--- a/docs/submissions/Phasmid_DEFCON_DemoLabs.pptx
+++ b/docs/submissions/Phasmid_DEFCON_DemoLabs.pptx
@@ -1968,8 +1968,8 @@
             <a:r>
               <a:rPr lang="en-US" dirty="0"/>
               <a:t>[19:20 / ~7:00] LIVE DEMO  ★中心
-EN (最小限・手を動かしながら): "This is the real TUI — Local Disclosure Control. I'll create a vessel, set the object cue under Faces, run the Guided flow, check dummy-profile plausibility in Audit, launch the local WebUI, then trigger Silent Standby and show the dummy disclosure. Watch the bottom bar."
-JA デモ詳細は別ランブック参照（Phasmid_Demo_Runbook）。要点: 話しすぎない/画面を指す/各ステップで一呼吸。失敗時は録画へ切替し設計点を口頭補強。約7分で切り上げ、Q&amp;Aに15分残す。</a:t>
+EN (最小限・手を動かしながら): "This is the real TUI — Local Disclosure Control. The home screen is deliberately small — four actions, nothing else. Under pressure you do not want a wall of options. I'll create protected storage, then open Expert controls with one key: set the object cue under Faces, run the Guided flow, check dummy-profile plausibility in Audit, launch the local WebUI, then trigger Silent Standby and show the dummy disclosure."
+JA デモ詳細は別ランブック参照（Phasmid_Demo_Runbook）。キー順（0.3.0 実機確認済）: n New → e Expert → f Faces → g Guided → a Audit → w WebUI → Ctrl+S Silent Standby（復帰 Ctrl+R / Esc）。Ctrl+S はフッタに出ないので指で覚える。要点: 話しすぎない/画面を指す/各ステップで一呼吸。失敗時は録画へ切替し設計点を口頭補強。約7分で切り上げ、Q&amp;Aに15分残す。</a:t>
             </a:r>
             <a:endParaRPr lang="en-US" dirty="0"/>
           </a:p>
@@ -19185,7 +19185,7 @@
                 <a:ea typeface="Courier New" pitchFamily="34" charset="-122"/>
                 <a:cs typeface="Courier New" pitchFamily="34" charset="-120"/>
               </a:rPr>
-              <a:t>bottom bar  </a:t>
+              <a:t>home bar  </a:t>
             </a:r>
             <a:pPr indent="0" marL="0">
               <a:buNone/>
@@ -19199,7 +19199,7 @@
                 <a:ea typeface="Courier New" pitchFamily="34" charset="-122"/>
                 <a:cs typeface="Courier New" pitchFamily="34" charset="-120"/>
               </a:rPr>
-              <a:t>Open · Create · Faces · Guided · Audit · Doctor · LUKS · WebUI</a:t>
+              <a:t>Open · New · Guided · Expert · WebUI  ·  e → Create · Faces · Audit</a:t>
             </a:r>
             <a:endParaRPr lang="en-US" sz="1250" dirty="0"/>
           </a:p>

--- a/docs/submissions/Phasmid_DEFCON_DemoLabs.pptx
+++ b/docs/submissions/Phasmid_DEFCON_DemoLabs.pptx
@@ -886,12 +886,18 @@
           <a:lstStyle/>
           <a:p>
             <a:r>
-              <a:rPr lang="en-US" dirty="0"/>
-              <a:t>[09:40 / 1:20] OBJECT-CUE  ★見せ場
-EN: "Here's the fun part. You show an everyday object to the camera to operate the access gate — nothing to type, nothing that looks like a secret. But this is the part people get wrong, so let me be clear: the object is a cue, not a key. It drives operation and policy checks. It is not the encryption key. A photo of the object unlocks nothing. The crypto stays with Argon2id and AES-GCM — the object just decides whether you get to act."
-JA: ゆっくり。最大の差別化点。cue≠key を二度言う。手元の物体を掲げると効果的。</a:t>
-            </a:r>
-            <a:endParaRPr lang="en-US" dirty="0"/>
+              <a:t>[09:40 / 1:20] OBJECT-CUE  ★見せ場</a:t>
+            </a:r>
+          </a:p>
+          <a:p>
+            <a:r>
+              <a:t>EN: "Here's the fun part. You show an everyday object to the camera to operate the access gate — nothing to type, nothing that looks like a secret. But this is the part people get wrong, so let me be clear: the object is a cue, not a key. It drives operation and policy checks. It is not the encryption key. A photo of the object unlocks nothing. The crypto stays with Argon2id and AES-GCM — the object just decides whether you get to act. You will see this fail live in a few minutes."</a:t>
+            </a:r>
+          </a:p>
+          <a:p>
+            <a:r>
+              <a:t>JA: ゆっくり。最大の差別化点。cue≠key を二度言う。手元の物体を掲げると効果的。**最後の一文で Step 3b（物体なしの失敗）を予告すること。**実証を約束しておくとデモの山が強くなる。</a:t>
+            </a:r>
           </a:p>
         </p:txBody>
       </p:sp>
@@ -976,12 +982,18 @@
           <a:lstStyle/>
           <a:p>
             <a:r>
-              <a:rPr lang="en-US" dirty="0"/>
-              <a:t>[11:00 / 1:20] COERCION-SAFE DELAYING
-EN: "This is what makes it coercion-safe. Silent Standby: a hotkey drops the sensitive UI into a harmless state — recovery needs re-auth. A plausible dummy dataset, prepared before any coercion and scored for plausibility. And context profiles — travel, field engineer, researcher — that shape what 'normal' looks like. In coercion-safe mode, a low-confidence match routes to the dummy path instead of failing loudly. The goal isn't magic invisibility — it's uncertainty and delay."
-JA: Silent Standby は後のデモで実演する、と予告。認識モードの帯を指す。</a:t>
-            </a:r>
-            <a:endParaRPr lang="en-US" dirty="0"/>
+              <a:t>[11:00 / 1:20] COERCION-SAFE DELAYING</a:t>
+            </a:r>
+          </a:p>
+          <a:p>
+            <a:r>
+              <a:t>EN: "This is what makes it coercion-safe. Silent Standby: a hotkey drops the sensitive UI into a harmless state — recovery needs re-auth. Then the material itself: the file you would hand over is one you wrote and stored yourself, before any coercion. Phasmid does not manufacture your cover story — a generated dataset would not survive five minutes of questioning. What it does offer is a filler that occupies free space, so an otherwise empty container does not read as empty. And context profiles — travel, field engineer, researcher — that tell you what 'normal' should look like, so you know what to prepare. In coercion-safe mode, a low-confidence match routes to the disclosure face instead of failing loudly. The goal isn't magic invisibility — it's uncertainty and delay."</a:t>
+            </a:r>
+          </a:p>
+          <a:p>
+            <a:r>
+              <a:t>JA: ここが製品モデルの核心。**囮ファイルは利用者が用意する**と言い切る。ツールが作った偽物に真実味はない。填充は空き領域対策に過ぎない。Silent Standby はデモで見せると予告。認識モードの帯を指す。</a:t>
+            </a:r>
           </a:p>
         </p:txBody>
       </p:sp>
@@ -1517,9 +1529,9 @@
           <a:p>
             <a:r>
               <a:rPr lang="en-US" dirty="0"/>
-              <a:t>[00:30 / 0:40] whoami
-EN: "Quick background: independent security researcher and open-source tool developer, penetration tester by trade, CISSP. I turn offensive experience into defensive tools — deception, delaying action, coercion-aware design. You may have seen my other work, the Azazel system and the PAKURI family, at Black Hat Arsenal, BSides, SecTor, CODE BLUE. Find me at 01rabbit on GitHub."
-JA: 経歴は流す。GitHubハンドルを指す。</a:t>
+              <a:t>[00:30 / 0:55] whoami
+EN: "A quick note on where I come from: like a lot of people in this room, I started in uniform — a former Japan Ground Self-Defense Force officer, a Second Lieutenant, in a cyber unit. My work since has mostly been offensive — and offensive work is really about the person, not just the algorithm; the weakest link is human. Phasmid points that lesson the other way: it doesn't protect the key, it protects the person holding it. Day-to-day I'm an independent researcher and open-source tool developer, pen tester, CISSP — you may have seen the Azazel system or the PAKURI family at Black Hat Arsenal, BSides, SecTor, CODE BLUE. Find me at 01rabbit on GitHub."
+JA: 冒頭は「経歴＝着想源」として淡々と。武勇伝化しない。person, not the algorithm と protects the person は必ず言い切る。GitHubハンドルを指す。</a:t>
             </a:r>
             <a:endParaRPr lang="en-US" dirty="0"/>
           </a:p>
@@ -1696,12 +1708,18 @@
           <a:lstStyle/>
           <a:p>
             <a:r>
-              <a:rPr lang="en-US" dirty="0"/>
-              <a:t>[17:05 / 1:10] DESIGN ETHICS  ★倫理
-EN: "Now the ethics — and this matters, especially in this room. Phasmid allows plausible controlled disclosure, standby, ambiguity-preserving workflows. It explicitly disallows rootkits, kernel-level hiding, anti-forensic destruction, forensic-tool bypass, and fabricating false events or timestamps. It increases uncertainty and delays confident conclusions — it does not claim forensic invisibility. This line is deliberate, and it's in the code."
-JA: フォレンジック/法執行の聴衆に誠実に。目を合わせて。ここで信頼を勝ち取る。</a:t>
-            </a:r>
-            <a:endParaRPr lang="en-US" dirty="0"/>
+              <a:t>[17:05 / 1:10] DESIGN ETHICS  ★倫理</a:t>
+            </a:r>
+          </a:p>
+          <a:p>
+            <a:r>
+              <a:t>EN: "Now the ethics — and this matters, especially in this room. The line I draw is simple: Phasmid destroys, but it never fabricates. It will not plant rootkits, hide processes, bypass forensic tools, forge timestamps, fake system events, or tamper with metadata to deceive an examiner — and it will not write your cover story for you either. What it does give the owner is a duress response — owner-triggered destruction: a silent brick overwrites the whole container with random data, and purge drops one face. Note what that means: under coercion the restricted credential destroys. It does not quietly disclose something false. There is no fake unlock that hands an examiner a forgery with my name on it. I'm telling you plainly that destruction exists, because the honest thing is to also say it's dangerous. Destroying data at the moment of seizure can itself be a crime — that's the border case on the problem slide, charged under a US destruction-of-evidence statute. Phasmid gives you the capability; it does not advise using it against lawful process, and legality is jurisdiction-dependent. The auto-fire path especially: understand your jurisdiction before you ever enable it. I won't comment on that active case or give legal advice."</a:t>
+            </a:r>
+          </a:p>
+          <a:p>
+            <a:r>
+              <a:t>JA: 破壊機能の存在を隠さず認める。核心は「destroyはする／fabricateはしない」。**強要下では開示しない — 制限パスフレーズは破壊資格であり取出資格ではない**。§2232（border case）を利用者リスクとして開示。自動発火経路は特に危険。推奨・法律助言はしない。</a:t>
+            </a:r>
           </a:p>
         </p:txBody>
       </p:sp>
@@ -1786,12 +1804,18 @@
           <a:lstStyle/>
           <a:p>
             <a:r>
-              <a:rPr lang="en-US" dirty="0"/>
-              <a:t>[18:15 / 0:50] SCOPE
-EN: "Scope, drawn honestly. Software-existence concealment: out. Data-existence deniability: partial. Controlled disclosure: in, and central. Coercion-aware fallback: in. And things it never claims — perfect deniability, forensic immunity, secure deletion on flash, protection from a compromised host. No snake oil. Okay — enough talk. Let me show you."
-JA: 誠実さの締め。最後の一文でデモへ橋渡し。</a:t>
-            </a:r>
-            <a:endParaRPr lang="en-US" dirty="0"/>
+              <a:t>[18:15 / 0:50] SCOPE</a:t>
+            </a:r>
+          </a:p>
+          <a:p>
+            <a:r>
+              <a:t>EN: "Scope, drawn honestly. Software-existence concealment: out. Data-existence deniability: partial. Controlled disclosure: in, and central. Coercion-aware fallback: in. And things it never claims — perfect deniability, forensic immunity, secure deletion on flash, protection from a compromised host. One more it never claims: that your cover story is convincing. It can tell you how much space is occupied. It cannot tell you whether anyone will believe you, and it does not pretend to. No snake oil. Okay — enough talk. Let me show you."</a:t>
+            </a:r>
+          </a:p>
+          <a:p>
+            <a:r>
+              <a:t>JA: 誠実さの締め。**「説得力を判定しない」を非主張リストの5つ目として口頭で追加する。**最後の一文でデモへ橋渡し。</a:t>
+            </a:r>
           </a:p>
         </p:txBody>
       </p:sp>
@@ -1966,12 +1990,18 @@
           <a:lstStyle/>
           <a:p>
             <a:r>
-              <a:rPr lang="en-US" dirty="0"/>
-              <a:t>[19:20 / ~7:00] LIVE DEMO  ★中心
-EN (最小限・手を動かしながら): "This is the real TUI — Local Disclosure Control. The home screen is deliberately small — four actions, nothing else. Under pressure you do not want a wall of options. I'll create protected storage, then open Expert controls with one key: set the object cue under Faces, run the Guided flow, check dummy-profile plausibility in Audit, launch the local WebUI, then trigger Silent Standby and show the dummy disclosure."
-JA デモ詳細は別ランブック参照（Phasmid_Demo_Runbook）。キー順（0.3.0 実機確認済）: n New → e Expert → f Faces → g Guided → a Audit → w WebUI → Ctrl+S Silent Standby（復帰 Ctrl+R / Esc）。Ctrl+S はフッタに出ないので指で覚える。要点: 話しすぎない/画面を指す/各ステップで一呼吸。失敗時は録画へ切替し設計点を口頭補強。約7分で切り上げ、Q&amp;Aに15分残す。</a:t>
-            </a:r>
-            <a:endParaRPr lang="en-US" dirty="0"/>
+              <a:t>[19:20 / ~7:00] LIVE DEMO  ★中心</a:t>
+            </a:r>
+          </a:p>
+          <a:p>
+            <a:r>
+              <a:t>EN (最小限・手を動かしながら): "This is the real TUI — Local Disclosure Control. I create a vessel. I store a file while holding the object in front of the camera. I recover it with the object — it comes back. Now watch: same file, same password, same everything, only the object is gone. Ten seconds, and it refuses. That is what 'the cue gates the operation' means. Then Audit — note what it does not claim. Then the local web interface, and Silent Standby."</a:t>
+            </a:r>
+          </a:p>
+          <a:p>
+            <a:r>
+              <a:t>JA: 詳細手順は別紙 **Phasmid_Demo_Runbook**（8ステップ）を参照。**Step 3b（物体なしで失敗）が本番の山。ここで必ず間を取る。**成功例だけでは cue≠key を何も証明していない。マウスは使わない（Tab/Enter）。端末幅123桁以上。Fill Free Space は実測4分なので壇上では実行しない。失敗時は録画へ切替。約7分で切り上げ、Q&amp;Aに15分残す。</a:t>
+            </a:r>
           </a:p>
         </p:txBody>
       </p:sp>
@@ -2056,12 +2086,18 @@
           <a:lstStyle/>
           <a:p>
             <a:r>
-              <a:rPr lang="en-US" dirty="0"/>
-              <a:t>[26:20 / 0:30] QUICK START
-EN: "Want to try it? Clone the repo, cd in, run ./phasmid — first run sets up a venv and opens the console. Research software, Apache-2.0. Evaluate it locally, in field-test conditions — not as production protection."
-JA: リポジトリURLを指す。ステッカーへ繋ぐ。</a:t>
-            </a:r>
-            <a:endParaRPr lang="en-US" dirty="0"/>
+              <a:t>[26:20 / 0:30] QUICK START</a:t>
+            </a:r>
+          </a:p>
+          <a:p>
+            <a:r>
+              <a:t>EN: "Want to try it? Clone the repo, cd in, run ./phasmid — first run sets up a venv and opens the console. Research software, Apache-2.0. Evaluate it locally, in field-test conditions — not as production protection."</a:t>
+            </a:r>
+          </a:p>
+          <a:p>
+            <a:r>
+              <a:t>JA: リポジトリURLを指す。**ステッカーは作成していないので言及しない。**卓上デモ（実機を触ってもらう）へ繋ぐ。</a:t>
+            </a:r>
           </a:p>
         </p:txBody>
       </p:sp>
@@ -2146,12 +2182,18 @@
           <a:lstStyle/>
           <a:p>
             <a:r>
-              <a:rPr lang="en-US" dirty="0"/>
-              <a:t>[26:50 / 0:40] CLOSING → Q&amp;A
-EN: "That's Phasmid — local-only, coercion-aware storage, honest limits included. Code, threat model, and architecture are all on GitHub at 01rabbit. Grab a sticker — and please, come break it. I've got time for questions."
-JA: 約27分で着地。残り約18分をQ&amp;A・卓上デモ・交流に。45分ハード停止厳守。ステッカー案内→Q&amp;Aへ。</a:t>
-            </a:r>
-            <a:endParaRPr lang="en-US" dirty="0"/>
+              <a:t>[26:50 / 0:40] CLOSING → Q&amp;A</a:t>
+            </a:r>
+          </a:p>
+          <a:p>
+            <a:r>
+              <a:t>EN: "That's Phasmid — local-only, coercion-aware storage, honest limits included. Code, threat model, and architecture are all on GitHub at 01rabbit. The device is on the table — come try it, and please, come break it. I've got time for questions."</a:t>
+            </a:r>
+          </a:p>
+          <a:p>
+            <a:r>
+              <a:t>JA: 約27分で着地。残り約18分をQ&amp;A・卓上デモ・交流に。**ステッカーは未作成 — 実機体験への導線に差し替え済み。**45分で必ず終了。</a:t>
+            </a:r>
           </a:p>
         </p:txBody>
       </p:sp>
@@ -2328,8 +2370,8 @@
             <a:r>
               <a:rPr lang="en-US" dirty="0"/>
               <a:t>[01:40 / 1:00] THE PROBLEM
-EN: "Here's what Phasmid is built for. Attackers today don't need to break your crypto. They take the device — at a border, a checkpoint, an arrest — and they ask you to unlock it. And full-disk encryption is all-or-nothing: the moment you open it under pressure, everything is exposed. That's over-disclosure — one demand, total exposure."
-JA: 3枚を左→右で指す。淡々と、しかし重さを持って。ここで問題意識を共有。</a:t>
+EN: "Here's what Phasmid is built for. Attackers today don't need to break your crypto. They take the device — at a border, a checkpoint, an arrest — and they ask you to unlock it. And full-disk encryption is all-or-nothing: the moment you open it under pressure, everything is exposed. That's over-disclosure — one demand, total exposure. And this isn't theoretical anymore: this year a U.S. citizen was federally charged after a duress feature wiped his phone at a border search — the first known case of its kind. The scenario on this slide now has a court date."
+JA: 3枚を左→右で指す。淡々と、しかし重さを持って。ここで問題意識を共有。下段の REAL CASE を一度指す。係争中の個別事案には踏み込まない。</a:t>
             </a:r>
             <a:endParaRPr lang="en-US" dirty="0"/>
           </a:p>
@@ -6117,7 +6159,7 @@
                 <a:ea typeface="Calibri" pitchFamily="34" charset="-122"/>
                 <a:cs typeface="Calibri" pitchFamily="34" charset="-120"/>
               </a:rPr>
-              <a:t>Workflows that separate what is shown from what stays protected, under documented assumptions.</a:t>
+              <a:t>Separates what is shown from what stays protected. Three credentials: open the real file, open the decoy, destroy the real.</a:t>
             </a:r>
             <a:endParaRPr lang="en-US" sz="1800" dirty="0"/>
           </a:p>
@@ -7572,7 +7614,7 @@
                 <a:ea typeface="Courier New" pitchFamily="34" charset="-122"/>
                 <a:cs typeface="Courier New" pitchFamily="34" charset="-120"/>
               </a:rPr>
-              <a:t>Plausible Dummy Dataset</a:t>
+              <a:t>Operator-supplied disclosure material</a:t>
             </a:r>
             <a:endParaRPr lang="en-US" sz="1800" dirty="0"/>
           </a:p>
@@ -7614,7 +7656,7 @@
                 <a:ea typeface="Calibri" pitchFamily="34" charset="-122"/>
                 <a:cs typeface="Calibri" pitchFamily="34" charset="-120"/>
               </a:rPr>
-              <a:t>Context-consistent content, prepared before any coercive event; scored by a plausibility report.</a:t>
+              <a:t>You prepare the file you would hand over, before any coercion. Phasmid never fabricates it.</a:t>
             </a:r>
             <a:endParaRPr lang="en-US" sz="1600" dirty="0"/>
           </a:p>
@@ -7780,7 +7822,7 @@
                 <a:ea typeface="Calibri" pitchFamily="34" charset="-122"/>
                 <a:cs typeface="Calibri" pitchFamily="34" charset="-120"/>
               </a:rPr>
-              <a:t>Schemas defining expected content and guiding dummy generation.</a:t>
+              <a:t>Schemas describing what 'normal' looks like for a role — so you know what to prepare.</a:t>
             </a:r>
             <a:endParaRPr lang="en-US" sz="1600" dirty="0"/>
           </a:p>
@@ -14281,7 +14323,7 @@
           <a:p>
             <a:pPr marL="342900" indent="-342900">
               <a:spcAft>
-                <a:spcPts val="800"/>
+                <a:spcPts val="600"/>
               </a:spcAft>
               <a:buSzPct val="100000"/>
               <a:buChar char="•"/>
@@ -14295,14 +14337,14 @@
                 <a:ea typeface="Calibri" pitchFamily="34" charset="-122"/>
                 <a:cs typeface="Calibri" pitchFamily="34" charset="-120"/>
               </a:rPr>
-              <a:t>Turn offensive experience into defensive tools</a:t>
+              <a:t>Ex-military — former JGSDF officer (2nd Lt.), cyber unit</a:t>
             </a:r>
             <a:endParaRPr lang="en-US" sz="1800" dirty="0"/>
           </a:p>
           <a:p>
             <a:pPr marL="342900" indent="-342900">
               <a:spcAft>
-                <a:spcPts val="800"/>
+                <a:spcPts val="600"/>
               </a:spcAft>
               <a:buSzPct val="100000"/>
               <a:buChar char="•"/>
@@ -14316,14 +14358,14 @@
                 <a:ea typeface="Calibri" pitchFamily="34" charset="-122"/>
                 <a:cs typeface="Calibri" pitchFamily="34" charset="-120"/>
               </a:rPr>
-              <a:t>Focus: deception, delaying action, constrained SOC/NOC, coercion-aware design</a:t>
+              <a:t>Turn offensive experience into defensive tools</a:t>
             </a:r>
             <a:endParaRPr lang="en-US" sz="1800" dirty="0"/>
           </a:p>
           <a:p>
             <a:pPr marL="342900" indent="-342900">
               <a:spcAft>
-                <a:spcPts val="800"/>
+                <a:spcPts val="600"/>
               </a:spcAft>
               <a:buSzPct val="100000"/>
               <a:buChar char="•"/>
@@ -14337,14 +14379,35 @@
                 <a:ea typeface="Calibri" pitchFamily="34" charset="-122"/>
                 <a:cs typeface="Calibri" pitchFamily="34" charset="-120"/>
               </a:rPr>
-              <a:t>Penetration tester background · CISSP</a:t>
+              <a:t>Focus: deception, delaying action, constrained SOC/NOC, coercion-aware design</a:t>
             </a:r>
             <a:endParaRPr lang="en-US" sz="1800" dirty="0"/>
           </a:p>
           <a:p>
             <a:pPr marL="342900" indent="-342900">
               <a:spcAft>
-                <a:spcPts val="800"/>
+                <a:spcPts val="600"/>
+              </a:spcAft>
+              <a:buSzPct val="100000"/>
+              <a:buChar char="•"/>
+            </a:pPr>
+            <a:r>
+              <a:rPr lang="en-US" sz="1800" dirty="0">
+                <a:solidFill>
+                  <a:srgbClr val="E8EFEA"/>
+                </a:solidFill>
+                <a:latin typeface="Calibri" pitchFamily="34" charset="0"/>
+                <a:ea typeface="Calibri" pitchFamily="34" charset="-122"/>
+                <a:cs typeface="Calibri" pitchFamily="34" charset="-120"/>
+              </a:rPr>
+              <a:t>Penetration tester background · CISSP</a:t>
+            </a:r>
+            <a:endParaRPr lang="en-US" sz="1800" dirty="0"/>
+          </a:p>
+          <a:p>
+            <a:pPr marL="342900" indent="-342900">
+              <a:spcAft>
+                <a:spcPts val="600"/>
               </a:spcAft>
               <a:buSzPct val="100000"/>
               <a:buChar char="•"/>
@@ -16764,109 +16827,64 @@
             <a:endParaRPr lang="en-US" sz="1700" dirty="0"/>
           </a:p>
           <a:p>
-            <a:pPr marL="342900" indent="-342900">
-              <a:spcAft>
-                <a:spcPts val="800"/>
-              </a:spcAft>
-              <a:buSzPct val="100000"/>
-              <a:buChar char="•"/>
-            </a:pPr>
-            <a:r>
-              <a:rPr lang="en-US" sz="1700" dirty="0">
+            <a:pPr/>
+            <a:r>
+              <a:rPr sz="1700">
                 <a:solidFill>
                   <a:srgbClr val="E8EFEA"/>
                 </a:solidFill>
-                <a:latin typeface="Calibri" pitchFamily="34" charset="0"/>
-                <a:ea typeface="Calibri" pitchFamily="34" charset="-122"/>
-                <a:cs typeface="Calibri" pitchFamily="34" charset="-120"/>
+                <a:latin typeface="Calibri"/>
               </a:rPr>
               <a:t>Privacy-preserving standby transitions</a:t>
             </a:r>
-            <a:endParaRPr lang="en-US" sz="1700" dirty="0"/>
-          </a:p>
-          <a:p>
-            <a:pPr marL="342900" indent="-342900">
-              <a:spcAft>
-                <a:spcPts val="800"/>
-              </a:spcAft>
-              <a:buSzPct val="100000"/>
-              <a:buChar char="•"/>
-            </a:pPr>
-            <a:r>
-              <a:rPr lang="en-US" sz="1700" dirty="0">
+          </a:p>
+          <a:p>
+            <a:pPr/>
+            <a:r>
+              <a:rPr sz="1700">
                 <a:solidFill>
                   <a:srgbClr val="E8EFEA"/>
                 </a:solidFill>
-                <a:latin typeface="Calibri" pitchFamily="34" charset="0"/>
-                <a:ea typeface="Calibri" pitchFamily="34" charset="-122"/>
-                <a:cs typeface="Calibri" pitchFamily="34" charset="-120"/>
+                <a:latin typeface="Calibri"/>
               </a:rPr>
               <a:t>Ambiguity-preserving workflows</a:t>
             </a:r>
-            <a:endParaRPr lang="en-US" sz="1700" dirty="0"/>
-          </a:p>
-          <a:p>
-            <a:pPr marL="342900" indent="-342900">
-              <a:spcAft>
-                <a:spcPts val="800"/>
-              </a:spcAft>
-              <a:buSzPct val="100000"/>
-              <a:buChar char="•"/>
-            </a:pPr>
-            <a:r>
-              <a:rPr lang="en-US" sz="1700" dirty="0">
+          </a:p>
+          <a:p>
+            <a:pPr/>
+            <a:r>
+              <a:rPr sz="1700">
                 <a:solidFill>
                   <a:srgbClr val="E8EFEA"/>
                 </a:solidFill>
-                <a:latin typeface="Calibri" pitchFamily="34" charset="0"/>
-                <a:ea typeface="Calibri" pitchFamily="34" charset="-122"/>
-                <a:cs typeface="Calibri" pitchFamily="34" charset="-120"/>
+                <a:latin typeface="Calibri"/>
               </a:rPr>
               <a:t>Configurable hotkey-triggered standby</a:t>
             </a:r>
-            <a:endParaRPr lang="en-US" sz="1700" dirty="0"/>
-          </a:p>
-          <a:p>
-            <a:pPr marL="342900" indent="-342900">
-              <a:spcAft>
-                <a:spcPts val="800"/>
-              </a:spcAft>
-              <a:buSzPct val="100000"/>
-              <a:buChar char="•"/>
-            </a:pPr>
-            <a:r>
-              <a:rPr lang="en-US" sz="1700" dirty="0">
+          </a:p>
+          <a:p>
+            <a:pPr/>
+            <a:r>
+              <a:rPr sz="1700">
                 <a:solidFill>
                   <a:srgbClr val="E8EFEA"/>
                 </a:solidFill>
-                <a:latin typeface="Calibri" pitchFamily="34" charset="0"/>
-                <a:ea typeface="Calibri" pitchFamily="34" charset="-122"/>
-                <a:cs typeface="Calibri" pitchFamily="34" charset="-120"/>
-              </a:rPr>
-              <a:t>Context-template-guided content</a:t>
-            </a:r>
-            <a:endParaRPr lang="en-US" sz="1700" dirty="0"/>
-          </a:p>
-          <a:p>
-            <a:pPr marL="342900" indent="-342900">
-              <a:spcAft>
-                <a:spcPts val="800"/>
-              </a:spcAft>
-              <a:buSzPct val="100000"/>
-              <a:buChar char="•"/>
-            </a:pPr>
-            <a:r>
-              <a:rPr lang="en-US" sz="1700" dirty="0">
+                <a:latin typeface="Calibri"/>
+              </a:rPr>
+              <a:t>Operator-supplied disclosure material</a:t>
+            </a:r>
+          </a:p>
+          <a:p>
+            <a:pPr/>
+            <a:r>
+              <a:rPr sz="1700">
                 <a:solidFill>
                   <a:srgbClr val="E8EFEA"/>
                 </a:solidFill>
-                <a:latin typeface="Calibri" pitchFamily="34" charset="0"/>
-                <a:ea typeface="Calibri" pitchFamily="34" charset="-122"/>
-                <a:cs typeface="Calibri" pitchFamily="34" charset="-120"/>
-              </a:rPr>
-              <a:t>Local plausibility reports</a:t>
-            </a:r>
-            <a:endParaRPr lang="en-US" sz="1700" dirty="0"/>
+                <a:latin typeface="Calibri"/>
+              </a:rPr>
+              <a:t>Local free-space reports</a:t>
+            </a:r>
           </a:p>
         </p:txBody>
       </p:sp>
@@ -17046,7 +17064,7 @@
                 <a:ea typeface="Calibri" pitchFamily="34" charset="-122"/>
                 <a:cs typeface="Calibri" pitchFamily="34" charset="-120"/>
               </a:rPr>
-              <a:t>Anti-forensic data destruction</a:t>
+              <a:t>Forensic-tool bypass or interference</a:t>
             </a:r>
             <a:endParaRPr lang="en-US" sz="1700" dirty="0"/>
           </a:p>
@@ -17067,7 +17085,7 @@
                 <a:ea typeface="Calibri" pitchFamily="34" charset="-122"/>
                 <a:cs typeface="Calibri" pitchFamily="34" charset="-120"/>
               </a:rPr>
-              <a:t>Forensic-tool bypass or interference</a:t>
+              <a:t>False system-event fabrication / timestamp forgery</a:t>
             </a:r>
             <a:endParaRPr lang="en-US" sz="1700" dirty="0"/>
           </a:p>
@@ -17088,69 +17106,48 @@
                 <a:ea typeface="Calibri" pitchFamily="34" charset="-122"/>
                 <a:cs typeface="Calibri" pitchFamily="34" charset="-120"/>
               </a:rPr>
-              <a:t>False system-event fabrication / timestamp forgery</a:t>
+              <a:t>Anti-forensic metadata tampering</a:t>
             </a:r>
             <a:endParaRPr lang="en-US" sz="1700" dirty="0"/>
           </a:p>
-          <a:p>
-            <a:pPr marL="342900" indent="-342900">
-              <a:spcAft>
-                <a:spcPts val="800"/>
-              </a:spcAft>
-              <a:buSzPct val="100000"/>
-              <a:buChar char="•"/>
-            </a:pPr>
-            <a:r>
-              <a:rPr lang="en-US" sz="1700" dirty="0">
-                <a:solidFill>
-                  <a:srgbClr val="E8EFEA"/>
+        </p:txBody>
+      </p:sp>
+      <p:sp>
+        <p:nvSpPr>
+          <p:cNvPr id="12" name="Text 8"/>
+          <p:cNvSpPr/>
+          <p:nvPr/>
+        </p:nvSpPr>
+        <p:spPr>
+          <a:xfrm>
+            <a:off x="566928" y="5742432"/>
+            <a:ext cx="11018520" cy="457200"/>
+          </a:xfrm>
+          <a:prstGeom prst="rect">
+            <a:avLst/>
+          </a:prstGeom>
+          <a:noFill/>
+          <a:ln/>
+        </p:spPr>
+        <p:txBody>
+          <a:bodyPr wrap="square" lIns="0" tIns="0" rIns="0" bIns="0" rtlCol="0" anchor="ctr"/>
+          <a:lstStyle/>
+          <a:p>
+            <a:pPr algn="ctr" indent="0" marL="0">
+              <a:buNone/>
+            </a:pPr>
+            <a:r>
+              <a:rPr lang="en-US" sz="1400" i="1" dirty="0">
+                <a:solidFill>
+                  <a:srgbClr val="9DB0A4"/>
                 </a:solidFill>
                 <a:latin typeface="Calibri" pitchFamily="34" charset="0"/>
                 <a:ea typeface="Calibri" pitchFamily="34" charset="-122"/>
                 <a:cs typeface="Calibri" pitchFamily="34" charset="-120"/>
               </a:rPr>
-              <a:t>Anti-forensic metadata tampering</a:t>
-            </a:r>
-            <a:endParaRPr lang="en-US" sz="1700" dirty="0"/>
-          </a:p>
-        </p:txBody>
-      </p:sp>
-      <p:sp>
-        <p:nvSpPr>
-          <p:cNvPr id="12" name="Text 8"/>
-          <p:cNvSpPr/>
-          <p:nvPr/>
-        </p:nvSpPr>
-        <p:spPr>
-          <a:xfrm>
-            <a:off x="566928" y="5742432"/>
-            <a:ext cx="11018520" cy="457200"/>
-          </a:xfrm>
-          <a:prstGeom prst="rect">
-            <a:avLst/>
-          </a:prstGeom>
-          <a:noFill/>
-          <a:ln/>
-        </p:spPr>
-        <p:txBody>
-          <a:bodyPr wrap="square" lIns="0" tIns="0" rIns="0" bIns="0" rtlCol="0" anchor="ctr"/>
-          <a:lstStyle/>
-          <a:p>
-            <a:pPr algn="ctr" indent="0" marL="0">
-              <a:buNone/>
-            </a:pPr>
-            <a:r>
-              <a:rPr lang="en-US" sz="1700" i="1" dirty="0">
-                <a:solidFill>
-                  <a:srgbClr val="9DB0A4"/>
-                </a:solidFill>
-                <a:latin typeface="Calibri" pitchFamily="34" charset="0"/>
-                <a:ea typeface="Calibri" pitchFamily="34" charset="-122"/>
-                <a:cs typeface="Calibri" pitchFamily="34" charset="-120"/>
-              </a:rPr>
-              <a:t>It increases uncertainty and delays confident conclusions — it does not claim forensic invisibility.</a:t>
-            </a:r>
-            <a:endParaRPr lang="en-US" sz="1700" dirty="0"/>
+              <a:t>Phasmid destroys but never fabricates — and under coercion the restricted credential destroys rather than discloses. Owner-triggered destruction is real and legally hazardous; the operator decides and bears the risk.</a:t>
+            </a:r>
+            <a:endParaRPr lang="en-US" sz="1400" dirty="0"/>
           </a:p>
         </p:txBody>
       </p:sp>
@@ -18245,7 +18242,7 @@
                 <a:ea typeface="Calibri" pitchFamily="34" charset="-122"/>
                 <a:cs typeface="Calibri" pitchFamily="34" charset="-120"/>
               </a:rPr>
-              <a:t>Research prototype with a documented security boundary — no snake oil.</a:t>
+              <a:t>Research prototype, documented boundary — no snake oil. Judging your cover story stays your job.</a:t>
             </a:r>
             <a:endParaRPr lang="en-US" sz="1600" dirty="0"/>
           </a:p>
@@ -19041,114 +19038,69 @@
                 <a:ea typeface="Calibri" pitchFamily="34" charset="-122"/>
                 <a:cs typeface="Calibri" pitchFamily="34" charset="-120"/>
               </a:rPr>
-              <a:t>Create a Vessel — deniable container file</a:t>
+              <a:t>Create a Vessel — deniable container</a:t>
             </a:r>
             <a:endParaRPr lang="en-US" sz="1700" dirty="0"/>
           </a:p>
           <a:p>
-            <a:pPr marL="342900" indent="-342900">
-              <a:spcAft>
-                <a:spcPts val="900"/>
-              </a:spcAft>
-              <a:buSzPct val="100000"/>
-              <a:buChar char="•"/>
-            </a:pPr>
-            <a:r>
-              <a:rPr lang="en-US" sz="1700" dirty="0">
+            <a:pPr/>
+            <a:r>
+              <a:rPr sz="1700">
                 <a:solidFill>
                   <a:srgbClr val="E8EFEA"/>
                 </a:solidFill>
-                <a:latin typeface="Calibri" pitchFamily="34" charset="0"/>
-                <a:ea typeface="Calibri" pitchFamily="34" charset="-122"/>
-                <a:cs typeface="Calibri" pitchFamily="34" charset="-120"/>
-              </a:rPr>
-              <a:t>Set posture &amp; Faces (object-cue / Janus)</a:t>
-            </a:r>
-            <a:endParaRPr lang="en-US" sz="1700" dirty="0"/>
-          </a:p>
-          <a:p>
-            <a:pPr marL="342900" indent="-342900">
-              <a:spcAft>
-                <a:spcPts val="900"/>
-              </a:spcAft>
-              <a:buSzPct val="100000"/>
-              <a:buChar char="•"/>
-            </a:pPr>
-            <a:r>
-              <a:rPr lang="en-US" sz="1700" dirty="0">
+                <a:latin typeface="Calibri"/>
+              </a:rPr>
+              <a:t>Store a file with the object cue</a:t>
+            </a:r>
+          </a:p>
+          <a:p>
+            <a:pPr/>
+            <a:r>
+              <a:rPr sz="1700">
                 <a:solidFill>
                   <a:srgbClr val="E8EFEA"/>
                 </a:solidFill>
-                <a:latin typeface="Calibri" pitchFamily="34" charset="0"/>
-                <a:ea typeface="Calibri" pitchFamily="34" charset="-122"/>
-                <a:cs typeface="Calibri" pitchFamily="34" charset="-120"/>
-              </a:rPr>
-              <a:t>Guided prepare → bind → operate</a:t>
-            </a:r>
-            <a:endParaRPr lang="en-US" sz="1700" dirty="0"/>
-          </a:p>
-          <a:p>
-            <a:pPr marL="342900" indent="-342900">
-              <a:spcAft>
-                <a:spcPts val="900"/>
-              </a:spcAft>
-              <a:buSzPct val="100000"/>
-              <a:buChar char="•"/>
-            </a:pPr>
-            <a:r>
-              <a:rPr lang="en-US" sz="1700" dirty="0">
+                <a:latin typeface="Calibri"/>
+              </a:rPr>
+              <a:t>Recover with the object — it comes back</a:t>
+            </a:r>
+          </a:p>
+          <a:p>
+            <a:pPr/>
+            <a:r>
+              <a:rPr sz="1700">
                 <a:solidFill>
                   <a:srgbClr val="E8EFEA"/>
                 </a:solidFill>
-                <a:latin typeface="Calibri" pitchFamily="34" charset="0"/>
-                <a:ea typeface="Calibri" pitchFamily="34" charset="-122"/>
-                <a:cs typeface="Calibri" pitchFamily="34" charset="-120"/>
-              </a:rPr>
-              <a:t>Audit: dummy-profile plausibility score</a:t>
-            </a:r>
-            <a:endParaRPr lang="en-US" sz="1700" dirty="0"/>
-          </a:p>
-          <a:p>
-            <a:pPr marL="342900" indent="-342900">
-              <a:spcAft>
-                <a:spcPts val="900"/>
-              </a:spcAft>
-              <a:buSzPct val="100000"/>
-              <a:buChar char="•"/>
-            </a:pPr>
-            <a:r>
-              <a:rPr lang="en-US" sz="1700" dirty="0">
+                <a:latin typeface="Calibri"/>
+              </a:rPr>
+              <a:t>Recover WITHOUT it — refused after 10 s</a:t>
+            </a:r>
+          </a:p>
+          <a:p>
+            <a:pPr/>
+            <a:r>
+              <a:rPr sz="1700">
                 <a:solidFill>
                   <a:srgbClr val="E8EFEA"/>
                 </a:solidFill>
-                <a:latin typeface="Calibri" pitchFamily="34" charset="0"/>
-                <a:ea typeface="Calibri" pitchFamily="34" charset="-122"/>
-                <a:cs typeface="Calibri" pitchFamily="34" charset="-120"/>
-              </a:rPr>
-              <a:t>Launch local WebUI (127.0.0.1)</a:t>
-            </a:r>
-            <a:endParaRPr lang="en-US" sz="1700" dirty="0"/>
-          </a:p>
-          <a:p>
-            <a:pPr marL="342900" indent="-342900">
-              <a:spcAft>
-                <a:spcPts val="900"/>
-              </a:spcAft>
-              <a:buSzPct val="100000"/>
-              <a:buChar char="•"/>
-            </a:pPr>
-            <a:r>
-              <a:rPr lang="en-US" sz="1700" dirty="0">
+                <a:latin typeface="Calibri"/>
+              </a:rPr>
+              <a:t>Audit — free space, and what it won't judge</a:t>
+            </a:r>
+          </a:p>
+          <a:p>
+            <a:pPr/>
+            <a:r>
+              <a:rPr sz="1700">
                 <a:solidFill>
                   <a:srgbClr val="E8EFEA"/>
                 </a:solidFill>
-                <a:latin typeface="Calibri" pitchFamily="34" charset="0"/>
-                <a:ea typeface="Calibri" pitchFamily="34" charset="-122"/>
-                <a:cs typeface="Calibri" pitchFamily="34" charset="-120"/>
-              </a:rPr>
-              <a:t>Silent Standby by hotkey → dummy_disclosure</a:t>
-            </a:r>
-            <a:endParaRPr lang="en-US" sz="1700" dirty="0"/>
+                <a:latin typeface="Calibri"/>
+              </a:rPr>
+              <a:t>Local WebUI over USB → Silent Standby</a:t>
+            </a:r>
           </a:p>
         </p:txBody>
       </p:sp>
@@ -19185,22 +19137,11 @@
                 <a:ea typeface="Courier New" pitchFamily="34" charset="-122"/>
                 <a:cs typeface="Courier New" pitchFamily="34" charset="-120"/>
               </a:rPr>
-              <a:t>home bar  </a:t>
-            </a:r>
-            <a:pPr indent="0" marL="0">
-              <a:buNone/>
-            </a:pPr>
-            <a:r>
-              <a:rPr lang="en-US" sz="1250" dirty="0">
-                <a:solidFill>
-                  <a:srgbClr val="9DB0A4"/>
-                </a:solidFill>
-                <a:latin typeface="Courier New" pitchFamily="34" charset="0"/>
-                <a:ea typeface="Courier New" pitchFamily="34" charset="-122"/>
-                <a:cs typeface="Courier New" pitchFamily="34" charset="-120"/>
-              </a:rPr>
-              <a:t>Open · New · Guided · Expert · WebUI  ·  e → Create · Faces · Audit</a:t>
-            </a:r>
+              <a:t>bottom bar  Open · New · Guided · Expert · Quit · WebUI   (Expert adds Audit · Doctor)</a:t>
+            </a:r>
+            <a:pPr indent="0" marL="0">
+              <a:buNone/>
+            </a:pPr>
             <a:endParaRPr lang="en-US" sz="1250" dirty="0"/>
           </a:p>
         </p:txBody>
@@ -20048,7 +19989,7 @@
                 <a:ea typeface="Courier New" pitchFamily="34" charset="-122"/>
                 <a:cs typeface="Courier New" pitchFamily="34" charset="-120"/>
               </a:rPr>
-              <a:t>grab a sticker →</a:t>
+              <a:t>try it at the table →</a:t>
             </a:r>
             <a:endParaRPr lang="en-US" sz="1400" dirty="0"/>
           </a:p>
@@ -22720,6 +22661,52 @@
           </a:p>
         </p:txBody>
       </p:sp>
+      <p:sp>
+        <p:nvSpPr>
+          <p:cNvPr id="90" name="RealCase"/>
+          <p:cNvSpPr/>
+          <p:nvPr/>
+        </p:nvSpPr>
+        <p:spPr>
+          <a:xfrm>
+            <a:off x="566928" y="5742432"/>
+            <a:ext cx="11064240" cy="502920"/>
+          </a:xfrm>
+          <a:prstGeom prst="rect">
+            <a:avLst/>
+          </a:prstGeom>
+          <a:noFill/>
+        </p:spPr>
+        <p:txBody>
+          <a:bodyPr wrap="square" lIns="0" tIns="0" rIns="0" bIns="0" rtlCol="0" anchor="ctr"/>
+          <a:lstStyle/>
+          <a:p>
+            <a:pPr algn="ctr">
+              <a:buNone/>
+            </a:pPr>
+            <a:r>
+              <a:rPr lang="en-US" sz="1500" b="1" dirty="0">
+                <a:solidFill>
+                  <a:srgbClr val="7EC46B"/>
+                </a:solidFill>
+                <a:latin typeface="Courier New" pitchFamily="34" charset="0"/>
+                <a:cs typeface="Courier New" pitchFamily="34" charset="0"/>
+              </a:rPr>
+              <a:t>REAL CASE (2026): </a:t>
+            </a:r>
+            <a:r>
+              <a:rPr lang="en-US" sz="1500" dirty="0">
+                <a:solidFill>
+                  <a:srgbClr val="E8EFEA"/>
+                </a:solidFill>
+                <a:latin typeface="Calibri" pitchFamily="34" charset="0"/>
+                <a:cs typeface="Calibri" pitchFamily="34" charset="0"/>
+              </a:rPr>
+              <a:t>a U.S. citizen was federally charged after a duress-wipe during a border search — the first known prosecution of its kind.</a:t>
+            </a:r>
+          </a:p>
+        </p:txBody>
+      </p:sp>
     </p:spTree>
   </p:cSld>
   <p:clrMapOvr>
@@ -24025,7 +24012,7 @@
                 <a:ea typeface="Calibri" pitchFamily="34" charset="-122"/>
                 <a:cs typeface="Calibri" pitchFamily="34" charset="-120"/>
               </a:rPr>
-              <a:t>Not a magic "delete everything" button</a:t>
+              <a:t>Not a risk-free delete — destruction is legally hazardous</a:t>
             </a:r>
             <a:endParaRPr lang="en-US" sz="1800" dirty="0"/>
           </a:p>

--- a/docs/submissions/Phasmid_DEFCON_DemoLabs.pptx
+++ b/docs/submissions/Phasmid_DEFCON_DemoLabs.pptx
@@ -1900,12 +1900,23 @@
           <a:lstStyle/>
           <a:p>
             <a:r>
-              <a:rPr lang="en-US" dirty="0"/>
-              <a:t>[19:05 / 0:15] LIVE DEMO (divider)
-EN: "Alright — live demo."
-JA: 章扉。ここで呼吸を整え、実機に向き直る。プロジェクタ入力をTUIへ切替。バックアップ録画の頭出しを確認。</a:t>
-            </a:r>
-            <a:endParaRPr lang="en-US" dirty="0"/>
+              <a:t>[19:05 / 0:15] LIVE DEMO (divider)</a:t>
+            </a:r>
+          </a:p>
+          <a:p>
+            <a:r>
+              <a:t>EN: "Alright — live demo."</a:t>
+            </a:r>
+          </a:p>
+          <a:p>
+            <a:r>
+              <a:t>JA: 章扉。呼吸を整え実機に向き直る。プロジェクタ入力をTUIへ切替。バックアップ録画の頭出しを確認。</a:t>
+            </a:r>
+          </a:p>
+          <a:p>
+            <a:r>
+              <a:t>この後の切替は Step 1→2（TUI→ブラウザ）と Step 4→5（ブラウザ→TUI）の1往復だけ。</a:t>
+            </a:r>
           </a:p>
         </p:txBody>
       </p:sp>
@@ -1990,17 +2001,54 @@
           <a:lstStyle/>
           <a:p>
             <a:r>
-              <a:t>[19:20 / ~7:00] LIVE DEMO  ★中心</a:t>
-            </a:r>
-          </a:p>
-          <a:p>
-            <a:r>
-              <a:t>EN (最小限・手を動かしながら): "This is the real TUI — Local Disclosure Control. I create a vessel. I store a file while holding the object in front of the camera. I recover it with the object — it comes back. Now watch: same file, same password, same everything, only the object is gone. Ten seconds, and it refuses. That is what 'the cue gates the operation' means. Then Audit — note what it does not claim. Then the local web interface, and Silent Standby."</a:t>
-            </a:r>
-          </a:p>
-          <a:p>
-            <a:r>
-              <a:t>JA: 詳細手順は別紙 **Phasmid_Demo_Runbook**（8ステップ）を参照。**Step 3b（物体なしで失敗）が本番の山。ここで必ず間を取る。**成功例だけでは cue≠key を何も証明していない。マウスは使わない（Tab/Enter）。端末幅123桁以上。Fill Free Space は実測4分なので壇上では実行しない。失敗時は録画へ切替。約7分で切り上げ、Q&amp;Aに15分残す。</a:t>
+              <a:t>[19:20 / ~7:20] LIVE DEMO  ★中心（9手・TUI+WebUI・切替1往復）</a:t>
+            </a:r>
+          </a:p>
+          <a:p>
+            <a:r>
+              <a:t>EN (最小限・手を動かしながら): "Here's what you're about to see. I'll create one container on the device. Then, in the local web interface, I'll put two different files into it — each behind its own password and its own everyday object. Then I open it twice. Same container, same screen. First password: this file. Second password: a completely different file. That is the two-face model, live. And then the part that matters most: I use the first password again, change nothing else, and simply take the object away. Watch it refuse. Then Audit, and Silent Standby."</a:t>
+            </a:r>
+          </a:p>
+          <a:p/>
+          <a:p>
+            <a:r>
+              <a:t>JA: 詳細は別紙 Phasmid_Demo_Runbook（9手・合計~7:20）。</a:t>
+            </a:r>
+          </a:p>
+          <a:p>
+            <a:r>
+              <a:t>証明は2つあり、順番に意味がある。対比①=Step 3→4（同じ容器・違うパスワード→違うファイル）が Janus の実証。対比②=Step 5（何も変えず物体だけ外す→拒否）が cue≠key の実証。どちらも省略できない — ①だけなら二重底のパスワード管理、②だけなら物体認証つき暗号化に見える。</a:t>
+            </a:r>
+          </a:p>
+          <a:p>
+            <a:r>
+              <a:t>Step 2〜4 は WebUI（store トークン）、Step 5 以降は TUI。切替は Step 1→2 と Step 4→5 の1往復のみ。</a:t>
+            </a:r>
+          </a:p>
+          <a:p>
+            <a:r>
+              <a:t>★Step 4 で必ず間を取る。可能なら2つのファイルを並べて見せる。</a:t>
+            </a:r>
+          </a:p>
+          <a:p/>
+          <a:p>
+            <a:r>
+              <a:t>注意: マウスは使わない（Tab/Enter）。端末幅124桁以上（#169 で Doctor・Inspect がフッタから消え 145→124 に低下）。TUI の Add File は #169 で非活性化 — 保存は WebUI のみ。Fill Free Space は実測4分なので壇上では実行しない。</a:t>
+            </a:r>
+          </a:p>
+          <a:p>
+            <a:r>
+              <a:t>落とし穴: 復元は2回とも retrieved_payload.bin で落ちるので、違いはファイル名ではなく中身を開いて見せる。事前にダウンロードフォルダを空にする（2つ目が (1) 付きになる）。</a:t>
+            </a:r>
+          </a:p>
+          <a:p>
+            <a:r>
+              <a:t>破壊は壇上で実演しない — Slide 21 で口頭、実演は卓上デモへ。</a:t>
+            </a:r>
+          </a:p>
+          <a:p>
+            <a:r>
+              <a:t>時間: 26:00 超で Step 3 の誤パスワード実演と Audit を削る。Step 4・Step 5・Silent Standby だけは何があっても実機で見せる。失敗時は録画へ切替。</a:t>
             </a:r>
           </a:p>
         </p:txBody>
@@ -18535,7 +18583,7 @@
                 <a:ea typeface="Courier New" pitchFamily="34" charset="-122"/>
                 <a:cs typeface="Courier New" pitchFamily="34" charset="-120"/>
               </a:rPr>
-              <a:t>Faces → </a:t>
+              <a:t>Bind → </a:t>
             </a:r>
             <a:pPr indent="0" marL="0">
               <a:buNone/>
@@ -18549,7 +18597,7 @@
                 <a:ea typeface="Courier New" pitchFamily="34" charset="-122"/>
                 <a:cs typeface="Courier New" pitchFamily="34" charset="-120"/>
               </a:rPr>
-              <a:t>Guided → </a:t>
+              <a:t>Two passwords → </a:t>
             </a:r>
             <a:pPr indent="0" marL="0">
               <a:buNone/>
@@ -18563,21 +18611,21 @@
                 <a:ea typeface="Courier New" pitchFamily="34" charset="-122"/>
                 <a:cs typeface="Courier New" pitchFamily="34" charset="-120"/>
               </a:rPr>
+              <a:t>Refused → </a:t>
+            </a:r>
+            <a:pPr indent="0" marL="0">
+              <a:buNone/>
+            </a:pPr>
+            <a:r>
+              <a:rPr lang="en-US" sz="1800" b="1" dirty="0">
+                <a:solidFill>
+                  <a:srgbClr val="7EC46B"/>
+                </a:solidFill>
+                <a:latin typeface="Courier New" pitchFamily="34" charset="0"/>
+                <a:ea typeface="Courier New" pitchFamily="34" charset="-122"/>
+                <a:cs typeface="Courier New" pitchFamily="34" charset="-120"/>
+              </a:rPr>
               <a:t>Audit → </a:t>
-            </a:r>
-            <a:pPr indent="0" marL="0">
-              <a:buNone/>
-            </a:pPr>
-            <a:r>
-              <a:rPr lang="en-US" sz="1800" b="1" dirty="0">
-                <a:solidFill>
-                  <a:srgbClr val="7EC46B"/>
-                </a:solidFill>
-                <a:latin typeface="Courier New" pitchFamily="34" charset="0"/>
-                <a:ea typeface="Courier New" pitchFamily="34" charset="-122"/>
-                <a:cs typeface="Courier New" pitchFamily="34" charset="-120"/>
-              </a:rPr>
-              <a:t>WebUI → </a:t>
             </a:r>
             <a:pPr indent="0" marL="0">
               <a:buNone/>
@@ -18869,7 +18917,7 @@
                 <a:ea typeface="Courier New" pitchFamily="34" charset="-122"/>
                 <a:cs typeface="Courier New" pitchFamily="34" charset="-120"/>
               </a:rPr>
-              <a:t>What you'll see at the table</a:t>
+              <a:t>One container, two passwords, two files</a:t>
             </a:r>
             <a:endParaRPr lang="en-US" sz="3400" dirty="0"/>
           </a:p>
@@ -18956,7 +19004,7 @@
                 <a:ea typeface="Courier New" pitchFamily="34" charset="-122"/>
                 <a:cs typeface="Courier New" pitchFamily="34" charset="-120"/>
               </a:rPr>
-              <a:t>Real TUI — Local Disclosure Control</a:t>
+              <a:t>Real TUI + local WebUI — Local Disclosure Control</a:t>
             </a:r>
             <a:endParaRPr lang="en-US" sz="1200" dirty="0"/>
           </a:p>
@@ -19038,7 +19086,7 @@
                 <a:ea typeface="Calibri" pitchFamily="34" charset="-122"/>
                 <a:cs typeface="Calibri" pitchFamily="34" charset="-120"/>
               </a:rPr>
-              <a:t>Create a Vessel — deniable container</a:t>
+              <a:t>Create a container — no header, no magic</a:t>
             </a:r>
             <a:endParaRPr lang="en-US" sz="1700" dirty="0"/>
           </a:p>
@@ -19051,7 +19099,7 @@
                 </a:solidFill>
                 <a:latin typeface="Calibri"/>
               </a:rPr>
-              <a:t>Store a file with the object cue</a:t>
+              <a:t>Store two files, two passwords, two objects</a:t>
             </a:r>
           </a:p>
           <a:p>
@@ -19063,7 +19111,7 @@
                 </a:solidFill>
                 <a:latin typeface="Calibri"/>
               </a:rPr>
-              <a:t>Recover with the object — it comes back</a:t>
+              <a:t>First password → the first file</a:t>
             </a:r>
           </a:p>
           <a:p>
@@ -19075,7 +19123,7 @@
                 </a:solidFill>
                 <a:latin typeface="Calibri"/>
               </a:rPr>
-              <a:t>Recover WITHOUT it — refused after 10 s</a:t>
+              <a:t>Second password → a different file</a:t>
             </a:r>
           </a:p>
           <a:p>
@@ -19087,7 +19135,7 @@
                 </a:solidFill>
                 <a:latin typeface="Calibri"/>
               </a:rPr>
-              <a:t>Audit — free space, and what it won't judge</a:t>
+              <a:t>Object taken away → refused after 10 s</a:t>
             </a:r>
           </a:p>
           <a:p>
@@ -19099,7 +19147,7 @@
                 </a:solidFill>
                 <a:latin typeface="Calibri"/>
               </a:rPr>
-              <a:t>Local WebUI over USB → Silent Standby</a:t>
+              <a:t>Audit, then Silent Standby</a:t>
             </a:r>
           </a:p>
         </p:txBody>
@@ -19137,7 +19185,7 @@
                 <a:ea typeface="Courier New" pitchFamily="34" charset="-122"/>
                 <a:cs typeface="Courier New" pitchFamily="34" charset="-120"/>
               </a:rPr>
-              <a:t>bottom bar  Open · New · Guided · Expert · Quit · WebUI   (Expert adds Audit · Doctor)</a:t>
+              <a:t>bottom bar  Open · New · Guided · Expert · Quit · WebUI   (Expert adds Audit)</a:t>
             </a:r>
             <a:pPr indent="0" marL="0">
               <a:buNone/>

--- a/docs/submissions/Phasmid_DEFCON_DemoLabs.pptx
+++ b/docs/submissions/Phasmid_DEFCON_DemoLabs.pptx
@@ -526,12 +526,254 @@
           <a:lstStyle/>
           <a:p>
             <a:r>
-              <a:rPr lang="en-US" dirty="0"/>
-              <a:t>[00:00 / 目安 0:30] TITLE
-EN: "Hey, thanks for coming. This is Phasmid — the reference build of what I call the Janus Eidolon System. Local-only, coercion-aware storage, built for the moment someone has both your device and you. I'm Makoto Sugita — Mr. Rabbit."
-JA: 開始00分。掴みは短く。バナーを一度指してすぐ本題へ。45分ハード停止・目標コンテンツ約28分。</a:t>
+              <a:rPr b="0"/>
+              <a:t>[00:00 / 0:30] TITLE — 発話 0:20</a:t>
             </a:r>
             <a:endParaRPr lang="en-US" dirty="0"/>
+          </a:p>
+          <a:p>
+            <a:r>
+              <a:rPr b="0"/>
+              <a:t/>
+            </a:r>
+          </a:p>
+          <a:p>
+            <a:r>
+              <a:rPr b="0"/>
+              <a:t>【読み方】</a:t>
+            </a:r>
+          </a:p>
+          <a:p>
+            <a:r>
+              <a:rPr b="0"/>
+              <a:t>・英文1行＝1息。行末で必ず一度切る。</a:t>
+            </a:r>
+          </a:p>
+          <a:p>
+            <a:r>
+              <a:rPr b="0"/>
+              <a:t>・カタカナの太字＝その文で一番強く言う語。そこだけ高く長く言えば通じる。英語は一音ずつの正確さではなく強弱で伝わるので、この1語だけ意識すればよい。</a:t>
+            </a:r>
+          </a:p>
+          <a:p>
+            <a:r>
+              <a:rPr b="0"/>
+              <a:t>・カタカナは普段のカタカナ語のまま。無理に英語風に崩していない。</a:t>
+            </a:r>
+          </a:p>
+          <a:p>
+            <a:r>
+              <a:rPr b="0"/>
+              <a:t>・ゥ付き（ゥロング／ゥライト／コゥレクト）は3語だけ。そのまま読むと long／light／collect に聞こえるため。</a:t>
+            </a:r>
+          </a:p>
+          <a:p>
+            <a:r>
+              <a:rPr b="0"/>
+              <a:t>・ヴ＝V（ヴォルト=vault。ボルト=bolt と区別）。 ス・ズ＝th。</a:t>
+            </a:r>
+          </a:p>
+          <a:p>
+            <a:r>
+              <a:rPr b="0"/>
+              <a:t/>
+            </a:r>
+          </a:p>
+          <a:p>
+            <a:r>
+              <a:rPr b="0"/>
+              <a:t>“Hi. Thank you for coming.</a:t>
+            </a:r>
+          </a:p>
+          <a:p>
+            <a:r>
+              <a:rPr b="0"/>
+              <a:t>  </a:t>
+            </a:r>
+            <a:r>
+              <a:rPr b="1"/>
+              <a:t>ハイ</a:t>
+            </a:r>
+            <a:r>
+              <a:rPr b="0"/>
+              <a:t>。 サンキュー フォー </a:t>
+            </a:r>
+            <a:r>
+              <a:rPr b="1"/>
+              <a:t>カミング</a:t>
+            </a:r>
+            <a:r>
+              <a:rPr b="0"/>
+              <a:t>。</a:t>
+            </a:r>
+          </a:p>
+          <a:p>
+            <a:r>
+              <a:rPr b="0"/>
+              <a:t>This is Phasmid.</a:t>
+            </a:r>
+          </a:p>
+          <a:p>
+            <a:r>
+              <a:rPr b="0"/>
+              <a:t>  ディス イズ </a:t>
+            </a:r>
+            <a:r>
+              <a:rPr b="1"/>
+              <a:t>ファズミッド</a:t>
+            </a:r>
+            <a:r>
+              <a:rPr b="0"/>
+              <a:t>。</a:t>
+            </a:r>
+          </a:p>
+          <a:p>
+            <a:r>
+              <a:rPr b="0"/>
+              <a:t>It’s the reference build of the Janus Eidolon System.</a:t>
+            </a:r>
+          </a:p>
+          <a:p>
+            <a:r>
+              <a:rPr b="0"/>
+              <a:t>  イッツ ザ レファレンス ビルド オヴ ザ </a:t>
+            </a:r>
+            <a:r>
+              <a:rPr b="1"/>
+              <a:t>ジェイナス アイドウロン システム</a:t>
+            </a:r>
+            <a:r>
+              <a:rPr b="0"/>
+              <a:t>。</a:t>
+            </a:r>
+          </a:p>
+          <a:p>
+            <a:r>
+              <a:rPr b="0"/>
+              <a:t>Storage that stays local — and expects coercion.</a:t>
+            </a:r>
+          </a:p>
+          <a:p>
+            <a:r>
+              <a:rPr b="0"/>
+              <a:t>  ストレージ ザット ステイズ </a:t>
+            </a:r>
+            <a:r>
+              <a:rPr b="1"/>
+              <a:t>ローカル</a:t>
+            </a:r>
+            <a:r>
+              <a:rPr b="0"/>
+              <a:t> — アンド イクスペクツ コアージョン。</a:t>
+            </a:r>
+          </a:p>
+          <a:p>
+            <a:r>
+              <a:rPr b="0"/>
+              <a:t>It’s built for one moment.</a:t>
+            </a:r>
+          </a:p>
+          <a:p>
+            <a:r>
+              <a:rPr b="0"/>
+              <a:t>  イッツ ビルト フォー </a:t>
+            </a:r>
+            <a:r>
+              <a:rPr b="1"/>
+              <a:t>ワン モウメント</a:t>
+            </a:r>
+            <a:r>
+              <a:rPr b="0"/>
+              <a:t>。</a:t>
+            </a:r>
+          </a:p>
+          <a:p>
+            <a:r>
+              <a:rPr b="0"/>
+              <a:t>Someone has your device… and they have you.</a:t>
+            </a:r>
+          </a:p>
+          <a:p>
+            <a:r>
+              <a:rPr b="0"/>
+              <a:t>  サムワン ハズ ユア </a:t>
+            </a:r>
+            <a:r>
+              <a:rPr b="1"/>
+              <a:t>デバイス</a:t>
+            </a:r>
+            <a:r>
+              <a:rPr b="0"/>
+              <a:t>… アンド ゼイ ハヴ </a:t>
+            </a:r>
+            <a:r>
+              <a:rPr b="1"/>
+              <a:t>ユー</a:t>
+            </a:r>
+            <a:r>
+              <a:rPr b="0"/>
+              <a:t>。</a:t>
+            </a:r>
+          </a:p>
+          <a:p>
+            <a:r>
+              <a:rPr b="0"/>
+              <a:t>I’m Makoto Sugita, from GMO Cybersecurity by Ierae, in Tokyo.</a:t>
+            </a:r>
+          </a:p>
+          <a:p>
+            <a:r>
+              <a:rPr b="0"/>
+              <a:t>  アイム </a:t>
+            </a:r>
+            <a:r>
+              <a:rPr b="1"/>
+              <a:t>マコト スギタ</a:t>
+            </a:r>
+            <a:r>
+              <a:rPr b="0"/>
+              <a:t>、 フロム ジーエムオー サイバーセキュリティ バイ </a:t>
+            </a:r>
+            <a:r>
+              <a:rPr b="1"/>
+              <a:t>イエラエ</a:t>
+            </a:r>
+            <a:r>
+              <a:rPr b="0"/>
+              <a:t>、 イン トウキョウ。</a:t>
+            </a:r>
+          </a:p>
+          <a:p>
+            <a:r>
+              <a:rPr b="0"/>
+              <a:t>Online — Mr. Rabbit.”</a:t>
+            </a:r>
+          </a:p>
+          <a:p>
+            <a:r>
+              <a:rPr b="0"/>
+              <a:t>  オンライン — </a:t>
+            </a:r>
+            <a:r>
+              <a:rPr b="1"/>
+              <a:t>ミスター ラビット</a:t>
+            </a:r>
+            <a:r>
+              <a:rPr b="0"/>
+              <a:t>。</a:t>
+            </a:r>
+          </a:p>
+          <a:p>
+            <a:r>
+              <a:rPr b="0"/>
+              <a:t/>
+            </a:r>
+          </a:p>
+          <a:p>
+            <a:r>
+              <a:rPr b="0"/>
+              <a:t>JA: 掴みは短く。バナーを一度指す。時計スタート</a:t>
+            </a:r>
           </a:p>
         </p:txBody>
       </p:sp>
@@ -616,12 +858,180 @@
           <a:lstStyle/>
           <a:p>
             <a:r>
-              <a:rPr lang="en-US" dirty="0"/>
-              <a:t>[07:10 / 1:00] ARCHITECTURE BOUNDARY
-EN: "Architecturally, four things stay explicit. Two-slot storage. Local access-key mixing — so keys come from local state, not a passphrase alone. A restricted-action policy that gates anything sensitive or recovery-related. And capture-visible discipline: normal flows never expose the structure, the recovery path, or the order you'd try things in."
-JA: 4点を順に指す。専門聴衆はここで頷く。</a:t>
+              <a:rPr b="0"/>
+              <a:t>[07:10 / 1:00] ARCHITECTURE BOUNDARY — 発話 0:25</a:t>
             </a:r>
             <a:endParaRPr lang="en-US" dirty="0"/>
+          </a:p>
+          <a:p>
+            <a:r>
+              <a:rPr b="0"/>
+              <a:t/>
+            </a:r>
+          </a:p>
+          <a:p>
+            <a:r>
+              <a:rPr b="0"/>
+              <a:t>“Architecturally, four things stay explicit.</a:t>
+            </a:r>
+          </a:p>
+          <a:p>
+            <a:r>
+              <a:rPr b="0"/>
+              <a:t>  アーキテクチャリー、 フォー シングズ ステイ </a:t>
+            </a:r>
+            <a:r>
+              <a:rPr b="1"/>
+              <a:t>エクスプリシット</a:t>
+            </a:r>
+            <a:r>
+              <a:rPr b="0"/>
+              <a:t>。</a:t>
+            </a:r>
+          </a:p>
+          <a:p>
+            <a:r>
+              <a:rPr b="0"/>
+              <a:t>One. Two-slot storage.</a:t>
+            </a:r>
+          </a:p>
+          <a:p>
+            <a:r>
+              <a:rPr b="0"/>
+              <a:t>  </a:t>
+            </a:r>
+            <a:r>
+              <a:rPr b="1"/>
+              <a:t>ワン</a:t>
+            </a:r>
+            <a:r>
+              <a:rPr b="0"/>
+              <a:t>。 トゥースロット </a:t>
+            </a:r>
+            <a:r>
+              <a:rPr b="1"/>
+              <a:t>ストレージ</a:t>
+            </a:r>
+            <a:r>
+              <a:rPr b="0"/>
+              <a:t>。</a:t>
+            </a:r>
+          </a:p>
+          <a:p>
+            <a:r>
+              <a:rPr b="0"/>
+              <a:t>Two. Local access-key mixing — keys come from local state, not from a passphrase alone.</a:t>
+            </a:r>
+          </a:p>
+          <a:p>
+            <a:r>
+              <a:rPr b="0"/>
+              <a:t>  </a:t>
+            </a:r>
+            <a:r>
+              <a:rPr b="1"/>
+              <a:t>トゥー</a:t>
+            </a:r>
+            <a:r>
+              <a:rPr b="0"/>
+              <a:t>。 ローカル アクセスキー ミキシング — キーズ カム フロム </a:t>
+            </a:r>
+            <a:r>
+              <a:rPr b="1"/>
+              <a:t>ローカル ステイト</a:t>
+            </a:r>
+            <a:r>
+              <a:rPr b="0"/>
+              <a:t>、 ナット フロム ア パスフレイズ アロウン。</a:t>
+            </a:r>
+          </a:p>
+          <a:p>
+            <a:r>
+              <a:rPr b="0"/>
+              <a:t>Three. A restricted-action policy. It gates anything sensitive, and anything about recovery.</a:t>
+            </a:r>
+          </a:p>
+          <a:p>
+            <a:r>
+              <a:rPr b="0"/>
+              <a:t>  </a:t>
+            </a:r>
+            <a:r>
+              <a:rPr b="1"/>
+              <a:t>スリー</a:t>
+            </a:r>
+            <a:r>
+              <a:rPr b="0"/>
+              <a:t>。 ア リストリクティッドアクション ポリシー。 イット ゲイツ エニシング </a:t>
+            </a:r>
+            <a:r>
+              <a:rPr b="1"/>
+              <a:t>センシティヴ</a:t>
+            </a:r>
+            <a:r>
+              <a:rPr b="0"/>
+              <a:t>、 アンド エニシング アバウト リカヴァリー。</a:t>
+            </a:r>
+          </a:p>
+          <a:p>
+            <a:r>
+              <a:rPr b="0"/>
+              <a:t>Four. Capture-visible discipline.</a:t>
+            </a:r>
+          </a:p>
+          <a:p>
+            <a:r>
+              <a:rPr b="0"/>
+              <a:t>  </a:t>
+            </a:r>
+            <a:r>
+              <a:rPr b="1"/>
+              <a:t>フォー</a:t>
+            </a:r>
+            <a:r>
+              <a:rPr b="0"/>
+              <a:t>。 キャプチャーヴィジブル </a:t>
+            </a:r>
+            <a:r>
+              <a:rPr b="1"/>
+              <a:t>ディシプリン</a:t>
+            </a:r>
+            <a:r>
+              <a:rPr b="0"/>
+              <a:t>。</a:t>
+            </a:r>
+          </a:p>
+          <a:p>
+            <a:r>
+              <a:rPr b="0"/>
+              <a:t>Normal flows never show the structure, the recovery path, or the order you’d try things in.</a:t>
+            </a:r>
+          </a:p>
+          <a:p>
+            <a:r>
+              <a:rPr b="0"/>
+              <a:t>  ノーマル フロウズ </a:t>
+            </a:r>
+            <a:r>
+              <a:rPr b="1"/>
+              <a:t>ネヴァー</a:t>
+            </a:r>
+            <a:r>
+              <a:rPr b="0"/>
+              <a:t> ショウ ザ ストラクチャー、 ザ リカヴァリー パス、 オア ジ オーダー ユード トライ シングズ イン。</a:t>
+            </a:r>
+          </a:p>
+          <a:p>
+            <a:r>
+              <a:rPr b="0"/>
+              <a:t/>
+            </a:r>
+          </a:p>
+          <a:p>
+            <a:r>
+              <a:rPr b="0"/>
+              <a:t>JA: 4点を順に。専門聴衆が頷く箇所。11は流し気味</a:t>
+            </a:r>
           </a:p>
         </p:txBody>
       </p:sp>
@@ -706,12 +1116,104 @@
           <a:lstStyle/>
           <a:p>
             <a:r>
-              <a:rPr lang="en-US" dirty="0"/>
-              <a:t>[08:10 / 0:40] LAYERS + DOCS
-EN: "Underneath, the system is built as narrow local layers — entry points, the restricted-action policy, the crypto core, local state, and the deployment boundary. And none of this is folklore: it's documented — a full specification, the threat model, the formal Janus spec, and the delaying-architecture design. Read it, poke holes in it."
-JA: 流し気味。文書が揃っていること＝真剣な研究であることを示す。</a:t>
+              <a:rPr b="0"/>
+              <a:t>[08:10 / 0:40] LAYERS + DOCS — 発話 0:15</a:t>
             </a:r>
             <a:endParaRPr lang="en-US" dirty="0"/>
+          </a:p>
+          <a:p>
+            <a:r>
+              <a:rPr b="0"/>
+              <a:t/>
+            </a:r>
+          </a:p>
+          <a:p>
+            <a:r>
+              <a:rPr b="0"/>
+              <a:t>Underneath are narrow local layers.</a:t>
+            </a:r>
+          </a:p>
+          <a:p>
+            <a:r>
+              <a:rPr b="0"/>
+              <a:t>  アンダニース アー </a:t>
+            </a:r>
+            <a:r>
+              <a:rPr b="1"/>
+              <a:t>ナロウ ローカル レイヤーズ</a:t>
+            </a:r>
+            <a:r>
+              <a:rPr b="0"/>
+              <a:t>。</a:t>
+            </a:r>
+          </a:p>
+          <a:p>
+            <a:r>
+              <a:rPr b="0"/>
+              <a:t>Entry points, policy, crypto core, local state, deployment.</a:t>
+            </a:r>
+          </a:p>
+          <a:p>
+            <a:r>
+              <a:rPr b="0"/>
+              <a:t>  エントリー ポインツ、 ポリシー、 クリプト コア、 ローカル ステイト、 ディプロイメント。</a:t>
+            </a:r>
+          </a:p>
+          <a:p>
+            <a:r>
+              <a:rPr b="0"/>
+              <a:t>None of this is folklore. It’s documented.</a:t>
+            </a:r>
+          </a:p>
+          <a:p>
+            <a:r>
+              <a:rPr b="0"/>
+              <a:t>  </a:t>
+            </a:r>
+            <a:r>
+              <a:rPr b="1"/>
+              <a:t>ナン</a:t>
+            </a:r>
+            <a:r>
+              <a:rPr b="0"/>
+              <a:t> オヴ ディス イズ フォウクロー。 イッツ </a:t>
+            </a:r>
+            <a:r>
+              <a:rPr b="1"/>
+              <a:t>ドキュメンティッド</a:t>
+            </a:r>
+            <a:r>
+              <a:rPr b="0"/>
+              <a:t>。</a:t>
+            </a:r>
+          </a:p>
+          <a:p>
+            <a:r>
+              <a:rPr b="0"/>
+              <a:t>Read it — and poke holes in it.”</a:t>
+            </a:r>
+          </a:p>
+          <a:p>
+            <a:r>
+              <a:rPr b="0"/>
+              <a:t>  </a:t>
+            </a:r>
+            <a:r>
+              <a:rPr b="1"/>
+              <a:t>リード</a:t>
+            </a:r>
+            <a:r>
+              <a:rPr b="0"/>
+              <a:t> イット — アンド </a:t>
+            </a:r>
+            <a:r>
+              <a:rPr b="1"/>
+              <a:t>ポウク ホウルズ</a:t>
+            </a:r>
+            <a:r>
+              <a:rPr b="0"/>
+              <a:t> イン イット。</a:t>
+            </a:r>
           </a:p>
         </p:txBody>
       </p:sp>
@@ -796,12 +1298,264 @@
           <a:lstStyle/>
           <a:p>
             <a:r>
-              <a:rPr lang="en-US" dirty="0"/>
-              <a:t>[08:50 / 0:50] THREE PILLARS
-EN: "Three moving parts. One — an encrypted local vessel: authenticated encryption, password-derived keys. Two — object-cue operation; I'll come right back to this, it's the fun part. Three — controlled disclosure: workflows that separate what's shown from what's protected."
-JA: ②を予告して次スライドへ引っ張る。</a:t>
+              <a:rPr b="0"/>
+              <a:t>[08:50 / 0:50] THREE PILLARS — 発話 0:35</a:t>
             </a:r>
             <a:endParaRPr lang="en-US" dirty="0"/>
+          </a:p>
+          <a:p>
+            <a:r>
+              <a:rPr b="0"/>
+              <a:t/>
+            </a:r>
+          </a:p>
+          <a:p>
+            <a:r>
+              <a:rPr b="0"/>
+              <a:t>“Three moving parts.</a:t>
+            </a:r>
+          </a:p>
+          <a:p>
+            <a:r>
+              <a:rPr b="0"/>
+              <a:t>  </a:t>
+            </a:r>
+            <a:r>
+              <a:rPr b="1"/>
+              <a:t>スリー</a:t>
+            </a:r>
+            <a:r>
+              <a:rPr b="0"/>
+              <a:t> ムーヴィング パーツ。</a:t>
+            </a:r>
+          </a:p>
+          <a:p>
+            <a:r>
+              <a:rPr b="0"/>
+              <a:t>One — an encrypted local vessel. Authenticated encryption, password-derived keys.</a:t>
+            </a:r>
+          </a:p>
+          <a:p>
+            <a:r>
+              <a:rPr b="0"/>
+              <a:t>  </a:t>
+            </a:r>
+            <a:r>
+              <a:rPr b="1"/>
+              <a:t>ワン</a:t>
+            </a:r>
+            <a:r>
+              <a:rPr b="0"/>
+              <a:t> — アン インクリプティッド ローカル </a:t>
+            </a:r>
+            <a:r>
+              <a:rPr b="1"/>
+              <a:t>ヴェッセル</a:t>
+            </a:r>
+            <a:r>
+              <a:rPr b="0"/>
+              <a:t>。 オーセンティケイティッド インクリプション、 パスワードディライヴド キーズ。</a:t>
+            </a:r>
+          </a:p>
+          <a:p>
+            <a:r>
+              <a:rPr b="0"/>
+              <a:t>Two — object-cue operation. I’ll come right back to this. It’s the fun part.</a:t>
+            </a:r>
+          </a:p>
+          <a:p>
+            <a:r>
+              <a:rPr b="0"/>
+              <a:t>  </a:t>
+            </a:r>
+            <a:r>
+              <a:rPr b="1"/>
+              <a:t>トゥー</a:t>
+            </a:r>
+            <a:r>
+              <a:rPr b="0"/>
+              <a:t> — オブジェクトキュー オペレイション。 アイル カム ゥライト バック トゥ ディス。 イッツ ザ </a:t>
+            </a:r>
+            <a:r>
+              <a:rPr b="1"/>
+              <a:t>ファン パート</a:t>
+            </a:r>
+            <a:r>
+              <a:rPr b="0"/>
+              <a:t>。</a:t>
+            </a:r>
+          </a:p>
+          <a:p>
+            <a:r>
+              <a:rPr b="0"/>
+              <a:t>Three — controlled disclosure.</a:t>
+            </a:r>
+          </a:p>
+          <a:p>
+            <a:r>
+              <a:rPr b="0"/>
+              <a:t>  </a:t>
+            </a:r>
+            <a:r>
+              <a:rPr b="1"/>
+              <a:t>スリー</a:t>
+            </a:r>
+            <a:r>
+              <a:rPr b="0"/>
+              <a:t> — コントロールド ディスクロージャー。</a:t>
+            </a:r>
+          </a:p>
+          <a:p>
+            <a:r>
+              <a:rPr b="0"/>
+              <a:t>And that third one is concrete, not a slogan.</a:t>
+            </a:r>
+          </a:p>
+          <a:p>
+            <a:r>
+              <a:rPr b="0"/>
+              <a:t>  アンド ザット サード ワン イズ </a:t>
+            </a:r>
+            <a:r>
+              <a:rPr b="1"/>
+              <a:t>コンクリート</a:t>
+            </a:r>
+            <a:r>
+              <a:rPr b="0"/>
+              <a:t>、 ナット ア スロウガン。</a:t>
+            </a:r>
+          </a:p>
+          <a:p>
+            <a:r>
+              <a:rPr b="0"/>
+              <a:t>You set three credentials.</a:t>
+            </a:r>
+          </a:p>
+          <a:p>
+            <a:r>
+              <a:rPr b="0"/>
+              <a:t>  ユー セット </a:t>
+            </a:r>
+            <a:r>
+              <a:rPr b="1"/>
+              <a:t>スリー クリデンシャルズ</a:t>
+            </a:r>
+            <a:r>
+              <a:rPr b="0"/>
+              <a:t>。</a:t>
+            </a:r>
+          </a:p>
+          <a:p>
+            <a:r>
+              <a:rPr b="0"/>
+              <a:t>One opens the real file.</a:t>
+            </a:r>
+          </a:p>
+          <a:p>
+            <a:r>
+              <a:rPr b="0"/>
+              <a:t>  ワン </a:t>
+            </a:r>
+            <a:r>
+              <a:rPr b="1"/>
+              <a:t>オウプンズ</a:t>
+            </a:r>
+            <a:r>
+              <a:rPr b="0"/>
+              <a:t> ザ リアル ファイル。</a:t>
+            </a:r>
+          </a:p>
+          <a:p>
+            <a:r>
+              <a:rPr b="0"/>
+              <a:t>One opens the decoy.</a:t>
+            </a:r>
+          </a:p>
+          <a:p>
+            <a:r>
+              <a:rPr b="0"/>
+              <a:t>  ワン オウプンズ ザ </a:t>
+            </a:r>
+            <a:r>
+              <a:rPr b="1"/>
+              <a:t>ディーコイ</a:t>
+            </a:r>
+            <a:r>
+              <a:rPr b="0"/>
+              <a:t>。</a:t>
+            </a:r>
+          </a:p>
+          <a:p>
+            <a:r>
+              <a:rPr b="0"/>
+              <a:t>And one destroys the real file.</a:t>
+            </a:r>
+          </a:p>
+          <a:p>
+            <a:r>
+              <a:rPr b="0"/>
+              <a:t>  アンド ワン </a:t>
+            </a:r>
+            <a:r>
+              <a:rPr b="1"/>
+              <a:t>ディストロイズ</a:t>
+            </a:r>
+            <a:r>
+              <a:rPr b="0"/>
+              <a:t> ザ リアル ファイル。</a:t>
+            </a:r>
+          </a:p>
+          <a:p>
+            <a:r>
+              <a:rPr b="0"/>
+              <a:t>Three passwords. Three very different outcomes.</a:t>
+            </a:r>
+          </a:p>
+          <a:p>
+            <a:r>
+              <a:rPr b="0"/>
+              <a:t>  スリー パスワーズ。 スリー ヴェリー </a:t>
+            </a:r>
+            <a:r>
+              <a:rPr b="1"/>
+              <a:t>ディファレント アウトカムズ</a:t>
+            </a:r>
+            <a:r>
+              <a:rPr b="0"/>
+              <a:t>。</a:t>
+            </a:r>
+          </a:p>
+          <a:p>
+            <a:r>
+              <a:rPr b="0"/>
+              <a:t>And only you know which is which.”</a:t>
+            </a:r>
+          </a:p>
+          <a:p>
+            <a:r>
+              <a:rPr b="0"/>
+              <a:t>  アンド </a:t>
+            </a:r>
+            <a:r>
+              <a:rPr b="1"/>
+              <a:t>オウンリー ユー</a:t>
+            </a:r>
+            <a:r>
+              <a:rPr b="0"/>
+              <a:t> ノウ ウィッチ イズ ウィッチ。</a:t>
+            </a:r>
+          </a:p>
+          <a:p>
+            <a:r>
+              <a:rPr b="0"/>
+              <a:t/>
+            </a:r>
+          </a:p>
+          <a:p>
+            <a:r>
+              <a:rPr b="0"/>
+              <a:t>JA: ② を予告して引っ張る。3パスフレーズはここが初出 — 指で3つ数えて見せると残る。破壊資格の意味は Slide 21 まで引っ張る</a:t>
+            </a:r>
           </a:p>
         </p:txBody>
       </p:sp>
@@ -886,17 +1640,362 @@
           <a:lstStyle/>
           <a:p>
             <a:r>
-              <a:t>[09:40 / 1:20] OBJECT-CUE  ★見せ場</a:t>
-            </a:r>
-          </a:p>
-          <a:p>
-            <a:r>
-              <a:t>EN: "Here's the fun part. You show an everyday object to the camera to operate the access gate — nothing to type, nothing that looks like a secret. But this is the part people get wrong, so let me be clear: the object is a cue, not a key. It drives operation and policy checks. It is not the encryption key. A photo of the object unlocks nothing. The crypto stays with Argon2id and AES-GCM — the object just decides whether you get to act. You will see this fail live in a few minutes."</a:t>
-            </a:r>
-          </a:p>
-          <a:p>
-            <a:r>
-              <a:t>JA: ゆっくり。最大の差別化点。cue≠key を二度言う。手元の物体を掲げると効果的。**最後の一文で Step 3b（物体なしの失敗）を予告すること。**実証を約束しておくとデモの山が強くなる。</a:t>
+              <a:rPr b="0"/>
+              <a:t>[09:40 / 1:20] OBJECT-CUE  ★見せ場 — 発話 0:50</a:t>
+            </a:r>
+          </a:p>
+          <a:p>
+            <a:r>
+              <a:rPr b="0"/>
+              <a:t/>
+            </a:r>
+          </a:p>
+          <a:p>
+            <a:r>
+              <a:rPr b="0"/>
+              <a:t>“Here’s the fun part.</a:t>
+            </a:r>
+          </a:p>
+          <a:p>
+            <a:r>
+              <a:rPr b="0"/>
+              <a:t>  ヒアズ ザ </a:t>
+            </a:r>
+            <a:r>
+              <a:rPr b="1"/>
+              <a:t>ファン パート</a:t>
+            </a:r>
+            <a:r>
+              <a:rPr b="0"/>
+              <a:t>。</a:t>
+            </a:r>
+          </a:p>
+          <a:p>
+            <a:r>
+              <a:rPr b="0"/>
+              <a:t>You show an everyday object to the camera, and that operates the access gate.</a:t>
+            </a:r>
+          </a:p>
+          <a:p>
+            <a:r>
+              <a:rPr b="0"/>
+              <a:t>  ユー ショウ アン エヴリデイ </a:t>
+            </a:r>
+            <a:r>
+              <a:rPr b="1"/>
+              <a:t>オブジェクト</a:t>
+            </a:r>
+            <a:r>
+              <a:rPr b="0"/>
+              <a:t> トゥ ザ カメラ、 アンド ザット オペレイツ ジ </a:t>
+            </a:r>
+            <a:r>
+              <a:rPr b="1"/>
+              <a:t>アクセス ゲイト</a:t>
+            </a:r>
+            <a:r>
+              <a:rPr b="0"/>
+              <a:t>。</a:t>
+            </a:r>
+          </a:p>
+          <a:p>
+            <a:r>
+              <a:rPr b="0"/>
+              <a:t>Nothing to type. Nothing that looks like a secret.</a:t>
+            </a:r>
+          </a:p>
+          <a:p>
+            <a:r>
+              <a:rPr b="0"/>
+              <a:t>  </a:t>
+            </a:r>
+            <a:r>
+              <a:rPr b="1"/>
+              <a:t>ナッシング</a:t>
+            </a:r>
+            <a:r>
+              <a:rPr b="0"/>
+              <a:t> トゥ タイプ。 </a:t>
+            </a:r>
+            <a:r>
+              <a:rPr b="1"/>
+              <a:t>ナッシング</a:t>
+            </a:r>
+            <a:r>
+              <a:rPr b="0"/>
+              <a:t> ザット ルックス ライク ア シークレット。</a:t>
+            </a:r>
+          </a:p>
+          <a:p>
+            <a:r>
+              <a:rPr b="0"/>
+              <a:t>Now — this is the part people get wrong. So let me be clear.</a:t>
+            </a:r>
+          </a:p>
+          <a:p>
+            <a:r>
+              <a:rPr b="0"/>
+              <a:t>  ナウ — ディス イズ ザ パート ピープル ゲット </a:t>
+            </a:r>
+            <a:r>
+              <a:rPr b="1"/>
+              <a:t>ゥロング</a:t>
+            </a:r>
+            <a:r>
+              <a:rPr b="0"/>
+              <a:t>。 ソウ レット ミー ビー </a:t>
+            </a:r>
+            <a:r>
+              <a:rPr b="1"/>
+              <a:t>クリア</a:t>
+            </a:r>
+            <a:r>
+              <a:rPr b="0"/>
+              <a:t>。</a:t>
+            </a:r>
+          </a:p>
+          <a:p>
+            <a:r>
+              <a:rPr b="0"/>
+              <a:t>The object is a cue, not a key.</a:t>
+            </a:r>
+          </a:p>
+          <a:p>
+            <a:r>
+              <a:rPr b="0"/>
+              <a:t>  ジ オブジェクト イズ ア </a:t>
+            </a:r>
+            <a:r>
+              <a:rPr b="1"/>
+              <a:t>キュー</a:t>
+            </a:r>
+            <a:r>
+              <a:rPr b="0"/>
+              <a:t>、 </a:t>
+            </a:r>
+            <a:r>
+              <a:rPr b="1"/>
+              <a:t>ナット</a:t>
+            </a:r>
+            <a:r>
+              <a:rPr b="0"/>
+              <a:t> ア キー。</a:t>
+            </a:r>
+          </a:p>
+          <a:p>
+            <a:r>
+              <a:rPr b="0"/>
+              <a:t>It drives operation, and policy checks.</a:t>
+            </a:r>
+          </a:p>
+          <a:p>
+            <a:r>
+              <a:rPr b="0"/>
+              <a:t>  イット ドライヴズ </a:t>
+            </a:r>
+            <a:r>
+              <a:rPr b="1"/>
+              <a:t>オペレイション</a:t>
+            </a:r>
+            <a:r>
+              <a:rPr b="0"/>
+              <a:t>、 アンド ポリシー チェックス。</a:t>
+            </a:r>
+          </a:p>
+          <a:p>
+            <a:r>
+              <a:rPr b="0"/>
+              <a:t>It is not the encryption key.</a:t>
+            </a:r>
+          </a:p>
+          <a:p>
+            <a:r>
+              <a:rPr b="0"/>
+              <a:t>  イット イズ </a:t>
+            </a:r>
+            <a:r>
+              <a:rPr b="1"/>
+              <a:t>ナット</a:t>
+            </a:r>
+            <a:r>
+              <a:rPr b="0"/>
+              <a:t> ジ インクリプション キー。</a:t>
+            </a:r>
+          </a:p>
+          <a:p>
+            <a:r>
+              <a:rPr b="0"/>
+              <a:t>A photo of the object unlocks nothing.</a:t>
+            </a:r>
+          </a:p>
+          <a:p>
+            <a:r>
+              <a:rPr b="0"/>
+              <a:t>  ア フォウトウ オヴ ジ オブジェクト アンロックス </a:t>
+            </a:r>
+            <a:r>
+              <a:rPr b="1"/>
+              <a:t>ナッシング</a:t>
+            </a:r>
+            <a:r>
+              <a:rPr b="0"/>
+              <a:t>。</a:t>
+            </a:r>
+          </a:p>
+          <a:p>
+            <a:r>
+              <a:rPr b="0"/>
+              <a:t>The crypto stays with Argon2id and AES-GCM.</a:t>
+            </a:r>
+          </a:p>
+          <a:p>
+            <a:r>
+              <a:rPr b="0"/>
+              <a:t>  ザ クリプト ステイズ ウィズ </a:t>
+            </a:r>
+            <a:r>
+              <a:rPr b="1"/>
+              <a:t>アーゴン トゥー アイディー</a:t>
+            </a:r>
+            <a:r>
+              <a:rPr b="0"/>
+              <a:t> アンド </a:t>
+            </a:r>
+            <a:r>
+              <a:rPr b="1"/>
+              <a:t>エイ イー エス ジー シー エム</a:t>
+            </a:r>
+            <a:r>
+              <a:rPr b="0"/>
+              <a:t>。</a:t>
+            </a:r>
+          </a:p>
+          <a:p>
+            <a:r>
+              <a:rPr b="0"/>
+              <a:t>The object only decides whether you get to act.</a:t>
+            </a:r>
+          </a:p>
+          <a:p>
+            <a:r>
+              <a:rPr b="0"/>
+              <a:t>  ジ オブジェクト オウンリー ディサイズ ウェザー ユー ゲット トゥ </a:t>
+            </a:r>
+            <a:r>
+              <a:rPr b="1"/>
+              <a:t>アクト</a:t>
+            </a:r>
+            <a:r>
+              <a:rPr b="0"/>
+              <a:t>。</a:t>
+            </a:r>
+          </a:p>
+          <a:p>
+            <a:r>
+              <a:rPr b="0"/>
+              <a:t>And you’ll watch this fail, live, in a few minutes.</a:t>
+            </a:r>
+          </a:p>
+          <a:p>
+            <a:r>
+              <a:rPr b="0"/>
+              <a:t>  アンド ユール ウォッチ ディス </a:t>
+            </a:r>
+            <a:r>
+              <a:rPr b="1"/>
+              <a:t>フェイル</a:t>
+            </a:r>
+            <a:r>
+              <a:rPr b="0"/>
+              <a:t>、 </a:t>
+            </a:r>
+            <a:r>
+              <a:rPr b="1"/>
+              <a:t>ライヴ</a:t>
+            </a:r>
+            <a:r>
+              <a:rPr b="0"/>
+              <a:t>、 イン ア フュー ミニッツ。</a:t>
+            </a:r>
+          </a:p>
+          <a:p>
+            <a:r>
+              <a:rPr b="0"/>
+              <a:t>Same file. Same password. No object.”</a:t>
+            </a:r>
+          </a:p>
+          <a:p>
+            <a:r>
+              <a:rPr b="0"/>
+              <a:t>  セイム ファイル。 セイム パスワード。 </a:t>
+            </a:r>
+            <a:r>
+              <a:rPr b="1"/>
+              <a:t>ノウ オブジェクト</a:t>
+            </a:r>
+            <a:r>
+              <a:rPr b="0"/>
+              <a:t>。</a:t>
+            </a:r>
+          </a:p>
+          <a:p>
+            <a:r>
+              <a:rPr b="0"/>
+              <a:t/>
+            </a:r>
+          </a:p>
+          <a:p>
+            <a:r>
+              <a:rPr b="0"/>
+              <a:t>SPEAK（決めゼリフ・間を置いて）</a:t>
+            </a:r>
+          </a:p>
+          <a:p>
+            <a:r>
+              <a:rPr b="0"/>
+              <a:t>“A cue, not a key. A photo of it unlocks nothing.”</a:t>
+            </a:r>
+          </a:p>
+          <a:p>
+            <a:r>
+              <a:rPr b="0"/>
+              <a:t>  ア </a:t>
+            </a:r>
+            <a:r>
+              <a:rPr b="1"/>
+              <a:t>キュー</a:t>
+            </a:r>
+            <a:r>
+              <a:rPr b="0"/>
+              <a:t>、 </a:t>
+            </a:r>
+            <a:r>
+              <a:rPr b="1"/>
+              <a:t>ナット</a:t>
+            </a:r>
+            <a:r>
+              <a:rPr b="0"/>
+              <a:t> ア キー。 ア フォウトウ オヴ イット アンロックス </a:t>
+            </a:r>
+            <a:r>
+              <a:rPr b="1"/>
+              <a:t>ナッシング</a:t>
+            </a:r>
+            <a:r>
+              <a:rPr b="0"/>
+              <a:t>。</a:t>
+            </a:r>
+          </a:p>
+          <a:p>
+            <a:r>
+              <a:rPr b="0"/>
+              <a:t/>
+            </a:r>
+          </a:p>
+          <a:p>
+            <a:r>
+              <a:rPr b="0"/>
+              <a:t>JA: ゆっくり。手元の物体を掲げると効果的。最後の一文で Step 4 を予告する — 実証を約束しておくとデモの山が強くなる</a:t>
             </a:r>
           </a:p>
         </p:txBody>
@@ -982,17 +2081,438 @@
           <a:lstStyle/>
           <a:p>
             <a:r>
-              <a:t>[11:00 / 1:20] COERCION-SAFE DELAYING</a:t>
-            </a:r>
-          </a:p>
-          <a:p>
-            <a:r>
-              <a:t>EN: "This is what makes it coercion-safe. Silent Standby: a hotkey drops the sensitive UI into a harmless state — recovery needs re-auth. Then the material itself: the file you would hand over is one you wrote and stored yourself, before any coercion. Phasmid does not manufacture your cover story — a generated dataset would not survive five minutes of questioning. What it does offer is a filler that occupies free space, so an otherwise empty container does not read as empty. And context profiles — travel, field engineer, researcher — that tell you what 'normal' should look like, so you know what to prepare. In coercion-safe mode, a low-confidence match routes to the disclosure face instead of failing loudly. The goal isn't magic invisibility — it's uncertainty and delay."</a:t>
-            </a:r>
-          </a:p>
-          <a:p>
-            <a:r>
-              <a:t>JA: ここが製品モデルの核心。**囮ファイルは利用者が用意する**と言い切る。ツールが作った偽物に真実味はない。填充は空き領域対策に過ぎない。Silent Standby はデモで見せると予告。認識モードの帯を指す。</a:t>
+              <a:rPr b="0"/>
+              <a:t>[11:00 / 1:20] COERCION-SAFE DELAYING — 発話 1:20</a:t>
+            </a:r>
+          </a:p>
+          <a:p>
+            <a:r>
+              <a:rPr b="0"/>
+              <a:t/>
+            </a:r>
+          </a:p>
+          <a:p>
+            <a:r>
+              <a:rPr b="0"/>
+              <a:t>“This is what makes it coercion-safe.</a:t>
+            </a:r>
+          </a:p>
+          <a:p>
+            <a:r>
+              <a:rPr b="0"/>
+              <a:t>  ディス イズ ワット メイクス イット </a:t>
+            </a:r>
+            <a:r>
+              <a:rPr b="1"/>
+              <a:t>コアージョン セイフ</a:t>
+            </a:r>
+            <a:r>
+              <a:rPr b="0"/>
+              <a:t>。</a:t>
+            </a:r>
+          </a:p>
+          <a:p>
+            <a:r>
+              <a:rPr b="0"/>
+              <a:t>First, Silent Standby.</a:t>
+            </a:r>
+          </a:p>
+          <a:p>
+            <a:r>
+              <a:rPr b="0"/>
+              <a:t>  ファースト、 </a:t>
+            </a:r>
+            <a:r>
+              <a:rPr b="1"/>
+              <a:t>サイレント スタンドバイ</a:t>
+            </a:r>
+            <a:r>
+              <a:rPr b="0"/>
+              <a:t>。</a:t>
+            </a:r>
+          </a:p>
+          <a:p>
+            <a:r>
+              <a:rPr b="0"/>
+              <a:t>One hotkey drops the sensitive interface into a harmless state.</a:t>
+            </a:r>
+          </a:p>
+          <a:p>
+            <a:r>
+              <a:rPr b="0"/>
+              <a:t>  ワン ホットキー ドロップス ザ センシティヴ インターフェイス イントゥ ア </a:t>
+            </a:r>
+            <a:r>
+              <a:rPr b="1"/>
+              <a:t>ハームレス ステイト</a:t>
+            </a:r>
+            <a:r>
+              <a:rPr b="0"/>
+              <a:t>。</a:t>
+            </a:r>
+          </a:p>
+          <a:p>
+            <a:r>
+              <a:rPr b="0"/>
+              <a:t>Coming back needs re-authentication.</a:t>
+            </a:r>
+          </a:p>
+          <a:p>
+            <a:r>
+              <a:rPr b="0"/>
+              <a:t>  カミング バック ニーズ </a:t>
+            </a:r>
+            <a:r>
+              <a:rPr b="1"/>
+              <a:t>リーオーセンティケイション</a:t>
+            </a:r>
+            <a:r>
+              <a:rPr b="0"/>
+              <a:t>。</a:t>
+            </a:r>
+          </a:p>
+          <a:p>
+            <a:r>
+              <a:rPr b="0"/>
+              <a:t>Second — the material itself. And I want to be exact here.</a:t>
+            </a:r>
+          </a:p>
+          <a:p>
+            <a:r>
+              <a:rPr b="0"/>
+              <a:t>  セカンド — ザ マテリアル </a:t>
+            </a:r>
+            <a:r>
+              <a:rPr b="1"/>
+              <a:t>イットセルフ</a:t>
+            </a:r>
+            <a:r>
+              <a:rPr b="0"/>
+              <a:t>。 アンド アイ ワナ ビー </a:t>
+            </a:r>
+            <a:r>
+              <a:rPr b="1"/>
+              <a:t>イグザクト</a:t>
+            </a:r>
+            <a:r>
+              <a:rPr b="0"/>
+              <a:t> ヒア。</a:t>
+            </a:r>
+          </a:p>
+          <a:p>
+            <a:r>
+              <a:rPr b="0"/>
+              <a:t>The file you would hand over is a file you wrote and stored yourself.</a:t>
+            </a:r>
+          </a:p>
+          <a:p>
+            <a:r>
+              <a:rPr b="0"/>
+              <a:t>  ザ ファイル ユー ウド ハンド オウヴァー イズ ア ファイル ユー </a:t>
+            </a:r>
+            <a:r>
+              <a:rPr b="1"/>
+              <a:t>ロウト アンド ストード ユアセルフ</a:t>
+            </a:r>
+            <a:r>
+              <a:rPr b="0"/>
+              <a:t>。</a:t>
+            </a:r>
+          </a:p>
+          <a:p>
+            <a:r>
+              <a:rPr b="0"/>
+              <a:t>Before any coercion.</a:t>
+            </a:r>
+          </a:p>
+          <a:p>
+            <a:r>
+              <a:rPr b="0"/>
+              <a:t>  ビフォー </a:t>
+            </a:r>
+            <a:r>
+              <a:rPr b="1"/>
+              <a:t>エニー</a:t>
+            </a:r>
+            <a:r>
+              <a:rPr b="0"/>
+              <a:t> コアージョン。</a:t>
+            </a:r>
+          </a:p>
+          <a:p>
+            <a:r>
+              <a:rPr b="0"/>
+              <a:t>Phasmid does not manufacture your cover story.</a:t>
+            </a:r>
+          </a:p>
+          <a:p>
+            <a:r>
+              <a:rPr b="0"/>
+              <a:t>  ファズミッド ダズ </a:t>
+            </a:r>
+            <a:r>
+              <a:rPr b="1"/>
+              <a:t>ナット</a:t>
+            </a:r>
+            <a:r>
+              <a:rPr b="0"/>
+              <a:t> マニュファクチャー ユア カヴァー ストーリー。</a:t>
+            </a:r>
+          </a:p>
+          <a:p>
+            <a:r>
+              <a:rPr b="0"/>
+              <a:t>Generated data would not survive five minutes of questioning.</a:t>
+            </a:r>
+          </a:p>
+          <a:p>
+            <a:r>
+              <a:rPr b="0"/>
+              <a:t>  ジェネレイティッド データ ウド ナット </a:t>
+            </a:r>
+            <a:r>
+              <a:rPr b="1"/>
+              <a:t>サヴァイヴ</a:t>
+            </a:r>
+            <a:r>
+              <a:rPr b="0"/>
+              <a:t> ファイヴ ミニッツ オヴ クエスチョニング。</a:t>
+            </a:r>
+          </a:p>
+          <a:p>
+            <a:r>
+              <a:rPr b="0"/>
+              <a:t>Not from someone holding your passport.</a:t>
+            </a:r>
+          </a:p>
+          <a:p>
+            <a:r>
+              <a:rPr b="0"/>
+              <a:t>  ナット フロム サムワン ホウルディング ユア </a:t>
+            </a:r>
+            <a:r>
+              <a:rPr b="1"/>
+              <a:t>パスポート</a:t>
+            </a:r>
+            <a:r>
+              <a:rPr b="0"/>
+              <a:t>。</a:t>
+            </a:r>
+          </a:p>
+          <a:p>
+            <a:r>
+              <a:rPr b="0"/>
+              <a:t>Realism has to come from your own material — not from my random-text generator.</a:t>
+            </a:r>
+          </a:p>
+          <a:p>
+            <a:r>
+              <a:rPr b="0"/>
+              <a:t>  </a:t>
+            </a:r>
+            <a:r>
+              <a:rPr b="1"/>
+              <a:t>リアリズム</a:t>
+            </a:r>
+            <a:r>
+              <a:rPr b="0"/>
+              <a:t> ハズ トゥ カム フロム ユア オウン マテリアル — ナット フロム マイ ランダムテクスト ジェネレイター。</a:t>
+            </a:r>
+          </a:p>
+          <a:p>
+            <a:r>
+              <a:rPr b="0"/>
+              <a:t>What the tool does give you is filler.</a:t>
+            </a:r>
+          </a:p>
+          <a:p>
+            <a:r>
+              <a:rPr b="0"/>
+              <a:t>  ワット ザ ツール ダズ ギヴ ユー イズ </a:t>
+            </a:r>
+            <a:r>
+              <a:rPr b="1"/>
+              <a:t>フィラー</a:t>
+            </a:r>
+            <a:r>
+              <a:rPr b="0"/>
+              <a:t>。</a:t>
+            </a:r>
+          </a:p>
+          <a:p>
+            <a:r>
+              <a:rPr b="0"/>
+              <a:t>It occupies free space, so an empty container doesn’t read as empty.</a:t>
+            </a:r>
+          </a:p>
+          <a:p>
+            <a:r>
+              <a:rPr b="0"/>
+              <a:t>  イット オキュパイズ </a:t>
+            </a:r>
+            <a:r>
+              <a:rPr b="1"/>
+              <a:t>フリー スペイス</a:t>
+            </a:r>
+            <a:r>
+              <a:rPr b="0"/>
+              <a:t>、 ソウ アン エンプティ コンテナ ダズント リード アズ </a:t>
+            </a:r>
+            <a:r>
+              <a:rPr b="1"/>
+              <a:t>エンプティ</a:t>
+            </a:r>
+            <a:r>
+              <a:rPr b="0"/>
+              <a:t>。</a:t>
+            </a:r>
+          </a:p>
+          <a:p>
+            <a:r>
+              <a:rPr b="0"/>
+              <a:t>That’s a volume problem. And volume is something software can actually solve.</a:t>
+            </a:r>
+          </a:p>
+          <a:p>
+            <a:r>
+              <a:rPr b="0"/>
+              <a:t>  ザッツ ア </a:t>
+            </a:r>
+            <a:r>
+              <a:rPr b="1"/>
+              <a:t>ヴォリューム プロブレム</a:t>
+            </a:r>
+            <a:r>
+              <a:rPr b="0"/>
+              <a:t>。 アンド ヴォリューム イズ サムシング ソフトウェア キャン </a:t>
+            </a:r>
+            <a:r>
+              <a:rPr b="1"/>
+              <a:t>アクチュアリー ソルヴ</a:t>
+            </a:r>
+            <a:r>
+              <a:rPr b="0"/>
+              <a:t>。</a:t>
+            </a:r>
+          </a:p>
+          <a:p>
+            <a:r>
+              <a:rPr b="0"/>
+              <a:t>Third — context profiles. Travel. Field engineer. Researcher.</a:t>
+            </a:r>
+          </a:p>
+          <a:p>
+            <a:r>
+              <a:rPr b="0"/>
+              <a:t>  サード — </a:t>
+            </a:r>
+            <a:r>
+              <a:rPr b="1"/>
+              <a:t>コンテクスト プロウファイルズ</a:t>
+            </a:r>
+            <a:r>
+              <a:rPr b="0"/>
+              <a:t>。 トラヴル。 フィールド エンジニア。 リサーチャー。</a:t>
+            </a:r>
+          </a:p>
+          <a:p>
+            <a:r>
+              <a:rPr b="0"/>
+              <a:t>They tell you what ‘normal’ should look like, so you know what to prepare.</a:t>
+            </a:r>
+          </a:p>
+          <a:p>
+            <a:r>
+              <a:rPr b="0"/>
+              <a:t>  ゼイ テル ユー ワット </a:t>
+            </a:r>
+            <a:r>
+              <a:rPr b="1"/>
+              <a:t>ノーマル</a:t>
+            </a:r>
+            <a:r>
+              <a:rPr b="0"/>
+              <a:t> シュド ルック ライク、 ソウ ユー ノウ ワット トゥ プリペア。</a:t>
+            </a:r>
+          </a:p>
+          <a:p>
+            <a:r>
+              <a:rPr b="0"/>
+              <a:t>And in coercion-safe mode, a low-confidence match goes to the disclosure face, instead of failing loudly.</a:t>
+            </a:r>
+          </a:p>
+          <a:p>
+            <a:r>
+              <a:rPr b="0"/>
+              <a:t>  アンド イン コアージョンセイフ モウド、 ア ロウ コンフィデンス マッチ ゴウズ トゥ ザ </a:t>
+            </a:r>
+            <a:r>
+              <a:rPr b="1"/>
+              <a:t>ディスクロージャー フェイス</a:t>
+            </a:r>
+            <a:r>
+              <a:rPr b="0"/>
+              <a:t>、 インステッド オヴ フェイリング ラウドリー。</a:t>
+            </a:r>
+          </a:p>
+          <a:p>
+            <a:r>
+              <a:rPr b="0"/>
+              <a:t>The goal isn’t magic invisibility.</a:t>
+            </a:r>
+          </a:p>
+          <a:p>
+            <a:r>
+              <a:rPr b="0"/>
+              <a:t>  ザ ゴウル イズント </a:t>
+            </a:r>
+            <a:r>
+              <a:rPr b="1"/>
+              <a:t>マジック インヴィジビリティ</a:t>
+            </a:r>
+            <a:r>
+              <a:rPr b="0"/>
+              <a:t>。</a:t>
+            </a:r>
+          </a:p>
+          <a:p>
+            <a:r>
+              <a:rPr b="0"/>
+              <a:t>The goal is uncertainty, and delay.”</a:t>
+            </a:r>
+          </a:p>
+          <a:p>
+            <a:r>
+              <a:rPr b="0"/>
+              <a:t>  ザ ゴウル イズ </a:t>
+            </a:r>
+            <a:r>
+              <a:rPr b="1"/>
+              <a:t>アンサートゥンティ</a:t>
+            </a:r>
+            <a:r>
+              <a:rPr b="0"/>
+              <a:t>、 アンド </a:t>
+            </a:r>
+            <a:r>
+              <a:rPr b="1"/>
+              <a:t>ディレイ</a:t>
+            </a:r>
+            <a:r>
+              <a:rPr b="0"/>
+              <a:t>。</a:t>
+            </a:r>
+          </a:p>
+          <a:p>
+            <a:r>
+              <a:rPr b="0"/>
+              <a:t/>
+            </a:r>
+          </a:p>
+          <a:p>
+            <a:r>
+              <a:rPr b="0"/>
+              <a:t>JA: 本トークで最も誤解されやすい点。「ツールが囮を作る」と思われた瞬間に設計の真実味が全部落ちる。「囮は利用者が用意する」と「填充は空き領域対策に過ぎない」を分けて言い切る。Silent Standby はデモで見せると予告</a:t>
             </a:r>
           </a:p>
         </p:txBody>
@@ -1078,12 +2598,116 @@
           <a:lstStyle/>
           <a:p>
             <a:r>
-              <a:rPr lang="en-US" dirty="0"/>
-              <a:t>[12:20 / 0:45] DESIGN PRINCIPLES
-EN: "The design principle is restraint. The vault file alone isn't meant to be enough. Normal flows don't reveal structure or recovery. And metadata reduction is best-effort — I call it support, not sanitization. Restraint is the feature, not a limitation."
-JA: 流す。誠実トーン維持。</a:t>
+              <a:rPr b="0"/>
+              <a:t>[12:20 / 0:45] DESIGN PRINCIPLES — 発話 0:15</a:t>
             </a:r>
             <a:endParaRPr lang="en-US" dirty="0"/>
+          </a:p>
+          <a:p>
+            <a:r>
+              <a:rPr b="0"/>
+              <a:t/>
+            </a:r>
+          </a:p>
+          <a:p>
+            <a:r>
+              <a:rPr b="0"/>
+              <a:t>“The design principle is restraint.</a:t>
+            </a:r>
+          </a:p>
+          <a:p>
+            <a:r>
+              <a:rPr b="0"/>
+              <a:t>  ザ デザイン プリンシプル イズ </a:t>
+            </a:r>
+            <a:r>
+              <a:rPr b="1"/>
+              <a:t>リストレイント</a:t>
+            </a:r>
+            <a:r>
+              <a:rPr b="0"/>
+              <a:t>。</a:t>
+            </a:r>
+          </a:p>
+          <a:p>
+            <a:r>
+              <a:rPr b="0"/>
+              <a:t>The vault file alone isn’t meant to be enough.</a:t>
+            </a:r>
+          </a:p>
+          <a:p>
+            <a:r>
+              <a:rPr b="0"/>
+              <a:t>  ザ ヴォルト ファイル </a:t>
+            </a:r>
+            <a:r>
+              <a:rPr b="1"/>
+              <a:t>アロウン</a:t>
+            </a:r>
+            <a:r>
+              <a:rPr b="0"/>
+              <a:t> イズント メント トゥ ビー イナフ。</a:t>
+            </a:r>
+          </a:p>
+          <a:p>
+            <a:r>
+              <a:rPr b="0"/>
+              <a:t>Normal flows don’t reveal structure, or recovery.</a:t>
+            </a:r>
+          </a:p>
+          <a:p>
+            <a:r>
+              <a:rPr b="0"/>
+              <a:t>  ノーマル フロウズ ドウント </a:t>
+            </a:r>
+            <a:r>
+              <a:rPr b="1"/>
+              <a:t>リヴィール</a:t>
+            </a:r>
+            <a:r>
+              <a:rPr b="0"/>
+              <a:t> ストラクチャー、 オア リカヴァリー。</a:t>
+            </a:r>
+          </a:p>
+          <a:p>
+            <a:r>
+              <a:rPr b="0"/>
+              <a:t>And metadata reduction is best-effort. Support — not sanitization.</a:t>
+            </a:r>
+          </a:p>
+          <a:p>
+            <a:r>
+              <a:rPr b="0"/>
+              <a:t>  アンド メタデータ リダクション イズ </a:t>
+            </a:r>
+            <a:r>
+              <a:rPr b="1"/>
+              <a:t>ベスト エフォート</a:t>
+            </a:r>
+            <a:r>
+              <a:rPr b="0"/>
+              <a:t>。 サポート — </a:t>
+            </a:r>
+            <a:r>
+              <a:rPr b="1"/>
+              <a:t>ナット</a:t>
+            </a:r>
+            <a:r>
+              <a:rPr b="0"/>
+              <a:t> サニタイゼイション。</a:t>
+            </a:r>
+          </a:p>
+          <a:p>
+            <a:r>
+              <a:rPr b="0"/>
+              <a:t/>
+            </a:r>
+          </a:p>
+          <a:p>
+            <a:r>
+              <a:rPr b="0"/>
+              <a:t>JA: 4ステップを順に指す。デモの地図と予告</a:t>
+            </a:r>
           </a:p>
         </p:txBody>
       </p:sp>
@@ -1168,12 +2792,144 @@
           <a:lstStyle/>
           <a:p>
             <a:r>
-              <a:rPr lang="en-US" dirty="0"/>
-              <a:t>[13:05 / 0:45] FLOW
-EN: "Operationally it's four steps: Prepare a vessel, Bind it to local state and the object cue, Operate through CLI, TUI or local WebUI, and Disclose — controlled, under documented assumptions. Keep this in your head — it's the map for the demo in a few minutes."
-JA: 4ステップを順に指す。デモの地図になると予告。</a:t>
+              <a:rPr b="0"/>
+              <a:t>[13:05 / 0:45] OPERATING FLOW — 発話 0:25</a:t>
             </a:r>
             <a:endParaRPr lang="en-US" dirty="0"/>
+          </a:p>
+          <a:p>
+            <a:r>
+              <a:rPr b="0"/>
+              <a:t/>
+            </a:r>
+          </a:p>
+          <a:p>
+            <a:r>
+              <a:rPr b="0"/>
+              <a:t>Operationally, it’s four steps.</a:t>
+            </a:r>
+          </a:p>
+          <a:p>
+            <a:r>
+              <a:rPr b="0"/>
+              <a:t>  オペレイショナリー、 イッツ </a:t>
+            </a:r>
+            <a:r>
+              <a:rPr b="1"/>
+              <a:t>フォー ステップス</a:t>
+            </a:r>
+            <a:r>
+              <a:rPr b="0"/>
+              <a:t>。</a:t>
+            </a:r>
+          </a:p>
+          <a:p>
+            <a:r>
+              <a:rPr b="0"/>
+              <a:t>Prepare a vessel.</a:t>
+            </a:r>
+          </a:p>
+          <a:p>
+            <a:r>
+              <a:rPr b="0"/>
+              <a:t>  </a:t>
+            </a:r>
+            <a:r>
+              <a:rPr b="1"/>
+              <a:t>プリペア</a:t>
+            </a:r>
+            <a:r>
+              <a:rPr b="0"/>
+              <a:t> ア ヴェッセル。</a:t>
+            </a:r>
+          </a:p>
+          <a:p>
+            <a:r>
+              <a:rPr b="0"/>
+              <a:t>Bind it — to local state, and to the object cue.</a:t>
+            </a:r>
+          </a:p>
+          <a:p>
+            <a:r>
+              <a:rPr b="0"/>
+              <a:t>  </a:t>
+            </a:r>
+            <a:r>
+              <a:rPr b="1"/>
+              <a:t>バインド</a:t>
+            </a:r>
+            <a:r>
+              <a:rPr b="0"/>
+              <a:t> イット — トゥ ローカル ステイト、 アンド トゥ ジ オブジェクト キュー。</a:t>
+            </a:r>
+          </a:p>
+          <a:p>
+            <a:r>
+              <a:rPr b="0"/>
+              <a:t>Operate it — through the CLI, the TUI, or the local web interface.</a:t>
+            </a:r>
+          </a:p>
+          <a:p>
+            <a:r>
+              <a:rPr b="0"/>
+              <a:t>  </a:t>
+            </a:r>
+            <a:r>
+              <a:rPr b="1"/>
+              <a:t>オペレイト</a:t>
+            </a:r>
+            <a:r>
+              <a:rPr b="0"/>
+              <a:t> イット — スルー ザ シー エル アイ、 ザ ティー ユー アイ、 オア ザ ローカル ウェブ インターフェイス。</a:t>
+            </a:r>
+          </a:p>
+          <a:p>
+            <a:r>
+              <a:rPr b="0"/>
+              <a:t>Disclose — controlled, under documented assumptions.</a:t>
+            </a:r>
+          </a:p>
+          <a:p>
+            <a:r>
+              <a:rPr b="0"/>
+              <a:t>  </a:t>
+            </a:r>
+            <a:r>
+              <a:rPr b="1"/>
+              <a:t>ディスクロウズ</a:t>
+            </a:r>
+            <a:r>
+              <a:rPr b="0"/>
+              <a:t> — コントロールド、 アンダー ドキュメンティッド アサンプションズ。</a:t>
+            </a:r>
+          </a:p>
+          <a:p>
+            <a:r>
+              <a:rPr b="0"/>
+              <a:t>Keep those four in your head. They’re the map for the demo.”</a:t>
+            </a:r>
+          </a:p>
+          <a:p>
+            <a:r>
+              <a:rPr b="0"/>
+              <a:t>  キープ ゾウズ </a:t>
+            </a:r>
+            <a:r>
+              <a:rPr b="1"/>
+              <a:t>フォー</a:t>
+            </a:r>
+            <a:r>
+              <a:rPr b="0"/>
+              <a:t> イン ユア ヘッド。 ゼア ザ </a:t>
+            </a:r>
+            <a:r>
+              <a:rPr b="1"/>
+              <a:t>マップ</a:t>
+            </a:r>
+            <a:r>
+              <a:rPr b="0"/>
+              <a:t> フォー ザ デモ。</a:t>
+            </a:r>
           </a:p>
         </p:txBody>
       </p:sp>
@@ -1258,12 +3014,200 @@
           <a:lstStyle/>
           <a:p>
             <a:r>
-              <a:rPr lang="en-US" dirty="0"/>
-              <a:t>[13:50 / 0:50] TECH
-EN: "Small, local, boring by design. Argon2id for key derivation, AES-GCM for authenticated encryption, WebUI bound to localhost, running on a Pi Zero 2 W. Tuned parameters for that little board, per-record encryption, no plaintext header. Boring is good — boring is auditable."
-JA: 数値は帯を指す程度。詳細はQ&amp;A/次スライド。</a:t>
+              <a:rPr b="0"/>
+              <a:t>[13:50 / 0:50] TECH — 発話 0:25</a:t>
             </a:r>
             <a:endParaRPr lang="en-US" dirty="0"/>
+          </a:p>
+          <a:p>
+            <a:r>
+              <a:rPr b="0"/>
+              <a:t/>
+            </a:r>
+          </a:p>
+          <a:p>
+            <a:r>
+              <a:rPr b="0"/>
+              <a:t>“Small. Local. Boring by design.</a:t>
+            </a:r>
+          </a:p>
+          <a:p>
+            <a:r>
+              <a:rPr b="0"/>
+              <a:t>  </a:t>
+            </a:r>
+            <a:r>
+              <a:rPr b="1"/>
+              <a:t>スモール</a:t>
+            </a:r>
+            <a:r>
+              <a:rPr b="0"/>
+              <a:t>。 </a:t>
+            </a:r>
+            <a:r>
+              <a:rPr b="1"/>
+              <a:t>ローカル</a:t>
+            </a:r>
+            <a:r>
+              <a:rPr b="0"/>
+              <a:t>。 </a:t>
+            </a:r>
+            <a:r>
+              <a:rPr b="1"/>
+              <a:t>ボーリング</a:t>
+            </a:r>
+            <a:r>
+              <a:rPr b="0"/>
+              <a:t> バイ デザイン。</a:t>
+            </a:r>
+          </a:p>
+          <a:p>
+            <a:r>
+              <a:rPr b="0"/>
+              <a:t>Argon2id for key derivation.</a:t>
+            </a:r>
+          </a:p>
+          <a:p>
+            <a:r>
+              <a:rPr b="0"/>
+              <a:t>  </a:t>
+            </a:r>
+            <a:r>
+              <a:rPr b="1"/>
+              <a:t>アーゴン トゥー アイディー</a:t>
+            </a:r>
+            <a:r>
+              <a:rPr b="0"/>
+              <a:t> フォー キー デリヴェイション。</a:t>
+            </a:r>
+          </a:p>
+          <a:p>
+            <a:r>
+              <a:rPr b="0"/>
+              <a:t>AES-GCM for authenticated encryption.</a:t>
+            </a:r>
+          </a:p>
+          <a:p>
+            <a:r>
+              <a:rPr b="0"/>
+              <a:t>  </a:t>
+            </a:r>
+            <a:r>
+              <a:rPr b="1"/>
+              <a:t>エイ イー エス ジー シー エム</a:t>
+            </a:r>
+            <a:r>
+              <a:rPr b="0"/>
+              <a:t> フォー オーセンティケイティッド インクリプション。</a:t>
+            </a:r>
+          </a:p>
+          <a:p>
+            <a:r>
+              <a:rPr b="0"/>
+              <a:t>The web interface bound to localhost.</a:t>
+            </a:r>
+          </a:p>
+          <a:p>
+            <a:r>
+              <a:rPr b="0"/>
+              <a:t>  ザ ウェブ インターフェイス バウンド トゥ </a:t>
+            </a:r>
+            <a:r>
+              <a:rPr b="1"/>
+              <a:t>ローカルホウスト</a:t>
+            </a:r>
+            <a:r>
+              <a:rPr b="0"/>
+              <a:t>。</a:t>
+            </a:r>
+          </a:p>
+          <a:p>
+            <a:r>
+              <a:rPr b="0"/>
+              <a:t>All of it on a Pi Zero 2 W.</a:t>
+            </a:r>
+          </a:p>
+          <a:p>
+            <a:r>
+              <a:rPr b="0"/>
+              <a:t>  オール オヴ イット オン ア </a:t>
+            </a:r>
+            <a:r>
+              <a:rPr b="1"/>
+              <a:t>パイ ズィーロウ トゥー ダブリュー</a:t>
+            </a:r>
+            <a:r>
+              <a:rPr b="0"/>
+              <a:t>。</a:t>
+            </a:r>
+          </a:p>
+          <a:p>
+            <a:r>
+              <a:rPr b="0"/>
+              <a:t>Parameters tuned for that little board. Per-record encryption. No plaintext header.</a:t>
+            </a:r>
+          </a:p>
+          <a:p>
+            <a:r>
+              <a:rPr b="0"/>
+              <a:t>  パラミターズ </a:t>
+            </a:r>
+            <a:r>
+              <a:rPr b="1"/>
+              <a:t>チューンド</a:t>
+            </a:r>
+            <a:r>
+              <a:rPr b="0"/>
+              <a:t> フォー ザット リトル ボード。 パーレコード インクリプション。 </a:t>
+            </a:r>
+            <a:r>
+              <a:rPr b="1"/>
+              <a:t>ノウ プレインテクスト ヘダー</a:t>
+            </a:r>
+            <a:r>
+              <a:rPr b="0"/>
+              <a:t>。</a:t>
+            </a:r>
+          </a:p>
+          <a:p>
+            <a:r>
+              <a:rPr b="0"/>
+              <a:t>Boring is good. Boring is auditable.”</a:t>
+            </a:r>
+          </a:p>
+          <a:p>
+            <a:r>
+              <a:rPr b="0"/>
+              <a:t>  ボーリング イズ </a:t>
+            </a:r>
+            <a:r>
+              <a:rPr b="1"/>
+              <a:t>グッド</a:t>
+            </a:r>
+            <a:r>
+              <a:rPr b="0"/>
+              <a:t>。 ボーリング イズ </a:t>
+            </a:r>
+            <a:r>
+              <a:rPr b="1"/>
+              <a:t>オーディタブル</a:t>
+            </a:r>
+            <a:r>
+              <a:rPr b="0"/>
+              <a:t>。</a:t>
+            </a:r>
+          </a:p>
+          <a:p>
+            <a:r>
+              <a:rPr b="0"/>
+              <a:t/>
+            </a:r>
+          </a:p>
+          <a:p>
+            <a:r>
+              <a:rPr b="0"/>
+              <a:t>JA: 数値は帯を指す程度。詳細は次 / Q&amp;A</a:t>
+            </a:r>
           </a:p>
         </p:txBody>
       </p:sp>
@@ -1348,12 +3292,204 @@
           <a:lstStyle/>
           <a:p>
             <a:r>
-              <a:rPr lang="en-US" dirty="0"/>
-              <a:t>[14:40 / 1:00] FIELD HARDWARE  ★エンゲージ
-EN: "And here's the actual thing. A Pi Zero 2 W in a 3D-printed case, a camera for the object cue, on a little tripod. The WebUI is reached over USB at localhost — it never touches a network. It's meant to read as an unremarkable small gadget. It's right here on the table — come look, and try it, after the talk."
-JA: 現物を指す/持ち上げる。卓上デモ・Q&amp;Aへの導線を作る。</a:t>
+              <a:rPr b="0"/>
+              <a:t>[14:40 / 1:00] FIELD HARDWARE  ★エンゲージ — 発話 0:30</a:t>
             </a:r>
             <a:endParaRPr lang="en-US" dirty="0"/>
+          </a:p>
+          <a:p>
+            <a:r>
+              <a:rPr b="0"/>
+              <a:t/>
+            </a:r>
+          </a:p>
+          <a:p>
+            <a:r>
+              <a:rPr b="0"/>
+              <a:t>“And here’s the actual thing.</a:t>
+            </a:r>
+          </a:p>
+          <a:p>
+            <a:r>
+              <a:rPr b="0"/>
+              <a:t>  アンド ヒアズ ジ </a:t>
+            </a:r>
+            <a:r>
+              <a:rPr b="1"/>
+              <a:t>アクチュアル シング</a:t>
+            </a:r>
+            <a:r>
+              <a:rPr b="0"/>
+              <a:t>。</a:t>
+            </a:r>
+          </a:p>
+          <a:p>
+            <a:r>
+              <a:rPr b="0"/>
+              <a:t>A Pi Zero 2 W, in a 3D-printed case.</a:t>
+            </a:r>
+          </a:p>
+          <a:p>
+            <a:r>
+              <a:rPr b="0"/>
+              <a:t>  ア パイ ズィーロウ トゥー ダブリュー、 イン ア </a:t>
+            </a:r>
+            <a:r>
+              <a:rPr b="1"/>
+              <a:t>スリーディー プリンティッド ケイス</a:t>
+            </a:r>
+            <a:r>
+              <a:rPr b="0"/>
+              <a:t>。</a:t>
+            </a:r>
+          </a:p>
+          <a:p>
+            <a:r>
+              <a:rPr b="0"/>
+              <a:t>A camera for the object cue. On a small tripod.</a:t>
+            </a:r>
+          </a:p>
+          <a:p>
+            <a:r>
+              <a:rPr b="0"/>
+              <a:t>  ア </a:t>
+            </a:r>
+            <a:r>
+              <a:rPr b="1"/>
+              <a:t>カメラ</a:t>
+            </a:r>
+            <a:r>
+              <a:rPr b="0"/>
+              <a:t> フォー ジ オブジェクト キュー。 オン ア スモール </a:t>
+            </a:r>
+            <a:r>
+              <a:rPr b="1"/>
+              <a:t>トライポッド</a:t>
+            </a:r>
+            <a:r>
+              <a:rPr b="0"/>
+              <a:t>。</a:t>
+            </a:r>
+          </a:p>
+          <a:p>
+            <a:r>
+              <a:rPr b="0"/>
+              <a:t>You reach the web interface over USB, at localhost.</a:t>
+            </a:r>
+          </a:p>
+          <a:p>
+            <a:r>
+              <a:rPr b="0"/>
+              <a:t>  ユー リーチ ザ ウェブ インターフェイス オウヴァー </a:t>
+            </a:r>
+            <a:r>
+              <a:rPr b="1"/>
+              <a:t>ユー エス ビー</a:t>
+            </a:r>
+            <a:r>
+              <a:rPr b="0"/>
+              <a:t>、 アット ローカルホウスト。</a:t>
+            </a:r>
+          </a:p>
+          <a:p>
+            <a:r>
+              <a:rPr b="0"/>
+              <a:t>It never touches a network.</a:t>
+            </a:r>
+          </a:p>
+          <a:p>
+            <a:r>
+              <a:rPr b="0"/>
+              <a:t>  イット </a:t>
+            </a:r>
+            <a:r>
+              <a:rPr b="1"/>
+              <a:t>ネヴァー</a:t>
+            </a:r>
+            <a:r>
+              <a:rPr b="0"/>
+              <a:t> タッチィズ ア ネットワーク。</a:t>
+            </a:r>
+          </a:p>
+          <a:p>
+            <a:r>
+              <a:rPr b="0"/>
+              <a:t>It’s meant to read as an unremarkable little gadget.</a:t>
+            </a:r>
+          </a:p>
+          <a:p>
+            <a:r>
+              <a:rPr b="0"/>
+              <a:t>  イッツ メント トゥ リード アズ アン アンリマーカブル リトル </a:t>
+            </a:r>
+            <a:r>
+              <a:rPr b="1"/>
+              <a:t>ガジェット</a:t>
+            </a:r>
+            <a:r>
+              <a:rPr b="0"/>
+              <a:t>。</a:t>
+            </a:r>
+          </a:p>
+          <a:p>
+            <a:r>
+              <a:rPr b="0"/>
+              <a:t>And it’s right here on the table.</a:t>
+            </a:r>
+          </a:p>
+          <a:p>
+            <a:r>
+              <a:rPr b="0"/>
+              <a:t>  アンド イッツ </a:t>
+            </a:r>
+            <a:r>
+              <a:rPr b="1"/>
+              <a:t>ゥライト ヒア</a:t>
+            </a:r>
+            <a:r>
+              <a:rPr b="0"/>
+              <a:t> オン ザ テイブル。</a:t>
+            </a:r>
+          </a:p>
+          <a:p>
+            <a:r>
+              <a:rPr b="0"/>
+              <a:t>Come and look — and try it — after the talk.”</a:t>
+            </a:r>
+          </a:p>
+          <a:p>
+            <a:r>
+              <a:rPr b="0"/>
+              <a:t>  </a:t>
+            </a:r>
+            <a:r>
+              <a:rPr b="1"/>
+              <a:t>カム アンド ルック</a:t>
+            </a:r>
+            <a:r>
+              <a:rPr b="0"/>
+              <a:t> — アンド </a:t>
+            </a:r>
+            <a:r>
+              <a:rPr b="1"/>
+              <a:t>トライ イット</a:t>
+            </a:r>
+            <a:r>
+              <a:rPr b="0"/>
+              <a:t> — アフター ザ トーク。</a:t>
+            </a:r>
+          </a:p>
+          <a:p>
+            <a:r>
+              <a:rPr b="0"/>
+              <a:t/>
+            </a:r>
+          </a:p>
+          <a:p>
+            <a:r>
+              <a:rPr b="0"/>
+              <a:t>JA: 「ただの小さなガジェットに見える」を強調</a:t>
+            </a:r>
           </a:p>
         </p:txBody>
       </p:sp>
@@ -1438,12 +3574,156 @@
           <a:lstStyle/>
           <a:p>
             <a:r>
-              <a:rPr lang="en-US" dirty="0"/>
-              <a:t>[15:40 / 0:45] CRYPTO CORE
-EN: "For the crypto people: Argon2id with mixed-in local access-key material and device binding, an optional external secret as a third factor, AES-GCM per record with authenticated metadata, and no plaintext marker in the vault. Startup self-tests check the primitives before anything runs. Details are in the repo — happy to go deep in Q&amp;A."
-JA: 全部読まない。左列3点を指す。深掘りはQ&amp;Aへ。</a:t>
+              <a:rPr b="0"/>
+              <a:t>[15:40 / 0:45] CRYPTO CORE — 発話 0:20</a:t>
             </a:r>
             <a:endParaRPr lang="en-US" dirty="0"/>
+          </a:p>
+          <a:p>
+            <a:r>
+              <a:rPr b="0"/>
+              <a:t/>
+            </a:r>
+          </a:p>
+          <a:p>
+            <a:r>
+              <a:rPr b="0"/>
+              <a:t>“For the crypto people.</a:t>
+            </a:r>
+          </a:p>
+          <a:p>
+            <a:r>
+              <a:rPr b="0"/>
+              <a:t>  フォー ザ </a:t>
+            </a:r>
+            <a:r>
+              <a:rPr b="1"/>
+              <a:t>クリプト ピープル</a:t>
+            </a:r>
+            <a:r>
+              <a:rPr b="0"/>
+              <a:t>。</a:t>
+            </a:r>
+          </a:p>
+          <a:p>
+            <a:r>
+              <a:rPr b="0"/>
+              <a:t>Argon2id, with local access-key material mixed in, and device binding.</a:t>
+            </a:r>
+          </a:p>
+          <a:p>
+            <a:r>
+              <a:rPr b="0"/>
+              <a:t>  アーゴン トゥー アイディー、 ウィズ </a:t>
+            </a:r>
+            <a:r>
+              <a:rPr b="1"/>
+              <a:t>ローカル アクセスキー マテリアル</a:t>
+            </a:r>
+            <a:r>
+              <a:rPr b="0"/>
+              <a:t> ミクスト イン、 アンド デバイス バインディング。</a:t>
+            </a:r>
+          </a:p>
+          <a:p>
+            <a:r>
+              <a:rPr b="0"/>
+              <a:t>An optional external secret, as a third factor.</a:t>
+            </a:r>
+          </a:p>
+          <a:p>
+            <a:r>
+              <a:rPr b="0"/>
+              <a:t>  アン オプショナル エクスターナル </a:t>
+            </a:r>
+            <a:r>
+              <a:rPr b="1"/>
+              <a:t>シークレット</a:t>
+            </a:r>
+            <a:r>
+              <a:rPr b="0"/>
+              <a:t>、 アズ ア </a:t>
+            </a:r>
+            <a:r>
+              <a:rPr b="1"/>
+              <a:t>サード ファクター</a:t>
+            </a:r>
+            <a:r>
+              <a:rPr b="0"/>
+              <a:t>。</a:t>
+            </a:r>
+          </a:p>
+          <a:p>
+            <a:r>
+              <a:rPr b="0"/>
+              <a:t>AES-GCM per record, with authenticated metadata.</a:t>
+            </a:r>
+          </a:p>
+          <a:p>
+            <a:r>
+              <a:rPr b="0"/>
+              <a:t>  エイ イー エス ジー シー エム パー </a:t>
+            </a:r>
+            <a:r>
+              <a:rPr b="1"/>
+              <a:t>レコード</a:t>
+            </a:r>
+            <a:r>
+              <a:rPr b="0"/>
+              <a:t>、 ウィズ オーセンティケイティッド メタデータ。</a:t>
+            </a:r>
+          </a:p>
+          <a:p>
+            <a:r>
+              <a:rPr b="0"/>
+              <a:t>No plaintext marker in the vault.</a:t>
+            </a:r>
+          </a:p>
+          <a:p>
+            <a:r>
+              <a:rPr b="0"/>
+              <a:t>  </a:t>
+            </a:r>
+            <a:r>
+              <a:rPr b="1"/>
+              <a:t>ノウ プレインテクスト マーカー</a:t>
+            </a:r>
+            <a:r>
+              <a:rPr b="0"/>
+              <a:t> イン ザ ヴォルト。</a:t>
+            </a:r>
+          </a:p>
+          <a:p>
+            <a:r>
+              <a:rPr b="0"/>
+              <a:t>Startup self-tests check the primitives first.</a:t>
+            </a:r>
+          </a:p>
+          <a:p>
+            <a:r>
+              <a:rPr b="0"/>
+              <a:t>  スタートアップ セルフテスツ チェック ザ プリミティヴズ </a:t>
+            </a:r>
+            <a:r>
+              <a:rPr b="1"/>
+              <a:t>ファースト</a:t>
+            </a:r>
+            <a:r>
+              <a:rPr b="0"/>
+              <a:t>。</a:t>
+            </a:r>
+          </a:p>
+          <a:p>
+            <a:r>
+              <a:rPr b="0"/>
+              <a:t/>
+            </a:r>
+          </a:p>
+          <a:p>
+            <a:r>
+              <a:rPr b="0"/>
+              <a:t>JA: 全部読まない。左列を指す。個別値は Q&amp;A へ</a:t>
+            </a:r>
           </a:p>
         </p:txBody>
       </p:sp>
@@ -1528,12 +3808,224 @@
           <a:lstStyle/>
           <a:p>
             <a:r>
-              <a:rPr lang="en-US" dirty="0"/>
-              <a:t>[00:30 / 0:55] whoami
-EN: "A quick note on where I come from: like a lot of people in this room, I started in uniform — a former Japan Ground Self-Defense Force officer, a Second Lieutenant, in a cyber unit. My work since has mostly been offensive — and offensive work is really about the person, not just the algorithm; the weakest link is human. Phasmid points that lesson the other way: it doesn't protect the key, it protects the person holding it. Day-to-day I'm an independent researcher and open-source tool developer, pen tester, CISSP — you may have seen the Azazel system or the PAKURI family at Black Hat Arsenal, BSides, SecTor, CODE BLUE. Find me at 01rabbit on GitHub."
-JA: 冒頭は「経歴＝着想源」として淡々と。武勇伝化しない。person, not the algorithm と protects the person は必ず言い切る。GitHubハンドルを指す。</a:t>
+              <a:rPr b="0"/>
+              <a:t>[00:30 / 0:55] WHOAMI — 発話 0:25</a:t>
             </a:r>
             <a:endParaRPr lang="en-US" dirty="0"/>
+          </a:p>
+          <a:p>
+            <a:r>
+              <a:rPr b="0"/>
+              <a:t/>
+            </a:r>
+          </a:p>
+          <a:p>
+            <a:r>
+              <a:rPr b="0"/>
+              <a:t>“Quick background.</a:t>
+            </a:r>
+          </a:p>
+          <a:p>
+            <a:r>
+              <a:rPr b="0"/>
+              <a:t>  クイック </a:t>
+            </a:r>
+            <a:r>
+              <a:rPr b="1"/>
+              <a:t>バックグラウンド</a:t>
+            </a:r>
+            <a:r>
+              <a:rPr b="0"/>
+              <a:t>。</a:t>
+            </a:r>
+          </a:p>
+          <a:p>
+            <a:r>
+              <a:rPr b="0"/>
+              <a:t>I’m a senior engineer at GMO Cybersecurity by Ierae, in Tokyo.</a:t>
+            </a:r>
+          </a:p>
+          <a:p>
+            <a:r>
+              <a:rPr b="0"/>
+              <a:t>  アイム ア </a:t>
+            </a:r>
+            <a:r>
+              <a:rPr b="1"/>
+              <a:t>シニア エンジニア</a:t>
+            </a:r>
+            <a:r>
+              <a:rPr b="0"/>
+              <a:t> アット ジーエムオー サイバーセキュリティ バイ </a:t>
+            </a:r>
+            <a:r>
+              <a:rPr b="1"/>
+              <a:t>イエラエ</a:t>
+            </a:r>
+            <a:r>
+              <a:rPr b="0"/>
+              <a:t>、 イン トウキョウ。</a:t>
+            </a:r>
+          </a:p>
+          <a:p>
+            <a:r>
+              <a:rPr b="0"/>
+              <a:t>Security research, and open-source tools.</a:t>
+            </a:r>
+          </a:p>
+          <a:p>
+            <a:r>
+              <a:rPr b="0"/>
+              <a:t>  セキュリティ </a:t>
+            </a:r>
+            <a:r>
+              <a:rPr b="1"/>
+              <a:t>リサーチ</a:t>
+            </a:r>
+            <a:r>
+              <a:rPr b="0"/>
+              <a:t>、 アンド </a:t>
+            </a:r>
+            <a:r>
+              <a:rPr b="1"/>
+              <a:t>オープンソース ツールズ</a:t>
+            </a:r>
+            <a:r>
+              <a:rPr b="0"/>
+              <a:t>。</a:t>
+            </a:r>
+          </a:p>
+          <a:p>
+            <a:r>
+              <a:rPr b="0"/>
+              <a:t>Penetration tester by trade. CISSP.</a:t>
+            </a:r>
+          </a:p>
+          <a:p>
+            <a:r>
+              <a:rPr b="0"/>
+              <a:t>  ペネトレイション テスター バイ </a:t>
+            </a:r>
+            <a:r>
+              <a:rPr b="1"/>
+              <a:t>トレイド</a:t>
+            </a:r>
+            <a:r>
+              <a:rPr b="0"/>
+              <a:t>。 シー アイ エス エス ピー。</a:t>
+            </a:r>
+          </a:p>
+          <a:p>
+            <a:r>
+              <a:rPr b="0"/>
+              <a:t>I turn offensive experience into defensive tools.</a:t>
+            </a:r>
+          </a:p>
+          <a:p>
+            <a:r>
+              <a:rPr b="0"/>
+              <a:t>  アイ ターン オフェンシヴ エクスピアリエンス イントゥ </a:t>
+            </a:r>
+            <a:r>
+              <a:rPr b="1"/>
+              <a:t>ディフェンシヴ ツールズ</a:t>
+            </a:r>
+            <a:r>
+              <a:rPr b="0"/>
+              <a:t>。</a:t>
+            </a:r>
+          </a:p>
+          <a:p>
+            <a:r>
+              <a:rPr b="0"/>
+              <a:t>Deception. Delay. Coercion-aware design.</a:t>
+            </a:r>
+          </a:p>
+          <a:p>
+            <a:r>
+              <a:rPr b="0"/>
+              <a:t>  ディセプション。 ディレイ。 </a:t>
+            </a:r>
+            <a:r>
+              <a:rPr b="1"/>
+              <a:t>コアージョン アウェア デザイン</a:t>
+            </a:r>
+            <a:r>
+              <a:rPr b="0"/>
+              <a:t>。</a:t>
+            </a:r>
+          </a:p>
+          <a:p>
+            <a:r>
+              <a:rPr b="0"/>
+              <a:t>You may know my other work — Azazel, and the PAKURI family.</a:t>
+            </a:r>
+          </a:p>
+          <a:p>
+            <a:r>
+              <a:rPr b="0"/>
+              <a:t>  ユー メイ ノウ マイ アザー ワーク — </a:t>
+            </a:r>
+            <a:r>
+              <a:rPr b="1"/>
+              <a:t>アザゼル</a:t>
+            </a:r>
+            <a:r>
+              <a:rPr b="0"/>
+              <a:t>、 アンド ザ </a:t>
+            </a:r>
+            <a:r>
+              <a:rPr b="1"/>
+              <a:t>パクリ</a:t>
+            </a:r>
+            <a:r>
+              <a:rPr b="0"/>
+              <a:t> ファミリー。</a:t>
+            </a:r>
+          </a:p>
+          <a:p>
+            <a:r>
+              <a:rPr b="0"/>
+              <a:t>Black Hat Arsenal. BSides. SecTor. CODE BLUE.</a:t>
+            </a:r>
+          </a:p>
+          <a:p>
+            <a:r>
+              <a:rPr b="0"/>
+              <a:t>  ブラック ハット アーサナル。 ビーサイズ。 セクター。 コウド ブルー。</a:t>
+            </a:r>
+          </a:p>
+          <a:p>
+            <a:r>
+              <a:rPr b="0"/>
+              <a:t>I’m 01rabbit on GitHub.”</a:t>
+            </a:r>
+          </a:p>
+          <a:p>
+            <a:r>
+              <a:rPr b="0"/>
+              <a:t>  アイム </a:t>
+            </a:r>
+            <a:r>
+              <a:rPr b="1"/>
+              <a:t>ゼロワン ラビット</a:t>
+            </a:r>
+            <a:r>
+              <a:rPr b="0"/>
+              <a:t> オン ギットハブ。</a:t>
+            </a:r>
+          </a:p>
+          <a:p>
+            <a:r>
+              <a:rPr b="0"/>
+              <a:t/>
+            </a:r>
+          </a:p>
+          <a:p>
+            <a:r>
+              <a:rPr b="0"/>
+              <a:t>JA: 経歴は流す。ハンドルを指す</a:t>
+            </a:r>
           </a:p>
         </p:txBody>
       </p:sp>
@@ -1618,12 +4110,120 @@
           <a:lstStyle/>
           <a:p>
             <a:r>
-              <a:rPr lang="en-US" dirty="0"/>
-              <a:t>[16:25 / 0:40] OPERATIONAL GUARDS
-EN: "The WebUI is hardened, not an afterthought: localhost binding, per-process tokens, a restricted-confirmation session that's HttpOnly and short-lived, attempt limiting, rate limiting, inactivity auto-kill, hardened headers, and an opt-in HMAC-chained audit log. Defense in depth around a local surface."
-JA: 一覧を俯瞰。個別値はQ&amp;A。</a:t>
+              <a:rPr b="0"/>
+              <a:t>[16:25 / 0:40] OPERATIONAL GUARDS — 発話 0:20</a:t>
             </a:r>
             <a:endParaRPr lang="en-US" dirty="0"/>
+          </a:p>
+          <a:p>
+            <a:r>
+              <a:rPr b="0"/>
+              <a:t/>
+            </a:r>
+          </a:p>
+          <a:p>
+            <a:r>
+              <a:rPr b="0"/>
+              <a:t>And the web interface is hardened — not an afterthought.</a:t>
+            </a:r>
+          </a:p>
+          <a:p>
+            <a:r>
+              <a:rPr b="0"/>
+              <a:t>  アンド ザ ウェブ インターフェイス イズ </a:t>
+            </a:r>
+            <a:r>
+              <a:rPr b="1"/>
+              <a:t>ハードゥンド</a:t>
+            </a:r>
+            <a:r>
+              <a:rPr b="0"/>
+              <a:t> — ナット アン アフターソート。</a:t>
+            </a:r>
+          </a:p>
+          <a:p>
+            <a:r>
+              <a:rPr b="0"/>
+              <a:t>Localhost binding. Per-process tokens.</a:t>
+            </a:r>
+          </a:p>
+          <a:p>
+            <a:r>
+              <a:rPr b="0"/>
+              <a:t>  ローカルホウスト バインディング。 パープロセス トウクンズ。</a:t>
+            </a:r>
+          </a:p>
+          <a:p>
+            <a:r>
+              <a:rPr b="0"/>
+              <a:t>A restricted-confirmation session: HttpOnly, and short-lived.</a:t>
+            </a:r>
+          </a:p>
+          <a:p>
+            <a:r>
+              <a:rPr b="0"/>
+              <a:t>  ア リストリクティッド コンファメイション セッション: </a:t>
+            </a:r>
+            <a:r>
+              <a:rPr b="1"/>
+              <a:t>エイチ ティー ティー ピー オウンリー</a:t>
+            </a:r>
+            <a:r>
+              <a:rPr b="0"/>
+              <a:t>、 アンド ショートリヴド。</a:t>
+            </a:r>
+          </a:p>
+          <a:p>
+            <a:r>
+              <a:rPr b="0"/>
+              <a:t>Attempt limiting. Rate limiting. Inactivity auto-kill. Hardened headers.</a:t>
+            </a:r>
+          </a:p>
+          <a:p>
+            <a:r>
+              <a:rPr b="0"/>
+              <a:t>  アテンプト リミティング。 レイト リミティング。 インアクティヴィティ オートキル。 ハードゥンド ヘダーズ。</a:t>
+            </a:r>
+          </a:p>
+          <a:p>
+            <a:r>
+              <a:rPr b="0"/>
+              <a:t>And an opt-in, HMAC-chained audit log.</a:t>
+            </a:r>
+          </a:p>
+          <a:p>
+            <a:r>
+              <a:rPr b="0"/>
+              <a:t>  アンド アン オプトイン、 </a:t>
+            </a:r>
+            <a:r>
+              <a:rPr b="1"/>
+              <a:t>エイチマック チェインド オーディット ログ</a:t>
+            </a:r>
+            <a:r>
+              <a:rPr b="0"/>
+              <a:t>。</a:t>
+            </a:r>
+          </a:p>
+          <a:p>
+            <a:r>
+              <a:rPr b="0"/>
+              <a:t>Happy to go deep in Q and A.”</a:t>
+            </a:r>
+          </a:p>
+          <a:p>
+            <a:r>
+              <a:rPr b="0"/>
+              <a:t>  ハッピー トゥ ゴウ </a:t>
+            </a:r>
+            <a:r>
+              <a:rPr b="1"/>
+              <a:t>ディープ</a:t>
+            </a:r>
+            <a:r>
+              <a:rPr b="0"/>
+              <a:t> イン キュー アンド エイ。</a:t>
+            </a:r>
           </a:p>
         </p:txBody>
       </p:sp>
@@ -1708,17 +4308,222 @@
           <a:lstStyle/>
           <a:p>
             <a:r>
-              <a:t>[17:05 / 1:10] DESIGN ETHICS  ★倫理</a:t>
-            </a:r>
-          </a:p>
-          <a:p>
-            <a:r>
-              <a:t>EN: "Now the ethics — and this matters, especially in this room. The line I draw is simple: Phasmid destroys, but it never fabricates. It will not plant rootkits, hide processes, bypass forensic tools, forge timestamps, fake system events, or tamper with metadata to deceive an examiner — and it will not write your cover story for you either. What it does give the owner is a duress response — owner-triggered destruction: a silent brick overwrites the whole container with random data, and purge drops one face. Note what that means: under coercion the restricted credential destroys. It does not quietly disclose something false. There is no fake unlock that hands an examiner a forgery with my name on it. I'm telling you plainly that destruction exists, because the honest thing is to also say it's dangerous. Destroying data at the moment of seizure can itself be a crime — that's the border case on the problem slide, charged under a US destruction-of-evidence statute. Phasmid gives you the capability; it does not advise using it against lawful process, and legality is jurisdiction-dependent. The auto-fire path especially: understand your jurisdiction before you ever enable it. I won't comment on that active case or give legal advice."</a:t>
-            </a:r>
-          </a:p>
-          <a:p>
-            <a:r>
-              <a:t>JA: 破壊機能の存在を隠さず認める。核心は「destroyはする／fabricateはしない」。**強要下では開示しない — 制限パスフレーズは破壊資格であり取出資格ではない**。§2232（border case）を利用者リスクとして開示。自動発火経路は特に危険。推奨・法律助言はしない。</a:t>
+              <a:rPr b="0"/>
+              <a:t>[17:05 / 1:10] DESIGN ETHICS  ★倫理 — 発話 0:30</a:t>
+            </a:r>
+          </a:p>
+          <a:p>
+            <a:r>
+              <a:rPr b="0"/>
+              <a:t/>
+            </a:r>
+          </a:p>
+          <a:p>
+            <a:r>
+              <a:rPr b="0"/>
+              <a:t>“Now the ethics. And this matters — especially in this room.</a:t>
+            </a:r>
+          </a:p>
+          <a:p>
+            <a:r>
+              <a:rPr b="0"/>
+              <a:t>  ナウ ジ </a:t>
+            </a:r>
+            <a:r>
+              <a:rPr b="1"/>
+              <a:t>エシックス</a:t>
+            </a:r>
+            <a:r>
+              <a:rPr b="0"/>
+              <a:t>。 アンド ディス </a:t>
+            </a:r>
+            <a:r>
+              <a:rPr b="1"/>
+              <a:t>マターズ</a:t>
+            </a:r>
+            <a:r>
+              <a:rPr b="0"/>
+              <a:t> — イスペシャリー イン ディス ルーム。</a:t>
+            </a:r>
+          </a:p>
+          <a:p>
+            <a:r>
+              <a:rPr b="0"/>
+              <a:t>Phasmid allows plausible controlled disclosure.</a:t>
+            </a:r>
+          </a:p>
+          <a:p>
+            <a:r>
+              <a:rPr b="0"/>
+              <a:t>  ファズミッド </a:t>
+            </a:r>
+            <a:r>
+              <a:rPr b="1"/>
+              <a:t>アラウズ</a:t>
+            </a:r>
+            <a:r>
+              <a:rPr b="0"/>
+              <a:t> プローザブル コントロールド ディスクロージャー。</a:t>
+            </a:r>
+          </a:p>
+          <a:p>
+            <a:r>
+              <a:rPr b="0"/>
+              <a:t>Standby. Workflows that preserve ambiguity.</a:t>
+            </a:r>
+          </a:p>
+          <a:p>
+            <a:r>
+              <a:rPr b="0"/>
+              <a:t>  スタンドバイ。 ワークフロウズ ザット プリザーヴ </a:t>
+            </a:r>
+            <a:r>
+              <a:rPr b="1"/>
+              <a:t>アンビギューイティ</a:t>
+            </a:r>
+            <a:r>
+              <a:rPr b="0"/>
+              <a:t>。</a:t>
+            </a:r>
+          </a:p>
+          <a:p>
+            <a:r>
+              <a:rPr b="0"/>
+              <a:t>It explicitly disallows rootkits. Kernel-level hiding.</a:t>
+            </a:r>
+          </a:p>
+          <a:p>
+            <a:r>
+              <a:rPr b="0"/>
+              <a:t>  イット エクスプリシットリー </a:t>
+            </a:r>
+            <a:r>
+              <a:rPr b="1"/>
+              <a:t>ディサラウズ</a:t>
+            </a:r>
+            <a:r>
+              <a:rPr b="0"/>
+              <a:t> ルートキッツ。 カーネルレヴル ハイディング。</a:t>
+            </a:r>
+          </a:p>
+          <a:p>
+            <a:r>
+              <a:rPr b="0"/>
+              <a:t>Anti-forensic destruction. Forensic-tool bypass.</a:t>
+            </a:r>
+          </a:p>
+          <a:p>
+            <a:r>
+              <a:rPr b="0"/>
+              <a:t>  アンティフォレンシック ディストラクション。 フォレンシック ツール バイパス。</a:t>
+            </a:r>
+          </a:p>
+          <a:p>
+            <a:r>
+              <a:rPr b="0"/>
+              <a:t>And fabricating false events, or false timestamps.</a:t>
+            </a:r>
+          </a:p>
+          <a:p>
+            <a:r>
+              <a:rPr b="0"/>
+              <a:t>  アンド </a:t>
+            </a:r>
+            <a:r>
+              <a:rPr b="1"/>
+              <a:t>ファブリケイティング</a:t>
+            </a:r>
+            <a:r>
+              <a:rPr b="0"/>
+              <a:t> フォルス イヴェンツ、 オア フォルス タイムスタンプス。</a:t>
+            </a:r>
+          </a:p>
+          <a:p>
+            <a:r>
+              <a:rPr b="0"/>
+              <a:t>It increases uncertainty. It delays a confident conclusion.</a:t>
+            </a:r>
+          </a:p>
+          <a:p>
+            <a:r>
+              <a:rPr b="0"/>
+              <a:t>  イット </a:t>
+            </a:r>
+            <a:r>
+              <a:rPr b="1"/>
+              <a:t>インクリーシズ</a:t>
+            </a:r>
+            <a:r>
+              <a:rPr b="0"/>
+              <a:t> アンサートゥンティ。 イット </a:t>
+            </a:r>
+            <a:r>
+              <a:rPr b="1"/>
+              <a:t>ディレイズ</a:t>
+            </a:r>
+            <a:r>
+              <a:rPr b="0"/>
+              <a:t> ア コンフィデント コンクルージョン。</a:t>
+            </a:r>
+          </a:p>
+          <a:p>
+            <a:r>
+              <a:rPr b="0"/>
+              <a:t>It does not claim forensic invisibility.</a:t>
+            </a:r>
+          </a:p>
+          <a:p>
+            <a:r>
+              <a:rPr b="0"/>
+              <a:t>  イット ダズ </a:t>
+            </a:r>
+            <a:r>
+              <a:rPr b="1"/>
+              <a:t>ナット</a:t>
+            </a:r>
+            <a:r>
+              <a:rPr b="0"/>
+              <a:t> クレイム フォレンシック インヴィジビリティ。</a:t>
+            </a:r>
+          </a:p>
+          <a:p>
+            <a:r>
+              <a:rPr b="0"/>
+              <a:t>That line is deliberate. And it’s in the code.”</a:t>
+            </a:r>
+          </a:p>
+          <a:p>
+            <a:r>
+              <a:rPr b="0"/>
+              <a:t>  ザット ライン イズ </a:t>
+            </a:r>
+            <a:r>
+              <a:rPr b="1"/>
+              <a:t>ディリバレット</a:t>
+            </a:r>
+            <a:r>
+              <a:rPr b="0"/>
+              <a:t>。 アンド イッツ イン ザ </a:t>
+            </a:r>
+            <a:r>
+              <a:rPr b="1"/>
+              <a:t>コウド</a:t>
+            </a:r>
+            <a:r>
+              <a:rPr b="0"/>
+              <a:t>。</a:t>
+            </a:r>
+          </a:p>
+          <a:p>
+            <a:r>
+              <a:rPr b="0"/>
+              <a:t/>
+            </a:r>
+          </a:p>
+          <a:p>
+            <a:r>
+              <a:rPr b="0"/>
+              <a:t>JA: フォレンジック/法執行の聴衆へ誠実に。目を合わせる。信頼獲得点</a:t>
             </a:r>
           </a:p>
         </p:txBody>
@@ -1804,17 +4609,302 @@
           <a:lstStyle/>
           <a:p>
             <a:r>
-              <a:t>[18:15 / 0:50] SCOPE</a:t>
-            </a:r>
-          </a:p>
-          <a:p>
-            <a:r>
-              <a:t>EN: "Scope, drawn honestly. Software-existence concealment: out. Data-existence deniability: partial. Controlled disclosure: in, and central. Coercion-aware fallback: in. And things it never claims — perfect deniability, forensic immunity, secure deletion on flash, protection from a compromised host. One more it never claims: that your cover story is convincing. It can tell you how much space is occupied. It cannot tell you whether anyone will believe you, and it does not pretend to. No snake oil. Okay — enough talk. Let me show you."</a:t>
-            </a:r>
-          </a:p>
-          <a:p>
-            <a:r>
-              <a:t>JA: 誠実さの締め。**「説得力を判定しない」を非主張リストの5つ目として口頭で追加する。**最後の一文でデモへ橋渡し。</a:t>
+              <a:rPr b="0"/>
+              <a:t>[18:15 / 0:50] SCOPE — 発話 0:45</a:t>
+            </a:r>
+          </a:p>
+          <a:p>
+            <a:r>
+              <a:rPr b="0"/>
+              <a:t/>
+            </a:r>
+          </a:p>
+          <a:p>
+            <a:r>
+              <a:rPr b="0"/>
+              <a:t>“Scope, drawn honestly.</a:t>
+            </a:r>
+          </a:p>
+          <a:p>
+            <a:r>
+              <a:rPr b="0"/>
+              <a:t>  </a:t>
+            </a:r>
+            <a:r>
+              <a:rPr b="1"/>
+              <a:t>スコープ</a:t>
+            </a:r>
+            <a:r>
+              <a:rPr b="0"/>
+              <a:t>、 ドローン </a:t>
+            </a:r>
+            <a:r>
+              <a:rPr b="1"/>
+              <a:t>オネストリー</a:t>
+            </a:r>
+            <a:r>
+              <a:rPr b="0"/>
+              <a:t>。</a:t>
+            </a:r>
+          </a:p>
+          <a:p>
+            <a:r>
+              <a:rPr b="0"/>
+              <a:t>Hiding that the software exists — out.</a:t>
+            </a:r>
+          </a:p>
+          <a:p>
+            <a:r>
+              <a:rPr b="0"/>
+              <a:t>  ハイディング ザット ザ ソフトウェア イグズィスツ — </a:t>
+            </a:r>
+            <a:r>
+              <a:rPr b="1"/>
+              <a:t>アウト</a:t>
+            </a:r>
+            <a:r>
+              <a:rPr b="0"/>
+              <a:t>。</a:t>
+            </a:r>
+          </a:p>
+          <a:p>
+            <a:r>
+              <a:rPr b="0"/>
+              <a:t>Denying that the data exists — partial.</a:t>
+            </a:r>
+          </a:p>
+          <a:p>
+            <a:r>
+              <a:rPr b="0"/>
+              <a:t>  ディナイイング ザット ザ データ イグズィスツ — </a:t>
+            </a:r>
+            <a:r>
+              <a:rPr b="1"/>
+              <a:t>パーシャル</a:t>
+            </a:r>
+            <a:r>
+              <a:rPr b="0"/>
+              <a:t>。</a:t>
+            </a:r>
+          </a:p>
+          <a:p>
+            <a:r>
+              <a:rPr b="0"/>
+              <a:t>Controlled disclosure — in, and central.</a:t>
+            </a:r>
+          </a:p>
+          <a:p>
+            <a:r>
+              <a:rPr b="0"/>
+              <a:t>  コントロールド ディスクロージャー — </a:t>
+            </a:r>
+            <a:r>
+              <a:rPr b="1"/>
+              <a:t>イン</a:t>
+            </a:r>
+            <a:r>
+              <a:rPr b="0"/>
+              <a:t>、 アンド </a:t>
+            </a:r>
+            <a:r>
+              <a:rPr b="1"/>
+              <a:t>セントラル</a:t>
+            </a:r>
+            <a:r>
+              <a:rPr b="0"/>
+              <a:t>。</a:t>
+            </a:r>
+          </a:p>
+          <a:p>
+            <a:r>
+              <a:rPr b="0"/>
+              <a:t>Coercion-aware fallback — in.</a:t>
+            </a:r>
+          </a:p>
+          <a:p>
+            <a:r>
+              <a:rPr b="0"/>
+              <a:t>  コアージョンアウェア フォールバック — </a:t>
+            </a:r>
+            <a:r>
+              <a:rPr b="1"/>
+              <a:t>イン</a:t>
+            </a:r>
+            <a:r>
+              <a:rPr b="0"/>
+              <a:t>。</a:t>
+            </a:r>
+          </a:p>
+          <a:p>
+            <a:r>
+              <a:rPr b="0"/>
+              <a:t>And here’s what it never claims.</a:t>
+            </a:r>
+          </a:p>
+          <a:p>
+            <a:r>
+              <a:rPr b="0"/>
+              <a:t>  アンド ヒアズ ワット イット </a:t>
+            </a:r>
+            <a:r>
+              <a:rPr b="1"/>
+              <a:t>ネヴァー</a:t>
+            </a:r>
+            <a:r>
+              <a:rPr b="0"/>
+              <a:t> クレイムズ。</a:t>
+            </a:r>
+          </a:p>
+          <a:p>
+            <a:r>
+              <a:rPr b="0"/>
+              <a:t>Perfect deniability. Forensic immunity.</a:t>
+            </a:r>
+          </a:p>
+          <a:p>
+            <a:r>
+              <a:rPr b="0"/>
+              <a:t>  パーフェクト ディナイアビリティ。 フォレンシック イミューニティ。</a:t>
+            </a:r>
+          </a:p>
+          <a:p>
+            <a:r>
+              <a:rPr b="0"/>
+              <a:t>Secure deletion on flash. Protection from a compromised host.</a:t>
+            </a:r>
+          </a:p>
+          <a:p>
+            <a:r>
+              <a:rPr b="0"/>
+              <a:t>  セキュア ディリーション オン フラッシュ。 プロテクション フロム ア コンプロマイズド ホウスト。</a:t>
+            </a:r>
+          </a:p>
+          <a:p>
+            <a:r>
+              <a:rPr b="0"/>
+              <a:t>And one more thing it never claims: that your cover story is convincing.</a:t>
+            </a:r>
+          </a:p>
+          <a:p>
+            <a:r>
+              <a:rPr b="0"/>
+              <a:t>  アンド ワン モア シング イット ネヴァー クレイムズ: ザット ユア カヴァー ストーリー イズ </a:t>
+            </a:r>
+            <a:r>
+              <a:rPr b="1"/>
+              <a:t>コンヴィンシング</a:t>
+            </a:r>
+            <a:r>
+              <a:rPr b="0"/>
+              <a:t>。</a:t>
+            </a:r>
+          </a:p>
+          <a:p>
+            <a:r>
+              <a:rPr b="0"/>
+              <a:t>It can tell you how much space is occupied.</a:t>
+            </a:r>
+          </a:p>
+          <a:p>
+            <a:r>
+              <a:rPr b="0"/>
+              <a:t>  イット キャン テル ユー ハウ マッチ </a:t>
+            </a:r>
+            <a:r>
+              <a:rPr b="1"/>
+              <a:t>スペイス</a:t>
+            </a:r>
+            <a:r>
+              <a:rPr b="0"/>
+              <a:t> イズ オキュパイド。</a:t>
+            </a:r>
+          </a:p>
+          <a:p>
+            <a:r>
+              <a:rPr b="0"/>
+              <a:t>It cannot tell you whether anyone will believe you.</a:t>
+            </a:r>
+          </a:p>
+          <a:p>
+            <a:r>
+              <a:rPr b="0"/>
+              <a:t>  イット キャナット テル ユー ウェザー エニワン ウィル </a:t>
+            </a:r>
+            <a:r>
+              <a:rPr b="1"/>
+              <a:t>ビリーヴ</a:t>
+            </a:r>
+            <a:r>
+              <a:rPr b="0"/>
+              <a:t> ユー。</a:t>
+            </a:r>
+          </a:p>
+          <a:p>
+            <a:r>
+              <a:rPr b="0"/>
+              <a:t>And it doesn’t pretend to. No snake oil.</a:t>
+            </a:r>
+          </a:p>
+          <a:p>
+            <a:r>
+              <a:rPr b="0"/>
+              <a:t>  アンド イット ダズント </a:t>
+            </a:r>
+            <a:r>
+              <a:rPr b="1"/>
+              <a:t>プリテンド</a:t>
+            </a:r>
+            <a:r>
+              <a:rPr b="0"/>
+              <a:t> トゥ。 </a:t>
+            </a:r>
+            <a:r>
+              <a:rPr b="1"/>
+              <a:t>ノウ スネイク オイル</a:t>
+            </a:r>
+            <a:r>
+              <a:rPr b="0"/>
+              <a:t>。</a:t>
+            </a:r>
+          </a:p>
+          <a:p>
+            <a:r>
+              <a:rPr b="0"/>
+              <a:t>All right. Enough talk. Let me show you.”</a:t>
+            </a:r>
+          </a:p>
+          <a:p>
+            <a:r>
+              <a:rPr b="0"/>
+              <a:t>  オーライト。 </a:t>
+            </a:r>
+            <a:r>
+              <a:rPr b="1"/>
+              <a:t>イナフ</a:t>
+            </a:r>
+            <a:r>
+              <a:rPr b="0"/>
+              <a:t> トーク。 レット ミー </a:t>
+            </a:r>
+            <a:r>
+              <a:rPr b="1"/>
+              <a:t>ショウ</a:t>
+            </a:r>
+            <a:r>
+              <a:rPr b="0"/>
+              <a:t> ユー。</a:t>
+            </a:r>
+          </a:p>
+          <a:p>
+            <a:r>
+              <a:rPr b="0"/>
+              <a:t/>
+            </a:r>
+          </a:p>
+          <a:p>
+            <a:r>
+              <a:rPr b="0"/>
+              <a:t>JA: 誠実さの締め。最後の一文でデモへ橋渡し</a:t>
             </a:r>
           </a:p>
         </p:txBody>
@@ -1900,22 +4990,46 @@
           <a:lstStyle/>
           <a:p>
             <a:r>
-              <a:t>[19:05 / 0:15] LIVE DEMO (divider)</a:t>
-            </a:r>
-          </a:p>
-          <a:p>
-            <a:r>
-              <a:t>EN: "Alright — live demo."</a:t>
-            </a:r>
-          </a:p>
-          <a:p>
-            <a:r>
-              <a:t>JA: 章扉。呼吸を整え実機に向き直る。プロジェクタ入力をTUIへ切替。バックアップ録画の頭出しを確認。</a:t>
-            </a:r>
-          </a:p>
-          <a:p>
-            <a:r>
-              <a:t>この後の切替は Step 1→2（TUI→ブラウザ）と Step 4→5（ブラウザ→TUI）の1往復だけ。</a:t>
+              <a:rPr b="0"/>
+              <a:t>[19:05 / 0:15] LIVE DEMO（章扉）</a:t>
+            </a:r>
+          </a:p>
+          <a:p>
+            <a:r>
+              <a:rPr b="0"/>
+              <a:t/>
+            </a:r>
+          </a:p>
+          <a:p>
+            <a:r>
+              <a:rPr b="0"/>
+              <a:t>“Alright — live demo.”</a:t>
+            </a:r>
+          </a:p>
+          <a:p>
+            <a:r>
+              <a:rPr b="0"/>
+              <a:t>  オーライト — </a:t>
+            </a:r>
+            <a:r>
+              <a:rPr b="1"/>
+              <a:t>ライヴ デモ</a:t>
+            </a:r>
+            <a:r>
+              <a:rPr b="0"/>
+              <a:t>。</a:t>
+            </a:r>
+          </a:p>
+          <a:p>
+            <a:r>
+              <a:rPr b="0"/>
+              <a:t/>
+            </a:r>
+          </a:p>
+          <a:p>
+            <a:r>
+              <a:rPr b="0"/>
+              <a:t>JA: 呼吸を整え実機に向き直る。プロジェクタ入力を TUI へ切替。バックアップ録画の頭出しを確認。以降の切替は Step 1→2（TUI→ブラウザ）と Step 4→5（ブラウザ→TUI）の1往復だけ。</a:t>
             </a:r>
           </a:p>
         </p:txBody>
@@ -2001,54 +5115,2034 @@
           <a:lstStyle/>
           <a:p>
             <a:r>
-              <a:t>[19:20 / ~7:20] LIVE DEMO  ★中心（9手・TUI+WebUI・切替1往復）</a:t>
-            </a:r>
-          </a:p>
-          <a:p>
-            <a:r>
-              <a:t>EN (最小限・手を動かしながら): "Here's what you're about to see. I'll create one container on the device. Then, in the local web interface, I'll put two different files into it — each behind its own password and its own everyday object. Then I open it twice. Same container, same screen. First password: this file. Second password: a completely different file. That is the two-face model, live. And then the part that matters most: I use the first password again, change nothing else, and simply take the object away. Watch it refuse. Then Audit, and Silent Standby."</a:t>
-            </a:r>
-          </a:p>
-          <a:p/>
-          <a:p>
-            <a:r>
-              <a:t>JA: 詳細は別紙 Phasmid_Demo_Runbook（9手・合計~7:20）。</a:t>
-            </a:r>
-          </a:p>
-          <a:p>
-            <a:r>
-              <a:t>証明は2つあり、順番に意味がある。対比①=Step 3→4（同じ容器・違うパスワード→違うファイル）が Janus の実証。対比②=Step 5（何も変えず物体だけ外す→拒否）が cue≠key の実証。どちらも省略できない — ①だけなら二重底のパスワード管理、②だけなら物体認証つき暗号化に見える。</a:t>
-            </a:r>
-          </a:p>
-          <a:p>
-            <a:r>
-              <a:t>Step 2〜4 は WebUI（store トークン）、Step 5 以降は TUI。切替は Step 1→2 と Step 4→5 の1往復のみ。</a:t>
-            </a:r>
-          </a:p>
-          <a:p>
-            <a:r>
-              <a:t>★Step 4 で必ず間を取る。可能なら2つのファイルを並べて見せる。</a:t>
-            </a:r>
-          </a:p>
-          <a:p/>
-          <a:p>
-            <a:r>
-              <a:t>注意: マウスは使わない（Tab/Enter）。端末幅124桁以上（#169 で Doctor・Inspect がフッタから消え 145→124 に低下）。TUI の Add File は #169 で非活性化 — 保存は WebUI のみ。Fill Free Space は実測4分なので壇上では実行しない。</a:t>
-            </a:r>
-          </a:p>
-          <a:p>
-            <a:r>
-              <a:t>落とし穴: 復元は2回とも retrieved_payload.bin で落ちるので、違いはファイル名ではなく中身を開いて見せる。事前にダウンロードフォルダを空にする（2つ目が (1) 付きになる）。</a:t>
-            </a:r>
-          </a:p>
-          <a:p>
-            <a:r>
-              <a:t>破壊は壇上で実演しない — Slide 21 で口頭、実演は卓上デモへ。</a:t>
-            </a:r>
-          </a:p>
-          <a:p>
-            <a:r>
-              <a:t>時間: 26:00 超で Step 3 の誤パスワード実演と Audit を削る。Step 4・Step 5・Silent Standby だけは何があっても実機で見せる。失敗時は録画へ切替。</a:t>
+              <a:rPr b="0"/>
+              <a:t>[19:20 / ~7:30] LIVE DEMO  ★中心（8手＋任意1・TUI+WebUI・切替1往復）</a:t>
+            </a:r>
+          </a:p>
+          <a:p>
+            <a:r>
+              <a:rPr b="0"/>
+              <a:t/>
+            </a:r>
+          </a:p>
+          <a:p>
+            <a:r>
+              <a:rPr b="0"/>
+              <a:t>── 前置き（手を動かしながら）</a:t>
+            </a:r>
+          </a:p>
+          <a:p>
+            <a:r>
+              <a:rPr b="0"/>
+              <a:t>“Here’s what you’re about to see.</a:t>
+            </a:r>
+          </a:p>
+          <a:p>
+            <a:r>
+              <a:rPr b="0"/>
+              <a:t>  ヒアズ ワット ユア アバウト トゥ </a:t>
+            </a:r>
+            <a:r>
+              <a:rPr b="1"/>
+              <a:t>シー</a:t>
+            </a:r>
+            <a:r>
+              <a:rPr b="0"/>
+              <a:t>。</a:t>
+            </a:r>
+          </a:p>
+          <a:p>
+            <a:r>
+              <a:rPr b="0"/>
+              <a:t>I’ll create one container on the device.</a:t>
+            </a:r>
+          </a:p>
+          <a:p>
+            <a:r>
+              <a:rPr b="0"/>
+              <a:t>  アイル クリエイト </a:t>
+            </a:r>
+            <a:r>
+              <a:rPr b="1"/>
+              <a:t>ワン コンテナ</a:t>
+            </a:r>
+            <a:r>
+              <a:rPr b="0"/>
+              <a:t> オン ザ デバイス。</a:t>
+            </a:r>
+          </a:p>
+          <a:p>
+            <a:r>
+              <a:rPr b="0"/>
+              <a:t>Then, in the local web interface, I’ll put two different files into it.</a:t>
+            </a:r>
+          </a:p>
+          <a:p>
+            <a:r>
+              <a:rPr b="0"/>
+              <a:t>  ゼン、 イン ザ ローカル ウェブ インターフェイス、 アイル プット </a:t>
+            </a:r>
+            <a:r>
+              <a:rPr b="1"/>
+              <a:t>トゥー ディファレント ファイルズ</a:t>
+            </a:r>
+            <a:r>
+              <a:rPr b="0"/>
+              <a:t> イントゥ イット。</a:t>
+            </a:r>
+          </a:p>
+          <a:p>
+            <a:r>
+              <a:rPr b="0"/>
+              <a:t>Each one behind its own password, and its own everyday object.</a:t>
+            </a:r>
+          </a:p>
+          <a:p>
+            <a:r>
+              <a:rPr b="0"/>
+              <a:t>  イーチ ワン ビハインド イツ </a:t>
+            </a:r>
+            <a:r>
+              <a:rPr b="1"/>
+              <a:t>オウン パスワード</a:t>
+            </a:r>
+            <a:r>
+              <a:rPr b="0"/>
+              <a:t>、 アンド イツ </a:t>
+            </a:r>
+            <a:r>
+              <a:rPr b="1"/>
+              <a:t>オウン エヴリデイ オブジェクト</a:t>
+            </a:r>
+            <a:r>
+              <a:rPr b="0"/>
+              <a:t>。</a:t>
+            </a:r>
+          </a:p>
+          <a:p>
+            <a:r>
+              <a:rPr b="0"/>
+              <a:t>Then I open one of them. Correct object, correct password — the file comes back.</a:t>
+            </a:r>
+          </a:p>
+          <a:p>
+            <a:r>
+              <a:rPr b="0"/>
+              <a:t>  ゼン アイ オウプン ワン オヴ ゼム。 コゥレクト オブジェクト、 コゥレクト パスワード — ザ ファイル </a:t>
+            </a:r>
+            <a:r>
+              <a:rPr b="1"/>
+              <a:t>カムズ バック</a:t>
+            </a:r>
+            <a:r>
+              <a:rPr b="0"/>
+              <a:t>。</a:t>
+            </a:r>
+          </a:p>
+          <a:p>
+            <a:r>
+              <a:rPr b="0"/>
+              <a:t>And then the part that matters most.</a:t>
+            </a:r>
+          </a:p>
+          <a:p>
+            <a:r>
+              <a:rPr b="0"/>
+              <a:t>  アンド ゼン ザ パート ザット </a:t>
+            </a:r>
+            <a:r>
+              <a:rPr b="1"/>
+              <a:t>マターズ モウスト</a:t>
+            </a:r>
+            <a:r>
+              <a:rPr b="0"/>
+              <a:t>。</a:t>
+            </a:r>
+          </a:p>
+          <a:p>
+            <a:r>
+              <a:rPr b="0"/>
+              <a:t>I don’t touch the screen.</a:t>
+            </a:r>
+          </a:p>
+          <a:p>
+            <a:r>
+              <a:rPr b="0"/>
+              <a:t>  アイ </a:t>
+            </a:r>
+            <a:r>
+              <a:rPr b="1"/>
+              <a:t>ドウント タッチ</a:t>
+            </a:r>
+            <a:r>
+              <a:rPr b="0"/>
+              <a:t> ザ スクリーン。</a:t>
+            </a:r>
+          </a:p>
+          <a:p>
+            <a:r>
+              <a:rPr b="0"/>
+              <a:t>Same tab. Same file. Same password. Same button.</a:t>
+            </a:r>
+          </a:p>
+          <a:p>
+            <a:r>
+              <a:rPr b="0"/>
+              <a:t>  セイム タブ。 セイム ファイル。 セイム パスワード。 セイム バトゥン。</a:t>
+            </a:r>
+          </a:p>
+          <a:p>
+            <a:r>
+              <a:rPr b="0"/>
+              <a:t>I simply take the object off the table.</a:t>
+            </a:r>
+          </a:p>
+          <a:p>
+            <a:r>
+              <a:rPr b="0"/>
+              <a:t>  アイ シンプリー </a:t>
+            </a:r>
+            <a:r>
+              <a:rPr b="1"/>
+              <a:t>テイク ジ オブジェクト オフ</a:t>
+            </a:r>
+            <a:r>
+              <a:rPr b="0"/>
+              <a:t> ザ テイブル。</a:t>
+            </a:r>
+          </a:p>
+          <a:p>
+            <a:r>
+              <a:rPr b="0"/>
+              <a:t>And watch it refuse.</a:t>
+            </a:r>
+          </a:p>
+          <a:p>
+            <a:r>
+              <a:rPr b="0"/>
+              <a:t>  アンド ウォッチ イット </a:t>
+            </a:r>
+            <a:r>
+              <a:rPr b="1"/>
+              <a:t>リフューズ</a:t>
+            </a:r>
+            <a:r>
+              <a:rPr b="0"/>
+              <a:t>。</a:t>
+            </a:r>
+          </a:p>
+          <a:p>
+            <a:r>
+              <a:rPr b="0"/>
+              <a:t>Then Audit. And Silent Standby.”</a:t>
+            </a:r>
+          </a:p>
+          <a:p>
+            <a:r>
+              <a:rPr b="0"/>
+              <a:t>  ゼン </a:t>
+            </a:r>
+            <a:r>
+              <a:rPr b="1"/>
+              <a:t>オーディット</a:t>
+            </a:r>
+            <a:r>
+              <a:rPr b="0"/>
+              <a:t>。 アンド </a:t>
+            </a:r>
+            <a:r>
+              <a:rPr b="1"/>
+              <a:t>サイレント スタンドバイ</a:t>
+            </a:r>
+            <a:r>
+              <a:rPr b="0"/>
+              <a:t>。</a:t>
+            </a:r>
+          </a:p>
+          <a:p>
+            <a:r>
+              <a:rPr b="0"/>
+              <a:t/>
+            </a:r>
+          </a:p>
+          <a:p>
+            <a:r>
+              <a:rPr b="0"/>
+              <a:t>── STEP 0 · 0:20 · Orientation</a:t>
+            </a:r>
+          </a:p>
+          <a:p>
+            <a:r>
+              <a:rPr b="0"/>
+              <a:t>DO: Simple ホームを提示。下部バーを指す（o · n · g · e · q · w の6つだけ）</a:t>
+            </a:r>
+          </a:p>
+          <a:p>
+            <a:r>
+              <a:rPr b="0"/>
+              <a:t>“This is the real console — Local Disclosure Control.</a:t>
+            </a:r>
+          </a:p>
+          <a:p>
+            <a:r>
+              <a:rPr b="0"/>
+              <a:t>  ディス イズ ザ </a:t>
+            </a:r>
+            <a:r>
+              <a:rPr b="1"/>
+              <a:t>リアル コンソウル</a:t>
+            </a:r>
+            <a:r>
+              <a:rPr b="0"/>
+              <a:t> — ローカル ディスクロージャー コントロール。</a:t>
+            </a:r>
+          </a:p>
+          <a:p>
+            <a:r>
+              <a:rPr b="0"/>
+              <a:t>The home screen is deliberately small.</a:t>
+            </a:r>
+          </a:p>
+          <a:p>
+            <a:r>
+              <a:rPr b="0"/>
+              <a:t>  ザ ホウム スクリーン イズ </a:t>
+            </a:r>
+            <a:r>
+              <a:rPr b="1"/>
+              <a:t>ディリバレットリー スモール</a:t>
+            </a:r>
+            <a:r>
+              <a:rPr b="0"/>
+              <a:t>。</a:t>
+            </a:r>
+          </a:p>
+          <a:p>
+            <a:r>
+              <a:rPr b="0"/>
+              <a:t>Open. New. Guided. Expert.</a:t>
+            </a:r>
+          </a:p>
+          <a:p>
+            <a:r>
+              <a:rPr b="0"/>
+              <a:t>  オウプン。 ニュー。 ガイディッド。 エクスパート。</a:t>
+            </a:r>
+          </a:p>
+          <a:p>
+            <a:r>
+              <a:rPr b="0"/>
+              <a:t>Under pressure, you don’t want a wall of options.</a:t>
+            </a:r>
+          </a:p>
+          <a:p>
+            <a:r>
+              <a:rPr b="0"/>
+              <a:t>  アンダー プレッシャー、 ユー ドウント ワント ア </a:t>
+            </a:r>
+            <a:r>
+              <a:rPr b="1"/>
+              <a:t>ウォール オヴ オプションズ</a:t>
+            </a:r>
+            <a:r>
+              <a:rPr b="0"/>
+              <a:t>。</a:t>
+            </a:r>
+          </a:p>
+          <a:p>
+            <a:r>
+              <a:rPr b="0"/>
+              <a:t>The full control set is one key away.”</a:t>
+            </a:r>
+          </a:p>
+          <a:p>
+            <a:r>
+              <a:rPr b="0"/>
+              <a:t>  ザ フル コントロール セット イズ </a:t>
+            </a:r>
+            <a:r>
+              <a:rPr b="1"/>
+              <a:t>ワン キー アウェイ</a:t>
+            </a:r>
+            <a:r>
+              <a:rPr b="0"/>
+              <a:t>。</a:t>
+            </a:r>
+          </a:p>
+          <a:p>
+            <a:r>
+              <a:rPr b="0"/>
+              <a:t/>
+            </a:r>
+          </a:p>
+          <a:p>
+            <a:r>
+              <a:rPr b="0"/>
+              <a:t>── STEP 1 · 0:50 · Create a Vessel — Prepare</a:t>
+            </a:r>
+          </a:p>
+          <a:p>
+            <a:r>
+              <a:rPr b="0"/>
+              <a:t>DO: n New → vessel-path → vessel-size を 64M に変更（Select・既定 512M。既定のまま作らない）→ vessel-label（任意・無害な語）→ create-btn</a:t>
+            </a:r>
+          </a:p>
+          <a:p>
+            <a:r>
+              <a:rPr b="0"/>
+              <a:t>“First I create a vessel — a deniable container file.</a:t>
+            </a:r>
+          </a:p>
+          <a:p>
+            <a:r>
+              <a:rPr b="0"/>
+              <a:t>  ファースト アイ クリエイト ア </a:t>
+            </a:r>
+            <a:r>
+              <a:rPr b="1"/>
+              <a:t>ヴェッセル</a:t>
+            </a:r>
+            <a:r>
+              <a:rPr b="0"/>
+              <a:t> — ア ディナイアブル コンテナ ファイル。</a:t>
+            </a:r>
+          </a:p>
+          <a:p>
+            <a:r>
+              <a:rPr b="0"/>
+              <a:t>This is the Prepare step.</a:t>
+            </a:r>
+          </a:p>
+          <a:p>
+            <a:r>
+              <a:rPr b="0"/>
+              <a:t>  ディス イズ ザ </a:t>
+            </a:r>
+            <a:r>
+              <a:rPr b="1"/>
+              <a:t>プリペア</a:t>
+            </a:r>
+            <a:r>
+              <a:rPr b="0"/>
+              <a:t> ステップ。</a:t>
+            </a:r>
+          </a:p>
+          <a:p>
+            <a:r>
+              <a:rPr b="0"/>
+              <a:t>It has no header. No magic bytes.</a:t>
+            </a:r>
+          </a:p>
+          <a:p>
+            <a:r>
+              <a:rPr b="0"/>
+              <a:t>  イット ハズ </a:t>
+            </a:r>
+            <a:r>
+              <a:rPr b="1"/>
+              <a:t>ノウ ヘダー</a:t>
+            </a:r>
+            <a:r>
+              <a:rPr b="0"/>
+              <a:t>。 </a:t>
+            </a:r>
+            <a:r>
+              <a:rPr b="1"/>
+              <a:t>ノウ マジック バイツ</a:t>
+            </a:r>
+            <a:r>
+              <a:rPr b="0"/>
+              <a:t>。</a:t>
+            </a:r>
+          </a:p>
+          <a:p>
+            <a:r>
+              <a:rPr b="0"/>
+              <a:t>On disk, it’s indistinguishable from random data.”</a:t>
+            </a:r>
+          </a:p>
+          <a:p>
+            <a:r>
+              <a:rPr b="0"/>
+              <a:t>  オン ディスク、 イッツ </a:t>
+            </a:r>
+            <a:r>
+              <a:rPr b="1"/>
+              <a:t>インディスティングウィシャブル</a:t>
+            </a:r>
+            <a:r>
+              <a:rPr b="0"/>
+              <a:t> フロム ランダム データ。</a:t>
+            </a:r>
+          </a:p>
+          <a:p>
+            <a:r>
+              <a:rPr b="0"/>
+              <a:t/>
+            </a:r>
+          </a:p>
+          <a:p>
+            <a:r>
+              <a:rPr b="0"/>
+              <a:t>── STEP 2 · 1:30 · Bind — put two different files into one container</a:t>
+            </a:r>
+          </a:p>
+          <a:p>
+            <a:r>
+              <a:rPr b="0"/>
+              <a:t>DO: TUI で w → プロジェクタをラップトップのブラウザへ切替 → 事前ブックマークの /unlock タブに store トークンを入力 → Store 画面。1回目：「Choose the entry」で Entry 1 → ファイル → パスワード → 物体を手元に置いたまま 1 · Capture empty scene → 物体Aをかざして 2 · Capture access object → かざしたまま Protect file2回目：Entry 2 に切替 → 別ファイル → 別パスワード → 物体を外して 1 · Capture empty scene → 物体Bをかざして 2 · Capture access object → Advanced security options → Restricted recovery password に破壊パスワード → かざしたまま Protect file</a:t>
+            </a:r>
+          </a:p>
+          <a:p>
+            <a:r>
+              <a:rPr b="0"/>
+              <a:t>“Now I switch to the browser.</a:t>
+            </a:r>
+          </a:p>
+          <a:p>
+            <a:r>
+              <a:rPr b="0"/>
+              <a:t>  ナウ アイ スウィッチ トゥ ザ </a:t>
+            </a:r>
+            <a:r>
+              <a:rPr b="1"/>
+              <a:t>ブラウザ</a:t>
+            </a:r>
+            <a:r>
+              <a:rPr b="0"/>
+              <a:t>。</a:t>
+            </a:r>
+          </a:p>
+          <a:p>
+            <a:r>
+              <a:rPr b="0"/>
+              <a:t>The same device serves a local web interface.</a:t>
+            </a:r>
+          </a:p>
+          <a:p>
+            <a:r>
+              <a:rPr b="0"/>
+              <a:t>  ザ セイム デバイス サーヴズ ア </a:t>
+            </a:r>
+            <a:r>
+              <a:rPr b="1"/>
+              <a:t>ローカル ウェブ インターフェイス</a:t>
+            </a:r>
+            <a:r>
+              <a:rPr b="0"/>
+              <a:t>。</a:t>
+            </a:r>
+          </a:p>
+          <a:p>
+            <a:r>
+              <a:rPr b="0"/>
+              <a:t>I’m logged in with a token scoped to the store role.</a:t>
+            </a:r>
+          </a:p>
+          <a:p>
+            <a:r>
+              <a:rPr b="0"/>
+              <a:t>  アイム ログド イン ウィズ ア トウクン スコウプト トゥ ザ </a:t>
+            </a:r>
+            <a:r>
+              <a:rPr b="1"/>
+              <a:t>ストア ロウル</a:t>
+            </a:r>
+            <a:r>
+              <a:rPr b="0"/>
+              <a:t>。</a:t>
+            </a:r>
+          </a:p>
+          <a:p>
+            <a:r>
+              <a:rPr b="0"/>
+              <a:t>I’m putting two different files into the one container I just made.</a:t>
+            </a:r>
+          </a:p>
+          <a:p>
+            <a:r>
+              <a:rPr b="0"/>
+              <a:t>  アイム プティング </a:t>
+            </a:r>
+            <a:r>
+              <a:rPr b="1"/>
+              <a:t>トゥー ディファレント ファイルズ</a:t>
+            </a:r>
+            <a:r>
+              <a:rPr b="0"/>
+              <a:t> イントゥ ザ ワン コンテナ アイ ジャスト メイド。</a:t>
+            </a:r>
+          </a:p>
+          <a:p>
+            <a:r>
+              <a:rPr b="0"/>
+              <a:t>Now watch — it takes two shots.</a:t>
+            </a:r>
+          </a:p>
+          <a:p>
+            <a:r>
+              <a:rPr b="0"/>
+              <a:t>  ナウ </a:t>
+            </a:r>
+            <a:r>
+              <a:rPr b="1"/>
+              <a:t>ウォッチ</a:t>
+            </a:r>
+            <a:r>
+              <a:rPr b="0"/>
+              <a:t> — イット テイクス </a:t>
+            </a:r>
+            <a:r>
+              <a:rPr b="1"/>
+              <a:t>トゥー ショッツ</a:t>
+            </a:r>
+            <a:r>
+              <a:rPr b="0"/>
+              <a:t>。</a:t>
+            </a:r>
+          </a:p>
+          <a:p>
+            <a:r>
+              <a:rPr b="0"/>
+              <a:t>First the empty view. Then the object.</a:t>
+            </a:r>
+          </a:p>
+          <a:p>
+            <a:r>
+              <a:rPr b="0"/>
+              <a:t>  ファースト ジ </a:t>
+            </a:r>
+            <a:r>
+              <a:rPr b="1"/>
+              <a:t>エンプティ ヴュー</a:t>
+            </a:r>
+            <a:r>
+              <a:rPr b="0"/>
+              <a:t>。 ゼン ジ </a:t>
+            </a:r>
+            <a:r>
+              <a:rPr b="1"/>
+              <a:t>オブジェクト</a:t>
+            </a:r>
+            <a:r>
+              <a:rPr b="0"/>
+              <a:t>。</a:t>
+            </a:r>
+          </a:p>
+          <a:p>
+            <a:r>
+              <a:rPr b="0"/>
+              <a:t>The difference between those two frames is what the device keeps.</a:t>
+            </a:r>
+          </a:p>
+          <a:p>
+            <a:r>
+              <a:rPr b="0"/>
+              <a:t>  ザ </a:t>
+            </a:r>
+            <a:r>
+              <a:rPr b="1"/>
+              <a:t>ディファレンス</a:t>
+            </a:r>
+            <a:r>
+              <a:rPr b="0"/>
+              <a:t> ビトウィーン ゾウズ トゥー フレイムズ イズ ワット ザ デバイス キープス。</a:t>
+            </a:r>
+          </a:p>
+          <a:p>
+            <a:r>
+              <a:rPr b="0"/>
+              <a:t>Otherwise it would be describing my wall.</a:t>
+            </a:r>
+          </a:p>
+          <a:p>
+            <a:r>
+              <a:rPr b="0"/>
+              <a:t>  アザワイズ イット ウド ビー ディスクライビング マイ </a:t>
+            </a:r>
+            <a:r>
+              <a:rPr b="1"/>
+              <a:t>ウォール</a:t>
+            </a:r>
+            <a:r>
+              <a:rPr b="0"/>
+              <a:t>。</a:t>
+            </a:r>
+          </a:p>
+          <a:p>
+            <a:r>
+              <a:rPr b="0"/>
+              <a:t>And then my wall would open the file.</a:t>
+            </a:r>
+          </a:p>
+          <a:p>
+            <a:r>
+              <a:rPr b="0"/>
+              <a:t>  アンド ゼン </a:t>
+            </a:r>
+            <a:r>
+              <a:rPr b="1"/>
+              <a:t>マイ ウォール</a:t>
+            </a:r>
+            <a:r>
+              <a:rPr b="0"/>
+              <a:t> ウド オウプン ザ ファイル。</a:t>
+            </a:r>
+          </a:p>
+          <a:p>
+            <a:r>
+              <a:rPr b="0"/>
+              <a:t>And remember what that object is. A cue, not a key.</a:t>
+            </a:r>
+          </a:p>
+          <a:p>
+            <a:r>
+              <a:rPr b="0"/>
+              <a:t>  アンド リメンバー ワット ザット オブジェクト イズ。 ア </a:t>
+            </a:r>
+            <a:r>
+              <a:rPr b="1"/>
+              <a:t>キュー</a:t>
+            </a:r>
+            <a:r>
+              <a:rPr b="0"/>
+              <a:t>、 </a:t>
+            </a:r>
+            <a:r>
+              <a:rPr b="1"/>
+              <a:t>ナット</a:t>
+            </a:r>
+            <a:r>
+              <a:rPr b="0"/>
+              <a:t> ア キー。</a:t>
+            </a:r>
+          </a:p>
+          <a:p>
+            <a:r>
+              <a:rPr b="0"/>
+              <a:t>It gates the operation. It is not the encryption key.</a:t>
+            </a:r>
+          </a:p>
+          <a:p>
+            <a:r>
+              <a:rPr b="0"/>
+              <a:t>  イット </a:t>
+            </a:r>
+            <a:r>
+              <a:rPr b="1"/>
+              <a:t>ゲイツ</a:t>
+            </a:r>
+            <a:r>
+              <a:rPr b="0"/>
+              <a:t> ジ オペレイション。 イット イズ </a:t>
+            </a:r>
+            <a:r>
+              <a:rPr b="1"/>
+              <a:t>ナット</a:t>
+            </a:r>
+            <a:r>
+              <a:rPr b="0"/>
+              <a:t> ジ インクリプション キー。</a:t>
+            </a:r>
+          </a:p>
+          <a:p>
+            <a:r>
+              <a:rPr b="0"/>
+              <a:t>A photograph of it unlocks nothing.”</a:t>
+            </a:r>
+          </a:p>
+          <a:p>
+            <a:r>
+              <a:rPr b="0"/>
+              <a:t>  ア フォウトグラフ オヴ イット アンロックス </a:t>
+            </a:r>
+            <a:r>
+              <a:rPr b="1"/>
+              <a:t>ナッシング</a:t>
+            </a:r>
+            <a:r>
+              <a:rPr b="0"/>
+              <a:t>。</a:t>
+            </a:r>
+          </a:p>
+          <a:p>
+            <a:r>
+              <a:rPr b="0"/>
+              <a:t/>
+            </a:r>
+          </a:p>
+          <a:p>
+            <a:r>
+              <a:rPr b="0"/>
+              <a:t>── STEP 3 · 0:50 · Operate — the file comes back, and the role boundary</a:t>
+            </a:r>
+          </a:p>
+          <a:p>
+            <a:r>
+              <a:rPr b="0"/>
+              <a:t>DO: 同じ store タブで Retrieve へ。物体Aを提示 → パスワード → Open protected file。続けて役割の境界：別タブで recover トークンで解錠しておいたウィンドウを一瞬提示 — ナビに Store / Maintenance が一切無いことを指す</a:t>
+            </a:r>
+          </a:p>
+          <a:p>
+            <a:r>
+              <a:rPr b="0"/>
+              <a:t>“Same object. Correct password. The file comes back.</a:t>
+            </a:r>
+          </a:p>
+          <a:p>
+            <a:r>
+              <a:rPr b="0"/>
+              <a:t>  セイム オブジェクト。 コゥレクト パスワード。 ザ ファイル </a:t>
+            </a:r>
+            <a:r>
+              <a:rPr b="1"/>
+              <a:t>カムズ バック</a:t>
+            </a:r>
+            <a:r>
+              <a:rPr b="0"/>
+              <a:t>。</a:t>
+            </a:r>
+          </a:p>
+          <a:p>
+            <a:r>
+              <a:rPr b="0"/>
+              <a:t>And here’s a second session. A narrower one.</a:t>
+            </a:r>
+          </a:p>
+          <a:p>
+            <a:r>
+              <a:rPr b="0"/>
+              <a:t>  アンド ヒアズ ア </a:t>
+            </a:r>
+            <a:r>
+              <a:rPr b="1"/>
+              <a:t>セカンド セッション</a:t>
+            </a:r>
+            <a:r>
+              <a:rPr b="0"/>
+              <a:t>。 ア </a:t>
+            </a:r>
+            <a:r>
+              <a:rPr b="1"/>
+              <a:t>ナロウアー</a:t>
+            </a:r>
+            <a:r>
+              <a:rPr b="0"/>
+              <a:t> ワン。</a:t>
+            </a:r>
+          </a:p>
+          <a:p>
+            <a:r>
+              <a:rPr b="0"/>
+              <a:t>Logged in with a different token — a different role.</a:t>
+            </a:r>
+          </a:p>
+          <a:p>
+            <a:r>
+              <a:rPr b="0"/>
+              <a:t>  ログド イン ウィズ ア </a:t>
+            </a:r>
+            <a:r>
+              <a:rPr b="1"/>
+              <a:t>ディファレント トウクン</a:t>
+            </a:r>
+            <a:r>
+              <a:rPr b="0"/>
+              <a:t> — ア </a:t>
+            </a:r>
+            <a:r>
+              <a:rPr b="1"/>
+              <a:t>ディファレント ロウル</a:t>
+            </a:r>
+            <a:r>
+              <a:rPr b="0"/>
+              <a:t>。</a:t>
+            </a:r>
+          </a:p>
+          <a:p>
+            <a:r>
+              <a:rPr b="0"/>
+              <a:t>It can decrypt, and it can destroy.</a:t>
+            </a:r>
+          </a:p>
+          <a:p>
+            <a:r>
+              <a:rPr b="0"/>
+              <a:t>  イット キャン </a:t>
+            </a:r>
+            <a:r>
+              <a:rPr b="1"/>
+              <a:t>ディクリプト</a:t>
+            </a:r>
+            <a:r>
+              <a:rPr b="0"/>
+              <a:t>、 アンド イット キャン </a:t>
+            </a:r>
+            <a:r>
+              <a:rPr b="1"/>
+              <a:t>ディストロイ</a:t>
+            </a:r>
+            <a:r>
+              <a:rPr b="0"/>
+              <a:t>。</a:t>
+            </a:r>
+          </a:p>
+          <a:p>
+            <a:r>
+              <a:rPr b="0"/>
+              <a:t>It can never reach Face setup at all.</a:t>
+            </a:r>
+          </a:p>
+          <a:p>
+            <a:r>
+              <a:rPr b="0"/>
+              <a:t>  イット キャン </a:t>
+            </a:r>
+            <a:r>
+              <a:rPr b="1"/>
+              <a:t>ネヴァー</a:t>
+            </a:r>
+            <a:r>
+              <a:rPr b="0"/>
+              <a:t> リーチ フェイス セットアップ アット オール。</a:t>
+            </a:r>
+          </a:p>
+          <a:p>
+            <a:r>
+              <a:rPr b="0"/>
+              <a:t>It can’t even see that there is more than one entry.”</a:t>
+            </a:r>
+          </a:p>
+          <a:p>
+            <a:r>
+              <a:rPr b="0"/>
+              <a:t>  イット キャント </a:t>
+            </a:r>
+            <a:r>
+              <a:rPr b="1"/>
+              <a:t>イーヴン シー</a:t>
+            </a:r>
+            <a:r>
+              <a:rPr b="0"/>
+              <a:t> ザット ゼア イズ モア ザン ワン エントリー。</a:t>
+            </a:r>
+          </a:p>
+          <a:p>
+            <a:r>
+              <a:rPr b="0"/>
+              <a:t/>
+            </a:r>
+          </a:p>
+          <a:p>
+            <a:r>
+              <a:rPr b="0"/>
+              <a:t>── STEP 4 · 0:50 · Same tab, same password — the object is gone, and it refuses</a:t>
+            </a:r>
+          </a:p>
+          <a:p>
+            <a:r>
+              <a:rPr b="0"/>
+              <a:t>DO: Step 3 と同じ Retrieve 画面のまま。 物体をカメラの視野から完全に外す（手で覆うのではなく卓の下に下ろす）→ オーバーレイが No object cue match に変わるのを待つ → Step 3 と同じパスワード → Open protected file。直後に物体を戻して同じパスワードで再実行し、成功させる（0:15）</a:t>
+            </a:r>
+          </a:p>
+          <a:p>
+            <a:r>
+              <a:rPr b="0"/>
+              <a:t>“Same tab. Same file. Same password. Same everything.</a:t>
+            </a:r>
+          </a:p>
+          <a:p>
+            <a:r>
+              <a:rPr b="0"/>
+              <a:t>  </a:t>
+            </a:r>
+            <a:r>
+              <a:rPr b="1"/>
+              <a:t>セイム</a:t>
+            </a:r>
+            <a:r>
+              <a:rPr b="0"/>
+              <a:t> タブ。 </a:t>
+            </a:r>
+            <a:r>
+              <a:rPr b="1"/>
+              <a:t>セイム</a:t>
+            </a:r>
+            <a:r>
+              <a:rPr b="0"/>
+              <a:t> ファイル。 </a:t>
+            </a:r>
+            <a:r>
+              <a:rPr b="1"/>
+              <a:t>セイム</a:t>
+            </a:r>
+            <a:r>
+              <a:rPr b="0"/>
+              <a:t> パスワード。 </a:t>
+            </a:r>
+            <a:r>
+              <a:rPr b="1"/>
+              <a:t>セイム エヴリシング</a:t>
+            </a:r>
+            <a:r>
+              <a:rPr b="0"/>
+              <a:t>。</a:t>
+            </a:r>
+          </a:p>
+          <a:p>
+            <a:r>
+              <a:rPr b="0"/>
+              <a:t>I have only taken the object away.</a:t>
+            </a:r>
+          </a:p>
+          <a:p>
+            <a:r>
+              <a:rPr b="0"/>
+              <a:t>  アイ ハヴ </a:t>
+            </a:r>
+            <a:r>
+              <a:rPr b="1"/>
+              <a:t>オウンリー</a:t>
+            </a:r>
+            <a:r>
+              <a:rPr b="0"/>
+              <a:t> テイクン ジ オブジェクト アウェイ。</a:t>
+            </a:r>
+          </a:p>
+          <a:p>
+            <a:r>
+              <a:rPr b="0"/>
+              <a:t>And look at what it says. ‘No valid entry found.’</a:t>
+            </a:r>
+          </a:p>
+          <a:p>
+            <a:r>
+              <a:rPr b="0"/>
+              <a:t>  アンド ルック アット ワット イット セズ。 </a:t>
+            </a:r>
+            <a:r>
+              <a:rPr b="1"/>
+              <a:t>ノウ ヴァリッド エントリー ファウンド</a:t>
+            </a:r>
+            <a:r>
+              <a:rPr b="0"/>
+              <a:t>。</a:t>
+            </a:r>
+          </a:p>
+          <a:p>
+            <a:r>
+              <a:rPr b="0"/>
+              <a:t>Not ‘wrong object’. Not ‘object missing’.</a:t>
+            </a:r>
+          </a:p>
+          <a:p>
+            <a:r>
+              <a:rPr b="0"/>
+              <a:t>  ナット </a:t>
+            </a:r>
+            <a:r>
+              <a:rPr b="1"/>
+              <a:t>ゥロング オブジェクト</a:t>
+            </a:r>
+            <a:r>
+              <a:rPr b="0"/>
+              <a:t>。 ナット </a:t>
+            </a:r>
+            <a:r>
+              <a:rPr b="1"/>
+              <a:t>オブジェクト ミッシング</a:t>
+            </a:r>
+            <a:r>
+              <a:rPr b="0"/>
+              <a:t>。</a:t>
+            </a:r>
+          </a:p>
+          <a:p>
+            <a:r>
+              <a:rPr b="0"/>
+              <a:t>It won’t even tell you what it’s waiting for.</a:t>
+            </a:r>
+          </a:p>
+          <a:p>
+            <a:r>
+              <a:rPr b="0"/>
+              <a:t>  イット ウォウント イーヴン テル ユー ワット イッツ </a:t>
+            </a:r>
+            <a:r>
+              <a:rPr b="1"/>
+              <a:t>ウェイティング</a:t>
+            </a:r>
+            <a:r>
+              <a:rPr b="0"/>
+              <a:t> フォー。</a:t>
+            </a:r>
+          </a:p>
+          <a:p>
+            <a:r>
+              <a:rPr b="0"/>
+              <a:t>That is deliberate.</a:t>
+            </a:r>
+          </a:p>
+          <a:p>
+            <a:r>
+              <a:rPr b="0"/>
+              <a:t>  ザット イズ </a:t>
+            </a:r>
+            <a:r>
+              <a:rPr b="1"/>
+              <a:t>ディリバレット</a:t>
+            </a:r>
+            <a:r>
+              <a:rPr b="0"/>
+              <a:t>。</a:t>
+            </a:r>
+          </a:p>
+          <a:p>
+            <a:r>
+              <a:rPr b="0"/>
+              <a:t>That is what ‘the cue gates the operation’ means.”</a:t>
+            </a:r>
+          </a:p>
+          <a:p>
+            <a:r>
+              <a:rPr b="0"/>
+              <a:t>  </a:t>
+            </a:r>
+            <a:r>
+              <a:rPr b="1"/>
+              <a:t>ザット</a:t>
+            </a:r>
+            <a:r>
+              <a:rPr b="0"/>
+              <a:t> イズ ワット 「ザ キュー ゲイツ ジ オペレイション」 ミーンズ。</a:t>
+            </a:r>
+          </a:p>
+          <a:p>
+            <a:r>
+              <a:rPr b="0"/>
+              <a:t>SPEAK（間を置いて）</a:t>
+            </a:r>
+          </a:p>
+          <a:p>
+            <a:r>
+              <a:rPr b="0"/>
+              <a:t>“Only the object is gone. And it refuses.”</a:t>
+            </a:r>
+          </a:p>
+          <a:p>
+            <a:r>
+              <a:rPr b="0"/>
+              <a:t>  </a:t>
+            </a:r>
+            <a:r>
+              <a:rPr b="1"/>
+              <a:t>オウンリー ジ オブジェクト</a:t>
+            </a:r>
+            <a:r>
+              <a:rPr b="0"/>
+              <a:t> イズ ゴーン。 アンド イット </a:t>
+            </a:r>
+            <a:r>
+              <a:rPr b="1"/>
+              <a:t>リフューズィズ</a:t>
+            </a:r>
+            <a:r>
+              <a:rPr b="0"/>
+              <a:t>。</a:t>
+            </a:r>
+          </a:p>
+          <a:p>
+            <a:r>
+              <a:rPr b="0"/>
+              <a:t/>
+            </a:r>
+          </a:p>
+          <a:p>
+            <a:r>
+              <a:rPr b="0"/>
+              <a:t>── STEP 4b · 0:40 · 同じ欄に、違うパスワード — エントリが消える</a:t>
+            </a:r>
+          </a:p>
+          <a:p>
+            <a:r>
+              <a:rPr b="0"/>
+              <a:t>DO: Step 3・4 とまったく同じ Retrieve 画面。 消したい Face の物体をかざす → パスワード欄に、そのアクセスパスワードではなく Clearing password（Store の Advanced security options で設定した2つめ）を入力 → Open protected file</a:t>
+            </a:r>
+          </a:p>
+          <a:p>
+            <a:r>
+              <a:rPr b="0"/>
+              <a:t>“Now watch this screen — because nothing on it is going to change.</a:t>
+            </a:r>
+          </a:p>
+          <a:p>
+            <a:r>
+              <a:rPr b="0"/>
+              <a:t>  ナウ </a:t>
+            </a:r>
+            <a:r>
+              <a:rPr b="1"/>
+              <a:t>ウォッチ ディス スクリーン</a:t>
+            </a:r>
+            <a:r>
+              <a:rPr b="0"/>
+              <a:t> — ビコズ </a:t>
+            </a:r>
+            <a:r>
+              <a:rPr b="1"/>
+              <a:t>ナッシング</a:t>
+            </a:r>
+            <a:r>
+              <a:rPr b="0"/>
+              <a:t> オン イット イズ ゴウイング トゥ チェインジ。</a:t>
+            </a:r>
+          </a:p>
+          <a:p>
+            <a:r>
+              <a:rPr b="0"/>
+              <a:t>Same tab. Same object. Same field. Same button.</a:t>
+            </a:r>
+          </a:p>
+          <a:p>
+            <a:r>
+              <a:rPr b="0"/>
+              <a:t>  セイム タブ。 セイム オブジェクト。 セイム フィールド。 セイム バトゥン。</a:t>
+            </a:r>
+          </a:p>
+          <a:p>
+            <a:r>
+              <a:rPr b="0"/>
+              <a:t>The only thing I do differently… is type a different password.</a:t>
+            </a:r>
+          </a:p>
+          <a:p>
+            <a:r>
+              <a:rPr b="0"/>
+              <a:t>  ジ オウンリー シング アイ ドゥー ディファレントリー… イズ タイプ ア </a:t>
+            </a:r>
+            <a:r>
+              <a:rPr b="1"/>
+              <a:t>ディファレント パスワード</a:t>
+            </a:r>
+            <a:r>
+              <a:rPr b="0"/>
+              <a:t>。</a:t>
+            </a:r>
+          </a:p>
+          <a:p>
+            <a:r>
+              <a:rPr b="0"/>
+              <a:t>And it says what it says when you mistype. No valid entry found.</a:t>
+            </a:r>
+          </a:p>
+          <a:p>
+            <a:r>
+              <a:rPr b="0"/>
+              <a:t>  アンド イット セズ ワット イット セズ ウェン ユー </a:t>
+            </a:r>
+            <a:r>
+              <a:rPr b="1"/>
+              <a:t>ミスタイプ</a:t>
+            </a:r>
+            <a:r>
+              <a:rPr b="0"/>
+              <a:t>。 ノウ ヴァリッド エントリー ファウンド。</a:t>
+            </a:r>
+          </a:p>
+          <a:p>
+            <a:r>
+              <a:rPr b="0"/>
+              <a:t>Except that entry is not locked.</a:t>
+            </a:r>
+          </a:p>
+          <a:p>
+            <a:r>
+              <a:rPr b="0"/>
+              <a:t>  イクセプト ザット エントリー イズ </a:t>
+            </a:r>
+            <a:r>
+              <a:rPr b="1"/>
+              <a:t>ナット ロックト</a:t>
+            </a:r>
+            <a:r>
+              <a:rPr b="0"/>
+              <a:t>。</a:t>
+            </a:r>
+          </a:p>
+          <a:p>
+            <a:r>
+              <a:rPr b="0"/>
+              <a:t>It is gone.</a:t>
+            </a:r>
+          </a:p>
+          <a:p>
+            <a:r>
+              <a:rPr b="0"/>
+              <a:t>  イット イズ </a:t>
+            </a:r>
+            <a:r>
+              <a:rPr b="1"/>
+              <a:t>ゴーン</a:t>
+            </a:r>
+            <a:r>
+              <a:rPr b="0"/>
+              <a:t>。</a:t>
+            </a:r>
+          </a:p>
+          <a:p>
+            <a:r>
+              <a:rPr b="0"/>
+              <a:t>The other one is untouched. And I can still open it.</a:t>
+            </a:r>
+          </a:p>
+          <a:p>
+            <a:r>
+              <a:rPr b="0"/>
+              <a:t>  ジ アザー ワン イズ </a:t>
+            </a:r>
+            <a:r>
+              <a:rPr b="1"/>
+              <a:t>アンタッチト</a:t>
+            </a:r>
+            <a:r>
+              <a:rPr b="0"/>
+              <a:t>。 アンド アイ キャン </a:t>
+            </a:r>
+            <a:r>
+              <a:rPr b="1"/>
+              <a:t>スティル オウプン</a:t>
+            </a:r>
+            <a:r>
+              <a:rPr b="0"/>
+              <a:t> イット。</a:t>
+            </a:r>
+          </a:p>
+          <a:p>
+            <a:r>
+              <a:rPr b="0"/>
+              <a:t>That’s my answer to ‘they’ll just make you type the password.’</a:t>
+            </a:r>
+          </a:p>
+          <a:p>
+            <a:r>
+              <a:rPr b="0"/>
+              <a:t>  ザッツ マイ </a:t>
+            </a:r>
+            <a:r>
+              <a:rPr b="1"/>
+              <a:t>アンサー</a:t>
+            </a:r>
+            <a:r>
+              <a:rPr b="0"/>
+              <a:t> トゥ 「ゼイル ジャスト メイク ユー タイプ ザ パスワード」。</a:t>
+            </a:r>
+          </a:p>
+          <a:p>
+            <a:r>
+              <a:rPr b="0"/>
+              <a:t>The password they can compel is not the only one there is.”</a:t>
+            </a:r>
+          </a:p>
+          <a:p>
+            <a:r>
+              <a:rPr b="0"/>
+              <a:t>  ザ パスワード ゼイ キャン </a:t>
+            </a:r>
+            <a:r>
+              <a:rPr b="1"/>
+              <a:t>コンペル</a:t>
+            </a:r>
+            <a:r>
+              <a:rPr b="0"/>
+              <a:t> イズ ナット ジ </a:t>
+            </a:r>
+            <a:r>
+              <a:rPr b="1"/>
+              <a:t>オウンリー ワン</a:t>
+            </a:r>
+            <a:r>
+              <a:rPr b="0"/>
+              <a:t> ゼア イズ。</a:t>
+            </a:r>
+          </a:p>
+          <a:p>
+            <a:r>
+              <a:rPr b="0"/>
+              <a:t>SPEAK（間を置いて）</a:t>
+            </a:r>
+          </a:p>
+          <a:p>
+            <a:r>
+              <a:rPr b="0"/>
+              <a:t>“Nothing on the screen changed. The entry is gone.”</a:t>
+            </a:r>
+          </a:p>
+          <a:p>
+            <a:r>
+              <a:rPr b="0"/>
+              <a:t>  </a:t>
+            </a:r>
+            <a:r>
+              <a:rPr b="1"/>
+              <a:t>ナッシング</a:t>
+            </a:r>
+            <a:r>
+              <a:rPr b="0"/>
+              <a:t> オン ザ スクリーン チェインジド。 ジ エントリー イズ </a:t>
+            </a:r>
+            <a:r>
+              <a:rPr b="1"/>
+              <a:t>ゴーン</a:t>
+            </a:r>
+            <a:r>
+              <a:rPr b="0"/>
+              <a:t>。</a:t>
+            </a:r>
+          </a:p>
+          <a:p>
+            <a:r>
+              <a:rPr b="0"/>
+              <a:t/>
+            </a:r>
+          </a:p>
+          <a:p>
+            <a:r>
+              <a:rPr b="0"/>
+              <a:t>── STEP 5 · 0:50 · Audit — free space, and what it won’t judge</a:t>
+            </a:r>
+          </a:p>
+          <a:p>
+            <a:r>
+              <a:rPr b="0"/>
+              <a:t>DO: ここでプロジェクタを TUI に戻す（切替②・往復の折り返し。以降は切替なし）。 e Expert → a Audit。Free Space Filler セクションを指す（戻るのは Esc）。a は #169 の非活性化対象から意図的に外してある — この Step でキー1つで直接使うため</a:t>
+            </a:r>
+          </a:p>
+          <a:p>
+            <a:r>
+              <a:rPr b="0"/>
+              <a:t>“Audit reports per face.</a:t>
+            </a:r>
+          </a:p>
+          <a:p>
+            <a:r>
+              <a:rPr b="0"/>
+              <a:t>  </a:t>
+            </a:r>
+            <a:r>
+              <a:rPr b="1"/>
+              <a:t>オーディット</a:t>
+            </a:r>
+            <a:r>
+              <a:rPr b="0"/>
+              <a:t> リポーツ パー </a:t>
+            </a:r>
+            <a:r>
+              <a:rPr b="1"/>
+              <a:t>フェイス</a:t>
+            </a:r>
+            <a:r>
+              <a:rPr b="0"/>
+              <a:t>。</a:t>
+            </a:r>
+          </a:p>
+          <a:p>
+            <a:r>
+              <a:rPr b="0"/>
+              <a:t>Now notice what it does not claim.</a:t>
+            </a:r>
+          </a:p>
+          <a:p>
+            <a:r>
+              <a:rPr b="0"/>
+              <a:t>  ナウ ノウティス ワット イット ダズ </a:t>
+            </a:r>
+            <a:r>
+              <a:rPr b="1"/>
+              <a:t>ナット</a:t>
+            </a:r>
+            <a:r>
+              <a:rPr b="0"/>
+              <a:t> クレイム。</a:t>
+            </a:r>
+          </a:p>
+          <a:p>
+            <a:r>
+              <a:rPr b="0"/>
+              <a:t>It doesn’t tell me my cover story is convincing.</a:t>
+            </a:r>
+          </a:p>
+          <a:p>
+            <a:r>
+              <a:rPr b="0"/>
+              <a:t>  イット ダズント テル ミー マイ カヴァー ストーリー イズ </a:t>
+            </a:r>
+            <a:r>
+              <a:rPr b="1"/>
+              <a:t>コンヴィンシング</a:t>
+            </a:r>
+            <a:r>
+              <a:rPr b="0"/>
+              <a:t>。</a:t>
+            </a:r>
+          </a:p>
+          <a:p>
+            <a:r>
+              <a:rPr b="0"/>
+              <a:t>The file I would hand over is one I wrote, and stored, myself.</a:t>
+            </a:r>
+          </a:p>
+          <a:p>
+            <a:r>
+              <a:rPr b="0"/>
+              <a:t>  ザ ファイル アイ ウド ハンド オウヴァー イズ ワン アイ </a:t>
+            </a:r>
+            <a:r>
+              <a:rPr b="1"/>
+              <a:t>ロウト</a:t>
+            </a:r>
+            <a:r>
+              <a:rPr b="0"/>
+              <a:t>、 アンド </a:t>
+            </a:r>
+            <a:r>
+              <a:rPr b="1"/>
+              <a:t>ストード</a:t>
+            </a:r>
+            <a:r>
+              <a:rPr b="0"/>
+              <a:t>、 マイセルフ。</a:t>
+            </a:r>
+          </a:p>
+          <a:p>
+            <a:r>
+              <a:rPr b="0"/>
+              <a:t>The tool can’t judge whether it’s believable. And it doesn’t pretend to.</a:t>
+            </a:r>
+          </a:p>
+          <a:p>
+            <a:r>
+              <a:rPr b="0"/>
+              <a:t>  ザ ツール キャント </a:t>
+            </a:r>
+            <a:r>
+              <a:rPr b="1"/>
+              <a:t>ジャッジ</a:t>
+            </a:r>
+            <a:r>
+              <a:rPr b="0"/>
+              <a:t> ウェザー イッツ ビリーヴァブル。 アンド イット ダズント </a:t>
+            </a:r>
+            <a:r>
+              <a:rPr b="1"/>
+              <a:t>プリテンド</a:t>
+            </a:r>
+            <a:r>
+              <a:rPr b="0"/>
+              <a:t> トゥ。</a:t>
+            </a:r>
+          </a:p>
+          <a:p>
+            <a:r>
+              <a:rPr b="0"/>
+              <a:t>All it reports here is how much free space is filled —</a:t>
+            </a:r>
+          </a:p>
+          <a:p>
+            <a:r>
+              <a:rPr b="0"/>
+              <a:t>  オール イット リポーツ ヒア イズ ハウ マッチ </a:t>
+            </a:r>
+            <a:r>
+              <a:rPr b="1"/>
+              <a:t>フリー スペイス</a:t>
+            </a:r>
+            <a:r>
+              <a:rPr b="0"/>
+              <a:t> イズ フィルド —</a:t>
+            </a:r>
+          </a:p>
+          <a:p>
+            <a:r>
+              <a:rPr b="0"/>
+              <a:t>so an otherwise empty container doesn’t read as empty.</a:t>
+            </a:r>
+          </a:p>
+          <a:p>
+            <a:r>
+              <a:rPr b="0"/>
+              <a:t>  ソウ アン アザワイズ エンプティ コンテナ ダズント リード アズ </a:t>
+            </a:r>
+            <a:r>
+              <a:rPr b="1"/>
+              <a:t>エンプティ</a:t>
+            </a:r>
+            <a:r>
+              <a:rPr b="0"/>
+              <a:t>。</a:t>
+            </a:r>
+          </a:p>
+          <a:p>
+            <a:r>
+              <a:rPr b="0"/>
+              <a:t>Judging the cover story is the operator’s job.</a:t>
+            </a:r>
+          </a:p>
+          <a:p>
+            <a:r>
+              <a:rPr b="0"/>
+              <a:t>  ジャッジング ザ カヴァー ストーリー イズ ジ </a:t>
+            </a:r>
+            <a:r>
+              <a:rPr b="1"/>
+              <a:t>オペレイターズ ジョブ</a:t>
+            </a:r>
+            <a:r>
+              <a:rPr b="0"/>
+              <a:t>。</a:t>
+            </a:r>
+          </a:p>
+          <a:p>
+            <a:r>
+              <a:rPr b="0"/>
+              <a:t>And the tool is honest about that boundary.”</a:t>
+            </a:r>
+          </a:p>
+          <a:p>
+            <a:r>
+              <a:rPr b="0"/>
+              <a:t>  アンド ザ ツール イズ </a:t>
+            </a:r>
+            <a:r>
+              <a:rPr b="1"/>
+              <a:t>オネスト</a:t>
+            </a:r>
+            <a:r>
+              <a:rPr b="0"/>
+              <a:t> アバウト ザット バウンダリー。</a:t>
+            </a:r>
+          </a:p>
+          <a:p>
+            <a:r>
+              <a:rPr b="0"/>
+              <a:t>SPEAK（間を置いて）</a:t>
+            </a:r>
+          </a:p>
+          <a:p>
+            <a:r>
+              <a:rPr b="0"/>
+              <a:t>“It reports what it can measure. It refuses to score what it can’t.”</a:t>
+            </a:r>
+          </a:p>
+          <a:p>
+            <a:r>
+              <a:rPr b="0"/>
+              <a:t>  イット リポーツ ワット イット キャン </a:t>
+            </a:r>
+            <a:r>
+              <a:rPr b="1"/>
+              <a:t>メジャー</a:t>
+            </a:r>
+            <a:r>
+              <a:rPr b="0"/>
+              <a:t>。 イット リフューズィズ トゥ </a:t>
+            </a:r>
+            <a:r>
+              <a:rPr b="1"/>
+              <a:t>スコア</a:t>
+            </a:r>
+            <a:r>
+              <a:rPr b="0"/>
+              <a:t> ワット イット キャント。</a:t>
+            </a:r>
+          </a:p>
+          <a:p>
+            <a:r>
+              <a:rPr b="0"/>
+              <a:t/>
+            </a:r>
+          </a:p>
+          <a:p>
+            <a:r>
+              <a:rPr b="0"/>
+              <a:t>── STEP 6 · 1:20 · Silent Standby — Disclose</a:t>
+            </a:r>
+          </a:p>
+          <a:p>
+            <a:r>
+              <a:rPr b="0"/>
+              <a:t>DO: Ctrl+S を押下。復帰は Ctrl+R または Esc。フッタに出ないので指で覚えておく</a:t>
+            </a:r>
+          </a:p>
+          <a:p>
+            <a:r>
+              <a:rPr b="0"/>
+              <a:t>“Now — the moment it’s built for.</a:t>
+            </a:r>
+          </a:p>
+          <a:p>
+            <a:r>
+              <a:rPr b="0"/>
+              <a:t>  ナウ — ザ </a:t>
+            </a:r>
+            <a:r>
+              <a:rPr b="1"/>
+              <a:t>モウメント</a:t>
+            </a:r>
+            <a:r>
+              <a:rPr b="0"/>
+              <a:t> イッツ ビルト フォー。</a:t>
+            </a:r>
+          </a:p>
+          <a:p>
+            <a:r>
+              <a:rPr b="0"/>
+              <a:t>One hotkey. Silent Standby.</a:t>
+            </a:r>
+          </a:p>
+          <a:p>
+            <a:r>
+              <a:rPr b="0"/>
+              <a:t>  </a:t>
+            </a:r>
+            <a:r>
+              <a:rPr b="1"/>
+              <a:t>ワン ホットキー</a:t>
+            </a:r>
+            <a:r>
+              <a:rPr b="0"/>
+              <a:t>。 </a:t>
+            </a:r>
+            <a:r>
+              <a:rPr b="1"/>
+              <a:t>サイレント スタンドバイ</a:t>
+            </a:r>
+            <a:r>
+              <a:rPr b="0"/>
+              <a:t>。</a:t>
+            </a:r>
+          </a:p>
+          <a:p>
+            <a:r>
+              <a:rPr b="0"/>
+              <a:t>The sensitive surface drops away.</a:t>
+            </a:r>
+          </a:p>
+          <a:p>
+            <a:r>
+              <a:rPr b="0"/>
+              <a:t>  ザ センシティヴ サーフィス </a:t>
+            </a:r>
+            <a:r>
+              <a:rPr b="1"/>
+              <a:t>ドロップス アウェイ</a:t>
+            </a:r>
+            <a:r>
+              <a:rPr b="0"/>
+              <a:t>。</a:t>
+            </a:r>
+          </a:p>
+          <a:p>
+            <a:r>
+              <a:rPr b="0"/>
+              <a:t>And it’s not only this screen. The web interface goes down with it.</a:t>
+            </a:r>
+          </a:p>
+          <a:p>
+            <a:r>
+              <a:rPr b="0"/>
+              <a:t>  アンド イッツ </a:t>
+            </a:r>
+            <a:r>
+              <a:rPr b="1"/>
+              <a:t>ナット オウンリー</a:t>
+            </a:r>
+            <a:r>
+              <a:rPr b="0"/>
+              <a:t> ディス スクリーン。 ザ ウェブ インターフェイス </a:t>
+            </a:r>
+            <a:r>
+              <a:rPr b="1"/>
+              <a:t>ゴウズ ダウン</a:t>
+            </a:r>
+            <a:r>
+              <a:rPr b="0"/>
+              <a:t> ウィズ イット。</a:t>
+            </a:r>
+          </a:p>
+          <a:p>
+            <a:r>
+              <a:rPr b="0"/>
+              <a:t>A laptop tethered to this device loses access at the same instant —</a:t>
+            </a:r>
+          </a:p>
+          <a:p>
+            <a:r>
+              <a:rPr b="0"/>
+              <a:t>  ア ラップトップ テザード トゥ ディス デバイス </a:t>
+            </a:r>
+            <a:r>
+              <a:rPr b="1"/>
+              <a:t>ルーズィズ アクセス</a:t>
+            </a:r>
+            <a:r>
+              <a:rPr b="0"/>
+              <a:t> アット ザ セイム インスタント —</a:t>
+            </a:r>
+          </a:p>
+          <a:p>
+            <a:r>
+              <a:rPr b="0"/>
+              <a:t>including the two browser tabs I just used.</a:t>
+            </a:r>
+          </a:p>
+          <a:p>
+            <a:r>
+              <a:rPr b="0"/>
+              <a:t>  インクルーディング ザ </a:t>
+            </a:r>
+            <a:r>
+              <a:rPr b="1"/>
+              <a:t>トゥー ブラウザ タブズ</a:t>
+            </a:r>
+            <a:r>
+              <a:rPr b="0"/>
+              <a:t> アイ ジャスト ユーズド。</a:t>
+            </a:r>
+          </a:p>
+          <a:p>
+            <a:r>
+              <a:rPr b="0"/>
+              <a:t>Coming back needs re-authentication.</a:t>
+            </a:r>
+          </a:p>
+          <a:p>
+            <a:r>
+              <a:rPr b="0"/>
+              <a:t>  カミング バック ニーズ </a:t>
+            </a:r>
+            <a:r>
+              <a:rPr b="1"/>
+              <a:t>リーオーセンティケイション</a:t>
+            </a:r>
+            <a:r>
+              <a:rPr b="0"/>
+              <a:t>。</a:t>
+            </a:r>
+          </a:p>
+          <a:p>
+            <a:r>
+              <a:rPr b="0"/>
+              <a:t>I’m not hiding from forensics.</a:t>
+            </a:r>
+          </a:p>
+          <a:p>
+            <a:r>
+              <a:rPr b="0"/>
+              <a:t>  アイム </a:t>
+            </a:r>
+            <a:r>
+              <a:rPr b="1"/>
+              <a:t>ナット ハイディング</a:t>
+            </a:r>
+            <a:r>
+              <a:rPr b="0"/>
+              <a:t> フロム フォレンシックス。</a:t>
+            </a:r>
+          </a:p>
+          <a:p>
+            <a:r>
+              <a:rPr b="0"/>
+              <a:t>I’m buying time, and uncertainty.”</a:t>
+            </a:r>
+          </a:p>
+          <a:p>
+            <a:r>
+              <a:rPr b="0"/>
+              <a:t>  アイム </a:t>
+            </a:r>
+            <a:r>
+              <a:rPr b="1"/>
+              <a:t>バイイング タイム</a:t>
+            </a:r>
+            <a:r>
+              <a:rPr b="0"/>
+              <a:t>、 アンド </a:t>
+            </a:r>
+            <a:r>
+              <a:rPr b="1"/>
+              <a:t>アンサートゥンティ</a:t>
+            </a:r>
+            <a:r>
+              <a:rPr b="0"/>
+              <a:t>。</a:t>
+            </a:r>
+          </a:p>
+          <a:p>
+            <a:r>
+              <a:rPr b="0"/>
+              <a:t>SPEAK（間を置いて）</a:t>
+            </a:r>
+          </a:p>
+          <a:p>
+            <a:r>
+              <a:rPr b="0"/>
+              <a:t>“One key. And the second surface goes with it.”</a:t>
+            </a:r>
+          </a:p>
+          <a:p>
+            <a:r>
+              <a:rPr b="0"/>
+              <a:t>  </a:t>
+            </a:r>
+            <a:r>
+              <a:rPr b="1"/>
+              <a:t>ワン キー</a:t>
+            </a:r>
+            <a:r>
+              <a:rPr b="0"/>
+              <a:t>。 アンド ザ セカンド サーフィス </a:t>
+            </a:r>
+            <a:r>
+              <a:rPr b="1"/>
+              <a:t>ゴウズ ウィズ イット</a:t>
+            </a:r>
+            <a:r>
+              <a:rPr b="0"/>
+              <a:t>。</a:t>
+            </a:r>
+          </a:p>
+          <a:p>
+            <a:r>
+              <a:rPr b="0"/>
+              <a:t/>
+            </a:r>
+          </a:p>
+          <a:p>
+            <a:r>
+              <a:rPr b="0"/>
+              <a:t>── STEP 7 · 0:10 · Wrap</a:t>
+            </a:r>
+          </a:p>
+          <a:p>
+            <a:r>
+              <a:rPr b="0"/>
+              <a:t>DO: Esc で Simple Operator へ戻す → プロジェクタ入力をスライドへ復帰（Slide 25）</a:t>
+            </a:r>
+          </a:p>
+          <a:p>
+            <a:r>
+              <a:rPr b="0"/>
+              <a:t>“That’s Prepare, Bind, Operate, Disclose. On real hardware.</a:t>
+            </a:r>
+          </a:p>
+          <a:p>
+            <a:r>
+              <a:rPr b="0"/>
+              <a:t>  ザッツ </a:t>
+            </a:r>
+            <a:r>
+              <a:rPr b="1"/>
+              <a:t>プリペア</a:t>
+            </a:r>
+            <a:r>
+              <a:rPr b="0"/>
+              <a:t>、 </a:t>
+            </a:r>
+            <a:r>
+              <a:rPr b="1"/>
+              <a:t>バインド</a:t>
+            </a:r>
+            <a:r>
+              <a:rPr b="0"/>
+              <a:t>、 </a:t>
+            </a:r>
+            <a:r>
+              <a:rPr b="1"/>
+              <a:t>オペレイト</a:t>
+            </a:r>
+            <a:r>
+              <a:rPr b="0"/>
+              <a:t>、 </a:t>
+            </a:r>
+            <a:r>
+              <a:rPr b="1"/>
+              <a:t>ディスクロウズ</a:t>
+            </a:r>
+            <a:r>
+              <a:rPr b="0"/>
+              <a:t>。 オン </a:t>
+            </a:r>
+            <a:r>
+              <a:rPr b="1"/>
+              <a:t>リアル ハードウェア</a:t>
+            </a:r>
+            <a:r>
+              <a:rPr b="0"/>
+              <a:t>。</a:t>
+            </a:r>
+          </a:p>
+          <a:p>
+            <a:r>
+              <a:rPr b="0"/>
+              <a:t>Come and try it at the table.”</a:t>
+            </a:r>
+          </a:p>
+          <a:p>
+            <a:r>
+              <a:rPr b="0"/>
+              <a:t>  </a:t>
+            </a:r>
+            <a:r>
+              <a:rPr b="1"/>
+              <a:t>カム アンド トライ イット</a:t>
+            </a:r>
+            <a:r>
+              <a:rPr b="0"/>
+              <a:t> アット ザ テイブル。</a:t>
+            </a:r>
+          </a:p>
+          <a:p>
+            <a:r>
+              <a:rPr b="0"/>
+              <a:t/>
+            </a:r>
+          </a:p>
+          <a:p>
+            <a:r>
+              <a:rPr b="0"/>
+              <a:t>── フォールバック（録画に切り替えたとき）</a:t>
+            </a:r>
+          </a:p>
+          <a:p>
+            <a:r>
+              <a:rPr b="0"/>
+              <a:t>“The design points stand either way.”</a:t>
+            </a:r>
+          </a:p>
+          <a:p>
+            <a:r>
+              <a:rPr b="0"/>
+              <a:t>  ザ デザイン ポインツ </a:t>
+            </a:r>
+            <a:r>
+              <a:rPr b="1"/>
+              <a:t>スタンド</a:t>
+            </a:r>
+            <a:r>
+              <a:rPr b="0"/>
+              <a:t> イーザー ウェイ。</a:t>
+            </a:r>
+          </a:p>
+          <a:p>
+            <a:r>
+              <a:rPr b="0"/>
+              <a:t/>
+            </a:r>
+          </a:p>
+          <a:p>
+            <a:r>
+              <a:rPr b="0"/>
+              <a:t>JA: Step 3→4（物体だけ外す→拒否→戻して成功）と Step 6（Standby）だけは何があっても実機で見せる。26:00 到達で Step 4b と Step 5 Audit を削る。個別ステップは最大15秒で見切り、止まらず前進。</a:t>
             </a:r>
           </a:p>
         </p:txBody>
@@ -2134,17 +7228,178 @@
           <a:lstStyle/>
           <a:p>
             <a:r>
-              <a:t>[26:20 / 0:30] QUICK START</a:t>
-            </a:r>
-          </a:p>
-          <a:p>
-            <a:r>
-              <a:t>EN: "Want to try it? Clone the repo, cd in, run ./phasmid — first run sets up a venv and opens the console. Research software, Apache-2.0. Evaluate it locally, in field-test conditions — not as production protection."</a:t>
-            </a:r>
-          </a:p>
-          <a:p>
-            <a:r>
-              <a:t>JA: リポジトリURLを指す。**ステッカーは作成していないので言及しない。**卓上デモ（実機を触ってもらう）へ繋ぐ。</a:t>
+              <a:rPr b="0"/>
+              <a:t>[26:20 / 0:30] QUICK START — 発話 0:20</a:t>
+            </a:r>
+          </a:p>
+          <a:p>
+            <a:r>
+              <a:rPr b="0"/>
+              <a:t/>
+            </a:r>
+          </a:p>
+          <a:p>
+            <a:r>
+              <a:rPr b="0"/>
+              <a:t>“Want to try it?</a:t>
+            </a:r>
+          </a:p>
+          <a:p>
+            <a:r>
+              <a:rPr b="0"/>
+              <a:t>  </a:t>
+            </a:r>
+            <a:r>
+              <a:rPr b="1"/>
+              <a:t>ワナ トライ イット</a:t>
+            </a:r>
+            <a:r>
+              <a:rPr b="0"/>
+              <a:t>?</a:t>
+            </a:r>
+          </a:p>
+          <a:p>
+            <a:r>
+              <a:rPr b="0"/>
+              <a:t>Clone the repo. Change into it. Run ./phasmid</a:t>
+            </a:r>
+          </a:p>
+          <a:p>
+            <a:r>
+              <a:rPr b="0"/>
+              <a:t>  </a:t>
+            </a:r>
+            <a:r>
+              <a:rPr b="1"/>
+              <a:t>クロウン</a:t>
+            </a:r>
+            <a:r>
+              <a:rPr b="0"/>
+              <a:t> ザ リーポウ。 </a:t>
+            </a:r>
+            <a:r>
+              <a:rPr b="1"/>
+              <a:t>チェインジ</a:t>
+            </a:r>
+            <a:r>
+              <a:rPr b="0"/>
+              <a:t> イントゥ イット。 </a:t>
+            </a:r>
+            <a:r>
+              <a:rPr b="1"/>
+              <a:t>ラン</a:t>
+            </a:r>
+            <a:r>
+              <a:rPr b="0"/>
+              <a:t> ドット スラッシュ ファズミッド。</a:t>
+            </a:r>
+          </a:p>
+          <a:p>
+            <a:r>
+              <a:rPr b="0"/>
+              <a:t>The first run sets up a virtual environment and opens the console.</a:t>
+            </a:r>
+          </a:p>
+          <a:p>
+            <a:r>
+              <a:rPr b="0"/>
+              <a:t>  ザ ファースト ラン セッツ アップ ア </a:t>
+            </a:r>
+            <a:r>
+              <a:rPr b="1"/>
+              <a:t>ヴァーチュアル インヴァイロンメント</a:t>
+            </a:r>
+            <a:r>
+              <a:rPr b="0"/>
+              <a:t> アンド オウプンズ ザ コンソウル。</a:t>
+            </a:r>
+          </a:p>
+          <a:p>
+            <a:r>
+              <a:rPr b="0"/>
+              <a:t>Research software. Apache 2.0.</a:t>
+            </a:r>
+          </a:p>
+          <a:p>
+            <a:r>
+              <a:rPr b="0"/>
+              <a:t>  </a:t>
+            </a:r>
+            <a:r>
+              <a:rPr b="1"/>
+              <a:t>リサーチ ソフトウェア</a:t>
+            </a:r>
+            <a:r>
+              <a:rPr b="0"/>
+              <a:t>。 </a:t>
+            </a:r>
+            <a:r>
+              <a:rPr b="1"/>
+              <a:t>アパッチ トゥー ポイント ズィーロウ</a:t>
+            </a:r>
+            <a:r>
+              <a:rPr b="0"/>
+              <a:t>。</a:t>
+            </a:r>
+          </a:p>
+          <a:p>
+            <a:r>
+              <a:rPr b="0"/>
+              <a:t>Evaluate it locally, in field-test conditions.</a:t>
+            </a:r>
+          </a:p>
+          <a:p>
+            <a:r>
+              <a:rPr b="0"/>
+              <a:t>  イヴァリュエイト イット </a:t>
+            </a:r>
+            <a:r>
+              <a:rPr b="1"/>
+              <a:t>ローカリー</a:t>
+            </a:r>
+            <a:r>
+              <a:rPr b="0"/>
+              <a:t>、 イン </a:t>
+            </a:r>
+            <a:r>
+              <a:rPr b="1"/>
+              <a:t>フィールドテスト コンディションズ</a:t>
+            </a:r>
+            <a:r>
+              <a:rPr b="0"/>
+              <a:t>。</a:t>
+            </a:r>
+          </a:p>
+          <a:p>
+            <a:r>
+              <a:rPr b="0"/>
+              <a:t>Not as production protection.”</a:t>
+            </a:r>
+          </a:p>
+          <a:p>
+            <a:r>
+              <a:rPr b="0"/>
+              <a:t>  </a:t>
+            </a:r>
+            <a:r>
+              <a:rPr b="1"/>
+              <a:t>ナット</a:t>
+            </a:r>
+            <a:r>
+              <a:rPr b="0"/>
+              <a:t> アズ プロダクション プロテクション。</a:t>
+            </a:r>
+          </a:p>
+          <a:p>
+            <a:r>
+              <a:rPr b="0"/>
+              <a:t/>
+            </a:r>
+          </a:p>
+          <a:p>
+            <a:r>
+              <a:rPr b="0"/>
+              <a:t>JA: リポジトリ URL を指す。ステッカーは未作成なので言及しない。卓上デモへ繋ぐ。</a:t>
             </a:r>
           </a:p>
         </p:txBody>
@@ -2230,17 +7485,178 @@
           <a:lstStyle/>
           <a:p>
             <a:r>
-              <a:t>[26:50 / 0:40] CLOSING → Q&amp;A</a:t>
-            </a:r>
-          </a:p>
-          <a:p>
-            <a:r>
-              <a:t>EN: "That's Phasmid — local-only, coercion-aware storage, honest limits included. Code, threat model, and architecture are all on GitHub at 01rabbit. The device is on the table — come try it, and please, come break it. I've got time for questions."</a:t>
-            </a:r>
-          </a:p>
-          <a:p>
-            <a:r>
-              <a:t>JA: 約27分で着地。残り約18分をQ&amp;A・卓上デモ・交流に。**ステッカーは未作成 — 実機体験への導線に差し替え済み。**45分で必ず終了。</a:t>
+              <a:rPr b="0"/>
+              <a:t>[26:50 / 0:40] CLOSING → Q&amp;A — 発話 0:25</a:t>
+            </a:r>
+          </a:p>
+          <a:p>
+            <a:r>
+              <a:rPr b="0"/>
+              <a:t/>
+            </a:r>
+          </a:p>
+          <a:p>
+            <a:r>
+              <a:rPr b="0"/>
+              <a:t>“That’s Phasmid.</a:t>
+            </a:r>
+          </a:p>
+          <a:p>
+            <a:r>
+              <a:rPr b="0"/>
+              <a:t>  ザッツ </a:t>
+            </a:r>
+            <a:r>
+              <a:rPr b="1"/>
+              <a:t>ファズミッド</a:t>
+            </a:r>
+            <a:r>
+              <a:rPr b="0"/>
+              <a:t>。</a:t>
+            </a:r>
+          </a:p>
+          <a:p>
+            <a:r>
+              <a:rPr b="0"/>
+              <a:t>Local-only. Coercion-aware. Honest limits included.</a:t>
+            </a:r>
+          </a:p>
+          <a:p>
+            <a:r>
+              <a:rPr b="0"/>
+              <a:t>  </a:t>
+            </a:r>
+            <a:r>
+              <a:rPr b="1"/>
+              <a:t>ローカル オウンリー</a:t>
+            </a:r>
+            <a:r>
+              <a:rPr b="0"/>
+              <a:t>。 </a:t>
+            </a:r>
+            <a:r>
+              <a:rPr b="1"/>
+              <a:t>コアージョン アウェア</a:t>
+            </a:r>
+            <a:r>
+              <a:rPr b="0"/>
+              <a:t>。 </a:t>
+            </a:r>
+            <a:r>
+              <a:rPr b="1"/>
+              <a:t>オネスト リミッツ</a:t>
+            </a:r>
+            <a:r>
+              <a:rPr b="0"/>
+              <a:t> インクルーディッド。</a:t>
+            </a:r>
+          </a:p>
+          <a:p>
+            <a:r>
+              <a:rPr b="0"/>
+              <a:t>The code, the threat model, and the architecture are all on GitHub, at 01rabbit.</a:t>
+            </a:r>
+          </a:p>
+          <a:p>
+            <a:r>
+              <a:rPr b="0"/>
+              <a:t>  ザ コウド、 ザ スレット モデル、 アンド ジ アーキテクチャー アー オール オン </a:t>
+            </a:r>
+            <a:r>
+              <a:rPr b="1"/>
+              <a:t>ギットハブ</a:t>
+            </a:r>
+            <a:r>
+              <a:rPr b="0"/>
+              <a:t>、 アット </a:t>
+            </a:r>
+            <a:r>
+              <a:rPr b="1"/>
+              <a:t>ゼロワン ラビット</a:t>
+            </a:r>
+            <a:r>
+              <a:rPr b="0"/>
+              <a:t>。</a:t>
+            </a:r>
+          </a:p>
+          <a:p>
+            <a:r>
+              <a:rPr b="0"/>
+              <a:t>The device is right here on the table.</a:t>
+            </a:r>
+          </a:p>
+          <a:p>
+            <a:r>
+              <a:rPr b="0"/>
+              <a:t>  ザ デバイス イズ </a:t>
+            </a:r>
+            <a:r>
+              <a:rPr b="1"/>
+              <a:t>ゥライト ヒア</a:t>
+            </a:r>
+            <a:r>
+              <a:rPr b="0"/>
+              <a:t> オン ザ テイブル。</a:t>
+            </a:r>
+          </a:p>
+          <a:p>
+            <a:r>
+              <a:rPr b="0"/>
+              <a:t>Come and try it. And please — come and break it.</a:t>
+            </a:r>
+          </a:p>
+          <a:p>
+            <a:r>
+              <a:rPr b="0"/>
+              <a:t>  </a:t>
+            </a:r>
+            <a:r>
+              <a:rPr b="1"/>
+              <a:t>カム アンド トライ イット</a:t>
+            </a:r>
+            <a:r>
+              <a:rPr b="0"/>
+              <a:t>。 アンド プリーズ — </a:t>
+            </a:r>
+            <a:r>
+              <a:rPr b="1"/>
+              <a:t>カム アンド ブレイク イット</a:t>
+            </a:r>
+            <a:r>
+              <a:rPr b="0"/>
+              <a:t>。</a:t>
+            </a:r>
+          </a:p>
+          <a:p>
+            <a:r>
+              <a:rPr b="0"/>
+              <a:t>I’ve got time for questions.”</a:t>
+            </a:r>
+          </a:p>
+          <a:p>
+            <a:r>
+              <a:rPr b="0"/>
+              <a:t>  アイヴ ゴット </a:t>
+            </a:r>
+            <a:r>
+              <a:rPr b="1"/>
+              <a:t>タイム</a:t>
+            </a:r>
+            <a:r>
+              <a:rPr b="0"/>
+              <a:t> フォー クエスチョンズ。</a:t>
+            </a:r>
+          </a:p>
+          <a:p>
+            <a:r>
+              <a:rPr b="0"/>
+              <a:t/>
+            </a:r>
+          </a:p>
+          <a:p>
+            <a:r>
+              <a:rPr b="0"/>
+              <a:t>JA: 約27分で着地。残り約18分を Q&amp;A・卓上デモ・交流へ。ステッカーは未作成 — 実機体験への導線に差し替え済み。45分で必ず終了。</a:t>
             </a:r>
           </a:p>
         </p:txBody>
@@ -2326,12 +7742,188 @@
           <a:lstStyle/>
           <a:p>
             <a:r>
-              <a:rPr lang="en-US" dirty="0"/>
-              <a:t>[01:10 / 0:30] AGENDA
-EN: "Here's the plan for the next half hour. First the problem — compelled access. Then the core idea, Janus. How it works — the object cue and coercion-safe delaying. A look under the hood — crypto, guards, the actual hardware. Then the honest limits — ethics and scope. And I'll finish with a live demo and how to run it yourself. I'll leave time for questions at the end."
-JA: 全体地図。指で6項目をなぞる。テンポよく。ここで聴衆の期待値を固定。</a:t>
+              <a:rPr b="0"/>
+              <a:t>[01:10 / 0:30] AGENDA — 発話 0:35</a:t>
             </a:r>
             <a:endParaRPr lang="en-US" dirty="0"/>
+          </a:p>
+          <a:p>
+            <a:r>
+              <a:rPr b="0"/>
+              <a:t/>
+            </a:r>
+          </a:p>
+          <a:p>
+            <a:r>
+              <a:rPr b="0"/>
+              <a:t>“Here’s the plan for the next half hour.</a:t>
+            </a:r>
+          </a:p>
+          <a:p>
+            <a:r>
+              <a:rPr b="0"/>
+              <a:t>  ヒアズ ザ </a:t>
+            </a:r>
+            <a:r>
+              <a:rPr b="1"/>
+              <a:t>プラン</a:t>
+            </a:r>
+            <a:r>
+              <a:rPr b="0"/>
+              <a:t> フォー ザ ネクスト ハーフ アウア。</a:t>
+            </a:r>
+          </a:p>
+          <a:p>
+            <a:r>
+              <a:rPr b="0"/>
+              <a:t>First, the problem: compelled access.</a:t>
+            </a:r>
+          </a:p>
+          <a:p>
+            <a:r>
+              <a:rPr b="0"/>
+              <a:t>  ファースト、 ザ プロブレム: </a:t>
+            </a:r>
+            <a:r>
+              <a:rPr b="1"/>
+              <a:t>コンペルド アクセス</a:t>
+            </a:r>
+            <a:r>
+              <a:rPr b="0"/>
+              <a:t>。</a:t>
+            </a:r>
+          </a:p>
+          <a:p>
+            <a:r>
+              <a:rPr b="0"/>
+              <a:t>Then the core idea — Janus.</a:t>
+            </a:r>
+          </a:p>
+          <a:p>
+            <a:r>
+              <a:rPr b="0"/>
+              <a:t>  ゼン ザ コア アイディア — </a:t>
+            </a:r>
+            <a:r>
+              <a:rPr b="1"/>
+              <a:t>ジェイナス</a:t>
+            </a:r>
+            <a:r>
+              <a:rPr b="0"/>
+              <a:t>。</a:t>
+            </a:r>
+          </a:p>
+          <a:p>
+            <a:r>
+              <a:rPr b="0"/>
+              <a:t>Then how it works: the object cue, and coercion-safe delay.</a:t>
+            </a:r>
+          </a:p>
+          <a:p>
+            <a:r>
+              <a:rPr b="0"/>
+              <a:t>  ゼン ハウ イット ワークス: ジ </a:t>
+            </a:r>
+            <a:r>
+              <a:rPr b="1"/>
+              <a:t>オブジェクト キュー</a:t>
+            </a:r>
+            <a:r>
+              <a:rPr b="0"/>
+              <a:t>、 アンド コアージョンセイフ ディレイ。</a:t>
+            </a:r>
+          </a:p>
+          <a:p>
+            <a:r>
+              <a:rPr b="0"/>
+              <a:t>Then under the hood — crypto, guards, and the hardware itself.</a:t>
+            </a:r>
+          </a:p>
+          <a:p>
+            <a:r>
+              <a:rPr b="0"/>
+              <a:t>  ゼン アンダー ザ </a:t>
+            </a:r>
+            <a:r>
+              <a:rPr b="1"/>
+              <a:t>フッド</a:t>
+            </a:r>
+            <a:r>
+              <a:rPr b="0"/>
+              <a:t> — クリプト、 ガーズ、 アンド ザ ハードウェア イットセルフ。</a:t>
+            </a:r>
+          </a:p>
+          <a:p>
+            <a:r>
+              <a:rPr b="0"/>
+              <a:t>Then the honest limits. Ethics, and scope.</a:t>
+            </a:r>
+          </a:p>
+          <a:p>
+            <a:r>
+              <a:rPr b="0"/>
+              <a:t>  ゼン ジ </a:t>
+            </a:r>
+            <a:r>
+              <a:rPr b="1"/>
+              <a:t>オネスト</a:t>
+            </a:r>
+            <a:r>
+              <a:rPr b="0"/>
+              <a:t> リミッツ。 エシックス、 アンド スコープ。</a:t>
+            </a:r>
+          </a:p>
+          <a:p>
+            <a:r>
+              <a:rPr b="0"/>
+              <a:t>I finish with a live demo, and how to run it yourself.</a:t>
+            </a:r>
+          </a:p>
+          <a:p>
+            <a:r>
+              <a:rPr b="0"/>
+              <a:t>  アイ フィニッシュ ウィズ ア </a:t>
+            </a:r>
+            <a:r>
+              <a:rPr b="1"/>
+              <a:t>ライヴ デモ</a:t>
+            </a:r>
+            <a:r>
+              <a:rPr b="0"/>
+              <a:t>、 アンド ハウ トゥ ラン イット ユアセルフ。</a:t>
+            </a:r>
+          </a:p>
+          <a:p>
+            <a:r>
+              <a:rPr b="0"/>
+              <a:t>And I’ll keep time for questions at the end.”</a:t>
+            </a:r>
+          </a:p>
+          <a:p>
+            <a:r>
+              <a:rPr b="0"/>
+              <a:t>  アンド アイル キープ </a:t>
+            </a:r>
+            <a:r>
+              <a:rPr b="1"/>
+              <a:t>タイム</a:t>
+            </a:r>
+            <a:r>
+              <a:rPr b="0"/>
+              <a:t> フォー クエスチョンズ アット ジ エンド。</a:t>
+            </a:r>
+          </a:p>
+          <a:p>
+            <a:r>
+              <a:rPr b="0"/>
+              <a:t/>
+            </a:r>
+          </a:p>
+          <a:p>
+            <a:r>
+              <a:rPr b="0"/>
+              <a:t>JA: 6項目を指でなぞる。期待値を固定</a:t>
+            </a:r>
           </a:p>
         </p:txBody>
       </p:sp>
@@ -2416,12 +8008,212 @@
           <a:lstStyle/>
           <a:p>
             <a:r>
-              <a:rPr lang="en-US" dirty="0"/>
-              <a:t>[01:40 / 1:00] THE PROBLEM
-EN: "Here's what Phasmid is built for. Attackers today don't need to break your crypto. They take the device — at a border, a checkpoint, an arrest — and they ask you to unlock it. And full-disk encryption is all-or-nothing: the moment you open it under pressure, everything is exposed. That's over-disclosure — one demand, total exposure. And this isn't theoretical anymore: this year a U.S. citizen was federally charged after a duress feature wiped his phone at a border search — the first known case of its kind. The scenario on this slide now has a court date."
-JA: 3枚を左→右で指す。淡々と、しかし重さを持って。ここで問題意識を共有。下段の REAL CASE を一度指す。係争中の個別事案には踏み込まない。</a:t>
+              <a:rPr b="0"/>
+              <a:t>[01:40 / 1:00] THE PROBLEM — 発話 0:25</a:t>
             </a:r>
             <a:endParaRPr lang="en-US" dirty="0"/>
+          </a:p>
+          <a:p>
+            <a:r>
+              <a:rPr b="0"/>
+              <a:t/>
+            </a:r>
+          </a:p>
+          <a:p>
+            <a:r>
+              <a:rPr b="0"/>
+              <a:t>“Here’s what Phasmid is built for.</a:t>
+            </a:r>
+          </a:p>
+          <a:p>
+            <a:r>
+              <a:rPr b="0"/>
+              <a:t>  ヒアズ ワット </a:t>
+            </a:r>
+            <a:r>
+              <a:rPr b="1"/>
+              <a:t>ファズミッド</a:t>
+            </a:r>
+            <a:r>
+              <a:rPr b="0"/>
+              <a:t> イズ ビルト フォー。</a:t>
+            </a:r>
+          </a:p>
+          <a:p>
+            <a:r>
+              <a:rPr b="0"/>
+              <a:t>Attackers today don’t break your crypto.</a:t>
+            </a:r>
+          </a:p>
+          <a:p>
+            <a:r>
+              <a:rPr b="0"/>
+              <a:t>  アタッカーズ トゥデイ ドウント ブレイク ユア </a:t>
+            </a:r>
+            <a:r>
+              <a:rPr b="1"/>
+              <a:t>クリプト</a:t>
+            </a:r>
+            <a:r>
+              <a:rPr b="0"/>
+              <a:t>。</a:t>
+            </a:r>
+          </a:p>
+          <a:p>
+            <a:r>
+              <a:rPr b="0"/>
+              <a:t>They take the device.</a:t>
+            </a:r>
+          </a:p>
+          <a:p>
+            <a:r>
+              <a:rPr b="0"/>
+              <a:t>  ゼイ テイク ザ </a:t>
+            </a:r>
+            <a:r>
+              <a:rPr b="1"/>
+              <a:t>デバイス</a:t>
+            </a:r>
+            <a:r>
+              <a:rPr b="0"/>
+              <a:t>。</a:t>
+            </a:r>
+          </a:p>
+          <a:p>
+            <a:r>
+              <a:rPr b="0"/>
+              <a:t>At a border. At a checkpoint. At an arrest.</a:t>
+            </a:r>
+          </a:p>
+          <a:p>
+            <a:r>
+              <a:rPr b="0"/>
+              <a:t>  アッタ </a:t>
+            </a:r>
+            <a:r>
+              <a:rPr b="1"/>
+              <a:t>ボーダー</a:t>
+            </a:r>
+            <a:r>
+              <a:rPr b="0"/>
+              <a:t>。 アッタ </a:t>
+            </a:r>
+            <a:r>
+              <a:rPr b="1"/>
+              <a:t>チェックポイント</a:t>
+            </a:r>
+            <a:r>
+              <a:rPr b="0"/>
+              <a:t>。 アッタン </a:t>
+            </a:r>
+            <a:r>
+              <a:rPr b="1"/>
+              <a:t>アレスト</a:t>
+            </a:r>
+            <a:r>
+              <a:rPr b="0"/>
+              <a:t>。</a:t>
+            </a:r>
+          </a:p>
+          <a:p>
+            <a:r>
+              <a:rPr b="0"/>
+              <a:t>And then they ask you to unlock it.</a:t>
+            </a:r>
+          </a:p>
+          <a:p>
+            <a:r>
+              <a:rPr b="0"/>
+              <a:t>  アンド ゼン ゼイ アスク ユー トゥ </a:t>
+            </a:r>
+            <a:r>
+              <a:rPr b="1"/>
+              <a:t>アンロック</a:t>
+            </a:r>
+            <a:r>
+              <a:rPr b="0"/>
+              <a:t> イット。</a:t>
+            </a:r>
+          </a:p>
+          <a:p>
+            <a:r>
+              <a:rPr b="0"/>
+              <a:t>Full-disk encryption is all or nothing.</a:t>
+            </a:r>
+          </a:p>
+          <a:p>
+            <a:r>
+              <a:rPr b="0"/>
+              <a:t>  フルディスク インクリプション イズ </a:t>
+            </a:r>
+            <a:r>
+              <a:rPr b="1"/>
+              <a:t>オール オア ナッシング</a:t>
+            </a:r>
+            <a:r>
+              <a:rPr b="0"/>
+              <a:t>。</a:t>
+            </a:r>
+          </a:p>
+          <a:p>
+            <a:r>
+              <a:rPr b="0"/>
+              <a:t>You open it once, under pressure — and everything is exposed.</a:t>
+            </a:r>
+          </a:p>
+          <a:p>
+            <a:r>
+              <a:rPr b="0"/>
+              <a:t>  ユー オウプン イット </a:t>
+            </a:r>
+            <a:r>
+              <a:rPr b="1"/>
+              <a:t>ワンス</a:t>
+            </a:r>
+            <a:r>
+              <a:rPr b="0"/>
+              <a:t>、 アンダー プレッシャー — アンド </a:t>
+            </a:r>
+            <a:r>
+              <a:rPr b="1"/>
+              <a:t>エヴリシング</a:t>
+            </a:r>
+            <a:r>
+              <a:rPr b="0"/>
+              <a:t> イズ エクスポウズド。</a:t>
+            </a:r>
+          </a:p>
+          <a:p>
+            <a:r>
+              <a:rPr b="0"/>
+              <a:t>That’s over-disclosure.”</a:t>
+            </a:r>
+          </a:p>
+          <a:p>
+            <a:r>
+              <a:rPr b="0"/>
+              <a:t>  ザッツ </a:t>
+            </a:r>
+            <a:r>
+              <a:rPr b="1"/>
+              <a:t>オウヴァー ディスクロージャー</a:t>
+            </a:r>
+            <a:r>
+              <a:rPr b="0"/>
+              <a:t>。</a:t>
+            </a:r>
+          </a:p>
+          <a:p>
+            <a:r>
+              <a:rPr b="0"/>
+              <a:t/>
+            </a:r>
+          </a:p>
+          <a:p>
+            <a:r>
+              <a:rPr b="0"/>
+              <a:t>JA: 3枚を左→右で指す。淡々と、しかし重く</a:t>
+            </a:r>
           </a:p>
         </p:txBody>
       </p:sp>
@@ -2506,12 +8298,180 @@
           <a:lstStyle/>
           <a:p>
             <a:r>
-              <a:rPr lang="en-US" dirty="0"/>
-              <a:t>[02:40 / 0:30] MEME
-EN: "So you get three bad options. Refuse — and you escalate. Comply with full-disk encryption — and you hand over everything. Or... controlled disclosure — show what's visible, protect the rest. Same demand, very different blast radius."
-JA: ここで軽く笑いを取る。テンポよく。緊張を一度ほぐす。</a:t>
+              <a:rPr b="0"/>
+              <a:t>[02:40 / 0:30] MEME — 発話 0:20</a:t>
             </a:r>
             <a:endParaRPr lang="en-US" dirty="0"/>
+          </a:p>
+          <a:p>
+            <a:r>
+              <a:rPr b="0"/>
+              <a:t/>
+            </a:r>
+          </a:p>
+          <a:p>
+            <a:r>
+              <a:rPr b="0"/>
+              <a:t>“So you get three bad options.</a:t>
+            </a:r>
+          </a:p>
+          <a:p>
+            <a:r>
+              <a:rPr b="0"/>
+              <a:t>  ソウ ユー ゲット </a:t>
+            </a:r>
+            <a:r>
+              <a:rPr b="1"/>
+              <a:t>スリー バッド オプションズ</a:t>
+            </a:r>
+            <a:r>
+              <a:rPr b="0"/>
+              <a:t>。</a:t>
+            </a:r>
+          </a:p>
+          <a:p>
+            <a:r>
+              <a:rPr b="0"/>
+              <a:t>Refuse — and you escalate.</a:t>
+            </a:r>
+          </a:p>
+          <a:p>
+            <a:r>
+              <a:rPr b="0"/>
+              <a:t>  </a:t>
+            </a:r>
+            <a:r>
+              <a:rPr b="1"/>
+              <a:t>リフューズ</a:t>
+            </a:r>
+            <a:r>
+              <a:rPr b="0"/>
+              <a:t> — アンド ユー </a:t>
+            </a:r>
+            <a:r>
+              <a:rPr b="1"/>
+              <a:t>エスカレイト</a:t>
+            </a:r>
+            <a:r>
+              <a:rPr b="0"/>
+              <a:t>。</a:t>
+            </a:r>
+          </a:p>
+          <a:p>
+            <a:r>
+              <a:rPr b="0"/>
+              <a:t>Comply, with full-disk encryption — and you hand over everything.</a:t>
+            </a:r>
+          </a:p>
+          <a:p>
+            <a:r>
+              <a:rPr b="0"/>
+              <a:t>  </a:t>
+            </a:r>
+            <a:r>
+              <a:rPr b="1"/>
+              <a:t>コンプライ</a:t>
+            </a:r>
+            <a:r>
+              <a:rPr b="0"/>
+              <a:t>、 ウィズ フルディスク インクリプション — アンド ユー ハンド オウヴァー </a:t>
+            </a:r>
+            <a:r>
+              <a:rPr b="1"/>
+              <a:t>エヴリシング</a:t>
+            </a:r>
+            <a:r>
+              <a:rPr b="0"/>
+              <a:t>。</a:t>
+            </a:r>
+          </a:p>
+          <a:p>
+            <a:r>
+              <a:rPr b="0"/>
+              <a:t>Or… controlled disclosure.</a:t>
+            </a:r>
+          </a:p>
+          <a:p>
+            <a:r>
+              <a:rPr b="0"/>
+              <a:t>  オア… </a:t>
+            </a:r>
+            <a:r>
+              <a:rPr b="1"/>
+              <a:t>コントロールド ディスクロージャー</a:t>
+            </a:r>
+            <a:r>
+              <a:rPr b="0"/>
+              <a:t>。</a:t>
+            </a:r>
+          </a:p>
+          <a:p>
+            <a:r>
+              <a:rPr b="0"/>
+              <a:t>Show what’s visible. Protect the rest.</a:t>
+            </a:r>
+          </a:p>
+          <a:p>
+            <a:r>
+              <a:rPr b="0"/>
+              <a:t>  ショウ ワッツ </a:t>
+            </a:r>
+            <a:r>
+              <a:rPr b="1"/>
+              <a:t>ヴィジブル</a:t>
+            </a:r>
+            <a:r>
+              <a:rPr b="0"/>
+              <a:t>。 プロテクト ザ </a:t>
+            </a:r>
+            <a:r>
+              <a:rPr b="1"/>
+              <a:t>レスト</a:t>
+            </a:r>
+            <a:r>
+              <a:rPr b="0"/>
+              <a:t>。</a:t>
+            </a:r>
+          </a:p>
+          <a:p>
+            <a:r>
+              <a:rPr b="0"/>
+              <a:t>Same demand. Very different blast radius.”</a:t>
+            </a:r>
+          </a:p>
+          <a:p>
+            <a:r>
+              <a:rPr b="0"/>
+              <a:t>  セイム </a:t>
+            </a:r>
+            <a:r>
+              <a:rPr b="1"/>
+              <a:t>ディマンド</a:t>
+            </a:r>
+            <a:r>
+              <a:rPr b="0"/>
+              <a:t>。 ヴェリー ディファレント </a:t>
+            </a:r>
+            <a:r>
+              <a:rPr b="1"/>
+              <a:t>ブラスト レイディアス</a:t>
+            </a:r>
+            <a:r>
+              <a:rPr b="0"/>
+              <a:t>。</a:t>
+            </a:r>
+          </a:p>
+          <a:p>
+            <a:r>
+              <a:rPr b="0"/>
+              <a:t/>
+            </a:r>
+          </a:p>
+          <a:p>
+            <a:r>
+              <a:rPr b="0"/>
+              <a:t>JA: 軽く笑いを取る。緊張を一度ほぐす</a:t>
+            </a:r>
           </a:p>
         </p:txBody>
       </p:sp>
@@ -2596,12 +8556,196 @@
           <a:lstStyle/>
           <a:p>
             <a:r>
-              <a:rPr lang="en-US" dirty="0"/>
-              <a:t>[03:10 / 0:50] WHAT IT IS / ISN'T
-EN: "Let me be precise. Phasmid is a field-evaluation research prototype for disclosure control — not casual file encryption, local-only by default. And it is not a replacement for audited full-disk encryption, not hardware-backed keys, not a magic delete button, and not a complete answer to compelled disclosure. I'll keep drawing that line the whole way through."
-JA: 誠実さを最初に宣言。IS/NOTを左右で示す。この一貫性が信頼の土台。</a:t>
+              <a:rPr b="0"/>
+              <a:t>[03:10 / 0:50] WHAT IT IS / ISN'T — 発話 0:25</a:t>
             </a:r>
             <a:endParaRPr lang="en-US" dirty="0"/>
+          </a:p>
+          <a:p>
+            <a:r>
+              <a:rPr b="0"/>
+              <a:t/>
+            </a:r>
+          </a:p>
+          <a:p>
+            <a:r>
+              <a:rPr b="0"/>
+              <a:t>“Let me be precise.</a:t>
+            </a:r>
+          </a:p>
+          <a:p>
+            <a:r>
+              <a:rPr b="0"/>
+              <a:t>  レット ミー ビー </a:t>
+            </a:r>
+            <a:r>
+              <a:rPr b="1"/>
+              <a:t>プリサイス</a:t>
+            </a:r>
+            <a:r>
+              <a:rPr b="0"/>
+              <a:t>。</a:t>
+            </a:r>
+          </a:p>
+          <a:p>
+            <a:r>
+              <a:rPr b="0"/>
+              <a:t>Phasmid is a field-evaluation research prototype for disclosure control.</a:t>
+            </a:r>
+          </a:p>
+          <a:p>
+            <a:r>
+              <a:rPr b="0"/>
+              <a:t>  ファズミッド イズ ア フィールド イヴァリュエイション リサーチ </a:t>
+            </a:r>
+            <a:r>
+              <a:rPr b="1"/>
+              <a:t>プロウトタイプ</a:t>
+            </a:r>
+            <a:r>
+              <a:rPr b="0"/>
+              <a:t> フォー ディスクロージャー コントロール。</a:t>
+            </a:r>
+          </a:p>
+          <a:p>
+            <a:r>
+              <a:rPr b="0"/>
+              <a:t>Local-only by default. Not casual file encryption.</a:t>
+            </a:r>
+          </a:p>
+          <a:p>
+            <a:r>
+              <a:rPr b="0"/>
+              <a:t>  </a:t>
+            </a:r>
+            <a:r>
+              <a:rPr b="1"/>
+              <a:t>ローカル オウンリー</a:t>
+            </a:r>
+            <a:r>
+              <a:rPr b="0"/>
+              <a:t> バイ ディフォルト。 </a:t>
+            </a:r>
+            <a:r>
+              <a:rPr b="1"/>
+              <a:t>ナット</a:t>
+            </a:r>
+            <a:r>
+              <a:rPr b="0"/>
+              <a:t> キャジュアル ファイル インクリプション。</a:t>
+            </a:r>
+          </a:p>
+          <a:p>
+            <a:r>
+              <a:rPr b="0"/>
+              <a:t>And it is not a replacement for audited full-disk encryption.</a:t>
+            </a:r>
+          </a:p>
+          <a:p>
+            <a:r>
+              <a:rPr b="0"/>
+              <a:t>  アンド イット イズ </a:t>
+            </a:r>
+            <a:r>
+              <a:rPr b="1"/>
+              <a:t>ナット</a:t>
+            </a:r>
+            <a:r>
+              <a:rPr b="0"/>
+              <a:t> ア リプレイスメント フォー オーディティッド フルディスク インクリプション。</a:t>
+            </a:r>
+          </a:p>
+          <a:p>
+            <a:r>
+              <a:rPr b="0"/>
+              <a:t>Not hardware-backed keys.</a:t>
+            </a:r>
+          </a:p>
+          <a:p>
+            <a:r>
+              <a:rPr b="0"/>
+              <a:t>  </a:t>
+            </a:r>
+            <a:r>
+              <a:rPr b="1"/>
+              <a:t>ナット</a:t>
+            </a:r>
+            <a:r>
+              <a:rPr b="0"/>
+              <a:t> ハードウェアバックト キーズ。</a:t>
+            </a:r>
+          </a:p>
+          <a:p>
+            <a:r>
+              <a:rPr b="0"/>
+              <a:t>Not a magic delete button.</a:t>
+            </a:r>
+          </a:p>
+          <a:p>
+            <a:r>
+              <a:rPr b="0"/>
+              <a:t>  </a:t>
+            </a:r>
+            <a:r>
+              <a:rPr b="1"/>
+              <a:t>ナット</a:t>
+            </a:r>
+            <a:r>
+              <a:rPr b="0"/>
+              <a:t> ア マジック ディリート バトゥン。</a:t>
+            </a:r>
+          </a:p>
+          <a:p>
+            <a:r>
+              <a:rPr b="0"/>
+              <a:t>Not a complete answer to compelled disclosure.</a:t>
+            </a:r>
+          </a:p>
+          <a:p>
+            <a:r>
+              <a:rPr b="0"/>
+              <a:t>  </a:t>
+            </a:r>
+            <a:r>
+              <a:rPr b="1"/>
+              <a:t>ナット</a:t>
+            </a:r>
+            <a:r>
+              <a:rPr b="0"/>
+              <a:t> ア コンプリート アンサー トゥ コンペルド ディスクロージャー。</a:t>
+            </a:r>
+          </a:p>
+          <a:p>
+            <a:r>
+              <a:rPr b="0"/>
+              <a:t>I’ll keep drawing that line, the whole way through.”</a:t>
+            </a:r>
+          </a:p>
+          <a:p>
+            <a:r>
+              <a:rPr b="0"/>
+              <a:t>  アイル キープ ドローイング </a:t>
+            </a:r>
+            <a:r>
+              <a:rPr b="1"/>
+              <a:t>ザット ライン</a:t>
+            </a:r>
+            <a:r>
+              <a:rPr b="0"/>
+              <a:t>、 ザ ホウル ウェイ スルー。</a:t>
+            </a:r>
+          </a:p>
+          <a:p>
+            <a:r>
+              <a:rPr b="0"/>
+              <a:t/>
+            </a:r>
+          </a:p>
+          <a:p>
+            <a:r>
+              <a:rPr b="0"/>
+              <a:t>JA: 誠実さを最初に宣言。IS / NOT を左右で</a:t>
+            </a:r>
           </a:p>
         </p:txBody>
       </p:sp>
@@ -2686,12 +8830,232 @@
           <a:lstStyle/>
           <a:p>
             <a:r>
-              <a:rPr lang="en-US" dirty="0"/>
-              <a:t>[04:00 / 1:10] CORE IDEA — JANUS
-EN: "The core idea is Janus — two faces. A two-slot model. Slot A is what a capture-visible surface shows: plausible, ordinary, disclosed under pressure. Slot B is protected local state, kept off the visible path, bound to local conditions — not just a password. The point is simple: what you show is not all there is."
-JA: 概念の核。左右のスロットを指す。ゆっくり。ここは聴衆に必ず持ち帰らせる。</a:t>
+              <a:rPr b="0"/>
+              <a:t>[04:00 / 1:10] CORE IDEA — JANUS — 発話 0:25</a:t>
             </a:r>
             <a:endParaRPr lang="en-US" dirty="0"/>
+          </a:p>
+          <a:p>
+            <a:r>
+              <a:rPr b="0"/>
+              <a:t/>
+            </a:r>
+          </a:p>
+          <a:p>
+            <a:r>
+              <a:rPr b="0"/>
+              <a:t>“The core idea is Janus. Two faces.</a:t>
+            </a:r>
+          </a:p>
+          <a:p>
+            <a:r>
+              <a:rPr b="0"/>
+              <a:t>  ザ コア アイディア イズ </a:t>
+            </a:r>
+            <a:r>
+              <a:rPr b="1"/>
+              <a:t>ジェイナス</a:t>
+            </a:r>
+            <a:r>
+              <a:rPr b="0"/>
+              <a:t>。 </a:t>
+            </a:r>
+            <a:r>
+              <a:rPr b="1"/>
+              <a:t>トゥー フェイシズ</a:t>
+            </a:r>
+            <a:r>
+              <a:rPr b="0"/>
+              <a:t>。</a:t>
+            </a:r>
+          </a:p>
+          <a:p>
+            <a:r>
+              <a:rPr b="0"/>
+              <a:t>A two-slot model.</a:t>
+            </a:r>
+          </a:p>
+          <a:p>
+            <a:r>
+              <a:rPr b="0"/>
+              <a:t>  ア </a:t>
+            </a:r>
+            <a:r>
+              <a:rPr b="1"/>
+              <a:t>トゥースロット</a:t>
+            </a:r>
+            <a:r>
+              <a:rPr b="0"/>
+              <a:t> モデル。</a:t>
+            </a:r>
+          </a:p>
+          <a:p>
+            <a:r>
+              <a:rPr b="0"/>
+              <a:t>Slot A is what the visible surface shows.</a:t>
+            </a:r>
+          </a:p>
+          <a:p>
+            <a:r>
+              <a:rPr b="0"/>
+              <a:t>  スロット </a:t>
+            </a:r>
+            <a:r>
+              <a:rPr b="1"/>
+              <a:t>エイ</a:t>
+            </a:r>
+            <a:r>
+              <a:rPr b="0"/>
+              <a:t> イズ ワット ザ ヴィジブル サーフィス ショウズ。</a:t>
+            </a:r>
+          </a:p>
+          <a:p>
+            <a:r>
+              <a:rPr b="0"/>
+              <a:t>Plausible. Ordinary. Disclosed under pressure.</a:t>
+            </a:r>
+          </a:p>
+          <a:p>
+            <a:r>
+              <a:rPr b="0"/>
+              <a:t>  </a:t>
+            </a:r>
+            <a:r>
+              <a:rPr b="1"/>
+              <a:t>プローザブル</a:t>
+            </a:r>
+            <a:r>
+              <a:rPr b="0"/>
+              <a:t>。 </a:t>
+            </a:r>
+            <a:r>
+              <a:rPr b="1"/>
+              <a:t>オーディナリー</a:t>
+            </a:r>
+            <a:r>
+              <a:rPr b="0"/>
+              <a:t>。 ディスクロウズド アンダー プレッシャー。</a:t>
+            </a:r>
+          </a:p>
+          <a:p>
+            <a:r>
+              <a:rPr b="0"/>
+              <a:t>Slot B is protected local state. It stays off the visible path.</a:t>
+            </a:r>
+          </a:p>
+          <a:p>
+            <a:r>
+              <a:rPr b="0"/>
+              <a:t>  スロット </a:t>
+            </a:r>
+            <a:r>
+              <a:rPr b="1"/>
+              <a:t>ビー</a:t>
+            </a:r>
+            <a:r>
+              <a:rPr b="0"/>
+              <a:t> イズ プロテクティッド ローカル ステイト。 イット ステイズ </a:t>
+            </a:r>
+            <a:r>
+              <a:rPr b="1"/>
+              <a:t>オフ</a:t>
+            </a:r>
+            <a:r>
+              <a:rPr b="0"/>
+              <a:t> ザ ヴィジブル パス。</a:t>
+            </a:r>
+          </a:p>
+          <a:p>
+            <a:r>
+              <a:rPr b="0"/>
+              <a:t>And it’s bound to local conditions — not to a password alone.</a:t>
+            </a:r>
+          </a:p>
+          <a:p>
+            <a:r>
+              <a:rPr b="0"/>
+              <a:t>  アンド イッツ バウンド トゥ </a:t>
+            </a:r>
+            <a:r>
+              <a:rPr b="1"/>
+              <a:t>ローカル コンディションズ</a:t>
+            </a:r>
+            <a:r>
+              <a:rPr b="0"/>
+              <a:t> — ナット トゥ ア パスワード アロウン。</a:t>
+            </a:r>
+          </a:p>
+          <a:p>
+            <a:r>
+              <a:rPr b="0"/>
+              <a:t>What you show is not all there is.”</a:t>
+            </a:r>
+          </a:p>
+          <a:p>
+            <a:r>
+              <a:rPr b="0"/>
+              <a:t>  ワット ユー ショウ イズ </a:t>
+            </a:r>
+            <a:r>
+              <a:rPr b="1"/>
+              <a:t>ナット オール</a:t>
+            </a:r>
+            <a:r>
+              <a:rPr b="0"/>
+              <a:t> ゼア イズ。</a:t>
+            </a:r>
+          </a:p>
+          <a:p>
+            <a:r>
+              <a:rPr b="0"/>
+              <a:t/>
+            </a:r>
+          </a:p>
+          <a:p>
+            <a:r>
+              <a:rPr b="0"/>
+              <a:t>SPEAK（決めゼリフ・間を置いて）</a:t>
+            </a:r>
+          </a:p>
+          <a:p>
+            <a:r>
+              <a:rPr b="0"/>
+              <a:t>“Slot A is what you show. Slot B is not on the visible path.”</a:t>
+            </a:r>
+          </a:p>
+          <a:p>
+            <a:r>
+              <a:rPr b="0"/>
+              <a:t>  スロット エイ イズ ワット ユー </a:t>
+            </a:r>
+            <a:r>
+              <a:rPr b="1"/>
+              <a:t>ショウ</a:t>
+            </a:r>
+            <a:r>
+              <a:rPr b="0"/>
+              <a:t>。 スロット ビー イズ </a:t>
+            </a:r>
+            <a:r>
+              <a:rPr b="1"/>
+              <a:t>ナット</a:t>
+            </a:r>
+            <a:r>
+              <a:rPr b="0"/>
+              <a:t> オン ザ ヴィジブル パス。</a:t>
+            </a:r>
+          </a:p>
+          <a:p>
+            <a:r>
+              <a:rPr b="0"/>
+              <a:t/>
+            </a:r>
+          </a:p>
+          <a:p>
+            <a:r>
+              <a:rPr b="0"/>
+              <a:t>JA: 概念の核。左右のスロットを指す。ゆっくり。必ず持ち帰らせる</a:t>
+            </a:r>
           </a:p>
         </p:txBody>
       </p:sp>
@@ -2776,12 +9140,200 @@
           <a:lstStyle/>
           <a:p>
             <a:r>
-              <a:rPr lang="en-US" dirty="0"/>
-              <a:t>[05:10 / 1:15] ADVERSARY MODEL
-EN: "Who does it defend against? Five in-scope adversaries — physical captor, passive observer, local active attacker, local-network attacker, and a coercing authority. And, just as important, five explicitly out of scope: a compromised kernel, hardware implants, remote attackers, supply-chain, and breaking the crypto itself. If the host is owned, no user-space tool saves you — and I won't pretend otherwise."
-JA: 30分枠なので本編で語る。左=戦う相手、右=戦わない相手。誠実さを示す重要スライド。</a:t>
+              <a:rPr b="0"/>
+              <a:t>[05:10 / 1:15] ADVERSARY MODEL — 発話 0:30</a:t>
             </a:r>
             <a:endParaRPr lang="en-US" dirty="0"/>
+          </a:p>
+          <a:p>
+            <a:r>
+              <a:rPr b="0"/>
+              <a:t/>
+            </a:r>
+          </a:p>
+          <a:p>
+            <a:r>
+              <a:rPr b="0"/>
+              <a:t>“Who does it defend against?</a:t>
+            </a:r>
+          </a:p>
+          <a:p>
+            <a:r>
+              <a:rPr b="0"/>
+              <a:t>  フー ダズ イット </a:t>
+            </a:r>
+            <a:r>
+              <a:rPr b="1"/>
+              <a:t>ディフェンド</a:t>
+            </a:r>
+            <a:r>
+              <a:rPr b="0"/>
+              <a:t> アゲンスト?</a:t>
+            </a:r>
+          </a:p>
+          <a:p>
+            <a:r>
+              <a:rPr b="0"/>
+              <a:t>Five adversaries in scope.</a:t>
+            </a:r>
+          </a:p>
+          <a:p>
+            <a:r>
+              <a:rPr b="0"/>
+              <a:t>  </a:t>
+            </a:r>
+            <a:r>
+              <a:rPr b="1"/>
+              <a:t>ファイヴ</a:t>
+            </a:r>
+            <a:r>
+              <a:rPr b="0"/>
+              <a:t> アドヴァサリーズ イン スコープ。</a:t>
+            </a:r>
+          </a:p>
+          <a:p>
+            <a:r>
+              <a:rPr b="0"/>
+              <a:t>A physical captor. A passive observer. A local active attacker.</a:t>
+            </a:r>
+          </a:p>
+          <a:p>
+            <a:r>
+              <a:rPr b="0"/>
+              <a:t>  ア フィジカル キャプター。 ア パッシヴ オブザーヴァー。 ア ローカル アクティヴ アタッカー。</a:t>
+            </a:r>
+          </a:p>
+          <a:p>
+            <a:r>
+              <a:rPr b="0"/>
+              <a:t>A local-network attacker. And a coercing authority.</a:t>
+            </a:r>
+          </a:p>
+          <a:p>
+            <a:r>
+              <a:rPr b="0"/>
+              <a:t>  ア ローカルネットワーク アタッカー。 アンド ア </a:t>
+            </a:r>
+            <a:r>
+              <a:rPr b="1"/>
+              <a:t>コアーシング オーソリティ</a:t>
+            </a:r>
+            <a:r>
+              <a:rPr b="0"/>
+              <a:t>。</a:t>
+            </a:r>
+          </a:p>
+          <a:p>
+            <a:r>
+              <a:rPr b="0"/>
+              <a:t>And five explicitly out of scope.</a:t>
+            </a:r>
+          </a:p>
+          <a:p>
+            <a:r>
+              <a:rPr b="0"/>
+              <a:t>  アンド ファイヴ エクスプリシットリー </a:t>
+            </a:r>
+            <a:r>
+              <a:rPr b="1"/>
+              <a:t>アウト オヴ スコープ</a:t>
+            </a:r>
+            <a:r>
+              <a:rPr b="0"/>
+              <a:t>。</a:t>
+            </a:r>
+          </a:p>
+          <a:p>
+            <a:r>
+              <a:rPr b="0"/>
+              <a:t>A compromised kernel. Hardware implants. Remote attackers.</a:t>
+            </a:r>
+          </a:p>
+          <a:p>
+            <a:r>
+              <a:rPr b="0"/>
+              <a:t>  ア コンプロマイズド カーネル。 ハードウェア インプランツ。 リモウト アタッカーズ。</a:t>
+            </a:r>
+          </a:p>
+          <a:p>
+            <a:r>
+              <a:rPr b="0"/>
+              <a:t>Supply chain. And breaking the crypto itself.</a:t>
+            </a:r>
+          </a:p>
+          <a:p>
+            <a:r>
+              <a:rPr b="0"/>
+              <a:t>  サプライ チェイン。 アンド ブレイキング ザ </a:t>
+            </a:r>
+            <a:r>
+              <a:rPr b="1"/>
+              <a:t>クリプト イットセルフ</a:t>
+            </a:r>
+            <a:r>
+              <a:rPr b="0"/>
+              <a:t>。</a:t>
+            </a:r>
+          </a:p>
+          <a:p>
+            <a:r>
+              <a:rPr b="0"/>
+              <a:t>If the host is owned, no user-space tool saves you.</a:t>
+            </a:r>
+          </a:p>
+          <a:p>
+            <a:r>
+              <a:rPr b="0"/>
+              <a:t>  イフ ザ ホウスト イズ </a:t>
+            </a:r>
+            <a:r>
+              <a:rPr b="1"/>
+              <a:t>オウンド</a:t>
+            </a:r>
+            <a:r>
+              <a:rPr b="0"/>
+              <a:t>、 ノウ ユーザースペイス ツール </a:t>
+            </a:r>
+            <a:r>
+              <a:rPr b="1"/>
+              <a:t>セイヴズ</a:t>
+            </a:r>
+            <a:r>
+              <a:rPr b="0"/>
+              <a:t> ユー。</a:t>
+            </a:r>
+          </a:p>
+          <a:p>
+            <a:r>
+              <a:rPr b="0"/>
+              <a:t>I won’t pretend otherwise.”</a:t>
+            </a:r>
+          </a:p>
+          <a:p>
+            <a:r>
+              <a:rPr b="0"/>
+              <a:t>  アイ ウォウント </a:t>
+            </a:r>
+            <a:r>
+              <a:rPr b="1"/>
+              <a:t>プリテンド</a:t>
+            </a:r>
+            <a:r>
+              <a:rPr b="0"/>
+              <a:t> アザワイズ。</a:t>
+            </a:r>
+          </a:p>
+          <a:p>
+            <a:r>
+              <a:rPr b="0"/>
+              <a:t/>
+            </a:r>
+          </a:p>
+          <a:p>
+            <a:r>
+              <a:rPr b="0"/>
+              <a:t>JA: 左=戦う相手、右=戦わない相手。誠実さの要</a:t>
+            </a:r>
           </a:p>
         </p:txBody>
       </p:sp>
@@ -2866,12 +9418,184 @@
           <a:lstStyle/>
           <a:p>
             <a:r>
-              <a:rPr lang="en-US" dirty="0"/>
-              <a:t>[06:25 / 0:45] STRIDE + LINDDUN
-EN: "I didn't just hand-wave the threats. Eighteen scenarios, each tagged with STRIDE and LINDDUN — offline cracking, session replay, header leakage, timing side-channels, object-cue spoofing, coerced disclosure. Here are a few representative ones; the full matrix is in the repo. If you want to argue about any of these, find me after — I'd enjoy it."
-JA: 表は全部読まない。代表2〜3行を指す。研究の厳密さを示す。深掘りはQ&amp;Aへ誘導。</a:t>
+              <a:rPr b="0"/>
+              <a:t>[06:25 / 0:45] STRIDE + LINDDUN — 発話 0:25</a:t>
             </a:r>
             <a:endParaRPr lang="en-US" dirty="0"/>
+          </a:p>
+          <a:p>
+            <a:r>
+              <a:rPr b="0"/>
+              <a:t/>
+            </a:r>
+          </a:p>
+          <a:p>
+            <a:r>
+              <a:rPr b="0"/>
+              <a:t>“I didn’t hand-wave the threats.</a:t>
+            </a:r>
+          </a:p>
+          <a:p>
+            <a:r>
+              <a:rPr b="0"/>
+              <a:t>  アイ ディドゥント </a:t>
+            </a:r>
+            <a:r>
+              <a:rPr b="1"/>
+              <a:t>ハンドウェイヴ</a:t>
+            </a:r>
+            <a:r>
+              <a:rPr b="0"/>
+              <a:t> ザ スレッツ。</a:t>
+            </a:r>
+          </a:p>
+          <a:p>
+            <a:r>
+              <a:rPr b="0"/>
+              <a:t>Eighteen scenarios. Each one tagged with STRIDE and LINDDUN.</a:t>
+            </a:r>
+          </a:p>
+          <a:p>
+            <a:r>
+              <a:rPr b="0"/>
+              <a:t>  </a:t>
+            </a:r>
+            <a:r>
+              <a:rPr b="1"/>
+              <a:t>エイティーン</a:t>
+            </a:r>
+            <a:r>
+              <a:rPr b="0"/>
+              <a:t> シナリオズ。 イーチ ワン タグド ウィズ </a:t>
+            </a:r>
+            <a:r>
+              <a:rPr b="1"/>
+              <a:t>ストライド</a:t>
+            </a:r>
+            <a:r>
+              <a:rPr b="0"/>
+              <a:t> アンド </a:t>
+            </a:r>
+            <a:r>
+              <a:rPr b="1"/>
+              <a:t>リンダン</a:t>
+            </a:r>
+            <a:r>
+              <a:rPr b="0"/>
+              <a:t>。</a:t>
+            </a:r>
+          </a:p>
+          <a:p>
+            <a:r>
+              <a:rPr b="0"/>
+              <a:t>Offline cracking. Session replay. Header leakage.</a:t>
+            </a:r>
+          </a:p>
+          <a:p>
+            <a:r>
+              <a:rPr b="0"/>
+              <a:t>  オフライン クラッキング。 セッション リプレイ。 ヘダー リーキッジ。</a:t>
+            </a:r>
+          </a:p>
+          <a:p>
+            <a:r>
+              <a:rPr b="0"/>
+              <a:t>Timing side-channels. Object-cue spoofing. Coerced disclosure.</a:t>
+            </a:r>
+          </a:p>
+          <a:p>
+            <a:r>
+              <a:rPr b="0"/>
+              <a:t>  タイミング サイドチャネルズ。 オブジェクトキュー スプーフィング。 コアースト ディスクロージャー。</a:t>
+            </a:r>
+          </a:p>
+          <a:p>
+            <a:r>
+              <a:rPr b="0"/>
+              <a:t>Here are a few. The full matrix is in the repo.</a:t>
+            </a:r>
+          </a:p>
+          <a:p>
+            <a:r>
+              <a:rPr b="0"/>
+              <a:t>  ヒア アー ア </a:t>
+            </a:r>
+            <a:r>
+              <a:rPr b="1"/>
+              <a:t>フュー</a:t>
+            </a:r>
+            <a:r>
+              <a:rPr b="0"/>
+              <a:t>。 ザ フル メイトリクス イズ イン ザ </a:t>
+            </a:r>
+            <a:r>
+              <a:rPr b="1"/>
+              <a:t>リーポウ</a:t>
+            </a:r>
+            <a:r>
+              <a:rPr b="0"/>
+              <a:t>。</a:t>
+            </a:r>
+          </a:p>
+          <a:p>
+            <a:r>
+              <a:rPr b="0"/>
+              <a:t>And if you want to argue with any of them — find me after.</a:t>
+            </a:r>
+          </a:p>
+          <a:p>
+            <a:r>
+              <a:rPr b="0"/>
+              <a:t>  アンド イフ ユー ワナ </a:t>
+            </a:r>
+            <a:r>
+              <a:rPr b="1"/>
+              <a:t>アーギュー</a:t>
+            </a:r>
+            <a:r>
+              <a:rPr b="0"/>
+              <a:t> ウィズ エニー オヴ ゼム — </a:t>
+            </a:r>
+            <a:r>
+              <a:rPr b="1"/>
+              <a:t>ファインド ミー アフター</a:t>
+            </a:r>
+            <a:r>
+              <a:rPr b="0"/>
+              <a:t>。</a:t>
+            </a:r>
+          </a:p>
+          <a:p>
+            <a:r>
+              <a:rPr b="0"/>
+              <a:t>I’d enjoy that.”</a:t>
+            </a:r>
+          </a:p>
+          <a:p>
+            <a:r>
+              <a:rPr b="0"/>
+              <a:t>  アイド </a:t>
+            </a:r>
+            <a:r>
+              <a:rPr b="1"/>
+              <a:t>エンジョイ</a:t>
+            </a:r>
+            <a:r>
+              <a:rPr b="0"/>
+              <a:t> ザット。</a:t>
+            </a:r>
+          </a:p>
+          <a:p>
+            <a:r>
+              <a:rPr b="0"/>
+              <a:t/>
+            </a:r>
+          </a:p>
+          <a:p>
+            <a:r>
+              <a:rPr b="0"/>
+              <a:t>JA: 表は全部読まない。代表2–3行を指す。遅れていたらここを最短で</a:t>
+            </a:r>
           </a:p>
         </p:txBody>
       </p:sp>
@@ -3439,7 +10163,7 @@
                 <a:ea typeface="Courier New" pitchFamily="34" charset="-122"/>
                 <a:cs typeface="Courier New" pitchFamily="34" charset="-120"/>
               </a:rPr>
-              <a:t>Makoto Sugita</a:t>
+              <a:t>Makoto Sugita  (Mr.Rabbit)</a:t>
             </a:r>
             <a:pPr algn="ctr" indent="0" marL="0">
               <a:buNone/>
@@ -3453,7 +10177,7 @@
                 <a:ea typeface="Courier New" pitchFamily="34" charset="-122"/>
                 <a:cs typeface="Courier New" pitchFamily="34" charset="-120"/>
               </a:rPr>
-              <a:t>  (Mr.Rabbit)</a:t>
+              <a:t>  ·  Senior Engineer, GMO Cybersecurity by Ierae, Inc.</a:t>
             </a:r>
             <a:pPr algn="ctr" indent="0" marL="0">
               <a:buNone/>
@@ -3467,7 +10191,7 @@
                 <a:ea typeface="Courier New" pitchFamily="34" charset="-122"/>
                 <a:cs typeface="Courier New" pitchFamily="34" charset="-120"/>
               </a:rPr>
-              <a:t>     @01ra66it</a:t>
+              <a:t/>
             </a:r>
             <a:pPr algn="ctr" indent="0" marL="0">
               <a:buNone/>
@@ -3481,46 +10205,105 @@
                 <a:ea typeface="Courier New" pitchFamily="34" charset="-122"/>
                 <a:cs typeface="Courier New" pitchFamily="34" charset="-120"/>
               </a:rPr>
-              <a:t>     github.com/01rabbit/Phasmid</a:t>
+              <a:t/>
             </a:r>
             <a:endParaRPr lang="en-US" sz="1600" dirty="0"/>
           </a:p>
-        </p:txBody>
-      </p:sp>
-      <p:sp>
-        <p:nvSpPr>
-          <p:cNvPr id="8" name="Text 5"/>
-          <p:cNvSpPr/>
-          <p:nvPr/>
-        </p:nvSpPr>
-        <p:spPr>
-          <a:xfrm>
-            <a:off x="0" y="6236208"/>
-            <a:ext cx="12188952" cy="320040"/>
-          </a:xfrm>
-          <a:prstGeom prst="rect">
-            <a:avLst/>
-          </a:prstGeom>
-          <a:noFill/>
-          <a:ln/>
-        </p:spPr>
-        <p:txBody>
-          <a:bodyPr wrap="square" lIns="0" tIns="0" rIns="0" bIns="0" rtlCol="0" anchor="ctr"/>
-          <a:lstStyle/>
           <a:p>
             <a:pPr algn="ctr" indent="0" marL="0">
               <a:buNone/>
             </a:pPr>
             <a:r>
-              <a:rPr lang="en-US" sz="1200" dirty="0">
-                <a:solidFill>
-                  <a:srgbClr val="6B7D71"/>
+              <a:rPr lang="en-US" sz="1600" b="1" dirty="0">
+                <a:solidFill>
+                  <a:srgbClr val="E8EFEA"/>
                 </a:solidFill>
                 <a:latin typeface="Courier New" pitchFamily="34" charset="0"/>
                 <a:ea typeface="Courier New" pitchFamily="34" charset="-122"/>
                 <a:cs typeface="Courier New" pitchFamily="34" charset="-120"/>
               </a:rPr>
-              <a:t>Research prototype · Apache-2.0 · v0.1.4</a:t>
+              <a:t>@01ra66it</a:t>
+            </a:r>
+            <a:pPr algn="ctr" indent="0" marL="0">
+              <a:buNone/>
+            </a:pPr>
+            <a:r>
+              <a:rPr lang="en-US" sz="1600" dirty="0">
+                <a:solidFill>
+                  <a:srgbClr val="9DB0A4"/>
+                </a:solidFill>
+                <a:latin typeface="Courier New" pitchFamily="34" charset="0"/>
+                <a:ea typeface="Courier New" pitchFamily="34" charset="-122"/>
+                <a:cs typeface="Courier New" pitchFamily="34" charset="-120"/>
+              </a:rPr>
+              <a:t>     github.com/01rabbit/Phasmid</a:t>
+            </a:r>
+            <a:pPr algn="ctr" indent="0" marL="0">
+              <a:buNone/>
+            </a:pPr>
+            <a:r>
+              <a:rPr lang="en-US" sz="1600" b="1" dirty="0">
+                <a:solidFill>
+                  <a:srgbClr val="7EC46B"/>
+                </a:solidFill>
+                <a:latin typeface="Courier New" pitchFamily="34" charset="0"/>
+                <a:ea typeface="Courier New" pitchFamily="34" charset="-122"/>
+                <a:cs typeface="Courier New" pitchFamily="34" charset="-120"/>
+              </a:rPr>
+              <a:t/>
+            </a:r>
+            <a:pPr algn="ctr" indent="0" marL="0">
+              <a:buNone/>
+            </a:pPr>
+            <a:r>
+              <a:rPr lang="en-US" sz="1600" dirty="0">
+                <a:solidFill>
+                  <a:srgbClr val="9DB0A4"/>
+                </a:solidFill>
+                <a:latin typeface="Courier New" pitchFamily="34" charset="0"/>
+                <a:ea typeface="Courier New" pitchFamily="34" charset="-122"/>
+                <a:cs typeface="Courier New" pitchFamily="34" charset="-120"/>
+              </a:rPr>
+              <a:t/>
+            </a:r>
+            <a:endParaRPr lang="en-US" sz="1600" dirty="0"/>
+          </a:p>
+        </p:txBody>
+      </p:sp>
+      <p:sp>
+        <p:nvSpPr>
+          <p:cNvPr id="8" name="Text 5"/>
+          <p:cNvSpPr/>
+          <p:nvPr/>
+        </p:nvSpPr>
+        <p:spPr>
+          <a:xfrm>
+            <a:off x="0" y="6236208"/>
+            <a:ext cx="12188952" cy="320040"/>
+          </a:xfrm>
+          <a:prstGeom prst="rect">
+            <a:avLst/>
+          </a:prstGeom>
+          <a:noFill/>
+          <a:ln/>
+        </p:spPr>
+        <p:txBody>
+          <a:bodyPr wrap="square" lIns="0" tIns="0" rIns="0" bIns="0" rtlCol="0" anchor="ctr"/>
+          <a:lstStyle/>
+          <a:p>
+            <a:pPr algn="ctr" indent="0" marL="0">
+              <a:buNone/>
+            </a:pPr>
+            <a:r>
+              <a:rPr lang="en-US" sz="1200" dirty="0">
+                <a:solidFill>
+                  <a:srgbClr val="6B7D71"/>
+                </a:solidFill>
+                <a:latin typeface="Courier New" pitchFamily="34" charset="0"/>
+                <a:ea typeface="Courier New" pitchFamily="34" charset="-122"/>
+                <a:cs typeface="Courier New" pitchFamily="34" charset="-120"/>
+              </a:rPr>
+              <a:t>Research prototype · Apache-2.0 · v0.6.0</a:t>
             </a:r>
             <a:endParaRPr lang="en-US" sz="1200" dirty="0"/>
           </a:p>
@@ -14084,7 +20867,7 @@
                 <a:ea typeface="Calibri" pitchFamily="34" charset="-122"/>
                 <a:cs typeface="Calibri" pitchFamily="34" charset="-120"/>
               </a:rPr>
-              <a:t>Independent Security Researcher</a:t>
+              <a:t>GMO Cybersecurity by Ierae, Inc.</a:t>
             </a:r>
             <a:endParaRPr lang="en-US" sz="1800" dirty="0"/>
           </a:p>
@@ -14123,7 +20906,7 @@
                 <a:ea typeface="Calibri" pitchFamily="34" charset="-122"/>
                 <a:cs typeface="Calibri" pitchFamily="34" charset="-120"/>
               </a:rPr>
-              <a:t>Open-source security tool developer</a:t>
+              <a:t>Senior Engineer · Security Researcher</a:t>
             </a:r>
             <a:endParaRPr lang="en-US" sz="1500" dirty="0"/>
           </a:p>
@@ -20564,7 +27347,7 @@
                 <a:ea typeface="Courier New" pitchFamily="34" charset="-122"/>
                 <a:cs typeface="Courier New" pitchFamily="34" charset="-120"/>
               </a:rPr>
-              <a:t>Makoto Sugita · Mr.Rabbit · Independent Security Researcher · Apache-2.0</a:t>
+              <a:t>Makoto Sugita · Mr.Rabbit · GMO Cybersecurity by Ierae, Inc. · Apache-2.0</a:t>
             </a:r>
             <a:endParaRPr lang="en-US" sz="1200" dirty="0"/>
           </a:p>

--- a/docs/submissions/Phasmid_DEFCON_DemoLabs.pptx
+++ b/docs/submissions/Phasmid_DEFCON_DemoLabs.pptx
@@ -10129,6 +10129,10 @@
             <a:prstDash val="solid"/>
           </a:ln>
         </p:spPr>
+        <p:txBody>
+          <a:bodyPr/>
+          <a:p/>
+        </p:txBody>
       </p:sp>
       <p:sp>
         <p:nvSpPr>
@@ -10177,7 +10181,7 @@
                 <a:ea typeface="Courier New" pitchFamily="34" charset="-122"/>
                 <a:cs typeface="Courier New" pitchFamily="34" charset="-120"/>
               </a:rPr>
-              <a:t>  ·  Senior Engineer, GMO Cybersecurity by Ierae, Inc.</a:t>
+              <a:t>  ·  Senior Engineer, GMO Cybersecurity by Ierae</a:t>
             </a:r>
             <a:pPr algn="ctr" indent="0" marL="0">
               <a:buNone/>
@@ -10452,6 +10456,10 @@
             </a:outerShdw>
           </a:effectLst>
         </p:spPr>
+        <p:txBody>
+          <a:bodyPr/>
+          <a:p/>
+        </p:txBody>
       </p:sp>
       <p:sp>
         <p:nvSpPr>
@@ -10479,6 +10487,10 @@
             <a:prstDash val="solid"/>
           </a:ln>
         </p:spPr>
+        <p:txBody>
+          <a:bodyPr/>
+          <a:p/>
+        </p:txBody>
       </p:sp>
       <p:pic>
         <p:nvPicPr>
@@ -10618,6 +10630,10 @@
             </a:outerShdw>
           </a:effectLst>
         </p:spPr>
+        <p:txBody>
+          <a:bodyPr/>
+          <a:p/>
+        </p:txBody>
       </p:sp>
       <p:sp>
         <p:nvSpPr>
@@ -10645,6 +10661,10 @@
             <a:prstDash val="solid"/>
           </a:ln>
         </p:spPr>
+        <p:txBody>
+          <a:bodyPr/>
+          <a:p/>
+        </p:txBody>
       </p:sp>
       <p:pic>
         <p:nvPicPr>
@@ -10784,6 +10804,10 @@
             </a:outerShdw>
           </a:effectLst>
         </p:spPr>
+        <p:txBody>
+          <a:bodyPr/>
+          <a:p/>
+        </p:txBody>
       </p:sp>
       <p:sp>
         <p:nvSpPr>
@@ -10811,6 +10835,10 @@
             <a:prstDash val="solid"/>
           </a:ln>
         </p:spPr>
+        <p:txBody>
+          <a:bodyPr/>
+          <a:p/>
+        </p:txBody>
       </p:sp>
       <p:pic>
         <p:nvPicPr>
@@ -10950,6 +10978,10 @@
             </a:outerShdw>
           </a:effectLst>
         </p:spPr>
+        <p:txBody>
+          <a:bodyPr/>
+          <a:p/>
+        </p:txBody>
       </p:sp>
       <p:sp>
         <p:nvSpPr>
@@ -10977,6 +11009,10 @@
             <a:prstDash val="solid"/>
           </a:ln>
         </p:spPr>
+        <p:txBody>
+          <a:bodyPr/>
+          <a:p/>
+        </p:txBody>
       </p:sp>
       <p:pic>
         <p:nvPicPr>
@@ -11332,6 +11368,10 @@
             </a:outerShdw>
           </a:effectLst>
         </p:spPr>
+        <p:txBody>
+          <a:bodyPr/>
+          <a:p/>
+        </p:txBody>
       </p:sp>
       <p:pic>
         <p:nvPicPr>
@@ -11834,6 +11874,10 @@
             </a:outerShdw>
           </a:effectLst>
         </p:spPr>
+        <p:txBody>
+          <a:bodyPr/>
+          <a:p/>
+        </p:txBody>
       </p:sp>
       <p:pic>
         <p:nvPicPr>
@@ -12537,6 +12581,10 @@
             </a:outerShdw>
           </a:effectLst>
         </p:spPr>
+        <p:txBody>
+          <a:bodyPr/>
+          <a:p/>
+        </p:txBody>
       </p:sp>
       <p:sp>
         <p:nvSpPr>
@@ -12562,6 +12610,10 @@
             <a:prstDash val="solid"/>
           </a:ln>
         </p:spPr>
+        <p:txBody>
+          <a:bodyPr/>
+          <a:p/>
+        </p:txBody>
       </p:sp>
       <p:pic>
         <p:nvPicPr>
@@ -12701,6 +12753,10 @@
             </a:outerShdw>
           </a:effectLst>
         </p:spPr>
+        <p:txBody>
+          <a:bodyPr/>
+          <a:p/>
+        </p:txBody>
       </p:sp>
       <p:sp>
         <p:nvSpPr>
@@ -12726,6 +12782,10 @@
             <a:prstDash val="solid"/>
           </a:ln>
         </p:spPr>
+        <p:txBody>
+          <a:bodyPr/>
+          <a:p/>
+        </p:txBody>
       </p:sp>
       <p:pic>
         <p:nvPicPr>
@@ -12865,6 +12925,10 @@
             </a:outerShdw>
           </a:effectLst>
         </p:spPr>
+        <p:txBody>
+          <a:bodyPr/>
+          <a:p/>
+        </p:txBody>
       </p:sp>
       <p:sp>
         <p:nvSpPr>
@@ -12890,6 +12954,10 @@
             <a:prstDash val="solid"/>
           </a:ln>
         </p:spPr>
+        <p:txBody>
+          <a:bodyPr/>
+          <a:p/>
+        </p:txBody>
       </p:sp>
       <p:pic>
         <p:nvPicPr>
@@ -13245,6 +13313,10 @@
             </a:outerShdw>
           </a:effectLst>
         </p:spPr>
+        <p:txBody>
+          <a:bodyPr/>
+          <a:p/>
+        </p:txBody>
       </p:sp>
       <p:pic>
         <p:nvPicPr>
@@ -13387,6 +13459,10 @@
             </a:outerShdw>
           </a:effectLst>
         </p:spPr>
+        <p:txBody>
+          <a:bodyPr/>
+          <a:p/>
+        </p:txBody>
       </p:sp>
       <p:sp>
         <p:nvSpPr>
@@ -13638,6 +13714,10 @@
             <a:prstDash val="solid"/>
           </a:ln>
         </p:spPr>
+        <p:txBody>
+          <a:bodyPr/>
+          <a:p/>
+        </p:txBody>
       </p:sp>
       <p:sp>
         <p:nvSpPr>
@@ -13930,6 +14010,10 @@
             </a:outerShdw>
           </a:effectLst>
         </p:spPr>
+        <p:txBody>
+          <a:bodyPr/>
+          <a:p/>
+        </p:txBody>
       </p:sp>
       <p:sp>
         <p:nvSpPr>
@@ -13957,6 +14041,10 @@
             <a:prstDash val="solid"/>
           </a:ln>
         </p:spPr>
+        <p:txBody>
+          <a:bodyPr/>
+          <a:p/>
+        </p:txBody>
       </p:sp>
       <p:pic>
         <p:nvPicPr>
@@ -14089,6 +14177,10 @@
             <a:prstDash val="solid"/>
           </a:ln>
         </p:spPr>
+        <p:txBody>
+          <a:bodyPr/>
+          <a:p/>
+        </p:txBody>
       </p:sp>
       <p:sp>
         <p:nvSpPr>
@@ -14155,6 +14247,10 @@
             <a:prstDash val="solid"/>
           </a:ln>
         </p:spPr>
+        <p:txBody>
+          <a:bodyPr/>
+          <a:p/>
+        </p:txBody>
       </p:sp>
       <p:sp>
         <p:nvSpPr>
@@ -14221,6 +14317,10 @@
             <a:prstDash val="solid"/>
           </a:ln>
         </p:spPr>
+        <p:txBody>
+          <a:bodyPr/>
+          <a:p/>
+        </p:txBody>
       </p:sp>
       <p:sp>
         <p:nvSpPr>
@@ -14287,6 +14387,10 @@
             <a:prstDash val="solid"/>
           </a:ln>
         </p:spPr>
+        <p:txBody>
+          <a:bodyPr/>
+          <a:p/>
+        </p:txBody>
       </p:sp>
       <p:sp>
         <p:nvSpPr>
@@ -14360,6 +14464,10 @@
             </a:outerShdw>
           </a:effectLst>
         </p:spPr>
+        <p:txBody>
+          <a:bodyPr/>
+          <a:p/>
+        </p:txBody>
       </p:sp>
       <p:sp>
         <p:nvSpPr>
@@ -14387,6 +14495,10 @@
             <a:prstDash val="solid"/>
           </a:ln>
         </p:spPr>
+        <p:txBody>
+          <a:bodyPr/>
+          <a:p/>
+        </p:txBody>
       </p:sp>
       <p:pic>
         <p:nvPicPr>
@@ -14526,6 +14638,10 @@
             </a:outerShdw>
           </a:effectLst>
         </p:spPr>
+        <p:txBody>
+          <a:bodyPr/>
+          <a:p/>
+        </p:txBody>
       </p:sp>
       <p:sp>
         <p:nvSpPr>
@@ -14553,6 +14669,10 @@
             <a:prstDash val="solid"/>
           </a:ln>
         </p:spPr>
+        <p:txBody>
+          <a:bodyPr/>
+          <a:p/>
+        </p:txBody>
       </p:sp>
       <p:pic>
         <p:nvPicPr>
@@ -14685,6 +14805,10 @@
             <a:prstDash val="solid"/>
           </a:ln>
         </p:spPr>
+        <p:txBody>
+          <a:bodyPr/>
+          <a:p/>
+        </p:txBody>
       </p:sp>
       <p:sp>
         <p:nvSpPr>
@@ -14751,6 +14875,10 @@
             <a:prstDash val="solid"/>
           </a:ln>
         </p:spPr>
+        <p:txBody>
+          <a:bodyPr/>
+          <a:p/>
+        </p:txBody>
       </p:sp>
       <p:sp>
         <p:nvSpPr>
@@ -14817,6 +14945,10 @@
             <a:prstDash val="solid"/>
           </a:ln>
         </p:spPr>
+        <p:txBody>
+          <a:bodyPr/>
+          <a:p/>
+        </p:txBody>
       </p:sp>
       <p:sp>
         <p:nvSpPr>
@@ -14883,6 +15015,10 @@
             <a:prstDash val="solid"/>
           </a:ln>
         </p:spPr>
+        <p:txBody>
+          <a:bodyPr/>
+          <a:p/>
+        </p:txBody>
       </p:sp>
       <p:sp>
         <p:nvSpPr>
@@ -14949,6 +15085,10 @@
             <a:prstDash val="solid"/>
           </a:ln>
         </p:spPr>
+        <p:txBody>
+          <a:bodyPr/>
+          <a:p/>
+        </p:txBody>
       </p:sp>
       <p:sp>
         <p:nvSpPr>
@@ -15022,6 +15162,10 @@
             </a:outerShdw>
           </a:effectLst>
         </p:spPr>
+        <p:txBody>
+          <a:bodyPr/>
+          <a:p/>
+        </p:txBody>
       </p:sp>
       <p:sp>
         <p:nvSpPr>
@@ -15411,6 +15555,10 @@
             </a:outerShdw>
           </a:effectLst>
         </p:spPr>
+        <p:txBody>
+          <a:bodyPr/>
+          <a:p/>
+        </p:txBody>
       </p:sp>
       <p:sp>
         <p:nvSpPr>
@@ -15438,6 +15586,10 @@
             <a:prstDash val="solid"/>
           </a:ln>
         </p:spPr>
+        <p:txBody>
+          <a:bodyPr/>
+          <a:p/>
+        </p:txBody>
       </p:sp>
       <p:pic>
         <p:nvPicPr>
@@ -15577,6 +15729,10 @@
             </a:outerShdw>
           </a:effectLst>
         </p:spPr>
+        <p:txBody>
+          <a:bodyPr/>
+          <a:p/>
+        </p:txBody>
       </p:sp>
       <p:sp>
         <p:nvSpPr>
@@ -15604,6 +15760,10 @@
             <a:prstDash val="solid"/>
           </a:ln>
         </p:spPr>
+        <p:txBody>
+          <a:bodyPr/>
+          <a:p/>
+        </p:txBody>
       </p:sp>
       <p:pic>
         <p:nvPicPr>
@@ -15743,6 +15903,10 @@
             </a:outerShdw>
           </a:effectLst>
         </p:spPr>
+        <p:txBody>
+          <a:bodyPr/>
+          <a:p/>
+        </p:txBody>
       </p:sp>
       <p:sp>
         <p:nvSpPr>
@@ -15770,6 +15934,10 @@
             <a:prstDash val="solid"/>
           </a:ln>
         </p:spPr>
+        <p:txBody>
+          <a:bodyPr/>
+          <a:p/>
+        </p:txBody>
       </p:sp>
       <p:pic>
         <p:nvPicPr>
@@ -16125,6 +16293,10 @@
             </a:outerShdw>
           </a:effectLst>
         </p:spPr>
+        <p:txBody>
+          <a:bodyPr/>
+          <a:p/>
+        </p:txBody>
       </p:sp>
       <p:sp>
         <p:nvSpPr>
@@ -16191,6 +16363,10 @@
             <a:prstDash val="solid"/>
           </a:ln>
         </p:spPr>
+        <p:txBody>
+          <a:bodyPr/>
+          <a:p/>
+        </p:txBody>
       </p:sp>
       <p:pic>
         <p:nvPicPr>
@@ -16354,6 +16530,10 @@
             </a:outerShdw>
           </a:effectLst>
         </p:spPr>
+        <p:txBody>
+          <a:bodyPr/>
+          <a:p/>
+        </p:txBody>
       </p:sp>
       <p:sp>
         <p:nvSpPr>
@@ -16420,6 +16600,10 @@
             <a:prstDash val="solid"/>
           </a:ln>
         </p:spPr>
+        <p:txBody>
+          <a:bodyPr/>
+          <a:p/>
+        </p:txBody>
       </p:sp>
       <p:pic>
         <p:nvPicPr>
@@ -16583,6 +16767,10 @@
             </a:outerShdw>
           </a:effectLst>
         </p:spPr>
+        <p:txBody>
+          <a:bodyPr/>
+          <a:p/>
+        </p:txBody>
       </p:sp>
       <p:sp>
         <p:nvSpPr>
@@ -16649,6 +16837,10 @@
             <a:prstDash val="solid"/>
           </a:ln>
         </p:spPr>
+        <p:txBody>
+          <a:bodyPr/>
+          <a:p/>
+        </p:txBody>
       </p:sp>
       <p:pic>
         <p:nvPicPr>
@@ -16812,6 +17004,10 @@
             </a:outerShdw>
           </a:effectLst>
         </p:spPr>
+        <p:txBody>
+          <a:bodyPr/>
+          <a:p/>
+        </p:txBody>
       </p:sp>
       <p:sp>
         <p:nvSpPr>
@@ -16878,6 +17074,10 @@
             <a:prstDash val="solid"/>
           </a:ln>
         </p:spPr>
+        <p:txBody>
+          <a:bodyPr/>
+          <a:p/>
+        </p:txBody>
       </p:sp>
       <p:pic>
         <p:nvPicPr>
@@ -17233,6 +17433,10 @@
             </a:outerShdw>
           </a:effectLst>
         </p:spPr>
+        <p:txBody>
+          <a:bodyPr/>
+          <a:p/>
+        </p:txBody>
       </p:sp>
       <p:sp>
         <p:nvSpPr>
@@ -17260,6 +17464,10 @@
             <a:prstDash val="solid"/>
           </a:ln>
         </p:spPr>
+        <p:txBody>
+          <a:bodyPr/>
+          <a:p/>
+        </p:txBody>
       </p:sp>
       <p:pic>
         <p:nvPicPr>
@@ -17419,6 +17627,10 @@
             </a:outerShdw>
           </a:effectLst>
         </p:spPr>
+        <p:txBody>
+          <a:bodyPr/>
+          <a:p/>
+        </p:txBody>
       </p:sp>
       <p:sp>
         <p:nvSpPr>
@@ -17446,6 +17658,10 @@
             <a:prstDash val="solid"/>
           </a:ln>
         </p:spPr>
+        <p:txBody>
+          <a:bodyPr/>
+          <a:p/>
+        </p:txBody>
       </p:sp>
       <p:pic>
         <p:nvPicPr>
@@ -17605,6 +17821,10 @@
             </a:outerShdw>
           </a:effectLst>
         </p:spPr>
+        <p:txBody>
+          <a:bodyPr/>
+          <a:p/>
+        </p:txBody>
       </p:sp>
       <p:sp>
         <p:nvSpPr>
@@ -17632,6 +17852,10 @@
             <a:prstDash val="solid"/>
           </a:ln>
         </p:spPr>
+        <p:txBody>
+          <a:bodyPr/>
+          <a:p/>
+        </p:txBody>
       </p:sp>
       <p:pic>
         <p:nvPicPr>
@@ -17791,6 +18015,10 @@
             </a:outerShdw>
           </a:effectLst>
         </p:spPr>
+        <p:txBody>
+          <a:bodyPr/>
+          <a:p/>
+        </p:txBody>
       </p:sp>
       <p:sp>
         <p:nvSpPr>
@@ -17818,6 +18046,10 @@
             <a:prstDash val="solid"/>
           </a:ln>
         </p:spPr>
+        <p:txBody>
+          <a:bodyPr/>
+          <a:p/>
+        </p:txBody>
       </p:sp>
       <p:pic>
         <p:nvPicPr>
@@ -17977,6 +18209,10 @@
             </a:outerShdw>
           </a:effectLst>
         </p:spPr>
+        <p:txBody>
+          <a:bodyPr/>
+          <a:p/>
+        </p:txBody>
       </p:sp>
       <p:sp>
         <p:nvSpPr>
@@ -18488,6 +18724,10 @@
             <a:prstDash val="solid"/>
           </a:ln>
         </p:spPr>
+        <p:txBody>
+          <a:bodyPr/>
+          <a:p/>
+        </p:txBody>
       </p:sp>
       <p:sp>
         <p:nvSpPr>
@@ -18515,6 +18755,10 @@
             <a:prstDash val="solid"/>
           </a:ln>
         </p:spPr>
+        <p:txBody>
+          <a:bodyPr/>
+          <a:p/>
+        </p:txBody>
       </p:sp>
       <p:sp>
         <p:nvSpPr>
@@ -18542,6 +18786,10 @@
             <a:prstDash val="solid"/>
           </a:ln>
         </p:spPr>
+        <p:txBody>
+          <a:bodyPr/>
+          <a:p/>
+        </p:txBody>
       </p:sp>
       <p:pic>
         <p:nvPicPr>
@@ -18674,6 +18922,10 @@
             <a:prstDash val="solid"/>
           </a:ln>
         </p:spPr>
+        <p:txBody>
+          <a:bodyPr/>
+          <a:p/>
+        </p:txBody>
       </p:sp>
       <p:sp>
         <p:nvSpPr>
@@ -18701,6 +18953,10 @@
             <a:prstDash val="solid"/>
           </a:ln>
         </p:spPr>
+        <p:txBody>
+          <a:bodyPr/>
+          <a:p/>
+        </p:txBody>
       </p:sp>
       <p:pic>
         <p:nvPicPr>
@@ -18833,6 +19089,10 @@
             <a:prstDash val="solid"/>
           </a:ln>
         </p:spPr>
+        <p:txBody>
+          <a:bodyPr/>
+          <a:p/>
+        </p:txBody>
       </p:sp>
       <p:sp>
         <p:nvSpPr>
@@ -18860,6 +19120,10 @@
             <a:prstDash val="solid"/>
           </a:ln>
         </p:spPr>
+        <p:txBody>
+          <a:bodyPr/>
+          <a:p/>
+        </p:txBody>
       </p:sp>
       <p:pic>
         <p:nvPicPr>
@@ -18992,6 +19256,10 @@
             <a:prstDash val="solid"/>
           </a:ln>
         </p:spPr>
+        <p:txBody>
+          <a:bodyPr/>
+          <a:p/>
+        </p:txBody>
       </p:sp>
       <p:sp>
         <p:nvSpPr>
@@ -19019,6 +19287,10 @@
             <a:prstDash val="solid"/>
           </a:ln>
         </p:spPr>
+        <p:txBody>
+          <a:bodyPr/>
+          <a:p/>
+        </p:txBody>
       </p:sp>
       <p:pic>
         <p:nvPicPr>
@@ -19151,6 +19423,10 @@
             <a:prstDash val="solid"/>
           </a:ln>
         </p:spPr>
+        <p:txBody>
+          <a:bodyPr/>
+          <a:p/>
+        </p:txBody>
       </p:sp>
       <p:sp>
         <p:nvSpPr>
@@ -19178,6 +19454,10 @@
             <a:prstDash val="solid"/>
           </a:ln>
         </p:spPr>
+        <p:txBody>
+          <a:bodyPr/>
+          <a:p/>
+        </p:txBody>
       </p:sp>
       <p:pic>
         <p:nvPicPr>
@@ -19533,6 +19813,10 @@
             </a:outerShdw>
           </a:effectLst>
         </p:spPr>
+        <p:txBody>
+          <a:bodyPr/>
+          <a:p/>
+        </p:txBody>
       </p:sp>
       <p:sp>
         <p:nvSpPr>
@@ -19560,6 +19844,10 @@
             <a:prstDash val="solid"/>
           </a:ln>
         </p:spPr>
+        <p:txBody>
+          <a:bodyPr/>
+          <a:p/>
+        </p:txBody>
       </p:sp>
       <p:pic>
         <p:nvPicPr>
@@ -19699,6 +19987,10 @@
             </a:outerShdw>
           </a:effectLst>
         </p:spPr>
+        <p:txBody>
+          <a:bodyPr/>
+          <a:p/>
+        </p:txBody>
       </p:sp>
       <p:sp>
         <p:nvSpPr>
@@ -19726,6 +20018,10 @@
             <a:prstDash val="solid"/>
           </a:ln>
         </p:spPr>
+        <p:txBody>
+          <a:bodyPr/>
+          <a:p/>
+        </p:txBody>
       </p:sp>
       <p:pic>
         <p:nvPicPr>
@@ -19865,6 +20161,10 @@
             </a:outerShdw>
           </a:effectLst>
         </p:spPr>
+        <p:txBody>
+          <a:bodyPr/>
+          <a:p/>
+        </p:txBody>
       </p:sp>
       <p:sp>
         <p:nvSpPr>
@@ -19892,6 +20192,10 @@
             <a:prstDash val="solid"/>
           </a:ln>
         </p:spPr>
+        <p:txBody>
+          <a:bodyPr/>
+          <a:p/>
+        </p:txBody>
       </p:sp>
       <p:pic>
         <p:nvPicPr>
@@ -20031,6 +20335,10 @@
             </a:outerShdw>
           </a:effectLst>
         </p:spPr>
+        <p:txBody>
+          <a:bodyPr/>
+          <a:p/>
+        </p:txBody>
       </p:sp>
       <p:sp>
         <p:nvSpPr>
@@ -20058,6 +20366,10 @@
             <a:prstDash val="solid"/>
           </a:ln>
         </p:spPr>
+        <p:txBody>
+          <a:bodyPr/>
+          <a:p/>
+        </p:txBody>
       </p:sp>
       <p:pic>
         <p:nvPicPr>
@@ -20197,6 +20509,10 @@
             </a:outerShdw>
           </a:effectLst>
         </p:spPr>
+        <p:txBody>
+          <a:bodyPr/>
+          <a:p/>
+        </p:txBody>
       </p:sp>
       <p:sp>
         <p:nvSpPr>
@@ -20224,6 +20540,10 @@
             <a:prstDash val="solid"/>
           </a:ln>
         </p:spPr>
+        <p:txBody>
+          <a:bodyPr/>
+          <a:p/>
+        </p:txBody>
       </p:sp>
       <p:pic>
         <p:nvPicPr>
@@ -20363,6 +20683,10 @@
             </a:outerShdw>
           </a:effectLst>
         </p:spPr>
+        <p:txBody>
+          <a:bodyPr/>
+          <a:p/>
+        </p:txBody>
       </p:sp>
       <p:sp>
         <p:nvSpPr>
@@ -20390,6 +20714,10 @@
             <a:prstDash val="solid"/>
           </a:ln>
         </p:spPr>
+        <p:txBody>
+          <a:bodyPr/>
+          <a:p/>
+        </p:txBody>
       </p:sp>
       <p:pic>
         <p:nvPicPr>
@@ -20784,6 +21112,10 @@
             </a:outerShdw>
           </a:effectLst>
         </p:spPr>
+        <p:txBody>
+          <a:bodyPr/>
+          <a:p/>
+        </p:txBody>
       </p:sp>
       <p:sp>
         <p:nvSpPr>
@@ -20809,6 +21141,10 @@
             <a:prstDash val="solid"/>
           </a:ln>
         </p:spPr>
+        <p:txBody>
+          <a:bodyPr/>
+          <a:p/>
+        </p:txBody>
       </p:sp>
       <p:pic>
         <p:nvPicPr>
@@ -20867,7 +21203,7 @@
                 <a:ea typeface="Calibri" pitchFamily="34" charset="-122"/>
                 <a:cs typeface="Calibri" pitchFamily="34" charset="-120"/>
               </a:rPr>
-              <a:t>GMO Cybersecurity by Ierae, Inc.</a:t>
+              <a:t>GMO Cybersecurity by Ierae</a:t>
             </a:r>
             <a:endParaRPr lang="en-US" sz="1800" dirty="0"/>
           </a:p>
@@ -20938,6 +21274,10 @@
             <a:prstDash val="solid"/>
           </a:ln>
         </p:spPr>
+        <p:txBody>
+          <a:bodyPr/>
+          <a:p/>
+        </p:txBody>
       </p:sp>
       <p:pic>
         <p:nvPicPr>
@@ -21028,6 +21368,10 @@
             <a:prstDash val="solid"/>
           </a:ln>
         </p:spPr>
+        <p:txBody>
+          <a:bodyPr/>
+          <a:p/>
+        </p:txBody>
       </p:sp>
       <p:pic>
         <p:nvPicPr>
@@ -21323,6 +21667,10 @@
             <a:prstDash val="solid"/>
           </a:ln>
         </p:spPr>
+        <p:txBody>
+          <a:bodyPr/>
+          <a:p/>
+        </p:txBody>
       </p:sp>
       <p:sp>
         <p:nvSpPr>
@@ -21389,6 +21737,10 @@
             <a:prstDash val="solid"/>
           </a:ln>
         </p:spPr>
+        <p:txBody>
+          <a:bodyPr/>
+          <a:p/>
+        </p:txBody>
       </p:sp>
       <p:sp>
         <p:nvSpPr>
@@ -21455,6 +21807,10 @@
             <a:prstDash val="solid"/>
           </a:ln>
         </p:spPr>
+        <p:txBody>
+          <a:bodyPr/>
+          <a:p/>
+        </p:txBody>
       </p:sp>
       <p:sp>
         <p:nvSpPr>
@@ -21521,6 +21877,10 @@
             <a:prstDash val="solid"/>
           </a:ln>
         </p:spPr>
+        <p:txBody>
+          <a:bodyPr/>
+          <a:p/>
+        </p:txBody>
       </p:sp>
       <p:sp>
         <p:nvSpPr>
@@ -21587,6 +21947,10 @@
             <a:prstDash val="solid"/>
           </a:ln>
         </p:spPr>
+        <p:txBody>
+          <a:bodyPr/>
+          <a:p/>
+        </p:txBody>
       </p:sp>
       <p:sp>
         <p:nvSpPr>
@@ -21653,6 +22017,10 @@
             <a:prstDash val="solid"/>
           </a:ln>
         </p:spPr>
+        <p:txBody>
+          <a:bodyPr/>
+          <a:p/>
+        </p:txBody>
       </p:sp>
       <p:sp>
         <p:nvSpPr>
@@ -21719,6 +22087,10 @@
             <a:prstDash val="solid"/>
           </a:ln>
         </p:spPr>
+        <p:txBody>
+          <a:bodyPr/>
+          <a:p/>
+        </p:txBody>
       </p:sp>
       <p:sp>
         <p:nvSpPr>
@@ -22008,6 +22380,10 @@
             </a:outerShdw>
           </a:effectLst>
         </p:spPr>
+        <p:txBody>
+          <a:bodyPr/>
+          <a:p/>
+        </p:txBody>
       </p:sp>
       <p:sp>
         <p:nvSpPr>
@@ -22035,6 +22411,10 @@
             <a:prstDash val="solid"/>
           </a:ln>
         </p:spPr>
+        <p:txBody>
+          <a:bodyPr/>
+          <a:p/>
+        </p:txBody>
       </p:sp>
       <p:pic>
         <p:nvPicPr>
@@ -22174,6 +22554,10 @@
             </a:outerShdw>
           </a:effectLst>
         </p:spPr>
+        <p:txBody>
+          <a:bodyPr/>
+          <a:p/>
+        </p:txBody>
       </p:sp>
       <p:sp>
         <p:nvSpPr>
@@ -22201,6 +22585,10 @@
             <a:prstDash val="solid"/>
           </a:ln>
         </p:spPr>
+        <p:txBody>
+          <a:bodyPr/>
+          <a:p/>
+        </p:txBody>
       </p:sp>
       <p:pic>
         <p:nvPicPr>
@@ -22340,6 +22728,10 @@
             </a:outerShdw>
           </a:effectLst>
         </p:spPr>
+        <p:txBody>
+          <a:bodyPr/>
+          <a:p/>
+        </p:txBody>
       </p:sp>
       <p:sp>
         <p:nvSpPr>
@@ -22367,6 +22759,10 @@
             <a:prstDash val="solid"/>
           </a:ln>
         </p:spPr>
+        <p:txBody>
+          <a:bodyPr/>
+          <a:p/>
+        </p:txBody>
       </p:sp>
       <p:pic>
         <p:nvPicPr>
@@ -22506,6 +22902,10 @@
             </a:outerShdw>
           </a:effectLst>
         </p:spPr>
+        <p:txBody>
+          <a:bodyPr/>
+          <a:p/>
+        </p:txBody>
       </p:sp>
       <p:sp>
         <p:nvSpPr>
@@ -22533,6 +22933,10 @@
             <a:prstDash val="solid"/>
           </a:ln>
         </p:spPr>
+        <p:txBody>
+          <a:bodyPr/>
+          <a:p/>
+        </p:txBody>
       </p:sp>
       <p:pic>
         <p:nvPicPr>
@@ -22672,6 +23076,10 @@
             </a:outerShdw>
           </a:effectLst>
         </p:spPr>
+        <p:txBody>
+          <a:bodyPr/>
+          <a:p/>
+        </p:txBody>
       </p:sp>
       <p:sp>
         <p:nvSpPr>
@@ -22699,6 +23107,10 @@
             <a:prstDash val="solid"/>
           </a:ln>
         </p:spPr>
+        <p:txBody>
+          <a:bodyPr/>
+          <a:p/>
+        </p:txBody>
       </p:sp>
       <p:pic>
         <p:nvPicPr>
@@ -22838,6 +23250,10 @@
             </a:outerShdw>
           </a:effectLst>
         </p:spPr>
+        <p:txBody>
+          <a:bodyPr/>
+          <a:p/>
+        </p:txBody>
       </p:sp>
       <p:sp>
         <p:nvSpPr>
@@ -22865,6 +23281,10 @@
             <a:prstDash val="solid"/>
           </a:ln>
         </p:spPr>
+        <p:txBody>
+          <a:bodyPr/>
+          <a:p/>
+        </p:txBody>
       </p:sp>
       <p:pic>
         <p:nvPicPr>
@@ -23004,6 +23424,10 @@
             </a:outerShdw>
           </a:effectLst>
         </p:spPr>
+        <p:txBody>
+          <a:bodyPr/>
+          <a:p/>
+        </p:txBody>
       </p:sp>
       <p:sp>
         <p:nvSpPr>
@@ -23031,6 +23455,10 @@
             <a:prstDash val="solid"/>
           </a:ln>
         </p:spPr>
+        <p:txBody>
+          <a:bodyPr/>
+          <a:p/>
+        </p:txBody>
       </p:sp>
       <p:pic>
         <p:nvPicPr>
@@ -23170,6 +23598,10 @@
             </a:outerShdw>
           </a:effectLst>
         </p:spPr>
+        <p:txBody>
+          <a:bodyPr/>
+          <a:p/>
+        </p:txBody>
       </p:sp>
       <p:sp>
         <p:nvSpPr>
@@ -23197,6 +23629,10 @@
             <a:prstDash val="solid"/>
           </a:ln>
         </p:spPr>
+        <p:txBody>
+          <a:bodyPr/>
+          <a:p/>
+        </p:txBody>
       </p:sp>
       <p:pic>
         <p:nvPicPr>
@@ -23552,6 +23988,10 @@
             </a:outerShdw>
           </a:effectLst>
         </p:spPr>
+        <p:txBody>
+          <a:bodyPr/>
+          <a:p/>
+        </p:txBody>
       </p:sp>
       <p:pic>
         <p:nvPicPr>
@@ -23752,6 +24192,10 @@
             </a:outerShdw>
           </a:effectLst>
         </p:spPr>
+        <p:txBody>
+          <a:bodyPr/>
+          <a:p/>
+        </p:txBody>
       </p:sp>
       <p:pic>
         <p:nvPicPr>
@@ -24231,6 +24675,10 @@
             </a:outerShdw>
           </a:effectLst>
         </p:spPr>
+        <p:txBody>
+          <a:bodyPr/>
+          <a:p/>
+        </p:txBody>
       </p:sp>
       <p:sp>
         <p:nvSpPr>
@@ -24336,6 +24784,10 @@
             <a:prstDash val="solid"/>
           </a:ln>
         </p:spPr>
+        <p:txBody>
+          <a:bodyPr/>
+          <a:p/>
+        </p:txBody>
       </p:sp>
       <p:sp>
         <p:nvSpPr>
@@ -24441,6 +24893,10 @@
             <a:prstDash val="solid"/>
           </a:ln>
         </p:spPr>
+        <p:txBody>
+          <a:bodyPr/>
+          <a:p/>
+        </p:txBody>
       </p:sp>
       <p:sp>
         <p:nvSpPr>
@@ -24546,6 +25002,10 @@
             <a:prstDash val="solid"/>
           </a:ln>
         </p:spPr>
+        <p:txBody>
+          <a:bodyPr/>
+          <a:p/>
+        </p:txBody>
       </p:sp>
       <p:sp>
         <p:nvSpPr>
@@ -24651,6 +25111,10 @@
             <a:prstDash val="solid"/>
           </a:ln>
         </p:spPr>
+        <p:txBody>
+          <a:bodyPr/>
+          <a:p/>
+        </p:txBody>
       </p:sp>
       <p:sp>
         <p:nvSpPr>
@@ -24724,6 +25188,10 @@
             </a:outerShdw>
           </a:effectLst>
         </p:spPr>
+        <p:txBody>
+          <a:bodyPr/>
+          <a:p/>
+        </p:txBody>
       </p:sp>
       <p:pic>
         <p:nvPicPr>
@@ -25450,6 +25918,10 @@
             <a:prstDash val="solid"/>
           </a:ln>
         </p:spPr>
+        <p:txBody>
+          <a:bodyPr/>
+          <a:p/>
+        </p:txBody>
       </p:sp>
       <p:sp>
         <p:nvSpPr>
@@ -25753,6 +26225,10 @@
             <a:prstDash val="solid"/>
           </a:ln>
         </p:spPr>
+        <p:txBody>
+          <a:bodyPr/>
+          <a:p/>
+        </p:txBody>
       </p:sp>
       <p:sp>
         <p:nvSpPr>
@@ -26226,6 +26702,10 @@
             </a:outerShdw>
           </a:effectLst>
         </p:spPr>
+        <p:txBody>
+          <a:bodyPr/>
+          <a:p/>
+        </p:txBody>
       </p:sp>
       <p:sp>
         <p:nvSpPr>
@@ -26432,6 +26912,10 @@
             </a:outerShdw>
           </a:effectLst>
         </p:spPr>
+        <p:txBody>
+          <a:bodyPr/>
+          <a:p/>
+        </p:txBody>
       </p:sp>
       <p:pic>
         <p:nvPicPr>
@@ -26762,6 +27246,10 @@
             </a:outerShdw>
           </a:effectLst>
         </p:spPr>
+        <p:txBody>
+          <a:bodyPr/>
+          <a:p/>
+        </p:txBody>
       </p:sp>
       <p:pic>
         <p:nvPicPr>
@@ -26926,6 +27414,10 @@
             <a:prstDash val="solid"/>
           </a:ln>
         </p:spPr>
+        <p:txBody>
+          <a:bodyPr/>
+          <a:p/>
+        </p:txBody>
       </p:sp>
       <p:sp>
         <p:nvSpPr>
@@ -26953,6 +27445,10 @@
             <a:prstDash val="solid"/>
           </a:ln>
         </p:spPr>
+        <p:txBody>
+          <a:bodyPr/>
+          <a:p/>
+        </p:txBody>
       </p:sp>
       <p:pic>
         <p:nvPicPr>
@@ -27082,6 +27578,10 @@
             <a:prstDash val="solid"/>
           </a:ln>
         </p:spPr>
+        <p:txBody>
+          <a:bodyPr/>
+          <a:p/>
+        </p:txBody>
       </p:sp>
       <p:pic>
         <p:nvPicPr>
@@ -27211,6 +27711,10 @@
             <a:prstDash val="solid"/>
           </a:ln>
         </p:spPr>
+        <p:txBody>
+          <a:bodyPr/>
+          <a:p/>
+        </p:txBody>
       </p:sp>
       <p:pic>
         <p:nvPicPr>
@@ -27347,7 +27851,7 @@
                 <a:ea typeface="Courier New" pitchFamily="34" charset="-122"/>
                 <a:cs typeface="Courier New" pitchFamily="34" charset="-120"/>
               </a:rPr>
-              <a:t>Makoto Sugita · Mr.Rabbit · GMO Cybersecurity by Ierae, Inc. · Apache-2.0</a:t>
+              <a:t>Makoto Sugita · Mr.Rabbit · GMO Cybersecurity by Ierae · Apache-2.0</a:t>
             </a:r>
             <a:endParaRPr lang="en-US" sz="1200" dirty="0"/>
           </a:p>
@@ -27489,6 +27993,10 @@
             <a:prstDash val="solid"/>
           </a:ln>
         </p:spPr>
+        <p:txBody>
+          <a:bodyPr/>
+          <a:p/>
+        </p:txBody>
       </p:sp>
       <p:sp>
         <p:nvSpPr>
@@ -27555,6 +28063,10 @@
             <a:prstDash val="solid"/>
           </a:ln>
         </p:spPr>
+        <p:txBody>
+          <a:bodyPr/>
+          <a:p/>
+        </p:txBody>
       </p:sp>
       <p:pic>
         <p:nvPicPr>
@@ -27684,6 +28196,10 @@
             <a:prstDash val="solid"/>
           </a:ln>
         </p:spPr>
+        <p:txBody>
+          <a:bodyPr/>
+          <a:p/>
+        </p:txBody>
       </p:sp>
       <p:sp>
         <p:nvSpPr>
@@ -27750,6 +28266,10 @@
             <a:prstDash val="solid"/>
           </a:ln>
         </p:spPr>
+        <p:txBody>
+          <a:bodyPr/>
+          <a:p/>
+        </p:txBody>
       </p:sp>
       <p:pic>
         <p:nvPicPr>
@@ -27879,6 +28399,10 @@
             <a:prstDash val="solid"/>
           </a:ln>
         </p:spPr>
+        <p:txBody>
+          <a:bodyPr/>
+          <a:p/>
+        </p:txBody>
       </p:sp>
       <p:sp>
         <p:nvSpPr>
@@ -27945,6 +28469,10 @@
             <a:prstDash val="solid"/>
           </a:ln>
         </p:spPr>
+        <p:txBody>
+          <a:bodyPr/>
+          <a:p/>
+        </p:txBody>
       </p:sp>
       <p:pic>
         <p:nvPicPr>
@@ -28074,6 +28602,10 @@
             <a:prstDash val="solid"/>
           </a:ln>
         </p:spPr>
+        <p:txBody>
+          <a:bodyPr/>
+          <a:p/>
+        </p:txBody>
       </p:sp>
       <p:sp>
         <p:nvSpPr>
@@ -28140,6 +28672,10 @@
             <a:prstDash val="solid"/>
           </a:ln>
         </p:spPr>
+        <p:txBody>
+          <a:bodyPr/>
+          <a:p/>
+        </p:txBody>
       </p:sp>
       <p:pic>
         <p:nvPicPr>
@@ -28269,6 +28805,10 @@
             <a:prstDash val="solid"/>
           </a:ln>
         </p:spPr>
+        <p:txBody>
+          <a:bodyPr/>
+          <a:p/>
+        </p:txBody>
       </p:sp>
       <p:sp>
         <p:nvSpPr>
@@ -28335,6 +28875,10 @@
             <a:prstDash val="solid"/>
           </a:ln>
         </p:spPr>
+        <p:txBody>
+          <a:bodyPr/>
+          <a:p/>
+        </p:txBody>
       </p:sp>
       <p:pic>
         <p:nvPicPr>
@@ -28464,6 +29008,10 @@
             <a:prstDash val="solid"/>
           </a:ln>
         </p:spPr>
+        <p:txBody>
+          <a:bodyPr/>
+          <a:p/>
+        </p:txBody>
       </p:sp>
       <p:sp>
         <p:nvSpPr>
@@ -28530,6 +29078,10 @@
             <a:prstDash val="solid"/>
           </a:ln>
         </p:spPr>
+        <p:txBody>
+          <a:bodyPr/>
+          <a:p/>
+        </p:txBody>
       </p:sp>
       <p:pic>
         <p:nvPicPr>
@@ -28921,6 +29473,10 @@
             </a:outerShdw>
           </a:effectLst>
         </p:spPr>
+        <p:txBody>
+          <a:bodyPr/>
+          <a:p/>
+        </p:txBody>
       </p:sp>
       <p:sp>
         <p:nvSpPr>
@@ -28948,6 +29504,10 @@
             <a:prstDash val="solid"/>
           </a:ln>
         </p:spPr>
+        <p:txBody>
+          <a:bodyPr/>
+          <a:p/>
+        </p:txBody>
       </p:sp>
       <p:pic>
         <p:nvPicPr>
@@ -29087,6 +29647,10 @@
             </a:outerShdw>
           </a:effectLst>
         </p:spPr>
+        <p:txBody>
+          <a:bodyPr/>
+          <a:p/>
+        </p:txBody>
       </p:sp>
       <p:sp>
         <p:nvSpPr>
@@ -29114,6 +29678,10 @@
             <a:prstDash val="solid"/>
           </a:ln>
         </p:spPr>
+        <p:txBody>
+          <a:bodyPr/>
+          <a:p/>
+        </p:txBody>
       </p:sp>
       <p:pic>
         <p:nvPicPr>
@@ -29253,6 +29821,10 @@
             </a:outerShdw>
           </a:effectLst>
         </p:spPr>
+        <p:txBody>
+          <a:bodyPr/>
+          <a:p/>
+        </p:txBody>
       </p:sp>
       <p:sp>
         <p:nvSpPr>
@@ -29280,6 +29852,10 @@
             <a:prstDash val="solid"/>
           </a:ln>
         </p:spPr>
+        <p:txBody>
+          <a:bodyPr/>
+          <a:p/>
+        </p:txBody>
       </p:sp>
       <p:pic>
         <p:nvPicPr>
@@ -29681,6 +30257,10 @@
             </a:outerShdw>
           </a:effectLst>
         </p:spPr>
+        <p:txBody>
+          <a:bodyPr/>
+          <a:p/>
+        </p:txBody>
       </p:sp>
       <p:sp>
         <p:nvSpPr>
@@ -29868,6 +30448,10 @@
             </a:outerShdw>
           </a:effectLst>
         </p:spPr>
+        <p:txBody>
+          <a:bodyPr/>
+          <a:p/>
+        </p:txBody>
       </p:sp>
       <p:sp>
         <p:nvSpPr>
@@ -30055,6 +30639,10 @@
             </a:outerShdw>
           </a:effectLst>
         </p:spPr>
+        <p:txBody>
+          <a:bodyPr/>
+          <a:p/>
+        </p:txBody>
       </p:sp>
       <p:sp>
         <p:nvSpPr>
@@ -30497,6 +31085,10 @@
             </a:outerShdw>
           </a:effectLst>
         </p:spPr>
+        <p:txBody>
+          <a:bodyPr/>
+          <a:p/>
+        </p:txBody>
       </p:sp>
       <p:pic>
         <p:nvPicPr>
@@ -30700,6 +31292,10 @@
             </a:outerShdw>
           </a:effectLst>
         </p:spPr>
+        <p:txBody>
+          <a:bodyPr/>
+          <a:p/>
+        </p:txBody>
       </p:sp>
       <p:pic>
         <p:nvPicPr>
@@ -31158,6 +31754,10 @@
             </a:outerShdw>
           </a:effectLst>
         </p:spPr>
+        <p:txBody>
+          <a:bodyPr/>
+          <a:p/>
+        </p:txBody>
       </p:sp>
       <p:sp>
         <p:nvSpPr>
@@ -31185,6 +31785,10 @@
             <a:prstDash val="solid"/>
           </a:ln>
         </p:spPr>
+        <p:txBody>
+          <a:bodyPr/>
+          <a:p/>
+        </p:txBody>
       </p:sp>
       <p:pic>
         <p:nvPicPr>
@@ -31367,6 +31971,10 @@
             </a:outerShdw>
           </a:effectLst>
         </p:spPr>
+        <p:txBody>
+          <a:bodyPr/>
+          <a:p/>
+        </p:txBody>
       </p:sp>
       <p:sp>
         <p:nvSpPr>
@@ -31394,6 +32002,10 @@
             <a:prstDash val="solid"/>
           </a:ln>
         </p:spPr>
+        <p:txBody>
+          <a:bodyPr/>
+          <a:p/>
+        </p:txBody>
       </p:sp>
       <p:pic>
         <p:nvPicPr>
@@ -31567,6 +32179,10 @@
             <a:prstDash val="solid"/>
           </a:ln>
         </p:spPr>
+        <p:txBody>
+          <a:bodyPr/>
+          <a:p/>
+        </p:txBody>
       </p:sp>
       <p:pic>
         <p:nvPicPr>
@@ -31841,6 +32457,10 @@
             </a:outerShdw>
           </a:effectLst>
         </p:spPr>
+        <p:txBody>
+          <a:bodyPr/>
+          <a:p/>
+        </p:txBody>
       </p:sp>
       <p:pic>
         <p:nvPicPr>
@@ -31931,6 +32551,10 @@
             <a:prstDash val="solid"/>
           </a:ln>
         </p:spPr>
+        <p:txBody>
+          <a:bodyPr/>
+          <a:p/>
+        </p:txBody>
       </p:sp>
       <p:pic>
         <p:nvPicPr>
@@ -32060,6 +32684,10 @@
             <a:prstDash val="solid"/>
           </a:ln>
         </p:spPr>
+        <p:txBody>
+          <a:bodyPr/>
+          <a:p/>
+        </p:txBody>
       </p:sp>
       <p:pic>
         <p:nvPicPr>
@@ -32189,6 +32817,10 @@
             <a:prstDash val="solid"/>
           </a:ln>
         </p:spPr>
+        <p:txBody>
+          <a:bodyPr/>
+          <a:p/>
+        </p:txBody>
       </p:sp>
       <p:pic>
         <p:nvPicPr>
@@ -32318,6 +32950,10 @@
             <a:prstDash val="solid"/>
           </a:ln>
         </p:spPr>
+        <p:txBody>
+          <a:bodyPr/>
+          <a:p/>
+        </p:txBody>
       </p:sp>
       <p:pic>
         <p:nvPicPr>
@@ -32447,6 +33083,10 @@
             <a:prstDash val="solid"/>
           </a:ln>
         </p:spPr>
+        <p:txBody>
+          <a:bodyPr/>
+          <a:p/>
+        </p:txBody>
       </p:sp>
       <p:pic>
         <p:nvPicPr>
@@ -32583,6 +33223,10 @@
             </a:outerShdw>
           </a:effectLst>
         </p:spPr>
+        <p:txBody>
+          <a:bodyPr/>
+          <a:p/>
+        </p:txBody>
       </p:sp>
       <p:pic>
         <p:nvPicPr>
@@ -33332,6 +33976,10 @@
             </a:outerShdw>
           </a:effectLst>
         </p:spPr>
+        <p:txBody>
+          <a:bodyPr/>
+          <a:p/>
+        </p:txBody>
       </p:sp>
       <p:sp>
         <p:nvSpPr>
@@ -33472,6 +34120,10 @@
             <a:prstDash val="solid"/>
           </a:ln>
         </p:spPr>
+        <p:txBody>
+          <a:bodyPr/>
+          <a:p/>
+        </p:txBody>
       </p:sp>
       <p:sp>
         <p:nvSpPr>
@@ -33612,6 +34264,10 @@
             <a:prstDash val="solid"/>
           </a:ln>
         </p:spPr>
+        <p:txBody>
+          <a:bodyPr/>
+          <a:p/>
+        </p:txBody>
       </p:sp>
       <p:sp>
         <p:nvSpPr>
@@ -33752,6 +34408,10 @@
             <a:prstDash val="solid"/>
           </a:ln>
         </p:spPr>
+        <p:txBody>
+          <a:bodyPr/>
+          <a:p/>
+        </p:txBody>
       </p:sp>
       <p:sp>
         <p:nvSpPr>
@@ -33892,6 +34552,10 @@
             <a:prstDash val="solid"/>
           </a:ln>
         </p:spPr>
+        <p:txBody>
+          <a:bodyPr/>
+          <a:p/>
+        </p:txBody>
       </p:sp>
       <p:sp>
         <p:nvSpPr>
@@ -34032,6 +34696,10 @@
             <a:prstDash val="solid"/>
           </a:ln>
         </p:spPr>
+        <p:txBody>
+          <a:bodyPr/>
+          <a:p/>
+        </p:txBody>
       </p:sp>
       <p:sp>
         <p:nvSpPr>
@@ -34172,6 +34840,10 @@
             <a:prstDash val="solid"/>
           </a:ln>
         </p:spPr>
+        <p:txBody>
+          <a:bodyPr/>
+          <a:p/>
+        </p:txBody>
       </p:sp>
       <p:sp>
         <p:nvSpPr>
@@ -34312,6 +34984,10 @@
             <a:prstDash val="solid"/>
           </a:ln>
         </p:spPr>
+        <p:txBody>
+          <a:bodyPr/>
+          <a:p/>
+        </p:txBody>
       </p:sp>
       <p:sp>
         <p:nvSpPr>

--- a/docs/submissions/Phasmid_DEFCON_DemoLabs.pptx
+++ b/docs/submissions/Phasmid_DEFCON_DemoLabs.pptx
@@ -526,12 +526,254 @@
           <a:lstStyle/>
           <a:p>
             <a:r>
-              <a:rPr lang="en-US" dirty="0"/>
-              <a:t>[00:00 / 目安 0:30] TITLE
-EN: "Hey, thanks for coming. This is Phasmid — the reference build of what I call the Janus Eidolon System. Local-only, coercion-aware storage, built for the moment someone has both your device and you. I'm Makoto Sugita — Mr. Rabbit."
-JA: 開始00分。掴みは短く。バナーを一度指してすぐ本題へ。45分ハード停止・目標コンテンツ約28分。</a:t>
+              <a:rPr b="0"/>
+              <a:t>[00:00 / 0:30] TITLE — 発話 0:20</a:t>
             </a:r>
             <a:endParaRPr lang="en-US" dirty="0"/>
+          </a:p>
+          <a:p>
+            <a:r>
+              <a:rPr b="0"/>
+              <a:t/>
+            </a:r>
+          </a:p>
+          <a:p>
+            <a:r>
+              <a:rPr b="0"/>
+              <a:t>【読み方】</a:t>
+            </a:r>
+          </a:p>
+          <a:p>
+            <a:r>
+              <a:rPr b="0"/>
+              <a:t>・英文1行＝1息。行末で必ず一度切る。</a:t>
+            </a:r>
+          </a:p>
+          <a:p>
+            <a:r>
+              <a:rPr b="0"/>
+              <a:t>・カタカナの太字＝その文で一番強く言う語。そこだけ高く長く言えば通じる。英語は一音ずつの正確さではなく強弱で伝わるので、この1語だけ意識すればよい。</a:t>
+            </a:r>
+          </a:p>
+          <a:p>
+            <a:r>
+              <a:rPr b="0"/>
+              <a:t>・カタカナは普段のカタカナ語のまま。無理に英語風に崩していない。</a:t>
+            </a:r>
+          </a:p>
+          <a:p>
+            <a:r>
+              <a:rPr b="0"/>
+              <a:t>・ゥ付き（ゥロング／ゥライト／コゥレクト）は3語だけ。そのまま読むと long／light／collect に聞こえるため。</a:t>
+            </a:r>
+          </a:p>
+          <a:p>
+            <a:r>
+              <a:rPr b="0"/>
+              <a:t>・ヴ＝V（ヴォルト=vault。ボルト=bolt と区別）。 ス・ズ＝th。</a:t>
+            </a:r>
+          </a:p>
+          <a:p>
+            <a:r>
+              <a:rPr b="0"/>
+              <a:t/>
+            </a:r>
+          </a:p>
+          <a:p>
+            <a:r>
+              <a:rPr b="0"/>
+              <a:t>“Hi. Thank you for coming.</a:t>
+            </a:r>
+          </a:p>
+          <a:p>
+            <a:r>
+              <a:rPr b="0"/>
+              <a:t>  </a:t>
+            </a:r>
+            <a:r>
+              <a:rPr b="1"/>
+              <a:t>ハイ</a:t>
+            </a:r>
+            <a:r>
+              <a:rPr b="0"/>
+              <a:t>。 サンキュー フォー </a:t>
+            </a:r>
+            <a:r>
+              <a:rPr b="1"/>
+              <a:t>カミング</a:t>
+            </a:r>
+            <a:r>
+              <a:rPr b="0"/>
+              <a:t>。</a:t>
+            </a:r>
+          </a:p>
+          <a:p>
+            <a:r>
+              <a:rPr b="0"/>
+              <a:t>This is Phasmid.</a:t>
+            </a:r>
+          </a:p>
+          <a:p>
+            <a:r>
+              <a:rPr b="0"/>
+              <a:t>  ディス イズ </a:t>
+            </a:r>
+            <a:r>
+              <a:rPr b="1"/>
+              <a:t>ファズミッド</a:t>
+            </a:r>
+            <a:r>
+              <a:rPr b="0"/>
+              <a:t>。</a:t>
+            </a:r>
+          </a:p>
+          <a:p>
+            <a:r>
+              <a:rPr b="0"/>
+              <a:t>It’s the reference build of the Janus Eidolon System.</a:t>
+            </a:r>
+          </a:p>
+          <a:p>
+            <a:r>
+              <a:rPr b="0"/>
+              <a:t>  イッツ ザ レファレンス ビルド オヴ ザ </a:t>
+            </a:r>
+            <a:r>
+              <a:rPr b="1"/>
+              <a:t>ジェイナス アイドウロン システム</a:t>
+            </a:r>
+            <a:r>
+              <a:rPr b="0"/>
+              <a:t>。</a:t>
+            </a:r>
+          </a:p>
+          <a:p>
+            <a:r>
+              <a:rPr b="0"/>
+              <a:t>Storage that stays local — and expects coercion.</a:t>
+            </a:r>
+          </a:p>
+          <a:p>
+            <a:r>
+              <a:rPr b="0"/>
+              <a:t>  ストレージ ザット ステイズ </a:t>
+            </a:r>
+            <a:r>
+              <a:rPr b="1"/>
+              <a:t>ローカル</a:t>
+            </a:r>
+            <a:r>
+              <a:rPr b="0"/>
+              <a:t> — アンド イクスペクツ コアージョン。</a:t>
+            </a:r>
+          </a:p>
+          <a:p>
+            <a:r>
+              <a:rPr b="0"/>
+              <a:t>It’s built for one moment.</a:t>
+            </a:r>
+          </a:p>
+          <a:p>
+            <a:r>
+              <a:rPr b="0"/>
+              <a:t>  イッツ ビルト フォー </a:t>
+            </a:r>
+            <a:r>
+              <a:rPr b="1"/>
+              <a:t>ワン モウメント</a:t>
+            </a:r>
+            <a:r>
+              <a:rPr b="0"/>
+              <a:t>。</a:t>
+            </a:r>
+          </a:p>
+          <a:p>
+            <a:r>
+              <a:rPr b="0"/>
+              <a:t>Someone has your device… and they have you.</a:t>
+            </a:r>
+          </a:p>
+          <a:p>
+            <a:r>
+              <a:rPr b="0"/>
+              <a:t>  サムワン ハズ ユア </a:t>
+            </a:r>
+            <a:r>
+              <a:rPr b="1"/>
+              <a:t>デバイス</a:t>
+            </a:r>
+            <a:r>
+              <a:rPr b="0"/>
+              <a:t>… アンド ゼイ ハヴ </a:t>
+            </a:r>
+            <a:r>
+              <a:rPr b="1"/>
+              <a:t>ユー</a:t>
+            </a:r>
+            <a:r>
+              <a:rPr b="0"/>
+              <a:t>。</a:t>
+            </a:r>
+          </a:p>
+          <a:p>
+            <a:r>
+              <a:rPr b="0"/>
+              <a:t>I’m Makoto Sugita, from GMO Cybersecurity by Ierae, in Tokyo.</a:t>
+            </a:r>
+          </a:p>
+          <a:p>
+            <a:r>
+              <a:rPr b="0"/>
+              <a:t>  アイム </a:t>
+            </a:r>
+            <a:r>
+              <a:rPr b="1"/>
+              <a:t>マコト スギタ</a:t>
+            </a:r>
+            <a:r>
+              <a:rPr b="0"/>
+              <a:t>、 フロム ジーエムオー サイバーセキュリティ バイ </a:t>
+            </a:r>
+            <a:r>
+              <a:rPr b="1"/>
+              <a:t>イエラエ</a:t>
+            </a:r>
+            <a:r>
+              <a:rPr b="0"/>
+              <a:t>、 イン トウキョウ。</a:t>
+            </a:r>
+          </a:p>
+          <a:p>
+            <a:r>
+              <a:rPr b="0"/>
+              <a:t>Online — Mr. Rabbit.”</a:t>
+            </a:r>
+          </a:p>
+          <a:p>
+            <a:r>
+              <a:rPr b="0"/>
+              <a:t>  オンライン — </a:t>
+            </a:r>
+            <a:r>
+              <a:rPr b="1"/>
+              <a:t>ミスター ラビット</a:t>
+            </a:r>
+            <a:r>
+              <a:rPr b="0"/>
+              <a:t>。</a:t>
+            </a:r>
+          </a:p>
+          <a:p>
+            <a:r>
+              <a:rPr b="0"/>
+              <a:t/>
+            </a:r>
+          </a:p>
+          <a:p>
+            <a:r>
+              <a:rPr b="0"/>
+              <a:t>JA: 掴みは短く。バナーを一度指す。時計スタート</a:t>
+            </a:r>
           </a:p>
         </p:txBody>
       </p:sp>
@@ -616,12 +858,180 @@
           <a:lstStyle/>
           <a:p>
             <a:r>
-              <a:rPr lang="en-US" dirty="0"/>
-              <a:t>[07:10 / 1:00] ARCHITECTURE BOUNDARY
-EN: "Architecturally, four things stay explicit. Two-slot storage. Local access-key mixing — so keys come from local state, not a passphrase alone. A restricted-action policy that gates anything sensitive or recovery-related. And capture-visible discipline: normal flows never expose the structure, the recovery path, or the order you'd try things in."
-JA: 4点を順に指す。専門聴衆はここで頷く。</a:t>
+              <a:rPr b="0"/>
+              <a:t>[07:10 / 1:00] ARCHITECTURE BOUNDARY — 発話 0:25</a:t>
             </a:r>
             <a:endParaRPr lang="en-US" dirty="0"/>
+          </a:p>
+          <a:p>
+            <a:r>
+              <a:rPr b="0"/>
+              <a:t/>
+            </a:r>
+          </a:p>
+          <a:p>
+            <a:r>
+              <a:rPr b="0"/>
+              <a:t>“Architecturally, four things stay explicit.</a:t>
+            </a:r>
+          </a:p>
+          <a:p>
+            <a:r>
+              <a:rPr b="0"/>
+              <a:t>  アーキテクチャリー、 フォー シングズ ステイ </a:t>
+            </a:r>
+            <a:r>
+              <a:rPr b="1"/>
+              <a:t>エクスプリシット</a:t>
+            </a:r>
+            <a:r>
+              <a:rPr b="0"/>
+              <a:t>。</a:t>
+            </a:r>
+          </a:p>
+          <a:p>
+            <a:r>
+              <a:rPr b="0"/>
+              <a:t>One. Two-slot storage.</a:t>
+            </a:r>
+          </a:p>
+          <a:p>
+            <a:r>
+              <a:rPr b="0"/>
+              <a:t>  </a:t>
+            </a:r>
+            <a:r>
+              <a:rPr b="1"/>
+              <a:t>ワン</a:t>
+            </a:r>
+            <a:r>
+              <a:rPr b="0"/>
+              <a:t>。 トゥースロット </a:t>
+            </a:r>
+            <a:r>
+              <a:rPr b="1"/>
+              <a:t>ストレージ</a:t>
+            </a:r>
+            <a:r>
+              <a:rPr b="0"/>
+              <a:t>。</a:t>
+            </a:r>
+          </a:p>
+          <a:p>
+            <a:r>
+              <a:rPr b="0"/>
+              <a:t>Two. Local access-key mixing — keys come from local state, not from a passphrase alone.</a:t>
+            </a:r>
+          </a:p>
+          <a:p>
+            <a:r>
+              <a:rPr b="0"/>
+              <a:t>  </a:t>
+            </a:r>
+            <a:r>
+              <a:rPr b="1"/>
+              <a:t>トゥー</a:t>
+            </a:r>
+            <a:r>
+              <a:rPr b="0"/>
+              <a:t>。 ローカル アクセスキー ミキシング — キーズ カム フロム </a:t>
+            </a:r>
+            <a:r>
+              <a:rPr b="1"/>
+              <a:t>ローカル ステイト</a:t>
+            </a:r>
+            <a:r>
+              <a:rPr b="0"/>
+              <a:t>、 ナット フロム ア パスフレイズ アロウン。</a:t>
+            </a:r>
+          </a:p>
+          <a:p>
+            <a:r>
+              <a:rPr b="0"/>
+              <a:t>Three. A restricted-action policy. It gates anything sensitive, and anything about recovery.</a:t>
+            </a:r>
+          </a:p>
+          <a:p>
+            <a:r>
+              <a:rPr b="0"/>
+              <a:t>  </a:t>
+            </a:r>
+            <a:r>
+              <a:rPr b="1"/>
+              <a:t>スリー</a:t>
+            </a:r>
+            <a:r>
+              <a:rPr b="0"/>
+              <a:t>。 ア リストリクティッドアクション ポリシー。 イット ゲイツ エニシング </a:t>
+            </a:r>
+            <a:r>
+              <a:rPr b="1"/>
+              <a:t>センシティヴ</a:t>
+            </a:r>
+            <a:r>
+              <a:rPr b="0"/>
+              <a:t>、 アンド エニシング アバウト リカヴァリー。</a:t>
+            </a:r>
+          </a:p>
+          <a:p>
+            <a:r>
+              <a:rPr b="0"/>
+              <a:t>Four. Capture-visible discipline.</a:t>
+            </a:r>
+          </a:p>
+          <a:p>
+            <a:r>
+              <a:rPr b="0"/>
+              <a:t>  </a:t>
+            </a:r>
+            <a:r>
+              <a:rPr b="1"/>
+              <a:t>フォー</a:t>
+            </a:r>
+            <a:r>
+              <a:rPr b="0"/>
+              <a:t>。 キャプチャーヴィジブル </a:t>
+            </a:r>
+            <a:r>
+              <a:rPr b="1"/>
+              <a:t>ディシプリン</a:t>
+            </a:r>
+            <a:r>
+              <a:rPr b="0"/>
+              <a:t>。</a:t>
+            </a:r>
+          </a:p>
+          <a:p>
+            <a:r>
+              <a:rPr b="0"/>
+              <a:t>Normal flows never show the structure, the recovery path, or the order you’d try things in.</a:t>
+            </a:r>
+          </a:p>
+          <a:p>
+            <a:r>
+              <a:rPr b="0"/>
+              <a:t>  ノーマル フロウズ </a:t>
+            </a:r>
+            <a:r>
+              <a:rPr b="1"/>
+              <a:t>ネヴァー</a:t>
+            </a:r>
+            <a:r>
+              <a:rPr b="0"/>
+              <a:t> ショウ ザ ストラクチャー、 ザ リカヴァリー パス、 オア ジ オーダー ユード トライ シングズ イン。</a:t>
+            </a:r>
+          </a:p>
+          <a:p>
+            <a:r>
+              <a:rPr b="0"/>
+              <a:t/>
+            </a:r>
+          </a:p>
+          <a:p>
+            <a:r>
+              <a:rPr b="0"/>
+              <a:t>JA: 4点を順に。専門聴衆が頷く箇所。11は流し気味</a:t>
+            </a:r>
           </a:p>
         </p:txBody>
       </p:sp>
@@ -706,12 +1116,104 @@
           <a:lstStyle/>
           <a:p>
             <a:r>
-              <a:rPr lang="en-US" dirty="0"/>
-              <a:t>[08:10 / 0:40] LAYERS + DOCS
-EN: "Underneath, the system is built as narrow local layers — entry points, the restricted-action policy, the crypto core, local state, and the deployment boundary. And none of this is folklore: it's documented — a full specification, the threat model, the formal Janus spec, and the delaying-architecture design. Read it, poke holes in it."
-JA: 流し気味。文書が揃っていること＝真剣な研究であることを示す。</a:t>
+              <a:rPr b="0"/>
+              <a:t>[08:10 / 0:40] LAYERS + DOCS — 発話 0:15</a:t>
             </a:r>
             <a:endParaRPr lang="en-US" dirty="0"/>
+          </a:p>
+          <a:p>
+            <a:r>
+              <a:rPr b="0"/>
+              <a:t/>
+            </a:r>
+          </a:p>
+          <a:p>
+            <a:r>
+              <a:rPr b="0"/>
+              <a:t>Underneath are narrow local layers.</a:t>
+            </a:r>
+          </a:p>
+          <a:p>
+            <a:r>
+              <a:rPr b="0"/>
+              <a:t>  アンダニース アー </a:t>
+            </a:r>
+            <a:r>
+              <a:rPr b="1"/>
+              <a:t>ナロウ ローカル レイヤーズ</a:t>
+            </a:r>
+            <a:r>
+              <a:rPr b="0"/>
+              <a:t>。</a:t>
+            </a:r>
+          </a:p>
+          <a:p>
+            <a:r>
+              <a:rPr b="0"/>
+              <a:t>Entry points, policy, crypto core, local state, deployment.</a:t>
+            </a:r>
+          </a:p>
+          <a:p>
+            <a:r>
+              <a:rPr b="0"/>
+              <a:t>  エントリー ポインツ、 ポリシー、 クリプト コア、 ローカル ステイト、 ディプロイメント。</a:t>
+            </a:r>
+          </a:p>
+          <a:p>
+            <a:r>
+              <a:rPr b="0"/>
+              <a:t>None of this is folklore. It’s documented.</a:t>
+            </a:r>
+          </a:p>
+          <a:p>
+            <a:r>
+              <a:rPr b="0"/>
+              <a:t>  </a:t>
+            </a:r>
+            <a:r>
+              <a:rPr b="1"/>
+              <a:t>ナン</a:t>
+            </a:r>
+            <a:r>
+              <a:rPr b="0"/>
+              <a:t> オヴ ディス イズ フォウクロー。 イッツ </a:t>
+            </a:r>
+            <a:r>
+              <a:rPr b="1"/>
+              <a:t>ドキュメンティッド</a:t>
+            </a:r>
+            <a:r>
+              <a:rPr b="0"/>
+              <a:t>。</a:t>
+            </a:r>
+          </a:p>
+          <a:p>
+            <a:r>
+              <a:rPr b="0"/>
+              <a:t>Read it — and poke holes in it.”</a:t>
+            </a:r>
+          </a:p>
+          <a:p>
+            <a:r>
+              <a:rPr b="0"/>
+              <a:t>  </a:t>
+            </a:r>
+            <a:r>
+              <a:rPr b="1"/>
+              <a:t>リード</a:t>
+            </a:r>
+            <a:r>
+              <a:rPr b="0"/>
+              <a:t> イット — アンド </a:t>
+            </a:r>
+            <a:r>
+              <a:rPr b="1"/>
+              <a:t>ポウク ホウルズ</a:t>
+            </a:r>
+            <a:r>
+              <a:rPr b="0"/>
+              <a:t> イン イット。</a:t>
+            </a:r>
           </a:p>
         </p:txBody>
       </p:sp>
@@ -796,12 +1298,264 @@
           <a:lstStyle/>
           <a:p>
             <a:r>
-              <a:rPr lang="en-US" dirty="0"/>
-              <a:t>[08:50 / 0:50] THREE PILLARS
-EN: "Three moving parts. One — an encrypted local vessel: authenticated encryption, password-derived keys. Two — object-cue operation; I'll come right back to this, it's the fun part. Three — controlled disclosure: workflows that separate what's shown from what's protected."
-JA: ②を予告して次スライドへ引っ張る。</a:t>
+              <a:rPr b="0"/>
+              <a:t>[08:50 / 0:50] THREE PILLARS — 発話 0:35</a:t>
             </a:r>
             <a:endParaRPr lang="en-US" dirty="0"/>
+          </a:p>
+          <a:p>
+            <a:r>
+              <a:rPr b="0"/>
+              <a:t/>
+            </a:r>
+          </a:p>
+          <a:p>
+            <a:r>
+              <a:rPr b="0"/>
+              <a:t>“Three moving parts.</a:t>
+            </a:r>
+          </a:p>
+          <a:p>
+            <a:r>
+              <a:rPr b="0"/>
+              <a:t>  </a:t>
+            </a:r>
+            <a:r>
+              <a:rPr b="1"/>
+              <a:t>スリー</a:t>
+            </a:r>
+            <a:r>
+              <a:rPr b="0"/>
+              <a:t> ムーヴィング パーツ。</a:t>
+            </a:r>
+          </a:p>
+          <a:p>
+            <a:r>
+              <a:rPr b="0"/>
+              <a:t>One — an encrypted local vessel. Authenticated encryption, password-derived keys.</a:t>
+            </a:r>
+          </a:p>
+          <a:p>
+            <a:r>
+              <a:rPr b="0"/>
+              <a:t>  </a:t>
+            </a:r>
+            <a:r>
+              <a:rPr b="1"/>
+              <a:t>ワン</a:t>
+            </a:r>
+            <a:r>
+              <a:rPr b="0"/>
+              <a:t> — アン インクリプティッド ローカル </a:t>
+            </a:r>
+            <a:r>
+              <a:rPr b="1"/>
+              <a:t>ヴェッセル</a:t>
+            </a:r>
+            <a:r>
+              <a:rPr b="0"/>
+              <a:t>。 オーセンティケイティッド インクリプション、 パスワードディライヴド キーズ。</a:t>
+            </a:r>
+          </a:p>
+          <a:p>
+            <a:r>
+              <a:rPr b="0"/>
+              <a:t>Two — object-cue operation. I’ll come right back to this. It’s the fun part.</a:t>
+            </a:r>
+          </a:p>
+          <a:p>
+            <a:r>
+              <a:rPr b="0"/>
+              <a:t>  </a:t>
+            </a:r>
+            <a:r>
+              <a:rPr b="1"/>
+              <a:t>トゥー</a:t>
+            </a:r>
+            <a:r>
+              <a:rPr b="0"/>
+              <a:t> — オブジェクトキュー オペレイション。 アイル カム ゥライト バック トゥ ディス。 イッツ ザ </a:t>
+            </a:r>
+            <a:r>
+              <a:rPr b="1"/>
+              <a:t>ファン パート</a:t>
+            </a:r>
+            <a:r>
+              <a:rPr b="0"/>
+              <a:t>。</a:t>
+            </a:r>
+          </a:p>
+          <a:p>
+            <a:r>
+              <a:rPr b="0"/>
+              <a:t>Three — controlled disclosure.</a:t>
+            </a:r>
+          </a:p>
+          <a:p>
+            <a:r>
+              <a:rPr b="0"/>
+              <a:t>  </a:t>
+            </a:r>
+            <a:r>
+              <a:rPr b="1"/>
+              <a:t>スリー</a:t>
+            </a:r>
+            <a:r>
+              <a:rPr b="0"/>
+              <a:t> — コントロールド ディスクロージャー。</a:t>
+            </a:r>
+          </a:p>
+          <a:p>
+            <a:r>
+              <a:rPr b="0"/>
+              <a:t>And that third one is concrete, not a slogan.</a:t>
+            </a:r>
+          </a:p>
+          <a:p>
+            <a:r>
+              <a:rPr b="0"/>
+              <a:t>  アンド ザット サード ワン イズ </a:t>
+            </a:r>
+            <a:r>
+              <a:rPr b="1"/>
+              <a:t>コンクリート</a:t>
+            </a:r>
+            <a:r>
+              <a:rPr b="0"/>
+              <a:t>、 ナット ア スロウガン。</a:t>
+            </a:r>
+          </a:p>
+          <a:p>
+            <a:r>
+              <a:rPr b="0"/>
+              <a:t>You set three credentials.</a:t>
+            </a:r>
+          </a:p>
+          <a:p>
+            <a:r>
+              <a:rPr b="0"/>
+              <a:t>  ユー セット </a:t>
+            </a:r>
+            <a:r>
+              <a:rPr b="1"/>
+              <a:t>スリー クリデンシャルズ</a:t>
+            </a:r>
+            <a:r>
+              <a:rPr b="0"/>
+              <a:t>。</a:t>
+            </a:r>
+          </a:p>
+          <a:p>
+            <a:r>
+              <a:rPr b="0"/>
+              <a:t>One opens the real file.</a:t>
+            </a:r>
+          </a:p>
+          <a:p>
+            <a:r>
+              <a:rPr b="0"/>
+              <a:t>  ワン </a:t>
+            </a:r>
+            <a:r>
+              <a:rPr b="1"/>
+              <a:t>オウプンズ</a:t>
+            </a:r>
+            <a:r>
+              <a:rPr b="0"/>
+              <a:t> ザ リアル ファイル。</a:t>
+            </a:r>
+          </a:p>
+          <a:p>
+            <a:r>
+              <a:rPr b="0"/>
+              <a:t>One opens the decoy.</a:t>
+            </a:r>
+          </a:p>
+          <a:p>
+            <a:r>
+              <a:rPr b="0"/>
+              <a:t>  ワン オウプンズ ザ </a:t>
+            </a:r>
+            <a:r>
+              <a:rPr b="1"/>
+              <a:t>ディーコイ</a:t>
+            </a:r>
+            <a:r>
+              <a:rPr b="0"/>
+              <a:t>。</a:t>
+            </a:r>
+          </a:p>
+          <a:p>
+            <a:r>
+              <a:rPr b="0"/>
+              <a:t>And one destroys the real file.</a:t>
+            </a:r>
+          </a:p>
+          <a:p>
+            <a:r>
+              <a:rPr b="0"/>
+              <a:t>  アンド ワン </a:t>
+            </a:r>
+            <a:r>
+              <a:rPr b="1"/>
+              <a:t>ディストロイズ</a:t>
+            </a:r>
+            <a:r>
+              <a:rPr b="0"/>
+              <a:t> ザ リアル ファイル。</a:t>
+            </a:r>
+          </a:p>
+          <a:p>
+            <a:r>
+              <a:rPr b="0"/>
+              <a:t>Three passwords. Three very different outcomes.</a:t>
+            </a:r>
+          </a:p>
+          <a:p>
+            <a:r>
+              <a:rPr b="0"/>
+              <a:t>  スリー パスワーズ。 スリー ヴェリー </a:t>
+            </a:r>
+            <a:r>
+              <a:rPr b="1"/>
+              <a:t>ディファレント アウトカムズ</a:t>
+            </a:r>
+            <a:r>
+              <a:rPr b="0"/>
+              <a:t>。</a:t>
+            </a:r>
+          </a:p>
+          <a:p>
+            <a:r>
+              <a:rPr b="0"/>
+              <a:t>And only you know which is which.”</a:t>
+            </a:r>
+          </a:p>
+          <a:p>
+            <a:r>
+              <a:rPr b="0"/>
+              <a:t>  アンド </a:t>
+            </a:r>
+            <a:r>
+              <a:rPr b="1"/>
+              <a:t>オウンリー ユー</a:t>
+            </a:r>
+            <a:r>
+              <a:rPr b="0"/>
+              <a:t> ノウ ウィッチ イズ ウィッチ。</a:t>
+            </a:r>
+          </a:p>
+          <a:p>
+            <a:r>
+              <a:rPr b="0"/>
+              <a:t/>
+            </a:r>
+          </a:p>
+          <a:p>
+            <a:r>
+              <a:rPr b="0"/>
+              <a:t>JA: ② を予告して引っ張る。3パスフレーズはここが初出 — 指で3つ数えて見せると残る。破壊資格の意味は Slide 21 まで引っ張る</a:t>
+            </a:r>
           </a:p>
         </p:txBody>
       </p:sp>
@@ -886,17 +1640,362 @@
           <a:lstStyle/>
           <a:p>
             <a:r>
-              <a:t>[09:40 / 1:20] OBJECT-CUE  ★見せ場</a:t>
-            </a:r>
-          </a:p>
-          <a:p>
-            <a:r>
-              <a:t>EN: "Here's the fun part. You show an everyday object to the camera to operate the access gate — nothing to type, nothing that looks like a secret. But this is the part people get wrong, so let me be clear: the object is a cue, not a key. It drives operation and policy checks. It is not the encryption key. A photo of the object unlocks nothing. The crypto stays with Argon2id and AES-GCM — the object just decides whether you get to act. You will see this fail live in a few minutes."</a:t>
-            </a:r>
-          </a:p>
-          <a:p>
-            <a:r>
-              <a:t>JA: ゆっくり。最大の差別化点。cue≠key を二度言う。手元の物体を掲げると効果的。**最後の一文で Step 3b（物体なしの失敗）を予告すること。**実証を約束しておくとデモの山が強くなる。</a:t>
+              <a:rPr b="0"/>
+              <a:t>[09:40 / 1:20] OBJECT-CUE  ★見せ場 — 発話 0:50</a:t>
+            </a:r>
+          </a:p>
+          <a:p>
+            <a:r>
+              <a:rPr b="0"/>
+              <a:t/>
+            </a:r>
+          </a:p>
+          <a:p>
+            <a:r>
+              <a:rPr b="0"/>
+              <a:t>“Here’s the fun part.</a:t>
+            </a:r>
+          </a:p>
+          <a:p>
+            <a:r>
+              <a:rPr b="0"/>
+              <a:t>  ヒアズ ザ </a:t>
+            </a:r>
+            <a:r>
+              <a:rPr b="1"/>
+              <a:t>ファン パート</a:t>
+            </a:r>
+            <a:r>
+              <a:rPr b="0"/>
+              <a:t>。</a:t>
+            </a:r>
+          </a:p>
+          <a:p>
+            <a:r>
+              <a:rPr b="0"/>
+              <a:t>You show an everyday object to the camera, and that operates the access gate.</a:t>
+            </a:r>
+          </a:p>
+          <a:p>
+            <a:r>
+              <a:rPr b="0"/>
+              <a:t>  ユー ショウ アン エヴリデイ </a:t>
+            </a:r>
+            <a:r>
+              <a:rPr b="1"/>
+              <a:t>オブジェクト</a:t>
+            </a:r>
+            <a:r>
+              <a:rPr b="0"/>
+              <a:t> トゥ ザ カメラ、 アンド ザット オペレイツ ジ </a:t>
+            </a:r>
+            <a:r>
+              <a:rPr b="1"/>
+              <a:t>アクセス ゲイト</a:t>
+            </a:r>
+            <a:r>
+              <a:rPr b="0"/>
+              <a:t>。</a:t>
+            </a:r>
+          </a:p>
+          <a:p>
+            <a:r>
+              <a:rPr b="0"/>
+              <a:t>Nothing to type. Nothing that looks like a secret.</a:t>
+            </a:r>
+          </a:p>
+          <a:p>
+            <a:r>
+              <a:rPr b="0"/>
+              <a:t>  </a:t>
+            </a:r>
+            <a:r>
+              <a:rPr b="1"/>
+              <a:t>ナッシング</a:t>
+            </a:r>
+            <a:r>
+              <a:rPr b="0"/>
+              <a:t> トゥ タイプ。 </a:t>
+            </a:r>
+            <a:r>
+              <a:rPr b="1"/>
+              <a:t>ナッシング</a:t>
+            </a:r>
+            <a:r>
+              <a:rPr b="0"/>
+              <a:t> ザット ルックス ライク ア シークレット。</a:t>
+            </a:r>
+          </a:p>
+          <a:p>
+            <a:r>
+              <a:rPr b="0"/>
+              <a:t>Now — this is the part people get wrong. So let me be clear.</a:t>
+            </a:r>
+          </a:p>
+          <a:p>
+            <a:r>
+              <a:rPr b="0"/>
+              <a:t>  ナウ — ディス イズ ザ パート ピープル ゲット </a:t>
+            </a:r>
+            <a:r>
+              <a:rPr b="1"/>
+              <a:t>ゥロング</a:t>
+            </a:r>
+            <a:r>
+              <a:rPr b="0"/>
+              <a:t>。 ソウ レット ミー ビー </a:t>
+            </a:r>
+            <a:r>
+              <a:rPr b="1"/>
+              <a:t>クリア</a:t>
+            </a:r>
+            <a:r>
+              <a:rPr b="0"/>
+              <a:t>。</a:t>
+            </a:r>
+          </a:p>
+          <a:p>
+            <a:r>
+              <a:rPr b="0"/>
+              <a:t>The object is a cue, not a key.</a:t>
+            </a:r>
+          </a:p>
+          <a:p>
+            <a:r>
+              <a:rPr b="0"/>
+              <a:t>  ジ オブジェクト イズ ア </a:t>
+            </a:r>
+            <a:r>
+              <a:rPr b="1"/>
+              <a:t>キュー</a:t>
+            </a:r>
+            <a:r>
+              <a:rPr b="0"/>
+              <a:t>、 </a:t>
+            </a:r>
+            <a:r>
+              <a:rPr b="1"/>
+              <a:t>ナット</a:t>
+            </a:r>
+            <a:r>
+              <a:rPr b="0"/>
+              <a:t> ア キー。</a:t>
+            </a:r>
+          </a:p>
+          <a:p>
+            <a:r>
+              <a:rPr b="0"/>
+              <a:t>It drives operation, and policy checks.</a:t>
+            </a:r>
+          </a:p>
+          <a:p>
+            <a:r>
+              <a:rPr b="0"/>
+              <a:t>  イット ドライヴズ </a:t>
+            </a:r>
+            <a:r>
+              <a:rPr b="1"/>
+              <a:t>オペレイション</a:t>
+            </a:r>
+            <a:r>
+              <a:rPr b="0"/>
+              <a:t>、 アンド ポリシー チェックス。</a:t>
+            </a:r>
+          </a:p>
+          <a:p>
+            <a:r>
+              <a:rPr b="0"/>
+              <a:t>It is not the encryption key.</a:t>
+            </a:r>
+          </a:p>
+          <a:p>
+            <a:r>
+              <a:rPr b="0"/>
+              <a:t>  イット イズ </a:t>
+            </a:r>
+            <a:r>
+              <a:rPr b="1"/>
+              <a:t>ナット</a:t>
+            </a:r>
+            <a:r>
+              <a:rPr b="0"/>
+              <a:t> ジ インクリプション キー。</a:t>
+            </a:r>
+          </a:p>
+          <a:p>
+            <a:r>
+              <a:rPr b="0"/>
+              <a:t>A photo of the object unlocks nothing.</a:t>
+            </a:r>
+          </a:p>
+          <a:p>
+            <a:r>
+              <a:rPr b="0"/>
+              <a:t>  ア フォウトウ オヴ ジ オブジェクト アンロックス </a:t>
+            </a:r>
+            <a:r>
+              <a:rPr b="1"/>
+              <a:t>ナッシング</a:t>
+            </a:r>
+            <a:r>
+              <a:rPr b="0"/>
+              <a:t>。</a:t>
+            </a:r>
+          </a:p>
+          <a:p>
+            <a:r>
+              <a:rPr b="0"/>
+              <a:t>The crypto stays with Argon2id and AES-GCM.</a:t>
+            </a:r>
+          </a:p>
+          <a:p>
+            <a:r>
+              <a:rPr b="0"/>
+              <a:t>  ザ クリプト ステイズ ウィズ </a:t>
+            </a:r>
+            <a:r>
+              <a:rPr b="1"/>
+              <a:t>アーゴン トゥー アイディー</a:t>
+            </a:r>
+            <a:r>
+              <a:rPr b="0"/>
+              <a:t> アンド </a:t>
+            </a:r>
+            <a:r>
+              <a:rPr b="1"/>
+              <a:t>エイ イー エス ジー シー エム</a:t>
+            </a:r>
+            <a:r>
+              <a:rPr b="0"/>
+              <a:t>。</a:t>
+            </a:r>
+          </a:p>
+          <a:p>
+            <a:r>
+              <a:rPr b="0"/>
+              <a:t>The object only decides whether you get to act.</a:t>
+            </a:r>
+          </a:p>
+          <a:p>
+            <a:r>
+              <a:rPr b="0"/>
+              <a:t>  ジ オブジェクト オウンリー ディサイズ ウェザー ユー ゲット トゥ </a:t>
+            </a:r>
+            <a:r>
+              <a:rPr b="1"/>
+              <a:t>アクト</a:t>
+            </a:r>
+            <a:r>
+              <a:rPr b="0"/>
+              <a:t>。</a:t>
+            </a:r>
+          </a:p>
+          <a:p>
+            <a:r>
+              <a:rPr b="0"/>
+              <a:t>And you’ll watch this fail, live, in a few minutes.</a:t>
+            </a:r>
+          </a:p>
+          <a:p>
+            <a:r>
+              <a:rPr b="0"/>
+              <a:t>  アンド ユール ウォッチ ディス </a:t>
+            </a:r>
+            <a:r>
+              <a:rPr b="1"/>
+              <a:t>フェイル</a:t>
+            </a:r>
+            <a:r>
+              <a:rPr b="0"/>
+              <a:t>、 </a:t>
+            </a:r>
+            <a:r>
+              <a:rPr b="1"/>
+              <a:t>ライヴ</a:t>
+            </a:r>
+            <a:r>
+              <a:rPr b="0"/>
+              <a:t>、 イン ア フュー ミニッツ。</a:t>
+            </a:r>
+          </a:p>
+          <a:p>
+            <a:r>
+              <a:rPr b="0"/>
+              <a:t>Same file. Same password. No object.”</a:t>
+            </a:r>
+          </a:p>
+          <a:p>
+            <a:r>
+              <a:rPr b="0"/>
+              <a:t>  セイム ファイル。 セイム パスワード。 </a:t>
+            </a:r>
+            <a:r>
+              <a:rPr b="1"/>
+              <a:t>ノウ オブジェクト</a:t>
+            </a:r>
+            <a:r>
+              <a:rPr b="0"/>
+              <a:t>。</a:t>
+            </a:r>
+          </a:p>
+          <a:p>
+            <a:r>
+              <a:rPr b="0"/>
+              <a:t/>
+            </a:r>
+          </a:p>
+          <a:p>
+            <a:r>
+              <a:rPr b="0"/>
+              <a:t>SPEAK（決めゼリフ・間を置いて）</a:t>
+            </a:r>
+          </a:p>
+          <a:p>
+            <a:r>
+              <a:rPr b="0"/>
+              <a:t>“A cue, not a key. A photo of it unlocks nothing.”</a:t>
+            </a:r>
+          </a:p>
+          <a:p>
+            <a:r>
+              <a:rPr b="0"/>
+              <a:t>  ア </a:t>
+            </a:r>
+            <a:r>
+              <a:rPr b="1"/>
+              <a:t>キュー</a:t>
+            </a:r>
+            <a:r>
+              <a:rPr b="0"/>
+              <a:t>、 </a:t>
+            </a:r>
+            <a:r>
+              <a:rPr b="1"/>
+              <a:t>ナット</a:t>
+            </a:r>
+            <a:r>
+              <a:rPr b="0"/>
+              <a:t> ア キー。 ア フォウトウ オヴ イット アンロックス </a:t>
+            </a:r>
+            <a:r>
+              <a:rPr b="1"/>
+              <a:t>ナッシング</a:t>
+            </a:r>
+            <a:r>
+              <a:rPr b="0"/>
+              <a:t>。</a:t>
+            </a:r>
+          </a:p>
+          <a:p>
+            <a:r>
+              <a:rPr b="0"/>
+              <a:t/>
+            </a:r>
+          </a:p>
+          <a:p>
+            <a:r>
+              <a:rPr b="0"/>
+              <a:t>JA: ゆっくり。手元の物体を掲げると効果的。最後の一文で Step 4 を予告する — 実証を約束しておくとデモの山が強くなる</a:t>
             </a:r>
           </a:p>
         </p:txBody>
@@ -982,17 +2081,438 @@
           <a:lstStyle/>
           <a:p>
             <a:r>
-              <a:t>[11:00 / 1:20] COERCION-SAFE DELAYING</a:t>
-            </a:r>
-          </a:p>
-          <a:p>
-            <a:r>
-              <a:t>EN: "This is what makes it coercion-safe. Silent Standby: a hotkey drops the sensitive UI into a harmless state — recovery needs re-auth. Then the material itself: the file you would hand over is one you wrote and stored yourself, before any coercion. Phasmid does not manufacture your cover story — a generated dataset would not survive five minutes of questioning. What it does offer is a filler that occupies free space, so an otherwise empty container does not read as empty. And context profiles — travel, field engineer, researcher — that tell you what 'normal' should look like, so you know what to prepare. In coercion-safe mode, a low-confidence match routes to the disclosure face instead of failing loudly. The goal isn't magic invisibility — it's uncertainty and delay."</a:t>
-            </a:r>
-          </a:p>
-          <a:p>
-            <a:r>
-              <a:t>JA: ここが製品モデルの核心。**囮ファイルは利用者が用意する**と言い切る。ツールが作った偽物に真実味はない。填充は空き領域対策に過ぎない。Silent Standby はデモで見せると予告。認識モードの帯を指す。</a:t>
+              <a:rPr b="0"/>
+              <a:t>[11:00 / 1:20] COERCION-SAFE DELAYING — 発話 1:20</a:t>
+            </a:r>
+          </a:p>
+          <a:p>
+            <a:r>
+              <a:rPr b="0"/>
+              <a:t/>
+            </a:r>
+          </a:p>
+          <a:p>
+            <a:r>
+              <a:rPr b="0"/>
+              <a:t>“This is what makes it coercion-safe.</a:t>
+            </a:r>
+          </a:p>
+          <a:p>
+            <a:r>
+              <a:rPr b="0"/>
+              <a:t>  ディス イズ ワット メイクス イット </a:t>
+            </a:r>
+            <a:r>
+              <a:rPr b="1"/>
+              <a:t>コアージョン セイフ</a:t>
+            </a:r>
+            <a:r>
+              <a:rPr b="0"/>
+              <a:t>。</a:t>
+            </a:r>
+          </a:p>
+          <a:p>
+            <a:r>
+              <a:rPr b="0"/>
+              <a:t>First, Silent Standby.</a:t>
+            </a:r>
+          </a:p>
+          <a:p>
+            <a:r>
+              <a:rPr b="0"/>
+              <a:t>  ファースト、 </a:t>
+            </a:r>
+            <a:r>
+              <a:rPr b="1"/>
+              <a:t>サイレント スタンドバイ</a:t>
+            </a:r>
+            <a:r>
+              <a:rPr b="0"/>
+              <a:t>。</a:t>
+            </a:r>
+          </a:p>
+          <a:p>
+            <a:r>
+              <a:rPr b="0"/>
+              <a:t>One hotkey drops the sensitive interface into a harmless state.</a:t>
+            </a:r>
+          </a:p>
+          <a:p>
+            <a:r>
+              <a:rPr b="0"/>
+              <a:t>  ワン ホットキー ドロップス ザ センシティヴ インターフェイス イントゥ ア </a:t>
+            </a:r>
+            <a:r>
+              <a:rPr b="1"/>
+              <a:t>ハームレス ステイト</a:t>
+            </a:r>
+            <a:r>
+              <a:rPr b="0"/>
+              <a:t>。</a:t>
+            </a:r>
+          </a:p>
+          <a:p>
+            <a:r>
+              <a:rPr b="0"/>
+              <a:t>Coming back needs re-authentication.</a:t>
+            </a:r>
+          </a:p>
+          <a:p>
+            <a:r>
+              <a:rPr b="0"/>
+              <a:t>  カミング バック ニーズ </a:t>
+            </a:r>
+            <a:r>
+              <a:rPr b="1"/>
+              <a:t>リーオーセンティケイション</a:t>
+            </a:r>
+            <a:r>
+              <a:rPr b="0"/>
+              <a:t>。</a:t>
+            </a:r>
+          </a:p>
+          <a:p>
+            <a:r>
+              <a:rPr b="0"/>
+              <a:t>Second — the material itself. And I want to be exact here.</a:t>
+            </a:r>
+          </a:p>
+          <a:p>
+            <a:r>
+              <a:rPr b="0"/>
+              <a:t>  セカンド — ザ マテリアル </a:t>
+            </a:r>
+            <a:r>
+              <a:rPr b="1"/>
+              <a:t>イットセルフ</a:t>
+            </a:r>
+            <a:r>
+              <a:rPr b="0"/>
+              <a:t>。 アンド アイ ワナ ビー </a:t>
+            </a:r>
+            <a:r>
+              <a:rPr b="1"/>
+              <a:t>イグザクト</a:t>
+            </a:r>
+            <a:r>
+              <a:rPr b="0"/>
+              <a:t> ヒア。</a:t>
+            </a:r>
+          </a:p>
+          <a:p>
+            <a:r>
+              <a:rPr b="0"/>
+              <a:t>The file you would hand over is a file you wrote and stored yourself.</a:t>
+            </a:r>
+          </a:p>
+          <a:p>
+            <a:r>
+              <a:rPr b="0"/>
+              <a:t>  ザ ファイル ユー ウド ハンド オウヴァー イズ ア ファイル ユー </a:t>
+            </a:r>
+            <a:r>
+              <a:rPr b="1"/>
+              <a:t>ロウト アンド ストード ユアセルフ</a:t>
+            </a:r>
+            <a:r>
+              <a:rPr b="0"/>
+              <a:t>。</a:t>
+            </a:r>
+          </a:p>
+          <a:p>
+            <a:r>
+              <a:rPr b="0"/>
+              <a:t>Before any coercion.</a:t>
+            </a:r>
+          </a:p>
+          <a:p>
+            <a:r>
+              <a:rPr b="0"/>
+              <a:t>  ビフォー </a:t>
+            </a:r>
+            <a:r>
+              <a:rPr b="1"/>
+              <a:t>エニー</a:t>
+            </a:r>
+            <a:r>
+              <a:rPr b="0"/>
+              <a:t> コアージョン。</a:t>
+            </a:r>
+          </a:p>
+          <a:p>
+            <a:r>
+              <a:rPr b="0"/>
+              <a:t>Phasmid does not manufacture your cover story.</a:t>
+            </a:r>
+          </a:p>
+          <a:p>
+            <a:r>
+              <a:rPr b="0"/>
+              <a:t>  ファズミッド ダズ </a:t>
+            </a:r>
+            <a:r>
+              <a:rPr b="1"/>
+              <a:t>ナット</a:t>
+            </a:r>
+            <a:r>
+              <a:rPr b="0"/>
+              <a:t> マニュファクチャー ユア カヴァー ストーリー。</a:t>
+            </a:r>
+          </a:p>
+          <a:p>
+            <a:r>
+              <a:rPr b="0"/>
+              <a:t>Generated data would not survive five minutes of questioning.</a:t>
+            </a:r>
+          </a:p>
+          <a:p>
+            <a:r>
+              <a:rPr b="0"/>
+              <a:t>  ジェネレイティッド データ ウド ナット </a:t>
+            </a:r>
+            <a:r>
+              <a:rPr b="1"/>
+              <a:t>サヴァイヴ</a:t>
+            </a:r>
+            <a:r>
+              <a:rPr b="0"/>
+              <a:t> ファイヴ ミニッツ オヴ クエスチョニング。</a:t>
+            </a:r>
+          </a:p>
+          <a:p>
+            <a:r>
+              <a:rPr b="0"/>
+              <a:t>Not from someone holding your passport.</a:t>
+            </a:r>
+          </a:p>
+          <a:p>
+            <a:r>
+              <a:rPr b="0"/>
+              <a:t>  ナット フロム サムワン ホウルディング ユア </a:t>
+            </a:r>
+            <a:r>
+              <a:rPr b="1"/>
+              <a:t>パスポート</a:t>
+            </a:r>
+            <a:r>
+              <a:rPr b="0"/>
+              <a:t>。</a:t>
+            </a:r>
+          </a:p>
+          <a:p>
+            <a:r>
+              <a:rPr b="0"/>
+              <a:t>Realism has to come from your own material — not from my random-text generator.</a:t>
+            </a:r>
+          </a:p>
+          <a:p>
+            <a:r>
+              <a:rPr b="0"/>
+              <a:t>  </a:t>
+            </a:r>
+            <a:r>
+              <a:rPr b="1"/>
+              <a:t>リアリズム</a:t>
+            </a:r>
+            <a:r>
+              <a:rPr b="0"/>
+              <a:t> ハズ トゥ カム フロム ユア オウン マテリアル — ナット フロム マイ ランダムテクスト ジェネレイター。</a:t>
+            </a:r>
+          </a:p>
+          <a:p>
+            <a:r>
+              <a:rPr b="0"/>
+              <a:t>What the tool does give you is filler.</a:t>
+            </a:r>
+          </a:p>
+          <a:p>
+            <a:r>
+              <a:rPr b="0"/>
+              <a:t>  ワット ザ ツール ダズ ギヴ ユー イズ </a:t>
+            </a:r>
+            <a:r>
+              <a:rPr b="1"/>
+              <a:t>フィラー</a:t>
+            </a:r>
+            <a:r>
+              <a:rPr b="0"/>
+              <a:t>。</a:t>
+            </a:r>
+          </a:p>
+          <a:p>
+            <a:r>
+              <a:rPr b="0"/>
+              <a:t>It occupies free space, so an empty container doesn’t read as empty.</a:t>
+            </a:r>
+          </a:p>
+          <a:p>
+            <a:r>
+              <a:rPr b="0"/>
+              <a:t>  イット オキュパイズ </a:t>
+            </a:r>
+            <a:r>
+              <a:rPr b="1"/>
+              <a:t>フリー スペイス</a:t>
+            </a:r>
+            <a:r>
+              <a:rPr b="0"/>
+              <a:t>、 ソウ アン エンプティ コンテナ ダズント リード アズ </a:t>
+            </a:r>
+            <a:r>
+              <a:rPr b="1"/>
+              <a:t>エンプティ</a:t>
+            </a:r>
+            <a:r>
+              <a:rPr b="0"/>
+              <a:t>。</a:t>
+            </a:r>
+          </a:p>
+          <a:p>
+            <a:r>
+              <a:rPr b="0"/>
+              <a:t>That’s a volume problem. And volume is something software can actually solve.</a:t>
+            </a:r>
+          </a:p>
+          <a:p>
+            <a:r>
+              <a:rPr b="0"/>
+              <a:t>  ザッツ ア </a:t>
+            </a:r>
+            <a:r>
+              <a:rPr b="1"/>
+              <a:t>ヴォリューム プロブレム</a:t>
+            </a:r>
+            <a:r>
+              <a:rPr b="0"/>
+              <a:t>。 アンド ヴォリューム イズ サムシング ソフトウェア キャン </a:t>
+            </a:r>
+            <a:r>
+              <a:rPr b="1"/>
+              <a:t>アクチュアリー ソルヴ</a:t>
+            </a:r>
+            <a:r>
+              <a:rPr b="0"/>
+              <a:t>。</a:t>
+            </a:r>
+          </a:p>
+          <a:p>
+            <a:r>
+              <a:rPr b="0"/>
+              <a:t>Third — context profiles. Travel. Field engineer. Researcher.</a:t>
+            </a:r>
+          </a:p>
+          <a:p>
+            <a:r>
+              <a:rPr b="0"/>
+              <a:t>  サード — </a:t>
+            </a:r>
+            <a:r>
+              <a:rPr b="1"/>
+              <a:t>コンテクスト プロウファイルズ</a:t>
+            </a:r>
+            <a:r>
+              <a:rPr b="0"/>
+              <a:t>。 トラヴル。 フィールド エンジニア。 リサーチャー。</a:t>
+            </a:r>
+          </a:p>
+          <a:p>
+            <a:r>
+              <a:rPr b="0"/>
+              <a:t>They tell you what ‘normal’ should look like, so you know what to prepare.</a:t>
+            </a:r>
+          </a:p>
+          <a:p>
+            <a:r>
+              <a:rPr b="0"/>
+              <a:t>  ゼイ テル ユー ワット </a:t>
+            </a:r>
+            <a:r>
+              <a:rPr b="1"/>
+              <a:t>ノーマル</a:t>
+            </a:r>
+            <a:r>
+              <a:rPr b="0"/>
+              <a:t> シュド ルック ライク、 ソウ ユー ノウ ワット トゥ プリペア。</a:t>
+            </a:r>
+          </a:p>
+          <a:p>
+            <a:r>
+              <a:rPr b="0"/>
+              <a:t>And in coercion-safe mode, a low-confidence match goes to the disclosure face, instead of failing loudly.</a:t>
+            </a:r>
+          </a:p>
+          <a:p>
+            <a:r>
+              <a:rPr b="0"/>
+              <a:t>  アンド イン コアージョンセイフ モウド、 ア ロウ コンフィデンス マッチ ゴウズ トゥ ザ </a:t>
+            </a:r>
+            <a:r>
+              <a:rPr b="1"/>
+              <a:t>ディスクロージャー フェイス</a:t>
+            </a:r>
+            <a:r>
+              <a:rPr b="0"/>
+              <a:t>、 インステッド オヴ フェイリング ラウドリー。</a:t>
+            </a:r>
+          </a:p>
+          <a:p>
+            <a:r>
+              <a:rPr b="0"/>
+              <a:t>The goal isn’t magic invisibility.</a:t>
+            </a:r>
+          </a:p>
+          <a:p>
+            <a:r>
+              <a:rPr b="0"/>
+              <a:t>  ザ ゴウル イズント </a:t>
+            </a:r>
+            <a:r>
+              <a:rPr b="1"/>
+              <a:t>マジック インヴィジビリティ</a:t>
+            </a:r>
+            <a:r>
+              <a:rPr b="0"/>
+              <a:t>。</a:t>
+            </a:r>
+          </a:p>
+          <a:p>
+            <a:r>
+              <a:rPr b="0"/>
+              <a:t>The goal is uncertainty, and delay.”</a:t>
+            </a:r>
+          </a:p>
+          <a:p>
+            <a:r>
+              <a:rPr b="0"/>
+              <a:t>  ザ ゴウル イズ </a:t>
+            </a:r>
+            <a:r>
+              <a:rPr b="1"/>
+              <a:t>アンサートゥンティ</a:t>
+            </a:r>
+            <a:r>
+              <a:rPr b="0"/>
+              <a:t>、 アンド </a:t>
+            </a:r>
+            <a:r>
+              <a:rPr b="1"/>
+              <a:t>ディレイ</a:t>
+            </a:r>
+            <a:r>
+              <a:rPr b="0"/>
+              <a:t>。</a:t>
+            </a:r>
+          </a:p>
+          <a:p>
+            <a:r>
+              <a:rPr b="0"/>
+              <a:t/>
+            </a:r>
+          </a:p>
+          <a:p>
+            <a:r>
+              <a:rPr b="0"/>
+              <a:t>JA: 本トークで最も誤解されやすい点。「ツールが囮を作る」と思われた瞬間に設計の真実味が全部落ちる。「囮は利用者が用意する」と「填充は空き領域対策に過ぎない」を分けて言い切る。Silent Standby はデモで見せると予告</a:t>
             </a:r>
           </a:p>
         </p:txBody>
@@ -1078,12 +2598,116 @@
           <a:lstStyle/>
           <a:p>
             <a:r>
-              <a:rPr lang="en-US" dirty="0"/>
-              <a:t>[12:20 / 0:45] DESIGN PRINCIPLES
-EN: "The design principle is restraint. The vault file alone isn't meant to be enough. Normal flows don't reveal structure or recovery. And metadata reduction is best-effort — I call it support, not sanitization. Restraint is the feature, not a limitation."
-JA: 流す。誠実トーン維持。</a:t>
+              <a:rPr b="0"/>
+              <a:t>[12:20 / 0:45] DESIGN PRINCIPLES — 発話 0:15</a:t>
             </a:r>
             <a:endParaRPr lang="en-US" dirty="0"/>
+          </a:p>
+          <a:p>
+            <a:r>
+              <a:rPr b="0"/>
+              <a:t/>
+            </a:r>
+          </a:p>
+          <a:p>
+            <a:r>
+              <a:rPr b="0"/>
+              <a:t>“The design principle is restraint.</a:t>
+            </a:r>
+          </a:p>
+          <a:p>
+            <a:r>
+              <a:rPr b="0"/>
+              <a:t>  ザ デザイン プリンシプル イズ </a:t>
+            </a:r>
+            <a:r>
+              <a:rPr b="1"/>
+              <a:t>リストレイント</a:t>
+            </a:r>
+            <a:r>
+              <a:rPr b="0"/>
+              <a:t>。</a:t>
+            </a:r>
+          </a:p>
+          <a:p>
+            <a:r>
+              <a:rPr b="0"/>
+              <a:t>The vault file alone isn’t meant to be enough.</a:t>
+            </a:r>
+          </a:p>
+          <a:p>
+            <a:r>
+              <a:rPr b="0"/>
+              <a:t>  ザ ヴォルト ファイル </a:t>
+            </a:r>
+            <a:r>
+              <a:rPr b="1"/>
+              <a:t>アロウン</a:t>
+            </a:r>
+            <a:r>
+              <a:rPr b="0"/>
+              <a:t> イズント メント トゥ ビー イナフ。</a:t>
+            </a:r>
+          </a:p>
+          <a:p>
+            <a:r>
+              <a:rPr b="0"/>
+              <a:t>Normal flows don’t reveal structure, or recovery.</a:t>
+            </a:r>
+          </a:p>
+          <a:p>
+            <a:r>
+              <a:rPr b="0"/>
+              <a:t>  ノーマル フロウズ ドウント </a:t>
+            </a:r>
+            <a:r>
+              <a:rPr b="1"/>
+              <a:t>リヴィール</a:t>
+            </a:r>
+            <a:r>
+              <a:rPr b="0"/>
+              <a:t> ストラクチャー、 オア リカヴァリー。</a:t>
+            </a:r>
+          </a:p>
+          <a:p>
+            <a:r>
+              <a:rPr b="0"/>
+              <a:t>And metadata reduction is best-effort. Support — not sanitization.</a:t>
+            </a:r>
+          </a:p>
+          <a:p>
+            <a:r>
+              <a:rPr b="0"/>
+              <a:t>  アンド メタデータ リダクション イズ </a:t>
+            </a:r>
+            <a:r>
+              <a:rPr b="1"/>
+              <a:t>ベスト エフォート</a:t>
+            </a:r>
+            <a:r>
+              <a:rPr b="0"/>
+              <a:t>。 サポート — </a:t>
+            </a:r>
+            <a:r>
+              <a:rPr b="1"/>
+              <a:t>ナット</a:t>
+            </a:r>
+            <a:r>
+              <a:rPr b="0"/>
+              <a:t> サニタイゼイション。</a:t>
+            </a:r>
+          </a:p>
+          <a:p>
+            <a:r>
+              <a:rPr b="0"/>
+              <a:t/>
+            </a:r>
+          </a:p>
+          <a:p>
+            <a:r>
+              <a:rPr b="0"/>
+              <a:t>JA: 4ステップを順に指す。デモの地図と予告</a:t>
+            </a:r>
           </a:p>
         </p:txBody>
       </p:sp>
@@ -1168,12 +2792,144 @@
           <a:lstStyle/>
           <a:p>
             <a:r>
-              <a:rPr lang="en-US" dirty="0"/>
-              <a:t>[13:05 / 0:45] FLOW
-EN: "Operationally it's four steps: Prepare a vessel, Bind it to local state and the object cue, Operate through CLI, TUI or local WebUI, and Disclose — controlled, under documented assumptions. Keep this in your head — it's the map for the demo in a few minutes."
-JA: 4ステップを順に指す。デモの地図になると予告。</a:t>
+              <a:rPr b="0"/>
+              <a:t>[13:05 / 0:45] OPERATING FLOW — 発話 0:25</a:t>
             </a:r>
             <a:endParaRPr lang="en-US" dirty="0"/>
+          </a:p>
+          <a:p>
+            <a:r>
+              <a:rPr b="0"/>
+              <a:t/>
+            </a:r>
+          </a:p>
+          <a:p>
+            <a:r>
+              <a:rPr b="0"/>
+              <a:t>Operationally, it’s four steps.</a:t>
+            </a:r>
+          </a:p>
+          <a:p>
+            <a:r>
+              <a:rPr b="0"/>
+              <a:t>  オペレイショナリー、 イッツ </a:t>
+            </a:r>
+            <a:r>
+              <a:rPr b="1"/>
+              <a:t>フォー ステップス</a:t>
+            </a:r>
+            <a:r>
+              <a:rPr b="0"/>
+              <a:t>。</a:t>
+            </a:r>
+          </a:p>
+          <a:p>
+            <a:r>
+              <a:rPr b="0"/>
+              <a:t>Prepare a vessel.</a:t>
+            </a:r>
+          </a:p>
+          <a:p>
+            <a:r>
+              <a:rPr b="0"/>
+              <a:t>  </a:t>
+            </a:r>
+            <a:r>
+              <a:rPr b="1"/>
+              <a:t>プリペア</a:t>
+            </a:r>
+            <a:r>
+              <a:rPr b="0"/>
+              <a:t> ア ヴェッセル。</a:t>
+            </a:r>
+          </a:p>
+          <a:p>
+            <a:r>
+              <a:rPr b="0"/>
+              <a:t>Bind it — to local state, and to the object cue.</a:t>
+            </a:r>
+          </a:p>
+          <a:p>
+            <a:r>
+              <a:rPr b="0"/>
+              <a:t>  </a:t>
+            </a:r>
+            <a:r>
+              <a:rPr b="1"/>
+              <a:t>バインド</a:t>
+            </a:r>
+            <a:r>
+              <a:rPr b="0"/>
+              <a:t> イット — トゥ ローカル ステイト、 アンド トゥ ジ オブジェクト キュー。</a:t>
+            </a:r>
+          </a:p>
+          <a:p>
+            <a:r>
+              <a:rPr b="0"/>
+              <a:t>Operate it — through the CLI, the TUI, or the local web interface.</a:t>
+            </a:r>
+          </a:p>
+          <a:p>
+            <a:r>
+              <a:rPr b="0"/>
+              <a:t>  </a:t>
+            </a:r>
+            <a:r>
+              <a:rPr b="1"/>
+              <a:t>オペレイト</a:t>
+            </a:r>
+            <a:r>
+              <a:rPr b="0"/>
+              <a:t> イット — スルー ザ シー エル アイ、 ザ ティー ユー アイ、 オア ザ ローカル ウェブ インターフェイス。</a:t>
+            </a:r>
+          </a:p>
+          <a:p>
+            <a:r>
+              <a:rPr b="0"/>
+              <a:t>Disclose — controlled, under documented assumptions.</a:t>
+            </a:r>
+          </a:p>
+          <a:p>
+            <a:r>
+              <a:rPr b="0"/>
+              <a:t>  </a:t>
+            </a:r>
+            <a:r>
+              <a:rPr b="1"/>
+              <a:t>ディスクロウズ</a:t>
+            </a:r>
+            <a:r>
+              <a:rPr b="0"/>
+              <a:t> — コントロールド、 アンダー ドキュメンティッド アサンプションズ。</a:t>
+            </a:r>
+          </a:p>
+          <a:p>
+            <a:r>
+              <a:rPr b="0"/>
+              <a:t>Keep those four in your head. They’re the map for the demo.”</a:t>
+            </a:r>
+          </a:p>
+          <a:p>
+            <a:r>
+              <a:rPr b="0"/>
+              <a:t>  キープ ゾウズ </a:t>
+            </a:r>
+            <a:r>
+              <a:rPr b="1"/>
+              <a:t>フォー</a:t>
+            </a:r>
+            <a:r>
+              <a:rPr b="0"/>
+              <a:t> イン ユア ヘッド。 ゼア ザ </a:t>
+            </a:r>
+            <a:r>
+              <a:rPr b="1"/>
+              <a:t>マップ</a:t>
+            </a:r>
+            <a:r>
+              <a:rPr b="0"/>
+              <a:t> フォー ザ デモ。</a:t>
+            </a:r>
           </a:p>
         </p:txBody>
       </p:sp>
@@ -1258,12 +3014,200 @@
           <a:lstStyle/>
           <a:p>
             <a:r>
-              <a:rPr lang="en-US" dirty="0"/>
-              <a:t>[13:50 / 0:50] TECH
-EN: "Small, local, boring by design. Argon2id for key derivation, AES-GCM for authenticated encryption, WebUI bound to localhost, running on a Pi Zero 2 W. Tuned parameters for that little board, per-record encryption, no plaintext header. Boring is good — boring is auditable."
-JA: 数値は帯を指す程度。詳細はQ&amp;A/次スライド。</a:t>
+              <a:rPr b="0"/>
+              <a:t>[13:50 / 0:50] TECH — 発話 0:25</a:t>
             </a:r>
             <a:endParaRPr lang="en-US" dirty="0"/>
+          </a:p>
+          <a:p>
+            <a:r>
+              <a:rPr b="0"/>
+              <a:t/>
+            </a:r>
+          </a:p>
+          <a:p>
+            <a:r>
+              <a:rPr b="0"/>
+              <a:t>“Small. Local. Boring by design.</a:t>
+            </a:r>
+          </a:p>
+          <a:p>
+            <a:r>
+              <a:rPr b="0"/>
+              <a:t>  </a:t>
+            </a:r>
+            <a:r>
+              <a:rPr b="1"/>
+              <a:t>スモール</a:t>
+            </a:r>
+            <a:r>
+              <a:rPr b="0"/>
+              <a:t>。 </a:t>
+            </a:r>
+            <a:r>
+              <a:rPr b="1"/>
+              <a:t>ローカル</a:t>
+            </a:r>
+            <a:r>
+              <a:rPr b="0"/>
+              <a:t>。 </a:t>
+            </a:r>
+            <a:r>
+              <a:rPr b="1"/>
+              <a:t>ボーリング</a:t>
+            </a:r>
+            <a:r>
+              <a:rPr b="0"/>
+              <a:t> バイ デザイン。</a:t>
+            </a:r>
+          </a:p>
+          <a:p>
+            <a:r>
+              <a:rPr b="0"/>
+              <a:t>Argon2id for key derivation.</a:t>
+            </a:r>
+          </a:p>
+          <a:p>
+            <a:r>
+              <a:rPr b="0"/>
+              <a:t>  </a:t>
+            </a:r>
+            <a:r>
+              <a:rPr b="1"/>
+              <a:t>アーゴン トゥー アイディー</a:t>
+            </a:r>
+            <a:r>
+              <a:rPr b="0"/>
+              <a:t> フォー キー デリヴェイション。</a:t>
+            </a:r>
+          </a:p>
+          <a:p>
+            <a:r>
+              <a:rPr b="0"/>
+              <a:t>AES-GCM for authenticated encryption.</a:t>
+            </a:r>
+          </a:p>
+          <a:p>
+            <a:r>
+              <a:rPr b="0"/>
+              <a:t>  </a:t>
+            </a:r>
+            <a:r>
+              <a:rPr b="1"/>
+              <a:t>エイ イー エス ジー シー エム</a:t>
+            </a:r>
+            <a:r>
+              <a:rPr b="0"/>
+              <a:t> フォー オーセンティケイティッド インクリプション。</a:t>
+            </a:r>
+          </a:p>
+          <a:p>
+            <a:r>
+              <a:rPr b="0"/>
+              <a:t>The web interface bound to localhost.</a:t>
+            </a:r>
+          </a:p>
+          <a:p>
+            <a:r>
+              <a:rPr b="0"/>
+              <a:t>  ザ ウェブ インターフェイス バウンド トゥ </a:t>
+            </a:r>
+            <a:r>
+              <a:rPr b="1"/>
+              <a:t>ローカルホウスト</a:t>
+            </a:r>
+            <a:r>
+              <a:rPr b="0"/>
+              <a:t>。</a:t>
+            </a:r>
+          </a:p>
+          <a:p>
+            <a:r>
+              <a:rPr b="0"/>
+              <a:t>All of it on a Pi Zero 2 W.</a:t>
+            </a:r>
+          </a:p>
+          <a:p>
+            <a:r>
+              <a:rPr b="0"/>
+              <a:t>  オール オヴ イット オン ア </a:t>
+            </a:r>
+            <a:r>
+              <a:rPr b="1"/>
+              <a:t>パイ ズィーロウ トゥー ダブリュー</a:t>
+            </a:r>
+            <a:r>
+              <a:rPr b="0"/>
+              <a:t>。</a:t>
+            </a:r>
+          </a:p>
+          <a:p>
+            <a:r>
+              <a:rPr b="0"/>
+              <a:t>Parameters tuned for that little board. Per-record encryption. No plaintext header.</a:t>
+            </a:r>
+          </a:p>
+          <a:p>
+            <a:r>
+              <a:rPr b="0"/>
+              <a:t>  パラミターズ </a:t>
+            </a:r>
+            <a:r>
+              <a:rPr b="1"/>
+              <a:t>チューンド</a:t>
+            </a:r>
+            <a:r>
+              <a:rPr b="0"/>
+              <a:t> フォー ザット リトル ボード。 パーレコード インクリプション。 </a:t>
+            </a:r>
+            <a:r>
+              <a:rPr b="1"/>
+              <a:t>ノウ プレインテクスト ヘダー</a:t>
+            </a:r>
+            <a:r>
+              <a:rPr b="0"/>
+              <a:t>。</a:t>
+            </a:r>
+          </a:p>
+          <a:p>
+            <a:r>
+              <a:rPr b="0"/>
+              <a:t>Boring is good. Boring is auditable.”</a:t>
+            </a:r>
+          </a:p>
+          <a:p>
+            <a:r>
+              <a:rPr b="0"/>
+              <a:t>  ボーリング イズ </a:t>
+            </a:r>
+            <a:r>
+              <a:rPr b="1"/>
+              <a:t>グッド</a:t>
+            </a:r>
+            <a:r>
+              <a:rPr b="0"/>
+              <a:t>。 ボーリング イズ </a:t>
+            </a:r>
+            <a:r>
+              <a:rPr b="1"/>
+              <a:t>オーディタブル</a:t>
+            </a:r>
+            <a:r>
+              <a:rPr b="0"/>
+              <a:t>。</a:t>
+            </a:r>
+          </a:p>
+          <a:p>
+            <a:r>
+              <a:rPr b="0"/>
+              <a:t/>
+            </a:r>
+          </a:p>
+          <a:p>
+            <a:r>
+              <a:rPr b="0"/>
+              <a:t>JA: 数値は帯を指す程度。詳細は次 / Q&amp;A</a:t>
+            </a:r>
           </a:p>
         </p:txBody>
       </p:sp>
@@ -1348,12 +3292,204 @@
           <a:lstStyle/>
           <a:p>
             <a:r>
-              <a:rPr lang="en-US" dirty="0"/>
-              <a:t>[14:40 / 1:00] FIELD HARDWARE  ★エンゲージ
-EN: "And here's the actual thing. A Pi Zero 2 W in a 3D-printed case, a camera for the object cue, on a little tripod. The WebUI is reached over USB at localhost — it never touches a network. It's meant to read as an unremarkable small gadget. It's right here on the table — come look, and try it, after the talk."
-JA: 現物を指す/持ち上げる。卓上デモ・Q&amp;Aへの導線を作る。</a:t>
+              <a:rPr b="0"/>
+              <a:t>[14:40 / 1:00] FIELD HARDWARE  ★エンゲージ — 発話 0:30</a:t>
             </a:r>
             <a:endParaRPr lang="en-US" dirty="0"/>
+          </a:p>
+          <a:p>
+            <a:r>
+              <a:rPr b="0"/>
+              <a:t/>
+            </a:r>
+          </a:p>
+          <a:p>
+            <a:r>
+              <a:rPr b="0"/>
+              <a:t>“And here’s the actual thing.</a:t>
+            </a:r>
+          </a:p>
+          <a:p>
+            <a:r>
+              <a:rPr b="0"/>
+              <a:t>  アンド ヒアズ ジ </a:t>
+            </a:r>
+            <a:r>
+              <a:rPr b="1"/>
+              <a:t>アクチュアル シング</a:t>
+            </a:r>
+            <a:r>
+              <a:rPr b="0"/>
+              <a:t>。</a:t>
+            </a:r>
+          </a:p>
+          <a:p>
+            <a:r>
+              <a:rPr b="0"/>
+              <a:t>A Pi Zero 2 W, in a 3D-printed case.</a:t>
+            </a:r>
+          </a:p>
+          <a:p>
+            <a:r>
+              <a:rPr b="0"/>
+              <a:t>  ア パイ ズィーロウ トゥー ダブリュー、 イン ア </a:t>
+            </a:r>
+            <a:r>
+              <a:rPr b="1"/>
+              <a:t>スリーディー プリンティッド ケイス</a:t>
+            </a:r>
+            <a:r>
+              <a:rPr b="0"/>
+              <a:t>。</a:t>
+            </a:r>
+          </a:p>
+          <a:p>
+            <a:r>
+              <a:rPr b="0"/>
+              <a:t>A camera for the object cue. On a small tripod.</a:t>
+            </a:r>
+          </a:p>
+          <a:p>
+            <a:r>
+              <a:rPr b="0"/>
+              <a:t>  ア </a:t>
+            </a:r>
+            <a:r>
+              <a:rPr b="1"/>
+              <a:t>カメラ</a:t>
+            </a:r>
+            <a:r>
+              <a:rPr b="0"/>
+              <a:t> フォー ジ オブジェクト キュー。 オン ア スモール </a:t>
+            </a:r>
+            <a:r>
+              <a:rPr b="1"/>
+              <a:t>トライポッド</a:t>
+            </a:r>
+            <a:r>
+              <a:rPr b="0"/>
+              <a:t>。</a:t>
+            </a:r>
+          </a:p>
+          <a:p>
+            <a:r>
+              <a:rPr b="0"/>
+              <a:t>You reach the web interface over USB, at localhost.</a:t>
+            </a:r>
+          </a:p>
+          <a:p>
+            <a:r>
+              <a:rPr b="0"/>
+              <a:t>  ユー リーチ ザ ウェブ インターフェイス オウヴァー </a:t>
+            </a:r>
+            <a:r>
+              <a:rPr b="1"/>
+              <a:t>ユー エス ビー</a:t>
+            </a:r>
+            <a:r>
+              <a:rPr b="0"/>
+              <a:t>、 アット ローカルホウスト。</a:t>
+            </a:r>
+          </a:p>
+          <a:p>
+            <a:r>
+              <a:rPr b="0"/>
+              <a:t>It never touches a network.</a:t>
+            </a:r>
+          </a:p>
+          <a:p>
+            <a:r>
+              <a:rPr b="0"/>
+              <a:t>  イット </a:t>
+            </a:r>
+            <a:r>
+              <a:rPr b="1"/>
+              <a:t>ネヴァー</a:t>
+            </a:r>
+            <a:r>
+              <a:rPr b="0"/>
+              <a:t> タッチィズ ア ネットワーク。</a:t>
+            </a:r>
+          </a:p>
+          <a:p>
+            <a:r>
+              <a:rPr b="0"/>
+              <a:t>It’s meant to read as an unremarkable little gadget.</a:t>
+            </a:r>
+          </a:p>
+          <a:p>
+            <a:r>
+              <a:rPr b="0"/>
+              <a:t>  イッツ メント トゥ リード アズ アン アンリマーカブル リトル </a:t>
+            </a:r>
+            <a:r>
+              <a:rPr b="1"/>
+              <a:t>ガジェット</a:t>
+            </a:r>
+            <a:r>
+              <a:rPr b="0"/>
+              <a:t>。</a:t>
+            </a:r>
+          </a:p>
+          <a:p>
+            <a:r>
+              <a:rPr b="0"/>
+              <a:t>And it’s right here on the table.</a:t>
+            </a:r>
+          </a:p>
+          <a:p>
+            <a:r>
+              <a:rPr b="0"/>
+              <a:t>  アンド イッツ </a:t>
+            </a:r>
+            <a:r>
+              <a:rPr b="1"/>
+              <a:t>ゥライト ヒア</a:t>
+            </a:r>
+            <a:r>
+              <a:rPr b="0"/>
+              <a:t> オン ザ テイブル。</a:t>
+            </a:r>
+          </a:p>
+          <a:p>
+            <a:r>
+              <a:rPr b="0"/>
+              <a:t>Come and look — and try it — after the talk.”</a:t>
+            </a:r>
+          </a:p>
+          <a:p>
+            <a:r>
+              <a:rPr b="0"/>
+              <a:t>  </a:t>
+            </a:r>
+            <a:r>
+              <a:rPr b="1"/>
+              <a:t>カム アンド ルック</a:t>
+            </a:r>
+            <a:r>
+              <a:rPr b="0"/>
+              <a:t> — アンド </a:t>
+            </a:r>
+            <a:r>
+              <a:rPr b="1"/>
+              <a:t>トライ イット</a:t>
+            </a:r>
+            <a:r>
+              <a:rPr b="0"/>
+              <a:t> — アフター ザ トーク。</a:t>
+            </a:r>
+          </a:p>
+          <a:p>
+            <a:r>
+              <a:rPr b="0"/>
+              <a:t/>
+            </a:r>
+          </a:p>
+          <a:p>
+            <a:r>
+              <a:rPr b="0"/>
+              <a:t>JA: 「ただの小さなガジェットに見える」を強調</a:t>
+            </a:r>
           </a:p>
         </p:txBody>
       </p:sp>
@@ -1438,12 +3574,156 @@
           <a:lstStyle/>
           <a:p>
             <a:r>
-              <a:rPr lang="en-US" dirty="0"/>
-              <a:t>[15:40 / 0:45] CRYPTO CORE
-EN: "For the crypto people: Argon2id with mixed-in local access-key material and device binding, an optional external secret as a third factor, AES-GCM per record with authenticated metadata, and no plaintext marker in the vault. Startup self-tests check the primitives before anything runs. Details are in the repo — happy to go deep in Q&amp;A."
-JA: 全部読まない。左列3点を指す。深掘りはQ&amp;Aへ。</a:t>
+              <a:rPr b="0"/>
+              <a:t>[15:40 / 0:45] CRYPTO CORE — 発話 0:20</a:t>
             </a:r>
             <a:endParaRPr lang="en-US" dirty="0"/>
+          </a:p>
+          <a:p>
+            <a:r>
+              <a:rPr b="0"/>
+              <a:t/>
+            </a:r>
+          </a:p>
+          <a:p>
+            <a:r>
+              <a:rPr b="0"/>
+              <a:t>“For the crypto people.</a:t>
+            </a:r>
+          </a:p>
+          <a:p>
+            <a:r>
+              <a:rPr b="0"/>
+              <a:t>  フォー ザ </a:t>
+            </a:r>
+            <a:r>
+              <a:rPr b="1"/>
+              <a:t>クリプト ピープル</a:t>
+            </a:r>
+            <a:r>
+              <a:rPr b="0"/>
+              <a:t>。</a:t>
+            </a:r>
+          </a:p>
+          <a:p>
+            <a:r>
+              <a:rPr b="0"/>
+              <a:t>Argon2id, with local access-key material mixed in, and device binding.</a:t>
+            </a:r>
+          </a:p>
+          <a:p>
+            <a:r>
+              <a:rPr b="0"/>
+              <a:t>  アーゴン トゥー アイディー、 ウィズ </a:t>
+            </a:r>
+            <a:r>
+              <a:rPr b="1"/>
+              <a:t>ローカル アクセスキー マテリアル</a:t>
+            </a:r>
+            <a:r>
+              <a:rPr b="0"/>
+              <a:t> ミクスト イン、 アンド デバイス バインディング。</a:t>
+            </a:r>
+          </a:p>
+          <a:p>
+            <a:r>
+              <a:rPr b="0"/>
+              <a:t>An optional external secret, as a third factor.</a:t>
+            </a:r>
+          </a:p>
+          <a:p>
+            <a:r>
+              <a:rPr b="0"/>
+              <a:t>  アン オプショナル エクスターナル </a:t>
+            </a:r>
+            <a:r>
+              <a:rPr b="1"/>
+              <a:t>シークレット</a:t>
+            </a:r>
+            <a:r>
+              <a:rPr b="0"/>
+              <a:t>、 アズ ア </a:t>
+            </a:r>
+            <a:r>
+              <a:rPr b="1"/>
+              <a:t>サード ファクター</a:t>
+            </a:r>
+            <a:r>
+              <a:rPr b="0"/>
+              <a:t>。</a:t>
+            </a:r>
+          </a:p>
+          <a:p>
+            <a:r>
+              <a:rPr b="0"/>
+              <a:t>AES-GCM per record, with authenticated metadata.</a:t>
+            </a:r>
+          </a:p>
+          <a:p>
+            <a:r>
+              <a:rPr b="0"/>
+              <a:t>  エイ イー エス ジー シー エム パー </a:t>
+            </a:r>
+            <a:r>
+              <a:rPr b="1"/>
+              <a:t>レコード</a:t>
+            </a:r>
+            <a:r>
+              <a:rPr b="0"/>
+              <a:t>、 ウィズ オーセンティケイティッド メタデータ。</a:t>
+            </a:r>
+          </a:p>
+          <a:p>
+            <a:r>
+              <a:rPr b="0"/>
+              <a:t>No plaintext marker in the vault.</a:t>
+            </a:r>
+          </a:p>
+          <a:p>
+            <a:r>
+              <a:rPr b="0"/>
+              <a:t>  </a:t>
+            </a:r>
+            <a:r>
+              <a:rPr b="1"/>
+              <a:t>ノウ プレインテクスト マーカー</a:t>
+            </a:r>
+            <a:r>
+              <a:rPr b="0"/>
+              <a:t> イン ザ ヴォルト。</a:t>
+            </a:r>
+          </a:p>
+          <a:p>
+            <a:r>
+              <a:rPr b="0"/>
+              <a:t>Startup self-tests check the primitives first.</a:t>
+            </a:r>
+          </a:p>
+          <a:p>
+            <a:r>
+              <a:rPr b="0"/>
+              <a:t>  スタートアップ セルフテスツ チェック ザ プリミティヴズ </a:t>
+            </a:r>
+            <a:r>
+              <a:rPr b="1"/>
+              <a:t>ファースト</a:t>
+            </a:r>
+            <a:r>
+              <a:rPr b="0"/>
+              <a:t>。</a:t>
+            </a:r>
+          </a:p>
+          <a:p>
+            <a:r>
+              <a:rPr b="0"/>
+              <a:t/>
+            </a:r>
+          </a:p>
+          <a:p>
+            <a:r>
+              <a:rPr b="0"/>
+              <a:t>JA: 全部読まない。左列を指す。個別値は Q&amp;A へ</a:t>
+            </a:r>
           </a:p>
         </p:txBody>
       </p:sp>
@@ -1528,12 +3808,224 @@
           <a:lstStyle/>
           <a:p>
             <a:r>
-              <a:rPr lang="en-US" dirty="0"/>
-              <a:t>[00:30 / 0:55] whoami
-EN: "A quick note on where I come from: like a lot of people in this room, I started in uniform — a former Japan Ground Self-Defense Force officer, a Second Lieutenant, in a cyber unit. My work since has mostly been offensive — and offensive work is really about the person, not just the algorithm; the weakest link is human. Phasmid points that lesson the other way: it doesn't protect the key, it protects the person holding it. Day-to-day I'm an independent researcher and open-source tool developer, pen tester, CISSP — you may have seen the Azazel system or the PAKURI family at Black Hat Arsenal, BSides, SecTor, CODE BLUE. Find me at 01rabbit on GitHub."
-JA: 冒頭は「経歴＝着想源」として淡々と。武勇伝化しない。person, not the algorithm と protects the person は必ず言い切る。GitHubハンドルを指す。</a:t>
+              <a:rPr b="0"/>
+              <a:t>[00:30 / 0:55] WHOAMI — 発話 0:25</a:t>
             </a:r>
             <a:endParaRPr lang="en-US" dirty="0"/>
+          </a:p>
+          <a:p>
+            <a:r>
+              <a:rPr b="0"/>
+              <a:t/>
+            </a:r>
+          </a:p>
+          <a:p>
+            <a:r>
+              <a:rPr b="0"/>
+              <a:t>“Quick background.</a:t>
+            </a:r>
+          </a:p>
+          <a:p>
+            <a:r>
+              <a:rPr b="0"/>
+              <a:t>  クイック </a:t>
+            </a:r>
+            <a:r>
+              <a:rPr b="1"/>
+              <a:t>バックグラウンド</a:t>
+            </a:r>
+            <a:r>
+              <a:rPr b="0"/>
+              <a:t>。</a:t>
+            </a:r>
+          </a:p>
+          <a:p>
+            <a:r>
+              <a:rPr b="0"/>
+              <a:t>I’m a senior engineer at GMO Cybersecurity by Ierae, in Tokyo.</a:t>
+            </a:r>
+          </a:p>
+          <a:p>
+            <a:r>
+              <a:rPr b="0"/>
+              <a:t>  アイム ア </a:t>
+            </a:r>
+            <a:r>
+              <a:rPr b="1"/>
+              <a:t>シニア エンジニア</a:t>
+            </a:r>
+            <a:r>
+              <a:rPr b="0"/>
+              <a:t> アット ジーエムオー サイバーセキュリティ バイ </a:t>
+            </a:r>
+            <a:r>
+              <a:rPr b="1"/>
+              <a:t>イエラエ</a:t>
+            </a:r>
+            <a:r>
+              <a:rPr b="0"/>
+              <a:t>、 イン トウキョウ。</a:t>
+            </a:r>
+          </a:p>
+          <a:p>
+            <a:r>
+              <a:rPr b="0"/>
+              <a:t>Security research, and open-source tools.</a:t>
+            </a:r>
+          </a:p>
+          <a:p>
+            <a:r>
+              <a:rPr b="0"/>
+              <a:t>  セキュリティ </a:t>
+            </a:r>
+            <a:r>
+              <a:rPr b="1"/>
+              <a:t>リサーチ</a:t>
+            </a:r>
+            <a:r>
+              <a:rPr b="0"/>
+              <a:t>、 アンド </a:t>
+            </a:r>
+            <a:r>
+              <a:rPr b="1"/>
+              <a:t>オープンソース ツールズ</a:t>
+            </a:r>
+            <a:r>
+              <a:rPr b="0"/>
+              <a:t>。</a:t>
+            </a:r>
+          </a:p>
+          <a:p>
+            <a:r>
+              <a:rPr b="0"/>
+              <a:t>Penetration tester by trade. CISSP.</a:t>
+            </a:r>
+          </a:p>
+          <a:p>
+            <a:r>
+              <a:rPr b="0"/>
+              <a:t>  ペネトレイション テスター バイ </a:t>
+            </a:r>
+            <a:r>
+              <a:rPr b="1"/>
+              <a:t>トレイド</a:t>
+            </a:r>
+            <a:r>
+              <a:rPr b="0"/>
+              <a:t>。 シー アイ エス エス ピー。</a:t>
+            </a:r>
+          </a:p>
+          <a:p>
+            <a:r>
+              <a:rPr b="0"/>
+              <a:t>I turn offensive experience into defensive tools.</a:t>
+            </a:r>
+          </a:p>
+          <a:p>
+            <a:r>
+              <a:rPr b="0"/>
+              <a:t>  アイ ターン オフェンシヴ エクスピアリエンス イントゥ </a:t>
+            </a:r>
+            <a:r>
+              <a:rPr b="1"/>
+              <a:t>ディフェンシヴ ツールズ</a:t>
+            </a:r>
+            <a:r>
+              <a:rPr b="0"/>
+              <a:t>。</a:t>
+            </a:r>
+          </a:p>
+          <a:p>
+            <a:r>
+              <a:rPr b="0"/>
+              <a:t>Deception. Delay. Coercion-aware design.</a:t>
+            </a:r>
+          </a:p>
+          <a:p>
+            <a:r>
+              <a:rPr b="0"/>
+              <a:t>  ディセプション。 ディレイ。 </a:t>
+            </a:r>
+            <a:r>
+              <a:rPr b="1"/>
+              <a:t>コアージョン アウェア デザイン</a:t>
+            </a:r>
+            <a:r>
+              <a:rPr b="0"/>
+              <a:t>。</a:t>
+            </a:r>
+          </a:p>
+          <a:p>
+            <a:r>
+              <a:rPr b="0"/>
+              <a:t>You may know my other work — Azazel, and the PAKURI family.</a:t>
+            </a:r>
+          </a:p>
+          <a:p>
+            <a:r>
+              <a:rPr b="0"/>
+              <a:t>  ユー メイ ノウ マイ アザー ワーク — </a:t>
+            </a:r>
+            <a:r>
+              <a:rPr b="1"/>
+              <a:t>アザゼル</a:t>
+            </a:r>
+            <a:r>
+              <a:rPr b="0"/>
+              <a:t>、 アンド ザ </a:t>
+            </a:r>
+            <a:r>
+              <a:rPr b="1"/>
+              <a:t>パクリ</a:t>
+            </a:r>
+            <a:r>
+              <a:rPr b="0"/>
+              <a:t> ファミリー。</a:t>
+            </a:r>
+          </a:p>
+          <a:p>
+            <a:r>
+              <a:rPr b="0"/>
+              <a:t>Black Hat Arsenal. BSides. SecTor. CODE BLUE.</a:t>
+            </a:r>
+          </a:p>
+          <a:p>
+            <a:r>
+              <a:rPr b="0"/>
+              <a:t>  ブラック ハット アーサナル。 ビーサイズ。 セクター。 コウド ブルー。</a:t>
+            </a:r>
+          </a:p>
+          <a:p>
+            <a:r>
+              <a:rPr b="0"/>
+              <a:t>I’m 01rabbit on GitHub.”</a:t>
+            </a:r>
+          </a:p>
+          <a:p>
+            <a:r>
+              <a:rPr b="0"/>
+              <a:t>  アイム </a:t>
+            </a:r>
+            <a:r>
+              <a:rPr b="1"/>
+              <a:t>ゼロワン ラビット</a:t>
+            </a:r>
+            <a:r>
+              <a:rPr b="0"/>
+              <a:t> オン ギットハブ。</a:t>
+            </a:r>
+          </a:p>
+          <a:p>
+            <a:r>
+              <a:rPr b="0"/>
+              <a:t/>
+            </a:r>
+          </a:p>
+          <a:p>
+            <a:r>
+              <a:rPr b="0"/>
+              <a:t>JA: 経歴は流す。ハンドルを指す</a:t>
+            </a:r>
           </a:p>
         </p:txBody>
       </p:sp>
@@ -1618,12 +4110,120 @@
           <a:lstStyle/>
           <a:p>
             <a:r>
-              <a:rPr lang="en-US" dirty="0"/>
-              <a:t>[16:25 / 0:40] OPERATIONAL GUARDS
-EN: "The WebUI is hardened, not an afterthought: localhost binding, per-process tokens, a restricted-confirmation session that's HttpOnly and short-lived, attempt limiting, rate limiting, inactivity auto-kill, hardened headers, and an opt-in HMAC-chained audit log. Defense in depth around a local surface."
-JA: 一覧を俯瞰。個別値はQ&amp;A。</a:t>
+              <a:rPr b="0"/>
+              <a:t>[16:25 / 0:40] OPERATIONAL GUARDS — 発話 0:20</a:t>
             </a:r>
             <a:endParaRPr lang="en-US" dirty="0"/>
+          </a:p>
+          <a:p>
+            <a:r>
+              <a:rPr b="0"/>
+              <a:t/>
+            </a:r>
+          </a:p>
+          <a:p>
+            <a:r>
+              <a:rPr b="0"/>
+              <a:t>And the web interface is hardened — not an afterthought.</a:t>
+            </a:r>
+          </a:p>
+          <a:p>
+            <a:r>
+              <a:rPr b="0"/>
+              <a:t>  アンド ザ ウェブ インターフェイス イズ </a:t>
+            </a:r>
+            <a:r>
+              <a:rPr b="1"/>
+              <a:t>ハードゥンド</a:t>
+            </a:r>
+            <a:r>
+              <a:rPr b="0"/>
+              <a:t> — ナット アン アフターソート。</a:t>
+            </a:r>
+          </a:p>
+          <a:p>
+            <a:r>
+              <a:rPr b="0"/>
+              <a:t>Localhost binding. Per-process tokens.</a:t>
+            </a:r>
+          </a:p>
+          <a:p>
+            <a:r>
+              <a:rPr b="0"/>
+              <a:t>  ローカルホウスト バインディング。 パープロセス トウクンズ。</a:t>
+            </a:r>
+          </a:p>
+          <a:p>
+            <a:r>
+              <a:rPr b="0"/>
+              <a:t>A restricted-confirmation session: HttpOnly, and short-lived.</a:t>
+            </a:r>
+          </a:p>
+          <a:p>
+            <a:r>
+              <a:rPr b="0"/>
+              <a:t>  ア リストリクティッド コンファメイション セッション: </a:t>
+            </a:r>
+            <a:r>
+              <a:rPr b="1"/>
+              <a:t>エイチ ティー ティー ピー オウンリー</a:t>
+            </a:r>
+            <a:r>
+              <a:rPr b="0"/>
+              <a:t>、 アンド ショートリヴド。</a:t>
+            </a:r>
+          </a:p>
+          <a:p>
+            <a:r>
+              <a:rPr b="0"/>
+              <a:t>Attempt limiting. Rate limiting. Inactivity auto-kill. Hardened headers.</a:t>
+            </a:r>
+          </a:p>
+          <a:p>
+            <a:r>
+              <a:rPr b="0"/>
+              <a:t>  アテンプト リミティング。 レイト リミティング。 インアクティヴィティ オートキル。 ハードゥンド ヘダーズ。</a:t>
+            </a:r>
+          </a:p>
+          <a:p>
+            <a:r>
+              <a:rPr b="0"/>
+              <a:t>And an opt-in, HMAC-chained audit log.</a:t>
+            </a:r>
+          </a:p>
+          <a:p>
+            <a:r>
+              <a:rPr b="0"/>
+              <a:t>  アンド アン オプトイン、 </a:t>
+            </a:r>
+            <a:r>
+              <a:rPr b="1"/>
+              <a:t>エイチマック チェインド オーディット ログ</a:t>
+            </a:r>
+            <a:r>
+              <a:rPr b="0"/>
+              <a:t>。</a:t>
+            </a:r>
+          </a:p>
+          <a:p>
+            <a:r>
+              <a:rPr b="0"/>
+              <a:t>Happy to go deep in Q and A.”</a:t>
+            </a:r>
+          </a:p>
+          <a:p>
+            <a:r>
+              <a:rPr b="0"/>
+              <a:t>  ハッピー トゥ ゴウ </a:t>
+            </a:r>
+            <a:r>
+              <a:rPr b="1"/>
+              <a:t>ディープ</a:t>
+            </a:r>
+            <a:r>
+              <a:rPr b="0"/>
+              <a:t> イン キュー アンド エイ。</a:t>
+            </a:r>
           </a:p>
         </p:txBody>
       </p:sp>
@@ -1708,17 +4308,222 @@
           <a:lstStyle/>
           <a:p>
             <a:r>
-              <a:t>[17:05 / 1:10] DESIGN ETHICS  ★倫理</a:t>
-            </a:r>
-          </a:p>
-          <a:p>
-            <a:r>
-              <a:t>EN: "Now the ethics — and this matters, especially in this room. The line I draw is simple: Phasmid destroys, but it never fabricates. It will not plant rootkits, hide processes, bypass forensic tools, forge timestamps, fake system events, or tamper with metadata to deceive an examiner — and it will not write your cover story for you either. What it does give the owner is a duress response — owner-triggered destruction: a silent brick overwrites the whole container with random data, and purge drops one face. Note what that means: under coercion the restricted credential destroys. It does not quietly disclose something false. There is no fake unlock that hands an examiner a forgery with my name on it. I'm telling you plainly that destruction exists, because the honest thing is to also say it's dangerous. Destroying data at the moment of seizure can itself be a crime — that's the border case on the problem slide, charged under a US destruction-of-evidence statute. Phasmid gives you the capability; it does not advise using it against lawful process, and legality is jurisdiction-dependent. The auto-fire path especially: understand your jurisdiction before you ever enable it. I won't comment on that active case or give legal advice."</a:t>
-            </a:r>
-          </a:p>
-          <a:p>
-            <a:r>
-              <a:t>JA: 破壊機能の存在を隠さず認める。核心は「destroyはする／fabricateはしない」。**強要下では開示しない — 制限パスフレーズは破壊資格であり取出資格ではない**。§2232（border case）を利用者リスクとして開示。自動発火経路は特に危険。推奨・法律助言はしない。</a:t>
+              <a:rPr b="0"/>
+              <a:t>[17:05 / 1:10] DESIGN ETHICS  ★倫理 — 発話 0:30</a:t>
+            </a:r>
+          </a:p>
+          <a:p>
+            <a:r>
+              <a:rPr b="0"/>
+              <a:t/>
+            </a:r>
+          </a:p>
+          <a:p>
+            <a:r>
+              <a:rPr b="0"/>
+              <a:t>“Now the ethics. And this matters — especially in this room.</a:t>
+            </a:r>
+          </a:p>
+          <a:p>
+            <a:r>
+              <a:rPr b="0"/>
+              <a:t>  ナウ ジ </a:t>
+            </a:r>
+            <a:r>
+              <a:rPr b="1"/>
+              <a:t>エシックス</a:t>
+            </a:r>
+            <a:r>
+              <a:rPr b="0"/>
+              <a:t>。 アンド ディス </a:t>
+            </a:r>
+            <a:r>
+              <a:rPr b="1"/>
+              <a:t>マターズ</a:t>
+            </a:r>
+            <a:r>
+              <a:rPr b="0"/>
+              <a:t> — イスペシャリー イン ディス ルーム。</a:t>
+            </a:r>
+          </a:p>
+          <a:p>
+            <a:r>
+              <a:rPr b="0"/>
+              <a:t>Phasmid allows plausible controlled disclosure.</a:t>
+            </a:r>
+          </a:p>
+          <a:p>
+            <a:r>
+              <a:rPr b="0"/>
+              <a:t>  ファズミッド </a:t>
+            </a:r>
+            <a:r>
+              <a:rPr b="1"/>
+              <a:t>アラウズ</a:t>
+            </a:r>
+            <a:r>
+              <a:rPr b="0"/>
+              <a:t> プローザブル コントロールド ディスクロージャー。</a:t>
+            </a:r>
+          </a:p>
+          <a:p>
+            <a:r>
+              <a:rPr b="0"/>
+              <a:t>Standby. Workflows that preserve ambiguity.</a:t>
+            </a:r>
+          </a:p>
+          <a:p>
+            <a:r>
+              <a:rPr b="0"/>
+              <a:t>  スタンドバイ。 ワークフロウズ ザット プリザーヴ </a:t>
+            </a:r>
+            <a:r>
+              <a:rPr b="1"/>
+              <a:t>アンビギューイティ</a:t>
+            </a:r>
+            <a:r>
+              <a:rPr b="0"/>
+              <a:t>。</a:t>
+            </a:r>
+          </a:p>
+          <a:p>
+            <a:r>
+              <a:rPr b="0"/>
+              <a:t>It explicitly disallows rootkits. Kernel-level hiding.</a:t>
+            </a:r>
+          </a:p>
+          <a:p>
+            <a:r>
+              <a:rPr b="0"/>
+              <a:t>  イット エクスプリシットリー </a:t>
+            </a:r>
+            <a:r>
+              <a:rPr b="1"/>
+              <a:t>ディサラウズ</a:t>
+            </a:r>
+            <a:r>
+              <a:rPr b="0"/>
+              <a:t> ルートキッツ。 カーネルレヴル ハイディング。</a:t>
+            </a:r>
+          </a:p>
+          <a:p>
+            <a:r>
+              <a:rPr b="0"/>
+              <a:t>Anti-forensic destruction. Forensic-tool bypass.</a:t>
+            </a:r>
+          </a:p>
+          <a:p>
+            <a:r>
+              <a:rPr b="0"/>
+              <a:t>  アンティフォレンシック ディストラクション。 フォレンシック ツール バイパス。</a:t>
+            </a:r>
+          </a:p>
+          <a:p>
+            <a:r>
+              <a:rPr b="0"/>
+              <a:t>And fabricating false events, or false timestamps.</a:t>
+            </a:r>
+          </a:p>
+          <a:p>
+            <a:r>
+              <a:rPr b="0"/>
+              <a:t>  アンド </a:t>
+            </a:r>
+            <a:r>
+              <a:rPr b="1"/>
+              <a:t>ファブリケイティング</a:t>
+            </a:r>
+            <a:r>
+              <a:rPr b="0"/>
+              <a:t> フォルス イヴェンツ、 オア フォルス タイムスタンプス。</a:t>
+            </a:r>
+          </a:p>
+          <a:p>
+            <a:r>
+              <a:rPr b="0"/>
+              <a:t>It increases uncertainty. It delays a confident conclusion.</a:t>
+            </a:r>
+          </a:p>
+          <a:p>
+            <a:r>
+              <a:rPr b="0"/>
+              <a:t>  イット </a:t>
+            </a:r>
+            <a:r>
+              <a:rPr b="1"/>
+              <a:t>インクリーシズ</a:t>
+            </a:r>
+            <a:r>
+              <a:rPr b="0"/>
+              <a:t> アンサートゥンティ。 イット </a:t>
+            </a:r>
+            <a:r>
+              <a:rPr b="1"/>
+              <a:t>ディレイズ</a:t>
+            </a:r>
+            <a:r>
+              <a:rPr b="0"/>
+              <a:t> ア コンフィデント コンクルージョン。</a:t>
+            </a:r>
+          </a:p>
+          <a:p>
+            <a:r>
+              <a:rPr b="0"/>
+              <a:t>It does not claim forensic invisibility.</a:t>
+            </a:r>
+          </a:p>
+          <a:p>
+            <a:r>
+              <a:rPr b="0"/>
+              <a:t>  イット ダズ </a:t>
+            </a:r>
+            <a:r>
+              <a:rPr b="1"/>
+              <a:t>ナット</a:t>
+            </a:r>
+            <a:r>
+              <a:rPr b="0"/>
+              <a:t> クレイム フォレンシック インヴィジビリティ。</a:t>
+            </a:r>
+          </a:p>
+          <a:p>
+            <a:r>
+              <a:rPr b="0"/>
+              <a:t>That line is deliberate. And it’s in the code.”</a:t>
+            </a:r>
+          </a:p>
+          <a:p>
+            <a:r>
+              <a:rPr b="0"/>
+              <a:t>  ザット ライン イズ </a:t>
+            </a:r>
+            <a:r>
+              <a:rPr b="1"/>
+              <a:t>ディリバレット</a:t>
+            </a:r>
+            <a:r>
+              <a:rPr b="0"/>
+              <a:t>。 アンド イッツ イン ザ </a:t>
+            </a:r>
+            <a:r>
+              <a:rPr b="1"/>
+              <a:t>コウド</a:t>
+            </a:r>
+            <a:r>
+              <a:rPr b="0"/>
+              <a:t>。</a:t>
+            </a:r>
+          </a:p>
+          <a:p>
+            <a:r>
+              <a:rPr b="0"/>
+              <a:t/>
+            </a:r>
+          </a:p>
+          <a:p>
+            <a:r>
+              <a:rPr b="0"/>
+              <a:t>JA: フォレンジック/法執行の聴衆へ誠実に。目を合わせる。信頼獲得点</a:t>
             </a:r>
           </a:p>
         </p:txBody>
@@ -1804,17 +4609,302 @@
           <a:lstStyle/>
           <a:p>
             <a:r>
-              <a:t>[18:15 / 0:50] SCOPE</a:t>
-            </a:r>
-          </a:p>
-          <a:p>
-            <a:r>
-              <a:t>EN: "Scope, drawn honestly. Software-existence concealment: out. Data-existence deniability: partial. Controlled disclosure: in, and central. Coercion-aware fallback: in. And things it never claims — perfect deniability, forensic immunity, secure deletion on flash, protection from a compromised host. One more it never claims: that your cover story is convincing. It can tell you how much space is occupied. It cannot tell you whether anyone will believe you, and it does not pretend to. No snake oil. Okay — enough talk. Let me show you."</a:t>
-            </a:r>
-          </a:p>
-          <a:p>
-            <a:r>
-              <a:t>JA: 誠実さの締め。**「説得力を判定しない」を非主張リストの5つ目として口頭で追加する。**最後の一文でデモへ橋渡し。</a:t>
+              <a:rPr b="0"/>
+              <a:t>[18:15 / 0:50] SCOPE — 発話 0:45</a:t>
+            </a:r>
+          </a:p>
+          <a:p>
+            <a:r>
+              <a:rPr b="0"/>
+              <a:t/>
+            </a:r>
+          </a:p>
+          <a:p>
+            <a:r>
+              <a:rPr b="0"/>
+              <a:t>“Scope, drawn honestly.</a:t>
+            </a:r>
+          </a:p>
+          <a:p>
+            <a:r>
+              <a:rPr b="0"/>
+              <a:t>  </a:t>
+            </a:r>
+            <a:r>
+              <a:rPr b="1"/>
+              <a:t>スコープ</a:t>
+            </a:r>
+            <a:r>
+              <a:rPr b="0"/>
+              <a:t>、 ドローン </a:t>
+            </a:r>
+            <a:r>
+              <a:rPr b="1"/>
+              <a:t>オネストリー</a:t>
+            </a:r>
+            <a:r>
+              <a:rPr b="0"/>
+              <a:t>。</a:t>
+            </a:r>
+          </a:p>
+          <a:p>
+            <a:r>
+              <a:rPr b="0"/>
+              <a:t>Hiding that the software exists — out.</a:t>
+            </a:r>
+          </a:p>
+          <a:p>
+            <a:r>
+              <a:rPr b="0"/>
+              <a:t>  ハイディング ザット ザ ソフトウェア イグズィスツ — </a:t>
+            </a:r>
+            <a:r>
+              <a:rPr b="1"/>
+              <a:t>アウト</a:t>
+            </a:r>
+            <a:r>
+              <a:rPr b="0"/>
+              <a:t>。</a:t>
+            </a:r>
+          </a:p>
+          <a:p>
+            <a:r>
+              <a:rPr b="0"/>
+              <a:t>Denying that the data exists — partial.</a:t>
+            </a:r>
+          </a:p>
+          <a:p>
+            <a:r>
+              <a:rPr b="0"/>
+              <a:t>  ディナイイング ザット ザ データ イグズィスツ — </a:t>
+            </a:r>
+            <a:r>
+              <a:rPr b="1"/>
+              <a:t>パーシャル</a:t>
+            </a:r>
+            <a:r>
+              <a:rPr b="0"/>
+              <a:t>。</a:t>
+            </a:r>
+          </a:p>
+          <a:p>
+            <a:r>
+              <a:rPr b="0"/>
+              <a:t>Controlled disclosure — in, and central.</a:t>
+            </a:r>
+          </a:p>
+          <a:p>
+            <a:r>
+              <a:rPr b="0"/>
+              <a:t>  コントロールド ディスクロージャー — </a:t>
+            </a:r>
+            <a:r>
+              <a:rPr b="1"/>
+              <a:t>イン</a:t>
+            </a:r>
+            <a:r>
+              <a:rPr b="0"/>
+              <a:t>、 アンド </a:t>
+            </a:r>
+            <a:r>
+              <a:rPr b="1"/>
+              <a:t>セントラル</a:t>
+            </a:r>
+            <a:r>
+              <a:rPr b="0"/>
+              <a:t>。</a:t>
+            </a:r>
+          </a:p>
+          <a:p>
+            <a:r>
+              <a:rPr b="0"/>
+              <a:t>Coercion-aware fallback — in.</a:t>
+            </a:r>
+          </a:p>
+          <a:p>
+            <a:r>
+              <a:rPr b="0"/>
+              <a:t>  コアージョンアウェア フォールバック — </a:t>
+            </a:r>
+            <a:r>
+              <a:rPr b="1"/>
+              <a:t>イン</a:t>
+            </a:r>
+            <a:r>
+              <a:rPr b="0"/>
+              <a:t>。</a:t>
+            </a:r>
+          </a:p>
+          <a:p>
+            <a:r>
+              <a:rPr b="0"/>
+              <a:t>And here’s what it never claims.</a:t>
+            </a:r>
+          </a:p>
+          <a:p>
+            <a:r>
+              <a:rPr b="0"/>
+              <a:t>  アンド ヒアズ ワット イット </a:t>
+            </a:r>
+            <a:r>
+              <a:rPr b="1"/>
+              <a:t>ネヴァー</a:t>
+            </a:r>
+            <a:r>
+              <a:rPr b="0"/>
+              <a:t> クレイムズ。</a:t>
+            </a:r>
+          </a:p>
+          <a:p>
+            <a:r>
+              <a:rPr b="0"/>
+              <a:t>Perfect deniability. Forensic immunity.</a:t>
+            </a:r>
+          </a:p>
+          <a:p>
+            <a:r>
+              <a:rPr b="0"/>
+              <a:t>  パーフェクト ディナイアビリティ。 フォレンシック イミューニティ。</a:t>
+            </a:r>
+          </a:p>
+          <a:p>
+            <a:r>
+              <a:rPr b="0"/>
+              <a:t>Secure deletion on flash. Protection from a compromised host.</a:t>
+            </a:r>
+          </a:p>
+          <a:p>
+            <a:r>
+              <a:rPr b="0"/>
+              <a:t>  セキュア ディリーション オン フラッシュ。 プロテクション フロム ア コンプロマイズド ホウスト。</a:t>
+            </a:r>
+          </a:p>
+          <a:p>
+            <a:r>
+              <a:rPr b="0"/>
+              <a:t>And one more thing it never claims: that your cover story is convincing.</a:t>
+            </a:r>
+          </a:p>
+          <a:p>
+            <a:r>
+              <a:rPr b="0"/>
+              <a:t>  アンド ワン モア シング イット ネヴァー クレイムズ: ザット ユア カヴァー ストーリー イズ </a:t>
+            </a:r>
+            <a:r>
+              <a:rPr b="1"/>
+              <a:t>コンヴィンシング</a:t>
+            </a:r>
+            <a:r>
+              <a:rPr b="0"/>
+              <a:t>。</a:t>
+            </a:r>
+          </a:p>
+          <a:p>
+            <a:r>
+              <a:rPr b="0"/>
+              <a:t>It can tell you how much space is occupied.</a:t>
+            </a:r>
+          </a:p>
+          <a:p>
+            <a:r>
+              <a:rPr b="0"/>
+              <a:t>  イット キャン テル ユー ハウ マッチ </a:t>
+            </a:r>
+            <a:r>
+              <a:rPr b="1"/>
+              <a:t>スペイス</a:t>
+            </a:r>
+            <a:r>
+              <a:rPr b="0"/>
+              <a:t> イズ オキュパイド。</a:t>
+            </a:r>
+          </a:p>
+          <a:p>
+            <a:r>
+              <a:rPr b="0"/>
+              <a:t>It cannot tell you whether anyone will believe you.</a:t>
+            </a:r>
+          </a:p>
+          <a:p>
+            <a:r>
+              <a:rPr b="0"/>
+              <a:t>  イット キャナット テル ユー ウェザー エニワン ウィル </a:t>
+            </a:r>
+            <a:r>
+              <a:rPr b="1"/>
+              <a:t>ビリーヴ</a:t>
+            </a:r>
+            <a:r>
+              <a:rPr b="0"/>
+              <a:t> ユー。</a:t>
+            </a:r>
+          </a:p>
+          <a:p>
+            <a:r>
+              <a:rPr b="0"/>
+              <a:t>And it doesn’t pretend to. No snake oil.</a:t>
+            </a:r>
+          </a:p>
+          <a:p>
+            <a:r>
+              <a:rPr b="0"/>
+              <a:t>  アンド イット ダズント </a:t>
+            </a:r>
+            <a:r>
+              <a:rPr b="1"/>
+              <a:t>プリテンド</a:t>
+            </a:r>
+            <a:r>
+              <a:rPr b="0"/>
+              <a:t> トゥ。 </a:t>
+            </a:r>
+            <a:r>
+              <a:rPr b="1"/>
+              <a:t>ノウ スネイク オイル</a:t>
+            </a:r>
+            <a:r>
+              <a:rPr b="0"/>
+              <a:t>。</a:t>
+            </a:r>
+          </a:p>
+          <a:p>
+            <a:r>
+              <a:rPr b="0"/>
+              <a:t>All right. Enough talk. Let me show you.”</a:t>
+            </a:r>
+          </a:p>
+          <a:p>
+            <a:r>
+              <a:rPr b="0"/>
+              <a:t>  オーライト。 </a:t>
+            </a:r>
+            <a:r>
+              <a:rPr b="1"/>
+              <a:t>イナフ</a:t>
+            </a:r>
+            <a:r>
+              <a:rPr b="0"/>
+              <a:t> トーク。 レット ミー </a:t>
+            </a:r>
+            <a:r>
+              <a:rPr b="1"/>
+              <a:t>ショウ</a:t>
+            </a:r>
+            <a:r>
+              <a:rPr b="0"/>
+              <a:t> ユー。</a:t>
+            </a:r>
+          </a:p>
+          <a:p>
+            <a:r>
+              <a:rPr b="0"/>
+              <a:t/>
+            </a:r>
+          </a:p>
+          <a:p>
+            <a:r>
+              <a:rPr b="0"/>
+              <a:t>JA: 誠実さの締め。最後の一文でデモへ橋渡し</a:t>
             </a:r>
           </a:p>
         </p:txBody>
@@ -1900,22 +4990,46 @@
           <a:lstStyle/>
           <a:p>
             <a:r>
-              <a:t>[19:05 / 0:15] LIVE DEMO (divider)</a:t>
-            </a:r>
-          </a:p>
-          <a:p>
-            <a:r>
-              <a:t>EN: "Alright — live demo."</a:t>
-            </a:r>
-          </a:p>
-          <a:p>
-            <a:r>
-              <a:t>JA: 章扉。呼吸を整え実機に向き直る。プロジェクタ入力をTUIへ切替。バックアップ録画の頭出しを確認。</a:t>
-            </a:r>
-          </a:p>
-          <a:p>
-            <a:r>
-              <a:t>この後の切替は Step 1→2（TUI→ブラウザ）と Step 4→5（ブラウザ→TUI）の1往復だけ。</a:t>
+              <a:rPr b="0"/>
+              <a:t>[19:05 / 0:15] LIVE DEMO（章扉）</a:t>
+            </a:r>
+          </a:p>
+          <a:p>
+            <a:r>
+              <a:rPr b="0"/>
+              <a:t/>
+            </a:r>
+          </a:p>
+          <a:p>
+            <a:r>
+              <a:rPr b="0"/>
+              <a:t>“Alright — live demo.”</a:t>
+            </a:r>
+          </a:p>
+          <a:p>
+            <a:r>
+              <a:rPr b="0"/>
+              <a:t>  オーライト — </a:t>
+            </a:r>
+            <a:r>
+              <a:rPr b="1"/>
+              <a:t>ライヴ デモ</a:t>
+            </a:r>
+            <a:r>
+              <a:rPr b="0"/>
+              <a:t>。</a:t>
+            </a:r>
+          </a:p>
+          <a:p>
+            <a:r>
+              <a:rPr b="0"/>
+              <a:t/>
+            </a:r>
+          </a:p>
+          <a:p>
+            <a:r>
+              <a:rPr b="0"/>
+              <a:t>JA: 呼吸を整え実機に向き直る。プロジェクタ入力を TUI へ切替。バックアップ録画の頭出しを確認。以降の切替は Step 1→2（TUI→ブラウザ）と Step 4→5（ブラウザ→TUI）の1往復だけ。</a:t>
             </a:r>
           </a:p>
         </p:txBody>
@@ -2001,54 +5115,2034 @@
           <a:lstStyle/>
           <a:p>
             <a:r>
-              <a:t>[19:20 / ~7:20] LIVE DEMO  ★中心（9手・TUI+WebUI・切替1往復）</a:t>
-            </a:r>
-          </a:p>
-          <a:p>
-            <a:r>
-              <a:t>EN (最小限・手を動かしながら): "Here's what you're about to see. I'll create one container on the device. Then, in the local web interface, I'll put two different files into it — each behind its own password and its own everyday object. Then I open it twice. Same container, same screen. First password: this file. Second password: a completely different file. That is the two-face model, live. And then the part that matters most: I use the first password again, change nothing else, and simply take the object away. Watch it refuse. Then Audit, and Silent Standby."</a:t>
-            </a:r>
-          </a:p>
-          <a:p/>
-          <a:p>
-            <a:r>
-              <a:t>JA: 詳細は別紙 Phasmid_Demo_Runbook（9手・合計~7:20）。</a:t>
-            </a:r>
-          </a:p>
-          <a:p>
-            <a:r>
-              <a:t>証明は2つあり、順番に意味がある。対比①=Step 3→4（同じ容器・違うパスワード→違うファイル）が Janus の実証。対比②=Step 5（何も変えず物体だけ外す→拒否）が cue≠key の実証。どちらも省略できない — ①だけなら二重底のパスワード管理、②だけなら物体認証つき暗号化に見える。</a:t>
-            </a:r>
-          </a:p>
-          <a:p>
-            <a:r>
-              <a:t>Step 2〜4 は WebUI（store トークン）、Step 5 以降は TUI。切替は Step 1→2 と Step 4→5 の1往復のみ。</a:t>
-            </a:r>
-          </a:p>
-          <a:p>
-            <a:r>
-              <a:t>★Step 4 で必ず間を取る。可能なら2つのファイルを並べて見せる。</a:t>
-            </a:r>
-          </a:p>
-          <a:p/>
-          <a:p>
-            <a:r>
-              <a:t>注意: マウスは使わない（Tab/Enter）。端末幅124桁以上（#169 で Doctor・Inspect がフッタから消え 145→124 に低下）。TUI の Add File は #169 で非活性化 — 保存は WebUI のみ。Fill Free Space は実測4分なので壇上では実行しない。</a:t>
-            </a:r>
-          </a:p>
-          <a:p>
-            <a:r>
-              <a:t>落とし穴: 復元は2回とも retrieved_payload.bin で落ちるので、違いはファイル名ではなく中身を開いて見せる。事前にダウンロードフォルダを空にする（2つ目が (1) 付きになる）。</a:t>
-            </a:r>
-          </a:p>
-          <a:p>
-            <a:r>
-              <a:t>破壊は壇上で実演しない — Slide 21 で口頭、実演は卓上デモへ。</a:t>
-            </a:r>
-          </a:p>
-          <a:p>
-            <a:r>
-              <a:t>時間: 26:00 超で Step 3 の誤パスワード実演と Audit を削る。Step 4・Step 5・Silent Standby だけは何があっても実機で見せる。失敗時は録画へ切替。</a:t>
+              <a:rPr b="0"/>
+              <a:t>[19:20 / ~7:30] LIVE DEMO  ★中心（8手＋任意1・TUI+WebUI・切替1往復）</a:t>
+            </a:r>
+          </a:p>
+          <a:p>
+            <a:r>
+              <a:rPr b="0"/>
+              <a:t/>
+            </a:r>
+          </a:p>
+          <a:p>
+            <a:r>
+              <a:rPr b="0"/>
+              <a:t>── 前置き（手を動かしながら）</a:t>
+            </a:r>
+          </a:p>
+          <a:p>
+            <a:r>
+              <a:rPr b="0"/>
+              <a:t>“Here’s what you’re about to see.</a:t>
+            </a:r>
+          </a:p>
+          <a:p>
+            <a:r>
+              <a:rPr b="0"/>
+              <a:t>  ヒアズ ワット ユア アバウト トゥ </a:t>
+            </a:r>
+            <a:r>
+              <a:rPr b="1"/>
+              <a:t>シー</a:t>
+            </a:r>
+            <a:r>
+              <a:rPr b="0"/>
+              <a:t>。</a:t>
+            </a:r>
+          </a:p>
+          <a:p>
+            <a:r>
+              <a:rPr b="0"/>
+              <a:t>I’ll create one container on the device.</a:t>
+            </a:r>
+          </a:p>
+          <a:p>
+            <a:r>
+              <a:rPr b="0"/>
+              <a:t>  アイル クリエイト </a:t>
+            </a:r>
+            <a:r>
+              <a:rPr b="1"/>
+              <a:t>ワン コンテナ</a:t>
+            </a:r>
+            <a:r>
+              <a:rPr b="0"/>
+              <a:t> オン ザ デバイス。</a:t>
+            </a:r>
+          </a:p>
+          <a:p>
+            <a:r>
+              <a:rPr b="0"/>
+              <a:t>Then, in the local web interface, I’ll put two different files into it.</a:t>
+            </a:r>
+          </a:p>
+          <a:p>
+            <a:r>
+              <a:rPr b="0"/>
+              <a:t>  ゼン、 イン ザ ローカル ウェブ インターフェイス、 アイル プット </a:t>
+            </a:r>
+            <a:r>
+              <a:rPr b="1"/>
+              <a:t>トゥー ディファレント ファイルズ</a:t>
+            </a:r>
+            <a:r>
+              <a:rPr b="0"/>
+              <a:t> イントゥ イット。</a:t>
+            </a:r>
+          </a:p>
+          <a:p>
+            <a:r>
+              <a:rPr b="0"/>
+              <a:t>Each one behind its own password, and its own everyday object.</a:t>
+            </a:r>
+          </a:p>
+          <a:p>
+            <a:r>
+              <a:rPr b="0"/>
+              <a:t>  イーチ ワン ビハインド イツ </a:t>
+            </a:r>
+            <a:r>
+              <a:rPr b="1"/>
+              <a:t>オウン パスワード</a:t>
+            </a:r>
+            <a:r>
+              <a:rPr b="0"/>
+              <a:t>、 アンド イツ </a:t>
+            </a:r>
+            <a:r>
+              <a:rPr b="1"/>
+              <a:t>オウン エヴリデイ オブジェクト</a:t>
+            </a:r>
+            <a:r>
+              <a:rPr b="0"/>
+              <a:t>。</a:t>
+            </a:r>
+          </a:p>
+          <a:p>
+            <a:r>
+              <a:rPr b="0"/>
+              <a:t>Then I open one of them. Correct object, correct password — the file comes back.</a:t>
+            </a:r>
+          </a:p>
+          <a:p>
+            <a:r>
+              <a:rPr b="0"/>
+              <a:t>  ゼン アイ オウプン ワン オヴ ゼム。 コゥレクト オブジェクト、 コゥレクト パスワード — ザ ファイル </a:t>
+            </a:r>
+            <a:r>
+              <a:rPr b="1"/>
+              <a:t>カムズ バック</a:t>
+            </a:r>
+            <a:r>
+              <a:rPr b="0"/>
+              <a:t>。</a:t>
+            </a:r>
+          </a:p>
+          <a:p>
+            <a:r>
+              <a:rPr b="0"/>
+              <a:t>And then the part that matters most.</a:t>
+            </a:r>
+          </a:p>
+          <a:p>
+            <a:r>
+              <a:rPr b="0"/>
+              <a:t>  アンド ゼン ザ パート ザット </a:t>
+            </a:r>
+            <a:r>
+              <a:rPr b="1"/>
+              <a:t>マターズ モウスト</a:t>
+            </a:r>
+            <a:r>
+              <a:rPr b="0"/>
+              <a:t>。</a:t>
+            </a:r>
+          </a:p>
+          <a:p>
+            <a:r>
+              <a:rPr b="0"/>
+              <a:t>I don’t touch the screen.</a:t>
+            </a:r>
+          </a:p>
+          <a:p>
+            <a:r>
+              <a:rPr b="0"/>
+              <a:t>  アイ </a:t>
+            </a:r>
+            <a:r>
+              <a:rPr b="1"/>
+              <a:t>ドウント タッチ</a:t>
+            </a:r>
+            <a:r>
+              <a:rPr b="0"/>
+              <a:t> ザ スクリーン。</a:t>
+            </a:r>
+          </a:p>
+          <a:p>
+            <a:r>
+              <a:rPr b="0"/>
+              <a:t>Same tab. Same file. Same password. Same button.</a:t>
+            </a:r>
+          </a:p>
+          <a:p>
+            <a:r>
+              <a:rPr b="0"/>
+              <a:t>  セイム タブ。 セイム ファイル。 セイム パスワード。 セイム バトゥン。</a:t>
+            </a:r>
+          </a:p>
+          <a:p>
+            <a:r>
+              <a:rPr b="0"/>
+              <a:t>I simply take the object off the table.</a:t>
+            </a:r>
+          </a:p>
+          <a:p>
+            <a:r>
+              <a:rPr b="0"/>
+              <a:t>  アイ シンプリー </a:t>
+            </a:r>
+            <a:r>
+              <a:rPr b="1"/>
+              <a:t>テイク ジ オブジェクト オフ</a:t>
+            </a:r>
+            <a:r>
+              <a:rPr b="0"/>
+              <a:t> ザ テイブル。</a:t>
+            </a:r>
+          </a:p>
+          <a:p>
+            <a:r>
+              <a:rPr b="0"/>
+              <a:t>And watch it refuse.</a:t>
+            </a:r>
+          </a:p>
+          <a:p>
+            <a:r>
+              <a:rPr b="0"/>
+              <a:t>  アンド ウォッチ イット </a:t>
+            </a:r>
+            <a:r>
+              <a:rPr b="1"/>
+              <a:t>リフューズ</a:t>
+            </a:r>
+            <a:r>
+              <a:rPr b="0"/>
+              <a:t>。</a:t>
+            </a:r>
+          </a:p>
+          <a:p>
+            <a:r>
+              <a:rPr b="0"/>
+              <a:t>Then Audit. And Silent Standby.”</a:t>
+            </a:r>
+          </a:p>
+          <a:p>
+            <a:r>
+              <a:rPr b="0"/>
+              <a:t>  ゼン </a:t>
+            </a:r>
+            <a:r>
+              <a:rPr b="1"/>
+              <a:t>オーディット</a:t>
+            </a:r>
+            <a:r>
+              <a:rPr b="0"/>
+              <a:t>。 アンド </a:t>
+            </a:r>
+            <a:r>
+              <a:rPr b="1"/>
+              <a:t>サイレント スタンドバイ</a:t>
+            </a:r>
+            <a:r>
+              <a:rPr b="0"/>
+              <a:t>。</a:t>
+            </a:r>
+          </a:p>
+          <a:p>
+            <a:r>
+              <a:rPr b="0"/>
+              <a:t/>
+            </a:r>
+          </a:p>
+          <a:p>
+            <a:r>
+              <a:rPr b="0"/>
+              <a:t>── STEP 0 · 0:20 · Orientation</a:t>
+            </a:r>
+          </a:p>
+          <a:p>
+            <a:r>
+              <a:rPr b="0"/>
+              <a:t>DO: Simple ホームを提示。下部バーを指す（o · n · g · e · q · w の6つだけ）</a:t>
+            </a:r>
+          </a:p>
+          <a:p>
+            <a:r>
+              <a:rPr b="0"/>
+              <a:t>“This is the real console — Local Disclosure Control.</a:t>
+            </a:r>
+          </a:p>
+          <a:p>
+            <a:r>
+              <a:rPr b="0"/>
+              <a:t>  ディス イズ ザ </a:t>
+            </a:r>
+            <a:r>
+              <a:rPr b="1"/>
+              <a:t>リアル コンソウル</a:t>
+            </a:r>
+            <a:r>
+              <a:rPr b="0"/>
+              <a:t> — ローカル ディスクロージャー コントロール。</a:t>
+            </a:r>
+          </a:p>
+          <a:p>
+            <a:r>
+              <a:rPr b="0"/>
+              <a:t>The home screen is deliberately small.</a:t>
+            </a:r>
+          </a:p>
+          <a:p>
+            <a:r>
+              <a:rPr b="0"/>
+              <a:t>  ザ ホウム スクリーン イズ </a:t>
+            </a:r>
+            <a:r>
+              <a:rPr b="1"/>
+              <a:t>ディリバレットリー スモール</a:t>
+            </a:r>
+            <a:r>
+              <a:rPr b="0"/>
+              <a:t>。</a:t>
+            </a:r>
+          </a:p>
+          <a:p>
+            <a:r>
+              <a:rPr b="0"/>
+              <a:t>Open. New. Guided. Expert.</a:t>
+            </a:r>
+          </a:p>
+          <a:p>
+            <a:r>
+              <a:rPr b="0"/>
+              <a:t>  オウプン。 ニュー。 ガイディッド。 エクスパート。</a:t>
+            </a:r>
+          </a:p>
+          <a:p>
+            <a:r>
+              <a:rPr b="0"/>
+              <a:t>Under pressure, you don’t want a wall of options.</a:t>
+            </a:r>
+          </a:p>
+          <a:p>
+            <a:r>
+              <a:rPr b="0"/>
+              <a:t>  アンダー プレッシャー、 ユー ドウント ワント ア </a:t>
+            </a:r>
+            <a:r>
+              <a:rPr b="1"/>
+              <a:t>ウォール オヴ オプションズ</a:t>
+            </a:r>
+            <a:r>
+              <a:rPr b="0"/>
+              <a:t>。</a:t>
+            </a:r>
+          </a:p>
+          <a:p>
+            <a:r>
+              <a:rPr b="0"/>
+              <a:t>The full control set is one key away.”</a:t>
+            </a:r>
+          </a:p>
+          <a:p>
+            <a:r>
+              <a:rPr b="0"/>
+              <a:t>  ザ フル コントロール セット イズ </a:t>
+            </a:r>
+            <a:r>
+              <a:rPr b="1"/>
+              <a:t>ワン キー アウェイ</a:t>
+            </a:r>
+            <a:r>
+              <a:rPr b="0"/>
+              <a:t>。</a:t>
+            </a:r>
+          </a:p>
+          <a:p>
+            <a:r>
+              <a:rPr b="0"/>
+              <a:t/>
+            </a:r>
+          </a:p>
+          <a:p>
+            <a:r>
+              <a:rPr b="0"/>
+              <a:t>── STEP 1 · 0:50 · Create a Vessel — Prepare</a:t>
+            </a:r>
+          </a:p>
+          <a:p>
+            <a:r>
+              <a:rPr b="0"/>
+              <a:t>DO: n New → vessel-path → vessel-size を 64M に変更（Select・既定 512M。既定のまま作らない）→ vessel-label（任意・無害な語）→ create-btn</a:t>
+            </a:r>
+          </a:p>
+          <a:p>
+            <a:r>
+              <a:rPr b="0"/>
+              <a:t>“First I create a vessel — a deniable container file.</a:t>
+            </a:r>
+          </a:p>
+          <a:p>
+            <a:r>
+              <a:rPr b="0"/>
+              <a:t>  ファースト アイ クリエイト ア </a:t>
+            </a:r>
+            <a:r>
+              <a:rPr b="1"/>
+              <a:t>ヴェッセル</a:t>
+            </a:r>
+            <a:r>
+              <a:rPr b="0"/>
+              <a:t> — ア ディナイアブル コンテナ ファイル。</a:t>
+            </a:r>
+          </a:p>
+          <a:p>
+            <a:r>
+              <a:rPr b="0"/>
+              <a:t>This is the Prepare step.</a:t>
+            </a:r>
+          </a:p>
+          <a:p>
+            <a:r>
+              <a:rPr b="0"/>
+              <a:t>  ディス イズ ザ </a:t>
+            </a:r>
+            <a:r>
+              <a:rPr b="1"/>
+              <a:t>プリペア</a:t>
+            </a:r>
+            <a:r>
+              <a:rPr b="0"/>
+              <a:t> ステップ。</a:t>
+            </a:r>
+          </a:p>
+          <a:p>
+            <a:r>
+              <a:rPr b="0"/>
+              <a:t>It has no header. No magic bytes.</a:t>
+            </a:r>
+          </a:p>
+          <a:p>
+            <a:r>
+              <a:rPr b="0"/>
+              <a:t>  イット ハズ </a:t>
+            </a:r>
+            <a:r>
+              <a:rPr b="1"/>
+              <a:t>ノウ ヘダー</a:t>
+            </a:r>
+            <a:r>
+              <a:rPr b="0"/>
+              <a:t>。 </a:t>
+            </a:r>
+            <a:r>
+              <a:rPr b="1"/>
+              <a:t>ノウ マジック バイツ</a:t>
+            </a:r>
+            <a:r>
+              <a:rPr b="0"/>
+              <a:t>。</a:t>
+            </a:r>
+          </a:p>
+          <a:p>
+            <a:r>
+              <a:rPr b="0"/>
+              <a:t>On disk, it’s indistinguishable from random data.”</a:t>
+            </a:r>
+          </a:p>
+          <a:p>
+            <a:r>
+              <a:rPr b="0"/>
+              <a:t>  オン ディスク、 イッツ </a:t>
+            </a:r>
+            <a:r>
+              <a:rPr b="1"/>
+              <a:t>インディスティングウィシャブル</a:t>
+            </a:r>
+            <a:r>
+              <a:rPr b="0"/>
+              <a:t> フロム ランダム データ。</a:t>
+            </a:r>
+          </a:p>
+          <a:p>
+            <a:r>
+              <a:rPr b="0"/>
+              <a:t/>
+            </a:r>
+          </a:p>
+          <a:p>
+            <a:r>
+              <a:rPr b="0"/>
+              <a:t>── STEP 2 · 1:30 · Bind — put two different files into one container</a:t>
+            </a:r>
+          </a:p>
+          <a:p>
+            <a:r>
+              <a:rPr b="0"/>
+              <a:t>DO: TUI で w → プロジェクタをラップトップのブラウザへ切替 → 事前ブックマークの /unlock タブに store トークンを入力 → Store 画面。1回目：「Choose the entry」で Entry 1 → ファイル → パスワード → 物体を手元に置いたまま 1 · Capture empty scene → 物体Aをかざして 2 · Capture access object → かざしたまま Protect file2回目：Entry 2 に切替 → 別ファイル → 別パスワード → 物体を外して 1 · Capture empty scene → 物体Bをかざして 2 · Capture access object → Advanced security options → Restricted recovery password に破壊パスワード → かざしたまま Protect file</a:t>
+            </a:r>
+          </a:p>
+          <a:p>
+            <a:r>
+              <a:rPr b="0"/>
+              <a:t>“Now I switch to the browser.</a:t>
+            </a:r>
+          </a:p>
+          <a:p>
+            <a:r>
+              <a:rPr b="0"/>
+              <a:t>  ナウ アイ スウィッチ トゥ ザ </a:t>
+            </a:r>
+            <a:r>
+              <a:rPr b="1"/>
+              <a:t>ブラウザ</a:t>
+            </a:r>
+            <a:r>
+              <a:rPr b="0"/>
+              <a:t>。</a:t>
+            </a:r>
+          </a:p>
+          <a:p>
+            <a:r>
+              <a:rPr b="0"/>
+              <a:t>The same device serves a local web interface.</a:t>
+            </a:r>
+          </a:p>
+          <a:p>
+            <a:r>
+              <a:rPr b="0"/>
+              <a:t>  ザ セイム デバイス サーヴズ ア </a:t>
+            </a:r>
+            <a:r>
+              <a:rPr b="1"/>
+              <a:t>ローカル ウェブ インターフェイス</a:t>
+            </a:r>
+            <a:r>
+              <a:rPr b="0"/>
+              <a:t>。</a:t>
+            </a:r>
+          </a:p>
+          <a:p>
+            <a:r>
+              <a:rPr b="0"/>
+              <a:t>I’m logged in with a token scoped to the store role.</a:t>
+            </a:r>
+          </a:p>
+          <a:p>
+            <a:r>
+              <a:rPr b="0"/>
+              <a:t>  アイム ログド イン ウィズ ア トウクン スコウプト トゥ ザ </a:t>
+            </a:r>
+            <a:r>
+              <a:rPr b="1"/>
+              <a:t>ストア ロウル</a:t>
+            </a:r>
+            <a:r>
+              <a:rPr b="0"/>
+              <a:t>。</a:t>
+            </a:r>
+          </a:p>
+          <a:p>
+            <a:r>
+              <a:rPr b="0"/>
+              <a:t>I’m putting two different files into the one container I just made.</a:t>
+            </a:r>
+          </a:p>
+          <a:p>
+            <a:r>
+              <a:rPr b="0"/>
+              <a:t>  アイム プティング </a:t>
+            </a:r>
+            <a:r>
+              <a:rPr b="1"/>
+              <a:t>トゥー ディファレント ファイルズ</a:t>
+            </a:r>
+            <a:r>
+              <a:rPr b="0"/>
+              <a:t> イントゥ ザ ワン コンテナ アイ ジャスト メイド。</a:t>
+            </a:r>
+          </a:p>
+          <a:p>
+            <a:r>
+              <a:rPr b="0"/>
+              <a:t>Now watch — it takes two shots.</a:t>
+            </a:r>
+          </a:p>
+          <a:p>
+            <a:r>
+              <a:rPr b="0"/>
+              <a:t>  ナウ </a:t>
+            </a:r>
+            <a:r>
+              <a:rPr b="1"/>
+              <a:t>ウォッチ</a:t>
+            </a:r>
+            <a:r>
+              <a:rPr b="0"/>
+              <a:t> — イット テイクス </a:t>
+            </a:r>
+            <a:r>
+              <a:rPr b="1"/>
+              <a:t>トゥー ショッツ</a:t>
+            </a:r>
+            <a:r>
+              <a:rPr b="0"/>
+              <a:t>。</a:t>
+            </a:r>
+          </a:p>
+          <a:p>
+            <a:r>
+              <a:rPr b="0"/>
+              <a:t>First the empty view. Then the object.</a:t>
+            </a:r>
+          </a:p>
+          <a:p>
+            <a:r>
+              <a:rPr b="0"/>
+              <a:t>  ファースト ジ </a:t>
+            </a:r>
+            <a:r>
+              <a:rPr b="1"/>
+              <a:t>エンプティ ヴュー</a:t>
+            </a:r>
+            <a:r>
+              <a:rPr b="0"/>
+              <a:t>。 ゼン ジ </a:t>
+            </a:r>
+            <a:r>
+              <a:rPr b="1"/>
+              <a:t>オブジェクト</a:t>
+            </a:r>
+            <a:r>
+              <a:rPr b="0"/>
+              <a:t>。</a:t>
+            </a:r>
+          </a:p>
+          <a:p>
+            <a:r>
+              <a:rPr b="0"/>
+              <a:t>The difference between those two frames is what the device keeps.</a:t>
+            </a:r>
+          </a:p>
+          <a:p>
+            <a:r>
+              <a:rPr b="0"/>
+              <a:t>  ザ </a:t>
+            </a:r>
+            <a:r>
+              <a:rPr b="1"/>
+              <a:t>ディファレンス</a:t>
+            </a:r>
+            <a:r>
+              <a:rPr b="0"/>
+              <a:t> ビトウィーン ゾウズ トゥー フレイムズ イズ ワット ザ デバイス キープス。</a:t>
+            </a:r>
+          </a:p>
+          <a:p>
+            <a:r>
+              <a:rPr b="0"/>
+              <a:t>Otherwise it would be describing my wall.</a:t>
+            </a:r>
+          </a:p>
+          <a:p>
+            <a:r>
+              <a:rPr b="0"/>
+              <a:t>  アザワイズ イット ウド ビー ディスクライビング マイ </a:t>
+            </a:r>
+            <a:r>
+              <a:rPr b="1"/>
+              <a:t>ウォール</a:t>
+            </a:r>
+            <a:r>
+              <a:rPr b="0"/>
+              <a:t>。</a:t>
+            </a:r>
+          </a:p>
+          <a:p>
+            <a:r>
+              <a:rPr b="0"/>
+              <a:t>And then my wall would open the file.</a:t>
+            </a:r>
+          </a:p>
+          <a:p>
+            <a:r>
+              <a:rPr b="0"/>
+              <a:t>  アンド ゼン </a:t>
+            </a:r>
+            <a:r>
+              <a:rPr b="1"/>
+              <a:t>マイ ウォール</a:t>
+            </a:r>
+            <a:r>
+              <a:rPr b="0"/>
+              <a:t> ウド オウプン ザ ファイル。</a:t>
+            </a:r>
+          </a:p>
+          <a:p>
+            <a:r>
+              <a:rPr b="0"/>
+              <a:t>And remember what that object is. A cue, not a key.</a:t>
+            </a:r>
+          </a:p>
+          <a:p>
+            <a:r>
+              <a:rPr b="0"/>
+              <a:t>  アンド リメンバー ワット ザット オブジェクト イズ。 ア </a:t>
+            </a:r>
+            <a:r>
+              <a:rPr b="1"/>
+              <a:t>キュー</a:t>
+            </a:r>
+            <a:r>
+              <a:rPr b="0"/>
+              <a:t>、 </a:t>
+            </a:r>
+            <a:r>
+              <a:rPr b="1"/>
+              <a:t>ナット</a:t>
+            </a:r>
+            <a:r>
+              <a:rPr b="0"/>
+              <a:t> ア キー。</a:t>
+            </a:r>
+          </a:p>
+          <a:p>
+            <a:r>
+              <a:rPr b="0"/>
+              <a:t>It gates the operation. It is not the encryption key.</a:t>
+            </a:r>
+          </a:p>
+          <a:p>
+            <a:r>
+              <a:rPr b="0"/>
+              <a:t>  イット </a:t>
+            </a:r>
+            <a:r>
+              <a:rPr b="1"/>
+              <a:t>ゲイツ</a:t>
+            </a:r>
+            <a:r>
+              <a:rPr b="0"/>
+              <a:t> ジ オペレイション。 イット イズ </a:t>
+            </a:r>
+            <a:r>
+              <a:rPr b="1"/>
+              <a:t>ナット</a:t>
+            </a:r>
+            <a:r>
+              <a:rPr b="0"/>
+              <a:t> ジ インクリプション キー。</a:t>
+            </a:r>
+          </a:p>
+          <a:p>
+            <a:r>
+              <a:rPr b="0"/>
+              <a:t>A photograph of it unlocks nothing.”</a:t>
+            </a:r>
+          </a:p>
+          <a:p>
+            <a:r>
+              <a:rPr b="0"/>
+              <a:t>  ア フォウトグラフ オヴ イット アンロックス </a:t>
+            </a:r>
+            <a:r>
+              <a:rPr b="1"/>
+              <a:t>ナッシング</a:t>
+            </a:r>
+            <a:r>
+              <a:rPr b="0"/>
+              <a:t>。</a:t>
+            </a:r>
+          </a:p>
+          <a:p>
+            <a:r>
+              <a:rPr b="0"/>
+              <a:t/>
+            </a:r>
+          </a:p>
+          <a:p>
+            <a:r>
+              <a:rPr b="0"/>
+              <a:t>── STEP 3 · 0:50 · Operate — the file comes back, and the role boundary</a:t>
+            </a:r>
+          </a:p>
+          <a:p>
+            <a:r>
+              <a:rPr b="0"/>
+              <a:t>DO: 同じ store タブで Retrieve へ。物体Aを提示 → パスワード → Open protected file。続けて役割の境界：別タブで recover トークンで解錠しておいたウィンドウを一瞬提示 — ナビに Store / Maintenance が一切無いことを指す</a:t>
+            </a:r>
+          </a:p>
+          <a:p>
+            <a:r>
+              <a:rPr b="0"/>
+              <a:t>“Same object. Correct password. The file comes back.</a:t>
+            </a:r>
+          </a:p>
+          <a:p>
+            <a:r>
+              <a:rPr b="0"/>
+              <a:t>  セイム オブジェクト。 コゥレクト パスワード。 ザ ファイル </a:t>
+            </a:r>
+            <a:r>
+              <a:rPr b="1"/>
+              <a:t>カムズ バック</a:t>
+            </a:r>
+            <a:r>
+              <a:rPr b="0"/>
+              <a:t>。</a:t>
+            </a:r>
+          </a:p>
+          <a:p>
+            <a:r>
+              <a:rPr b="0"/>
+              <a:t>And here’s a second session. A narrower one.</a:t>
+            </a:r>
+          </a:p>
+          <a:p>
+            <a:r>
+              <a:rPr b="0"/>
+              <a:t>  アンド ヒアズ ア </a:t>
+            </a:r>
+            <a:r>
+              <a:rPr b="1"/>
+              <a:t>セカンド セッション</a:t>
+            </a:r>
+            <a:r>
+              <a:rPr b="0"/>
+              <a:t>。 ア </a:t>
+            </a:r>
+            <a:r>
+              <a:rPr b="1"/>
+              <a:t>ナロウアー</a:t>
+            </a:r>
+            <a:r>
+              <a:rPr b="0"/>
+              <a:t> ワン。</a:t>
+            </a:r>
+          </a:p>
+          <a:p>
+            <a:r>
+              <a:rPr b="0"/>
+              <a:t>Logged in with a different token — a different role.</a:t>
+            </a:r>
+          </a:p>
+          <a:p>
+            <a:r>
+              <a:rPr b="0"/>
+              <a:t>  ログド イン ウィズ ア </a:t>
+            </a:r>
+            <a:r>
+              <a:rPr b="1"/>
+              <a:t>ディファレント トウクン</a:t>
+            </a:r>
+            <a:r>
+              <a:rPr b="0"/>
+              <a:t> — ア </a:t>
+            </a:r>
+            <a:r>
+              <a:rPr b="1"/>
+              <a:t>ディファレント ロウル</a:t>
+            </a:r>
+            <a:r>
+              <a:rPr b="0"/>
+              <a:t>。</a:t>
+            </a:r>
+          </a:p>
+          <a:p>
+            <a:r>
+              <a:rPr b="0"/>
+              <a:t>It can decrypt, and it can destroy.</a:t>
+            </a:r>
+          </a:p>
+          <a:p>
+            <a:r>
+              <a:rPr b="0"/>
+              <a:t>  イット キャン </a:t>
+            </a:r>
+            <a:r>
+              <a:rPr b="1"/>
+              <a:t>ディクリプト</a:t>
+            </a:r>
+            <a:r>
+              <a:rPr b="0"/>
+              <a:t>、 アンド イット キャン </a:t>
+            </a:r>
+            <a:r>
+              <a:rPr b="1"/>
+              <a:t>ディストロイ</a:t>
+            </a:r>
+            <a:r>
+              <a:rPr b="0"/>
+              <a:t>。</a:t>
+            </a:r>
+          </a:p>
+          <a:p>
+            <a:r>
+              <a:rPr b="0"/>
+              <a:t>It can never reach Face setup at all.</a:t>
+            </a:r>
+          </a:p>
+          <a:p>
+            <a:r>
+              <a:rPr b="0"/>
+              <a:t>  イット キャン </a:t>
+            </a:r>
+            <a:r>
+              <a:rPr b="1"/>
+              <a:t>ネヴァー</a:t>
+            </a:r>
+            <a:r>
+              <a:rPr b="0"/>
+              <a:t> リーチ フェイス セットアップ アット オール。</a:t>
+            </a:r>
+          </a:p>
+          <a:p>
+            <a:r>
+              <a:rPr b="0"/>
+              <a:t>It can’t even see that there is more than one entry.”</a:t>
+            </a:r>
+          </a:p>
+          <a:p>
+            <a:r>
+              <a:rPr b="0"/>
+              <a:t>  イット キャント </a:t>
+            </a:r>
+            <a:r>
+              <a:rPr b="1"/>
+              <a:t>イーヴン シー</a:t>
+            </a:r>
+            <a:r>
+              <a:rPr b="0"/>
+              <a:t> ザット ゼア イズ モア ザン ワン エントリー。</a:t>
+            </a:r>
+          </a:p>
+          <a:p>
+            <a:r>
+              <a:rPr b="0"/>
+              <a:t/>
+            </a:r>
+          </a:p>
+          <a:p>
+            <a:r>
+              <a:rPr b="0"/>
+              <a:t>── STEP 4 · 0:50 · Same tab, same password — the object is gone, and it refuses</a:t>
+            </a:r>
+          </a:p>
+          <a:p>
+            <a:r>
+              <a:rPr b="0"/>
+              <a:t>DO: Step 3 と同じ Retrieve 画面のまま。 物体をカメラの視野から完全に外す（手で覆うのではなく卓の下に下ろす）→ オーバーレイが No object cue match に変わるのを待つ → Step 3 と同じパスワード → Open protected file。直後に物体を戻して同じパスワードで再実行し、成功させる（0:15）</a:t>
+            </a:r>
+          </a:p>
+          <a:p>
+            <a:r>
+              <a:rPr b="0"/>
+              <a:t>“Same tab. Same file. Same password. Same everything.</a:t>
+            </a:r>
+          </a:p>
+          <a:p>
+            <a:r>
+              <a:rPr b="0"/>
+              <a:t>  </a:t>
+            </a:r>
+            <a:r>
+              <a:rPr b="1"/>
+              <a:t>セイム</a:t>
+            </a:r>
+            <a:r>
+              <a:rPr b="0"/>
+              <a:t> タブ。 </a:t>
+            </a:r>
+            <a:r>
+              <a:rPr b="1"/>
+              <a:t>セイム</a:t>
+            </a:r>
+            <a:r>
+              <a:rPr b="0"/>
+              <a:t> ファイル。 </a:t>
+            </a:r>
+            <a:r>
+              <a:rPr b="1"/>
+              <a:t>セイム</a:t>
+            </a:r>
+            <a:r>
+              <a:rPr b="0"/>
+              <a:t> パスワード。 </a:t>
+            </a:r>
+            <a:r>
+              <a:rPr b="1"/>
+              <a:t>セイム エヴリシング</a:t>
+            </a:r>
+            <a:r>
+              <a:rPr b="0"/>
+              <a:t>。</a:t>
+            </a:r>
+          </a:p>
+          <a:p>
+            <a:r>
+              <a:rPr b="0"/>
+              <a:t>I have only taken the object away.</a:t>
+            </a:r>
+          </a:p>
+          <a:p>
+            <a:r>
+              <a:rPr b="0"/>
+              <a:t>  アイ ハヴ </a:t>
+            </a:r>
+            <a:r>
+              <a:rPr b="1"/>
+              <a:t>オウンリー</a:t>
+            </a:r>
+            <a:r>
+              <a:rPr b="0"/>
+              <a:t> テイクン ジ オブジェクト アウェイ。</a:t>
+            </a:r>
+          </a:p>
+          <a:p>
+            <a:r>
+              <a:rPr b="0"/>
+              <a:t>And look at what it says. ‘No valid entry found.’</a:t>
+            </a:r>
+          </a:p>
+          <a:p>
+            <a:r>
+              <a:rPr b="0"/>
+              <a:t>  アンド ルック アット ワット イット セズ。 </a:t>
+            </a:r>
+            <a:r>
+              <a:rPr b="1"/>
+              <a:t>ノウ ヴァリッド エントリー ファウンド</a:t>
+            </a:r>
+            <a:r>
+              <a:rPr b="0"/>
+              <a:t>。</a:t>
+            </a:r>
+          </a:p>
+          <a:p>
+            <a:r>
+              <a:rPr b="0"/>
+              <a:t>Not ‘wrong object’. Not ‘object missing’.</a:t>
+            </a:r>
+          </a:p>
+          <a:p>
+            <a:r>
+              <a:rPr b="0"/>
+              <a:t>  ナット </a:t>
+            </a:r>
+            <a:r>
+              <a:rPr b="1"/>
+              <a:t>ゥロング オブジェクト</a:t>
+            </a:r>
+            <a:r>
+              <a:rPr b="0"/>
+              <a:t>。 ナット </a:t>
+            </a:r>
+            <a:r>
+              <a:rPr b="1"/>
+              <a:t>オブジェクト ミッシング</a:t>
+            </a:r>
+            <a:r>
+              <a:rPr b="0"/>
+              <a:t>。</a:t>
+            </a:r>
+          </a:p>
+          <a:p>
+            <a:r>
+              <a:rPr b="0"/>
+              <a:t>It won’t even tell you what it’s waiting for.</a:t>
+            </a:r>
+          </a:p>
+          <a:p>
+            <a:r>
+              <a:rPr b="0"/>
+              <a:t>  イット ウォウント イーヴン テル ユー ワット イッツ </a:t>
+            </a:r>
+            <a:r>
+              <a:rPr b="1"/>
+              <a:t>ウェイティング</a:t>
+            </a:r>
+            <a:r>
+              <a:rPr b="0"/>
+              <a:t> フォー。</a:t>
+            </a:r>
+          </a:p>
+          <a:p>
+            <a:r>
+              <a:rPr b="0"/>
+              <a:t>That is deliberate.</a:t>
+            </a:r>
+          </a:p>
+          <a:p>
+            <a:r>
+              <a:rPr b="0"/>
+              <a:t>  ザット イズ </a:t>
+            </a:r>
+            <a:r>
+              <a:rPr b="1"/>
+              <a:t>ディリバレット</a:t>
+            </a:r>
+            <a:r>
+              <a:rPr b="0"/>
+              <a:t>。</a:t>
+            </a:r>
+          </a:p>
+          <a:p>
+            <a:r>
+              <a:rPr b="0"/>
+              <a:t>That is what ‘the cue gates the operation’ means.”</a:t>
+            </a:r>
+          </a:p>
+          <a:p>
+            <a:r>
+              <a:rPr b="0"/>
+              <a:t>  </a:t>
+            </a:r>
+            <a:r>
+              <a:rPr b="1"/>
+              <a:t>ザット</a:t>
+            </a:r>
+            <a:r>
+              <a:rPr b="0"/>
+              <a:t> イズ ワット 「ザ キュー ゲイツ ジ オペレイション」 ミーンズ。</a:t>
+            </a:r>
+          </a:p>
+          <a:p>
+            <a:r>
+              <a:rPr b="0"/>
+              <a:t>SPEAK（間を置いて）</a:t>
+            </a:r>
+          </a:p>
+          <a:p>
+            <a:r>
+              <a:rPr b="0"/>
+              <a:t>“Only the object is gone. And it refuses.”</a:t>
+            </a:r>
+          </a:p>
+          <a:p>
+            <a:r>
+              <a:rPr b="0"/>
+              <a:t>  </a:t>
+            </a:r>
+            <a:r>
+              <a:rPr b="1"/>
+              <a:t>オウンリー ジ オブジェクト</a:t>
+            </a:r>
+            <a:r>
+              <a:rPr b="0"/>
+              <a:t> イズ ゴーン。 アンド イット </a:t>
+            </a:r>
+            <a:r>
+              <a:rPr b="1"/>
+              <a:t>リフューズィズ</a:t>
+            </a:r>
+            <a:r>
+              <a:rPr b="0"/>
+              <a:t>。</a:t>
+            </a:r>
+          </a:p>
+          <a:p>
+            <a:r>
+              <a:rPr b="0"/>
+              <a:t/>
+            </a:r>
+          </a:p>
+          <a:p>
+            <a:r>
+              <a:rPr b="0"/>
+              <a:t>── STEP 4b · 0:40 · 同じ欄に、違うパスワード — エントリが消える</a:t>
+            </a:r>
+          </a:p>
+          <a:p>
+            <a:r>
+              <a:rPr b="0"/>
+              <a:t>DO: Step 3・4 とまったく同じ Retrieve 画面。 消したい Face の物体をかざす → パスワード欄に、そのアクセスパスワードではなく Clearing password（Store の Advanced security options で設定した2つめ）を入力 → Open protected file</a:t>
+            </a:r>
+          </a:p>
+          <a:p>
+            <a:r>
+              <a:rPr b="0"/>
+              <a:t>“Now watch this screen — because nothing on it is going to change.</a:t>
+            </a:r>
+          </a:p>
+          <a:p>
+            <a:r>
+              <a:rPr b="0"/>
+              <a:t>  ナウ </a:t>
+            </a:r>
+            <a:r>
+              <a:rPr b="1"/>
+              <a:t>ウォッチ ディス スクリーン</a:t>
+            </a:r>
+            <a:r>
+              <a:rPr b="0"/>
+              <a:t> — ビコズ </a:t>
+            </a:r>
+            <a:r>
+              <a:rPr b="1"/>
+              <a:t>ナッシング</a:t>
+            </a:r>
+            <a:r>
+              <a:rPr b="0"/>
+              <a:t> オン イット イズ ゴウイング トゥ チェインジ。</a:t>
+            </a:r>
+          </a:p>
+          <a:p>
+            <a:r>
+              <a:rPr b="0"/>
+              <a:t>Same tab. Same object. Same field. Same button.</a:t>
+            </a:r>
+          </a:p>
+          <a:p>
+            <a:r>
+              <a:rPr b="0"/>
+              <a:t>  セイム タブ。 セイム オブジェクト。 セイム フィールド。 セイム バトゥン。</a:t>
+            </a:r>
+          </a:p>
+          <a:p>
+            <a:r>
+              <a:rPr b="0"/>
+              <a:t>The only thing I do differently… is type a different password.</a:t>
+            </a:r>
+          </a:p>
+          <a:p>
+            <a:r>
+              <a:rPr b="0"/>
+              <a:t>  ジ オウンリー シング アイ ドゥー ディファレントリー… イズ タイプ ア </a:t>
+            </a:r>
+            <a:r>
+              <a:rPr b="1"/>
+              <a:t>ディファレント パスワード</a:t>
+            </a:r>
+            <a:r>
+              <a:rPr b="0"/>
+              <a:t>。</a:t>
+            </a:r>
+          </a:p>
+          <a:p>
+            <a:r>
+              <a:rPr b="0"/>
+              <a:t>And it says what it says when you mistype. No valid entry found.</a:t>
+            </a:r>
+          </a:p>
+          <a:p>
+            <a:r>
+              <a:rPr b="0"/>
+              <a:t>  アンド イット セズ ワット イット セズ ウェン ユー </a:t>
+            </a:r>
+            <a:r>
+              <a:rPr b="1"/>
+              <a:t>ミスタイプ</a:t>
+            </a:r>
+            <a:r>
+              <a:rPr b="0"/>
+              <a:t>。 ノウ ヴァリッド エントリー ファウンド。</a:t>
+            </a:r>
+          </a:p>
+          <a:p>
+            <a:r>
+              <a:rPr b="0"/>
+              <a:t>Except that entry is not locked.</a:t>
+            </a:r>
+          </a:p>
+          <a:p>
+            <a:r>
+              <a:rPr b="0"/>
+              <a:t>  イクセプト ザット エントリー イズ </a:t>
+            </a:r>
+            <a:r>
+              <a:rPr b="1"/>
+              <a:t>ナット ロックト</a:t>
+            </a:r>
+            <a:r>
+              <a:rPr b="0"/>
+              <a:t>。</a:t>
+            </a:r>
+          </a:p>
+          <a:p>
+            <a:r>
+              <a:rPr b="0"/>
+              <a:t>It is gone.</a:t>
+            </a:r>
+          </a:p>
+          <a:p>
+            <a:r>
+              <a:rPr b="0"/>
+              <a:t>  イット イズ </a:t>
+            </a:r>
+            <a:r>
+              <a:rPr b="1"/>
+              <a:t>ゴーン</a:t>
+            </a:r>
+            <a:r>
+              <a:rPr b="0"/>
+              <a:t>。</a:t>
+            </a:r>
+          </a:p>
+          <a:p>
+            <a:r>
+              <a:rPr b="0"/>
+              <a:t>The other one is untouched. And I can still open it.</a:t>
+            </a:r>
+          </a:p>
+          <a:p>
+            <a:r>
+              <a:rPr b="0"/>
+              <a:t>  ジ アザー ワン イズ </a:t>
+            </a:r>
+            <a:r>
+              <a:rPr b="1"/>
+              <a:t>アンタッチト</a:t>
+            </a:r>
+            <a:r>
+              <a:rPr b="0"/>
+              <a:t>。 アンド アイ キャン </a:t>
+            </a:r>
+            <a:r>
+              <a:rPr b="1"/>
+              <a:t>スティル オウプン</a:t>
+            </a:r>
+            <a:r>
+              <a:rPr b="0"/>
+              <a:t> イット。</a:t>
+            </a:r>
+          </a:p>
+          <a:p>
+            <a:r>
+              <a:rPr b="0"/>
+              <a:t>That’s my answer to ‘they’ll just make you type the password.’</a:t>
+            </a:r>
+          </a:p>
+          <a:p>
+            <a:r>
+              <a:rPr b="0"/>
+              <a:t>  ザッツ マイ </a:t>
+            </a:r>
+            <a:r>
+              <a:rPr b="1"/>
+              <a:t>アンサー</a:t>
+            </a:r>
+            <a:r>
+              <a:rPr b="0"/>
+              <a:t> トゥ 「ゼイル ジャスト メイク ユー タイプ ザ パスワード」。</a:t>
+            </a:r>
+          </a:p>
+          <a:p>
+            <a:r>
+              <a:rPr b="0"/>
+              <a:t>The password they can compel is not the only one there is.”</a:t>
+            </a:r>
+          </a:p>
+          <a:p>
+            <a:r>
+              <a:rPr b="0"/>
+              <a:t>  ザ パスワード ゼイ キャン </a:t>
+            </a:r>
+            <a:r>
+              <a:rPr b="1"/>
+              <a:t>コンペル</a:t>
+            </a:r>
+            <a:r>
+              <a:rPr b="0"/>
+              <a:t> イズ ナット ジ </a:t>
+            </a:r>
+            <a:r>
+              <a:rPr b="1"/>
+              <a:t>オウンリー ワン</a:t>
+            </a:r>
+            <a:r>
+              <a:rPr b="0"/>
+              <a:t> ゼア イズ。</a:t>
+            </a:r>
+          </a:p>
+          <a:p>
+            <a:r>
+              <a:rPr b="0"/>
+              <a:t>SPEAK（間を置いて）</a:t>
+            </a:r>
+          </a:p>
+          <a:p>
+            <a:r>
+              <a:rPr b="0"/>
+              <a:t>“Nothing on the screen changed. The entry is gone.”</a:t>
+            </a:r>
+          </a:p>
+          <a:p>
+            <a:r>
+              <a:rPr b="0"/>
+              <a:t>  </a:t>
+            </a:r>
+            <a:r>
+              <a:rPr b="1"/>
+              <a:t>ナッシング</a:t>
+            </a:r>
+            <a:r>
+              <a:rPr b="0"/>
+              <a:t> オン ザ スクリーン チェインジド。 ジ エントリー イズ </a:t>
+            </a:r>
+            <a:r>
+              <a:rPr b="1"/>
+              <a:t>ゴーン</a:t>
+            </a:r>
+            <a:r>
+              <a:rPr b="0"/>
+              <a:t>。</a:t>
+            </a:r>
+          </a:p>
+          <a:p>
+            <a:r>
+              <a:rPr b="0"/>
+              <a:t/>
+            </a:r>
+          </a:p>
+          <a:p>
+            <a:r>
+              <a:rPr b="0"/>
+              <a:t>── STEP 5 · 0:50 · Audit — free space, and what it won’t judge</a:t>
+            </a:r>
+          </a:p>
+          <a:p>
+            <a:r>
+              <a:rPr b="0"/>
+              <a:t>DO: ここでプロジェクタを TUI に戻す（切替②・往復の折り返し。以降は切替なし）。 e Expert → a Audit。Free Space Filler セクションを指す（戻るのは Esc）。a は #169 の非活性化対象から意図的に外してある — この Step でキー1つで直接使うため</a:t>
+            </a:r>
+          </a:p>
+          <a:p>
+            <a:r>
+              <a:rPr b="0"/>
+              <a:t>“Audit reports per face.</a:t>
+            </a:r>
+          </a:p>
+          <a:p>
+            <a:r>
+              <a:rPr b="0"/>
+              <a:t>  </a:t>
+            </a:r>
+            <a:r>
+              <a:rPr b="1"/>
+              <a:t>オーディット</a:t>
+            </a:r>
+            <a:r>
+              <a:rPr b="0"/>
+              <a:t> リポーツ パー </a:t>
+            </a:r>
+            <a:r>
+              <a:rPr b="1"/>
+              <a:t>フェイス</a:t>
+            </a:r>
+            <a:r>
+              <a:rPr b="0"/>
+              <a:t>。</a:t>
+            </a:r>
+          </a:p>
+          <a:p>
+            <a:r>
+              <a:rPr b="0"/>
+              <a:t>Now notice what it does not claim.</a:t>
+            </a:r>
+          </a:p>
+          <a:p>
+            <a:r>
+              <a:rPr b="0"/>
+              <a:t>  ナウ ノウティス ワット イット ダズ </a:t>
+            </a:r>
+            <a:r>
+              <a:rPr b="1"/>
+              <a:t>ナット</a:t>
+            </a:r>
+            <a:r>
+              <a:rPr b="0"/>
+              <a:t> クレイム。</a:t>
+            </a:r>
+          </a:p>
+          <a:p>
+            <a:r>
+              <a:rPr b="0"/>
+              <a:t>It doesn’t tell me my cover story is convincing.</a:t>
+            </a:r>
+          </a:p>
+          <a:p>
+            <a:r>
+              <a:rPr b="0"/>
+              <a:t>  イット ダズント テル ミー マイ カヴァー ストーリー イズ </a:t>
+            </a:r>
+            <a:r>
+              <a:rPr b="1"/>
+              <a:t>コンヴィンシング</a:t>
+            </a:r>
+            <a:r>
+              <a:rPr b="0"/>
+              <a:t>。</a:t>
+            </a:r>
+          </a:p>
+          <a:p>
+            <a:r>
+              <a:rPr b="0"/>
+              <a:t>The file I would hand over is one I wrote, and stored, myself.</a:t>
+            </a:r>
+          </a:p>
+          <a:p>
+            <a:r>
+              <a:rPr b="0"/>
+              <a:t>  ザ ファイル アイ ウド ハンド オウヴァー イズ ワン アイ </a:t>
+            </a:r>
+            <a:r>
+              <a:rPr b="1"/>
+              <a:t>ロウト</a:t>
+            </a:r>
+            <a:r>
+              <a:rPr b="0"/>
+              <a:t>、 アンド </a:t>
+            </a:r>
+            <a:r>
+              <a:rPr b="1"/>
+              <a:t>ストード</a:t>
+            </a:r>
+            <a:r>
+              <a:rPr b="0"/>
+              <a:t>、 マイセルフ。</a:t>
+            </a:r>
+          </a:p>
+          <a:p>
+            <a:r>
+              <a:rPr b="0"/>
+              <a:t>The tool can’t judge whether it’s believable. And it doesn’t pretend to.</a:t>
+            </a:r>
+          </a:p>
+          <a:p>
+            <a:r>
+              <a:rPr b="0"/>
+              <a:t>  ザ ツール キャント </a:t>
+            </a:r>
+            <a:r>
+              <a:rPr b="1"/>
+              <a:t>ジャッジ</a:t>
+            </a:r>
+            <a:r>
+              <a:rPr b="0"/>
+              <a:t> ウェザー イッツ ビリーヴァブル。 アンド イット ダズント </a:t>
+            </a:r>
+            <a:r>
+              <a:rPr b="1"/>
+              <a:t>プリテンド</a:t>
+            </a:r>
+            <a:r>
+              <a:rPr b="0"/>
+              <a:t> トゥ。</a:t>
+            </a:r>
+          </a:p>
+          <a:p>
+            <a:r>
+              <a:rPr b="0"/>
+              <a:t>All it reports here is how much free space is filled —</a:t>
+            </a:r>
+          </a:p>
+          <a:p>
+            <a:r>
+              <a:rPr b="0"/>
+              <a:t>  オール イット リポーツ ヒア イズ ハウ マッチ </a:t>
+            </a:r>
+            <a:r>
+              <a:rPr b="1"/>
+              <a:t>フリー スペイス</a:t>
+            </a:r>
+            <a:r>
+              <a:rPr b="0"/>
+              <a:t> イズ フィルド —</a:t>
+            </a:r>
+          </a:p>
+          <a:p>
+            <a:r>
+              <a:rPr b="0"/>
+              <a:t>so an otherwise empty container doesn’t read as empty.</a:t>
+            </a:r>
+          </a:p>
+          <a:p>
+            <a:r>
+              <a:rPr b="0"/>
+              <a:t>  ソウ アン アザワイズ エンプティ コンテナ ダズント リード アズ </a:t>
+            </a:r>
+            <a:r>
+              <a:rPr b="1"/>
+              <a:t>エンプティ</a:t>
+            </a:r>
+            <a:r>
+              <a:rPr b="0"/>
+              <a:t>。</a:t>
+            </a:r>
+          </a:p>
+          <a:p>
+            <a:r>
+              <a:rPr b="0"/>
+              <a:t>Judging the cover story is the operator’s job.</a:t>
+            </a:r>
+          </a:p>
+          <a:p>
+            <a:r>
+              <a:rPr b="0"/>
+              <a:t>  ジャッジング ザ カヴァー ストーリー イズ ジ </a:t>
+            </a:r>
+            <a:r>
+              <a:rPr b="1"/>
+              <a:t>オペレイターズ ジョブ</a:t>
+            </a:r>
+            <a:r>
+              <a:rPr b="0"/>
+              <a:t>。</a:t>
+            </a:r>
+          </a:p>
+          <a:p>
+            <a:r>
+              <a:rPr b="0"/>
+              <a:t>And the tool is honest about that boundary.”</a:t>
+            </a:r>
+          </a:p>
+          <a:p>
+            <a:r>
+              <a:rPr b="0"/>
+              <a:t>  アンド ザ ツール イズ </a:t>
+            </a:r>
+            <a:r>
+              <a:rPr b="1"/>
+              <a:t>オネスト</a:t>
+            </a:r>
+            <a:r>
+              <a:rPr b="0"/>
+              <a:t> アバウト ザット バウンダリー。</a:t>
+            </a:r>
+          </a:p>
+          <a:p>
+            <a:r>
+              <a:rPr b="0"/>
+              <a:t>SPEAK（間を置いて）</a:t>
+            </a:r>
+          </a:p>
+          <a:p>
+            <a:r>
+              <a:rPr b="0"/>
+              <a:t>“It reports what it can measure. It refuses to score what it can’t.”</a:t>
+            </a:r>
+          </a:p>
+          <a:p>
+            <a:r>
+              <a:rPr b="0"/>
+              <a:t>  イット リポーツ ワット イット キャン </a:t>
+            </a:r>
+            <a:r>
+              <a:rPr b="1"/>
+              <a:t>メジャー</a:t>
+            </a:r>
+            <a:r>
+              <a:rPr b="0"/>
+              <a:t>。 イット リフューズィズ トゥ </a:t>
+            </a:r>
+            <a:r>
+              <a:rPr b="1"/>
+              <a:t>スコア</a:t>
+            </a:r>
+            <a:r>
+              <a:rPr b="0"/>
+              <a:t> ワット イット キャント。</a:t>
+            </a:r>
+          </a:p>
+          <a:p>
+            <a:r>
+              <a:rPr b="0"/>
+              <a:t/>
+            </a:r>
+          </a:p>
+          <a:p>
+            <a:r>
+              <a:rPr b="0"/>
+              <a:t>── STEP 6 · 1:20 · Silent Standby — Disclose</a:t>
+            </a:r>
+          </a:p>
+          <a:p>
+            <a:r>
+              <a:rPr b="0"/>
+              <a:t>DO: Ctrl+S を押下。復帰は Ctrl+R または Esc。フッタに出ないので指で覚えておく</a:t>
+            </a:r>
+          </a:p>
+          <a:p>
+            <a:r>
+              <a:rPr b="0"/>
+              <a:t>“Now — the moment it’s built for.</a:t>
+            </a:r>
+          </a:p>
+          <a:p>
+            <a:r>
+              <a:rPr b="0"/>
+              <a:t>  ナウ — ザ </a:t>
+            </a:r>
+            <a:r>
+              <a:rPr b="1"/>
+              <a:t>モウメント</a:t>
+            </a:r>
+            <a:r>
+              <a:rPr b="0"/>
+              <a:t> イッツ ビルト フォー。</a:t>
+            </a:r>
+          </a:p>
+          <a:p>
+            <a:r>
+              <a:rPr b="0"/>
+              <a:t>One hotkey. Silent Standby.</a:t>
+            </a:r>
+          </a:p>
+          <a:p>
+            <a:r>
+              <a:rPr b="0"/>
+              <a:t>  </a:t>
+            </a:r>
+            <a:r>
+              <a:rPr b="1"/>
+              <a:t>ワン ホットキー</a:t>
+            </a:r>
+            <a:r>
+              <a:rPr b="0"/>
+              <a:t>。 </a:t>
+            </a:r>
+            <a:r>
+              <a:rPr b="1"/>
+              <a:t>サイレント スタンドバイ</a:t>
+            </a:r>
+            <a:r>
+              <a:rPr b="0"/>
+              <a:t>。</a:t>
+            </a:r>
+          </a:p>
+          <a:p>
+            <a:r>
+              <a:rPr b="0"/>
+              <a:t>The sensitive surface drops away.</a:t>
+            </a:r>
+          </a:p>
+          <a:p>
+            <a:r>
+              <a:rPr b="0"/>
+              <a:t>  ザ センシティヴ サーフィス </a:t>
+            </a:r>
+            <a:r>
+              <a:rPr b="1"/>
+              <a:t>ドロップス アウェイ</a:t>
+            </a:r>
+            <a:r>
+              <a:rPr b="0"/>
+              <a:t>。</a:t>
+            </a:r>
+          </a:p>
+          <a:p>
+            <a:r>
+              <a:rPr b="0"/>
+              <a:t>And it’s not only this screen. The web interface goes down with it.</a:t>
+            </a:r>
+          </a:p>
+          <a:p>
+            <a:r>
+              <a:rPr b="0"/>
+              <a:t>  アンド イッツ </a:t>
+            </a:r>
+            <a:r>
+              <a:rPr b="1"/>
+              <a:t>ナット オウンリー</a:t>
+            </a:r>
+            <a:r>
+              <a:rPr b="0"/>
+              <a:t> ディス スクリーン。 ザ ウェブ インターフェイス </a:t>
+            </a:r>
+            <a:r>
+              <a:rPr b="1"/>
+              <a:t>ゴウズ ダウン</a:t>
+            </a:r>
+            <a:r>
+              <a:rPr b="0"/>
+              <a:t> ウィズ イット。</a:t>
+            </a:r>
+          </a:p>
+          <a:p>
+            <a:r>
+              <a:rPr b="0"/>
+              <a:t>A laptop tethered to this device loses access at the same instant —</a:t>
+            </a:r>
+          </a:p>
+          <a:p>
+            <a:r>
+              <a:rPr b="0"/>
+              <a:t>  ア ラップトップ テザード トゥ ディス デバイス </a:t>
+            </a:r>
+            <a:r>
+              <a:rPr b="1"/>
+              <a:t>ルーズィズ アクセス</a:t>
+            </a:r>
+            <a:r>
+              <a:rPr b="0"/>
+              <a:t> アット ザ セイム インスタント —</a:t>
+            </a:r>
+          </a:p>
+          <a:p>
+            <a:r>
+              <a:rPr b="0"/>
+              <a:t>including the two browser tabs I just used.</a:t>
+            </a:r>
+          </a:p>
+          <a:p>
+            <a:r>
+              <a:rPr b="0"/>
+              <a:t>  インクルーディング ザ </a:t>
+            </a:r>
+            <a:r>
+              <a:rPr b="1"/>
+              <a:t>トゥー ブラウザ タブズ</a:t>
+            </a:r>
+            <a:r>
+              <a:rPr b="0"/>
+              <a:t> アイ ジャスト ユーズド。</a:t>
+            </a:r>
+          </a:p>
+          <a:p>
+            <a:r>
+              <a:rPr b="0"/>
+              <a:t>Coming back needs re-authentication.</a:t>
+            </a:r>
+          </a:p>
+          <a:p>
+            <a:r>
+              <a:rPr b="0"/>
+              <a:t>  カミング バック ニーズ </a:t>
+            </a:r>
+            <a:r>
+              <a:rPr b="1"/>
+              <a:t>リーオーセンティケイション</a:t>
+            </a:r>
+            <a:r>
+              <a:rPr b="0"/>
+              <a:t>。</a:t>
+            </a:r>
+          </a:p>
+          <a:p>
+            <a:r>
+              <a:rPr b="0"/>
+              <a:t>I’m not hiding from forensics.</a:t>
+            </a:r>
+          </a:p>
+          <a:p>
+            <a:r>
+              <a:rPr b="0"/>
+              <a:t>  アイム </a:t>
+            </a:r>
+            <a:r>
+              <a:rPr b="1"/>
+              <a:t>ナット ハイディング</a:t>
+            </a:r>
+            <a:r>
+              <a:rPr b="0"/>
+              <a:t> フロム フォレンシックス。</a:t>
+            </a:r>
+          </a:p>
+          <a:p>
+            <a:r>
+              <a:rPr b="0"/>
+              <a:t>I’m buying time, and uncertainty.”</a:t>
+            </a:r>
+          </a:p>
+          <a:p>
+            <a:r>
+              <a:rPr b="0"/>
+              <a:t>  アイム </a:t>
+            </a:r>
+            <a:r>
+              <a:rPr b="1"/>
+              <a:t>バイイング タイム</a:t>
+            </a:r>
+            <a:r>
+              <a:rPr b="0"/>
+              <a:t>、 アンド </a:t>
+            </a:r>
+            <a:r>
+              <a:rPr b="1"/>
+              <a:t>アンサートゥンティ</a:t>
+            </a:r>
+            <a:r>
+              <a:rPr b="0"/>
+              <a:t>。</a:t>
+            </a:r>
+          </a:p>
+          <a:p>
+            <a:r>
+              <a:rPr b="0"/>
+              <a:t>SPEAK（間を置いて）</a:t>
+            </a:r>
+          </a:p>
+          <a:p>
+            <a:r>
+              <a:rPr b="0"/>
+              <a:t>“One key. And the second surface goes with it.”</a:t>
+            </a:r>
+          </a:p>
+          <a:p>
+            <a:r>
+              <a:rPr b="0"/>
+              <a:t>  </a:t>
+            </a:r>
+            <a:r>
+              <a:rPr b="1"/>
+              <a:t>ワン キー</a:t>
+            </a:r>
+            <a:r>
+              <a:rPr b="0"/>
+              <a:t>。 アンド ザ セカンド サーフィス </a:t>
+            </a:r>
+            <a:r>
+              <a:rPr b="1"/>
+              <a:t>ゴウズ ウィズ イット</a:t>
+            </a:r>
+            <a:r>
+              <a:rPr b="0"/>
+              <a:t>。</a:t>
+            </a:r>
+          </a:p>
+          <a:p>
+            <a:r>
+              <a:rPr b="0"/>
+              <a:t/>
+            </a:r>
+          </a:p>
+          <a:p>
+            <a:r>
+              <a:rPr b="0"/>
+              <a:t>── STEP 7 · 0:10 · Wrap</a:t>
+            </a:r>
+          </a:p>
+          <a:p>
+            <a:r>
+              <a:rPr b="0"/>
+              <a:t>DO: Esc で Simple Operator へ戻す → プロジェクタ入力をスライドへ復帰（Slide 25）</a:t>
+            </a:r>
+          </a:p>
+          <a:p>
+            <a:r>
+              <a:rPr b="0"/>
+              <a:t>“That’s Prepare, Bind, Operate, Disclose. On real hardware.</a:t>
+            </a:r>
+          </a:p>
+          <a:p>
+            <a:r>
+              <a:rPr b="0"/>
+              <a:t>  ザッツ </a:t>
+            </a:r>
+            <a:r>
+              <a:rPr b="1"/>
+              <a:t>プリペア</a:t>
+            </a:r>
+            <a:r>
+              <a:rPr b="0"/>
+              <a:t>、 </a:t>
+            </a:r>
+            <a:r>
+              <a:rPr b="1"/>
+              <a:t>バインド</a:t>
+            </a:r>
+            <a:r>
+              <a:rPr b="0"/>
+              <a:t>、 </a:t>
+            </a:r>
+            <a:r>
+              <a:rPr b="1"/>
+              <a:t>オペレイト</a:t>
+            </a:r>
+            <a:r>
+              <a:rPr b="0"/>
+              <a:t>、 </a:t>
+            </a:r>
+            <a:r>
+              <a:rPr b="1"/>
+              <a:t>ディスクロウズ</a:t>
+            </a:r>
+            <a:r>
+              <a:rPr b="0"/>
+              <a:t>。 オン </a:t>
+            </a:r>
+            <a:r>
+              <a:rPr b="1"/>
+              <a:t>リアル ハードウェア</a:t>
+            </a:r>
+            <a:r>
+              <a:rPr b="0"/>
+              <a:t>。</a:t>
+            </a:r>
+          </a:p>
+          <a:p>
+            <a:r>
+              <a:rPr b="0"/>
+              <a:t>Come and try it at the table.”</a:t>
+            </a:r>
+          </a:p>
+          <a:p>
+            <a:r>
+              <a:rPr b="0"/>
+              <a:t>  </a:t>
+            </a:r>
+            <a:r>
+              <a:rPr b="1"/>
+              <a:t>カム アンド トライ イット</a:t>
+            </a:r>
+            <a:r>
+              <a:rPr b="0"/>
+              <a:t> アット ザ テイブル。</a:t>
+            </a:r>
+          </a:p>
+          <a:p>
+            <a:r>
+              <a:rPr b="0"/>
+              <a:t/>
+            </a:r>
+          </a:p>
+          <a:p>
+            <a:r>
+              <a:rPr b="0"/>
+              <a:t>── フォールバック（録画に切り替えたとき）</a:t>
+            </a:r>
+          </a:p>
+          <a:p>
+            <a:r>
+              <a:rPr b="0"/>
+              <a:t>“The design points stand either way.”</a:t>
+            </a:r>
+          </a:p>
+          <a:p>
+            <a:r>
+              <a:rPr b="0"/>
+              <a:t>  ザ デザイン ポインツ </a:t>
+            </a:r>
+            <a:r>
+              <a:rPr b="1"/>
+              <a:t>スタンド</a:t>
+            </a:r>
+            <a:r>
+              <a:rPr b="0"/>
+              <a:t> イーザー ウェイ。</a:t>
+            </a:r>
+          </a:p>
+          <a:p>
+            <a:r>
+              <a:rPr b="0"/>
+              <a:t/>
+            </a:r>
+          </a:p>
+          <a:p>
+            <a:r>
+              <a:rPr b="0"/>
+              <a:t>JA: Step 3→4（物体だけ外す→拒否→戻して成功）と Step 6（Standby）だけは何があっても実機で見せる。26:00 到達で Step 4b と Step 5 Audit を削る。個別ステップは最大15秒で見切り、止まらず前進。</a:t>
             </a:r>
           </a:p>
         </p:txBody>
@@ -2134,17 +7228,178 @@
           <a:lstStyle/>
           <a:p>
             <a:r>
-              <a:t>[26:20 / 0:30] QUICK START</a:t>
-            </a:r>
-          </a:p>
-          <a:p>
-            <a:r>
-              <a:t>EN: "Want to try it? Clone the repo, cd in, run ./phasmid — first run sets up a venv and opens the console. Research software, Apache-2.0. Evaluate it locally, in field-test conditions — not as production protection."</a:t>
-            </a:r>
-          </a:p>
-          <a:p>
-            <a:r>
-              <a:t>JA: リポジトリURLを指す。**ステッカーは作成していないので言及しない。**卓上デモ（実機を触ってもらう）へ繋ぐ。</a:t>
+              <a:rPr b="0"/>
+              <a:t>[26:20 / 0:30] QUICK START — 発話 0:20</a:t>
+            </a:r>
+          </a:p>
+          <a:p>
+            <a:r>
+              <a:rPr b="0"/>
+              <a:t/>
+            </a:r>
+          </a:p>
+          <a:p>
+            <a:r>
+              <a:rPr b="0"/>
+              <a:t>“Want to try it?</a:t>
+            </a:r>
+          </a:p>
+          <a:p>
+            <a:r>
+              <a:rPr b="0"/>
+              <a:t>  </a:t>
+            </a:r>
+            <a:r>
+              <a:rPr b="1"/>
+              <a:t>ワナ トライ イット</a:t>
+            </a:r>
+            <a:r>
+              <a:rPr b="0"/>
+              <a:t>?</a:t>
+            </a:r>
+          </a:p>
+          <a:p>
+            <a:r>
+              <a:rPr b="0"/>
+              <a:t>Clone the repo. Change into it. Run ./phasmid</a:t>
+            </a:r>
+          </a:p>
+          <a:p>
+            <a:r>
+              <a:rPr b="0"/>
+              <a:t>  </a:t>
+            </a:r>
+            <a:r>
+              <a:rPr b="1"/>
+              <a:t>クロウン</a:t>
+            </a:r>
+            <a:r>
+              <a:rPr b="0"/>
+              <a:t> ザ リーポウ。 </a:t>
+            </a:r>
+            <a:r>
+              <a:rPr b="1"/>
+              <a:t>チェインジ</a:t>
+            </a:r>
+            <a:r>
+              <a:rPr b="0"/>
+              <a:t> イントゥ イット。 </a:t>
+            </a:r>
+            <a:r>
+              <a:rPr b="1"/>
+              <a:t>ラン</a:t>
+            </a:r>
+            <a:r>
+              <a:rPr b="0"/>
+              <a:t> ドット スラッシュ ファズミッド。</a:t>
+            </a:r>
+          </a:p>
+          <a:p>
+            <a:r>
+              <a:rPr b="0"/>
+              <a:t>The first run sets up a virtual environment and opens the console.</a:t>
+            </a:r>
+          </a:p>
+          <a:p>
+            <a:r>
+              <a:rPr b="0"/>
+              <a:t>  ザ ファースト ラン セッツ アップ ア </a:t>
+            </a:r>
+            <a:r>
+              <a:rPr b="1"/>
+              <a:t>ヴァーチュアル インヴァイロンメント</a:t>
+            </a:r>
+            <a:r>
+              <a:rPr b="0"/>
+              <a:t> アンド オウプンズ ザ コンソウル。</a:t>
+            </a:r>
+          </a:p>
+          <a:p>
+            <a:r>
+              <a:rPr b="0"/>
+              <a:t>Research software. Apache 2.0.</a:t>
+            </a:r>
+          </a:p>
+          <a:p>
+            <a:r>
+              <a:rPr b="0"/>
+              <a:t>  </a:t>
+            </a:r>
+            <a:r>
+              <a:rPr b="1"/>
+              <a:t>リサーチ ソフトウェア</a:t>
+            </a:r>
+            <a:r>
+              <a:rPr b="0"/>
+              <a:t>。 </a:t>
+            </a:r>
+            <a:r>
+              <a:rPr b="1"/>
+              <a:t>アパッチ トゥー ポイント ズィーロウ</a:t>
+            </a:r>
+            <a:r>
+              <a:rPr b="0"/>
+              <a:t>。</a:t>
+            </a:r>
+          </a:p>
+          <a:p>
+            <a:r>
+              <a:rPr b="0"/>
+              <a:t>Evaluate it locally, in field-test conditions.</a:t>
+            </a:r>
+          </a:p>
+          <a:p>
+            <a:r>
+              <a:rPr b="0"/>
+              <a:t>  イヴァリュエイト イット </a:t>
+            </a:r>
+            <a:r>
+              <a:rPr b="1"/>
+              <a:t>ローカリー</a:t>
+            </a:r>
+            <a:r>
+              <a:rPr b="0"/>
+              <a:t>、 イン </a:t>
+            </a:r>
+            <a:r>
+              <a:rPr b="1"/>
+              <a:t>フィールドテスト コンディションズ</a:t>
+            </a:r>
+            <a:r>
+              <a:rPr b="0"/>
+              <a:t>。</a:t>
+            </a:r>
+          </a:p>
+          <a:p>
+            <a:r>
+              <a:rPr b="0"/>
+              <a:t>Not as production protection.”</a:t>
+            </a:r>
+          </a:p>
+          <a:p>
+            <a:r>
+              <a:rPr b="0"/>
+              <a:t>  </a:t>
+            </a:r>
+            <a:r>
+              <a:rPr b="1"/>
+              <a:t>ナット</a:t>
+            </a:r>
+            <a:r>
+              <a:rPr b="0"/>
+              <a:t> アズ プロダクション プロテクション。</a:t>
+            </a:r>
+          </a:p>
+          <a:p>
+            <a:r>
+              <a:rPr b="0"/>
+              <a:t/>
+            </a:r>
+          </a:p>
+          <a:p>
+            <a:r>
+              <a:rPr b="0"/>
+              <a:t>JA: リポジトリ URL を指す。ステッカーは未作成なので言及しない。卓上デモへ繋ぐ。</a:t>
             </a:r>
           </a:p>
         </p:txBody>
@@ -2230,17 +7485,178 @@
           <a:lstStyle/>
           <a:p>
             <a:r>
-              <a:t>[26:50 / 0:40] CLOSING → Q&amp;A</a:t>
-            </a:r>
-          </a:p>
-          <a:p>
-            <a:r>
-              <a:t>EN: "That's Phasmid — local-only, coercion-aware storage, honest limits included. Code, threat model, and architecture are all on GitHub at 01rabbit. The device is on the table — come try it, and please, come break it. I've got time for questions."</a:t>
-            </a:r>
-          </a:p>
-          <a:p>
-            <a:r>
-              <a:t>JA: 約27分で着地。残り約18分をQ&amp;A・卓上デモ・交流に。**ステッカーは未作成 — 実機体験への導線に差し替え済み。**45分で必ず終了。</a:t>
+              <a:rPr b="0"/>
+              <a:t>[26:50 / 0:40] CLOSING → Q&amp;A — 発話 0:25</a:t>
+            </a:r>
+          </a:p>
+          <a:p>
+            <a:r>
+              <a:rPr b="0"/>
+              <a:t/>
+            </a:r>
+          </a:p>
+          <a:p>
+            <a:r>
+              <a:rPr b="0"/>
+              <a:t>“That’s Phasmid.</a:t>
+            </a:r>
+          </a:p>
+          <a:p>
+            <a:r>
+              <a:rPr b="0"/>
+              <a:t>  ザッツ </a:t>
+            </a:r>
+            <a:r>
+              <a:rPr b="1"/>
+              <a:t>ファズミッド</a:t>
+            </a:r>
+            <a:r>
+              <a:rPr b="0"/>
+              <a:t>。</a:t>
+            </a:r>
+          </a:p>
+          <a:p>
+            <a:r>
+              <a:rPr b="0"/>
+              <a:t>Local-only. Coercion-aware. Honest limits included.</a:t>
+            </a:r>
+          </a:p>
+          <a:p>
+            <a:r>
+              <a:rPr b="0"/>
+              <a:t>  </a:t>
+            </a:r>
+            <a:r>
+              <a:rPr b="1"/>
+              <a:t>ローカル オウンリー</a:t>
+            </a:r>
+            <a:r>
+              <a:rPr b="0"/>
+              <a:t>。 </a:t>
+            </a:r>
+            <a:r>
+              <a:rPr b="1"/>
+              <a:t>コアージョン アウェア</a:t>
+            </a:r>
+            <a:r>
+              <a:rPr b="0"/>
+              <a:t>。 </a:t>
+            </a:r>
+            <a:r>
+              <a:rPr b="1"/>
+              <a:t>オネスト リミッツ</a:t>
+            </a:r>
+            <a:r>
+              <a:rPr b="0"/>
+              <a:t> インクルーディッド。</a:t>
+            </a:r>
+          </a:p>
+          <a:p>
+            <a:r>
+              <a:rPr b="0"/>
+              <a:t>The code, the threat model, and the architecture are all on GitHub, at 01rabbit.</a:t>
+            </a:r>
+          </a:p>
+          <a:p>
+            <a:r>
+              <a:rPr b="0"/>
+              <a:t>  ザ コウド、 ザ スレット モデル、 アンド ジ アーキテクチャー アー オール オン </a:t>
+            </a:r>
+            <a:r>
+              <a:rPr b="1"/>
+              <a:t>ギットハブ</a:t>
+            </a:r>
+            <a:r>
+              <a:rPr b="0"/>
+              <a:t>、 アット </a:t>
+            </a:r>
+            <a:r>
+              <a:rPr b="1"/>
+              <a:t>ゼロワン ラビット</a:t>
+            </a:r>
+            <a:r>
+              <a:rPr b="0"/>
+              <a:t>。</a:t>
+            </a:r>
+          </a:p>
+          <a:p>
+            <a:r>
+              <a:rPr b="0"/>
+              <a:t>The device is right here on the table.</a:t>
+            </a:r>
+          </a:p>
+          <a:p>
+            <a:r>
+              <a:rPr b="0"/>
+              <a:t>  ザ デバイス イズ </a:t>
+            </a:r>
+            <a:r>
+              <a:rPr b="1"/>
+              <a:t>ゥライト ヒア</a:t>
+            </a:r>
+            <a:r>
+              <a:rPr b="0"/>
+              <a:t> オン ザ テイブル。</a:t>
+            </a:r>
+          </a:p>
+          <a:p>
+            <a:r>
+              <a:rPr b="0"/>
+              <a:t>Come and try it. And please — come and break it.</a:t>
+            </a:r>
+          </a:p>
+          <a:p>
+            <a:r>
+              <a:rPr b="0"/>
+              <a:t>  </a:t>
+            </a:r>
+            <a:r>
+              <a:rPr b="1"/>
+              <a:t>カム アンド トライ イット</a:t>
+            </a:r>
+            <a:r>
+              <a:rPr b="0"/>
+              <a:t>。 アンド プリーズ — </a:t>
+            </a:r>
+            <a:r>
+              <a:rPr b="1"/>
+              <a:t>カム アンド ブレイク イット</a:t>
+            </a:r>
+            <a:r>
+              <a:rPr b="0"/>
+              <a:t>。</a:t>
+            </a:r>
+          </a:p>
+          <a:p>
+            <a:r>
+              <a:rPr b="0"/>
+              <a:t>I’ve got time for questions.”</a:t>
+            </a:r>
+          </a:p>
+          <a:p>
+            <a:r>
+              <a:rPr b="0"/>
+              <a:t>  アイヴ ゴット </a:t>
+            </a:r>
+            <a:r>
+              <a:rPr b="1"/>
+              <a:t>タイム</a:t>
+            </a:r>
+            <a:r>
+              <a:rPr b="0"/>
+              <a:t> フォー クエスチョンズ。</a:t>
+            </a:r>
+          </a:p>
+          <a:p>
+            <a:r>
+              <a:rPr b="0"/>
+              <a:t/>
+            </a:r>
+          </a:p>
+          <a:p>
+            <a:r>
+              <a:rPr b="0"/>
+              <a:t>JA: 約27分で着地。残り約18分を Q&amp;A・卓上デモ・交流へ。ステッカーは未作成 — 実機体験への導線に差し替え済み。45分で必ず終了。</a:t>
             </a:r>
           </a:p>
         </p:txBody>
@@ -2326,12 +7742,188 @@
           <a:lstStyle/>
           <a:p>
             <a:r>
-              <a:rPr lang="en-US" dirty="0"/>
-              <a:t>[01:10 / 0:30] AGENDA
-EN: "Here's the plan for the next half hour. First the problem — compelled access. Then the core idea, Janus. How it works — the object cue and coercion-safe delaying. A look under the hood — crypto, guards, the actual hardware. Then the honest limits — ethics and scope. And I'll finish with a live demo and how to run it yourself. I'll leave time for questions at the end."
-JA: 全体地図。指で6項目をなぞる。テンポよく。ここで聴衆の期待値を固定。</a:t>
+              <a:rPr b="0"/>
+              <a:t>[01:10 / 0:30] AGENDA — 発話 0:35</a:t>
             </a:r>
             <a:endParaRPr lang="en-US" dirty="0"/>
+          </a:p>
+          <a:p>
+            <a:r>
+              <a:rPr b="0"/>
+              <a:t/>
+            </a:r>
+          </a:p>
+          <a:p>
+            <a:r>
+              <a:rPr b="0"/>
+              <a:t>“Here’s the plan for the next half hour.</a:t>
+            </a:r>
+          </a:p>
+          <a:p>
+            <a:r>
+              <a:rPr b="0"/>
+              <a:t>  ヒアズ ザ </a:t>
+            </a:r>
+            <a:r>
+              <a:rPr b="1"/>
+              <a:t>プラン</a:t>
+            </a:r>
+            <a:r>
+              <a:rPr b="0"/>
+              <a:t> フォー ザ ネクスト ハーフ アウア。</a:t>
+            </a:r>
+          </a:p>
+          <a:p>
+            <a:r>
+              <a:rPr b="0"/>
+              <a:t>First, the problem: compelled access.</a:t>
+            </a:r>
+          </a:p>
+          <a:p>
+            <a:r>
+              <a:rPr b="0"/>
+              <a:t>  ファースト、 ザ プロブレム: </a:t>
+            </a:r>
+            <a:r>
+              <a:rPr b="1"/>
+              <a:t>コンペルド アクセス</a:t>
+            </a:r>
+            <a:r>
+              <a:rPr b="0"/>
+              <a:t>。</a:t>
+            </a:r>
+          </a:p>
+          <a:p>
+            <a:r>
+              <a:rPr b="0"/>
+              <a:t>Then the core idea — Janus.</a:t>
+            </a:r>
+          </a:p>
+          <a:p>
+            <a:r>
+              <a:rPr b="0"/>
+              <a:t>  ゼン ザ コア アイディア — </a:t>
+            </a:r>
+            <a:r>
+              <a:rPr b="1"/>
+              <a:t>ジェイナス</a:t>
+            </a:r>
+            <a:r>
+              <a:rPr b="0"/>
+              <a:t>。</a:t>
+            </a:r>
+          </a:p>
+          <a:p>
+            <a:r>
+              <a:rPr b="0"/>
+              <a:t>Then how it works: the object cue, and coercion-safe delay.</a:t>
+            </a:r>
+          </a:p>
+          <a:p>
+            <a:r>
+              <a:rPr b="0"/>
+              <a:t>  ゼン ハウ イット ワークス: ジ </a:t>
+            </a:r>
+            <a:r>
+              <a:rPr b="1"/>
+              <a:t>オブジェクト キュー</a:t>
+            </a:r>
+            <a:r>
+              <a:rPr b="0"/>
+              <a:t>、 アンド コアージョンセイフ ディレイ。</a:t>
+            </a:r>
+          </a:p>
+          <a:p>
+            <a:r>
+              <a:rPr b="0"/>
+              <a:t>Then under the hood — crypto, guards, and the hardware itself.</a:t>
+            </a:r>
+          </a:p>
+          <a:p>
+            <a:r>
+              <a:rPr b="0"/>
+              <a:t>  ゼン アンダー ザ </a:t>
+            </a:r>
+            <a:r>
+              <a:rPr b="1"/>
+              <a:t>フッド</a:t>
+            </a:r>
+            <a:r>
+              <a:rPr b="0"/>
+              <a:t> — クリプト、 ガーズ、 アンド ザ ハードウェア イットセルフ。</a:t>
+            </a:r>
+          </a:p>
+          <a:p>
+            <a:r>
+              <a:rPr b="0"/>
+              <a:t>Then the honest limits. Ethics, and scope.</a:t>
+            </a:r>
+          </a:p>
+          <a:p>
+            <a:r>
+              <a:rPr b="0"/>
+              <a:t>  ゼン ジ </a:t>
+            </a:r>
+            <a:r>
+              <a:rPr b="1"/>
+              <a:t>オネスト</a:t>
+            </a:r>
+            <a:r>
+              <a:rPr b="0"/>
+              <a:t> リミッツ。 エシックス、 アンド スコープ。</a:t>
+            </a:r>
+          </a:p>
+          <a:p>
+            <a:r>
+              <a:rPr b="0"/>
+              <a:t>I finish with a live demo, and how to run it yourself.</a:t>
+            </a:r>
+          </a:p>
+          <a:p>
+            <a:r>
+              <a:rPr b="0"/>
+              <a:t>  アイ フィニッシュ ウィズ ア </a:t>
+            </a:r>
+            <a:r>
+              <a:rPr b="1"/>
+              <a:t>ライヴ デモ</a:t>
+            </a:r>
+            <a:r>
+              <a:rPr b="0"/>
+              <a:t>、 アンド ハウ トゥ ラン イット ユアセルフ。</a:t>
+            </a:r>
+          </a:p>
+          <a:p>
+            <a:r>
+              <a:rPr b="0"/>
+              <a:t>And I’ll keep time for questions at the end.”</a:t>
+            </a:r>
+          </a:p>
+          <a:p>
+            <a:r>
+              <a:rPr b="0"/>
+              <a:t>  アンド アイル キープ </a:t>
+            </a:r>
+            <a:r>
+              <a:rPr b="1"/>
+              <a:t>タイム</a:t>
+            </a:r>
+            <a:r>
+              <a:rPr b="0"/>
+              <a:t> フォー クエスチョンズ アット ジ エンド。</a:t>
+            </a:r>
+          </a:p>
+          <a:p>
+            <a:r>
+              <a:rPr b="0"/>
+              <a:t/>
+            </a:r>
+          </a:p>
+          <a:p>
+            <a:r>
+              <a:rPr b="0"/>
+              <a:t>JA: 6項目を指でなぞる。期待値を固定</a:t>
+            </a:r>
           </a:p>
         </p:txBody>
       </p:sp>
@@ -2416,12 +8008,212 @@
           <a:lstStyle/>
           <a:p>
             <a:r>
-              <a:rPr lang="en-US" dirty="0"/>
-              <a:t>[01:40 / 1:00] THE PROBLEM
-EN: "Here's what Phasmid is built for. Attackers today don't need to break your crypto. They take the device — at a border, a checkpoint, an arrest — and they ask you to unlock it. And full-disk encryption is all-or-nothing: the moment you open it under pressure, everything is exposed. That's over-disclosure — one demand, total exposure. And this isn't theoretical anymore: this year a U.S. citizen was federally charged after a duress feature wiped his phone at a border search — the first known case of its kind. The scenario on this slide now has a court date."
-JA: 3枚を左→右で指す。淡々と、しかし重さを持って。ここで問題意識を共有。下段の REAL CASE を一度指す。係争中の個別事案には踏み込まない。</a:t>
+              <a:rPr b="0"/>
+              <a:t>[01:40 / 1:00] THE PROBLEM — 発話 0:25</a:t>
             </a:r>
             <a:endParaRPr lang="en-US" dirty="0"/>
+          </a:p>
+          <a:p>
+            <a:r>
+              <a:rPr b="0"/>
+              <a:t/>
+            </a:r>
+          </a:p>
+          <a:p>
+            <a:r>
+              <a:rPr b="0"/>
+              <a:t>“Here’s what Phasmid is built for.</a:t>
+            </a:r>
+          </a:p>
+          <a:p>
+            <a:r>
+              <a:rPr b="0"/>
+              <a:t>  ヒアズ ワット </a:t>
+            </a:r>
+            <a:r>
+              <a:rPr b="1"/>
+              <a:t>ファズミッド</a:t>
+            </a:r>
+            <a:r>
+              <a:rPr b="0"/>
+              <a:t> イズ ビルト フォー。</a:t>
+            </a:r>
+          </a:p>
+          <a:p>
+            <a:r>
+              <a:rPr b="0"/>
+              <a:t>Attackers today don’t break your crypto.</a:t>
+            </a:r>
+          </a:p>
+          <a:p>
+            <a:r>
+              <a:rPr b="0"/>
+              <a:t>  アタッカーズ トゥデイ ドウント ブレイク ユア </a:t>
+            </a:r>
+            <a:r>
+              <a:rPr b="1"/>
+              <a:t>クリプト</a:t>
+            </a:r>
+            <a:r>
+              <a:rPr b="0"/>
+              <a:t>。</a:t>
+            </a:r>
+          </a:p>
+          <a:p>
+            <a:r>
+              <a:rPr b="0"/>
+              <a:t>They take the device.</a:t>
+            </a:r>
+          </a:p>
+          <a:p>
+            <a:r>
+              <a:rPr b="0"/>
+              <a:t>  ゼイ テイク ザ </a:t>
+            </a:r>
+            <a:r>
+              <a:rPr b="1"/>
+              <a:t>デバイス</a:t>
+            </a:r>
+            <a:r>
+              <a:rPr b="0"/>
+              <a:t>。</a:t>
+            </a:r>
+          </a:p>
+          <a:p>
+            <a:r>
+              <a:rPr b="0"/>
+              <a:t>At a border. At a checkpoint. At an arrest.</a:t>
+            </a:r>
+          </a:p>
+          <a:p>
+            <a:r>
+              <a:rPr b="0"/>
+              <a:t>  アッタ </a:t>
+            </a:r>
+            <a:r>
+              <a:rPr b="1"/>
+              <a:t>ボーダー</a:t>
+            </a:r>
+            <a:r>
+              <a:rPr b="0"/>
+              <a:t>。 アッタ </a:t>
+            </a:r>
+            <a:r>
+              <a:rPr b="1"/>
+              <a:t>チェックポイント</a:t>
+            </a:r>
+            <a:r>
+              <a:rPr b="0"/>
+              <a:t>。 アッタン </a:t>
+            </a:r>
+            <a:r>
+              <a:rPr b="1"/>
+              <a:t>アレスト</a:t>
+            </a:r>
+            <a:r>
+              <a:rPr b="0"/>
+              <a:t>。</a:t>
+            </a:r>
+          </a:p>
+          <a:p>
+            <a:r>
+              <a:rPr b="0"/>
+              <a:t>And then they ask you to unlock it.</a:t>
+            </a:r>
+          </a:p>
+          <a:p>
+            <a:r>
+              <a:rPr b="0"/>
+              <a:t>  アンド ゼン ゼイ アスク ユー トゥ </a:t>
+            </a:r>
+            <a:r>
+              <a:rPr b="1"/>
+              <a:t>アンロック</a:t>
+            </a:r>
+            <a:r>
+              <a:rPr b="0"/>
+              <a:t> イット。</a:t>
+            </a:r>
+          </a:p>
+          <a:p>
+            <a:r>
+              <a:rPr b="0"/>
+              <a:t>Full-disk encryption is all or nothing.</a:t>
+            </a:r>
+          </a:p>
+          <a:p>
+            <a:r>
+              <a:rPr b="0"/>
+              <a:t>  フルディスク インクリプション イズ </a:t>
+            </a:r>
+            <a:r>
+              <a:rPr b="1"/>
+              <a:t>オール オア ナッシング</a:t>
+            </a:r>
+            <a:r>
+              <a:rPr b="0"/>
+              <a:t>。</a:t>
+            </a:r>
+          </a:p>
+          <a:p>
+            <a:r>
+              <a:rPr b="0"/>
+              <a:t>You open it once, under pressure — and everything is exposed.</a:t>
+            </a:r>
+          </a:p>
+          <a:p>
+            <a:r>
+              <a:rPr b="0"/>
+              <a:t>  ユー オウプン イット </a:t>
+            </a:r>
+            <a:r>
+              <a:rPr b="1"/>
+              <a:t>ワンス</a:t>
+            </a:r>
+            <a:r>
+              <a:rPr b="0"/>
+              <a:t>、 アンダー プレッシャー — アンド </a:t>
+            </a:r>
+            <a:r>
+              <a:rPr b="1"/>
+              <a:t>エヴリシング</a:t>
+            </a:r>
+            <a:r>
+              <a:rPr b="0"/>
+              <a:t> イズ エクスポウズド。</a:t>
+            </a:r>
+          </a:p>
+          <a:p>
+            <a:r>
+              <a:rPr b="0"/>
+              <a:t>That’s over-disclosure.”</a:t>
+            </a:r>
+          </a:p>
+          <a:p>
+            <a:r>
+              <a:rPr b="0"/>
+              <a:t>  ザッツ </a:t>
+            </a:r>
+            <a:r>
+              <a:rPr b="1"/>
+              <a:t>オウヴァー ディスクロージャー</a:t>
+            </a:r>
+            <a:r>
+              <a:rPr b="0"/>
+              <a:t>。</a:t>
+            </a:r>
+          </a:p>
+          <a:p>
+            <a:r>
+              <a:rPr b="0"/>
+              <a:t/>
+            </a:r>
+          </a:p>
+          <a:p>
+            <a:r>
+              <a:rPr b="0"/>
+              <a:t>JA: 3枚を左→右で指す。淡々と、しかし重く</a:t>
+            </a:r>
           </a:p>
         </p:txBody>
       </p:sp>
@@ -2506,12 +8298,180 @@
           <a:lstStyle/>
           <a:p>
             <a:r>
-              <a:rPr lang="en-US" dirty="0"/>
-              <a:t>[02:40 / 0:30] MEME
-EN: "So you get three bad options. Refuse — and you escalate. Comply with full-disk encryption — and you hand over everything. Or... controlled disclosure — show what's visible, protect the rest. Same demand, very different blast radius."
-JA: ここで軽く笑いを取る。テンポよく。緊張を一度ほぐす。</a:t>
+              <a:rPr b="0"/>
+              <a:t>[02:40 / 0:30] MEME — 発話 0:20</a:t>
             </a:r>
             <a:endParaRPr lang="en-US" dirty="0"/>
+          </a:p>
+          <a:p>
+            <a:r>
+              <a:rPr b="0"/>
+              <a:t/>
+            </a:r>
+          </a:p>
+          <a:p>
+            <a:r>
+              <a:rPr b="0"/>
+              <a:t>“So you get three bad options.</a:t>
+            </a:r>
+          </a:p>
+          <a:p>
+            <a:r>
+              <a:rPr b="0"/>
+              <a:t>  ソウ ユー ゲット </a:t>
+            </a:r>
+            <a:r>
+              <a:rPr b="1"/>
+              <a:t>スリー バッド オプションズ</a:t>
+            </a:r>
+            <a:r>
+              <a:rPr b="0"/>
+              <a:t>。</a:t>
+            </a:r>
+          </a:p>
+          <a:p>
+            <a:r>
+              <a:rPr b="0"/>
+              <a:t>Refuse — and you escalate.</a:t>
+            </a:r>
+          </a:p>
+          <a:p>
+            <a:r>
+              <a:rPr b="0"/>
+              <a:t>  </a:t>
+            </a:r>
+            <a:r>
+              <a:rPr b="1"/>
+              <a:t>リフューズ</a:t>
+            </a:r>
+            <a:r>
+              <a:rPr b="0"/>
+              <a:t> — アンド ユー </a:t>
+            </a:r>
+            <a:r>
+              <a:rPr b="1"/>
+              <a:t>エスカレイト</a:t>
+            </a:r>
+            <a:r>
+              <a:rPr b="0"/>
+              <a:t>。</a:t>
+            </a:r>
+          </a:p>
+          <a:p>
+            <a:r>
+              <a:rPr b="0"/>
+              <a:t>Comply, with full-disk encryption — and you hand over everything.</a:t>
+            </a:r>
+          </a:p>
+          <a:p>
+            <a:r>
+              <a:rPr b="0"/>
+              <a:t>  </a:t>
+            </a:r>
+            <a:r>
+              <a:rPr b="1"/>
+              <a:t>コンプライ</a:t>
+            </a:r>
+            <a:r>
+              <a:rPr b="0"/>
+              <a:t>、 ウィズ フルディスク インクリプション — アンド ユー ハンド オウヴァー </a:t>
+            </a:r>
+            <a:r>
+              <a:rPr b="1"/>
+              <a:t>エヴリシング</a:t>
+            </a:r>
+            <a:r>
+              <a:rPr b="0"/>
+              <a:t>。</a:t>
+            </a:r>
+          </a:p>
+          <a:p>
+            <a:r>
+              <a:rPr b="0"/>
+              <a:t>Or… controlled disclosure.</a:t>
+            </a:r>
+          </a:p>
+          <a:p>
+            <a:r>
+              <a:rPr b="0"/>
+              <a:t>  オア… </a:t>
+            </a:r>
+            <a:r>
+              <a:rPr b="1"/>
+              <a:t>コントロールド ディスクロージャー</a:t>
+            </a:r>
+            <a:r>
+              <a:rPr b="0"/>
+              <a:t>。</a:t>
+            </a:r>
+          </a:p>
+          <a:p>
+            <a:r>
+              <a:rPr b="0"/>
+              <a:t>Show what’s visible. Protect the rest.</a:t>
+            </a:r>
+          </a:p>
+          <a:p>
+            <a:r>
+              <a:rPr b="0"/>
+              <a:t>  ショウ ワッツ </a:t>
+            </a:r>
+            <a:r>
+              <a:rPr b="1"/>
+              <a:t>ヴィジブル</a:t>
+            </a:r>
+            <a:r>
+              <a:rPr b="0"/>
+              <a:t>。 プロテクト ザ </a:t>
+            </a:r>
+            <a:r>
+              <a:rPr b="1"/>
+              <a:t>レスト</a:t>
+            </a:r>
+            <a:r>
+              <a:rPr b="0"/>
+              <a:t>。</a:t>
+            </a:r>
+          </a:p>
+          <a:p>
+            <a:r>
+              <a:rPr b="0"/>
+              <a:t>Same demand. Very different blast radius.”</a:t>
+            </a:r>
+          </a:p>
+          <a:p>
+            <a:r>
+              <a:rPr b="0"/>
+              <a:t>  セイム </a:t>
+            </a:r>
+            <a:r>
+              <a:rPr b="1"/>
+              <a:t>ディマンド</a:t>
+            </a:r>
+            <a:r>
+              <a:rPr b="0"/>
+              <a:t>。 ヴェリー ディファレント </a:t>
+            </a:r>
+            <a:r>
+              <a:rPr b="1"/>
+              <a:t>ブラスト レイディアス</a:t>
+            </a:r>
+            <a:r>
+              <a:rPr b="0"/>
+              <a:t>。</a:t>
+            </a:r>
+          </a:p>
+          <a:p>
+            <a:r>
+              <a:rPr b="0"/>
+              <a:t/>
+            </a:r>
+          </a:p>
+          <a:p>
+            <a:r>
+              <a:rPr b="0"/>
+              <a:t>JA: 軽く笑いを取る。緊張を一度ほぐす</a:t>
+            </a:r>
           </a:p>
         </p:txBody>
       </p:sp>
@@ -2596,12 +8556,196 @@
           <a:lstStyle/>
           <a:p>
             <a:r>
-              <a:rPr lang="en-US" dirty="0"/>
-              <a:t>[03:10 / 0:50] WHAT IT IS / ISN'T
-EN: "Let me be precise. Phasmid is a field-evaluation research prototype for disclosure control — not casual file encryption, local-only by default. And it is not a replacement for audited full-disk encryption, not hardware-backed keys, not a magic delete button, and not a complete answer to compelled disclosure. I'll keep drawing that line the whole way through."
-JA: 誠実さを最初に宣言。IS/NOTを左右で示す。この一貫性が信頼の土台。</a:t>
+              <a:rPr b="0"/>
+              <a:t>[03:10 / 0:50] WHAT IT IS / ISN'T — 発話 0:25</a:t>
             </a:r>
             <a:endParaRPr lang="en-US" dirty="0"/>
+          </a:p>
+          <a:p>
+            <a:r>
+              <a:rPr b="0"/>
+              <a:t/>
+            </a:r>
+          </a:p>
+          <a:p>
+            <a:r>
+              <a:rPr b="0"/>
+              <a:t>“Let me be precise.</a:t>
+            </a:r>
+          </a:p>
+          <a:p>
+            <a:r>
+              <a:rPr b="0"/>
+              <a:t>  レット ミー ビー </a:t>
+            </a:r>
+            <a:r>
+              <a:rPr b="1"/>
+              <a:t>プリサイス</a:t>
+            </a:r>
+            <a:r>
+              <a:rPr b="0"/>
+              <a:t>。</a:t>
+            </a:r>
+          </a:p>
+          <a:p>
+            <a:r>
+              <a:rPr b="0"/>
+              <a:t>Phasmid is a field-evaluation research prototype for disclosure control.</a:t>
+            </a:r>
+          </a:p>
+          <a:p>
+            <a:r>
+              <a:rPr b="0"/>
+              <a:t>  ファズミッド イズ ア フィールド イヴァリュエイション リサーチ </a:t>
+            </a:r>
+            <a:r>
+              <a:rPr b="1"/>
+              <a:t>プロウトタイプ</a:t>
+            </a:r>
+            <a:r>
+              <a:rPr b="0"/>
+              <a:t> フォー ディスクロージャー コントロール。</a:t>
+            </a:r>
+          </a:p>
+          <a:p>
+            <a:r>
+              <a:rPr b="0"/>
+              <a:t>Local-only by default. Not casual file encryption.</a:t>
+            </a:r>
+          </a:p>
+          <a:p>
+            <a:r>
+              <a:rPr b="0"/>
+              <a:t>  </a:t>
+            </a:r>
+            <a:r>
+              <a:rPr b="1"/>
+              <a:t>ローカル オウンリー</a:t>
+            </a:r>
+            <a:r>
+              <a:rPr b="0"/>
+              <a:t> バイ ディフォルト。 </a:t>
+            </a:r>
+            <a:r>
+              <a:rPr b="1"/>
+              <a:t>ナット</a:t>
+            </a:r>
+            <a:r>
+              <a:rPr b="0"/>
+              <a:t> キャジュアル ファイル インクリプション。</a:t>
+            </a:r>
+          </a:p>
+          <a:p>
+            <a:r>
+              <a:rPr b="0"/>
+              <a:t>And it is not a replacement for audited full-disk encryption.</a:t>
+            </a:r>
+          </a:p>
+          <a:p>
+            <a:r>
+              <a:rPr b="0"/>
+              <a:t>  アンド イット イズ </a:t>
+            </a:r>
+            <a:r>
+              <a:rPr b="1"/>
+              <a:t>ナット</a:t>
+            </a:r>
+            <a:r>
+              <a:rPr b="0"/>
+              <a:t> ア リプレイスメント フォー オーディティッド フルディスク インクリプション。</a:t>
+            </a:r>
+          </a:p>
+          <a:p>
+            <a:r>
+              <a:rPr b="0"/>
+              <a:t>Not hardware-backed keys.</a:t>
+            </a:r>
+          </a:p>
+          <a:p>
+            <a:r>
+              <a:rPr b="0"/>
+              <a:t>  </a:t>
+            </a:r>
+            <a:r>
+              <a:rPr b="1"/>
+              <a:t>ナット</a:t>
+            </a:r>
+            <a:r>
+              <a:rPr b="0"/>
+              <a:t> ハードウェアバックト キーズ。</a:t>
+            </a:r>
+          </a:p>
+          <a:p>
+            <a:r>
+              <a:rPr b="0"/>
+              <a:t>Not a magic delete button.</a:t>
+            </a:r>
+          </a:p>
+          <a:p>
+            <a:r>
+              <a:rPr b="0"/>
+              <a:t>  </a:t>
+            </a:r>
+            <a:r>
+              <a:rPr b="1"/>
+              <a:t>ナット</a:t>
+            </a:r>
+            <a:r>
+              <a:rPr b="0"/>
+              <a:t> ア マジック ディリート バトゥン。</a:t>
+            </a:r>
+          </a:p>
+          <a:p>
+            <a:r>
+              <a:rPr b="0"/>
+              <a:t>Not a complete answer to compelled disclosure.</a:t>
+            </a:r>
+          </a:p>
+          <a:p>
+            <a:r>
+              <a:rPr b="0"/>
+              <a:t>  </a:t>
+            </a:r>
+            <a:r>
+              <a:rPr b="1"/>
+              <a:t>ナット</a:t>
+            </a:r>
+            <a:r>
+              <a:rPr b="0"/>
+              <a:t> ア コンプリート アンサー トゥ コンペルド ディスクロージャー。</a:t>
+            </a:r>
+          </a:p>
+          <a:p>
+            <a:r>
+              <a:rPr b="0"/>
+              <a:t>I’ll keep drawing that line, the whole way through.”</a:t>
+            </a:r>
+          </a:p>
+          <a:p>
+            <a:r>
+              <a:rPr b="0"/>
+              <a:t>  アイル キープ ドローイング </a:t>
+            </a:r>
+            <a:r>
+              <a:rPr b="1"/>
+              <a:t>ザット ライン</a:t>
+            </a:r>
+            <a:r>
+              <a:rPr b="0"/>
+              <a:t>、 ザ ホウル ウェイ スルー。</a:t>
+            </a:r>
+          </a:p>
+          <a:p>
+            <a:r>
+              <a:rPr b="0"/>
+              <a:t/>
+            </a:r>
+          </a:p>
+          <a:p>
+            <a:r>
+              <a:rPr b="0"/>
+              <a:t>JA: 誠実さを最初に宣言。IS / NOT を左右で</a:t>
+            </a:r>
           </a:p>
         </p:txBody>
       </p:sp>
@@ -2686,12 +8830,232 @@
           <a:lstStyle/>
           <a:p>
             <a:r>
-              <a:rPr lang="en-US" dirty="0"/>
-              <a:t>[04:00 / 1:10] CORE IDEA — JANUS
-EN: "The core idea is Janus — two faces. A two-slot model. Slot A is what a capture-visible surface shows: plausible, ordinary, disclosed under pressure. Slot B is protected local state, kept off the visible path, bound to local conditions — not just a password. The point is simple: what you show is not all there is."
-JA: 概念の核。左右のスロットを指す。ゆっくり。ここは聴衆に必ず持ち帰らせる。</a:t>
+              <a:rPr b="0"/>
+              <a:t>[04:00 / 1:10] CORE IDEA — JANUS — 発話 0:25</a:t>
             </a:r>
             <a:endParaRPr lang="en-US" dirty="0"/>
+          </a:p>
+          <a:p>
+            <a:r>
+              <a:rPr b="0"/>
+              <a:t/>
+            </a:r>
+          </a:p>
+          <a:p>
+            <a:r>
+              <a:rPr b="0"/>
+              <a:t>“The core idea is Janus. Two faces.</a:t>
+            </a:r>
+          </a:p>
+          <a:p>
+            <a:r>
+              <a:rPr b="0"/>
+              <a:t>  ザ コア アイディア イズ </a:t>
+            </a:r>
+            <a:r>
+              <a:rPr b="1"/>
+              <a:t>ジェイナス</a:t>
+            </a:r>
+            <a:r>
+              <a:rPr b="0"/>
+              <a:t>。 </a:t>
+            </a:r>
+            <a:r>
+              <a:rPr b="1"/>
+              <a:t>トゥー フェイシズ</a:t>
+            </a:r>
+            <a:r>
+              <a:rPr b="0"/>
+              <a:t>。</a:t>
+            </a:r>
+          </a:p>
+          <a:p>
+            <a:r>
+              <a:rPr b="0"/>
+              <a:t>A two-slot model.</a:t>
+            </a:r>
+          </a:p>
+          <a:p>
+            <a:r>
+              <a:rPr b="0"/>
+              <a:t>  ア </a:t>
+            </a:r>
+            <a:r>
+              <a:rPr b="1"/>
+              <a:t>トゥースロット</a:t>
+            </a:r>
+            <a:r>
+              <a:rPr b="0"/>
+              <a:t> モデル。</a:t>
+            </a:r>
+          </a:p>
+          <a:p>
+            <a:r>
+              <a:rPr b="0"/>
+              <a:t>Slot A is what the visible surface shows.</a:t>
+            </a:r>
+          </a:p>
+          <a:p>
+            <a:r>
+              <a:rPr b="0"/>
+              <a:t>  スロット </a:t>
+            </a:r>
+            <a:r>
+              <a:rPr b="1"/>
+              <a:t>エイ</a:t>
+            </a:r>
+            <a:r>
+              <a:rPr b="0"/>
+              <a:t> イズ ワット ザ ヴィジブル サーフィス ショウズ。</a:t>
+            </a:r>
+          </a:p>
+          <a:p>
+            <a:r>
+              <a:rPr b="0"/>
+              <a:t>Plausible. Ordinary. Disclosed under pressure.</a:t>
+            </a:r>
+          </a:p>
+          <a:p>
+            <a:r>
+              <a:rPr b="0"/>
+              <a:t>  </a:t>
+            </a:r>
+            <a:r>
+              <a:rPr b="1"/>
+              <a:t>プローザブル</a:t>
+            </a:r>
+            <a:r>
+              <a:rPr b="0"/>
+              <a:t>。 </a:t>
+            </a:r>
+            <a:r>
+              <a:rPr b="1"/>
+              <a:t>オーディナリー</a:t>
+            </a:r>
+            <a:r>
+              <a:rPr b="0"/>
+              <a:t>。 ディスクロウズド アンダー プレッシャー。</a:t>
+            </a:r>
+          </a:p>
+          <a:p>
+            <a:r>
+              <a:rPr b="0"/>
+              <a:t>Slot B is protected local state. It stays off the visible path.</a:t>
+            </a:r>
+          </a:p>
+          <a:p>
+            <a:r>
+              <a:rPr b="0"/>
+              <a:t>  スロット </a:t>
+            </a:r>
+            <a:r>
+              <a:rPr b="1"/>
+              <a:t>ビー</a:t>
+            </a:r>
+            <a:r>
+              <a:rPr b="0"/>
+              <a:t> イズ プロテクティッド ローカル ステイト。 イット ステイズ </a:t>
+            </a:r>
+            <a:r>
+              <a:rPr b="1"/>
+              <a:t>オフ</a:t>
+            </a:r>
+            <a:r>
+              <a:rPr b="0"/>
+              <a:t> ザ ヴィジブル パス。</a:t>
+            </a:r>
+          </a:p>
+          <a:p>
+            <a:r>
+              <a:rPr b="0"/>
+              <a:t>And it’s bound to local conditions — not to a password alone.</a:t>
+            </a:r>
+          </a:p>
+          <a:p>
+            <a:r>
+              <a:rPr b="0"/>
+              <a:t>  アンド イッツ バウンド トゥ </a:t>
+            </a:r>
+            <a:r>
+              <a:rPr b="1"/>
+              <a:t>ローカル コンディションズ</a:t>
+            </a:r>
+            <a:r>
+              <a:rPr b="0"/>
+              <a:t> — ナット トゥ ア パスワード アロウン。</a:t>
+            </a:r>
+          </a:p>
+          <a:p>
+            <a:r>
+              <a:rPr b="0"/>
+              <a:t>What you show is not all there is.”</a:t>
+            </a:r>
+          </a:p>
+          <a:p>
+            <a:r>
+              <a:rPr b="0"/>
+              <a:t>  ワット ユー ショウ イズ </a:t>
+            </a:r>
+            <a:r>
+              <a:rPr b="1"/>
+              <a:t>ナット オール</a:t>
+            </a:r>
+            <a:r>
+              <a:rPr b="0"/>
+              <a:t> ゼア イズ。</a:t>
+            </a:r>
+          </a:p>
+          <a:p>
+            <a:r>
+              <a:rPr b="0"/>
+              <a:t/>
+            </a:r>
+          </a:p>
+          <a:p>
+            <a:r>
+              <a:rPr b="0"/>
+              <a:t>SPEAK（決めゼリフ・間を置いて）</a:t>
+            </a:r>
+          </a:p>
+          <a:p>
+            <a:r>
+              <a:rPr b="0"/>
+              <a:t>“Slot A is what you show. Slot B is not on the visible path.”</a:t>
+            </a:r>
+          </a:p>
+          <a:p>
+            <a:r>
+              <a:rPr b="0"/>
+              <a:t>  スロット エイ イズ ワット ユー </a:t>
+            </a:r>
+            <a:r>
+              <a:rPr b="1"/>
+              <a:t>ショウ</a:t>
+            </a:r>
+            <a:r>
+              <a:rPr b="0"/>
+              <a:t>。 スロット ビー イズ </a:t>
+            </a:r>
+            <a:r>
+              <a:rPr b="1"/>
+              <a:t>ナット</a:t>
+            </a:r>
+            <a:r>
+              <a:rPr b="0"/>
+              <a:t> オン ザ ヴィジブル パス。</a:t>
+            </a:r>
+          </a:p>
+          <a:p>
+            <a:r>
+              <a:rPr b="0"/>
+              <a:t/>
+            </a:r>
+          </a:p>
+          <a:p>
+            <a:r>
+              <a:rPr b="0"/>
+              <a:t>JA: 概念の核。左右のスロットを指す。ゆっくり。必ず持ち帰らせる</a:t>
+            </a:r>
           </a:p>
         </p:txBody>
       </p:sp>
@@ -2776,12 +9140,200 @@
           <a:lstStyle/>
           <a:p>
             <a:r>
-              <a:rPr lang="en-US" dirty="0"/>
-              <a:t>[05:10 / 1:15] ADVERSARY MODEL
-EN: "Who does it defend against? Five in-scope adversaries — physical captor, passive observer, local active attacker, local-network attacker, and a coercing authority. And, just as important, five explicitly out of scope: a compromised kernel, hardware implants, remote attackers, supply-chain, and breaking the crypto itself. If the host is owned, no user-space tool saves you — and I won't pretend otherwise."
-JA: 30分枠なので本編で語る。左=戦う相手、右=戦わない相手。誠実さを示す重要スライド。</a:t>
+              <a:rPr b="0"/>
+              <a:t>[05:10 / 1:15] ADVERSARY MODEL — 発話 0:30</a:t>
             </a:r>
             <a:endParaRPr lang="en-US" dirty="0"/>
+          </a:p>
+          <a:p>
+            <a:r>
+              <a:rPr b="0"/>
+              <a:t/>
+            </a:r>
+          </a:p>
+          <a:p>
+            <a:r>
+              <a:rPr b="0"/>
+              <a:t>“Who does it defend against?</a:t>
+            </a:r>
+          </a:p>
+          <a:p>
+            <a:r>
+              <a:rPr b="0"/>
+              <a:t>  フー ダズ イット </a:t>
+            </a:r>
+            <a:r>
+              <a:rPr b="1"/>
+              <a:t>ディフェンド</a:t>
+            </a:r>
+            <a:r>
+              <a:rPr b="0"/>
+              <a:t> アゲンスト?</a:t>
+            </a:r>
+          </a:p>
+          <a:p>
+            <a:r>
+              <a:rPr b="0"/>
+              <a:t>Five adversaries in scope.</a:t>
+            </a:r>
+          </a:p>
+          <a:p>
+            <a:r>
+              <a:rPr b="0"/>
+              <a:t>  </a:t>
+            </a:r>
+            <a:r>
+              <a:rPr b="1"/>
+              <a:t>ファイヴ</a:t>
+            </a:r>
+            <a:r>
+              <a:rPr b="0"/>
+              <a:t> アドヴァサリーズ イン スコープ。</a:t>
+            </a:r>
+          </a:p>
+          <a:p>
+            <a:r>
+              <a:rPr b="0"/>
+              <a:t>A physical captor. A passive observer. A local active attacker.</a:t>
+            </a:r>
+          </a:p>
+          <a:p>
+            <a:r>
+              <a:rPr b="0"/>
+              <a:t>  ア フィジカル キャプター。 ア パッシヴ オブザーヴァー。 ア ローカル アクティヴ アタッカー。</a:t>
+            </a:r>
+          </a:p>
+          <a:p>
+            <a:r>
+              <a:rPr b="0"/>
+              <a:t>A local-network attacker. And a coercing authority.</a:t>
+            </a:r>
+          </a:p>
+          <a:p>
+            <a:r>
+              <a:rPr b="0"/>
+              <a:t>  ア ローカルネットワーク アタッカー。 アンド ア </a:t>
+            </a:r>
+            <a:r>
+              <a:rPr b="1"/>
+              <a:t>コアーシング オーソリティ</a:t>
+            </a:r>
+            <a:r>
+              <a:rPr b="0"/>
+              <a:t>。</a:t>
+            </a:r>
+          </a:p>
+          <a:p>
+            <a:r>
+              <a:rPr b="0"/>
+              <a:t>And five explicitly out of scope.</a:t>
+            </a:r>
+          </a:p>
+          <a:p>
+            <a:r>
+              <a:rPr b="0"/>
+              <a:t>  アンド ファイヴ エクスプリシットリー </a:t>
+            </a:r>
+            <a:r>
+              <a:rPr b="1"/>
+              <a:t>アウト オヴ スコープ</a:t>
+            </a:r>
+            <a:r>
+              <a:rPr b="0"/>
+              <a:t>。</a:t>
+            </a:r>
+          </a:p>
+          <a:p>
+            <a:r>
+              <a:rPr b="0"/>
+              <a:t>A compromised kernel. Hardware implants. Remote attackers.</a:t>
+            </a:r>
+          </a:p>
+          <a:p>
+            <a:r>
+              <a:rPr b="0"/>
+              <a:t>  ア コンプロマイズド カーネル。 ハードウェア インプランツ。 リモウト アタッカーズ。</a:t>
+            </a:r>
+          </a:p>
+          <a:p>
+            <a:r>
+              <a:rPr b="0"/>
+              <a:t>Supply chain. And breaking the crypto itself.</a:t>
+            </a:r>
+          </a:p>
+          <a:p>
+            <a:r>
+              <a:rPr b="0"/>
+              <a:t>  サプライ チェイン。 アンド ブレイキング ザ </a:t>
+            </a:r>
+            <a:r>
+              <a:rPr b="1"/>
+              <a:t>クリプト イットセルフ</a:t>
+            </a:r>
+            <a:r>
+              <a:rPr b="0"/>
+              <a:t>。</a:t>
+            </a:r>
+          </a:p>
+          <a:p>
+            <a:r>
+              <a:rPr b="0"/>
+              <a:t>If the host is owned, no user-space tool saves you.</a:t>
+            </a:r>
+          </a:p>
+          <a:p>
+            <a:r>
+              <a:rPr b="0"/>
+              <a:t>  イフ ザ ホウスト イズ </a:t>
+            </a:r>
+            <a:r>
+              <a:rPr b="1"/>
+              <a:t>オウンド</a:t>
+            </a:r>
+            <a:r>
+              <a:rPr b="0"/>
+              <a:t>、 ノウ ユーザースペイス ツール </a:t>
+            </a:r>
+            <a:r>
+              <a:rPr b="1"/>
+              <a:t>セイヴズ</a:t>
+            </a:r>
+            <a:r>
+              <a:rPr b="0"/>
+              <a:t> ユー。</a:t>
+            </a:r>
+          </a:p>
+          <a:p>
+            <a:r>
+              <a:rPr b="0"/>
+              <a:t>I won’t pretend otherwise.”</a:t>
+            </a:r>
+          </a:p>
+          <a:p>
+            <a:r>
+              <a:rPr b="0"/>
+              <a:t>  アイ ウォウント </a:t>
+            </a:r>
+            <a:r>
+              <a:rPr b="1"/>
+              <a:t>プリテンド</a:t>
+            </a:r>
+            <a:r>
+              <a:rPr b="0"/>
+              <a:t> アザワイズ。</a:t>
+            </a:r>
+          </a:p>
+          <a:p>
+            <a:r>
+              <a:rPr b="0"/>
+              <a:t/>
+            </a:r>
+          </a:p>
+          <a:p>
+            <a:r>
+              <a:rPr b="0"/>
+              <a:t>JA: 左=戦う相手、右=戦わない相手。誠実さの要</a:t>
+            </a:r>
           </a:p>
         </p:txBody>
       </p:sp>
@@ -2866,12 +9418,184 @@
           <a:lstStyle/>
           <a:p>
             <a:r>
-              <a:rPr lang="en-US" dirty="0"/>
-              <a:t>[06:25 / 0:45] STRIDE + LINDDUN
-EN: "I didn't just hand-wave the threats. Eighteen scenarios, each tagged with STRIDE and LINDDUN — offline cracking, session replay, header leakage, timing side-channels, object-cue spoofing, coerced disclosure. Here are a few representative ones; the full matrix is in the repo. If you want to argue about any of these, find me after — I'd enjoy it."
-JA: 表は全部読まない。代表2〜3行を指す。研究の厳密さを示す。深掘りはQ&amp;Aへ誘導。</a:t>
+              <a:rPr b="0"/>
+              <a:t>[06:25 / 0:45] STRIDE + LINDDUN — 発話 0:25</a:t>
             </a:r>
             <a:endParaRPr lang="en-US" dirty="0"/>
+          </a:p>
+          <a:p>
+            <a:r>
+              <a:rPr b="0"/>
+              <a:t/>
+            </a:r>
+          </a:p>
+          <a:p>
+            <a:r>
+              <a:rPr b="0"/>
+              <a:t>“I didn’t hand-wave the threats.</a:t>
+            </a:r>
+          </a:p>
+          <a:p>
+            <a:r>
+              <a:rPr b="0"/>
+              <a:t>  アイ ディドゥント </a:t>
+            </a:r>
+            <a:r>
+              <a:rPr b="1"/>
+              <a:t>ハンドウェイヴ</a:t>
+            </a:r>
+            <a:r>
+              <a:rPr b="0"/>
+              <a:t> ザ スレッツ。</a:t>
+            </a:r>
+          </a:p>
+          <a:p>
+            <a:r>
+              <a:rPr b="0"/>
+              <a:t>Eighteen scenarios. Each one tagged with STRIDE and LINDDUN.</a:t>
+            </a:r>
+          </a:p>
+          <a:p>
+            <a:r>
+              <a:rPr b="0"/>
+              <a:t>  </a:t>
+            </a:r>
+            <a:r>
+              <a:rPr b="1"/>
+              <a:t>エイティーン</a:t>
+            </a:r>
+            <a:r>
+              <a:rPr b="0"/>
+              <a:t> シナリオズ。 イーチ ワン タグド ウィズ </a:t>
+            </a:r>
+            <a:r>
+              <a:rPr b="1"/>
+              <a:t>ストライド</a:t>
+            </a:r>
+            <a:r>
+              <a:rPr b="0"/>
+              <a:t> アンド </a:t>
+            </a:r>
+            <a:r>
+              <a:rPr b="1"/>
+              <a:t>リンダン</a:t>
+            </a:r>
+            <a:r>
+              <a:rPr b="0"/>
+              <a:t>。</a:t>
+            </a:r>
+          </a:p>
+          <a:p>
+            <a:r>
+              <a:rPr b="0"/>
+              <a:t>Offline cracking. Session replay. Header leakage.</a:t>
+            </a:r>
+          </a:p>
+          <a:p>
+            <a:r>
+              <a:rPr b="0"/>
+              <a:t>  オフライン クラッキング。 セッション リプレイ。 ヘダー リーキッジ。</a:t>
+            </a:r>
+          </a:p>
+          <a:p>
+            <a:r>
+              <a:rPr b="0"/>
+              <a:t>Timing side-channels. Object-cue spoofing. Coerced disclosure.</a:t>
+            </a:r>
+          </a:p>
+          <a:p>
+            <a:r>
+              <a:rPr b="0"/>
+              <a:t>  タイミング サイドチャネルズ。 オブジェクトキュー スプーフィング。 コアースト ディスクロージャー。</a:t>
+            </a:r>
+          </a:p>
+          <a:p>
+            <a:r>
+              <a:rPr b="0"/>
+              <a:t>Here are a few. The full matrix is in the repo.</a:t>
+            </a:r>
+          </a:p>
+          <a:p>
+            <a:r>
+              <a:rPr b="0"/>
+              <a:t>  ヒア アー ア </a:t>
+            </a:r>
+            <a:r>
+              <a:rPr b="1"/>
+              <a:t>フュー</a:t>
+            </a:r>
+            <a:r>
+              <a:rPr b="0"/>
+              <a:t>。 ザ フル メイトリクス イズ イン ザ </a:t>
+            </a:r>
+            <a:r>
+              <a:rPr b="1"/>
+              <a:t>リーポウ</a:t>
+            </a:r>
+            <a:r>
+              <a:rPr b="0"/>
+              <a:t>。</a:t>
+            </a:r>
+          </a:p>
+          <a:p>
+            <a:r>
+              <a:rPr b="0"/>
+              <a:t>And if you want to argue with any of them — find me after.</a:t>
+            </a:r>
+          </a:p>
+          <a:p>
+            <a:r>
+              <a:rPr b="0"/>
+              <a:t>  アンド イフ ユー ワナ </a:t>
+            </a:r>
+            <a:r>
+              <a:rPr b="1"/>
+              <a:t>アーギュー</a:t>
+            </a:r>
+            <a:r>
+              <a:rPr b="0"/>
+              <a:t> ウィズ エニー オヴ ゼム — </a:t>
+            </a:r>
+            <a:r>
+              <a:rPr b="1"/>
+              <a:t>ファインド ミー アフター</a:t>
+            </a:r>
+            <a:r>
+              <a:rPr b="0"/>
+              <a:t>。</a:t>
+            </a:r>
+          </a:p>
+          <a:p>
+            <a:r>
+              <a:rPr b="0"/>
+              <a:t>I’d enjoy that.”</a:t>
+            </a:r>
+          </a:p>
+          <a:p>
+            <a:r>
+              <a:rPr b="0"/>
+              <a:t>  アイド </a:t>
+            </a:r>
+            <a:r>
+              <a:rPr b="1"/>
+              <a:t>エンジョイ</a:t>
+            </a:r>
+            <a:r>
+              <a:rPr b="0"/>
+              <a:t> ザット。</a:t>
+            </a:r>
+          </a:p>
+          <a:p>
+            <a:r>
+              <a:rPr b="0"/>
+              <a:t/>
+            </a:r>
+          </a:p>
+          <a:p>
+            <a:r>
+              <a:rPr b="0"/>
+              <a:t>JA: 表は全部読まない。代表2–3行を指す。遅れていたらここを最短で</a:t>
+            </a:r>
           </a:p>
         </p:txBody>
       </p:sp>
@@ -3405,6 +10129,10 @@
             <a:prstDash val="solid"/>
           </a:ln>
         </p:spPr>
+        <p:txBody>
+          <a:bodyPr/>
+          <a:p/>
+        </p:txBody>
       </p:sp>
       <p:sp>
         <p:nvSpPr>
@@ -3439,7 +10167,7 @@
                 <a:ea typeface="Courier New" pitchFamily="34" charset="-122"/>
                 <a:cs typeface="Courier New" pitchFamily="34" charset="-120"/>
               </a:rPr>
-              <a:t>Makoto Sugita</a:t>
+              <a:t>Makoto Sugita  (Mr.Rabbit)</a:t>
             </a:r>
             <a:pPr algn="ctr" indent="0" marL="0">
               <a:buNone/>
@@ -3453,7 +10181,7 @@
                 <a:ea typeface="Courier New" pitchFamily="34" charset="-122"/>
                 <a:cs typeface="Courier New" pitchFamily="34" charset="-120"/>
               </a:rPr>
-              <a:t>  (Mr.Rabbit)</a:t>
+              <a:t>  ·  Senior Engineer, GMO Cybersecurity by Ierae</a:t>
             </a:r>
             <a:pPr algn="ctr" indent="0" marL="0">
               <a:buNone/>
@@ -3467,7 +10195,7 @@
                 <a:ea typeface="Courier New" pitchFamily="34" charset="-122"/>
                 <a:cs typeface="Courier New" pitchFamily="34" charset="-120"/>
               </a:rPr>
-              <a:t>     @01ra66it</a:t>
+              <a:t/>
             </a:r>
             <a:pPr algn="ctr" indent="0" marL="0">
               <a:buNone/>
@@ -3481,46 +10209,105 @@
                 <a:ea typeface="Courier New" pitchFamily="34" charset="-122"/>
                 <a:cs typeface="Courier New" pitchFamily="34" charset="-120"/>
               </a:rPr>
-              <a:t>     github.com/01rabbit/Phasmid</a:t>
+              <a:t/>
             </a:r>
             <a:endParaRPr lang="en-US" sz="1600" dirty="0"/>
           </a:p>
-        </p:txBody>
-      </p:sp>
-      <p:sp>
-        <p:nvSpPr>
-          <p:cNvPr id="8" name="Text 5"/>
-          <p:cNvSpPr/>
-          <p:nvPr/>
-        </p:nvSpPr>
-        <p:spPr>
-          <a:xfrm>
-            <a:off x="0" y="6236208"/>
-            <a:ext cx="12188952" cy="320040"/>
-          </a:xfrm>
-          <a:prstGeom prst="rect">
-            <a:avLst/>
-          </a:prstGeom>
-          <a:noFill/>
-          <a:ln/>
-        </p:spPr>
-        <p:txBody>
-          <a:bodyPr wrap="square" lIns="0" tIns="0" rIns="0" bIns="0" rtlCol="0" anchor="ctr"/>
-          <a:lstStyle/>
           <a:p>
             <a:pPr algn="ctr" indent="0" marL="0">
               <a:buNone/>
             </a:pPr>
             <a:r>
-              <a:rPr lang="en-US" sz="1200" dirty="0">
-                <a:solidFill>
-                  <a:srgbClr val="6B7D71"/>
+              <a:rPr lang="en-US" sz="1600" b="1" dirty="0">
+                <a:solidFill>
+                  <a:srgbClr val="E8EFEA"/>
                 </a:solidFill>
                 <a:latin typeface="Courier New" pitchFamily="34" charset="0"/>
                 <a:ea typeface="Courier New" pitchFamily="34" charset="-122"/>
                 <a:cs typeface="Courier New" pitchFamily="34" charset="-120"/>
               </a:rPr>
-              <a:t>Research prototype · Apache-2.0 · v0.1.4</a:t>
+              <a:t>@01ra66it</a:t>
+            </a:r>
+            <a:pPr algn="ctr" indent="0" marL="0">
+              <a:buNone/>
+            </a:pPr>
+            <a:r>
+              <a:rPr lang="en-US" sz="1600" dirty="0">
+                <a:solidFill>
+                  <a:srgbClr val="9DB0A4"/>
+                </a:solidFill>
+                <a:latin typeface="Courier New" pitchFamily="34" charset="0"/>
+                <a:ea typeface="Courier New" pitchFamily="34" charset="-122"/>
+                <a:cs typeface="Courier New" pitchFamily="34" charset="-120"/>
+              </a:rPr>
+              <a:t>     github.com/01rabbit/Phasmid</a:t>
+            </a:r>
+            <a:pPr algn="ctr" indent="0" marL="0">
+              <a:buNone/>
+            </a:pPr>
+            <a:r>
+              <a:rPr lang="en-US" sz="1600" b="1" dirty="0">
+                <a:solidFill>
+                  <a:srgbClr val="7EC46B"/>
+                </a:solidFill>
+                <a:latin typeface="Courier New" pitchFamily="34" charset="0"/>
+                <a:ea typeface="Courier New" pitchFamily="34" charset="-122"/>
+                <a:cs typeface="Courier New" pitchFamily="34" charset="-120"/>
+              </a:rPr>
+              <a:t/>
+            </a:r>
+            <a:pPr algn="ctr" indent="0" marL="0">
+              <a:buNone/>
+            </a:pPr>
+            <a:r>
+              <a:rPr lang="en-US" sz="1600" dirty="0">
+                <a:solidFill>
+                  <a:srgbClr val="9DB0A4"/>
+                </a:solidFill>
+                <a:latin typeface="Courier New" pitchFamily="34" charset="0"/>
+                <a:ea typeface="Courier New" pitchFamily="34" charset="-122"/>
+                <a:cs typeface="Courier New" pitchFamily="34" charset="-120"/>
+              </a:rPr>
+              <a:t/>
+            </a:r>
+            <a:endParaRPr lang="en-US" sz="1600" dirty="0"/>
+          </a:p>
+        </p:txBody>
+      </p:sp>
+      <p:sp>
+        <p:nvSpPr>
+          <p:cNvPr id="8" name="Text 5"/>
+          <p:cNvSpPr/>
+          <p:nvPr/>
+        </p:nvSpPr>
+        <p:spPr>
+          <a:xfrm>
+            <a:off x="0" y="6236208"/>
+            <a:ext cx="12188952" cy="320040"/>
+          </a:xfrm>
+          <a:prstGeom prst="rect">
+            <a:avLst/>
+          </a:prstGeom>
+          <a:noFill/>
+          <a:ln/>
+        </p:spPr>
+        <p:txBody>
+          <a:bodyPr wrap="square" lIns="0" tIns="0" rIns="0" bIns="0" rtlCol="0" anchor="ctr"/>
+          <a:lstStyle/>
+          <a:p>
+            <a:pPr algn="ctr" indent="0" marL="0">
+              <a:buNone/>
+            </a:pPr>
+            <a:r>
+              <a:rPr lang="en-US" sz="1200" dirty="0">
+                <a:solidFill>
+                  <a:srgbClr val="6B7D71"/>
+                </a:solidFill>
+                <a:latin typeface="Courier New" pitchFamily="34" charset="0"/>
+                <a:ea typeface="Courier New" pitchFamily="34" charset="-122"/>
+                <a:cs typeface="Courier New" pitchFamily="34" charset="-120"/>
+              </a:rPr>
+              <a:t>Research prototype · Apache-2.0 · v0.6.0</a:t>
             </a:r>
             <a:endParaRPr lang="en-US" sz="1200" dirty="0"/>
           </a:p>
@@ -3669,6 +10456,10 @@
             </a:outerShdw>
           </a:effectLst>
         </p:spPr>
+        <p:txBody>
+          <a:bodyPr/>
+          <a:p/>
+        </p:txBody>
       </p:sp>
       <p:sp>
         <p:nvSpPr>
@@ -3696,6 +10487,10 @@
             <a:prstDash val="solid"/>
           </a:ln>
         </p:spPr>
+        <p:txBody>
+          <a:bodyPr/>
+          <a:p/>
+        </p:txBody>
       </p:sp>
       <p:pic>
         <p:nvPicPr>
@@ -3835,6 +10630,10 @@
             </a:outerShdw>
           </a:effectLst>
         </p:spPr>
+        <p:txBody>
+          <a:bodyPr/>
+          <a:p/>
+        </p:txBody>
       </p:sp>
       <p:sp>
         <p:nvSpPr>
@@ -3862,6 +10661,10 @@
             <a:prstDash val="solid"/>
           </a:ln>
         </p:spPr>
+        <p:txBody>
+          <a:bodyPr/>
+          <a:p/>
+        </p:txBody>
       </p:sp>
       <p:pic>
         <p:nvPicPr>
@@ -4001,6 +10804,10 @@
             </a:outerShdw>
           </a:effectLst>
         </p:spPr>
+        <p:txBody>
+          <a:bodyPr/>
+          <a:p/>
+        </p:txBody>
       </p:sp>
       <p:sp>
         <p:nvSpPr>
@@ -4028,6 +10835,10 @@
             <a:prstDash val="solid"/>
           </a:ln>
         </p:spPr>
+        <p:txBody>
+          <a:bodyPr/>
+          <a:p/>
+        </p:txBody>
       </p:sp>
       <p:pic>
         <p:nvPicPr>
@@ -4167,6 +10978,10 @@
             </a:outerShdw>
           </a:effectLst>
         </p:spPr>
+        <p:txBody>
+          <a:bodyPr/>
+          <a:p/>
+        </p:txBody>
       </p:sp>
       <p:sp>
         <p:nvSpPr>
@@ -4194,6 +11009,10 @@
             <a:prstDash val="solid"/>
           </a:ln>
         </p:spPr>
+        <p:txBody>
+          <a:bodyPr/>
+          <a:p/>
+        </p:txBody>
       </p:sp>
       <p:pic>
         <p:nvPicPr>
@@ -4549,6 +11368,10 @@
             </a:outerShdw>
           </a:effectLst>
         </p:spPr>
+        <p:txBody>
+          <a:bodyPr/>
+          <a:p/>
+        </p:txBody>
       </p:sp>
       <p:pic>
         <p:nvPicPr>
@@ -5051,6 +11874,10 @@
             </a:outerShdw>
           </a:effectLst>
         </p:spPr>
+        <p:txBody>
+          <a:bodyPr/>
+          <a:p/>
+        </p:txBody>
       </p:sp>
       <p:pic>
         <p:nvPicPr>
@@ -5754,6 +12581,10 @@
             </a:outerShdw>
           </a:effectLst>
         </p:spPr>
+        <p:txBody>
+          <a:bodyPr/>
+          <a:p/>
+        </p:txBody>
       </p:sp>
       <p:sp>
         <p:nvSpPr>
@@ -5779,6 +12610,10 @@
             <a:prstDash val="solid"/>
           </a:ln>
         </p:spPr>
+        <p:txBody>
+          <a:bodyPr/>
+          <a:p/>
+        </p:txBody>
       </p:sp>
       <p:pic>
         <p:nvPicPr>
@@ -5918,6 +12753,10 @@
             </a:outerShdw>
           </a:effectLst>
         </p:spPr>
+        <p:txBody>
+          <a:bodyPr/>
+          <a:p/>
+        </p:txBody>
       </p:sp>
       <p:sp>
         <p:nvSpPr>
@@ -5943,6 +12782,10 @@
             <a:prstDash val="solid"/>
           </a:ln>
         </p:spPr>
+        <p:txBody>
+          <a:bodyPr/>
+          <a:p/>
+        </p:txBody>
       </p:sp>
       <p:pic>
         <p:nvPicPr>
@@ -6082,6 +12925,10 @@
             </a:outerShdw>
           </a:effectLst>
         </p:spPr>
+        <p:txBody>
+          <a:bodyPr/>
+          <a:p/>
+        </p:txBody>
       </p:sp>
       <p:sp>
         <p:nvSpPr>
@@ -6107,6 +12954,10 @@
             <a:prstDash val="solid"/>
           </a:ln>
         </p:spPr>
+        <p:txBody>
+          <a:bodyPr/>
+          <a:p/>
+        </p:txBody>
       </p:sp>
       <p:pic>
         <p:nvPicPr>
@@ -6462,6 +13313,10 @@
             </a:outerShdw>
           </a:effectLst>
         </p:spPr>
+        <p:txBody>
+          <a:bodyPr/>
+          <a:p/>
+        </p:txBody>
       </p:sp>
       <p:pic>
         <p:nvPicPr>
@@ -6604,6 +13459,10 @@
             </a:outerShdw>
           </a:effectLst>
         </p:spPr>
+        <p:txBody>
+          <a:bodyPr/>
+          <a:p/>
+        </p:txBody>
       </p:sp>
       <p:sp>
         <p:nvSpPr>
@@ -6855,6 +13714,10 @@
             <a:prstDash val="solid"/>
           </a:ln>
         </p:spPr>
+        <p:txBody>
+          <a:bodyPr/>
+          <a:p/>
+        </p:txBody>
       </p:sp>
       <p:sp>
         <p:nvSpPr>
@@ -7147,6 +14010,10 @@
             </a:outerShdw>
           </a:effectLst>
         </p:spPr>
+        <p:txBody>
+          <a:bodyPr/>
+          <a:p/>
+        </p:txBody>
       </p:sp>
       <p:sp>
         <p:nvSpPr>
@@ -7174,6 +14041,10 @@
             <a:prstDash val="solid"/>
           </a:ln>
         </p:spPr>
+        <p:txBody>
+          <a:bodyPr/>
+          <a:p/>
+        </p:txBody>
       </p:sp>
       <p:pic>
         <p:nvPicPr>
@@ -7306,6 +14177,10 @@
             <a:prstDash val="solid"/>
           </a:ln>
         </p:spPr>
+        <p:txBody>
+          <a:bodyPr/>
+          <a:p/>
+        </p:txBody>
       </p:sp>
       <p:sp>
         <p:nvSpPr>
@@ -7372,6 +14247,10 @@
             <a:prstDash val="solid"/>
           </a:ln>
         </p:spPr>
+        <p:txBody>
+          <a:bodyPr/>
+          <a:p/>
+        </p:txBody>
       </p:sp>
       <p:sp>
         <p:nvSpPr>
@@ -7438,6 +14317,10 @@
             <a:prstDash val="solid"/>
           </a:ln>
         </p:spPr>
+        <p:txBody>
+          <a:bodyPr/>
+          <a:p/>
+        </p:txBody>
       </p:sp>
       <p:sp>
         <p:nvSpPr>
@@ -7504,6 +14387,10 @@
             <a:prstDash val="solid"/>
           </a:ln>
         </p:spPr>
+        <p:txBody>
+          <a:bodyPr/>
+          <a:p/>
+        </p:txBody>
       </p:sp>
       <p:sp>
         <p:nvSpPr>
@@ -7577,6 +14464,10 @@
             </a:outerShdw>
           </a:effectLst>
         </p:spPr>
+        <p:txBody>
+          <a:bodyPr/>
+          <a:p/>
+        </p:txBody>
       </p:sp>
       <p:sp>
         <p:nvSpPr>
@@ -7604,6 +14495,10 @@
             <a:prstDash val="solid"/>
           </a:ln>
         </p:spPr>
+        <p:txBody>
+          <a:bodyPr/>
+          <a:p/>
+        </p:txBody>
       </p:sp>
       <p:pic>
         <p:nvPicPr>
@@ -7743,6 +14638,10 @@
             </a:outerShdw>
           </a:effectLst>
         </p:spPr>
+        <p:txBody>
+          <a:bodyPr/>
+          <a:p/>
+        </p:txBody>
       </p:sp>
       <p:sp>
         <p:nvSpPr>
@@ -7770,6 +14669,10 @@
             <a:prstDash val="solid"/>
           </a:ln>
         </p:spPr>
+        <p:txBody>
+          <a:bodyPr/>
+          <a:p/>
+        </p:txBody>
       </p:sp>
       <p:pic>
         <p:nvPicPr>
@@ -7902,6 +14805,10 @@
             <a:prstDash val="solid"/>
           </a:ln>
         </p:spPr>
+        <p:txBody>
+          <a:bodyPr/>
+          <a:p/>
+        </p:txBody>
       </p:sp>
       <p:sp>
         <p:nvSpPr>
@@ -7968,6 +14875,10 @@
             <a:prstDash val="solid"/>
           </a:ln>
         </p:spPr>
+        <p:txBody>
+          <a:bodyPr/>
+          <a:p/>
+        </p:txBody>
       </p:sp>
       <p:sp>
         <p:nvSpPr>
@@ -8034,6 +14945,10 @@
             <a:prstDash val="solid"/>
           </a:ln>
         </p:spPr>
+        <p:txBody>
+          <a:bodyPr/>
+          <a:p/>
+        </p:txBody>
       </p:sp>
       <p:sp>
         <p:nvSpPr>
@@ -8100,6 +15015,10 @@
             <a:prstDash val="solid"/>
           </a:ln>
         </p:spPr>
+        <p:txBody>
+          <a:bodyPr/>
+          <a:p/>
+        </p:txBody>
       </p:sp>
       <p:sp>
         <p:nvSpPr>
@@ -8166,6 +15085,10 @@
             <a:prstDash val="solid"/>
           </a:ln>
         </p:spPr>
+        <p:txBody>
+          <a:bodyPr/>
+          <a:p/>
+        </p:txBody>
       </p:sp>
       <p:sp>
         <p:nvSpPr>
@@ -8239,6 +15162,10 @@
             </a:outerShdw>
           </a:effectLst>
         </p:spPr>
+        <p:txBody>
+          <a:bodyPr/>
+          <a:p/>
+        </p:txBody>
       </p:sp>
       <p:sp>
         <p:nvSpPr>
@@ -8628,6 +15555,10 @@
             </a:outerShdw>
           </a:effectLst>
         </p:spPr>
+        <p:txBody>
+          <a:bodyPr/>
+          <a:p/>
+        </p:txBody>
       </p:sp>
       <p:sp>
         <p:nvSpPr>
@@ -8655,6 +15586,10 @@
             <a:prstDash val="solid"/>
           </a:ln>
         </p:spPr>
+        <p:txBody>
+          <a:bodyPr/>
+          <a:p/>
+        </p:txBody>
       </p:sp>
       <p:pic>
         <p:nvPicPr>
@@ -8794,6 +15729,10 @@
             </a:outerShdw>
           </a:effectLst>
         </p:spPr>
+        <p:txBody>
+          <a:bodyPr/>
+          <a:p/>
+        </p:txBody>
       </p:sp>
       <p:sp>
         <p:nvSpPr>
@@ -8821,6 +15760,10 @@
             <a:prstDash val="solid"/>
           </a:ln>
         </p:spPr>
+        <p:txBody>
+          <a:bodyPr/>
+          <a:p/>
+        </p:txBody>
       </p:sp>
       <p:pic>
         <p:nvPicPr>
@@ -8960,6 +15903,10 @@
             </a:outerShdw>
           </a:effectLst>
         </p:spPr>
+        <p:txBody>
+          <a:bodyPr/>
+          <a:p/>
+        </p:txBody>
       </p:sp>
       <p:sp>
         <p:nvSpPr>
@@ -8987,6 +15934,10 @@
             <a:prstDash val="solid"/>
           </a:ln>
         </p:spPr>
+        <p:txBody>
+          <a:bodyPr/>
+          <a:p/>
+        </p:txBody>
       </p:sp>
       <p:pic>
         <p:nvPicPr>
@@ -9342,6 +16293,10 @@
             </a:outerShdw>
           </a:effectLst>
         </p:spPr>
+        <p:txBody>
+          <a:bodyPr/>
+          <a:p/>
+        </p:txBody>
       </p:sp>
       <p:sp>
         <p:nvSpPr>
@@ -9408,6 +16363,10 @@
             <a:prstDash val="solid"/>
           </a:ln>
         </p:spPr>
+        <p:txBody>
+          <a:bodyPr/>
+          <a:p/>
+        </p:txBody>
       </p:sp>
       <p:pic>
         <p:nvPicPr>
@@ -9571,6 +16530,10 @@
             </a:outerShdw>
           </a:effectLst>
         </p:spPr>
+        <p:txBody>
+          <a:bodyPr/>
+          <a:p/>
+        </p:txBody>
       </p:sp>
       <p:sp>
         <p:nvSpPr>
@@ -9637,6 +16600,10 @@
             <a:prstDash val="solid"/>
           </a:ln>
         </p:spPr>
+        <p:txBody>
+          <a:bodyPr/>
+          <a:p/>
+        </p:txBody>
       </p:sp>
       <p:pic>
         <p:nvPicPr>
@@ -9800,6 +16767,10 @@
             </a:outerShdw>
           </a:effectLst>
         </p:spPr>
+        <p:txBody>
+          <a:bodyPr/>
+          <a:p/>
+        </p:txBody>
       </p:sp>
       <p:sp>
         <p:nvSpPr>
@@ -9866,6 +16837,10 @@
             <a:prstDash val="solid"/>
           </a:ln>
         </p:spPr>
+        <p:txBody>
+          <a:bodyPr/>
+          <a:p/>
+        </p:txBody>
       </p:sp>
       <p:pic>
         <p:nvPicPr>
@@ -10029,6 +17004,10 @@
             </a:outerShdw>
           </a:effectLst>
         </p:spPr>
+        <p:txBody>
+          <a:bodyPr/>
+          <a:p/>
+        </p:txBody>
       </p:sp>
       <p:sp>
         <p:nvSpPr>
@@ -10095,6 +17074,10 @@
             <a:prstDash val="solid"/>
           </a:ln>
         </p:spPr>
+        <p:txBody>
+          <a:bodyPr/>
+          <a:p/>
+        </p:txBody>
       </p:sp>
       <p:pic>
         <p:nvPicPr>
@@ -10450,6 +17433,10 @@
             </a:outerShdw>
           </a:effectLst>
         </p:spPr>
+        <p:txBody>
+          <a:bodyPr/>
+          <a:p/>
+        </p:txBody>
       </p:sp>
       <p:sp>
         <p:nvSpPr>
@@ -10477,6 +17464,10 @@
             <a:prstDash val="solid"/>
           </a:ln>
         </p:spPr>
+        <p:txBody>
+          <a:bodyPr/>
+          <a:p/>
+        </p:txBody>
       </p:sp>
       <p:pic>
         <p:nvPicPr>
@@ -10636,6 +17627,10 @@
             </a:outerShdw>
           </a:effectLst>
         </p:spPr>
+        <p:txBody>
+          <a:bodyPr/>
+          <a:p/>
+        </p:txBody>
       </p:sp>
       <p:sp>
         <p:nvSpPr>
@@ -10663,6 +17658,10 @@
             <a:prstDash val="solid"/>
           </a:ln>
         </p:spPr>
+        <p:txBody>
+          <a:bodyPr/>
+          <a:p/>
+        </p:txBody>
       </p:sp>
       <p:pic>
         <p:nvPicPr>
@@ -10822,6 +17821,10 @@
             </a:outerShdw>
           </a:effectLst>
         </p:spPr>
+        <p:txBody>
+          <a:bodyPr/>
+          <a:p/>
+        </p:txBody>
       </p:sp>
       <p:sp>
         <p:nvSpPr>
@@ -10849,6 +17852,10 @@
             <a:prstDash val="solid"/>
           </a:ln>
         </p:spPr>
+        <p:txBody>
+          <a:bodyPr/>
+          <a:p/>
+        </p:txBody>
       </p:sp>
       <p:pic>
         <p:nvPicPr>
@@ -11008,6 +18015,10 @@
             </a:outerShdw>
           </a:effectLst>
         </p:spPr>
+        <p:txBody>
+          <a:bodyPr/>
+          <a:p/>
+        </p:txBody>
       </p:sp>
       <p:sp>
         <p:nvSpPr>
@@ -11035,6 +18046,10 @@
             <a:prstDash val="solid"/>
           </a:ln>
         </p:spPr>
+        <p:txBody>
+          <a:bodyPr/>
+          <a:p/>
+        </p:txBody>
       </p:sp>
       <p:pic>
         <p:nvPicPr>
@@ -11194,6 +18209,10 @@
             </a:outerShdw>
           </a:effectLst>
         </p:spPr>
+        <p:txBody>
+          <a:bodyPr/>
+          <a:p/>
+        </p:txBody>
       </p:sp>
       <p:sp>
         <p:nvSpPr>
@@ -11705,6 +18724,10 @@
             <a:prstDash val="solid"/>
           </a:ln>
         </p:spPr>
+        <p:txBody>
+          <a:bodyPr/>
+          <a:p/>
+        </p:txBody>
       </p:sp>
       <p:sp>
         <p:nvSpPr>
@@ -11732,6 +18755,10 @@
             <a:prstDash val="solid"/>
           </a:ln>
         </p:spPr>
+        <p:txBody>
+          <a:bodyPr/>
+          <a:p/>
+        </p:txBody>
       </p:sp>
       <p:sp>
         <p:nvSpPr>
@@ -11759,6 +18786,10 @@
             <a:prstDash val="solid"/>
           </a:ln>
         </p:spPr>
+        <p:txBody>
+          <a:bodyPr/>
+          <a:p/>
+        </p:txBody>
       </p:sp>
       <p:pic>
         <p:nvPicPr>
@@ -11891,6 +18922,10 @@
             <a:prstDash val="solid"/>
           </a:ln>
         </p:spPr>
+        <p:txBody>
+          <a:bodyPr/>
+          <a:p/>
+        </p:txBody>
       </p:sp>
       <p:sp>
         <p:nvSpPr>
@@ -11918,6 +18953,10 @@
             <a:prstDash val="solid"/>
           </a:ln>
         </p:spPr>
+        <p:txBody>
+          <a:bodyPr/>
+          <a:p/>
+        </p:txBody>
       </p:sp>
       <p:pic>
         <p:nvPicPr>
@@ -12050,6 +19089,10 @@
             <a:prstDash val="solid"/>
           </a:ln>
         </p:spPr>
+        <p:txBody>
+          <a:bodyPr/>
+          <a:p/>
+        </p:txBody>
       </p:sp>
       <p:sp>
         <p:nvSpPr>
@@ -12077,6 +19120,10 @@
             <a:prstDash val="solid"/>
           </a:ln>
         </p:spPr>
+        <p:txBody>
+          <a:bodyPr/>
+          <a:p/>
+        </p:txBody>
       </p:sp>
       <p:pic>
         <p:nvPicPr>
@@ -12209,6 +19256,10 @@
             <a:prstDash val="solid"/>
           </a:ln>
         </p:spPr>
+        <p:txBody>
+          <a:bodyPr/>
+          <a:p/>
+        </p:txBody>
       </p:sp>
       <p:sp>
         <p:nvSpPr>
@@ -12236,6 +19287,10 @@
             <a:prstDash val="solid"/>
           </a:ln>
         </p:spPr>
+        <p:txBody>
+          <a:bodyPr/>
+          <a:p/>
+        </p:txBody>
       </p:sp>
       <p:pic>
         <p:nvPicPr>
@@ -12368,6 +19423,10 @@
             <a:prstDash val="solid"/>
           </a:ln>
         </p:spPr>
+        <p:txBody>
+          <a:bodyPr/>
+          <a:p/>
+        </p:txBody>
       </p:sp>
       <p:sp>
         <p:nvSpPr>
@@ -12395,6 +19454,10 @@
             <a:prstDash val="solid"/>
           </a:ln>
         </p:spPr>
+        <p:txBody>
+          <a:bodyPr/>
+          <a:p/>
+        </p:txBody>
       </p:sp>
       <p:pic>
         <p:nvPicPr>
@@ -12750,6 +19813,10 @@
             </a:outerShdw>
           </a:effectLst>
         </p:spPr>
+        <p:txBody>
+          <a:bodyPr/>
+          <a:p/>
+        </p:txBody>
       </p:sp>
       <p:sp>
         <p:nvSpPr>
@@ -12777,6 +19844,10 @@
             <a:prstDash val="solid"/>
           </a:ln>
         </p:spPr>
+        <p:txBody>
+          <a:bodyPr/>
+          <a:p/>
+        </p:txBody>
       </p:sp>
       <p:pic>
         <p:nvPicPr>
@@ -12916,6 +19987,10 @@
             </a:outerShdw>
           </a:effectLst>
         </p:spPr>
+        <p:txBody>
+          <a:bodyPr/>
+          <a:p/>
+        </p:txBody>
       </p:sp>
       <p:sp>
         <p:nvSpPr>
@@ -12943,6 +20018,10 @@
             <a:prstDash val="solid"/>
           </a:ln>
         </p:spPr>
+        <p:txBody>
+          <a:bodyPr/>
+          <a:p/>
+        </p:txBody>
       </p:sp>
       <p:pic>
         <p:nvPicPr>
@@ -13082,6 +20161,10 @@
             </a:outerShdw>
           </a:effectLst>
         </p:spPr>
+        <p:txBody>
+          <a:bodyPr/>
+          <a:p/>
+        </p:txBody>
       </p:sp>
       <p:sp>
         <p:nvSpPr>
@@ -13109,6 +20192,10 @@
             <a:prstDash val="solid"/>
           </a:ln>
         </p:spPr>
+        <p:txBody>
+          <a:bodyPr/>
+          <a:p/>
+        </p:txBody>
       </p:sp>
       <p:pic>
         <p:nvPicPr>
@@ -13248,6 +20335,10 @@
             </a:outerShdw>
           </a:effectLst>
         </p:spPr>
+        <p:txBody>
+          <a:bodyPr/>
+          <a:p/>
+        </p:txBody>
       </p:sp>
       <p:sp>
         <p:nvSpPr>
@@ -13275,6 +20366,10 @@
             <a:prstDash val="solid"/>
           </a:ln>
         </p:spPr>
+        <p:txBody>
+          <a:bodyPr/>
+          <a:p/>
+        </p:txBody>
       </p:sp>
       <p:pic>
         <p:nvPicPr>
@@ -13414,6 +20509,10 @@
             </a:outerShdw>
           </a:effectLst>
         </p:spPr>
+        <p:txBody>
+          <a:bodyPr/>
+          <a:p/>
+        </p:txBody>
       </p:sp>
       <p:sp>
         <p:nvSpPr>
@@ -13441,6 +20540,10 @@
             <a:prstDash val="solid"/>
           </a:ln>
         </p:spPr>
+        <p:txBody>
+          <a:bodyPr/>
+          <a:p/>
+        </p:txBody>
       </p:sp>
       <p:pic>
         <p:nvPicPr>
@@ -13580,6 +20683,10 @@
             </a:outerShdw>
           </a:effectLst>
         </p:spPr>
+        <p:txBody>
+          <a:bodyPr/>
+          <a:p/>
+        </p:txBody>
       </p:sp>
       <p:sp>
         <p:nvSpPr>
@@ -13607,6 +20714,10 @@
             <a:prstDash val="solid"/>
           </a:ln>
         </p:spPr>
+        <p:txBody>
+          <a:bodyPr/>
+          <a:p/>
+        </p:txBody>
       </p:sp>
       <p:pic>
         <p:nvPicPr>
@@ -14001,6 +21112,10 @@
             </a:outerShdw>
           </a:effectLst>
         </p:spPr>
+        <p:txBody>
+          <a:bodyPr/>
+          <a:p/>
+        </p:txBody>
       </p:sp>
       <p:sp>
         <p:nvSpPr>
@@ -14026,6 +21141,10 @@
             <a:prstDash val="solid"/>
           </a:ln>
         </p:spPr>
+        <p:txBody>
+          <a:bodyPr/>
+          <a:p/>
+        </p:txBody>
       </p:sp>
       <p:pic>
         <p:nvPicPr>
@@ -14084,7 +21203,7 @@
                 <a:ea typeface="Calibri" pitchFamily="34" charset="-122"/>
                 <a:cs typeface="Calibri" pitchFamily="34" charset="-120"/>
               </a:rPr>
-              <a:t>Independent Security Researcher</a:t>
+              <a:t>GMO Cybersecurity by Ierae</a:t>
             </a:r>
             <a:endParaRPr lang="en-US" sz="1800" dirty="0"/>
           </a:p>
@@ -14123,7 +21242,7 @@
                 <a:ea typeface="Calibri" pitchFamily="34" charset="-122"/>
                 <a:cs typeface="Calibri" pitchFamily="34" charset="-120"/>
               </a:rPr>
-              <a:t>Open-source security tool developer</a:t>
+              <a:t>Senior Engineer · Security Researcher</a:t>
             </a:r>
             <a:endParaRPr lang="en-US" sz="1500" dirty="0"/>
           </a:p>
@@ -14155,6 +21274,10 @@
             <a:prstDash val="solid"/>
           </a:ln>
         </p:spPr>
+        <p:txBody>
+          <a:bodyPr/>
+          <a:p/>
+        </p:txBody>
       </p:sp>
       <p:pic>
         <p:nvPicPr>
@@ -14245,6 +21368,10 @@
             <a:prstDash val="solid"/>
           </a:ln>
         </p:spPr>
+        <p:txBody>
+          <a:bodyPr/>
+          <a:p/>
+        </p:txBody>
       </p:sp>
       <p:pic>
         <p:nvPicPr>
@@ -14540,6 +21667,10 @@
             <a:prstDash val="solid"/>
           </a:ln>
         </p:spPr>
+        <p:txBody>
+          <a:bodyPr/>
+          <a:p/>
+        </p:txBody>
       </p:sp>
       <p:sp>
         <p:nvSpPr>
@@ -14606,6 +21737,10 @@
             <a:prstDash val="solid"/>
           </a:ln>
         </p:spPr>
+        <p:txBody>
+          <a:bodyPr/>
+          <a:p/>
+        </p:txBody>
       </p:sp>
       <p:sp>
         <p:nvSpPr>
@@ -14672,6 +21807,10 @@
             <a:prstDash val="solid"/>
           </a:ln>
         </p:spPr>
+        <p:txBody>
+          <a:bodyPr/>
+          <a:p/>
+        </p:txBody>
       </p:sp>
       <p:sp>
         <p:nvSpPr>
@@ -14738,6 +21877,10 @@
             <a:prstDash val="solid"/>
           </a:ln>
         </p:spPr>
+        <p:txBody>
+          <a:bodyPr/>
+          <a:p/>
+        </p:txBody>
       </p:sp>
       <p:sp>
         <p:nvSpPr>
@@ -14804,6 +21947,10 @@
             <a:prstDash val="solid"/>
           </a:ln>
         </p:spPr>
+        <p:txBody>
+          <a:bodyPr/>
+          <a:p/>
+        </p:txBody>
       </p:sp>
       <p:sp>
         <p:nvSpPr>
@@ -14870,6 +22017,10 @@
             <a:prstDash val="solid"/>
           </a:ln>
         </p:spPr>
+        <p:txBody>
+          <a:bodyPr/>
+          <a:p/>
+        </p:txBody>
       </p:sp>
       <p:sp>
         <p:nvSpPr>
@@ -14936,6 +22087,10 @@
             <a:prstDash val="solid"/>
           </a:ln>
         </p:spPr>
+        <p:txBody>
+          <a:bodyPr/>
+          <a:p/>
+        </p:txBody>
       </p:sp>
       <p:sp>
         <p:nvSpPr>
@@ -15225,6 +22380,10 @@
             </a:outerShdw>
           </a:effectLst>
         </p:spPr>
+        <p:txBody>
+          <a:bodyPr/>
+          <a:p/>
+        </p:txBody>
       </p:sp>
       <p:sp>
         <p:nvSpPr>
@@ -15252,6 +22411,10 @@
             <a:prstDash val="solid"/>
           </a:ln>
         </p:spPr>
+        <p:txBody>
+          <a:bodyPr/>
+          <a:p/>
+        </p:txBody>
       </p:sp>
       <p:pic>
         <p:nvPicPr>
@@ -15391,6 +22554,10 @@
             </a:outerShdw>
           </a:effectLst>
         </p:spPr>
+        <p:txBody>
+          <a:bodyPr/>
+          <a:p/>
+        </p:txBody>
       </p:sp>
       <p:sp>
         <p:nvSpPr>
@@ -15418,6 +22585,10 @@
             <a:prstDash val="solid"/>
           </a:ln>
         </p:spPr>
+        <p:txBody>
+          <a:bodyPr/>
+          <a:p/>
+        </p:txBody>
       </p:sp>
       <p:pic>
         <p:nvPicPr>
@@ -15557,6 +22728,10 @@
             </a:outerShdw>
           </a:effectLst>
         </p:spPr>
+        <p:txBody>
+          <a:bodyPr/>
+          <a:p/>
+        </p:txBody>
       </p:sp>
       <p:sp>
         <p:nvSpPr>
@@ -15584,6 +22759,10 @@
             <a:prstDash val="solid"/>
           </a:ln>
         </p:spPr>
+        <p:txBody>
+          <a:bodyPr/>
+          <a:p/>
+        </p:txBody>
       </p:sp>
       <p:pic>
         <p:nvPicPr>
@@ -15723,6 +22902,10 @@
             </a:outerShdw>
           </a:effectLst>
         </p:spPr>
+        <p:txBody>
+          <a:bodyPr/>
+          <a:p/>
+        </p:txBody>
       </p:sp>
       <p:sp>
         <p:nvSpPr>
@@ -15750,6 +22933,10 @@
             <a:prstDash val="solid"/>
           </a:ln>
         </p:spPr>
+        <p:txBody>
+          <a:bodyPr/>
+          <a:p/>
+        </p:txBody>
       </p:sp>
       <p:pic>
         <p:nvPicPr>
@@ -15889,6 +23076,10 @@
             </a:outerShdw>
           </a:effectLst>
         </p:spPr>
+        <p:txBody>
+          <a:bodyPr/>
+          <a:p/>
+        </p:txBody>
       </p:sp>
       <p:sp>
         <p:nvSpPr>
@@ -15916,6 +23107,10 @@
             <a:prstDash val="solid"/>
           </a:ln>
         </p:spPr>
+        <p:txBody>
+          <a:bodyPr/>
+          <a:p/>
+        </p:txBody>
       </p:sp>
       <p:pic>
         <p:nvPicPr>
@@ -16055,6 +23250,10 @@
             </a:outerShdw>
           </a:effectLst>
         </p:spPr>
+        <p:txBody>
+          <a:bodyPr/>
+          <a:p/>
+        </p:txBody>
       </p:sp>
       <p:sp>
         <p:nvSpPr>
@@ -16082,6 +23281,10 @@
             <a:prstDash val="solid"/>
           </a:ln>
         </p:spPr>
+        <p:txBody>
+          <a:bodyPr/>
+          <a:p/>
+        </p:txBody>
       </p:sp>
       <p:pic>
         <p:nvPicPr>
@@ -16221,6 +23424,10 @@
             </a:outerShdw>
           </a:effectLst>
         </p:spPr>
+        <p:txBody>
+          <a:bodyPr/>
+          <a:p/>
+        </p:txBody>
       </p:sp>
       <p:sp>
         <p:nvSpPr>
@@ -16248,6 +23455,10 @@
             <a:prstDash val="solid"/>
           </a:ln>
         </p:spPr>
+        <p:txBody>
+          <a:bodyPr/>
+          <a:p/>
+        </p:txBody>
       </p:sp>
       <p:pic>
         <p:nvPicPr>
@@ -16387,6 +23598,10 @@
             </a:outerShdw>
           </a:effectLst>
         </p:spPr>
+        <p:txBody>
+          <a:bodyPr/>
+          <a:p/>
+        </p:txBody>
       </p:sp>
       <p:sp>
         <p:nvSpPr>
@@ -16414,6 +23629,10 @@
             <a:prstDash val="solid"/>
           </a:ln>
         </p:spPr>
+        <p:txBody>
+          <a:bodyPr/>
+          <a:p/>
+        </p:txBody>
       </p:sp>
       <p:pic>
         <p:nvPicPr>
@@ -16769,6 +23988,10 @@
             </a:outerShdw>
           </a:effectLst>
         </p:spPr>
+        <p:txBody>
+          <a:bodyPr/>
+          <a:p/>
+        </p:txBody>
       </p:sp>
       <p:pic>
         <p:nvPicPr>
@@ -16969,6 +24192,10 @@
             </a:outerShdw>
           </a:effectLst>
         </p:spPr>
+        <p:txBody>
+          <a:bodyPr/>
+          <a:p/>
+        </p:txBody>
       </p:sp>
       <p:pic>
         <p:nvPicPr>
@@ -17448,6 +24675,10 @@
             </a:outerShdw>
           </a:effectLst>
         </p:spPr>
+        <p:txBody>
+          <a:bodyPr/>
+          <a:p/>
+        </p:txBody>
       </p:sp>
       <p:sp>
         <p:nvSpPr>
@@ -17553,6 +24784,10 @@
             <a:prstDash val="solid"/>
           </a:ln>
         </p:spPr>
+        <p:txBody>
+          <a:bodyPr/>
+          <a:p/>
+        </p:txBody>
       </p:sp>
       <p:sp>
         <p:nvSpPr>
@@ -17658,6 +24893,10 @@
             <a:prstDash val="solid"/>
           </a:ln>
         </p:spPr>
+        <p:txBody>
+          <a:bodyPr/>
+          <a:p/>
+        </p:txBody>
       </p:sp>
       <p:sp>
         <p:nvSpPr>
@@ -17763,6 +25002,10 @@
             <a:prstDash val="solid"/>
           </a:ln>
         </p:spPr>
+        <p:txBody>
+          <a:bodyPr/>
+          <a:p/>
+        </p:txBody>
       </p:sp>
       <p:sp>
         <p:nvSpPr>
@@ -17868,6 +25111,10 @@
             <a:prstDash val="solid"/>
           </a:ln>
         </p:spPr>
+        <p:txBody>
+          <a:bodyPr/>
+          <a:p/>
+        </p:txBody>
       </p:sp>
       <p:sp>
         <p:nvSpPr>
@@ -17941,6 +25188,10 @@
             </a:outerShdw>
           </a:effectLst>
         </p:spPr>
+        <p:txBody>
+          <a:bodyPr/>
+          <a:p/>
+        </p:txBody>
       </p:sp>
       <p:pic>
         <p:nvPicPr>
@@ -18667,6 +25918,10 @@
             <a:prstDash val="solid"/>
           </a:ln>
         </p:spPr>
+        <p:txBody>
+          <a:bodyPr/>
+          <a:p/>
+        </p:txBody>
       </p:sp>
       <p:sp>
         <p:nvSpPr>
@@ -18970,6 +26225,10 @@
             <a:prstDash val="solid"/>
           </a:ln>
         </p:spPr>
+        <p:txBody>
+          <a:bodyPr/>
+          <a:p/>
+        </p:txBody>
       </p:sp>
       <p:sp>
         <p:nvSpPr>
@@ -19443,6 +26702,10 @@
             </a:outerShdw>
           </a:effectLst>
         </p:spPr>
+        <p:txBody>
+          <a:bodyPr/>
+          <a:p/>
+        </p:txBody>
       </p:sp>
       <p:sp>
         <p:nvSpPr>
@@ -19649,6 +26912,10 @@
             </a:outerShdw>
           </a:effectLst>
         </p:spPr>
+        <p:txBody>
+          <a:bodyPr/>
+          <a:p/>
+        </p:txBody>
       </p:sp>
       <p:pic>
         <p:nvPicPr>
@@ -19979,6 +27246,10 @@
             </a:outerShdw>
           </a:effectLst>
         </p:spPr>
+        <p:txBody>
+          <a:bodyPr/>
+          <a:p/>
+        </p:txBody>
       </p:sp>
       <p:pic>
         <p:nvPicPr>
@@ -20143,6 +27414,10 @@
             <a:prstDash val="solid"/>
           </a:ln>
         </p:spPr>
+        <p:txBody>
+          <a:bodyPr/>
+          <a:p/>
+        </p:txBody>
       </p:sp>
       <p:sp>
         <p:nvSpPr>
@@ -20170,6 +27445,10 @@
             <a:prstDash val="solid"/>
           </a:ln>
         </p:spPr>
+        <p:txBody>
+          <a:bodyPr/>
+          <a:p/>
+        </p:txBody>
       </p:sp>
       <p:pic>
         <p:nvPicPr>
@@ -20299,6 +27578,10 @@
             <a:prstDash val="solid"/>
           </a:ln>
         </p:spPr>
+        <p:txBody>
+          <a:bodyPr/>
+          <a:p/>
+        </p:txBody>
       </p:sp>
       <p:pic>
         <p:nvPicPr>
@@ -20428,6 +27711,10 @@
             <a:prstDash val="solid"/>
           </a:ln>
         </p:spPr>
+        <p:txBody>
+          <a:bodyPr/>
+          <a:p/>
+        </p:txBody>
       </p:sp>
       <p:pic>
         <p:nvPicPr>
@@ -20564,7 +27851,7 @@
                 <a:ea typeface="Courier New" pitchFamily="34" charset="-122"/>
                 <a:cs typeface="Courier New" pitchFamily="34" charset="-120"/>
               </a:rPr>
-              <a:t>Makoto Sugita · Mr.Rabbit · Independent Security Researcher · Apache-2.0</a:t>
+              <a:t>Makoto Sugita · Mr.Rabbit · GMO Cybersecurity by Ierae · Apache-2.0</a:t>
             </a:r>
             <a:endParaRPr lang="en-US" sz="1200" dirty="0"/>
           </a:p>
@@ -20706,6 +27993,10 @@
             <a:prstDash val="solid"/>
           </a:ln>
         </p:spPr>
+        <p:txBody>
+          <a:bodyPr/>
+          <a:p/>
+        </p:txBody>
       </p:sp>
       <p:sp>
         <p:nvSpPr>
@@ -20772,6 +28063,10 @@
             <a:prstDash val="solid"/>
           </a:ln>
         </p:spPr>
+        <p:txBody>
+          <a:bodyPr/>
+          <a:p/>
+        </p:txBody>
       </p:sp>
       <p:pic>
         <p:nvPicPr>
@@ -20901,6 +28196,10 @@
             <a:prstDash val="solid"/>
           </a:ln>
         </p:spPr>
+        <p:txBody>
+          <a:bodyPr/>
+          <a:p/>
+        </p:txBody>
       </p:sp>
       <p:sp>
         <p:nvSpPr>
@@ -20967,6 +28266,10 @@
             <a:prstDash val="solid"/>
           </a:ln>
         </p:spPr>
+        <p:txBody>
+          <a:bodyPr/>
+          <a:p/>
+        </p:txBody>
       </p:sp>
       <p:pic>
         <p:nvPicPr>
@@ -21096,6 +28399,10 @@
             <a:prstDash val="solid"/>
           </a:ln>
         </p:spPr>
+        <p:txBody>
+          <a:bodyPr/>
+          <a:p/>
+        </p:txBody>
       </p:sp>
       <p:sp>
         <p:nvSpPr>
@@ -21162,6 +28469,10 @@
             <a:prstDash val="solid"/>
           </a:ln>
         </p:spPr>
+        <p:txBody>
+          <a:bodyPr/>
+          <a:p/>
+        </p:txBody>
       </p:sp>
       <p:pic>
         <p:nvPicPr>
@@ -21291,6 +28602,10 @@
             <a:prstDash val="solid"/>
           </a:ln>
         </p:spPr>
+        <p:txBody>
+          <a:bodyPr/>
+          <a:p/>
+        </p:txBody>
       </p:sp>
       <p:sp>
         <p:nvSpPr>
@@ -21357,6 +28672,10 @@
             <a:prstDash val="solid"/>
           </a:ln>
         </p:spPr>
+        <p:txBody>
+          <a:bodyPr/>
+          <a:p/>
+        </p:txBody>
       </p:sp>
       <p:pic>
         <p:nvPicPr>
@@ -21486,6 +28805,10 @@
             <a:prstDash val="solid"/>
           </a:ln>
         </p:spPr>
+        <p:txBody>
+          <a:bodyPr/>
+          <a:p/>
+        </p:txBody>
       </p:sp>
       <p:sp>
         <p:nvSpPr>
@@ -21552,6 +28875,10 @@
             <a:prstDash val="solid"/>
           </a:ln>
         </p:spPr>
+        <p:txBody>
+          <a:bodyPr/>
+          <a:p/>
+        </p:txBody>
       </p:sp>
       <p:pic>
         <p:nvPicPr>
@@ -21681,6 +29008,10 @@
             <a:prstDash val="solid"/>
           </a:ln>
         </p:spPr>
+        <p:txBody>
+          <a:bodyPr/>
+          <a:p/>
+        </p:txBody>
       </p:sp>
       <p:sp>
         <p:nvSpPr>
@@ -21747,6 +29078,10 @@
             <a:prstDash val="solid"/>
           </a:ln>
         </p:spPr>
+        <p:txBody>
+          <a:bodyPr/>
+          <a:p/>
+        </p:txBody>
       </p:sp>
       <p:pic>
         <p:nvPicPr>
@@ -22138,6 +29473,10 @@
             </a:outerShdw>
           </a:effectLst>
         </p:spPr>
+        <p:txBody>
+          <a:bodyPr/>
+          <a:p/>
+        </p:txBody>
       </p:sp>
       <p:sp>
         <p:nvSpPr>
@@ -22165,6 +29504,10 @@
             <a:prstDash val="solid"/>
           </a:ln>
         </p:spPr>
+        <p:txBody>
+          <a:bodyPr/>
+          <a:p/>
+        </p:txBody>
       </p:sp>
       <p:pic>
         <p:nvPicPr>
@@ -22304,6 +29647,10 @@
             </a:outerShdw>
           </a:effectLst>
         </p:spPr>
+        <p:txBody>
+          <a:bodyPr/>
+          <a:p/>
+        </p:txBody>
       </p:sp>
       <p:sp>
         <p:nvSpPr>
@@ -22331,6 +29678,10 @@
             <a:prstDash val="solid"/>
           </a:ln>
         </p:spPr>
+        <p:txBody>
+          <a:bodyPr/>
+          <a:p/>
+        </p:txBody>
       </p:sp>
       <p:pic>
         <p:nvPicPr>
@@ -22470,6 +29821,10 @@
             </a:outerShdw>
           </a:effectLst>
         </p:spPr>
+        <p:txBody>
+          <a:bodyPr/>
+          <a:p/>
+        </p:txBody>
       </p:sp>
       <p:sp>
         <p:nvSpPr>
@@ -22497,6 +29852,10 @@
             <a:prstDash val="solid"/>
           </a:ln>
         </p:spPr>
+        <p:txBody>
+          <a:bodyPr/>
+          <a:p/>
+        </p:txBody>
       </p:sp>
       <p:pic>
         <p:nvPicPr>
@@ -22898,6 +30257,10 @@
             </a:outerShdw>
           </a:effectLst>
         </p:spPr>
+        <p:txBody>
+          <a:bodyPr/>
+          <a:p/>
+        </p:txBody>
       </p:sp>
       <p:sp>
         <p:nvSpPr>
@@ -23085,6 +30448,10 @@
             </a:outerShdw>
           </a:effectLst>
         </p:spPr>
+        <p:txBody>
+          <a:bodyPr/>
+          <a:p/>
+        </p:txBody>
       </p:sp>
       <p:sp>
         <p:nvSpPr>
@@ -23272,6 +30639,10 @@
             </a:outerShdw>
           </a:effectLst>
         </p:spPr>
+        <p:txBody>
+          <a:bodyPr/>
+          <a:p/>
+        </p:txBody>
       </p:sp>
       <p:sp>
         <p:nvSpPr>
@@ -23714,6 +31085,10 @@
             </a:outerShdw>
           </a:effectLst>
         </p:spPr>
+        <p:txBody>
+          <a:bodyPr/>
+          <a:p/>
+        </p:txBody>
       </p:sp>
       <p:pic>
         <p:nvPicPr>
@@ -23917,6 +31292,10 @@
             </a:outerShdw>
           </a:effectLst>
         </p:spPr>
+        <p:txBody>
+          <a:bodyPr/>
+          <a:p/>
+        </p:txBody>
       </p:sp>
       <p:pic>
         <p:nvPicPr>
@@ -24375,6 +31754,10 @@
             </a:outerShdw>
           </a:effectLst>
         </p:spPr>
+        <p:txBody>
+          <a:bodyPr/>
+          <a:p/>
+        </p:txBody>
       </p:sp>
       <p:sp>
         <p:nvSpPr>
@@ -24402,6 +31785,10 @@
             <a:prstDash val="solid"/>
           </a:ln>
         </p:spPr>
+        <p:txBody>
+          <a:bodyPr/>
+          <a:p/>
+        </p:txBody>
       </p:sp>
       <p:pic>
         <p:nvPicPr>
@@ -24584,6 +31971,10 @@
             </a:outerShdw>
           </a:effectLst>
         </p:spPr>
+        <p:txBody>
+          <a:bodyPr/>
+          <a:p/>
+        </p:txBody>
       </p:sp>
       <p:sp>
         <p:nvSpPr>
@@ -24611,6 +32002,10 @@
             <a:prstDash val="solid"/>
           </a:ln>
         </p:spPr>
+        <p:txBody>
+          <a:bodyPr/>
+          <a:p/>
+        </p:txBody>
       </p:sp>
       <p:pic>
         <p:nvPicPr>
@@ -24784,6 +32179,10 @@
             <a:prstDash val="solid"/>
           </a:ln>
         </p:spPr>
+        <p:txBody>
+          <a:bodyPr/>
+          <a:p/>
+        </p:txBody>
       </p:sp>
       <p:pic>
         <p:nvPicPr>
@@ -25058,6 +32457,10 @@
             </a:outerShdw>
           </a:effectLst>
         </p:spPr>
+        <p:txBody>
+          <a:bodyPr/>
+          <a:p/>
+        </p:txBody>
       </p:sp>
       <p:pic>
         <p:nvPicPr>
@@ -25148,6 +32551,10 @@
             <a:prstDash val="solid"/>
           </a:ln>
         </p:spPr>
+        <p:txBody>
+          <a:bodyPr/>
+          <a:p/>
+        </p:txBody>
       </p:sp>
       <p:pic>
         <p:nvPicPr>
@@ -25277,6 +32684,10 @@
             <a:prstDash val="solid"/>
           </a:ln>
         </p:spPr>
+        <p:txBody>
+          <a:bodyPr/>
+          <a:p/>
+        </p:txBody>
       </p:sp>
       <p:pic>
         <p:nvPicPr>
@@ -25406,6 +32817,10 @@
             <a:prstDash val="solid"/>
           </a:ln>
         </p:spPr>
+        <p:txBody>
+          <a:bodyPr/>
+          <a:p/>
+        </p:txBody>
       </p:sp>
       <p:pic>
         <p:nvPicPr>
@@ -25535,6 +32950,10 @@
             <a:prstDash val="solid"/>
           </a:ln>
         </p:spPr>
+        <p:txBody>
+          <a:bodyPr/>
+          <a:p/>
+        </p:txBody>
       </p:sp>
       <p:pic>
         <p:nvPicPr>
@@ -25664,6 +33083,10 @@
             <a:prstDash val="solid"/>
           </a:ln>
         </p:spPr>
+        <p:txBody>
+          <a:bodyPr/>
+          <a:p/>
+        </p:txBody>
       </p:sp>
       <p:pic>
         <p:nvPicPr>
@@ -25800,6 +33223,10 @@
             </a:outerShdw>
           </a:effectLst>
         </p:spPr>
+        <p:txBody>
+          <a:bodyPr/>
+          <a:p/>
+        </p:txBody>
       </p:sp>
       <p:pic>
         <p:nvPicPr>
@@ -26549,6 +33976,10 @@
             </a:outerShdw>
           </a:effectLst>
         </p:spPr>
+        <p:txBody>
+          <a:bodyPr/>
+          <a:p/>
+        </p:txBody>
       </p:sp>
       <p:sp>
         <p:nvSpPr>
@@ -26689,6 +34120,10 @@
             <a:prstDash val="solid"/>
           </a:ln>
         </p:spPr>
+        <p:txBody>
+          <a:bodyPr/>
+          <a:p/>
+        </p:txBody>
       </p:sp>
       <p:sp>
         <p:nvSpPr>
@@ -26829,6 +34264,10 @@
             <a:prstDash val="solid"/>
           </a:ln>
         </p:spPr>
+        <p:txBody>
+          <a:bodyPr/>
+          <a:p/>
+        </p:txBody>
       </p:sp>
       <p:sp>
         <p:nvSpPr>
@@ -26969,6 +34408,10 @@
             <a:prstDash val="solid"/>
           </a:ln>
         </p:spPr>
+        <p:txBody>
+          <a:bodyPr/>
+          <a:p/>
+        </p:txBody>
       </p:sp>
       <p:sp>
         <p:nvSpPr>
@@ -27109,6 +34552,10 @@
             <a:prstDash val="solid"/>
           </a:ln>
         </p:spPr>
+        <p:txBody>
+          <a:bodyPr/>
+          <a:p/>
+        </p:txBody>
       </p:sp>
       <p:sp>
         <p:nvSpPr>
@@ -27249,6 +34696,10 @@
             <a:prstDash val="solid"/>
           </a:ln>
         </p:spPr>
+        <p:txBody>
+          <a:bodyPr/>
+          <a:p/>
+        </p:txBody>
       </p:sp>
       <p:sp>
         <p:nvSpPr>
@@ -27389,6 +34840,10 @@
             <a:prstDash val="solid"/>
           </a:ln>
         </p:spPr>
+        <p:txBody>
+          <a:bodyPr/>
+          <a:p/>
+        </p:txBody>
       </p:sp>
       <p:sp>
         <p:nvSpPr>
@@ -27529,6 +34984,10 @@
             <a:prstDash val="solid"/>
           </a:ln>
         </p:spPr>
+        <p:txBody>
+          <a:bodyPr/>
+          <a:p/>
+        </p:txBody>
       </p:sp>
       <p:sp>
         <p:nvSpPr>

--- a/docs/submissions/Phasmid_DEFCON_DemoLabs.pptx
+++ b/docs/submissions/Phasmid_DEFCON_DemoLabs.pptx
@@ -3809,7 +3809,7 @@
           <a:p>
             <a:r>
               <a:rPr b="0" sz="1700"/>
-              <a:t>[00:30 / 1:00] WHOAMI — 発話 0:40</a:t>
+              <a:t>[00:30 / 1:00] WHOAMI — 発話 0:45</a:t>
             </a:r>
             <a:endParaRPr lang="en-US" dirty="0"/>
           </a:p>
@@ -3870,13 +3870,149 @@
           <a:p>
             <a:r>
               <a:rPr b="0" sz="1700"/>
-              <a:t>Security research, and open-source tools.</a:t>
-            </a:r>
-          </a:p>
-          <a:p>
-            <a:r>
-              <a:rPr b="0" sz="1700"/>
-              <a:t>  セキュリティ </a:t>
+              <a:t>I work in the SOC. Defence, every day.</a:t>
+            </a:r>
+          </a:p>
+          <a:p>
+            <a:r>
+              <a:rPr b="0" sz="1700"/>
+              <a:t>  アイ ワーク イン ザ </a:t>
+            </a:r>
+            <a:r>
+              <a:rPr b="1" sz="1700"/>
+              <a:t>エス オー シー</a:t>
+            </a:r>
+            <a:r>
+              <a:rPr b="0" sz="1700"/>
+              <a:t>。 </a:t>
+            </a:r>
+            <a:r>
+              <a:rPr b="1" sz="1700"/>
+              <a:t>ディフェンス</a:t>
+            </a:r>
+            <a:r>
+              <a:rPr b="0" sz="1700"/>
+              <a:t>、 エヴリ デイ。</a:t>
+            </a:r>
+          </a:p>
+          <a:p>
+            <a:r>
+              <a:rPr b="0" sz="1700"/>
+              <a:t>Before that — a penetration tester. CISSP.</a:t>
+            </a:r>
+          </a:p>
+          <a:p>
+            <a:r>
+              <a:rPr b="0" sz="1700"/>
+              <a:t>  ビフォー ザット — ア </a:t>
+            </a:r>
+            <a:r>
+              <a:rPr b="1" sz="1700"/>
+              <a:t>ペネトレイション テスター</a:t>
+            </a:r>
+            <a:r>
+              <a:rPr b="0" sz="1700"/>
+              <a:t>。 シー アイ エス エス ピー。</a:t>
+            </a:r>
+          </a:p>
+          <a:p>
+            <a:r>
+              <a:rPr b="0" sz="1700"/>
+              <a:t>And before that, in uniform — a Japan Ground Self-Defense Force officer, in a cyber unit.</a:t>
+            </a:r>
+          </a:p>
+          <a:p>
+            <a:r>
+              <a:rPr b="0" sz="1700"/>
+              <a:t>  アンド ビフォー ザット、 イン </a:t>
+            </a:r>
+            <a:r>
+              <a:rPr b="1" sz="1700"/>
+              <a:t>ユニフォーム</a:t>
+            </a:r>
+            <a:r>
+              <a:rPr b="0" sz="1700"/>
+              <a:t> — ア ジャパン グラウンド セルフディフェンス フォース </a:t>
+            </a:r>
+            <a:r>
+              <a:rPr b="1" sz="1700"/>
+              <a:t>オフィサー</a:t>
+            </a:r>
+            <a:r>
+              <a:rPr b="0" sz="1700"/>
+              <a:t>、 イン ア サイバー ユニット。</a:t>
+            </a:r>
+          </a:p>
+          <a:p>
+            <a:r>
+              <a:rPr b="0" sz="1700"/>
+              <a:t>Offensive work taught me the weak link is the person, not the algorithm.</a:t>
+            </a:r>
+          </a:p>
+          <a:p>
+            <a:r>
+              <a:rPr b="0" sz="1700"/>
+              <a:t>  オフェンシヴ ワーク トート ミー ザ ウィーク リンク イズ ザ </a:t>
+            </a:r>
+            <a:r>
+              <a:rPr b="1" sz="1700"/>
+              <a:t>パーソン</a:t>
+            </a:r>
+            <a:r>
+              <a:rPr b="0" sz="1700"/>
+              <a:t>、 ナット ジ アルゴリズム。</a:t>
+            </a:r>
+          </a:p>
+          <a:p>
+            <a:r>
+              <a:rPr b="0" sz="1700"/>
+              <a:t>So I turn offensive experience into defensive tools.</a:t>
+            </a:r>
+          </a:p>
+          <a:p>
+            <a:r>
+              <a:rPr b="0" sz="1700"/>
+              <a:t>  ソウ アイ ターン オフェンシヴ エクスピアリエンス イントゥ </a:t>
+            </a:r>
+            <a:r>
+              <a:rPr b="1" sz="1700"/>
+              <a:t>ディフェンシヴ ツールズ</a:t>
+            </a:r>
+            <a:r>
+              <a:rPr b="0" sz="1700"/>
+              <a:t>。</a:t>
+            </a:r>
+          </a:p>
+          <a:p>
+            <a:r>
+              <a:rPr b="0" sz="1700"/>
+              <a:t>Deception. Delay. Coercion-aware design.</a:t>
+            </a:r>
+          </a:p>
+          <a:p>
+            <a:r>
+              <a:rPr b="0" sz="1700"/>
+              <a:t>  ディセプション。 ディレイ。 </a:t>
+            </a:r>
+            <a:r>
+              <a:rPr b="1" sz="1700"/>
+              <a:t>コアージョン アウェア デザイン</a:t>
+            </a:r>
+            <a:r>
+              <a:rPr b="0" sz="1700"/>
+              <a:t>。</a:t>
+            </a:r>
+          </a:p>
+          <a:p>
+            <a:r>
+              <a:rPr b="0" sz="1700"/>
+              <a:t>Alongside that — security research, and open-source tools.</a:t>
+            </a:r>
+          </a:p>
+          <a:p>
+            <a:r>
+              <a:rPr b="0" sz="1700"/>
+              <a:t>  アロングサイド ザット — セキュリティ </a:t>
             </a:r>
             <a:r>
               <a:rPr b="1" sz="1700"/>
@@ -3889,114 +4025,6 @@
             <a:r>
               <a:rPr b="1" sz="1700"/>
               <a:t>オープンソース ツールズ</a:t>
-            </a:r>
-            <a:r>
-              <a:rPr b="0" sz="1700"/>
-              <a:t>。</a:t>
-            </a:r>
-          </a:p>
-          <a:p>
-            <a:r>
-              <a:rPr b="0" sz="1700"/>
-              <a:t>Penetration tester by trade. CISSP.</a:t>
-            </a:r>
-          </a:p>
-          <a:p>
-            <a:r>
-              <a:rPr b="0" sz="1700"/>
-              <a:t>  ペネトレイション テスター バイ </a:t>
-            </a:r>
-            <a:r>
-              <a:rPr b="1" sz="1700"/>
-              <a:t>トレイド</a:t>
-            </a:r>
-            <a:r>
-              <a:rPr b="0" sz="1700"/>
-              <a:t>。 シー アイ エス エス ピー。</a:t>
-            </a:r>
-          </a:p>
-          <a:p>
-            <a:r>
-              <a:rPr b="0" sz="1700"/>
-              <a:t>And before that, I was in uniform — a Japan Ground Self-Defense Force officer, in a cyber unit.</a:t>
-            </a:r>
-          </a:p>
-          <a:p>
-            <a:r>
-              <a:rPr b="0" sz="1700"/>
-              <a:t>  アンド ビフォー ザット、 アイ ワズ イン </a:t>
-            </a:r>
-            <a:r>
-              <a:rPr b="1" sz="1700"/>
-              <a:t>ユニフォーム</a:t>
-            </a:r>
-            <a:r>
-              <a:rPr b="0" sz="1700"/>
-              <a:t> — ア ジャパン グラウンド セルフディフェンス フォース </a:t>
-            </a:r>
-            <a:r>
-              <a:rPr b="1" sz="1700"/>
-              <a:t>オフィサー</a:t>
-            </a:r>
-            <a:r>
-              <a:rPr b="0" sz="1700"/>
-              <a:t>、 イン ア サイバー ユニット。</a:t>
-            </a:r>
-          </a:p>
-          <a:p>
-            <a:r>
-              <a:rPr b="0" sz="1700"/>
-              <a:t>Offensive work taught me the weak link is the person, not the algorithm.</a:t>
-            </a:r>
-          </a:p>
-          <a:p>
-            <a:r>
-              <a:rPr b="0" sz="1700"/>
-              <a:t>  オフェンシヴ ワーク トート ミー ザ ウィーク リンク イズ ザ </a:t>
-            </a:r>
-            <a:r>
-              <a:rPr b="1" sz="1700"/>
-              <a:t>パーソン</a:t>
-            </a:r>
-            <a:r>
-              <a:rPr b="0" sz="1700"/>
-              <a:t>、 ナット ジ アルゴリズム。</a:t>
-            </a:r>
-          </a:p>
-          <a:p>
-            <a:r>
-              <a:rPr b="0" sz="1700"/>
-              <a:t>So I turn offensive experience into defensive tools.</a:t>
-            </a:r>
-          </a:p>
-          <a:p>
-            <a:r>
-              <a:rPr b="0" sz="1700"/>
-              <a:t>  ソウ アイ ターン オフェンシヴ エクスピアリエンス イントゥ </a:t>
-            </a:r>
-            <a:r>
-              <a:rPr b="1" sz="1700"/>
-              <a:t>ディフェンシヴ ツールズ</a:t>
-            </a:r>
-            <a:r>
-              <a:rPr b="0" sz="1700"/>
-              <a:t>。</a:t>
-            </a:r>
-          </a:p>
-          <a:p>
-            <a:r>
-              <a:rPr b="0" sz="1700"/>
-              <a:t>Deception. Delay. Coercion-aware design.</a:t>
-            </a:r>
-          </a:p>
-          <a:p>
-            <a:r>
-              <a:rPr b="0" sz="1700"/>
-              <a:t>  ディセプション。 ディレイ。 </a:t>
-            </a:r>
-            <a:r>
-              <a:rPr b="1" sz="1700"/>
-              <a:t>コアージョン アウェア デザイン</a:t>
             </a:r>
             <a:r>
               <a:rPr b="0" sz="1700"/>
@@ -21093,7 +21121,7 @@
                 <a:ea typeface="Calibri" pitchFamily="34" charset="-122"/>
                 <a:cs typeface="Calibri" pitchFamily="34" charset="-120"/>
               </a:rPr>
-              <a:t>Senior Engineer · Security Researcher</a:t>
+              <a:t>Senior Engineer, SOC · Security Researcher</a:t>
             </a:r>
             <a:endParaRPr lang="en-US" sz="1500" dirty="0"/>
           </a:p>
@@ -21418,7 +21446,7 @@
                 <a:ea typeface="Calibri" pitchFamily="34" charset="-122"/>
                 <a:cs typeface="Calibri" pitchFamily="34" charset="-120"/>
               </a:rPr>
-              <a:t>Penetration tester background · CISSP</a:t>
+              <a:t>Former penetration tester · CISSP</a:t>
             </a:r>
             <a:endParaRPr lang="en-US" sz="1800" dirty="0"/>
           </a:p>

--- a/docs/submissions/Phasmid_DEFCON_DemoLabs.pptx
+++ b/docs/submissions/Phasmid_DEFCON_DemoLabs.pptx
@@ -3842,7 +3842,7 @@
           <a:p>
             <a:r>
               <a:rPr b="0" sz="1700"/>
-              <a:t>I’m a senior engineer at GMO Cybersecurity by Ierae, in Tokyo.</a:t>
+              <a:t>I’m a senior engineer at GMO Cybersecurity by Ierae.</a:t>
             </a:r>
           </a:p>
           <a:p>
@@ -3864,13 +3864,13 @@
             </a:r>
             <a:r>
               <a:rPr b="0" sz="1700"/>
-              <a:t>、 イン トウキョウ。</a:t>
-            </a:r>
-          </a:p>
-          <a:p>
-            <a:r>
-              <a:rPr b="0" sz="1700"/>
-              <a:t>I work in the SOC. Defence, every day.</a:t>
+              <a:t>。</a:t>
+            </a:r>
+          </a:p>
+          <a:p>
+            <a:r>
+              <a:rPr b="0" sz="1700"/>
+              <a:t>I work in the SOC. Defense, every day.</a:t>
             </a:r>
           </a:p>
           <a:p>
@@ -4029,34 +4029,6 @@
             <a:r>
               <a:rPr b="0" sz="1700"/>
               <a:t>。</a:t>
-            </a:r>
-          </a:p>
-          <a:p>
-            <a:r>
-              <a:rPr b="0" sz="1700"/>
-              <a:t>You may know my other work — Azazel, and the PAKURI family.</a:t>
-            </a:r>
-          </a:p>
-          <a:p>
-            <a:r>
-              <a:rPr b="0" sz="1700"/>
-              <a:t>  ユー メイ ノウ マイ アザー ワーク — </a:t>
-            </a:r>
-            <a:r>
-              <a:rPr b="1" sz="1700"/>
-              <a:t>アザゼル</a:t>
-            </a:r>
-            <a:r>
-              <a:rPr b="0" sz="1700"/>
-              <a:t>、 アンド ザ </a:t>
-            </a:r>
-            <a:r>
-              <a:rPr b="1" sz="1700"/>
-              <a:t>パクリ</a:t>
-            </a:r>
-            <a:r>
-              <a:rPr b="0" sz="1700"/>
-              <a:t> ファミリー。</a:t>
             </a:r>
           </a:p>
           <a:p>
@@ -5085,7 +5057,7 @@
           <a:p>
             <a:r>
               <a:rPr b="0" sz="1700"/>
-              <a:t>  オーライト — </a:t>
+              <a:t>  オールライト — </a:t>
             </a:r>
             <a:r>
               <a:rPr b="1" sz="1700"/>
@@ -5105,7 +5077,7 @@
           <a:p>
             <a:r>
               <a:rPr b="0" sz="1200"/>
-              <a:t>JA: 呼吸を整え実機に向き直る。プロジェクタ入力を TUI へ切替。バックアップ録画の頭出しを確認。以降の切替は Step 1→2（TUI→ブラウザ）と Step 4→5（ブラウザ→TUI）の1往復だけ。</a:t>
+              <a:t>JA: 呼吸を整え実機に向き直る。スペースをターミナル（TUI）へ切替。バックアップ録画の頭出しを確認。以降の切替は SCENE 1→2 の片道1回だけで、TUI には戻らない。</a:t>
             </a:r>
           </a:p>
         </p:txBody>
@@ -5192,7 +5164,7 @@
           <a:p>
             <a:r>
               <a:rPr b="0" sz="1700"/>
-              <a:t>[19:20 / ~8:05] LIVE DEMO  ★中心（9手＋任意1・TUI+WebUI・切替1往復）</a:t>
+              <a:t>[19:20 / ~8:30] LIVE DEMO  ★中心（12シーン・画面切替は片道1回）</a:t>
             </a:r>
           </a:p>
           <a:p>
@@ -5203,24 +5175,24 @@
           </a:p>
           <a:p>
             <a:r>
-              <a:rPr b="0" sz="1700"/>
+              <a:rPr b="0" sz="1200"/>
               <a:t>── 前置き（手を動かしながら）</a:t>
             </a:r>
           </a:p>
           <a:p>
             <a:r>
               <a:rPr b="0" sz="1700"/>
-              <a:t>“Here’s what you’re about to see.</a:t>
-            </a:r>
-          </a:p>
-          <a:p>
-            <a:r>
-              <a:rPr b="0" sz="1700"/>
-              <a:t>  ヒアズ ワット ユア アバウト トゥ </a:t>
-            </a:r>
-            <a:r>
-              <a:rPr b="1" sz="1700"/>
-              <a:t>シー</a:t>
+              <a:t>“This is the real system.</a:t>
+            </a:r>
+          </a:p>
+          <a:p>
+            <a:r>
+              <a:rPr b="0" sz="1700"/>
+              <a:t>  ディス イズ ザ </a:t>
+            </a:r>
+            <a:r>
+              <a:rPr b="1" sz="1700"/>
+              <a:t>リアル システム</a:t>
             </a:r>
             <a:r>
               <a:rPr b="0" sz="1700"/>
@@ -5230,65 +5202,145 @@
           <a:p>
             <a:r>
               <a:rPr b="0" sz="1700"/>
-              <a:t>I’ll create one container on the device.</a:t>
-            </a:r>
-          </a:p>
-          <a:p>
-            <a:r>
-              <a:rPr b="0" sz="1700"/>
-              <a:t>  アイル クリエイト </a:t>
-            </a:r>
-            <a:r>
-              <a:rPr b="1" sz="1700"/>
-              <a:t>ワン コンテナ</a:t>
-            </a:r>
-            <a:r>
-              <a:rPr b="0" sz="1700"/>
-              <a:t> オン ザ デバイス。</a:t>
-            </a:r>
-          </a:p>
-          <a:p>
-            <a:r>
-              <a:rPr b="0" sz="1700"/>
-              <a:t>Then, in the local web interface, I’ll put two different files into it.</a:t>
-            </a:r>
-          </a:p>
-          <a:p>
-            <a:r>
-              <a:rPr b="0" sz="1700"/>
-              <a:t>  ゼン、 イン ザ ローカル ウェブ インターフェイス、 アイル プット </a:t>
-            </a:r>
-            <a:r>
-              <a:rPr b="1" sz="1700"/>
-              <a:t>トゥー ディファレント ファイルズ</a:t>
-            </a:r>
-            <a:r>
-              <a:rPr b="0" sz="1700"/>
-              <a:t> イントゥ イット。</a:t>
-            </a:r>
-          </a:p>
-          <a:p>
-            <a:r>
-              <a:rPr b="0" sz="1700"/>
-              <a:t>Each one behind its own password, and its own everyday object.</a:t>
-            </a:r>
-          </a:p>
-          <a:p>
-            <a:r>
-              <a:rPr b="0" sz="1700"/>
-              <a:t>  イーチ ワン ビハインド イツ </a:t>
-            </a:r>
-            <a:r>
-              <a:rPr b="1" sz="1700"/>
-              <a:t>オウン パスワード</a:t>
-            </a:r>
-            <a:r>
-              <a:rPr b="0" sz="1700"/>
-              <a:t>、 アンド イツ </a:t>
-            </a:r>
-            <a:r>
-              <a:rPr b="1" sz="1700"/>
-              <a:t>オウン エヴリデイ オブジェクト</a:t>
+              <a:t>One file on disk.</a:t>
+            </a:r>
+          </a:p>
+          <a:p>
+            <a:r>
+              <a:rPr b="0" sz="1700"/>
+              <a:t>  </a:t>
+            </a:r>
+            <a:r>
+              <a:rPr b="1" sz="1700"/>
+              <a:t>ワン ファイル</a:t>
+            </a:r>
+            <a:r>
+              <a:rPr b="0" sz="1700"/>
+              <a:t> オン ディスク。</a:t>
+            </a:r>
+          </a:p>
+          <a:p>
+            <a:r>
+              <a:rPr b="0" sz="1700"/>
+              <a:t>Two objects, two passwords, two files inside it.</a:t>
+            </a:r>
+          </a:p>
+          <a:p>
+            <a:r>
+              <a:rPr b="0" sz="1700"/>
+              <a:t>  </a:t>
+            </a:r>
+            <a:r>
+              <a:rPr b="1" sz="1700"/>
+              <a:t>トゥー オブジェクツ</a:t>
+            </a:r>
+            <a:r>
+              <a:rPr b="0" sz="1700"/>
+              <a:t>、 </a:t>
+            </a:r>
+            <a:r>
+              <a:rPr b="1" sz="1700"/>
+              <a:t>トゥー パスワーズ</a:t>
+            </a:r>
+            <a:r>
+              <a:rPr b="0" sz="1700"/>
+              <a:t>、 </a:t>
+            </a:r>
+            <a:r>
+              <a:rPr b="1" sz="1700"/>
+              <a:t>トゥー ファイルズ</a:t>
+            </a:r>
+            <a:r>
+              <a:rPr b="0" sz="1700"/>
+              <a:t> インサイド イット。</a:t>
+            </a:r>
+          </a:p>
+          <a:p>
+            <a:r>
+              <a:rPr b="0" sz="1700"/>
+              <a:t>And a password that ends one, instead of opening it.”</a:t>
+            </a:r>
+          </a:p>
+          <a:p>
+            <a:r>
+              <a:rPr b="0" sz="1700"/>
+              <a:t>  アンド ア パスワード ザット </a:t>
+            </a:r>
+            <a:r>
+              <a:rPr b="1" sz="1700"/>
+              <a:t>エンズ</a:t>
+            </a:r>
+            <a:r>
+              <a:rPr b="0" sz="1700"/>
+              <a:t> ワン、 インステッド オヴ </a:t>
+            </a:r>
+            <a:r>
+              <a:rPr b="1" sz="1700"/>
+              <a:t>オウプニング</a:t>
+            </a:r>
+            <a:r>
+              <a:rPr b="0" sz="1700"/>
+              <a:t> イット。</a:t>
+            </a:r>
+          </a:p>
+          <a:p>
+            <a:r>
+              <a:rPr b="0" sz="1700"/>
+              <a:t/>
+            </a:r>
+          </a:p>
+          <a:p>
+            <a:r>
+              <a:rPr b="0" sz="1200"/>
+              <a:t>── SCENE 0 · The console（0:20）</a:t>
+            </a:r>
+          </a:p>
+          <a:p>
+            <a:r>
+              <a:rPr b="0" sz="1200"/>
+              <a:t>DO: Simple Operator 画面を出したまま提示する。</a:t>
+            </a:r>
+          </a:p>
+          <a:p>
+            <a:r>
+              <a:rPr b="0" sz="1200"/>
+              <a:t>DO: 下部のバー（open / new / guided / expert）を指す。</a:t>
+            </a:r>
+          </a:p>
+          <a:p>
+            <a:r>
+              <a:rPr b="0" sz="1700"/>
+              <a:t>This is the real console.</a:t>
+            </a:r>
+          </a:p>
+          <a:p>
+            <a:r>
+              <a:rPr b="0" sz="1700"/>
+              <a:t>  ディス イズ ザ </a:t>
+            </a:r>
+            <a:r>
+              <a:rPr b="1" sz="1700"/>
+              <a:t>リアル</a:t>
+            </a:r>
+            <a:r>
+              <a:rPr b="0" sz="1700"/>
+              <a:t> コンソール。</a:t>
+            </a:r>
+          </a:p>
+          <a:p>
+            <a:r>
+              <a:rPr b="0" sz="1700"/>
+              <a:t>Local Disclosure Control.</a:t>
+            </a:r>
+          </a:p>
+          <a:p>
+            <a:r>
+              <a:rPr b="0" sz="1700"/>
+              <a:t>  </a:t>
+            </a:r>
+            <a:r>
+              <a:rPr b="1" sz="1700"/>
+              <a:t>ローカル ディスクロージャー コントロール</a:t>
             </a:r>
             <a:r>
               <a:rPr b="0" sz="1700"/>
@@ -5298,13 +5350,161 @@
           <a:p>
             <a:r>
               <a:rPr b="0" sz="1700"/>
-              <a:t>Then I open them. One object, one password — one file.</a:t>
-            </a:r>
-          </a:p>
-          <a:p>
-            <a:r>
-              <a:rPr b="0" sz="1700"/>
-              <a:t>  ゼン アイ オウプン ゼム。 ワン オブジェクト、 ワン パスワード — </a:t>
+              <a:t>The home screen is deliberately small.</a:t>
+            </a:r>
+          </a:p>
+          <a:p>
+            <a:r>
+              <a:rPr b="0" sz="1700"/>
+              <a:t>  ザ ホーム スクリーン イズ ディリバレットリー </a:t>
+            </a:r>
+            <a:r>
+              <a:rPr b="1" sz="1700"/>
+              <a:t>スモール</a:t>
+            </a:r>
+            <a:r>
+              <a:rPr b="0" sz="1700"/>
+              <a:t>。</a:t>
+            </a:r>
+          </a:p>
+          <a:p>
+            <a:r>
+              <a:rPr b="0" sz="1700"/>
+              <a:t>Open. New. Guided. Expert.</a:t>
+            </a:r>
+          </a:p>
+          <a:p>
+            <a:r>
+              <a:rPr b="0" sz="1700"/>
+              <a:t>  オウプン。 ニュー。 ガイデッド。 エクスパート。</a:t>
+            </a:r>
+          </a:p>
+          <a:p>
+            <a:r>
+              <a:rPr b="0" sz="1700"/>
+              <a:t>Under pressure, you do not want a wall of options.</a:t>
+            </a:r>
+          </a:p>
+          <a:p>
+            <a:r>
+              <a:rPr b="0" sz="1700"/>
+              <a:t>  アンダー </a:t>
+            </a:r>
+            <a:r>
+              <a:rPr b="1" sz="1700"/>
+              <a:t>プレッシャー</a:t>
+            </a:r>
+            <a:r>
+              <a:rPr b="0" sz="1700"/>
+              <a:t>、 ユー ドウント ウォント ア </a:t>
+            </a:r>
+            <a:r>
+              <a:rPr b="1" sz="1700"/>
+              <a:t>ウォール オヴ オプションズ</a:t>
+            </a:r>
+            <a:r>
+              <a:rPr b="0" sz="1700"/>
+              <a:t>。</a:t>
+            </a:r>
+          </a:p>
+          <a:p>
+            <a:r>
+              <a:rPr b="0" sz="1700"/>
+              <a:t>The full control set is one key away.</a:t>
+            </a:r>
+          </a:p>
+          <a:p>
+            <a:r>
+              <a:rPr b="0" sz="1700"/>
+              <a:t>  ザ フル コントロール セット イズ </a:t>
+            </a:r>
+            <a:r>
+              <a:rPr b="1" sz="1700"/>
+              <a:t>ワン キー</a:t>
+            </a:r>
+            <a:r>
+              <a:rPr b="0" sz="1700"/>
+              <a:t> アウェイ。</a:t>
+            </a:r>
+          </a:p>
+          <a:p>
+            <a:r>
+              <a:rPr b="0" sz="1700"/>
+              <a:t/>
+            </a:r>
+          </a:p>
+          <a:p>
+            <a:r>
+              <a:rPr b="0" sz="1200"/>
+              <a:t>── SCENE 1 · One file on disk（1:10）</a:t>
+            </a:r>
+          </a:p>
+          <a:p>
+            <a:r>
+              <a:rPr b="0" sz="1200"/>
+              <a:t>DO: TUI: n (New) → vessel-path に demo.vessel → vessel-size を 64M に変更（既定の 512M のまま作らない）</a:t>
+            </a:r>
+          </a:p>
+          <a:p>
+            <a:r>
+              <a:rPr b="0" sz="1200"/>
+              <a:t>DO: → vessel-label（任意）→ create-btn</a:t>
+            </a:r>
+          </a:p>
+          <a:p>
+            <a:r>
+              <a:rPr b="0" sz="1200"/>
+              <a:t>DO: シェルに切り替えて、実物を見せる:</a:t>
+            </a:r>
+          </a:p>
+          <a:p>
+            <a:r>
+              <a:rPr b="0" sz="1200"/>
+              <a:t>DO: ls -lh demo.vessel</a:t>
+            </a:r>
+          </a:p>
+          <a:p>
+            <a:r>
+              <a:rPr b="0" sz="1200"/>
+              <a:t>DO: file demo.vessel</a:t>
+            </a:r>
+          </a:p>
+          <a:p>
+            <a:r>
+              <a:rPr b="0" sz="1200"/>
+              <a:t>DO: xxd demo.vessel | head -5</a:t>
+            </a:r>
+          </a:p>
+          <a:p>
+            <a:r>
+              <a:rPr b="0" sz="1700"/>
+              <a:t>First, I make a vessel.</a:t>
+            </a:r>
+          </a:p>
+          <a:p>
+            <a:r>
+              <a:rPr b="0" sz="1700"/>
+              <a:t>  ファースト、 アイ メイク ア </a:t>
+            </a:r>
+            <a:r>
+              <a:rPr b="1" sz="1700"/>
+              <a:t>ヴェッセル</a:t>
+            </a:r>
+            <a:r>
+              <a:rPr b="0" sz="1700"/>
+              <a:t>。</a:t>
+            </a:r>
+          </a:p>
+          <a:p>
+            <a:r>
+              <a:rPr b="0" sz="1700"/>
+              <a:t>A deniable container. One file.</a:t>
+            </a:r>
+          </a:p>
+          <a:p>
+            <a:r>
+              <a:rPr b="0" sz="1700"/>
+              <a:t>  ア ディナイアブル コンテイナー。 </a:t>
             </a:r>
             <a:r>
               <a:rPr b="1" sz="1700"/>
@@ -5318,13 +5518,1303 @@
           <a:p>
             <a:r>
               <a:rPr b="0" sz="1700"/>
-              <a:t>A different object, a different password — a different file.</a:t>
-            </a:r>
-          </a:p>
-          <a:p>
-            <a:r>
-              <a:rPr b="0" sz="1700"/>
-              <a:t>  ア ディファレント オブジェクト、 ア ディファレント パスワード — ア </a:t>
+              <a:t>Sixty-four megabytes.</a:t>
+            </a:r>
+          </a:p>
+          <a:p>
+            <a:r>
+              <a:rPr b="0" sz="1700"/>
+              <a:t>  </a:t>
+            </a:r>
+            <a:r>
+              <a:rPr b="1" sz="1700"/>
+              <a:t>シクスティフォー</a:t>
+            </a:r>
+            <a:r>
+              <a:rPr b="0" sz="1700"/>
+              <a:t> メガバイツ。</a:t>
+            </a:r>
+          </a:p>
+          <a:p>
+            <a:r>
+              <a:rPr b="0" sz="1700"/>
+              <a:t>Let me show you what that looks like on disk.</a:t>
+            </a:r>
+          </a:p>
+          <a:p>
+            <a:r>
+              <a:rPr b="0" sz="1700"/>
+              <a:t>  レット ミー ショウ ユー ワット ザット </a:t>
+            </a:r>
+            <a:r>
+              <a:rPr b="1" sz="1700"/>
+              <a:t>ルックス ライク</a:t>
+            </a:r>
+            <a:r>
+              <a:rPr b="0" sz="1700"/>
+              <a:t> オン ディスク。</a:t>
+            </a:r>
+          </a:p>
+          <a:p>
+            <a:r>
+              <a:rPr b="0" sz="1700"/>
+              <a:t>ls — one file. That is all there is.</a:t>
+            </a:r>
+          </a:p>
+          <a:p>
+            <a:r>
+              <a:rPr b="0" sz="1700"/>
+              <a:t>  エルエス — </a:t>
+            </a:r>
+            <a:r>
+              <a:rPr b="1" sz="1700"/>
+              <a:t>ワン ファイル</a:t>
+            </a:r>
+            <a:r>
+              <a:rPr b="0" sz="1700"/>
+              <a:t>。 ザッツ </a:t>
+            </a:r>
+            <a:r>
+              <a:rPr b="1" sz="1700"/>
+              <a:t>オール</a:t>
+            </a:r>
+            <a:r>
+              <a:rPr b="0" sz="1700"/>
+              <a:t> ゼア イズ。</a:t>
+            </a:r>
+          </a:p>
+          <a:p>
+            <a:r>
+              <a:rPr b="0" sz="1700"/>
+              <a:t>file — it says 'data'.</a:t>
+            </a:r>
+          </a:p>
+          <a:p>
+            <a:r>
+              <a:rPr b="0" sz="1700"/>
+              <a:t>  ファイル — イット セズ </a:t>
+            </a:r>
+            <a:r>
+              <a:rPr b="1" sz="1700"/>
+              <a:t>データ</a:t>
+            </a:r>
+            <a:r>
+              <a:rPr b="0" sz="1700"/>
+              <a:t>。</a:t>
+            </a:r>
+          </a:p>
+          <a:p>
+            <a:r>
+              <a:rPr b="0" sz="1700"/>
+              <a:t>It has nothing to say, because there is nothing to read.</a:t>
+            </a:r>
+          </a:p>
+          <a:p>
+            <a:r>
+              <a:rPr b="0" sz="1700"/>
+              <a:t>  イット ハズ </a:t>
+            </a:r>
+            <a:r>
+              <a:rPr b="1" sz="1700"/>
+              <a:t>ナッシング</a:t>
+            </a:r>
+            <a:r>
+              <a:rPr b="0" sz="1700"/>
+              <a:t> トゥ セイ、 ビコーズ ゼアズ </a:t>
+            </a:r>
+            <a:r>
+              <a:rPr b="1" sz="1700"/>
+              <a:t>ナッシング</a:t>
+            </a:r>
+            <a:r>
+              <a:rPr b="0" sz="1700"/>
+              <a:t> トゥ リード。</a:t>
+            </a:r>
+          </a:p>
+          <a:p>
+            <a:r>
+              <a:rPr b="0" sz="1700"/>
+              <a:t>No header. No magic bytes. No format at all.</a:t>
+            </a:r>
+          </a:p>
+          <a:p>
+            <a:r>
+              <a:rPr b="0" sz="1700"/>
+              <a:t>  ノウ </a:t>
+            </a:r>
+            <a:r>
+              <a:rPr b="1" sz="1700"/>
+              <a:t>ヘッダー</a:t>
+            </a:r>
+            <a:r>
+              <a:rPr b="0" sz="1700"/>
+              <a:t>。 ノウ </a:t>
+            </a:r>
+            <a:r>
+              <a:rPr b="1" sz="1700"/>
+              <a:t>マジック バイツ</a:t>
+            </a:r>
+            <a:r>
+              <a:rPr b="0" sz="1700"/>
+              <a:t>。 ノウ フォーマット </a:t>
+            </a:r>
+            <a:r>
+              <a:rPr b="1" sz="1700"/>
+              <a:t>アット オール</a:t>
+            </a:r>
+            <a:r>
+              <a:rPr b="0" sz="1700"/>
+              <a:t>。</a:t>
+            </a:r>
+          </a:p>
+          <a:p>
+            <a:r>
+              <a:rPr b="0" sz="1700"/>
+              <a:t>On disk, this is random.</a:t>
+            </a:r>
+          </a:p>
+          <a:p>
+            <a:r>
+              <a:rPr b="0" sz="1700"/>
+              <a:t>  オン ディスク、 ディス イズ </a:t>
+            </a:r>
+            <a:r>
+              <a:rPr b="1" sz="1700"/>
+              <a:t>ランダム</a:t>
+            </a:r>
+            <a:r>
+              <a:rPr b="0" sz="1700"/>
+              <a:t>。</a:t>
+            </a:r>
+          </a:p>
+          <a:p>
+            <a:r>
+              <a:rPr b="0" sz="1700"/>
+              <a:t>Remember the name. Demo dot vessel.</a:t>
+            </a:r>
+          </a:p>
+          <a:p>
+            <a:r>
+              <a:rPr b="0" sz="1700"/>
+              <a:t>  リメンバー ザ </a:t>
+            </a:r>
+            <a:r>
+              <a:rPr b="1" sz="1700"/>
+              <a:t>ネイム</a:t>
+            </a:r>
+            <a:r>
+              <a:rPr b="0" sz="1700"/>
+              <a:t>。 </a:t>
+            </a:r>
+            <a:r>
+              <a:rPr b="1" sz="1700"/>
+              <a:t>デモ ドット ヴェッセル</a:t>
+            </a:r>
+            <a:r>
+              <a:rPr b="0" sz="1700"/>
+              <a:t>。</a:t>
+            </a:r>
+          </a:p>
+          <a:p>
+            <a:r>
+              <a:rPr b="0" sz="1700"/>
+              <a:t>Everything from here comes out of this one file.</a:t>
+            </a:r>
+          </a:p>
+          <a:p>
+            <a:r>
+              <a:rPr b="0" sz="1700"/>
+              <a:t>  エヴリシング フロム ヒア カムズ アウト オヴ </a:t>
+            </a:r>
+            <a:r>
+              <a:rPr b="1" sz="1700"/>
+              <a:t>ディス ワン ファイル</a:t>
+            </a:r>
+            <a:r>
+              <a:rPr b="0" sz="1700"/>
+              <a:t>。</a:t>
+            </a:r>
+          </a:p>
+          <a:p>
+            <a:r>
+              <a:rPr b="0" sz="1700"/>
+              <a:t/>
+            </a:r>
+          </a:p>
+          <a:p>
+            <a:r>
+              <a:rPr b="0" sz="1200"/>
+              <a:t>── ⟶ 画面切替（—）</a:t>
+            </a:r>
+          </a:p>
+          <a:p>
+            <a:r>
+              <a:rPr b="0" sz="1200"/>
+              <a:t>DO: スペースを「スライド／ターミナル／ブラウザ」の3つに固定し、Ctrl+←→ だけで移動する。</a:t>
+            </a:r>
+          </a:p>
+          <a:p>
+            <a:r>
+              <a:rPr b="0" sz="1200"/>
+              <a:t>DO: 集中モード（おやすみモード）を必ずオンにしておく — 通知が投影画面に出る。</a:t>
+            </a:r>
+          </a:p>
+          <a:p>
+            <a:r>
+              <a:rPr b="0" sz="1700"/>
+              <a:t/>
+            </a:r>
+          </a:p>
+          <a:p>
+            <a:r>
+              <a:rPr b="0" sz="1200"/>
+              <a:t>── SCENE 2 · Into the browser（0:50）</a:t>
+            </a:r>
+          </a:p>
+          <a:p>
+            <a:r>
+              <a:rPr b="0" sz="1200"/>
+              <a:t>DO: ブラウザで /unlock を開く（事前にブックマークしておく）</a:t>
+            </a:r>
+          </a:p>
+          <a:p>
+            <a:r>
+              <a:rPr b="0" sz="1200"/>
+              <a:t>DO: store トークンを入力してログイン</a:t>
+            </a:r>
+          </a:p>
+          <a:p>
+            <a:r>
+              <a:rPr b="0" sz="1700"/>
+              <a:t>The device also serves a local web interface.</a:t>
+            </a:r>
+          </a:p>
+          <a:p>
+            <a:r>
+              <a:rPr b="0" sz="1700"/>
+              <a:t>  ザ デバイス オールソウ サーヴズ ア </a:t>
+            </a:r>
+            <a:r>
+              <a:rPr b="1" sz="1700"/>
+              <a:t>ローカル ウェブ インターフェイス</a:t>
+            </a:r>
+            <a:r>
+              <a:rPr b="0" sz="1700"/>
+              <a:t>。</a:t>
+            </a:r>
+          </a:p>
+          <a:p>
+            <a:r>
+              <a:rPr b="0" sz="1700"/>
+              <a:t>I am logging in now.</a:t>
+            </a:r>
+          </a:p>
+          <a:p>
+            <a:r>
+              <a:rPr b="0" sz="1700"/>
+              <a:t>  アイム </a:t>
+            </a:r>
+            <a:r>
+              <a:rPr b="1" sz="1700"/>
+              <a:t>ロギング イン</a:t>
+            </a:r>
+            <a:r>
+              <a:rPr b="0" sz="1700"/>
+              <a:t> ナウ。</a:t>
+            </a:r>
+          </a:p>
+          <a:p>
+            <a:r>
+              <a:rPr b="0" sz="1700"/>
+              <a:t>One word about these tokens, because it matters.</a:t>
+            </a:r>
+          </a:p>
+          <a:p>
+            <a:r>
+              <a:rPr b="0" sz="1700"/>
+              <a:t>  ワン ワード アバウト ジーズ </a:t>
+            </a:r>
+            <a:r>
+              <a:rPr b="1" sz="1700"/>
+              <a:t>トウクンズ</a:t>
+            </a:r>
+            <a:r>
+              <a:rPr b="0" sz="1700"/>
+              <a:t>、 ビコーズ イット </a:t>
+            </a:r>
+            <a:r>
+              <a:rPr b="1" sz="1700"/>
+              <a:t>マターズ</a:t>
+            </a:r>
+            <a:r>
+              <a:rPr b="0" sz="1700"/>
+              <a:t>。</a:t>
+            </a:r>
+          </a:p>
+          <a:p>
+            <a:r>
+              <a:rPr b="0" sz="1700"/>
+              <a:t>In real use, you issue two of them.</a:t>
+            </a:r>
+          </a:p>
+          <a:p>
+            <a:r>
+              <a:rPr b="0" sz="1700"/>
+              <a:t>  イン リアル ユース、 ユー イシュー </a:t>
+            </a:r>
+            <a:r>
+              <a:rPr b="1" sz="1700"/>
+              <a:t>トゥー</a:t>
+            </a:r>
+            <a:r>
+              <a:rPr b="0" sz="1700"/>
+              <a:t> オヴ ゼム。</a:t>
+            </a:r>
+          </a:p>
+          <a:p>
+            <a:r>
+              <a:rPr b="0" sz="1700"/>
+              <a:t>A full-control token — used once, somewhere safe, to set things up.</a:t>
+            </a:r>
+          </a:p>
+          <a:p>
+            <a:r>
+              <a:rPr b="0" sz="1700"/>
+              <a:t>  ア </a:t>
+            </a:r>
+            <a:r>
+              <a:rPr b="1" sz="1700"/>
+              <a:t>フルコントロール</a:t>
+            </a:r>
+            <a:r>
+              <a:rPr b="0" sz="1700"/>
+              <a:t> トウクン — ユーズド </a:t>
+            </a:r>
+            <a:r>
+              <a:rPr b="1" sz="1700"/>
+              <a:t>ワンス</a:t>
+            </a:r>
+            <a:r>
+              <a:rPr b="0" sz="1700"/>
+              <a:t>、 サムウェア </a:t>
+            </a:r>
+            <a:r>
+              <a:rPr b="1" sz="1700"/>
+              <a:t>セイフ</a:t>
+            </a:r>
+            <a:r>
+              <a:rPr b="0" sz="1700"/>
+              <a:t>、 トゥ セット シングス アップ。</a:t>
+            </a:r>
+          </a:p>
+          <a:p>
+            <a:r>
+              <a:rPr b="0" sz="1700"/>
+              <a:t>And a recovery token, that can decrypt and nothing else.</a:t>
+            </a:r>
+          </a:p>
+          <a:p>
+            <a:r>
+              <a:rPr b="0" sz="1700"/>
+              <a:t>  アンド ア </a:t>
+            </a:r>
+            <a:r>
+              <a:rPr b="1" sz="1700"/>
+              <a:t>リカヴァリー</a:t>
+            </a:r>
+            <a:r>
+              <a:rPr b="0" sz="1700"/>
+              <a:t> トウクン、 ザット キャン </a:t>
+            </a:r>
+            <a:r>
+              <a:rPr b="1" sz="1700"/>
+              <a:t>ディクリプト</a:t>
+            </a:r>
+            <a:r>
+              <a:rPr b="0" sz="1700"/>
+              <a:t> アンド </a:t>
+            </a:r>
+            <a:r>
+              <a:rPr b="1" sz="1700"/>
+              <a:t>ナッシング エルス</a:t>
+            </a:r>
+            <a:r>
+              <a:rPr b="0" sz="1700"/>
+              <a:t>。</a:t>
+            </a:r>
+          </a:p>
+          <a:p>
+            <a:r>
+              <a:rPr b="0" sz="1700"/>
+              <a:t>That is the one you carry into a bad situation.</a:t>
+            </a:r>
+          </a:p>
+          <a:p>
+            <a:r>
+              <a:rPr b="0" sz="1700"/>
+              <a:t>  ザッツ ザ ワン ユー </a:t>
+            </a:r>
+            <a:r>
+              <a:rPr b="1" sz="1700"/>
+              <a:t>キャリー</a:t>
+            </a:r>
+            <a:r>
+              <a:rPr b="0" sz="1700"/>
+              <a:t> イントゥ ア </a:t>
+            </a:r>
+            <a:r>
+              <a:rPr b="1" sz="1700"/>
+              <a:t>バッド シチュエイション</a:t>
+            </a:r>
+            <a:r>
+              <a:rPr b="0" sz="1700"/>
+              <a:t>。</a:t>
+            </a:r>
+          </a:p>
+          <a:p>
+            <a:r>
+              <a:rPr b="0" sz="1700"/>
+              <a:t>It cannot reach setup, so it cannot give setup away.</a:t>
+            </a:r>
+          </a:p>
+          <a:p>
+            <a:r>
+              <a:rPr b="0" sz="1700"/>
+              <a:t>  イット キャナット </a:t>
+            </a:r>
+            <a:r>
+              <a:rPr b="1" sz="1700"/>
+              <a:t>リーチ</a:t>
+            </a:r>
+            <a:r>
+              <a:rPr b="0" sz="1700"/>
+              <a:t> セットアップ、 ソウ イット キャナット </a:t>
+            </a:r>
+            <a:r>
+              <a:rPr b="1" sz="1700"/>
+              <a:t>ギヴ イット アウェイ</a:t>
+            </a:r>
+            <a:r>
+              <a:rPr b="0" sz="1700"/>
+              <a:t>。</a:t>
+            </a:r>
+          </a:p>
+          <a:p>
+            <a:r>
+              <a:rPr b="0" sz="1700"/>
+              <a:t>Today I use one token, for time. Just know the split is there.</a:t>
+            </a:r>
+          </a:p>
+          <a:p>
+            <a:r>
+              <a:rPr b="0" sz="1700"/>
+              <a:t>  トゥデイ アイ ユーズ </a:t>
+            </a:r>
+            <a:r>
+              <a:rPr b="1" sz="1700"/>
+              <a:t>ワン</a:t>
+            </a:r>
+            <a:r>
+              <a:rPr b="0" sz="1700"/>
+              <a:t> トウクン、 フォー </a:t>
+            </a:r>
+            <a:r>
+              <a:rPr b="1" sz="1700"/>
+              <a:t>タイム</a:t>
+            </a:r>
+            <a:r>
+              <a:rPr b="0" sz="1700"/>
+              <a:t>。 ジャスト ノウ ザ </a:t>
+            </a:r>
+            <a:r>
+              <a:rPr b="1" sz="1700"/>
+              <a:t>スプリット</a:t>
+            </a:r>
+            <a:r>
+              <a:rPr b="0" sz="1700"/>
+              <a:t> イズ ゼア。</a:t>
+            </a:r>
+          </a:p>
+          <a:p>
+            <a:r>
+              <a:rPr b="0" sz="1700"/>
+              <a:t/>
+            </a:r>
+          </a:p>
+          <a:p>
+            <a:r>
+              <a:rPr b="0" sz="1200"/>
+              <a:t>── SCENE 3 · Slot A — the file you would hand over（0:50）</a:t>
+            </a:r>
+          </a:p>
+          <a:p>
+            <a:r>
+              <a:rPr b="0" sz="1200"/>
+              <a:t>DO: Store 画面 → Step 1「Choose the entry」で Entry 1 を選択</a:t>
+            </a:r>
+          </a:p>
+          <a:p>
+            <a:r>
+              <a:rPr b="0" sz="1200"/>
+              <a:t>DO: → 偽装用ファイルを選択 → パスワードA を入力</a:t>
+            </a:r>
+          </a:p>
+          <a:p>
+            <a:r>
+              <a:rPr b="0" sz="1200"/>
+              <a:t>DO: → 物体を手元に置いたまま「1 · Capture empty scene」</a:t>
+            </a:r>
+          </a:p>
+          <a:p>
+            <a:r>
+              <a:rPr b="0" sz="1200"/>
+              <a:t>DO: → 物体A をかざして「2 · Capture access object」</a:t>
+            </a:r>
+          </a:p>
+          <a:p>
+            <a:r>
+              <a:rPr b="0" sz="1200"/>
+              <a:t>DO: → かざしたまま「Protect file」</a:t>
+            </a:r>
+          </a:p>
+          <a:p>
+            <a:r>
+              <a:rPr b="0" sz="1700"/>
+              <a:t>Slot A. This is the file I would hand over.</a:t>
+            </a:r>
+          </a:p>
+          <a:p>
+            <a:r>
+              <a:rPr b="0" sz="1700"/>
+              <a:t>  </a:t>
+            </a:r>
+            <a:r>
+              <a:rPr b="1" sz="1700"/>
+              <a:t>スロット エイ</a:t>
+            </a:r>
+            <a:r>
+              <a:rPr b="0" sz="1700"/>
+              <a:t>。 ディス イズ ザ ファイル アイ ウッド </a:t>
+            </a:r>
+            <a:r>
+              <a:rPr b="1" sz="1700"/>
+              <a:t>ハンド オーヴァー</a:t>
+            </a:r>
+            <a:r>
+              <a:rPr b="0" sz="1700"/>
+              <a:t>。</a:t>
+            </a:r>
+          </a:p>
+          <a:p>
+            <a:r>
+              <a:rPr b="0" sz="1700"/>
+              <a:t>Now watch the camera. It takes two shots.</a:t>
+            </a:r>
+          </a:p>
+          <a:p>
+            <a:r>
+              <a:rPr b="0" sz="1700"/>
+              <a:t>  ナウ ウォッチ ザ カメラ。 イット テイクス </a:t>
+            </a:r>
+            <a:r>
+              <a:rPr b="1" sz="1700"/>
+              <a:t>トゥー ショッツ</a:t>
+            </a:r>
+            <a:r>
+              <a:rPr b="0" sz="1700"/>
+              <a:t>。</a:t>
+            </a:r>
+          </a:p>
+          <a:p>
+            <a:r>
+              <a:rPr b="0" sz="1700"/>
+              <a:t>First, the empty scene. Just my table.</a:t>
+            </a:r>
+          </a:p>
+          <a:p>
+            <a:r>
+              <a:rPr b="0" sz="1700"/>
+              <a:t>  ファースト、 ジ </a:t>
+            </a:r>
+            <a:r>
+              <a:rPr b="1" sz="1700"/>
+              <a:t>エンプティ シーン</a:t>
+            </a:r>
+            <a:r>
+              <a:rPr b="0" sz="1700"/>
+              <a:t>。 ジャスト マイ </a:t>
+            </a:r>
+            <a:r>
+              <a:rPr b="1" sz="1700"/>
+              <a:t>テイブル</a:t>
+            </a:r>
+            <a:r>
+              <a:rPr b="0" sz="1700"/>
+              <a:t>。</a:t>
+            </a:r>
+          </a:p>
+          <a:p>
+            <a:r>
+              <a:rPr b="0" sz="1700"/>
+              <a:t>Then the same view, with the object in it.</a:t>
+            </a:r>
+          </a:p>
+          <a:p>
+            <a:r>
+              <a:rPr b="0" sz="1700"/>
+              <a:t>  ゼン ザ </a:t>
+            </a:r>
+            <a:r>
+              <a:rPr b="1" sz="1700"/>
+              <a:t>セイム ヴュー</a:t>
+            </a:r>
+            <a:r>
+              <a:rPr b="0" sz="1700"/>
+              <a:t>、 ウィズ ジ </a:t>
+            </a:r>
+            <a:r>
+              <a:rPr b="1" sz="1700"/>
+              <a:t>オブジェクト</a:t>
+            </a:r>
+            <a:r>
+              <a:rPr b="0" sz="1700"/>
+              <a:t> イン イット。</a:t>
+            </a:r>
+          </a:p>
+          <a:p>
+            <a:r>
+              <a:rPr b="0" sz="1700"/>
+              <a:t>The device keeps the difference between them.</a:t>
+            </a:r>
+          </a:p>
+          <a:p>
+            <a:r>
+              <a:rPr b="0" sz="1700"/>
+              <a:t>  ザ デバイス キープス ザ </a:t>
+            </a:r>
+            <a:r>
+              <a:rPr b="1" sz="1700"/>
+              <a:t>ディファレンス</a:t>
+            </a:r>
+            <a:r>
+              <a:rPr b="0" sz="1700"/>
+              <a:t> ビトウィーン ゼム。</a:t>
+            </a:r>
+          </a:p>
+          <a:p>
+            <a:r>
+              <a:rPr b="0" sz="1700"/>
+              <a:t>Not my table. Not the room. The object.</a:t>
+            </a:r>
+          </a:p>
+          <a:p>
+            <a:r>
+              <a:rPr b="0" sz="1700"/>
+              <a:t>  ナット マイ テイブル。 ナット ザ ルーム。 </a:t>
+            </a:r>
+            <a:r>
+              <a:rPr b="1" sz="1700"/>
+              <a:t>ジ オブジェクト</a:t>
+            </a:r>
+            <a:r>
+              <a:rPr b="0" sz="1700"/>
+              <a:t>。</a:t>
+            </a:r>
+          </a:p>
+          <a:p>
+            <a:r>
+              <a:rPr b="0" sz="1700"/>
+              <a:t>And this is a cue, not a key.</a:t>
+            </a:r>
+          </a:p>
+          <a:p>
+            <a:r>
+              <a:rPr b="0" sz="1700"/>
+              <a:t>  アンド ディス イズ ア </a:t>
+            </a:r>
+            <a:r>
+              <a:rPr b="1" sz="1700"/>
+              <a:t>キュー</a:t>
+            </a:r>
+            <a:r>
+              <a:rPr b="0" sz="1700"/>
+              <a:t>、 ナット ア </a:t>
+            </a:r>
+            <a:r>
+              <a:rPr b="1" sz="1700"/>
+              <a:t>キー</a:t>
+            </a:r>
+            <a:r>
+              <a:rPr b="0" sz="1700"/>
+              <a:t>。</a:t>
+            </a:r>
+          </a:p>
+          <a:p>
+            <a:r>
+              <a:rPr b="0" sz="1700"/>
+              <a:t>It does not encrypt anything.</a:t>
+            </a:r>
+          </a:p>
+          <a:p>
+            <a:r>
+              <a:rPr b="0" sz="1700"/>
+              <a:t>  イット ダズ ナット </a:t>
+            </a:r>
+            <a:r>
+              <a:rPr b="1" sz="1700"/>
+              <a:t>エンクリプト</a:t>
+            </a:r>
+            <a:r>
+              <a:rPr b="0" sz="1700"/>
+              <a:t> エニシング。</a:t>
+            </a:r>
+          </a:p>
+          <a:p>
+            <a:r>
+              <a:rPr b="0" sz="1700"/>
+              <a:t>It decides whether the operation may start at all.</a:t>
+            </a:r>
+          </a:p>
+          <a:p>
+            <a:r>
+              <a:rPr b="0" sz="1700"/>
+              <a:t>  イット ディサイズ ウェザー ジ オペレイション </a:t>
+            </a:r>
+            <a:r>
+              <a:rPr b="1" sz="1700"/>
+              <a:t>メイ スタート</a:t>
+            </a:r>
+            <a:r>
+              <a:rPr b="0" sz="1700"/>
+              <a:t> アット オール。</a:t>
+            </a:r>
+          </a:p>
+          <a:p>
+            <a:r>
+              <a:rPr b="0" sz="1700"/>
+              <a:t>A photograph of it opens nothing.</a:t>
+            </a:r>
+          </a:p>
+          <a:p>
+            <a:r>
+              <a:rPr b="0" sz="1700"/>
+              <a:t>  ア </a:t>
+            </a:r>
+            <a:r>
+              <a:rPr b="1" sz="1700"/>
+              <a:t>フォトグラフ</a:t>
+            </a:r>
+            <a:r>
+              <a:rPr b="0" sz="1700"/>
+              <a:t> オヴ イット オウプンズ </a:t>
+            </a:r>
+            <a:r>
+              <a:rPr b="1" sz="1700"/>
+              <a:t>ナッシング</a:t>
+            </a:r>
+            <a:r>
+              <a:rPr b="0" sz="1700"/>
+              <a:t>。</a:t>
+            </a:r>
+          </a:p>
+          <a:p>
+            <a:r>
+              <a:rPr b="0" sz="1700"/>
+              <a:t/>
+            </a:r>
+          </a:p>
+          <a:p>
+            <a:r>
+              <a:rPr b="0" sz="1200"/>
+              <a:t>── SCENE 4 · Slot B — the file you would not（1:00）</a:t>
+            </a:r>
+          </a:p>
+          <a:p>
+            <a:r>
+              <a:rPr b="0" sz="1200"/>
+              <a:t>DO: Step 1 を Entry 2 に切り替え → 真のファイルを選択 → パスワードB を入力</a:t>
+            </a:r>
+          </a:p>
+          <a:p>
+            <a:r>
+              <a:rPr b="0" sz="1200"/>
+              <a:t>DO: → Advanced security options で Clearing password（破壊用）を設定</a:t>
+            </a:r>
+          </a:p>
+          <a:p>
+            <a:r>
+              <a:rPr b="0" sz="1200"/>
+              <a:t>DO: → 物体を外して「1 · Capture empty scene」</a:t>
+            </a:r>
+          </a:p>
+          <a:p>
+            <a:r>
+              <a:rPr b="0" sz="1200"/>
+              <a:t>DO: → 物体B をかざして「2 · Capture access object」</a:t>
+            </a:r>
+          </a:p>
+          <a:p>
+            <a:r>
+              <a:rPr b="0" sz="1200"/>
+              <a:t>DO: → かざしたまま「Protect file」</a:t>
+            </a:r>
+          </a:p>
+          <a:p>
+            <a:r>
+              <a:rPr b="0" sz="1700"/>
+              <a:t>Slot B. Same file on disk. Same demo dot vessel.</a:t>
+            </a:r>
+          </a:p>
+          <a:p>
+            <a:r>
+              <a:rPr b="0" sz="1700"/>
+              <a:t>  </a:t>
+            </a:r>
+            <a:r>
+              <a:rPr b="1" sz="1700"/>
+              <a:t>スロット ビー</a:t>
+            </a:r>
+            <a:r>
+              <a:rPr b="0" sz="1700"/>
+              <a:t>。 セイム ファイル オン ディスク。 セイム </a:t>
+            </a:r>
+            <a:r>
+              <a:rPr b="1" sz="1700"/>
+              <a:t>デモ ドット ヴェッセル</a:t>
+            </a:r>
+            <a:r>
+              <a:rPr b="0" sz="1700"/>
+              <a:t>。</a:t>
+            </a:r>
+          </a:p>
+          <a:p>
+            <a:r>
+              <a:rPr b="0" sz="1700"/>
+              <a:t>A different object. A different password.</a:t>
+            </a:r>
+          </a:p>
+          <a:p>
+            <a:r>
+              <a:rPr b="0" sz="1700"/>
+              <a:t>  ア ディファレント </a:t>
+            </a:r>
+            <a:r>
+              <a:rPr b="1" sz="1700"/>
+              <a:t>オブジェクト</a:t>
+            </a:r>
+            <a:r>
+              <a:rPr b="0" sz="1700"/>
+              <a:t>。 ア ディファレント </a:t>
+            </a:r>
+            <a:r>
+              <a:rPr b="1" sz="1700"/>
+              <a:t>パスワード</a:t>
+            </a:r>
+            <a:r>
+              <a:rPr b="0" sz="1700"/>
+              <a:t>。</a:t>
+            </a:r>
+          </a:p>
+          <a:p>
+            <a:r>
+              <a:rPr b="0" sz="1700"/>
+              <a:t>And one more thing here, which I will use later.</a:t>
+            </a:r>
+          </a:p>
+          <a:p>
+            <a:r>
+              <a:rPr b="0" sz="1700"/>
+              <a:t>  アンド </a:t>
+            </a:r>
+            <a:r>
+              <a:rPr b="1" sz="1700"/>
+              <a:t>ワン モア シング</a:t>
+            </a:r>
+            <a:r>
+              <a:rPr b="0" sz="1700"/>
+              <a:t> ヒア、 ウィッチ アイル </a:t>
+            </a:r>
+            <a:r>
+              <a:rPr b="1" sz="1700"/>
+              <a:t>ユーズ レイター</a:t>
+            </a:r>
+            <a:r>
+              <a:rPr b="0" sz="1700"/>
+              <a:t>。</a:t>
+            </a:r>
+          </a:p>
+          <a:p>
+            <a:r>
+              <a:rPr b="0" sz="1700"/>
+              <a:t>A second password for this slot.</a:t>
+            </a:r>
+          </a:p>
+          <a:p>
+            <a:r>
+              <a:rPr b="0" sz="1700"/>
+              <a:t>  ア </a:t>
+            </a:r>
+            <a:r>
+              <a:rPr b="1" sz="1700"/>
+              <a:t>セカンド パスワード</a:t>
+            </a:r>
+            <a:r>
+              <a:rPr b="0" sz="1700"/>
+              <a:t> フォー ディス スロット。</a:t>
+            </a:r>
+          </a:p>
+          <a:p>
+            <a:r>
+              <a:rPr b="0" sz="1700"/>
+              <a:t>Not one that opens it.</a:t>
+            </a:r>
+          </a:p>
+          <a:p>
+            <a:r>
+              <a:rPr b="0" sz="1700"/>
+              <a:t>  </a:t>
+            </a:r>
+            <a:r>
+              <a:rPr b="1" sz="1700"/>
+              <a:t>ナット</a:t>
+            </a:r>
+            <a:r>
+              <a:rPr b="0" sz="1700"/>
+              <a:t> ワン ザット </a:t>
+            </a:r>
+            <a:r>
+              <a:rPr b="1" sz="1700"/>
+              <a:t>オウプンズ</a:t>
+            </a:r>
+            <a:r>
+              <a:rPr b="0" sz="1700"/>
+              <a:t> イット。</a:t>
+            </a:r>
+          </a:p>
+          <a:p>
+            <a:r>
+              <a:rPr b="0" sz="1700"/>
+              <a:t>Both slots now live inside that one file.</a:t>
+            </a:r>
+          </a:p>
+          <a:p>
+            <a:r>
+              <a:rPr b="0" sz="1700"/>
+              <a:t>  ボウス スロッツ ナウ リヴ </a:t>
+            </a:r>
+            <a:r>
+              <a:rPr b="1" sz="1700"/>
+              <a:t>インサイド</a:t>
+            </a:r>
+            <a:r>
+              <a:rPr b="0" sz="1700"/>
+              <a:t> ザット </a:t>
+            </a:r>
+            <a:r>
+              <a:rPr b="1" sz="1700"/>
+              <a:t>ワン ファイル</a:t>
+            </a:r>
+            <a:r>
+              <a:rPr b="0" sz="1700"/>
+              <a:t>。</a:t>
+            </a:r>
+          </a:p>
+          <a:p>
+            <a:r>
+              <a:rPr b="0" sz="1700"/>
+              <a:t/>
+            </a:r>
+          </a:p>
+          <a:p>
+            <a:r>
+              <a:rPr b="0" sz="1200"/>
+              <a:t>── SCENE 5 · Slot A opens（0:20）</a:t>
+            </a:r>
+          </a:p>
+          <a:p>
+            <a:r>
+              <a:rPr b="0" sz="1200"/>
+              <a:t>DO: Retrieve 画面 → 物体A をかざす → 一致表示を待つ</a:t>
+            </a:r>
+          </a:p>
+          <a:p>
+            <a:r>
+              <a:rPr b="0" sz="1200"/>
+              <a:t>DO: → パスワードA → Open protected file</a:t>
+            </a:r>
+          </a:p>
+          <a:p>
+            <a:r>
+              <a:rPr b="0" sz="1200"/>
+              <a:t>DO: → 落ちてきたファイルを開いて中身を見せる</a:t>
+            </a:r>
+          </a:p>
+          <a:p>
+            <a:r>
+              <a:rPr b="0" sz="1700"/>
+              <a:t>Object A. Password A.</a:t>
+            </a:r>
+          </a:p>
+          <a:p>
+            <a:r>
+              <a:rPr b="0" sz="1700"/>
+              <a:t>  </a:t>
+            </a:r>
+            <a:r>
+              <a:rPr b="1" sz="1700"/>
+              <a:t>オブジェクト エイ</a:t>
+            </a:r>
+            <a:r>
+              <a:rPr b="0" sz="1700"/>
+              <a:t>。 </a:t>
+            </a:r>
+            <a:r>
+              <a:rPr b="1" sz="1700"/>
+              <a:t>パスワード エイ</a:t>
+            </a:r>
+            <a:r>
+              <a:rPr b="0" sz="1700"/>
+              <a:t>。</a:t>
+            </a:r>
+          </a:p>
+          <a:p>
+            <a:r>
+              <a:rPr b="0" sz="1700"/>
+              <a:t>And there it is.</a:t>
+            </a:r>
+          </a:p>
+          <a:p>
+            <a:r>
+              <a:rPr b="0" sz="1700"/>
+              <a:t>  アンド </a:t>
+            </a:r>
+            <a:r>
+              <a:rPr b="1" sz="1700"/>
+              <a:t>ゼア イット イズ</a:t>
+            </a:r>
+            <a:r>
+              <a:rPr b="0" sz="1700"/>
+              <a:t>。</a:t>
+            </a:r>
+          </a:p>
+          <a:p>
+            <a:r>
+              <a:rPr b="0" sz="1700"/>
+              <a:t>That is Slot A, out of demo dot vessel.</a:t>
+            </a:r>
+          </a:p>
+          <a:p>
+            <a:r>
+              <a:rPr b="0" sz="1700"/>
+              <a:t>  ザッツ </a:t>
+            </a:r>
+            <a:r>
+              <a:rPr b="1" sz="1700"/>
+              <a:t>スロット エイ</a:t>
+            </a:r>
+            <a:r>
+              <a:rPr b="0" sz="1700"/>
+              <a:t>、 アウト オヴ </a:t>
+            </a:r>
+            <a:r>
+              <a:rPr b="1" sz="1700"/>
+              <a:t>デモ ドット ヴェッセル</a:t>
+            </a:r>
+            <a:r>
+              <a:rPr b="0" sz="1700"/>
+              <a:t>。</a:t>
+            </a:r>
+          </a:p>
+          <a:p>
+            <a:r>
+              <a:rPr b="0" sz="1700"/>
+              <a:t/>
+            </a:r>
+          </a:p>
+          <a:p>
+            <a:r>
+              <a:rPr b="0" sz="1200"/>
+              <a:t>── SCENE 6 · The object alone is not enough（1:00）</a:t>
+            </a:r>
+          </a:p>
+          <a:p>
+            <a:r>
+              <a:rPr b="0" sz="1200"/>
+              <a:t>DO: 同じ Retrieve 画面のまま、物体B に持ち替える → 一致表示を待つ（待たずに押すと拒否される）</a:t>
+            </a:r>
+          </a:p>
+          <a:p>
+            <a:r>
+              <a:rPr b="0" sz="1200"/>
+              <a:t>DO: → まず パスワードA を入力 → Open protected file → 失敗</a:t>
+            </a:r>
+          </a:p>
+          <a:p>
+            <a:r>
+              <a:rPr b="0" sz="1200"/>
+              <a:t>DO: → 続けて パスワードB を入力 → Open protected file → 成功</a:t>
+            </a:r>
+          </a:p>
+          <a:p>
+            <a:r>
+              <a:rPr b="0" sz="1200"/>
+              <a:t>DO: → 落ちてきたファイルを開いて、SCENE 5 と中身が違うことを見せる</a:t>
+            </a:r>
+          </a:p>
+          <a:p>
+            <a:r>
+              <a:rPr b="0" sz="1700"/>
+              <a:t>Same screen. I have only changed the object.</a:t>
+            </a:r>
+          </a:p>
+          <a:p>
+            <a:r>
+              <a:rPr b="0" sz="1700"/>
+              <a:t>  </a:t>
+            </a:r>
+            <a:r>
+              <a:rPr b="1" sz="1700"/>
+              <a:t>セイム スクリーン</a:t>
+            </a:r>
+            <a:r>
+              <a:rPr b="0" sz="1700"/>
+              <a:t>。 アイヴ </a:t>
+            </a:r>
+            <a:r>
+              <a:rPr b="1" sz="1700"/>
+              <a:t>オンリー</a:t>
+            </a:r>
+            <a:r>
+              <a:rPr b="0" sz="1700"/>
+              <a:t> チェインジド ジ オブジェクト。</a:t>
+            </a:r>
+          </a:p>
+          <a:p>
+            <a:r>
+              <a:rPr b="0" sz="1700"/>
+              <a:t>This is the object for Slot B.</a:t>
+            </a:r>
+          </a:p>
+          <a:p>
+            <a:r>
+              <a:rPr b="0" sz="1700"/>
+              <a:t>  ディス イズ ジ オブジェクト フォー </a:t>
+            </a:r>
+            <a:r>
+              <a:rPr b="1" sz="1700"/>
+              <a:t>スロット ビー</a:t>
+            </a:r>
+            <a:r>
+              <a:rPr b="0" sz="1700"/>
+              <a:t>。</a:t>
+            </a:r>
+          </a:p>
+          <a:p>
+            <a:r>
+              <a:rPr b="0" sz="1700"/>
+              <a:t>And I will type Slot A's password.</a:t>
+            </a:r>
+          </a:p>
+          <a:p>
+            <a:r>
+              <a:rPr b="0" sz="1700"/>
+              <a:t>  アンド アイル タイプ </a:t>
+            </a:r>
+            <a:r>
+              <a:rPr b="1" sz="1700"/>
+              <a:t>スロット エイズ</a:t>
+            </a:r>
+            <a:r>
+              <a:rPr b="0" sz="1700"/>
+              <a:t> パスワード。</a:t>
+            </a:r>
+          </a:p>
+          <a:p>
+            <a:r>
+              <a:rPr b="0" sz="1700"/>
+              <a:t>No valid entry found.</a:t>
+            </a:r>
+          </a:p>
+          <a:p>
+            <a:r>
+              <a:rPr b="0" sz="1700"/>
+              <a:t>  </a:t>
+            </a:r>
+            <a:r>
+              <a:rPr b="1" sz="1700"/>
+              <a:t>ノウ ヴァリッド エントリー ファウンド</a:t>
+            </a:r>
+            <a:r>
+              <a:rPr b="0" sz="1700"/>
+              <a:t>。</a:t>
+            </a:r>
+          </a:p>
+          <a:p>
+            <a:r>
+              <a:rPr b="0" sz="1700"/>
+              <a:t>The object is right. The password is not. Nothing opens.</a:t>
+            </a:r>
+          </a:p>
+          <a:p>
+            <a:r>
+              <a:rPr b="0" sz="1700"/>
+              <a:t>  ジ オブジェクト イズ </a:t>
+            </a:r>
+            <a:r>
+              <a:rPr b="1" sz="1700"/>
+              <a:t>ゥライト</a:t>
+            </a:r>
+            <a:r>
+              <a:rPr b="0" sz="1700"/>
+              <a:t>。 ザ パスワード イズ </a:t>
+            </a:r>
+            <a:r>
+              <a:rPr b="1" sz="1700"/>
+              <a:t>ナット</a:t>
+            </a:r>
+            <a:r>
+              <a:rPr b="0" sz="1700"/>
+              <a:t>。 </a:t>
+            </a:r>
+            <a:r>
+              <a:rPr b="1" sz="1700"/>
+              <a:t>ナッシング</a:t>
+            </a:r>
+            <a:r>
+              <a:rPr b="0" sz="1700"/>
+              <a:t> オウプンズ。</a:t>
+            </a:r>
+          </a:p>
+          <a:p>
+            <a:r>
+              <a:rPr b="0" sz="1700"/>
+              <a:t>Now Slot B's own password.</a:t>
+            </a:r>
+          </a:p>
+          <a:p>
+            <a:r>
+              <a:rPr b="0" sz="1700"/>
+              <a:t>  ナウ </a:t>
+            </a:r>
+            <a:r>
+              <a:rPr b="1" sz="1700"/>
+              <a:t>スロット ビーズ オウン</a:t>
+            </a:r>
+            <a:r>
+              <a:rPr b="0" sz="1700"/>
+              <a:t> パスワード。</a:t>
+            </a:r>
+          </a:p>
+          <a:p>
+            <a:r>
+              <a:rPr b="0" sz="1700"/>
+              <a:t>A different file — out of the same file on disk.</a:t>
+            </a:r>
+          </a:p>
+          <a:p>
+            <a:r>
+              <a:rPr b="0" sz="1700"/>
+              <a:t>  ア </a:t>
             </a:r>
             <a:r>
               <a:rPr b="1" sz="1700"/>
@@ -5332,13 +6822,145 @@
             </a:r>
             <a:r>
               <a:rPr b="0" sz="1700"/>
+              <a:t> — アウト オヴ ザ </a:t>
+            </a:r>
+            <a:r>
+              <a:rPr b="1" sz="1700"/>
+              <a:t>セイム ファイル</a:t>
+            </a:r>
+            <a:r>
+              <a:rPr b="0" sz="1700"/>
+              <a:t> オン ディスク。</a:t>
+            </a:r>
+          </a:p>
+          <a:p>
+            <a:r>
+              <a:rPr b="0" sz="1700"/>
+              <a:t>One vessel. Two objects. Two passwords. Two files.</a:t>
+            </a:r>
+          </a:p>
+          <a:p>
+            <a:r>
+              <a:rPr b="0" sz="1700"/>
+              <a:t>  </a:t>
+            </a:r>
+            <a:r>
+              <a:rPr b="1" sz="1700"/>
+              <a:t>ワン ヴェッセル</a:t>
+            </a:r>
+            <a:r>
+              <a:rPr b="0" sz="1700"/>
+              <a:t>。 </a:t>
+            </a:r>
+            <a:r>
+              <a:rPr b="1" sz="1700"/>
+              <a:t>トゥー オブジェクツ</a:t>
+            </a:r>
+            <a:r>
+              <a:rPr b="0" sz="1700"/>
+              <a:t>。 </a:t>
+            </a:r>
+            <a:r>
+              <a:rPr b="1" sz="1700"/>
+              <a:t>トゥー パスワーズ</a:t>
+            </a:r>
+            <a:r>
+              <a:rPr b="0" sz="1700"/>
+              <a:t>。 </a:t>
+            </a:r>
+            <a:r>
+              <a:rPr b="1" sz="1700"/>
+              <a:t>トゥー ファイルズ</a:t>
+            </a:r>
+            <a:r>
+              <a:rPr b="0" sz="1700"/>
               <a:t>。</a:t>
             </a:r>
           </a:p>
           <a:p>
             <a:r>
               <a:rPr b="0" sz="1700"/>
-              <a:t>Same container. That is the two-slot model, working.</a:t>
+              <a:t/>
+            </a:r>
+          </a:p>
+          <a:p>
+            <a:r>
+              <a:rPr b="0" sz="1200"/>
+              <a:t>── SCENE 7 · The password alone is not enough either（0:40）</a:t>
+            </a:r>
+          </a:p>
+          <a:p>
+            <a:r>
+              <a:rPr b="0" sz="1200"/>
+              <a:t>DO: 同じ Retrieve 画面のまま、物体A に持ち替える → 表示が変わるのを待つ</a:t>
+            </a:r>
+          </a:p>
+          <a:p>
+            <a:r>
+              <a:rPr b="0" sz="1200"/>
+              <a:t>DO: → パスワードB を入力 → Open protected file → 失敗</a:t>
+            </a:r>
+          </a:p>
+          <a:p>
+            <a:r>
+              <a:rPr b="0" sz="1700"/>
+              <a:t>Now the other way around.</a:t>
+            </a:r>
+          </a:p>
+          <a:p>
+            <a:r>
+              <a:rPr b="0" sz="1700"/>
+              <a:t>  ナウ ジ </a:t>
+            </a:r>
+            <a:r>
+              <a:rPr b="1" sz="1700"/>
+              <a:t>アザー ウェイ</a:t>
+            </a:r>
+            <a:r>
+              <a:rPr b="0" sz="1700"/>
+              <a:t> アラウンド。</a:t>
+            </a:r>
+          </a:p>
+          <a:p>
+            <a:r>
+              <a:rPr b="0" sz="1700"/>
+              <a:t>I keep Slot B's password. I change the object back to A.</a:t>
+            </a:r>
+          </a:p>
+          <a:p>
+            <a:r>
+              <a:rPr b="0" sz="1700"/>
+              <a:t>  アイ </a:t>
+            </a:r>
+            <a:r>
+              <a:rPr b="1" sz="1700"/>
+              <a:t>キープ</a:t>
+            </a:r>
+            <a:r>
+              <a:rPr b="0" sz="1700"/>
+              <a:t> スロット ビーズ パスワード。 アイ </a:t>
+            </a:r>
+            <a:r>
+              <a:rPr b="1" sz="1700"/>
+              <a:t>チェインジ</a:t>
+            </a:r>
+            <a:r>
+              <a:rPr b="0" sz="1700"/>
+              <a:t> ジ オブジェクト バック トゥ </a:t>
+            </a:r>
+            <a:r>
+              <a:rPr b="1" sz="1700"/>
+              <a:t>エイ</a:t>
+            </a:r>
+            <a:r>
+              <a:rPr b="0" sz="1700"/>
+              <a:t>。</a:t>
+            </a:r>
+          </a:p>
+          <a:p>
+            <a:r>
+              <a:rPr b="0" sz="1700"/>
+              <a:t>Same result. No valid entry found.</a:t>
             </a:r>
           </a:p>
           <a:p>
@@ -5348,35 +6970,35 @@
             </a:r>
             <a:r>
               <a:rPr b="1" sz="1700"/>
-              <a:t>セイム コンテナ</a:t>
-            </a:r>
-            <a:r>
-              <a:rPr b="0" sz="1700"/>
-              <a:t>。 ザット イズ ザ </a:t>
-            </a:r>
-            <a:r>
-              <a:rPr b="1" sz="1700"/>
-              <a:t>トゥースロット モデル</a:t>
-            </a:r>
-            <a:r>
-              <a:rPr b="0" sz="1700"/>
-              <a:t>、 ワーキング。</a:t>
-            </a:r>
-          </a:p>
-          <a:p>
-            <a:r>
-              <a:rPr b="0" sz="1700"/>
-              <a:t>And then the part that matters most.</a:t>
-            </a:r>
-          </a:p>
-          <a:p>
-            <a:r>
-              <a:rPr b="0" sz="1700"/>
-              <a:t>  アンド ゼン ザ パート ザット </a:t>
-            </a:r>
-            <a:r>
-              <a:rPr b="1" sz="1700"/>
-              <a:t>マターズ モウスト</a:t>
+              <a:t>セイム リザルト</a:t>
+            </a:r>
+            <a:r>
+              <a:rPr b="0" sz="1700"/>
+              <a:t>。 ノウ ヴァリッド エントリー ファウンド。</a:t>
+            </a:r>
+          </a:p>
+          <a:p>
+            <a:r>
+              <a:rPr b="0" sz="1700"/>
+              <a:t>Not 'wrong object'. Not 'object missing'.</a:t>
+            </a:r>
+          </a:p>
+          <a:p>
+            <a:r>
+              <a:rPr b="0" sz="1700"/>
+              <a:t>  ナット </a:t>
+            </a:r>
+            <a:r>
+              <a:rPr b="1" sz="1700"/>
+              <a:t>ゥロング オブジェクト</a:t>
+            </a:r>
+            <a:r>
+              <a:rPr b="0" sz="1700"/>
+              <a:t>。 ナット </a:t>
+            </a:r>
+            <a:r>
+              <a:rPr b="1" sz="1700"/>
+              <a:t>オブジェクト ミッシング</a:t>
             </a:r>
             <a:r>
               <a:rPr b="0" sz="1700"/>
@@ -5386,69 +7008,25 @@
           <a:p>
             <a:r>
               <a:rPr b="0" sz="1700"/>
-              <a:t>I don’t touch the screen.</a:t>
-            </a:r>
-          </a:p>
-          <a:p>
-            <a:r>
-              <a:rPr b="0" sz="1700"/>
-              <a:t>  アイ </a:t>
-            </a:r>
-            <a:r>
-              <a:rPr b="1" sz="1700"/>
-              <a:t>ドウント タッチ</a:t>
-            </a:r>
-            <a:r>
-              <a:rPr b="0" sz="1700"/>
-              <a:t> ザ スクリーン。</a:t>
-            </a:r>
-          </a:p>
-          <a:p>
-            <a:r>
-              <a:rPr b="0" sz="1700"/>
-              <a:t>Same tab. Same file. Same password. Same button.</a:t>
-            </a:r>
-          </a:p>
-          <a:p>
-            <a:r>
-              <a:rPr b="0" sz="1700"/>
-              <a:t>  セイム タブ。 セイム ファイル。 セイム パスワード。 セイム バトゥン。</a:t>
-            </a:r>
-          </a:p>
-          <a:p>
-            <a:r>
-              <a:rPr b="0" sz="1700"/>
-              <a:t>I simply take the object off the table.</a:t>
-            </a:r>
-          </a:p>
-          <a:p>
-            <a:r>
-              <a:rPr b="0" sz="1700"/>
-              <a:t>  アイ シンプリー </a:t>
-            </a:r>
-            <a:r>
-              <a:rPr b="1" sz="1700"/>
-              <a:t>テイク ジ オブジェクト オフ</a:t>
-            </a:r>
-            <a:r>
-              <a:rPr b="0" sz="1700"/>
-              <a:t> ザ テイブル。</a:t>
-            </a:r>
-          </a:p>
-          <a:p>
-            <a:r>
-              <a:rPr b="0" sz="1700"/>
-              <a:t>And watch it refuse.</a:t>
-            </a:r>
-          </a:p>
-          <a:p>
-            <a:r>
-              <a:rPr b="0" sz="1700"/>
-              <a:t>  アンド ウォッチ イット </a:t>
-            </a:r>
-            <a:r>
-              <a:rPr b="1" sz="1700"/>
-              <a:t>リフューズ</a:t>
+              <a:t>It will not tell you what it is waiting for.</a:t>
+            </a:r>
+          </a:p>
+          <a:p>
+            <a:r>
+              <a:rPr b="0" sz="1700"/>
+              <a:t>  イット ウィル ナット </a:t>
+            </a:r>
+            <a:r>
+              <a:rPr b="1" sz="1700"/>
+              <a:t>テル ユー</a:t>
+            </a:r>
+            <a:r>
+              <a:rPr b="0" sz="1700"/>
+              <a:t> ワット イッツ </a:t>
+            </a:r>
+            <a:r>
+              <a:rPr b="1" sz="1700"/>
+              <a:t>ウェイティング フォー</a:t>
             </a:r>
             <a:r>
               <a:rPr b="0" sz="1700"/>
@@ -5458,25 +7036,89 @@
           <a:p>
             <a:r>
               <a:rPr b="0" sz="1700"/>
-              <a:t>Then Audit. And Silent Standby.”</a:t>
-            </a:r>
-          </a:p>
-          <a:p>
-            <a:r>
-              <a:rPr b="0" sz="1700"/>
-              <a:t>  ゼン </a:t>
-            </a:r>
-            <a:r>
-              <a:rPr b="1" sz="1700"/>
-              <a:t>オーディット</a:t>
-            </a:r>
-            <a:r>
-              <a:rPr b="0" sz="1700"/>
-              <a:t>。 アンド </a:t>
-            </a:r>
-            <a:r>
-              <a:rPr b="1" sz="1700"/>
-              <a:t>サイレント スタンドバイ</a:t>
+              <a:t>That is what 'the cue gates the operation' means.</a:t>
+            </a:r>
+          </a:p>
+          <a:p>
+            <a:r>
+              <a:rPr b="0" sz="1700"/>
+              <a:t>  ザッツ ワット ザ </a:t>
+            </a:r>
+            <a:r>
+              <a:rPr b="1" sz="1700"/>
+              <a:t>キュー ゲイツ ジ オペレイション</a:t>
+            </a:r>
+            <a:r>
+              <a:rPr b="0" sz="1700"/>
+              <a:t> ミーンズ。</a:t>
+            </a:r>
+          </a:p>
+          <a:p>
+            <a:r>
+              <a:rPr b="0" sz="1700"/>
+              <a:t/>
+            </a:r>
+          </a:p>
+          <a:p>
+            <a:r>
+              <a:rPr b="0" sz="1200"/>
+              <a:t>── SCENE 8 · Coercion — hand over Slot A（0:30）</a:t>
+            </a:r>
+          </a:p>
+          <a:p>
+            <a:r>
+              <a:rPr b="0" sz="1200"/>
+              <a:t>DO: 物体A → パスワードA → Open protected file（SCENE 5 と同一操作）</a:t>
+            </a:r>
+          </a:p>
+          <a:p>
+            <a:r>
+              <a:rPr b="0" sz="1200"/>
+              <a:t>DO: ここは手を速く動かさない。語りで見せる場面。</a:t>
+            </a:r>
+          </a:p>
+          <a:p>
+            <a:r>
+              <a:rPr b="0" sz="1700"/>
+              <a:t>Now change the situation.</a:t>
+            </a:r>
+          </a:p>
+          <a:p>
+            <a:r>
+              <a:rPr b="0" sz="1700"/>
+              <a:t>  ナウ </a:t>
+            </a:r>
+            <a:r>
+              <a:rPr b="1" sz="1700"/>
+              <a:t>チェインジ</a:t>
+            </a:r>
+            <a:r>
+              <a:rPr b="0" sz="1700"/>
+              <a:t> ザ シチュエイション。</a:t>
+            </a:r>
+          </a:p>
+          <a:p>
+            <a:r>
+              <a:rPr b="0" sz="1700"/>
+              <a:t>Someone has the device. And they have me.</a:t>
+            </a:r>
+          </a:p>
+          <a:p>
+            <a:r>
+              <a:rPr b="0" sz="1700"/>
+              <a:t>  サムワン ハズ ザ </a:t>
+            </a:r>
+            <a:r>
+              <a:rPr b="1" sz="1700"/>
+              <a:t>デバイス</a:t>
+            </a:r>
+            <a:r>
+              <a:rPr b="0" sz="1700"/>
+              <a:t>。 アンド ゼイ ハヴ </a:t>
+            </a:r>
+            <a:r>
+              <a:rPr b="1" sz="1700"/>
+              <a:t>ミー</a:t>
             </a:r>
             <a:r>
               <a:rPr b="0" sz="1700"/>
@@ -5486,55 +7128,179 @@
           <a:p>
             <a:r>
               <a:rPr b="0" sz="1700"/>
+              <a:t>'Give us the password.'</a:t>
+            </a:r>
+          </a:p>
+          <a:p>
+            <a:r>
+              <a:rPr b="0" sz="1700"/>
+              <a:t>  </a:t>
+            </a:r>
+            <a:r>
+              <a:rPr b="1" sz="1700"/>
+              <a:t>ギヴ アス</a:t>
+            </a:r>
+            <a:r>
+              <a:rPr b="0" sz="1700"/>
+              <a:t> ザ パスワード。</a:t>
+            </a:r>
+          </a:p>
+          <a:p>
+            <a:r>
+              <a:rPr b="0" sz="1700"/>
+              <a:t>So I do. Object A. Password A.</a:t>
+            </a:r>
+          </a:p>
+          <a:p>
+            <a:r>
+              <a:rPr b="0" sz="1700"/>
+              <a:t>  ソウ </a:t>
+            </a:r>
+            <a:r>
+              <a:rPr b="1" sz="1700"/>
+              <a:t>アイ ドゥー</a:t>
+            </a:r>
+            <a:r>
+              <a:rPr b="0" sz="1700"/>
+              <a:t>。 オブジェクト エイ。 パスワード エイ。</a:t>
+            </a:r>
+          </a:p>
+          <a:p>
+            <a:r>
+              <a:rPr b="0" sz="1700"/>
+              <a:t>They get a file. A real file, that really opens.</a:t>
+            </a:r>
+          </a:p>
+          <a:p>
+            <a:r>
+              <a:rPr b="0" sz="1700"/>
+              <a:t>  ゼイ ゲット ア ファイル。 ア </a:t>
+            </a:r>
+            <a:r>
+              <a:rPr b="1" sz="1700"/>
+              <a:t>リアル</a:t>
+            </a:r>
+            <a:r>
+              <a:rPr b="0" sz="1700"/>
+              <a:t> ファイル、 ザット </a:t>
+            </a:r>
+            <a:r>
+              <a:rPr b="1" sz="1700"/>
+              <a:t>リアリー オウプンズ</a:t>
+            </a:r>
+            <a:r>
+              <a:rPr b="0" sz="1700"/>
+              <a:t>。</a:t>
+            </a:r>
+          </a:p>
+          <a:p>
+            <a:r>
+              <a:rPr b="0" sz="1700"/>
+              <a:t>Nothing on this screen says there is another one.</a:t>
+            </a:r>
+          </a:p>
+          <a:p>
+            <a:r>
+              <a:rPr b="0" sz="1700"/>
+              <a:t>  </a:t>
+            </a:r>
+            <a:r>
+              <a:rPr b="1" sz="1700"/>
+              <a:t>ナッシング</a:t>
+            </a:r>
+            <a:r>
+              <a:rPr b="0" sz="1700"/>
+              <a:t> オン ディス スクリーン セズ ゼアズ </a:t>
+            </a:r>
+            <a:r>
+              <a:rPr b="1" sz="1700"/>
+              <a:t>アナザー ワン</a:t>
+            </a:r>
+            <a:r>
+              <a:rPr b="0" sz="1700"/>
+              <a:t>。</a:t>
+            </a:r>
+          </a:p>
+          <a:p>
+            <a:r>
+              <a:rPr b="0" sz="1700"/>
+              <a:t>That is the whole design.</a:t>
+            </a:r>
+          </a:p>
+          <a:p>
+            <a:r>
+              <a:rPr b="0" sz="1700"/>
+              <a:t>  ザッツ ザ </a:t>
+            </a:r>
+            <a:r>
+              <a:rPr b="1" sz="1700"/>
+              <a:t>ホウル デザイン</a:t>
+            </a:r>
+            <a:r>
+              <a:rPr b="0" sz="1700"/>
+              <a:t>。</a:t>
+            </a:r>
+          </a:p>
+          <a:p>
+            <a:r>
+              <a:rPr b="0" sz="1700"/>
               <a:t/>
             </a:r>
           </a:p>
           <a:p>
             <a:r>
-              <a:rPr b="0" sz="1700"/>
-              <a:t>── STEP 0 · 0:20 · Orientation</a:t>
-            </a:r>
-          </a:p>
-          <a:p>
-            <a:r>
               <a:rPr b="0" sz="1200"/>
-              <a:t>DO: Simple ホームを提示。下部バーを指す（o · n · g · e · q · w の6つだけ）</a:t>
-            </a:r>
-          </a:p>
-          <a:p>
-            <a:r>
-              <a:rPr b="0" sz="1700"/>
-              <a:t>“This is the real console — Local Disclosure Control.</a:t>
-            </a:r>
-          </a:p>
-          <a:p>
-            <a:r>
-              <a:rPr b="0" sz="1700"/>
-              <a:t>  ディス イズ ザ </a:t>
-            </a:r>
-            <a:r>
-              <a:rPr b="1" sz="1700"/>
-              <a:t>リアル コンソウル</a:t>
-            </a:r>
-            <a:r>
-              <a:rPr b="0" sz="1700"/>
-              <a:t> — ローカル ディスクロージャー コントロール。</a:t>
-            </a:r>
-          </a:p>
-          <a:p>
-            <a:r>
-              <a:rPr b="0" sz="1700"/>
-              <a:t>The home screen is deliberately small.</a:t>
-            </a:r>
-          </a:p>
-          <a:p>
-            <a:r>
-              <a:rPr b="0" sz="1700"/>
-              <a:t>  ザ ホウム スクリーン イズ </a:t>
-            </a:r>
-            <a:r>
-              <a:rPr b="1" sz="1700"/>
-              <a:t>ディリバレットリー スモール</a:t>
+              <a:t>── SCENE 9 · The other password（0:50）</a:t>
+            </a:r>
+          </a:p>
+          <a:p>
+            <a:r>
+              <a:rPr b="0" sz="1200"/>
+              <a:t>DO: 同じ Retrieve 画面。消したい方の物体（物体B）をかざす</a:t>
+            </a:r>
+          </a:p>
+          <a:p>
+            <a:r>
+              <a:rPr b="0" sz="1200"/>
+              <a:t>DO: → パスワード欄に Clearing password（破壊用）を入力 → Open protected file</a:t>
+            </a:r>
+          </a:p>
+          <a:p>
+            <a:r>
+              <a:rPr b="0" sz="1200"/>
+              <a:t>DO: → No valid entry found. と出る</a:t>
+            </a:r>
+          </a:p>
+          <a:p>
+            <a:r>
+              <a:rPr b="0" sz="1700"/>
+              <a:t>Worse case. They already know there is more.</a:t>
+            </a:r>
+          </a:p>
+          <a:p>
+            <a:r>
+              <a:rPr b="0" sz="1700"/>
+              <a:t>  </a:t>
+            </a:r>
+            <a:r>
+              <a:rPr b="1" sz="1700"/>
+              <a:t>ワース ケイス</a:t>
+            </a:r>
+            <a:r>
+              <a:rPr b="0" sz="1700"/>
+              <a:t>。 ゼイ オールレディ </a:t>
+            </a:r>
+            <a:r>
+              <a:rPr b="1" sz="1700"/>
+              <a:t>ノウ</a:t>
+            </a:r>
+            <a:r>
+              <a:rPr b="0" sz="1700"/>
+              <a:t> ゼアズ </a:t>
+            </a:r>
+            <a:r>
+              <a:rPr b="1" sz="1700"/>
+              <a:t>モア</a:t>
             </a:r>
             <a:r>
               <a:rPr b="0" sz="1700"/>
@@ -5544,29 +7310,57 @@
           <a:p>
             <a:r>
               <a:rPr b="0" sz="1700"/>
-              <a:t>Open. New. Guided. Expert.</a:t>
-            </a:r>
-          </a:p>
-          <a:p>
-            <a:r>
-              <a:rPr b="0" sz="1700"/>
-              <a:t>  オウプン。 ニュー。 ガイディッド。 エクスパート。</a:t>
-            </a:r>
-          </a:p>
-          <a:p>
-            <a:r>
-              <a:rPr b="0" sz="1700"/>
-              <a:t>Under pressure, you don’t want a wall of options.</a:t>
-            </a:r>
-          </a:p>
-          <a:p>
-            <a:r>
-              <a:rPr b="0" sz="1700"/>
-              <a:t>  アンダー プレッシャー、 ユー ドウント ワント ア </a:t>
-            </a:r>
-            <a:r>
-              <a:rPr b="1" sz="1700"/>
-              <a:t>ウォール オヴ オプションズ</a:t>
+              <a:t>Same screen. Same object. Same field. Same button.</a:t>
+            </a:r>
+          </a:p>
+          <a:p>
+            <a:r>
+              <a:rPr b="0" sz="1700"/>
+              <a:t>  セイム スクリーン。 セイム オブジェクト。 セイム フィールド。 セイム ボタン。</a:t>
+            </a:r>
+          </a:p>
+          <a:p>
+            <a:r>
+              <a:rPr b="0" sz="1700"/>
+              <a:t>The only thing I change is which password I type.</a:t>
+            </a:r>
+          </a:p>
+          <a:p>
+            <a:r>
+              <a:rPr b="0" sz="1700"/>
+              <a:t>  ジ </a:t>
+            </a:r>
+            <a:r>
+              <a:rPr b="1" sz="1700"/>
+              <a:t>オンリー</a:t>
+            </a:r>
+            <a:r>
+              <a:rPr b="0" sz="1700"/>
+              <a:t> シング アイ チェインジ イズ </a:t>
+            </a:r>
+            <a:r>
+              <a:rPr b="1" sz="1700"/>
+              <a:t>ウィッチ パスワード</a:t>
+            </a:r>
+            <a:r>
+              <a:rPr b="0" sz="1700"/>
+              <a:t> アイ タイプ。</a:t>
+            </a:r>
+          </a:p>
+          <a:p>
+            <a:r>
+              <a:rPr b="0" sz="1700"/>
+              <a:t>And it says — no valid entry found.</a:t>
+            </a:r>
+          </a:p>
+          <a:p>
+            <a:r>
+              <a:rPr b="0" sz="1700"/>
+              <a:t>  アンド イット セズ — </a:t>
+            </a:r>
+            <a:r>
+              <a:rPr b="1" sz="1700"/>
+              <a:t>ノウ ヴァリッド エントリー ファウンド</a:t>
             </a:r>
             <a:r>
               <a:rPr b="0" sz="1700"/>
@@ -5576,17 +7370,25 @@
           <a:p>
             <a:r>
               <a:rPr b="0" sz="1700"/>
-              <a:t>The full control set is one key away.”</a:t>
-            </a:r>
-          </a:p>
-          <a:p>
-            <a:r>
-              <a:rPr b="0" sz="1700"/>
-              <a:t>  ザ フル コントロール セット イズ </a:t>
-            </a:r>
-            <a:r>
-              <a:rPr b="1" sz="1700"/>
-              <a:t>ワン キー アウェイ</a:t>
+              <a:t>That is the same sentence you get from a typo.</a:t>
+            </a:r>
+          </a:p>
+          <a:p>
+            <a:r>
+              <a:rPr b="0" sz="1700"/>
+              <a:t>  ザッツ ザ </a:t>
+            </a:r>
+            <a:r>
+              <a:rPr b="1" sz="1700"/>
+              <a:t>セイム センテンス</a:t>
+            </a:r>
+            <a:r>
+              <a:rPr b="0" sz="1700"/>
+              <a:t> ユー ゲット フロム ア </a:t>
+            </a:r>
+            <a:r>
+              <a:rPr b="1" sz="1700"/>
+              <a:t>タイポ</a:t>
             </a:r>
             <a:r>
               <a:rPr b="0" sz="1700"/>
@@ -5596,75 +7398,321 @@
           <a:p>
             <a:r>
               <a:rPr b="0" sz="1700"/>
+              <a:t>But that entry is not locked. It is gone.</a:t>
+            </a:r>
+          </a:p>
+          <a:p>
+            <a:r>
+              <a:rPr b="0" sz="1700"/>
+              <a:t>  バット ザット エントリー イズ ナット </a:t>
+            </a:r>
+            <a:r>
+              <a:rPr b="1" sz="1700"/>
+              <a:t>ロックト</a:t>
+            </a:r>
+            <a:r>
+              <a:rPr b="0" sz="1700"/>
+              <a:t>。 イッツ </a:t>
+            </a:r>
+            <a:r>
+              <a:rPr b="1" sz="1700"/>
+              <a:t>ゴーン</a:t>
+            </a:r>
+            <a:r>
+              <a:rPr b="0" sz="1700"/>
+              <a:t>。</a:t>
+            </a:r>
+          </a:p>
+          <a:p>
+            <a:r>
+              <a:rPr b="0" sz="1700"/>
+              <a:t>The password they can compel is not the only one there is.</a:t>
+            </a:r>
+          </a:p>
+          <a:p>
+            <a:r>
+              <a:rPr b="0" sz="1700"/>
+              <a:t>  ザ パスワード ゼイ キャン </a:t>
+            </a:r>
+            <a:r>
+              <a:rPr b="1" sz="1700"/>
+              <a:t>コンペル</a:t>
+            </a:r>
+            <a:r>
+              <a:rPr b="0" sz="1700"/>
+              <a:t> イズ ナット ジ </a:t>
+            </a:r>
+            <a:r>
+              <a:rPr b="1" sz="1700"/>
+              <a:t>オンリー ワン</a:t>
+            </a:r>
+            <a:r>
+              <a:rPr b="0" sz="1700"/>
+              <a:t> ゼア イズ。</a:t>
+            </a:r>
+          </a:p>
+          <a:p>
+            <a:r>
+              <a:rPr b="0" sz="1700"/>
               <a:t/>
             </a:r>
           </a:p>
           <a:p>
             <a:r>
-              <a:rPr b="0" sz="1700"/>
-              <a:t>── STEP 1 · 0:50 · Create a Vessel — Prepare</a:t>
-            </a:r>
-          </a:p>
-          <a:p>
-            <a:r>
               <a:rPr b="0" sz="1200"/>
-              <a:t>DO: n New → vessel-path → vessel-size を 64M に変更（Select・既定 512M。既定のまま作らない）→ vessel-label（任意・無害な語）→ create-btn</a:t>
-            </a:r>
-          </a:p>
-          <a:p>
-            <a:r>
-              <a:rPr b="0" sz="1700"/>
-              <a:t>“First I create a vessel — a deniable container file.</a:t>
-            </a:r>
-          </a:p>
-          <a:p>
-            <a:r>
-              <a:rPr b="0" sz="1700"/>
-              <a:t>  ファースト アイ クリエイト ア </a:t>
-            </a:r>
-            <a:r>
-              <a:rPr b="1" sz="1700"/>
-              <a:t>ヴェッセル</a:t>
-            </a:r>
-            <a:r>
-              <a:rPr b="0" sz="1700"/>
-              <a:t> — ア ディナイアブル コンテナ ファイル。</a:t>
-            </a:r>
-          </a:p>
-          <a:p>
-            <a:r>
-              <a:rPr b="0" sz="1700"/>
-              <a:t>This is the Prepare step.</a:t>
-            </a:r>
-          </a:p>
-          <a:p>
-            <a:r>
-              <a:rPr b="0" sz="1700"/>
-              <a:t>  ディス イズ ザ </a:t>
-            </a:r>
-            <a:r>
-              <a:rPr b="1" sz="1700"/>
-              <a:t>プリペア</a:t>
-            </a:r>
-            <a:r>
-              <a:rPr b="0" sz="1700"/>
-              <a:t> ステップ。</a:t>
-            </a:r>
-          </a:p>
-          <a:p>
-            <a:r>
-              <a:rPr b="0" sz="1700"/>
-              <a:t>It has no header. No magic bytes.</a:t>
-            </a:r>
-          </a:p>
-          <a:p>
-            <a:r>
-              <a:rPr b="0" sz="1700"/>
-              <a:t>  イット ハズ </a:t>
-            </a:r>
-            <a:r>
-              <a:rPr b="1" sz="1700"/>
-              <a:t>ノウ ヘダー</a:t>
+              <a:t>── SCENE 10 · Nothing left to open — and what the tool will not claim（0:50）</a:t>
+            </a:r>
+          </a:p>
+          <a:p>
+            <a:r>
+              <a:rPr b="0" sz="1200"/>
+              <a:t>DO: 物体B → パスワードB（正規のもの）→ Open protected file → 何も出てこない</a:t>
+            </a:r>
+          </a:p>
+          <a:p>
+            <a:r>
+              <a:rPr b="0" sz="1200"/>
+              <a:t>DO: 続けて 物体A → パスワードA → Open protected file → 開く（時間が押していれば口頭のみ）</a:t>
+            </a:r>
+          </a:p>
+          <a:p>
+            <a:r>
+              <a:rPr b="0" sz="1200"/>
+              <a:t>DO: 最後の3行は操作なし。手を止めて、客席を見て言う。</a:t>
+            </a:r>
+          </a:p>
+          <a:p>
+            <a:r>
+              <a:rPr b="0" sz="1700"/>
+              <a:t>Let me prove that.</a:t>
+            </a:r>
+          </a:p>
+          <a:p>
+            <a:r>
+              <a:rPr b="0" sz="1700"/>
+              <a:t>  レット ミー </a:t>
+            </a:r>
+            <a:r>
+              <a:rPr b="1" sz="1700"/>
+              <a:t>プルーヴ</a:t>
+            </a:r>
+            <a:r>
+              <a:rPr b="0" sz="1700"/>
+              <a:t> ザット。</a:t>
+            </a:r>
+          </a:p>
+          <a:p>
+            <a:r>
+              <a:rPr b="0" sz="1700"/>
+              <a:t>Object B. Slot B's real password. The correct way.</a:t>
+            </a:r>
+          </a:p>
+          <a:p>
+            <a:r>
+              <a:rPr b="0" sz="1700"/>
+              <a:t>  オブジェクト ビー。 スロット ビーズ </a:t>
+            </a:r>
+            <a:r>
+              <a:rPr b="1" sz="1700"/>
+              <a:t>リアル</a:t>
+            </a:r>
+            <a:r>
+              <a:rPr b="0" sz="1700"/>
+              <a:t> パスワード。 ザ </a:t>
+            </a:r>
+            <a:r>
+              <a:rPr b="1" sz="1700"/>
+              <a:t>コゥレクト ウェイ</a:t>
+            </a:r>
+            <a:r>
+              <a:rPr b="0" sz="1700"/>
+              <a:t>。</a:t>
+            </a:r>
+          </a:p>
+          <a:p>
+            <a:r>
+              <a:rPr b="0" sz="1700"/>
+              <a:t>Nothing.</a:t>
+            </a:r>
+          </a:p>
+          <a:p>
+            <a:r>
+              <a:rPr b="0" sz="1700"/>
+              <a:t>  </a:t>
+            </a:r>
+            <a:r>
+              <a:rPr b="1" sz="1700"/>
+              <a:t>ナッシング</a:t>
+            </a:r>
+            <a:r>
+              <a:rPr b="0" sz="1700"/>
+              <a:t>。</a:t>
+            </a:r>
+          </a:p>
+          <a:p>
+            <a:r>
+              <a:rPr b="0" sz="1700"/>
+              <a:t>I cannot get it back either. That is not a bug.</a:t>
+            </a:r>
+          </a:p>
+          <a:p>
+            <a:r>
+              <a:rPr b="0" sz="1700"/>
+              <a:t>  アイ キャナット ゲット イット バック </a:t>
+            </a:r>
+            <a:r>
+              <a:rPr b="1" sz="1700"/>
+              <a:t>アイザー</a:t>
+            </a:r>
+            <a:r>
+              <a:rPr b="0" sz="1700"/>
+              <a:t>。 ザッツ </a:t>
+            </a:r>
+            <a:r>
+              <a:rPr b="1" sz="1700"/>
+              <a:t>ナット ア バグ</a:t>
+            </a:r>
+            <a:r>
+              <a:rPr b="0" sz="1700"/>
+              <a:t>。</a:t>
+            </a:r>
+          </a:p>
+          <a:p>
+            <a:r>
+              <a:rPr b="0" sz="1700"/>
+              <a:t>And Slot A still opens, exactly as before.</a:t>
+            </a:r>
+          </a:p>
+          <a:p>
+            <a:r>
+              <a:rPr b="0" sz="1700"/>
+              <a:t>  アンド </a:t>
+            </a:r>
+            <a:r>
+              <a:rPr b="1" sz="1700"/>
+              <a:t>スロット エイ</a:t>
+            </a:r>
+            <a:r>
+              <a:rPr b="0" sz="1700"/>
+              <a:t> スティル オウプンズ、 イグザクトリー アズ </a:t>
+            </a:r>
+            <a:r>
+              <a:rPr b="1" sz="1700"/>
+              <a:t>ビフォー</a:t>
+            </a:r>
+            <a:r>
+              <a:rPr b="0" sz="1700"/>
+              <a:t>。</a:t>
+            </a:r>
+          </a:p>
+          <a:p>
+            <a:r>
+              <a:rPr b="0" sz="1700"/>
+              <a:t>One thing this tool will never tell you:</a:t>
+            </a:r>
+          </a:p>
+          <a:p>
+            <a:r>
+              <a:rPr b="0" sz="1700"/>
+              <a:t>  ワン シング ディス ツール ウィル ネヴァー </a:t>
+            </a:r>
+            <a:r>
+              <a:rPr b="1" sz="1700"/>
+              <a:t>テル ユー</a:t>
+            </a:r>
+            <a:r>
+              <a:rPr b="0" sz="1700"/>
+              <a:t>:</a:t>
+            </a:r>
+          </a:p>
+          <a:p>
+            <a:r>
+              <a:rPr b="0" sz="1700"/>
+              <a:t>whether your cover story is believable.</a:t>
+            </a:r>
+          </a:p>
+          <a:p>
+            <a:r>
+              <a:rPr b="0" sz="1700"/>
+              <a:t>  ウェザー ユア </a:t>
+            </a:r>
+            <a:r>
+              <a:rPr b="1" sz="1700"/>
+              <a:t>カヴァー ストーリー</a:t>
+            </a:r>
+            <a:r>
+              <a:rPr b="0" sz="1700"/>
+              <a:t> イズ </a:t>
+            </a:r>
+            <a:r>
+              <a:rPr b="1" sz="1700"/>
+              <a:t>ビリーヴァブル</a:t>
+            </a:r>
+            <a:r>
+              <a:rPr b="0" sz="1700"/>
+              <a:t>。</a:t>
+            </a:r>
+          </a:p>
+          <a:p>
+            <a:r>
+              <a:rPr b="0" sz="1700"/>
+              <a:t>That is your job. It does not pretend otherwise.</a:t>
+            </a:r>
+          </a:p>
+          <a:p>
+            <a:r>
+              <a:rPr b="0" sz="1700"/>
+              <a:t>  ザッツ </a:t>
+            </a:r>
+            <a:r>
+              <a:rPr b="1" sz="1700"/>
+              <a:t>ユア ジョブ</a:t>
+            </a:r>
+            <a:r>
+              <a:rPr b="0" sz="1700"/>
+              <a:t>。 イット ダズ ナット </a:t>
+            </a:r>
+            <a:r>
+              <a:rPr b="1" sz="1700"/>
+              <a:t>プリテンド</a:t>
+            </a:r>
+            <a:r>
+              <a:rPr b="0" sz="1700"/>
+              <a:t> アザーワイズ。</a:t>
+            </a:r>
+          </a:p>
+          <a:p>
+            <a:r>
+              <a:rPr b="0" sz="1700"/>
+              <a:t/>
+            </a:r>
+          </a:p>
+          <a:p>
+            <a:r>
+              <a:rPr b="0" sz="1200"/>
+              <a:t>── SCENE 11 · Wrap（0:10）</a:t>
+            </a:r>
+          </a:p>
+          <a:p>
+            <a:r>
+              <a:rPr b="0" sz="1200"/>
+              <a:t>DO: スライド（Slide 25）へ戻す。</a:t>
+            </a:r>
+          </a:p>
+          <a:p>
+            <a:r>
+              <a:rPr b="0" sz="1700"/>
+              <a:t>One file. Two objects. Two passwords.</a:t>
+            </a:r>
+          </a:p>
+          <a:p>
+            <a:r>
+              <a:rPr b="0" sz="1700"/>
+              <a:t>  </a:t>
+            </a:r>
+            <a:r>
+              <a:rPr b="1" sz="1700"/>
+              <a:t>ワン ファイル</a:t>
             </a:r>
             <a:r>
               <a:rPr b="0" sz="1700"/>
@@ -5672,7 +7720,15 @@
             </a:r>
             <a:r>
               <a:rPr b="1" sz="1700"/>
-              <a:t>ノウ マジック バイツ</a:t>
+              <a:t>トゥー オブジェクツ</a:t>
+            </a:r>
+            <a:r>
+              <a:rPr b="0" sz="1700"/>
+              <a:t>。 </a:t>
+            </a:r>
+            <a:r>
+              <a:rPr b="1" sz="1700"/>
+              <a:t>トゥー パスワーズ</a:t>
             </a:r>
             <a:r>
               <a:rPr b="0" sz="1700"/>
@@ -5682,21 +7738,57 @@
           <a:p>
             <a:r>
               <a:rPr b="0" sz="1700"/>
-              <a:t>On disk, it’s indistinguishable from random data.”</a:t>
-            </a:r>
-          </a:p>
-          <a:p>
-            <a:r>
-              <a:rPr b="0" sz="1700"/>
-              <a:t>  オン ディスク、 イッツ </a:t>
-            </a:r>
-            <a:r>
-              <a:rPr b="1" sz="1700"/>
-              <a:t>インディスティングウィシャブル</a:t>
-            </a:r>
-            <a:r>
-              <a:rPr b="0" sz="1700"/>
-              <a:t> フロム ランダム データ。</a:t>
+              <a:t>And a password that ends one, instead of opening it.</a:t>
+            </a:r>
+          </a:p>
+          <a:p>
+            <a:r>
+              <a:rPr b="0" sz="1700"/>
+              <a:t>  アンド ア パスワード ザット </a:t>
+            </a:r>
+            <a:r>
+              <a:rPr b="1" sz="1700"/>
+              <a:t>エンズ</a:t>
+            </a:r>
+            <a:r>
+              <a:rPr b="0" sz="1700"/>
+              <a:t> ワン、 インステッド オヴ </a:t>
+            </a:r>
+            <a:r>
+              <a:rPr b="1" sz="1700"/>
+              <a:t>オウプニング</a:t>
+            </a:r>
+            <a:r>
+              <a:rPr b="0" sz="1700"/>
+              <a:t> イット。</a:t>
+            </a:r>
+          </a:p>
+          <a:p>
+            <a:r>
+              <a:rPr b="0" sz="1700"/>
+              <a:t>On real hardware. Come and try it at the table.</a:t>
+            </a:r>
+          </a:p>
+          <a:p>
+            <a:r>
+              <a:rPr b="0" sz="1700"/>
+              <a:t>  オン </a:t>
+            </a:r>
+            <a:r>
+              <a:rPr b="1" sz="1700"/>
+              <a:t>リアル ハードウェア</a:t>
+            </a:r>
+            <a:r>
+              <a:rPr b="0" sz="1700"/>
+              <a:t>。 カム アンド </a:t>
+            </a:r>
+            <a:r>
+              <a:rPr b="1" sz="1700"/>
+              <a:t>トライ イット</a:t>
+            </a:r>
+            <a:r>
+              <a:rPr b="0" sz="1700"/>
+              <a:t> アット ザ テイブル。</a:t>
             </a:r>
           </a:p>
           <a:p>
@@ -5707,286 +7799,14 @@
           </a:p>
           <a:p>
             <a:r>
-              <a:rPr b="0" sz="1700"/>
-              <a:t>── STEP 2 · 1:30 · Bind — put two different files into one container</a:t>
-            </a:r>
-          </a:p>
-          <a:p>
-            <a:r>
               <a:rPr b="0" sz="1200"/>
-              <a:t>DO: TUI で w → プロジェクタをラップトップのブラウザへ切替 → 事前ブックマークの /unlock タブに store トークンを入力 → Store 画面。1回目：「Choose the entry」で Entry 1 → ファイル → パスワード → 物体を手元に置いたまま 1 · Capture empty scene → 物体Aをかざして 2 · Capture access object → かざしたまま Protect file2回目：Entry 2 に切替 → 別ファイル → 別パスワード → 物体を外して 1 · Capture empty scene → 物体Bをかざして 2 · Capture access object → Advanced security options → Restricted recovery password に破壊パスワード → かざしたまま Protect file</a:t>
-            </a:r>
-          </a:p>
-          <a:p>
-            <a:r>
-              <a:rPr b="0" sz="1700"/>
-              <a:t>“Now I switch to the browser.</a:t>
-            </a:r>
-          </a:p>
-          <a:p>
-            <a:r>
-              <a:rPr b="0" sz="1700"/>
-              <a:t>  ナウ アイ スウィッチ トゥ ザ </a:t>
-            </a:r>
-            <a:r>
-              <a:rPr b="1" sz="1700"/>
-              <a:t>ブラウザ</a:t>
-            </a:r>
-            <a:r>
-              <a:rPr b="0" sz="1700"/>
-              <a:t>。</a:t>
-            </a:r>
-          </a:p>
-          <a:p>
-            <a:r>
-              <a:rPr b="0" sz="1700"/>
-              <a:t>The same device serves a local web interface.</a:t>
-            </a:r>
-          </a:p>
-          <a:p>
-            <a:r>
-              <a:rPr b="0" sz="1700"/>
-              <a:t>  ザ セイム デバイス サーヴズ ア </a:t>
-            </a:r>
-            <a:r>
-              <a:rPr b="1" sz="1700"/>
-              <a:t>ローカル ウェブ インターフェイス</a:t>
-            </a:r>
-            <a:r>
-              <a:rPr b="0" sz="1700"/>
-              <a:t>。</a:t>
-            </a:r>
-          </a:p>
-          <a:p>
-            <a:r>
-              <a:rPr b="0" sz="1700"/>
-              <a:t>I’m logged in with a token scoped to the store role.</a:t>
-            </a:r>
-          </a:p>
-          <a:p>
-            <a:r>
-              <a:rPr b="0" sz="1700"/>
-              <a:t>  アイム ログド イン ウィズ ア トウクン スコウプト トゥ ザ </a:t>
-            </a:r>
-            <a:r>
-              <a:rPr b="1" sz="1700"/>
-              <a:t>ストア ロウル</a:t>
-            </a:r>
-            <a:r>
-              <a:rPr b="0" sz="1700"/>
-              <a:t>。</a:t>
-            </a:r>
-          </a:p>
-          <a:p>
-            <a:r>
-              <a:rPr b="0" sz="1700"/>
-              <a:t>I’m putting two different files into the one container I just made.</a:t>
-            </a:r>
-          </a:p>
-          <a:p>
-            <a:r>
-              <a:rPr b="0" sz="1700"/>
-              <a:t>  アイム プティング </a:t>
-            </a:r>
-            <a:r>
-              <a:rPr b="1" sz="1700"/>
-              <a:t>トゥー ディファレント ファイルズ</a:t>
-            </a:r>
-            <a:r>
-              <a:rPr b="0" sz="1700"/>
-              <a:t> イントゥ ザ ワン コンテナ アイ ジャスト メイド。</a:t>
-            </a:r>
-          </a:p>
-          <a:p>
-            <a:r>
-              <a:rPr b="0" sz="1700"/>
-              <a:t>Now watch — it takes two shots.</a:t>
-            </a:r>
-          </a:p>
-          <a:p>
-            <a:r>
-              <a:rPr b="0" sz="1700"/>
-              <a:t>  ナウ </a:t>
-            </a:r>
-            <a:r>
-              <a:rPr b="1" sz="1700"/>
-              <a:t>ウォッチ</a:t>
-            </a:r>
-            <a:r>
-              <a:rPr b="0" sz="1700"/>
-              <a:t> — イット テイクス </a:t>
-            </a:r>
-            <a:r>
-              <a:rPr b="1" sz="1700"/>
-              <a:t>トゥー ショッツ</a:t>
-            </a:r>
-            <a:r>
-              <a:rPr b="0" sz="1700"/>
-              <a:t>。</a:t>
-            </a:r>
-          </a:p>
-          <a:p>
-            <a:r>
-              <a:rPr b="0" sz="1700"/>
-              <a:t>First the empty view. Then the object.</a:t>
-            </a:r>
-          </a:p>
-          <a:p>
-            <a:r>
-              <a:rPr b="0" sz="1700"/>
-              <a:t>  ファースト ジ </a:t>
-            </a:r>
-            <a:r>
-              <a:rPr b="1" sz="1700"/>
-              <a:t>エンプティ ヴュー</a:t>
-            </a:r>
-            <a:r>
-              <a:rPr b="0" sz="1700"/>
-              <a:t>。 ゼン ジ </a:t>
-            </a:r>
-            <a:r>
-              <a:rPr b="1" sz="1700"/>
-              <a:t>オブジェクト</a:t>
-            </a:r>
-            <a:r>
-              <a:rPr b="0" sz="1700"/>
-              <a:t>。</a:t>
-            </a:r>
-          </a:p>
-          <a:p>
-            <a:r>
-              <a:rPr b="0" sz="1700"/>
-              <a:t>The difference between those two frames is what the device keeps.</a:t>
-            </a:r>
-          </a:p>
-          <a:p>
-            <a:r>
-              <a:rPr b="0" sz="1700"/>
-              <a:t>  ザ </a:t>
-            </a:r>
-            <a:r>
-              <a:rPr b="1" sz="1700"/>
-              <a:t>ディファレンス</a:t>
-            </a:r>
-            <a:r>
-              <a:rPr b="0" sz="1700"/>
-              <a:t> ビトウィーン ゾウズ トゥー フレイムズ イズ ワット ザ デバイス キープス。</a:t>
-            </a:r>
-          </a:p>
-          <a:p>
-            <a:r>
-              <a:rPr b="0" sz="1700"/>
-              <a:t>Otherwise it would be describing my wall.</a:t>
-            </a:r>
-          </a:p>
-          <a:p>
-            <a:r>
-              <a:rPr b="0" sz="1700"/>
-              <a:t>  アザワイズ イット ウド ビー ディスクライビング マイ </a:t>
-            </a:r>
-            <a:r>
-              <a:rPr b="1" sz="1700"/>
-              <a:t>ウォール</a:t>
-            </a:r>
-            <a:r>
-              <a:rPr b="0" sz="1700"/>
-              <a:t>。</a:t>
-            </a:r>
-          </a:p>
-          <a:p>
-            <a:r>
-              <a:rPr b="0" sz="1700"/>
-              <a:t>And then my wall would open the file.</a:t>
-            </a:r>
-          </a:p>
-          <a:p>
-            <a:r>
-              <a:rPr b="0" sz="1700"/>
-              <a:t>  アンド ゼン </a:t>
-            </a:r>
-            <a:r>
-              <a:rPr b="1" sz="1700"/>
-              <a:t>マイ ウォール</a:t>
-            </a:r>
-            <a:r>
-              <a:rPr b="0" sz="1700"/>
-              <a:t> ウド オウプン ザ ファイル。</a:t>
-            </a:r>
-          </a:p>
-          <a:p>
-            <a:r>
-              <a:rPr b="0" sz="1700"/>
-              <a:t>And remember what that object is. A cue, not a key.</a:t>
-            </a:r>
-          </a:p>
-          <a:p>
-            <a:r>
-              <a:rPr b="0" sz="1700"/>
-              <a:t>  アンド リメンバー ワット ザット オブジェクト イズ。 ア </a:t>
-            </a:r>
-            <a:r>
-              <a:rPr b="1" sz="1700"/>
-              <a:t>キュー</a:t>
-            </a:r>
-            <a:r>
-              <a:rPr b="0" sz="1700"/>
-              <a:t>、 </a:t>
-            </a:r>
-            <a:r>
-              <a:rPr b="1" sz="1700"/>
-              <a:t>ナット</a:t>
-            </a:r>
-            <a:r>
-              <a:rPr b="0" sz="1700"/>
-              <a:t> ア キー。</a:t>
-            </a:r>
-          </a:p>
-          <a:p>
-            <a:r>
-              <a:rPr b="0" sz="1700"/>
-              <a:t>It gates the operation. It is not the encryption key.</a:t>
-            </a:r>
-          </a:p>
-          <a:p>
-            <a:r>
-              <a:rPr b="0" sz="1700"/>
-              <a:t>  イット </a:t>
-            </a:r>
-            <a:r>
-              <a:rPr b="1" sz="1700"/>
-              <a:t>ゲイツ</a:t>
-            </a:r>
-            <a:r>
-              <a:rPr b="0" sz="1700"/>
-              <a:t> ジ オペレイション。 イット イズ </a:t>
-            </a:r>
-            <a:r>
-              <a:rPr b="1" sz="1700"/>
-              <a:t>ナット</a:t>
-            </a:r>
-            <a:r>
-              <a:rPr b="0" sz="1700"/>
-              <a:t> ジ インクリプション キー。</a:t>
-            </a:r>
-          </a:p>
-          <a:p>
-            <a:r>
-              <a:rPr b="0" sz="1700"/>
-              <a:t>A photograph of it unlocks nothing.”</a:t>
-            </a:r>
-          </a:p>
-          <a:p>
-            <a:r>
-              <a:rPr b="0" sz="1700"/>
-              <a:t>  ア フォウトグラフ オヴ イット アンロックス </a:t>
-            </a:r>
-            <a:r>
-              <a:rPr b="1" sz="1700"/>
-              <a:t>ナッシング</a:t>
-            </a:r>
-            <a:r>
-              <a:rPr b="0" sz="1700"/>
-              <a:t>。</a:t>
+              <a:t>── フォールバック（録画に切り替えたとき）</a:t>
+            </a:r>
+          </a:p>
+          <a:p>
+            <a:r>
+              <a:rPr b="0" sz="1200"/>
+              <a:t>JA: 「1つの容器・2つの物体・2つのパスワード・そして開くのではなく終わらせるパスワード」を口頭で辿る。個別シーンは最大15秒で見切り、止まらず前進。</a:t>
             </a:r>
           </a:p>
           <a:p>
@@ -5997,1444 +7817,8 @@
           </a:p>
           <a:p>
             <a:r>
-              <a:rPr b="0" sz="1700"/>
-              <a:t>── STEP 3 · 0:50 · Operate — the file comes back, and the role boundary</a:t>
-            </a:r>
-          </a:p>
-          <a:p>
-            <a:r>
               <a:rPr b="0" sz="1200"/>
-              <a:t>DO: 同じ store タブで Retrieve へ。物体Aを提示 → パスワード → Open protected file。続けて役割の境界：別タブで recover トークンで解錠しておいたウィンドウを一瞬提示 — ナビに Store / Maintenance が一切無いことを指す</a:t>
-            </a:r>
-          </a:p>
-          <a:p>
-            <a:r>
-              <a:rPr b="0" sz="1700"/>
-              <a:t>“Same object. Correct password. The file comes back.</a:t>
-            </a:r>
-          </a:p>
-          <a:p>
-            <a:r>
-              <a:rPr b="0" sz="1700"/>
-              <a:t>  セイム オブジェクト。 コゥレクト パスワード。 ザ ファイル </a:t>
-            </a:r>
-            <a:r>
-              <a:rPr b="1" sz="1700"/>
-              <a:t>カムズ バック</a:t>
-            </a:r>
-            <a:r>
-              <a:rPr b="0" sz="1700"/>
-              <a:t>。</a:t>
-            </a:r>
-          </a:p>
-          <a:p>
-            <a:r>
-              <a:rPr b="0" sz="1700"/>
-              <a:t>And here’s a second session. A narrower one.</a:t>
-            </a:r>
-          </a:p>
-          <a:p>
-            <a:r>
-              <a:rPr b="0" sz="1700"/>
-              <a:t>  アンド ヒアズ ア </a:t>
-            </a:r>
-            <a:r>
-              <a:rPr b="1" sz="1700"/>
-              <a:t>セカンド セッション</a:t>
-            </a:r>
-            <a:r>
-              <a:rPr b="0" sz="1700"/>
-              <a:t>。 ア </a:t>
-            </a:r>
-            <a:r>
-              <a:rPr b="1" sz="1700"/>
-              <a:t>ナロウアー</a:t>
-            </a:r>
-            <a:r>
-              <a:rPr b="0" sz="1700"/>
-              <a:t> ワン。</a:t>
-            </a:r>
-          </a:p>
-          <a:p>
-            <a:r>
-              <a:rPr b="0" sz="1700"/>
-              <a:t>Logged in with a different token — a different role.</a:t>
-            </a:r>
-          </a:p>
-          <a:p>
-            <a:r>
-              <a:rPr b="0" sz="1700"/>
-              <a:t>  ログド イン ウィズ ア </a:t>
-            </a:r>
-            <a:r>
-              <a:rPr b="1" sz="1700"/>
-              <a:t>ディファレント トウクン</a:t>
-            </a:r>
-            <a:r>
-              <a:rPr b="0" sz="1700"/>
-              <a:t> — ア </a:t>
-            </a:r>
-            <a:r>
-              <a:rPr b="1" sz="1700"/>
-              <a:t>ディファレント ロウル</a:t>
-            </a:r>
-            <a:r>
-              <a:rPr b="0" sz="1700"/>
-              <a:t>。</a:t>
-            </a:r>
-          </a:p>
-          <a:p>
-            <a:r>
-              <a:rPr b="0" sz="1700"/>
-              <a:t>It can decrypt, and it can destroy.</a:t>
-            </a:r>
-          </a:p>
-          <a:p>
-            <a:r>
-              <a:rPr b="0" sz="1700"/>
-              <a:t>  イット キャン </a:t>
-            </a:r>
-            <a:r>
-              <a:rPr b="1" sz="1700"/>
-              <a:t>ディクリプト</a:t>
-            </a:r>
-            <a:r>
-              <a:rPr b="0" sz="1700"/>
-              <a:t>、 アンド イット キャン </a:t>
-            </a:r>
-            <a:r>
-              <a:rPr b="1" sz="1700"/>
-              <a:t>ディストロイ</a:t>
-            </a:r>
-            <a:r>
-              <a:rPr b="0" sz="1700"/>
-              <a:t>。</a:t>
-            </a:r>
-          </a:p>
-          <a:p>
-            <a:r>
-              <a:rPr b="0" sz="1700"/>
-              <a:t>It can never reach Face setup at all.</a:t>
-            </a:r>
-          </a:p>
-          <a:p>
-            <a:r>
-              <a:rPr b="0" sz="1700"/>
-              <a:t>  イット キャン </a:t>
-            </a:r>
-            <a:r>
-              <a:rPr b="1" sz="1700"/>
-              <a:t>ネヴァー</a:t>
-            </a:r>
-            <a:r>
-              <a:rPr b="0" sz="1700"/>
-              <a:t> リーチ フェイス セットアップ アット オール。</a:t>
-            </a:r>
-          </a:p>
-          <a:p>
-            <a:r>
-              <a:rPr b="0" sz="1700"/>
-              <a:t>It can’t even see that there is more than one entry.”</a:t>
-            </a:r>
-          </a:p>
-          <a:p>
-            <a:r>
-              <a:rPr b="0" sz="1700"/>
-              <a:t>  イット キャント </a:t>
-            </a:r>
-            <a:r>
-              <a:rPr b="1" sz="1700"/>
-              <a:t>イーヴン シー</a:t>
-            </a:r>
-            <a:r>
-              <a:rPr b="0" sz="1700"/>
-              <a:t> ザット ゼア イズ モア ザン ワン エントリー。</a:t>
-            </a:r>
-          </a:p>
-          <a:p>
-            <a:r>
-              <a:rPr b="0" sz="1700"/>
-              <a:t/>
-            </a:r>
-          </a:p>
-          <a:p>
-            <a:r>
-              <a:rPr b="0" sz="1700"/>
-              <a:t>── STEP 3b · 0:35 · The second object, the second password — a different file</a:t>
-            </a:r>
-          </a:p>
-          <a:p>
-            <a:r>
-              <a:rPr b="0" sz="1200"/>
-              <a:t>DO: 同じ Retrieve 画面のまま、物体Bに持ち替える → 2つ目のパスワード → Open protected file。落ちてきたファイルを開いて中身を見せる</a:t>
-            </a:r>
-          </a:p>
-          <a:p>
-            <a:r>
-              <a:rPr b="0" sz="1700"/>
-              <a:t>“Now the same screen. The same container.</a:t>
-            </a:r>
-          </a:p>
-          <a:p>
-            <a:r>
-              <a:rPr b="0" sz="1700"/>
-              <a:t>  ナウ ザ </a:t>
-            </a:r>
-            <a:r>
-              <a:rPr b="1" sz="1700"/>
-              <a:t>セイム スクリーン</a:t>
-            </a:r>
-            <a:r>
-              <a:rPr b="0" sz="1700"/>
-              <a:t>。 ザ セイム コンテナ。</a:t>
-            </a:r>
-          </a:p>
-          <a:p>
-            <a:r>
-              <a:rPr b="0" sz="1700"/>
-              <a:t>But a different object — and a different password.</a:t>
-            </a:r>
-          </a:p>
-          <a:p>
-            <a:r>
-              <a:rPr b="0" sz="1700"/>
-              <a:t>  バット ア </a:t>
-            </a:r>
-            <a:r>
-              <a:rPr b="1" sz="1700"/>
-              <a:t>ディファレント オブジェクト</a:t>
-            </a:r>
-            <a:r>
-              <a:rPr b="0" sz="1700"/>
-              <a:t> — アンド ア </a:t>
-            </a:r>
-            <a:r>
-              <a:rPr b="1" sz="1700"/>
-              <a:t>ディファレント パスワード</a:t>
-            </a:r>
-            <a:r>
-              <a:rPr b="0" sz="1700"/>
-              <a:t>。</a:t>
-            </a:r>
-          </a:p>
-          <a:p>
-            <a:r>
-              <a:rPr b="0" sz="1700"/>
-              <a:t>And a different file comes back.</a:t>
-            </a:r>
-          </a:p>
-          <a:p>
-            <a:r>
-              <a:rPr b="0" sz="1700"/>
-              <a:t>  アンド ア </a:t>
-            </a:r>
-            <a:r>
-              <a:rPr b="1" sz="1700"/>
-              <a:t>ディファレント ファイル</a:t>
-            </a:r>
-            <a:r>
-              <a:rPr b="0" sz="1700"/>
-              <a:t> カムズ バック。</a:t>
-            </a:r>
-          </a:p>
-          <a:p>
-            <a:r>
-              <a:rPr b="0" sz="1700"/>
-              <a:t>One container. Two objects. Two passwords. Two files.</a:t>
-            </a:r>
-          </a:p>
-          <a:p>
-            <a:r>
-              <a:rPr b="0" sz="1700"/>
-              <a:t>  </a:t>
-            </a:r>
-            <a:r>
-              <a:rPr b="1" sz="1700"/>
-              <a:t>ワン コンテナ</a:t>
-            </a:r>
-            <a:r>
-              <a:rPr b="0" sz="1700"/>
-              <a:t>。 トゥー オブジェクツ。 トゥー パスワーズ。 </a:t>
-            </a:r>
-            <a:r>
-              <a:rPr b="1" sz="1700"/>
-              <a:t>トゥー ファイルズ</a:t>
-            </a:r>
-            <a:r>
-              <a:rPr b="0" sz="1700"/>
-              <a:t>。</a:t>
-            </a:r>
-          </a:p>
-          <a:p>
-            <a:r>
-              <a:rPr b="0" sz="1700"/>
-              <a:t>That is Slot A and Slot B — on the table, in front of you.”</a:t>
-            </a:r>
-          </a:p>
-          <a:p>
-            <a:r>
-              <a:rPr b="0" sz="1700"/>
-              <a:t>  ザット イズ </a:t>
-            </a:r>
-            <a:r>
-              <a:rPr b="1" sz="1700"/>
-              <a:t>スロット エイ アンド スロット ビー</a:t>
-            </a:r>
-            <a:r>
-              <a:rPr b="0" sz="1700"/>
-              <a:t> — オン ザ テイブル、 イン フロント オヴ ユー。</a:t>
-            </a:r>
-          </a:p>
-          <a:p>
-            <a:r>
-              <a:rPr b="0" sz="1700"/>
-              <a:t>SPEAK（間を置いて）</a:t>
-            </a:r>
-          </a:p>
-          <a:p>
-            <a:r>
-              <a:rPr b="0" sz="1700"/>
-              <a:t>“Same container. Different object — a different file.”</a:t>
-            </a:r>
-          </a:p>
-          <a:p>
-            <a:r>
-              <a:rPr b="0" sz="1700"/>
-              <a:t>  </a:t>
-            </a:r>
-            <a:r>
-              <a:rPr b="1" sz="1700"/>
-              <a:t>セイム コンテナ</a:t>
-            </a:r>
-            <a:r>
-              <a:rPr b="0" sz="1700"/>
-              <a:t>。 ディファレント オブジェクト — ア </a:t>
-            </a:r>
-            <a:r>
-              <a:rPr b="1" sz="1700"/>
-              <a:t>ディファレント ファイル</a:t>
-            </a:r>
-            <a:r>
-              <a:rPr b="0" sz="1700"/>
-              <a:t>。</a:t>
-            </a:r>
-          </a:p>
-          <a:p>
-            <a:r>
-              <a:rPr b="0" sz="1700"/>
-              <a:t/>
-            </a:r>
-          </a:p>
-          <a:p>
-            <a:r>
-              <a:rPr b="0" sz="1700"/>
-              <a:t>── STEP 4 · 0:50 · Same tab, same password — the object is gone, and it refuses</a:t>
-            </a:r>
-          </a:p>
-          <a:p>
-            <a:r>
-              <a:rPr b="0" sz="1200"/>
-              <a:t>DO: Step 3 と同じ Retrieve 画面のまま。 物体をカメラの視野から完全に外す（手で覆うのではなく卓の下に下ろす）→ オーバーレイが No object cue match に変わるのを待つ → Step 3 と同じパスワード → Open protected file。直後に物体を戻して同じパスワードで再実行し、成功させる（0:15）</a:t>
-            </a:r>
-          </a:p>
-          <a:p>
-            <a:r>
-              <a:rPr b="0" sz="1700"/>
-              <a:t>“Same tab. Same file. Same password. Same everything.</a:t>
-            </a:r>
-          </a:p>
-          <a:p>
-            <a:r>
-              <a:rPr b="0" sz="1700"/>
-              <a:t>  </a:t>
-            </a:r>
-            <a:r>
-              <a:rPr b="1" sz="1700"/>
-              <a:t>セイム</a:t>
-            </a:r>
-            <a:r>
-              <a:rPr b="0" sz="1700"/>
-              <a:t> タブ。 </a:t>
-            </a:r>
-            <a:r>
-              <a:rPr b="1" sz="1700"/>
-              <a:t>セイム</a:t>
-            </a:r>
-            <a:r>
-              <a:rPr b="0" sz="1700"/>
-              <a:t> ファイル。 </a:t>
-            </a:r>
-            <a:r>
-              <a:rPr b="1" sz="1700"/>
-              <a:t>セイム</a:t>
-            </a:r>
-            <a:r>
-              <a:rPr b="0" sz="1700"/>
-              <a:t> パスワード。 </a:t>
-            </a:r>
-            <a:r>
-              <a:rPr b="1" sz="1700"/>
-              <a:t>セイム エヴリシング</a:t>
-            </a:r>
-            <a:r>
-              <a:rPr b="0" sz="1700"/>
-              <a:t>。</a:t>
-            </a:r>
-          </a:p>
-          <a:p>
-            <a:r>
-              <a:rPr b="0" sz="1700"/>
-              <a:t>I have only taken the object away.</a:t>
-            </a:r>
-          </a:p>
-          <a:p>
-            <a:r>
-              <a:rPr b="0" sz="1700"/>
-              <a:t>  アイ ハヴ </a:t>
-            </a:r>
-            <a:r>
-              <a:rPr b="1" sz="1700"/>
-              <a:t>オウンリー</a:t>
-            </a:r>
-            <a:r>
-              <a:rPr b="0" sz="1700"/>
-              <a:t> テイクン ジ オブジェクト アウェイ。</a:t>
-            </a:r>
-          </a:p>
-          <a:p>
-            <a:r>
-              <a:rPr b="0" sz="1700"/>
-              <a:t>And look at what it says. ‘No valid entry found.’</a:t>
-            </a:r>
-          </a:p>
-          <a:p>
-            <a:r>
-              <a:rPr b="0" sz="1700"/>
-              <a:t>  アンド ルック アット ワット イット セズ。 </a:t>
-            </a:r>
-            <a:r>
-              <a:rPr b="1" sz="1700"/>
-              <a:t>ノウ ヴァリッド エントリー ファウンド</a:t>
-            </a:r>
-            <a:r>
-              <a:rPr b="0" sz="1700"/>
-              <a:t>。</a:t>
-            </a:r>
-          </a:p>
-          <a:p>
-            <a:r>
-              <a:rPr b="0" sz="1700"/>
-              <a:t>Not ‘wrong object’. Not ‘object missing’.</a:t>
-            </a:r>
-          </a:p>
-          <a:p>
-            <a:r>
-              <a:rPr b="0" sz="1700"/>
-              <a:t>  ナット </a:t>
-            </a:r>
-            <a:r>
-              <a:rPr b="1" sz="1700"/>
-              <a:t>ゥロング オブジェクト</a:t>
-            </a:r>
-            <a:r>
-              <a:rPr b="0" sz="1700"/>
-              <a:t>。 ナット </a:t>
-            </a:r>
-            <a:r>
-              <a:rPr b="1" sz="1700"/>
-              <a:t>オブジェクト ミッシング</a:t>
-            </a:r>
-            <a:r>
-              <a:rPr b="0" sz="1700"/>
-              <a:t>。</a:t>
-            </a:r>
-          </a:p>
-          <a:p>
-            <a:r>
-              <a:rPr b="0" sz="1700"/>
-              <a:t>It won’t even tell you what it’s waiting for.</a:t>
-            </a:r>
-          </a:p>
-          <a:p>
-            <a:r>
-              <a:rPr b="0" sz="1700"/>
-              <a:t>  イット ウォウント イーヴン テル ユー ワット イッツ </a:t>
-            </a:r>
-            <a:r>
-              <a:rPr b="1" sz="1700"/>
-              <a:t>ウェイティング</a:t>
-            </a:r>
-            <a:r>
-              <a:rPr b="0" sz="1700"/>
-              <a:t> フォー。</a:t>
-            </a:r>
-          </a:p>
-          <a:p>
-            <a:r>
-              <a:rPr b="0" sz="1700"/>
-              <a:t>That is deliberate.</a:t>
-            </a:r>
-          </a:p>
-          <a:p>
-            <a:r>
-              <a:rPr b="0" sz="1700"/>
-              <a:t>  ザット イズ </a:t>
-            </a:r>
-            <a:r>
-              <a:rPr b="1" sz="1700"/>
-              <a:t>ディリバレット</a:t>
-            </a:r>
-            <a:r>
-              <a:rPr b="0" sz="1700"/>
-              <a:t>。</a:t>
-            </a:r>
-          </a:p>
-          <a:p>
-            <a:r>
-              <a:rPr b="0" sz="1700"/>
-              <a:t>That is what ‘the cue gates the operation’ means.”</a:t>
-            </a:r>
-          </a:p>
-          <a:p>
-            <a:r>
-              <a:rPr b="0" sz="1700"/>
-              <a:t>  </a:t>
-            </a:r>
-            <a:r>
-              <a:rPr b="1" sz="1700"/>
-              <a:t>ザット</a:t>
-            </a:r>
-            <a:r>
-              <a:rPr b="0" sz="1700"/>
-              <a:t> イズ ワット 「ザ キュー ゲイツ ジ オペレイション」 ミーンズ。</a:t>
-            </a:r>
-          </a:p>
-          <a:p>
-            <a:r>
-              <a:rPr b="0" sz="1700"/>
-              <a:t>SPEAK（間を置いて）</a:t>
-            </a:r>
-          </a:p>
-          <a:p>
-            <a:r>
-              <a:rPr b="0" sz="1700"/>
-              <a:t>“Only the object is gone. And it refuses.”</a:t>
-            </a:r>
-          </a:p>
-          <a:p>
-            <a:r>
-              <a:rPr b="0" sz="1700"/>
-              <a:t>  </a:t>
-            </a:r>
-            <a:r>
-              <a:rPr b="1" sz="1700"/>
-              <a:t>オウンリー ジ オブジェクト</a:t>
-            </a:r>
-            <a:r>
-              <a:rPr b="0" sz="1700"/>
-              <a:t> イズ ゴーン。 アンド イット </a:t>
-            </a:r>
-            <a:r>
-              <a:rPr b="1" sz="1700"/>
-              <a:t>リフューズィズ</a:t>
-            </a:r>
-            <a:r>
-              <a:rPr b="0" sz="1700"/>
-              <a:t>。</a:t>
-            </a:r>
-          </a:p>
-          <a:p>
-            <a:r>
-              <a:rPr b="0" sz="1700"/>
-              <a:t/>
-            </a:r>
-          </a:p>
-          <a:p>
-            <a:r>
-              <a:rPr b="0" sz="1700"/>
-              <a:t>── STEP 4b · 0:40 · 同じ欄に、違うパスワード — エントリが消える</a:t>
-            </a:r>
-          </a:p>
-          <a:p>
-            <a:r>
-              <a:rPr b="0" sz="1200"/>
-              <a:t>DO: Step 3・4 とまったく同じ Retrieve 画面。 消したい Face の物体をかざす → パスワード欄に、そのアクセスパスワードではなく Clearing password（Store の Advanced security options で設定した2つめ）を入力 → Open protected file</a:t>
-            </a:r>
-          </a:p>
-          <a:p>
-            <a:r>
-              <a:rPr b="0" sz="1700"/>
-              <a:t>“Now watch this screen — because nothing on it is going to change.</a:t>
-            </a:r>
-          </a:p>
-          <a:p>
-            <a:r>
-              <a:rPr b="0" sz="1700"/>
-              <a:t>  ナウ </a:t>
-            </a:r>
-            <a:r>
-              <a:rPr b="1" sz="1700"/>
-              <a:t>ウォッチ ディス スクリーン</a:t>
-            </a:r>
-            <a:r>
-              <a:rPr b="0" sz="1700"/>
-              <a:t> — ビコズ </a:t>
-            </a:r>
-            <a:r>
-              <a:rPr b="1" sz="1700"/>
-              <a:t>ナッシング</a:t>
-            </a:r>
-            <a:r>
-              <a:rPr b="0" sz="1700"/>
-              <a:t> オン イット イズ ゴウイング トゥ チェインジ。</a:t>
-            </a:r>
-          </a:p>
-          <a:p>
-            <a:r>
-              <a:rPr b="0" sz="1700"/>
-              <a:t>Same tab. Same object. Same field. Same button.</a:t>
-            </a:r>
-          </a:p>
-          <a:p>
-            <a:r>
-              <a:rPr b="0" sz="1700"/>
-              <a:t>  セイム タブ。 セイム オブジェクト。 セイム フィールド。 セイム バトゥン。</a:t>
-            </a:r>
-          </a:p>
-          <a:p>
-            <a:r>
-              <a:rPr b="0" sz="1700"/>
-              <a:t>The only thing I do differently… is type a different password.</a:t>
-            </a:r>
-          </a:p>
-          <a:p>
-            <a:r>
-              <a:rPr b="0" sz="1700"/>
-              <a:t>  ジ オウンリー シング アイ ドゥー ディファレントリー… イズ タイプ ア </a:t>
-            </a:r>
-            <a:r>
-              <a:rPr b="1" sz="1700"/>
-              <a:t>ディファレント パスワード</a:t>
-            </a:r>
-            <a:r>
-              <a:rPr b="0" sz="1700"/>
-              <a:t>。</a:t>
-            </a:r>
-          </a:p>
-          <a:p>
-            <a:r>
-              <a:rPr b="0" sz="1700"/>
-              <a:t>And it says what it says when you mistype. No valid entry found.</a:t>
-            </a:r>
-          </a:p>
-          <a:p>
-            <a:r>
-              <a:rPr b="0" sz="1700"/>
-              <a:t>  アンド イット セズ ワット イット セズ ウェン ユー </a:t>
-            </a:r>
-            <a:r>
-              <a:rPr b="1" sz="1700"/>
-              <a:t>ミスタイプ</a:t>
-            </a:r>
-            <a:r>
-              <a:rPr b="0" sz="1700"/>
-              <a:t>。 ノウ ヴァリッド エントリー ファウンド。</a:t>
-            </a:r>
-          </a:p>
-          <a:p>
-            <a:r>
-              <a:rPr b="0" sz="1700"/>
-              <a:t>Except that entry is not locked.</a:t>
-            </a:r>
-          </a:p>
-          <a:p>
-            <a:r>
-              <a:rPr b="0" sz="1700"/>
-              <a:t>  イクセプト ザット エントリー イズ </a:t>
-            </a:r>
-            <a:r>
-              <a:rPr b="1" sz="1700"/>
-              <a:t>ナット ロックト</a:t>
-            </a:r>
-            <a:r>
-              <a:rPr b="0" sz="1700"/>
-              <a:t>。</a:t>
-            </a:r>
-          </a:p>
-          <a:p>
-            <a:r>
-              <a:rPr b="0" sz="1700"/>
-              <a:t>It is gone.</a:t>
-            </a:r>
-          </a:p>
-          <a:p>
-            <a:r>
-              <a:rPr b="0" sz="1700"/>
-              <a:t>  イット イズ </a:t>
-            </a:r>
-            <a:r>
-              <a:rPr b="1" sz="1700"/>
-              <a:t>ゴーン</a:t>
-            </a:r>
-            <a:r>
-              <a:rPr b="0" sz="1700"/>
-              <a:t>。</a:t>
-            </a:r>
-          </a:p>
-          <a:p>
-            <a:r>
-              <a:rPr b="0" sz="1700"/>
-              <a:t>The other one is untouched. And I can still open it.</a:t>
-            </a:r>
-          </a:p>
-          <a:p>
-            <a:r>
-              <a:rPr b="0" sz="1700"/>
-              <a:t>  ジ アザー ワン イズ </a:t>
-            </a:r>
-            <a:r>
-              <a:rPr b="1" sz="1700"/>
-              <a:t>アンタッチト</a:t>
-            </a:r>
-            <a:r>
-              <a:rPr b="0" sz="1700"/>
-              <a:t>。 アンド アイ キャン </a:t>
-            </a:r>
-            <a:r>
-              <a:rPr b="1" sz="1700"/>
-              <a:t>スティル オウプン</a:t>
-            </a:r>
-            <a:r>
-              <a:rPr b="0" sz="1700"/>
-              <a:t> イット。</a:t>
-            </a:r>
-          </a:p>
-          <a:p>
-            <a:r>
-              <a:rPr b="0" sz="1700"/>
-              <a:t>That’s my answer to ‘they’ll just make you type the password.’</a:t>
-            </a:r>
-          </a:p>
-          <a:p>
-            <a:r>
-              <a:rPr b="0" sz="1700"/>
-              <a:t>  ザッツ マイ </a:t>
-            </a:r>
-            <a:r>
-              <a:rPr b="1" sz="1700"/>
-              <a:t>アンサー</a:t>
-            </a:r>
-            <a:r>
-              <a:rPr b="0" sz="1700"/>
-              <a:t> トゥ 「ゼイル ジャスト メイク ユー タイプ ザ パスワード」。</a:t>
-            </a:r>
-          </a:p>
-          <a:p>
-            <a:r>
-              <a:rPr b="0" sz="1700"/>
-              <a:t>The password they can compel is not the only one there is.”</a:t>
-            </a:r>
-          </a:p>
-          <a:p>
-            <a:r>
-              <a:rPr b="0" sz="1700"/>
-              <a:t>  ザ パスワード ゼイ キャン </a:t>
-            </a:r>
-            <a:r>
-              <a:rPr b="1" sz="1700"/>
-              <a:t>コンペル</a:t>
-            </a:r>
-            <a:r>
-              <a:rPr b="0" sz="1700"/>
-              <a:t> イズ ナット ジ </a:t>
-            </a:r>
-            <a:r>
-              <a:rPr b="1" sz="1700"/>
-              <a:t>オウンリー ワン</a:t>
-            </a:r>
-            <a:r>
-              <a:rPr b="0" sz="1700"/>
-              <a:t> ゼア イズ。</a:t>
-            </a:r>
-          </a:p>
-          <a:p>
-            <a:r>
-              <a:rPr b="0" sz="1700"/>
-              <a:t>SPEAK（間を置いて）</a:t>
-            </a:r>
-          </a:p>
-          <a:p>
-            <a:r>
-              <a:rPr b="0" sz="1700"/>
-              <a:t>“Nothing on the screen changed. The entry is gone.”</a:t>
-            </a:r>
-          </a:p>
-          <a:p>
-            <a:r>
-              <a:rPr b="0" sz="1700"/>
-              <a:t>  </a:t>
-            </a:r>
-            <a:r>
-              <a:rPr b="1" sz="1700"/>
-              <a:t>ナッシング</a:t>
-            </a:r>
-            <a:r>
-              <a:rPr b="0" sz="1700"/>
-              <a:t> オン ザ スクリーン チェインジド。 ジ エントリー イズ </a:t>
-            </a:r>
-            <a:r>
-              <a:rPr b="1" sz="1700"/>
-              <a:t>ゴーン</a:t>
-            </a:r>
-            <a:r>
-              <a:rPr b="0" sz="1700"/>
-              <a:t>。</a:t>
-            </a:r>
-          </a:p>
-          <a:p>
-            <a:r>
-              <a:rPr b="0" sz="1700"/>
-              <a:t/>
-            </a:r>
-          </a:p>
-          <a:p>
-            <a:r>
-              <a:rPr b="0" sz="1700"/>
-              <a:t>── STEP 5 · 0:50 · Audit — free space, and what it won’t judge</a:t>
-            </a:r>
-          </a:p>
-          <a:p>
-            <a:r>
-              <a:rPr b="0" sz="1200"/>
-              <a:t>DO: ここでプロジェクタを TUI に戻す（切替②・往復の折り返し。以降は切替なし）。 e Expert → a Audit。Free Space Filler セクションを指す（戻るのは Esc）。a は #169 の非活性化対象から意図的に外してある — この Step でキー1つで直接使うため</a:t>
-            </a:r>
-          </a:p>
-          <a:p>
-            <a:r>
-              <a:rPr b="0" sz="1700"/>
-              <a:t>“Audit reports per face.</a:t>
-            </a:r>
-          </a:p>
-          <a:p>
-            <a:r>
-              <a:rPr b="0" sz="1700"/>
-              <a:t>  </a:t>
-            </a:r>
-            <a:r>
-              <a:rPr b="1" sz="1700"/>
-              <a:t>オーディット</a:t>
-            </a:r>
-            <a:r>
-              <a:rPr b="0" sz="1700"/>
-              <a:t> リポーツ パー </a:t>
-            </a:r>
-            <a:r>
-              <a:rPr b="1" sz="1700"/>
-              <a:t>フェイス</a:t>
-            </a:r>
-            <a:r>
-              <a:rPr b="0" sz="1700"/>
-              <a:t>。</a:t>
-            </a:r>
-          </a:p>
-          <a:p>
-            <a:r>
-              <a:rPr b="0" sz="1700"/>
-              <a:t>Now notice what it does not claim.</a:t>
-            </a:r>
-          </a:p>
-          <a:p>
-            <a:r>
-              <a:rPr b="0" sz="1700"/>
-              <a:t>  ナウ ノウティス ワット イット ダズ </a:t>
-            </a:r>
-            <a:r>
-              <a:rPr b="1" sz="1700"/>
-              <a:t>ナット</a:t>
-            </a:r>
-            <a:r>
-              <a:rPr b="0" sz="1700"/>
-              <a:t> クレイム。</a:t>
-            </a:r>
-          </a:p>
-          <a:p>
-            <a:r>
-              <a:rPr b="0" sz="1700"/>
-              <a:t>It doesn’t tell me my cover story is convincing.</a:t>
-            </a:r>
-          </a:p>
-          <a:p>
-            <a:r>
-              <a:rPr b="0" sz="1700"/>
-              <a:t>  イット ダズント テル ミー マイ カヴァー ストーリー イズ </a:t>
-            </a:r>
-            <a:r>
-              <a:rPr b="1" sz="1700"/>
-              <a:t>コンヴィンシング</a:t>
-            </a:r>
-            <a:r>
-              <a:rPr b="0" sz="1700"/>
-              <a:t>。</a:t>
-            </a:r>
-          </a:p>
-          <a:p>
-            <a:r>
-              <a:rPr b="0" sz="1700"/>
-              <a:t>The file I would hand over is one I wrote, and stored, myself.</a:t>
-            </a:r>
-          </a:p>
-          <a:p>
-            <a:r>
-              <a:rPr b="0" sz="1700"/>
-              <a:t>  ザ ファイル アイ ウド ハンド オウヴァー イズ ワン アイ </a:t>
-            </a:r>
-            <a:r>
-              <a:rPr b="1" sz="1700"/>
-              <a:t>ロウト</a:t>
-            </a:r>
-            <a:r>
-              <a:rPr b="0" sz="1700"/>
-              <a:t>、 アンド </a:t>
-            </a:r>
-            <a:r>
-              <a:rPr b="1" sz="1700"/>
-              <a:t>ストード</a:t>
-            </a:r>
-            <a:r>
-              <a:rPr b="0" sz="1700"/>
-              <a:t>、 マイセルフ。</a:t>
-            </a:r>
-          </a:p>
-          <a:p>
-            <a:r>
-              <a:rPr b="0" sz="1700"/>
-              <a:t>The tool can’t judge whether it’s believable. And it doesn’t pretend to.</a:t>
-            </a:r>
-          </a:p>
-          <a:p>
-            <a:r>
-              <a:rPr b="0" sz="1700"/>
-              <a:t>  ザ ツール キャント </a:t>
-            </a:r>
-            <a:r>
-              <a:rPr b="1" sz="1700"/>
-              <a:t>ジャッジ</a:t>
-            </a:r>
-            <a:r>
-              <a:rPr b="0" sz="1700"/>
-              <a:t> ウェザー イッツ ビリーヴァブル。 アンド イット ダズント </a:t>
-            </a:r>
-            <a:r>
-              <a:rPr b="1" sz="1700"/>
-              <a:t>プリテンド</a:t>
-            </a:r>
-            <a:r>
-              <a:rPr b="0" sz="1700"/>
-              <a:t> トゥ。</a:t>
-            </a:r>
-          </a:p>
-          <a:p>
-            <a:r>
-              <a:rPr b="0" sz="1700"/>
-              <a:t>All it reports here is how much free space is filled —</a:t>
-            </a:r>
-          </a:p>
-          <a:p>
-            <a:r>
-              <a:rPr b="0" sz="1700"/>
-              <a:t>  オール イット リポーツ ヒア イズ ハウ マッチ </a:t>
-            </a:r>
-            <a:r>
-              <a:rPr b="1" sz="1700"/>
-              <a:t>フリー スペイス</a:t>
-            </a:r>
-            <a:r>
-              <a:rPr b="0" sz="1700"/>
-              <a:t> イズ フィルド —</a:t>
-            </a:r>
-          </a:p>
-          <a:p>
-            <a:r>
-              <a:rPr b="0" sz="1700"/>
-              <a:t>so an otherwise empty container doesn’t read as empty.</a:t>
-            </a:r>
-          </a:p>
-          <a:p>
-            <a:r>
-              <a:rPr b="0" sz="1700"/>
-              <a:t>  ソウ アン アザワイズ エンプティ コンテナ ダズント リード アズ </a:t>
-            </a:r>
-            <a:r>
-              <a:rPr b="1" sz="1700"/>
-              <a:t>エンプティ</a:t>
-            </a:r>
-            <a:r>
-              <a:rPr b="0" sz="1700"/>
-              <a:t>。</a:t>
-            </a:r>
-          </a:p>
-          <a:p>
-            <a:r>
-              <a:rPr b="0" sz="1700"/>
-              <a:t>Judging the cover story is the operator’s job.</a:t>
-            </a:r>
-          </a:p>
-          <a:p>
-            <a:r>
-              <a:rPr b="0" sz="1700"/>
-              <a:t>  ジャッジング ザ カヴァー ストーリー イズ ジ </a:t>
-            </a:r>
-            <a:r>
-              <a:rPr b="1" sz="1700"/>
-              <a:t>オペレイターズ ジョブ</a:t>
-            </a:r>
-            <a:r>
-              <a:rPr b="0" sz="1700"/>
-              <a:t>。</a:t>
-            </a:r>
-          </a:p>
-          <a:p>
-            <a:r>
-              <a:rPr b="0" sz="1700"/>
-              <a:t>And the tool is honest about that boundary.”</a:t>
-            </a:r>
-          </a:p>
-          <a:p>
-            <a:r>
-              <a:rPr b="0" sz="1700"/>
-              <a:t>  アンド ザ ツール イズ </a:t>
-            </a:r>
-            <a:r>
-              <a:rPr b="1" sz="1700"/>
-              <a:t>オネスト</a:t>
-            </a:r>
-            <a:r>
-              <a:rPr b="0" sz="1700"/>
-              <a:t> アバウト ザット バウンダリー。</a:t>
-            </a:r>
-          </a:p>
-          <a:p>
-            <a:r>
-              <a:rPr b="0" sz="1700"/>
-              <a:t>SPEAK（間を置いて）</a:t>
-            </a:r>
-          </a:p>
-          <a:p>
-            <a:r>
-              <a:rPr b="0" sz="1700"/>
-              <a:t>“It reports what it can measure. It refuses to score what it can’t.”</a:t>
-            </a:r>
-          </a:p>
-          <a:p>
-            <a:r>
-              <a:rPr b="0" sz="1700"/>
-              <a:t>  イット リポーツ ワット イット キャン </a:t>
-            </a:r>
-            <a:r>
-              <a:rPr b="1" sz="1700"/>
-              <a:t>メジャー</a:t>
-            </a:r>
-            <a:r>
-              <a:rPr b="0" sz="1700"/>
-              <a:t>。 イット リフューズィズ トゥ </a:t>
-            </a:r>
-            <a:r>
-              <a:rPr b="1" sz="1700"/>
-              <a:t>スコア</a:t>
-            </a:r>
-            <a:r>
-              <a:rPr b="0" sz="1700"/>
-              <a:t> ワット イット キャント。</a:t>
-            </a:r>
-          </a:p>
-          <a:p>
-            <a:r>
-              <a:rPr b="0" sz="1700"/>
-              <a:t/>
-            </a:r>
-          </a:p>
-          <a:p>
-            <a:r>
-              <a:rPr b="0" sz="1700"/>
-              <a:t>── STEP 6 · 1:20 · Silent Standby — Disclose</a:t>
-            </a:r>
-          </a:p>
-          <a:p>
-            <a:r>
-              <a:rPr b="0" sz="1200"/>
-              <a:t>DO: Ctrl+S を押下。復帰は Ctrl+R または Esc。フッタに出ないので指で覚えておく</a:t>
-            </a:r>
-          </a:p>
-          <a:p>
-            <a:r>
-              <a:rPr b="0" sz="1700"/>
-              <a:t>“Now — the moment it’s built for.</a:t>
-            </a:r>
-          </a:p>
-          <a:p>
-            <a:r>
-              <a:rPr b="0" sz="1700"/>
-              <a:t>  ナウ — ザ </a:t>
-            </a:r>
-            <a:r>
-              <a:rPr b="1" sz="1700"/>
-              <a:t>モウメント</a:t>
-            </a:r>
-            <a:r>
-              <a:rPr b="0" sz="1700"/>
-              <a:t> イッツ ビルト フォー。</a:t>
-            </a:r>
-          </a:p>
-          <a:p>
-            <a:r>
-              <a:rPr b="0" sz="1700"/>
-              <a:t>One hotkey. Silent Standby.</a:t>
-            </a:r>
-          </a:p>
-          <a:p>
-            <a:r>
-              <a:rPr b="0" sz="1700"/>
-              <a:t>  </a:t>
-            </a:r>
-            <a:r>
-              <a:rPr b="1" sz="1700"/>
-              <a:t>ワン ホットキー</a:t>
-            </a:r>
-            <a:r>
-              <a:rPr b="0" sz="1700"/>
-              <a:t>。 </a:t>
-            </a:r>
-            <a:r>
-              <a:rPr b="1" sz="1700"/>
-              <a:t>サイレント スタンドバイ</a:t>
-            </a:r>
-            <a:r>
-              <a:rPr b="0" sz="1700"/>
-              <a:t>。</a:t>
-            </a:r>
-          </a:p>
-          <a:p>
-            <a:r>
-              <a:rPr b="0" sz="1700"/>
-              <a:t>The sensitive surface drops away.</a:t>
-            </a:r>
-          </a:p>
-          <a:p>
-            <a:r>
-              <a:rPr b="0" sz="1700"/>
-              <a:t>  ザ センシティヴ サーフィス </a:t>
-            </a:r>
-            <a:r>
-              <a:rPr b="1" sz="1700"/>
-              <a:t>ドロップス アウェイ</a:t>
-            </a:r>
-            <a:r>
-              <a:rPr b="0" sz="1700"/>
-              <a:t>。</a:t>
-            </a:r>
-          </a:p>
-          <a:p>
-            <a:r>
-              <a:rPr b="0" sz="1700"/>
-              <a:t>And it’s not only this screen. The web interface goes down with it.</a:t>
-            </a:r>
-          </a:p>
-          <a:p>
-            <a:r>
-              <a:rPr b="0" sz="1700"/>
-              <a:t>  アンド イッツ </a:t>
-            </a:r>
-            <a:r>
-              <a:rPr b="1" sz="1700"/>
-              <a:t>ナット オウンリー</a:t>
-            </a:r>
-            <a:r>
-              <a:rPr b="0" sz="1700"/>
-              <a:t> ディス スクリーン。 ザ ウェブ インターフェイス </a:t>
-            </a:r>
-            <a:r>
-              <a:rPr b="1" sz="1700"/>
-              <a:t>ゴウズ ダウン</a:t>
-            </a:r>
-            <a:r>
-              <a:rPr b="0" sz="1700"/>
-              <a:t> ウィズ イット。</a:t>
-            </a:r>
-          </a:p>
-          <a:p>
-            <a:r>
-              <a:rPr b="0" sz="1700"/>
-              <a:t>A laptop tethered to this device loses access at the same instant —</a:t>
-            </a:r>
-          </a:p>
-          <a:p>
-            <a:r>
-              <a:rPr b="0" sz="1700"/>
-              <a:t>  ア ラップトップ テザード トゥ ディス デバイス </a:t>
-            </a:r>
-            <a:r>
-              <a:rPr b="1" sz="1700"/>
-              <a:t>ルーズィズ アクセス</a:t>
-            </a:r>
-            <a:r>
-              <a:rPr b="0" sz="1700"/>
-              <a:t> アット ザ セイム インスタント —</a:t>
-            </a:r>
-          </a:p>
-          <a:p>
-            <a:r>
-              <a:rPr b="0" sz="1700"/>
-              <a:t>including the two browser tabs I just used.</a:t>
-            </a:r>
-          </a:p>
-          <a:p>
-            <a:r>
-              <a:rPr b="0" sz="1700"/>
-              <a:t>  インクルーディング ザ </a:t>
-            </a:r>
-            <a:r>
-              <a:rPr b="1" sz="1700"/>
-              <a:t>トゥー ブラウザ タブズ</a:t>
-            </a:r>
-            <a:r>
-              <a:rPr b="0" sz="1700"/>
-              <a:t> アイ ジャスト ユーズド。</a:t>
-            </a:r>
-          </a:p>
-          <a:p>
-            <a:r>
-              <a:rPr b="0" sz="1700"/>
-              <a:t>Coming back needs re-authentication.</a:t>
-            </a:r>
-          </a:p>
-          <a:p>
-            <a:r>
-              <a:rPr b="0" sz="1700"/>
-              <a:t>  カミング バック ニーズ </a:t>
-            </a:r>
-            <a:r>
-              <a:rPr b="1" sz="1700"/>
-              <a:t>リーオーセンティケイション</a:t>
-            </a:r>
-            <a:r>
-              <a:rPr b="0" sz="1700"/>
-              <a:t>。</a:t>
-            </a:r>
-          </a:p>
-          <a:p>
-            <a:r>
-              <a:rPr b="0" sz="1700"/>
-              <a:t>I’m not hiding from forensics.</a:t>
-            </a:r>
-          </a:p>
-          <a:p>
-            <a:r>
-              <a:rPr b="0" sz="1700"/>
-              <a:t>  アイム </a:t>
-            </a:r>
-            <a:r>
-              <a:rPr b="1" sz="1700"/>
-              <a:t>ナット ハイディング</a:t>
-            </a:r>
-            <a:r>
-              <a:rPr b="0" sz="1700"/>
-              <a:t> フロム フォレンシックス。</a:t>
-            </a:r>
-          </a:p>
-          <a:p>
-            <a:r>
-              <a:rPr b="0" sz="1700"/>
-              <a:t>I’m buying time, and uncertainty.”</a:t>
-            </a:r>
-          </a:p>
-          <a:p>
-            <a:r>
-              <a:rPr b="0" sz="1700"/>
-              <a:t>  アイム </a:t>
-            </a:r>
-            <a:r>
-              <a:rPr b="1" sz="1700"/>
-              <a:t>バイイング タイム</a:t>
-            </a:r>
-            <a:r>
-              <a:rPr b="0" sz="1700"/>
-              <a:t>、 アンド </a:t>
-            </a:r>
-            <a:r>
-              <a:rPr b="1" sz="1700"/>
-              <a:t>アンサートゥンティ</a:t>
-            </a:r>
-            <a:r>
-              <a:rPr b="0" sz="1700"/>
-              <a:t>。</a:t>
-            </a:r>
-          </a:p>
-          <a:p>
-            <a:r>
-              <a:rPr b="0" sz="1700"/>
-              <a:t>SPEAK（間を置いて）</a:t>
-            </a:r>
-          </a:p>
-          <a:p>
-            <a:r>
-              <a:rPr b="0" sz="1700"/>
-              <a:t>“One key. And the second surface goes with it.”</a:t>
-            </a:r>
-          </a:p>
-          <a:p>
-            <a:r>
-              <a:rPr b="0" sz="1700"/>
-              <a:t>  </a:t>
-            </a:r>
-            <a:r>
-              <a:rPr b="1" sz="1700"/>
-              <a:t>ワン キー</a:t>
-            </a:r>
-            <a:r>
-              <a:rPr b="0" sz="1700"/>
-              <a:t>。 アンド ザ セカンド サーフィス </a:t>
-            </a:r>
-            <a:r>
-              <a:rPr b="1" sz="1700"/>
-              <a:t>ゴウズ ウィズ イット</a:t>
-            </a:r>
-            <a:r>
-              <a:rPr b="0" sz="1700"/>
-              <a:t>。</a:t>
-            </a:r>
-          </a:p>
-          <a:p>
-            <a:r>
-              <a:rPr b="0" sz="1700"/>
-              <a:t/>
-            </a:r>
-          </a:p>
-          <a:p>
-            <a:r>
-              <a:rPr b="0" sz="1700"/>
-              <a:t>── STEP 7 · 0:10 · Wrap</a:t>
-            </a:r>
-          </a:p>
-          <a:p>
-            <a:r>
-              <a:rPr b="0" sz="1200"/>
-              <a:t>DO: Esc で Simple Operator へ戻す → プロジェクタ入力をスライドへ復帰（Slide 25）</a:t>
-            </a:r>
-          </a:p>
-          <a:p>
-            <a:r>
-              <a:rPr b="0" sz="1700"/>
-              <a:t>“That’s Prepare, Bind, Operate, Disclose. On real hardware.</a:t>
-            </a:r>
-          </a:p>
-          <a:p>
-            <a:r>
-              <a:rPr b="0" sz="1700"/>
-              <a:t>  ザッツ </a:t>
-            </a:r>
-            <a:r>
-              <a:rPr b="1" sz="1700"/>
-              <a:t>プリペア</a:t>
-            </a:r>
-            <a:r>
-              <a:rPr b="0" sz="1700"/>
-              <a:t>、 </a:t>
-            </a:r>
-            <a:r>
-              <a:rPr b="1" sz="1700"/>
-              <a:t>バインド</a:t>
-            </a:r>
-            <a:r>
-              <a:rPr b="0" sz="1700"/>
-              <a:t>、 </a:t>
-            </a:r>
-            <a:r>
-              <a:rPr b="1" sz="1700"/>
-              <a:t>オペレイト</a:t>
-            </a:r>
-            <a:r>
-              <a:rPr b="0" sz="1700"/>
-              <a:t>、 </a:t>
-            </a:r>
-            <a:r>
-              <a:rPr b="1" sz="1700"/>
-              <a:t>ディスクロウズ</a:t>
-            </a:r>
-            <a:r>
-              <a:rPr b="0" sz="1700"/>
-              <a:t>。 オン </a:t>
-            </a:r>
-            <a:r>
-              <a:rPr b="1" sz="1700"/>
-              <a:t>リアル ハードウェア</a:t>
-            </a:r>
-            <a:r>
-              <a:rPr b="0" sz="1700"/>
-              <a:t>。</a:t>
-            </a:r>
-          </a:p>
-          <a:p>
-            <a:r>
-              <a:rPr b="0" sz="1700"/>
-              <a:t>Come and try it at the table.”</a:t>
-            </a:r>
-          </a:p>
-          <a:p>
-            <a:r>
-              <a:rPr b="0" sz="1700"/>
-              <a:t>  </a:t>
-            </a:r>
-            <a:r>
-              <a:rPr b="1" sz="1700"/>
-              <a:t>カム アンド トライ イット</a:t>
-            </a:r>
-            <a:r>
-              <a:rPr b="0" sz="1700"/>
-              <a:t> アット ザ テイブル。</a:t>
-            </a:r>
-          </a:p>
-          <a:p>
-            <a:r>
-              <a:rPr b="0" sz="1700"/>
-              <a:t/>
-            </a:r>
-          </a:p>
-          <a:p>
-            <a:r>
-              <a:rPr b="0" sz="1700"/>
-              <a:t>── フォールバック（録画に切り替えたとき）</a:t>
-            </a:r>
-          </a:p>
-          <a:p>
-            <a:r>
-              <a:rPr b="0" sz="1700"/>
-              <a:t>“The design points stand either way.”</a:t>
-            </a:r>
-          </a:p>
-          <a:p>
-            <a:r>
-              <a:rPr b="0" sz="1700"/>
-              <a:t>  ザ デザイン ポインツ </a:t>
-            </a:r>
-            <a:r>
-              <a:rPr b="1" sz="1700"/>
-              <a:t>スタンド</a:t>
-            </a:r>
-            <a:r>
-              <a:rPr b="0" sz="1700"/>
-              <a:t> イーザー ウェイ。</a:t>
-            </a:r>
-          </a:p>
-          <a:p>
-            <a:r>
-              <a:rPr b="0" sz="1700"/>
-              <a:t/>
-            </a:r>
-          </a:p>
-          <a:p>
-            <a:r>
-              <a:rPr b="0" sz="1200"/>
-              <a:t>JA: Step 3→4（物体だけ外す→拒否→戻して成功）と Step 6（Standby）だけは何があっても実機で見せる。26:00 到達で Step 4b と Step 5 Audit を削る。個別ステップは最大15秒で見切り、止まらず前進。</a:t>
+              <a:t>JA: 26:00 到達で SCENE 5 と SCENE 8 を落とす。SCENE 1・6・7・9・10 は何があっても実機で見せる。Audit と Silent Standby は実演しない — Audit は卓上デモと質疑の持ち札に回す。</a:t>
             </a:r>
           </a:p>
         </p:txBody>
@@ -21383,7 +21767,7 @@
                 <a:ea typeface="Calibri" pitchFamily="34" charset="-122"/>
                 <a:cs typeface="Calibri" pitchFamily="34" charset="-120"/>
               </a:rPr>
-              <a:t>Ex-military — former JGSDF officer (2nd Lt.), cyber unit</a:t>
+              <a:t>Turn offensive experience into defensive tools</a:t>
             </a:r>
             <a:endParaRPr lang="en-US" sz="1800" dirty="0"/>
           </a:p>
@@ -21404,7 +21788,7 @@
                 <a:ea typeface="Calibri" pitchFamily="34" charset="-122"/>
                 <a:cs typeface="Calibri" pitchFamily="34" charset="-120"/>
               </a:rPr>
-              <a:t>Turn offensive experience into defensive tools</a:t>
+              <a:t>Focus: deception, delaying action, constrained SOC/NOC, coercion-aware design</a:t>
             </a:r>
             <a:endParaRPr lang="en-US" sz="1800" dirty="0"/>
           </a:p>
@@ -21425,7 +21809,7 @@
                 <a:ea typeface="Calibri" pitchFamily="34" charset="-122"/>
                 <a:cs typeface="Calibri" pitchFamily="34" charset="-120"/>
               </a:rPr>
-              <a:t>Focus: deception, delaying action, constrained SOC/NOC, coercion-aware design</a:t>
+              <a:t>Former penetration tester · CISSP</a:t>
             </a:r>
             <a:endParaRPr lang="en-US" sz="1800" dirty="0"/>
           </a:p>
@@ -21446,7 +21830,7 @@
                 <a:ea typeface="Calibri" pitchFamily="34" charset="-122"/>
                 <a:cs typeface="Calibri" pitchFamily="34" charset="-120"/>
               </a:rPr>
-              <a:t>Former penetration tester · CISSP</a:t>
+              <a:t>Ex-military — former JGSDF officer (2nd Lt.), cyber unit</a:t>
             </a:r>
             <a:endParaRPr lang="en-US" sz="1800" dirty="0"/>
           </a:p>
@@ -25567,7 +25951,7 @@
                 <a:ea typeface="Courier New" pitchFamily="34" charset="-122"/>
                 <a:cs typeface="Courier New" pitchFamily="34" charset="-120"/>
               </a:rPr>
-              <a:t>Create → Bind → Two passwords, two files → Refused → Audit → Silent Standby</a:t>
+              <a:t>One file → Two objects, two passwords, two files → Refused, both ways → Compelled → Gone</a:t>
             </a:r>
             <a:pPr indent="0" marL="0">
               <a:buNone/>

--- a/docs/submissions/Phasmid_DEFCON_DemoLabs.pptx
+++ b/docs/submissions/Phasmid_DEFCON_DemoLabs.pptx
@@ -5472,7 +5472,7 @@
           <a:p>
             <a:r>
               <a:rPr b="0" sz="1200"/>
-              <a:t>DO: xxd demo.vessel | head -5</a:t>
+              <a:t>DO: od -A x -t x1z -N 96 demo.vessel</a:t>
             </a:r>
           </a:p>
           <a:p>

--- a/docs/submissions/Phasmid_DEFCON_DemoLabs.pptx
+++ b/docs/submissions/Phasmid_DEFCON_DemoLabs.pptx
@@ -6050,7 +6050,7 @@
           <a:p>
             <a:r>
               <a:rPr b="0" sz="1200"/>
-              <a:t>DO: Store 画面 → Step 1「Choose the entry」で Entry 1 を選択</a:t>
+              <a:t>DO: Store 画面 → Step 1「Choose the slot」で Slot A を選択</a:t>
             </a:r>
           </a:p>
           <a:p>
@@ -6332,7 +6332,7 @@
           <a:p>
             <a:r>
               <a:rPr b="0" sz="1200"/>
-              <a:t>DO: Step 1 を Entry 2 に切り替え → 真のファイルを選択 → パスワードB を入力</a:t>
+              <a:t>DO: Step 1 を Slot B に切り替え → 真のファイルを選択 → パスワードB を入力</a:t>
             </a:r>
           </a:p>
           <a:p>

--- a/docs/submissions/Phasmid_DEFCON_DemoLabs.pptx
+++ b/docs/submissions/Phasmid_DEFCON_DemoLabs.pptx
@@ -3842,7 +3842,7 @@
           <a:p>
             <a:r>
               <a:rPr b="0" sz="1700"/>
-              <a:t>I’m a senior engineer at GMO Cybersecurity by Ierae, in Tokyo.</a:t>
+              <a:t>I’m a senior engineer at GMO Cybersecurity by Ierae.</a:t>
             </a:r>
           </a:p>
           <a:p>
@@ -3864,13 +3864,13 @@
             </a:r>
             <a:r>
               <a:rPr b="0" sz="1700"/>
-              <a:t>、 イン トウキョウ。</a:t>
-            </a:r>
-          </a:p>
-          <a:p>
-            <a:r>
-              <a:rPr b="0" sz="1700"/>
-              <a:t>I work in the SOC. Defence, every day.</a:t>
+              <a:t>。</a:t>
+            </a:r>
+          </a:p>
+          <a:p>
+            <a:r>
+              <a:rPr b="0" sz="1700"/>
+              <a:t>I work in the SOC. Defense, every day.</a:t>
             </a:r>
           </a:p>
           <a:p>
@@ -4029,34 +4029,6 @@
             <a:r>
               <a:rPr b="0" sz="1700"/>
               <a:t>。</a:t>
-            </a:r>
-          </a:p>
-          <a:p>
-            <a:r>
-              <a:rPr b="0" sz="1700"/>
-              <a:t>You may know my other work — Azazel, and the PAKURI family.</a:t>
-            </a:r>
-          </a:p>
-          <a:p>
-            <a:r>
-              <a:rPr b="0" sz="1700"/>
-              <a:t>  ユー メイ ノウ マイ アザー ワーク — </a:t>
-            </a:r>
-            <a:r>
-              <a:rPr b="1" sz="1700"/>
-              <a:t>アザゼル</a:t>
-            </a:r>
-            <a:r>
-              <a:rPr b="0" sz="1700"/>
-              <a:t>、 アンド ザ </a:t>
-            </a:r>
-            <a:r>
-              <a:rPr b="1" sz="1700"/>
-              <a:t>パクリ</a:t>
-            </a:r>
-            <a:r>
-              <a:rPr b="0" sz="1700"/>
-              <a:t> ファミリー。</a:t>
             </a:r>
           </a:p>
           <a:p>
@@ -5085,7 +5057,7 @@
           <a:p>
             <a:r>
               <a:rPr b="0" sz="1700"/>
-              <a:t>  オーライト — </a:t>
+              <a:t>  オールライト — </a:t>
             </a:r>
             <a:r>
               <a:rPr b="1" sz="1700"/>
@@ -5105,7 +5077,7 @@
           <a:p>
             <a:r>
               <a:rPr b="0" sz="1200"/>
-              <a:t>JA: 呼吸を整え実機に向き直る。プロジェクタ入力を TUI へ切替。バックアップ録画の頭出しを確認。以降の切替は Step 1→2（TUI→ブラウザ）と Step 4→5（ブラウザ→TUI）の1往復だけ。</a:t>
+              <a:t>JA: 呼吸を整え実機に向き直る。スペースをターミナル（TUI）へ切替。バックアップ録画の頭出しを確認。以降の切替は SCENE 1→2 の片道1回だけで、TUI には戻らない。</a:t>
             </a:r>
           </a:p>
         </p:txBody>
@@ -5192,7 +5164,7 @@
           <a:p>
             <a:r>
               <a:rPr b="0" sz="1700"/>
-              <a:t>[19:20 / ~8:05] LIVE DEMO  ★中心（9手＋任意1・TUI+WebUI・切替1往復）</a:t>
+              <a:t>[19:20 / ~8:30] LIVE DEMO  ★中心（12シーン・画面切替は片道1回）</a:t>
             </a:r>
           </a:p>
           <a:p>
@@ -5203,24 +5175,24 @@
           </a:p>
           <a:p>
             <a:r>
-              <a:rPr b="0" sz="1700"/>
+              <a:rPr b="0" sz="1200"/>
               <a:t>── 前置き（手を動かしながら）</a:t>
             </a:r>
           </a:p>
           <a:p>
             <a:r>
               <a:rPr b="0" sz="1700"/>
-              <a:t>“Here’s what you’re about to see.</a:t>
-            </a:r>
-          </a:p>
-          <a:p>
-            <a:r>
-              <a:rPr b="0" sz="1700"/>
-              <a:t>  ヒアズ ワット ユア アバウト トゥ </a:t>
-            </a:r>
-            <a:r>
-              <a:rPr b="1" sz="1700"/>
-              <a:t>シー</a:t>
+              <a:t>“This is the real system.</a:t>
+            </a:r>
+          </a:p>
+          <a:p>
+            <a:r>
+              <a:rPr b="0" sz="1700"/>
+              <a:t>  ディス イズ ザ </a:t>
+            </a:r>
+            <a:r>
+              <a:rPr b="1" sz="1700"/>
+              <a:t>リアル システム</a:t>
             </a:r>
             <a:r>
               <a:rPr b="0" sz="1700"/>
@@ -5230,65 +5202,145 @@
           <a:p>
             <a:r>
               <a:rPr b="0" sz="1700"/>
-              <a:t>I’ll create one container on the device.</a:t>
-            </a:r>
-          </a:p>
-          <a:p>
-            <a:r>
-              <a:rPr b="0" sz="1700"/>
-              <a:t>  アイル クリエイト </a:t>
-            </a:r>
-            <a:r>
-              <a:rPr b="1" sz="1700"/>
-              <a:t>ワン コンテナ</a:t>
-            </a:r>
-            <a:r>
-              <a:rPr b="0" sz="1700"/>
-              <a:t> オン ザ デバイス。</a:t>
-            </a:r>
-          </a:p>
-          <a:p>
-            <a:r>
-              <a:rPr b="0" sz="1700"/>
-              <a:t>Then, in the local web interface, I’ll put two different files into it.</a:t>
-            </a:r>
-          </a:p>
-          <a:p>
-            <a:r>
-              <a:rPr b="0" sz="1700"/>
-              <a:t>  ゼン、 イン ザ ローカル ウェブ インターフェイス、 アイル プット </a:t>
-            </a:r>
-            <a:r>
-              <a:rPr b="1" sz="1700"/>
-              <a:t>トゥー ディファレント ファイルズ</a:t>
-            </a:r>
-            <a:r>
-              <a:rPr b="0" sz="1700"/>
-              <a:t> イントゥ イット。</a:t>
-            </a:r>
-          </a:p>
-          <a:p>
-            <a:r>
-              <a:rPr b="0" sz="1700"/>
-              <a:t>Each one behind its own password, and its own everyday object.</a:t>
-            </a:r>
-          </a:p>
-          <a:p>
-            <a:r>
-              <a:rPr b="0" sz="1700"/>
-              <a:t>  イーチ ワン ビハインド イツ </a:t>
-            </a:r>
-            <a:r>
-              <a:rPr b="1" sz="1700"/>
-              <a:t>オウン パスワード</a:t>
-            </a:r>
-            <a:r>
-              <a:rPr b="0" sz="1700"/>
-              <a:t>、 アンド イツ </a:t>
-            </a:r>
-            <a:r>
-              <a:rPr b="1" sz="1700"/>
-              <a:t>オウン エヴリデイ オブジェクト</a:t>
+              <a:t>One file on disk.</a:t>
+            </a:r>
+          </a:p>
+          <a:p>
+            <a:r>
+              <a:rPr b="0" sz="1700"/>
+              <a:t>  </a:t>
+            </a:r>
+            <a:r>
+              <a:rPr b="1" sz="1700"/>
+              <a:t>ワン ファイル</a:t>
+            </a:r>
+            <a:r>
+              <a:rPr b="0" sz="1700"/>
+              <a:t> オン ディスク。</a:t>
+            </a:r>
+          </a:p>
+          <a:p>
+            <a:r>
+              <a:rPr b="0" sz="1700"/>
+              <a:t>Two objects, two passwords, two files inside it.</a:t>
+            </a:r>
+          </a:p>
+          <a:p>
+            <a:r>
+              <a:rPr b="0" sz="1700"/>
+              <a:t>  </a:t>
+            </a:r>
+            <a:r>
+              <a:rPr b="1" sz="1700"/>
+              <a:t>トゥー オブジェクツ</a:t>
+            </a:r>
+            <a:r>
+              <a:rPr b="0" sz="1700"/>
+              <a:t>、 </a:t>
+            </a:r>
+            <a:r>
+              <a:rPr b="1" sz="1700"/>
+              <a:t>トゥー パスワーズ</a:t>
+            </a:r>
+            <a:r>
+              <a:rPr b="0" sz="1700"/>
+              <a:t>、 </a:t>
+            </a:r>
+            <a:r>
+              <a:rPr b="1" sz="1700"/>
+              <a:t>トゥー ファイルズ</a:t>
+            </a:r>
+            <a:r>
+              <a:rPr b="0" sz="1700"/>
+              <a:t> インサイド イット。</a:t>
+            </a:r>
+          </a:p>
+          <a:p>
+            <a:r>
+              <a:rPr b="0" sz="1700"/>
+              <a:t>And a password that ends one, instead of opening it.”</a:t>
+            </a:r>
+          </a:p>
+          <a:p>
+            <a:r>
+              <a:rPr b="0" sz="1700"/>
+              <a:t>  アンド ア パスワード ザット </a:t>
+            </a:r>
+            <a:r>
+              <a:rPr b="1" sz="1700"/>
+              <a:t>エンズ</a:t>
+            </a:r>
+            <a:r>
+              <a:rPr b="0" sz="1700"/>
+              <a:t> ワン、 インステッド オヴ </a:t>
+            </a:r>
+            <a:r>
+              <a:rPr b="1" sz="1700"/>
+              <a:t>オウプニング</a:t>
+            </a:r>
+            <a:r>
+              <a:rPr b="0" sz="1700"/>
+              <a:t> イット。</a:t>
+            </a:r>
+          </a:p>
+          <a:p>
+            <a:r>
+              <a:rPr b="0" sz="1700"/>
+              <a:t/>
+            </a:r>
+          </a:p>
+          <a:p>
+            <a:r>
+              <a:rPr b="0" sz="1200"/>
+              <a:t>── SCENE 0 · The console（0:20）</a:t>
+            </a:r>
+          </a:p>
+          <a:p>
+            <a:r>
+              <a:rPr b="0" sz="1200"/>
+              <a:t>DO: Simple Operator 画面を出したまま提示する。</a:t>
+            </a:r>
+          </a:p>
+          <a:p>
+            <a:r>
+              <a:rPr b="0" sz="1200"/>
+              <a:t>DO: 下部のバー（open / new / guided / expert）を指す。</a:t>
+            </a:r>
+          </a:p>
+          <a:p>
+            <a:r>
+              <a:rPr b="0" sz="1700"/>
+              <a:t>This is the real console.</a:t>
+            </a:r>
+          </a:p>
+          <a:p>
+            <a:r>
+              <a:rPr b="0" sz="1700"/>
+              <a:t>  ディス イズ ザ </a:t>
+            </a:r>
+            <a:r>
+              <a:rPr b="1" sz="1700"/>
+              <a:t>リアル</a:t>
+            </a:r>
+            <a:r>
+              <a:rPr b="0" sz="1700"/>
+              <a:t> コンソール。</a:t>
+            </a:r>
+          </a:p>
+          <a:p>
+            <a:r>
+              <a:rPr b="0" sz="1700"/>
+              <a:t>Local Disclosure Control.</a:t>
+            </a:r>
+          </a:p>
+          <a:p>
+            <a:r>
+              <a:rPr b="0" sz="1700"/>
+              <a:t>  </a:t>
+            </a:r>
+            <a:r>
+              <a:rPr b="1" sz="1700"/>
+              <a:t>ローカル ディスクロージャー コントロール</a:t>
             </a:r>
             <a:r>
               <a:rPr b="0" sz="1700"/>
@@ -5298,13 +5350,161 @@
           <a:p>
             <a:r>
               <a:rPr b="0" sz="1700"/>
-              <a:t>Then I open them. One object, one password — one file.</a:t>
-            </a:r>
-          </a:p>
-          <a:p>
-            <a:r>
-              <a:rPr b="0" sz="1700"/>
-              <a:t>  ゼン アイ オウプン ゼム。 ワン オブジェクト、 ワン パスワード — </a:t>
+              <a:t>The home screen is deliberately small.</a:t>
+            </a:r>
+          </a:p>
+          <a:p>
+            <a:r>
+              <a:rPr b="0" sz="1700"/>
+              <a:t>  ザ ホーム スクリーン イズ ディリバレットリー </a:t>
+            </a:r>
+            <a:r>
+              <a:rPr b="1" sz="1700"/>
+              <a:t>スモール</a:t>
+            </a:r>
+            <a:r>
+              <a:rPr b="0" sz="1700"/>
+              <a:t>。</a:t>
+            </a:r>
+          </a:p>
+          <a:p>
+            <a:r>
+              <a:rPr b="0" sz="1700"/>
+              <a:t>Open. New. Guided. Expert.</a:t>
+            </a:r>
+          </a:p>
+          <a:p>
+            <a:r>
+              <a:rPr b="0" sz="1700"/>
+              <a:t>  オウプン。 ニュー。 ガイデッド。 エクスパート。</a:t>
+            </a:r>
+          </a:p>
+          <a:p>
+            <a:r>
+              <a:rPr b="0" sz="1700"/>
+              <a:t>Under pressure, you do not want a wall of options.</a:t>
+            </a:r>
+          </a:p>
+          <a:p>
+            <a:r>
+              <a:rPr b="0" sz="1700"/>
+              <a:t>  アンダー </a:t>
+            </a:r>
+            <a:r>
+              <a:rPr b="1" sz="1700"/>
+              <a:t>プレッシャー</a:t>
+            </a:r>
+            <a:r>
+              <a:rPr b="0" sz="1700"/>
+              <a:t>、 ユー ドウント ウォント ア </a:t>
+            </a:r>
+            <a:r>
+              <a:rPr b="1" sz="1700"/>
+              <a:t>ウォール オヴ オプションズ</a:t>
+            </a:r>
+            <a:r>
+              <a:rPr b="0" sz="1700"/>
+              <a:t>。</a:t>
+            </a:r>
+          </a:p>
+          <a:p>
+            <a:r>
+              <a:rPr b="0" sz="1700"/>
+              <a:t>The full control set is one key away.</a:t>
+            </a:r>
+          </a:p>
+          <a:p>
+            <a:r>
+              <a:rPr b="0" sz="1700"/>
+              <a:t>  ザ フル コントロール セット イズ </a:t>
+            </a:r>
+            <a:r>
+              <a:rPr b="1" sz="1700"/>
+              <a:t>ワン キー</a:t>
+            </a:r>
+            <a:r>
+              <a:rPr b="0" sz="1700"/>
+              <a:t> アウェイ。</a:t>
+            </a:r>
+          </a:p>
+          <a:p>
+            <a:r>
+              <a:rPr b="0" sz="1700"/>
+              <a:t/>
+            </a:r>
+          </a:p>
+          <a:p>
+            <a:r>
+              <a:rPr b="0" sz="1200"/>
+              <a:t>── SCENE 1 · One file on disk（1:10）</a:t>
+            </a:r>
+          </a:p>
+          <a:p>
+            <a:r>
+              <a:rPr b="0" sz="1200"/>
+              <a:t>DO: TUI: n (New) → vessel-path に demo.vessel → vessel-size を 64M に変更（既定の 512M のまま作らない）</a:t>
+            </a:r>
+          </a:p>
+          <a:p>
+            <a:r>
+              <a:rPr b="0" sz="1200"/>
+              <a:t>DO: → vessel-label（任意）→ create-btn</a:t>
+            </a:r>
+          </a:p>
+          <a:p>
+            <a:r>
+              <a:rPr b="0" sz="1200"/>
+              <a:t>DO: シェルに切り替えて、実物を見せる:</a:t>
+            </a:r>
+          </a:p>
+          <a:p>
+            <a:r>
+              <a:rPr b="0" sz="1200"/>
+              <a:t>DO: ls -lh demo.vessel</a:t>
+            </a:r>
+          </a:p>
+          <a:p>
+            <a:r>
+              <a:rPr b="0" sz="1200"/>
+              <a:t>DO: file demo.vessel</a:t>
+            </a:r>
+          </a:p>
+          <a:p>
+            <a:r>
+              <a:rPr b="0" sz="1200"/>
+              <a:t>DO: od -A x -t x1z -N 96 demo.vessel</a:t>
+            </a:r>
+          </a:p>
+          <a:p>
+            <a:r>
+              <a:rPr b="0" sz="1700"/>
+              <a:t>First, I make a vessel.</a:t>
+            </a:r>
+          </a:p>
+          <a:p>
+            <a:r>
+              <a:rPr b="0" sz="1700"/>
+              <a:t>  ファースト、 アイ メイク ア </a:t>
+            </a:r>
+            <a:r>
+              <a:rPr b="1" sz="1700"/>
+              <a:t>ヴェッセル</a:t>
+            </a:r>
+            <a:r>
+              <a:rPr b="0" sz="1700"/>
+              <a:t>。</a:t>
+            </a:r>
+          </a:p>
+          <a:p>
+            <a:r>
+              <a:rPr b="0" sz="1700"/>
+              <a:t>A deniable container. One file.</a:t>
+            </a:r>
+          </a:p>
+          <a:p>
+            <a:r>
+              <a:rPr b="0" sz="1700"/>
+              <a:t>  ア ディナイアブル コンテイナー。 </a:t>
             </a:r>
             <a:r>
               <a:rPr b="1" sz="1700"/>
@@ -5318,13 +5518,1303 @@
           <a:p>
             <a:r>
               <a:rPr b="0" sz="1700"/>
-              <a:t>A different object, a different password — a different file.</a:t>
-            </a:r>
-          </a:p>
-          <a:p>
-            <a:r>
-              <a:rPr b="0" sz="1700"/>
-              <a:t>  ア ディファレント オブジェクト、 ア ディファレント パスワード — ア </a:t>
+              <a:t>Sixty-four megabytes.</a:t>
+            </a:r>
+          </a:p>
+          <a:p>
+            <a:r>
+              <a:rPr b="0" sz="1700"/>
+              <a:t>  </a:t>
+            </a:r>
+            <a:r>
+              <a:rPr b="1" sz="1700"/>
+              <a:t>シクスティフォー</a:t>
+            </a:r>
+            <a:r>
+              <a:rPr b="0" sz="1700"/>
+              <a:t> メガバイツ。</a:t>
+            </a:r>
+          </a:p>
+          <a:p>
+            <a:r>
+              <a:rPr b="0" sz="1700"/>
+              <a:t>Let me show you what that looks like on disk.</a:t>
+            </a:r>
+          </a:p>
+          <a:p>
+            <a:r>
+              <a:rPr b="0" sz="1700"/>
+              <a:t>  レット ミー ショウ ユー ワット ザット </a:t>
+            </a:r>
+            <a:r>
+              <a:rPr b="1" sz="1700"/>
+              <a:t>ルックス ライク</a:t>
+            </a:r>
+            <a:r>
+              <a:rPr b="0" sz="1700"/>
+              <a:t> オン ディスク。</a:t>
+            </a:r>
+          </a:p>
+          <a:p>
+            <a:r>
+              <a:rPr b="0" sz="1700"/>
+              <a:t>ls — one file. That is all there is.</a:t>
+            </a:r>
+          </a:p>
+          <a:p>
+            <a:r>
+              <a:rPr b="0" sz="1700"/>
+              <a:t>  エルエス — </a:t>
+            </a:r>
+            <a:r>
+              <a:rPr b="1" sz="1700"/>
+              <a:t>ワン ファイル</a:t>
+            </a:r>
+            <a:r>
+              <a:rPr b="0" sz="1700"/>
+              <a:t>。 ザッツ </a:t>
+            </a:r>
+            <a:r>
+              <a:rPr b="1" sz="1700"/>
+              <a:t>オール</a:t>
+            </a:r>
+            <a:r>
+              <a:rPr b="0" sz="1700"/>
+              <a:t> ゼア イズ。</a:t>
+            </a:r>
+          </a:p>
+          <a:p>
+            <a:r>
+              <a:rPr b="0" sz="1700"/>
+              <a:t>file — it says 'data'.</a:t>
+            </a:r>
+          </a:p>
+          <a:p>
+            <a:r>
+              <a:rPr b="0" sz="1700"/>
+              <a:t>  ファイル — イット セズ </a:t>
+            </a:r>
+            <a:r>
+              <a:rPr b="1" sz="1700"/>
+              <a:t>データ</a:t>
+            </a:r>
+            <a:r>
+              <a:rPr b="0" sz="1700"/>
+              <a:t>。</a:t>
+            </a:r>
+          </a:p>
+          <a:p>
+            <a:r>
+              <a:rPr b="0" sz="1700"/>
+              <a:t>It has nothing to say, because there is nothing to read.</a:t>
+            </a:r>
+          </a:p>
+          <a:p>
+            <a:r>
+              <a:rPr b="0" sz="1700"/>
+              <a:t>  イット ハズ </a:t>
+            </a:r>
+            <a:r>
+              <a:rPr b="1" sz="1700"/>
+              <a:t>ナッシング</a:t>
+            </a:r>
+            <a:r>
+              <a:rPr b="0" sz="1700"/>
+              <a:t> トゥ セイ、 ビコーズ ゼアズ </a:t>
+            </a:r>
+            <a:r>
+              <a:rPr b="1" sz="1700"/>
+              <a:t>ナッシング</a:t>
+            </a:r>
+            <a:r>
+              <a:rPr b="0" sz="1700"/>
+              <a:t> トゥ リード。</a:t>
+            </a:r>
+          </a:p>
+          <a:p>
+            <a:r>
+              <a:rPr b="0" sz="1700"/>
+              <a:t>No header. No magic bytes. No format at all.</a:t>
+            </a:r>
+          </a:p>
+          <a:p>
+            <a:r>
+              <a:rPr b="0" sz="1700"/>
+              <a:t>  ノウ </a:t>
+            </a:r>
+            <a:r>
+              <a:rPr b="1" sz="1700"/>
+              <a:t>ヘッダー</a:t>
+            </a:r>
+            <a:r>
+              <a:rPr b="0" sz="1700"/>
+              <a:t>。 ノウ </a:t>
+            </a:r>
+            <a:r>
+              <a:rPr b="1" sz="1700"/>
+              <a:t>マジック バイツ</a:t>
+            </a:r>
+            <a:r>
+              <a:rPr b="0" sz="1700"/>
+              <a:t>。 ノウ フォーマット </a:t>
+            </a:r>
+            <a:r>
+              <a:rPr b="1" sz="1700"/>
+              <a:t>アット オール</a:t>
+            </a:r>
+            <a:r>
+              <a:rPr b="0" sz="1700"/>
+              <a:t>。</a:t>
+            </a:r>
+          </a:p>
+          <a:p>
+            <a:r>
+              <a:rPr b="0" sz="1700"/>
+              <a:t>On disk, this is random.</a:t>
+            </a:r>
+          </a:p>
+          <a:p>
+            <a:r>
+              <a:rPr b="0" sz="1700"/>
+              <a:t>  オン ディスク、 ディス イズ </a:t>
+            </a:r>
+            <a:r>
+              <a:rPr b="1" sz="1700"/>
+              <a:t>ランダム</a:t>
+            </a:r>
+            <a:r>
+              <a:rPr b="0" sz="1700"/>
+              <a:t>。</a:t>
+            </a:r>
+          </a:p>
+          <a:p>
+            <a:r>
+              <a:rPr b="0" sz="1700"/>
+              <a:t>Remember the name. Demo dot vessel.</a:t>
+            </a:r>
+          </a:p>
+          <a:p>
+            <a:r>
+              <a:rPr b="0" sz="1700"/>
+              <a:t>  リメンバー ザ </a:t>
+            </a:r>
+            <a:r>
+              <a:rPr b="1" sz="1700"/>
+              <a:t>ネイム</a:t>
+            </a:r>
+            <a:r>
+              <a:rPr b="0" sz="1700"/>
+              <a:t>。 </a:t>
+            </a:r>
+            <a:r>
+              <a:rPr b="1" sz="1700"/>
+              <a:t>デモ ドット ヴェッセル</a:t>
+            </a:r>
+            <a:r>
+              <a:rPr b="0" sz="1700"/>
+              <a:t>。</a:t>
+            </a:r>
+          </a:p>
+          <a:p>
+            <a:r>
+              <a:rPr b="0" sz="1700"/>
+              <a:t>Everything from here comes out of this one file.</a:t>
+            </a:r>
+          </a:p>
+          <a:p>
+            <a:r>
+              <a:rPr b="0" sz="1700"/>
+              <a:t>  エヴリシング フロム ヒア カムズ アウト オヴ </a:t>
+            </a:r>
+            <a:r>
+              <a:rPr b="1" sz="1700"/>
+              <a:t>ディス ワン ファイル</a:t>
+            </a:r>
+            <a:r>
+              <a:rPr b="0" sz="1700"/>
+              <a:t>。</a:t>
+            </a:r>
+          </a:p>
+          <a:p>
+            <a:r>
+              <a:rPr b="0" sz="1700"/>
+              <a:t/>
+            </a:r>
+          </a:p>
+          <a:p>
+            <a:r>
+              <a:rPr b="0" sz="1200"/>
+              <a:t>── ⟶ 画面切替（—）</a:t>
+            </a:r>
+          </a:p>
+          <a:p>
+            <a:r>
+              <a:rPr b="0" sz="1200"/>
+              <a:t>DO: スペースを「スライド／ターミナル／ブラウザ」の3つに固定し、Ctrl+←→ だけで移動する。</a:t>
+            </a:r>
+          </a:p>
+          <a:p>
+            <a:r>
+              <a:rPr b="0" sz="1200"/>
+              <a:t>DO: 集中モード（おやすみモード）を必ずオンにしておく — 通知が投影画面に出る。</a:t>
+            </a:r>
+          </a:p>
+          <a:p>
+            <a:r>
+              <a:rPr b="0" sz="1700"/>
+              <a:t/>
+            </a:r>
+          </a:p>
+          <a:p>
+            <a:r>
+              <a:rPr b="0" sz="1200"/>
+              <a:t>── SCENE 2 · Into the browser（0:50）</a:t>
+            </a:r>
+          </a:p>
+          <a:p>
+            <a:r>
+              <a:rPr b="0" sz="1200"/>
+              <a:t>DO: ブラウザで /unlock を開く（事前にブックマークしておく）</a:t>
+            </a:r>
+          </a:p>
+          <a:p>
+            <a:r>
+              <a:rPr b="0" sz="1200"/>
+              <a:t>DO: store トークンを入力してログイン</a:t>
+            </a:r>
+          </a:p>
+          <a:p>
+            <a:r>
+              <a:rPr b="0" sz="1700"/>
+              <a:t>The device also serves a local web interface.</a:t>
+            </a:r>
+          </a:p>
+          <a:p>
+            <a:r>
+              <a:rPr b="0" sz="1700"/>
+              <a:t>  ザ デバイス オールソウ サーヴズ ア </a:t>
+            </a:r>
+            <a:r>
+              <a:rPr b="1" sz="1700"/>
+              <a:t>ローカル ウェブ インターフェイス</a:t>
+            </a:r>
+            <a:r>
+              <a:rPr b="0" sz="1700"/>
+              <a:t>。</a:t>
+            </a:r>
+          </a:p>
+          <a:p>
+            <a:r>
+              <a:rPr b="0" sz="1700"/>
+              <a:t>I am logging in now.</a:t>
+            </a:r>
+          </a:p>
+          <a:p>
+            <a:r>
+              <a:rPr b="0" sz="1700"/>
+              <a:t>  アイム </a:t>
+            </a:r>
+            <a:r>
+              <a:rPr b="1" sz="1700"/>
+              <a:t>ロギング イン</a:t>
+            </a:r>
+            <a:r>
+              <a:rPr b="0" sz="1700"/>
+              <a:t> ナウ。</a:t>
+            </a:r>
+          </a:p>
+          <a:p>
+            <a:r>
+              <a:rPr b="0" sz="1700"/>
+              <a:t>One word about these tokens, because it matters.</a:t>
+            </a:r>
+          </a:p>
+          <a:p>
+            <a:r>
+              <a:rPr b="0" sz="1700"/>
+              <a:t>  ワン ワード アバウト ジーズ </a:t>
+            </a:r>
+            <a:r>
+              <a:rPr b="1" sz="1700"/>
+              <a:t>トウクンズ</a:t>
+            </a:r>
+            <a:r>
+              <a:rPr b="0" sz="1700"/>
+              <a:t>、 ビコーズ イット </a:t>
+            </a:r>
+            <a:r>
+              <a:rPr b="1" sz="1700"/>
+              <a:t>マターズ</a:t>
+            </a:r>
+            <a:r>
+              <a:rPr b="0" sz="1700"/>
+              <a:t>。</a:t>
+            </a:r>
+          </a:p>
+          <a:p>
+            <a:r>
+              <a:rPr b="0" sz="1700"/>
+              <a:t>In real use, you issue two of them.</a:t>
+            </a:r>
+          </a:p>
+          <a:p>
+            <a:r>
+              <a:rPr b="0" sz="1700"/>
+              <a:t>  イン リアル ユース、 ユー イシュー </a:t>
+            </a:r>
+            <a:r>
+              <a:rPr b="1" sz="1700"/>
+              <a:t>トゥー</a:t>
+            </a:r>
+            <a:r>
+              <a:rPr b="0" sz="1700"/>
+              <a:t> オヴ ゼム。</a:t>
+            </a:r>
+          </a:p>
+          <a:p>
+            <a:r>
+              <a:rPr b="0" sz="1700"/>
+              <a:t>A full-control token — used once, somewhere safe, to set things up.</a:t>
+            </a:r>
+          </a:p>
+          <a:p>
+            <a:r>
+              <a:rPr b="0" sz="1700"/>
+              <a:t>  ア </a:t>
+            </a:r>
+            <a:r>
+              <a:rPr b="1" sz="1700"/>
+              <a:t>フルコントロール</a:t>
+            </a:r>
+            <a:r>
+              <a:rPr b="0" sz="1700"/>
+              <a:t> トウクン — ユーズド </a:t>
+            </a:r>
+            <a:r>
+              <a:rPr b="1" sz="1700"/>
+              <a:t>ワンス</a:t>
+            </a:r>
+            <a:r>
+              <a:rPr b="0" sz="1700"/>
+              <a:t>、 サムウェア </a:t>
+            </a:r>
+            <a:r>
+              <a:rPr b="1" sz="1700"/>
+              <a:t>セイフ</a:t>
+            </a:r>
+            <a:r>
+              <a:rPr b="0" sz="1700"/>
+              <a:t>、 トゥ セット シングス アップ。</a:t>
+            </a:r>
+          </a:p>
+          <a:p>
+            <a:r>
+              <a:rPr b="0" sz="1700"/>
+              <a:t>And a recovery token, that can decrypt and nothing else.</a:t>
+            </a:r>
+          </a:p>
+          <a:p>
+            <a:r>
+              <a:rPr b="0" sz="1700"/>
+              <a:t>  アンド ア </a:t>
+            </a:r>
+            <a:r>
+              <a:rPr b="1" sz="1700"/>
+              <a:t>リカヴァリー</a:t>
+            </a:r>
+            <a:r>
+              <a:rPr b="0" sz="1700"/>
+              <a:t> トウクン、 ザット キャン </a:t>
+            </a:r>
+            <a:r>
+              <a:rPr b="1" sz="1700"/>
+              <a:t>ディクリプト</a:t>
+            </a:r>
+            <a:r>
+              <a:rPr b="0" sz="1700"/>
+              <a:t> アンド </a:t>
+            </a:r>
+            <a:r>
+              <a:rPr b="1" sz="1700"/>
+              <a:t>ナッシング エルス</a:t>
+            </a:r>
+            <a:r>
+              <a:rPr b="0" sz="1700"/>
+              <a:t>。</a:t>
+            </a:r>
+          </a:p>
+          <a:p>
+            <a:r>
+              <a:rPr b="0" sz="1700"/>
+              <a:t>That is the one you carry into a bad situation.</a:t>
+            </a:r>
+          </a:p>
+          <a:p>
+            <a:r>
+              <a:rPr b="0" sz="1700"/>
+              <a:t>  ザッツ ザ ワン ユー </a:t>
+            </a:r>
+            <a:r>
+              <a:rPr b="1" sz="1700"/>
+              <a:t>キャリー</a:t>
+            </a:r>
+            <a:r>
+              <a:rPr b="0" sz="1700"/>
+              <a:t> イントゥ ア </a:t>
+            </a:r>
+            <a:r>
+              <a:rPr b="1" sz="1700"/>
+              <a:t>バッド シチュエイション</a:t>
+            </a:r>
+            <a:r>
+              <a:rPr b="0" sz="1700"/>
+              <a:t>。</a:t>
+            </a:r>
+          </a:p>
+          <a:p>
+            <a:r>
+              <a:rPr b="0" sz="1700"/>
+              <a:t>It cannot reach setup, so it cannot give setup away.</a:t>
+            </a:r>
+          </a:p>
+          <a:p>
+            <a:r>
+              <a:rPr b="0" sz="1700"/>
+              <a:t>  イット キャナット </a:t>
+            </a:r>
+            <a:r>
+              <a:rPr b="1" sz="1700"/>
+              <a:t>リーチ</a:t>
+            </a:r>
+            <a:r>
+              <a:rPr b="0" sz="1700"/>
+              <a:t> セットアップ、 ソウ イット キャナット </a:t>
+            </a:r>
+            <a:r>
+              <a:rPr b="1" sz="1700"/>
+              <a:t>ギヴ イット アウェイ</a:t>
+            </a:r>
+            <a:r>
+              <a:rPr b="0" sz="1700"/>
+              <a:t>。</a:t>
+            </a:r>
+          </a:p>
+          <a:p>
+            <a:r>
+              <a:rPr b="0" sz="1700"/>
+              <a:t>Today I use one token, for time. Just know the split is there.</a:t>
+            </a:r>
+          </a:p>
+          <a:p>
+            <a:r>
+              <a:rPr b="0" sz="1700"/>
+              <a:t>  トゥデイ アイ ユーズ </a:t>
+            </a:r>
+            <a:r>
+              <a:rPr b="1" sz="1700"/>
+              <a:t>ワン</a:t>
+            </a:r>
+            <a:r>
+              <a:rPr b="0" sz="1700"/>
+              <a:t> トウクン、 フォー </a:t>
+            </a:r>
+            <a:r>
+              <a:rPr b="1" sz="1700"/>
+              <a:t>タイム</a:t>
+            </a:r>
+            <a:r>
+              <a:rPr b="0" sz="1700"/>
+              <a:t>。 ジャスト ノウ ザ </a:t>
+            </a:r>
+            <a:r>
+              <a:rPr b="1" sz="1700"/>
+              <a:t>スプリット</a:t>
+            </a:r>
+            <a:r>
+              <a:rPr b="0" sz="1700"/>
+              <a:t> イズ ゼア。</a:t>
+            </a:r>
+          </a:p>
+          <a:p>
+            <a:r>
+              <a:rPr b="0" sz="1700"/>
+              <a:t/>
+            </a:r>
+          </a:p>
+          <a:p>
+            <a:r>
+              <a:rPr b="0" sz="1200"/>
+              <a:t>── SCENE 3 · Slot A — the file you would hand over（0:50）</a:t>
+            </a:r>
+          </a:p>
+          <a:p>
+            <a:r>
+              <a:rPr b="0" sz="1200"/>
+              <a:t>DO: Store 画面 → Step 1「Choose the slot」で Slot A を選択</a:t>
+            </a:r>
+          </a:p>
+          <a:p>
+            <a:r>
+              <a:rPr b="0" sz="1200"/>
+              <a:t>DO: → 偽装用ファイルを選択 → パスワードA を入力</a:t>
+            </a:r>
+          </a:p>
+          <a:p>
+            <a:r>
+              <a:rPr b="0" sz="1200"/>
+              <a:t>DO: → 物体を手元に置いたまま「1 · Capture empty scene」</a:t>
+            </a:r>
+          </a:p>
+          <a:p>
+            <a:r>
+              <a:rPr b="0" sz="1200"/>
+              <a:t>DO: → 物体A をかざして「2 · Capture access object」</a:t>
+            </a:r>
+          </a:p>
+          <a:p>
+            <a:r>
+              <a:rPr b="0" sz="1200"/>
+              <a:t>DO: → かざしたまま「Protect file」</a:t>
+            </a:r>
+          </a:p>
+          <a:p>
+            <a:r>
+              <a:rPr b="0" sz="1700"/>
+              <a:t>Slot A. This is the file I would hand over.</a:t>
+            </a:r>
+          </a:p>
+          <a:p>
+            <a:r>
+              <a:rPr b="0" sz="1700"/>
+              <a:t>  </a:t>
+            </a:r>
+            <a:r>
+              <a:rPr b="1" sz="1700"/>
+              <a:t>スロット エイ</a:t>
+            </a:r>
+            <a:r>
+              <a:rPr b="0" sz="1700"/>
+              <a:t>。 ディス イズ ザ ファイル アイ ウッド </a:t>
+            </a:r>
+            <a:r>
+              <a:rPr b="1" sz="1700"/>
+              <a:t>ハンド オーヴァー</a:t>
+            </a:r>
+            <a:r>
+              <a:rPr b="0" sz="1700"/>
+              <a:t>。</a:t>
+            </a:r>
+          </a:p>
+          <a:p>
+            <a:r>
+              <a:rPr b="0" sz="1700"/>
+              <a:t>Now watch the camera. It takes two shots.</a:t>
+            </a:r>
+          </a:p>
+          <a:p>
+            <a:r>
+              <a:rPr b="0" sz="1700"/>
+              <a:t>  ナウ ウォッチ ザ カメラ。 イット テイクス </a:t>
+            </a:r>
+            <a:r>
+              <a:rPr b="1" sz="1700"/>
+              <a:t>トゥー ショッツ</a:t>
+            </a:r>
+            <a:r>
+              <a:rPr b="0" sz="1700"/>
+              <a:t>。</a:t>
+            </a:r>
+          </a:p>
+          <a:p>
+            <a:r>
+              <a:rPr b="0" sz="1700"/>
+              <a:t>First, the empty scene. Just my table.</a:t>
+            </a:r>
+          </a:p>
+          <a:p>
+            <a:r>
+              <a:rPr b="0" sz="1700"/>
+              <a:t>  ファースト、 ジ </a:t>
+            </a:r>
+            <a:r>
+              <a:rPr b="1" sz="1700"/>
+              <a:t>エンプティ シーン</a:t>
+            </a:r>
+            <a:r>
+              <a:rPr b="0" sz="1700"/>
+              <a:t>。 ジャスト マイ </a:t>
+            </a:r>
+            <a:r>
+              <a:rPr b="1" sz="1700"/>
+              <a:t>テイブル</a:t>
+            </a:r>
+            <a:r>
+              <a:rPr b="0" sz="1700"/>
+              <a:t>。</a:t>
+            </a:r>
+          </a:p>
+          <a:p>
+            <a:r>
+              <a:rPr b="0" sz="1700"/>
+              <a:t>Then the same view, with the object in it.</a:t>
+            </a:r>
+          </a:p>
+          <a:p>
+            <a:r>
+              <a:rPr b="0" sz="1700"/>
+              <a:t>  ゼン ザ </a:t>
+            </a:r>
+            <a:r>
+              <a:rPr b="1" sz="1700"/>
+              <a:t>セイム ヴュー</a:t>
+            </a:r>
+            <a:r>
+              <a:rPr b="0" sz="1700"/>
+              <a:t>、 ウィズ ジ </a:t>
+            </a:r>
+            <a:r>
+              <a:rPr b="1" sz="1700"/>
+              <a:t>オブジェクト</a:t>
+            </a:r>
+            <a:r>
+              <a:rPr b="0" sz="1700"/>
+              <a:t> イン イット。</a:t>
+            </a:r>
+          </a:p>
+          <a:p>
+            <a:r>
+              <a:rPr b="0" sz="1700"/>
+              <a:t>The device keeps the difference between them.</a:t>
+            </a:r>
+          </a:p>
+          <a:p>
+            <a:r>
+              <a:rPr b="0" sz="1700"/>
+              <a:t>  ザ デバイス キープス ザ </a:t>
+            </a:r>
+            <a:r>
+              <a:rPr b="1" sz="1700"/>
+              <a:t>ディファレンス</a:t>
+            </a:r>
+            <a:r>
+              <a:rPr b="0" sz="1700"/>
+              <a:t> ビトウィーン ゼム。</a:t>
+            </a:r>
+          </a:p>
+          <a:p>
+            <a:r>
+              <a:rPr b="0" sz="1700"/>
+              <a:t>Not my table. Not the room. The object.</a:t>
+            </a:r>
+          </a:p>
+          <a:p>
+            <a:r>
+              <a:rPr b="0" sz="1700"/>
+              <a:t>  ナット マイ テイブル。 ナット ザ ルーム。 </a:t>
+            </a:r>
+            <a:r>
+              <a:rPr b="1" sz="1700"/>
+              <a:t>ジ オブジェクト</a:t>
+            </a:r>
+            <a:r>
+              <a:rPr b="0" sz="1700"/>
+              <a:t>。</a:t>
+            </a:r>
+          </a:p>
+          <a:p>
+            <a:r>
+              <a:rPr b="0" sz="1700"/>
+              <a:t>And this is a cue, not a key.</a:t>
+            </a:r>
+          </a:p>
+          <a:p>
+            <a:r>
+              <a:rPr b="0" sz="1700"/>
+              <a:t>  アンド ディス イズ ア </a:t>
+            </a:r>
+            <a:r>
+              <a:rPr b="1" sz="1700"/>
+              <a:t>キュー</a:t>
+            </a:r>
+            <a:r>
+              <a:rPr b="0" sz="1700"/>
+              <a:t>、 ナット ア </a:t>
+            </a:r>
+            <a:r>
+              <a:rPr b="1" sz="1700"/>
+              <a:t>キー</a:t>
+            </a:r>
+            <a:r>
+              <a:rPr b="0" sz="1700"/>
+              <a:t>。</a:t>
+            </a:r>
+          </a:p>
+          <a:p>
+            <a:r>
+              <a:rPr b="0" sz="1700"/>
+              <a:t>It does not encrypt anything.</a:t>
+            </a:r>
+          </a:p>
+          <a:p>
+            <a:r>
+              <a:rPr b="0" sz="1700"/>
+              <a:t>  イット ダズ ナット </a:t>
+            </a:r>
+            <a:r>
+              <a:rPr b="1" sz="1700"/>
+              <a:t>エンクリプト</a:t>
+            </a:r>
+            <a:r>
+              <a:rPr b="0" sz="1700"/>
+              <a:t> エニシング。</a:t>
+            </a:r>
+          </a:p>
+          <a:p>
+            <a:r>
+              <a:rPr b="0" sz="1700"/>
+              <a:t>It decides whether the operation may start at all.</a:t>
+            </a:r>
+          </a:p>
+          <a:p>
+            <a:r>
+              <a:rPr b="0" sz="1700"/>
+              <a:t>  イット ディサイズ ウェザー ジ オペレイション </a:t>
+            </a:r>
+            <a:r>
+              <a:rPr b="1" sz="1700"/>
+              <a:t>メイ スタート</a:t>
+            </a:r>
+            <a:r>
+              <a:rPr b="0" sz="1700"/>
+              <a:t> アット オール。</a:t>
+            </a:r>
+          </a:p>
+          <a:p>
+            <a:r>
+              <a:rPr b="0" sz="1700"/>
+              <a:t>A photograph of it opens nothing.</a:t>
+            </a:r>
+          </a:p>
+          <a:p>
+            <a:r>
+              <a:rPr b="0" sz="1700"/>
+              <a:t>  ア </a:t>
+            </a:r>
+            <a:r>
+              <a:rPr b="1" sz="1700"/>
+              <a:t>フォトグラフ</a:t>
+            </a:r>
+            <a:r>
+              <a:rPr b="0" sz="1700"/>
+              <a:t> オヴ イット オウプンズ </a:t>
+            </a:r>
+            <a:r>
+              <a:rPr b="1" sz="1700"/>
+              <a:t>ナッシング</a:t>
+            </a:r>
+            <a:r>
+              <a:rPr b="0" sz="1700"/>
+              <a:t>。</a:t>
+            </a:r>
+          </a:p>
+          <a:p>
+            <a:r>
+              <a:rPr b="0" sz="1700"/>
+              <a:t/>
+            </a:r>
+          </a:p>
+          <a:p>
+            <a:r>
+              <a:rPr b="0" sz="1200"/>
+              <a:t>── SCENE 4 · Slot B — the file you would not（1:00）</a:t>
+            </a:r>
+          </a:p>
+          <a:p>
+            <a:r>
+              <a:rPr b="0" sz="1200"/>
+              <a:t>DO: Step 1 を Slot B に切り替え → 真のファイルを選択 → パスワードB を入力</a:t>
+            </a:r>
+          </a:p>
+          <a:p>
+            <a:r>
+              <a:rPr b="0" sz="1200"/>
+              <a:t>DO: → Advanced security options で Clearing password（破壊用）を設定</a:t>
+            </a:r>
+          </a:p>
+          <a:p>
+            <a:r>
+              <a:rPr b="0" sz="1200"/>
+              <a:t>DO: → 物体を外して「1 · Capture empty scene」</a:t>
+            </a:r>
+          </a:p>
+          <a:p>
+            <a:r>
+              <a:rPr b="0" sz="1200"/>
+              <a:t>DO: → 物体B をかざして「2 · Capture access object」</a:t>
+            </a:r>
+          </a:p>
+          <a:p>
+            <a:r>
+              <a:rPr b="0" sz="1200"/>
+              <a:t>DO: → かざしたまま「Protect file」</a:t>
+            </a:r>
+          </a:p>
+          <a:p>
+            <a:r>
+              <a:rPr b="0" sz="1700"/>
+              <a:t>Slot B. Same file on disk. Same demo dot vessel.</a:t>
+            </a:r>
+          </a:p>
+          <a:p>
+            <a:r>
+              <a:rPr b="0" sz="1700"/>
+              <a:t>  </a:t>
+            </a:r>
+            <a:r>
+              <a:rPr b="1" sz="1700"/>
+              <a:t>スロット ビー</a:t>
+            </a:r>
+            <a:r>
+              <a:rPr b="0" sz="1700"/>
+              <a:t>。 セイム ファイル オン ディスク。 セイム </a:t>
+            </a:r>
+            <a:r>
+              <a:rPr b="1" sz="1700"/>
+              <a:t>デモ ドット ヴェッセル</a:t>
+            </a:r>
+            <a:r>
+              <a:rPr b="0" sz="1700"/>
+              <a:t>。</a:t>
+            </a:r>
+          </a:p>
+          <a:p>
+            <a:r>
+              <a:rPr b="0" sz="1700"/>
+              <a:t>A different object. A different password.</a:t>
+            </a:r>
+          </a:p>
+          <a:p>
+            <a:r>
+              <a:rPr b="0" sz="1700"/>
+              <a:t>  ア ディファレント </a:t>
+            </a:r>
+            <a:r>
+              <a:rPr b="1" sz="1700"/>
+              <a:t>オブジェクト</a:t>
+            </a:r>
+            <a:r>
+              <a:rPr b="0" sz="1700"/>
+              <a:t>。 ア ディファレント </a:t>
+            </a:r>
+            <a:r>
+              <a:rPr b="1" sz="1700"/>
+              <a:t>パスワード</a:t>
+            </a:r>
+            <a:r>
+              <a:rPr b="0" sz="1700"/>
+              <a:t>。</a:t>
+            </a:r>
+          </a:p>
+          <a:p>
+            <a:r>
+              <a:rPr b="0" sz="1700"/>
+              <a:t>And one more thing here, which I will use later.</a:t>
+            </a:r>
+          </a:p>
+          <a:p>
+            <a:r>
+              <a:rPr b="0" sz="1700"/>
+              <a:t>  アンド </a:t>
+            </a:r>
+            <a:r>
+              <a:rPr b="1" sz="1700"/>
+              <a:t>ワン モア シング</a:t>
+            </a:r>
+            <a:r>
+              <a:rPr b="0" sz="1700"/>
+              <a:t> ヒア、 ウィッチ アイル </a:t>
+            </a:r>
+            <a:r>
+              <a:rPr b="1" sz="1700"/>
+              <a:t>ユーズ レイター</a:t>
+            </a:r>
+            <a:r>
+              <a:rPr b="0" sz="1700"/>
+              <a:t>。</a:t>
+            </a:r>
+          </a:p>
+          <a:p>
+            <a:r>
+              <a:rPr b="0" sz="1700"/>
+              <a:t>A second password for this slot.</a:t>
+            </a:r>
+          </a:p>
+          <a:p>
+            <a:r>
+              <a:rPr b="0" sz="1700"/>
+              <a:t>  ア </a:t>
+            </a:r>
+            <a:r>
+              <a:rPr b="1" sz="1700"/>
+              <a:t>セカンド パスワード</a:t>
+            </a:r>
+            <a:r>
+              <a:rPr b="0" sz="1700"/>
+              <a:t> フォー ディス スロット。</a:t>
+            </a:r>
+          </a:p>
+          <a:p>
+            <a:r>
+              <a:rPr b="0" sz="1700"/>
+              <a:t>Not one that opens it.</a:t>
+            </a:r>
+          </a:p>
+          <a:p>
+            <a:r>
+              <a:rPr b="0" sz="1700"/>
+              <a:t>  </a:t>
+            </a:r>
+            <a:r>
+              <a:rPr b="1" sz="1700"/>
+              <a:t>ナット</a:t>
+            </a:r>
+            <a:r>
+              <a:rPr b="0" sz="1700"/>
+              <a:t> ワン ザット </a:t>
+            </a:r>
+            <a:r>
+              <a:rPr b="1" sz="1700"/>
+              <a:t>オウプンズ</a:t>
+            </a:r>
+            <a:r>
+              <a:rPr b="0" sz="1700"/>
+              <a:t> イット。</a:t>
+            </a:r>
+          </a:p>
+          <a:p>
+            <a:r>
+              <a:rPr b="0" sz="1700"/>
+              <a:t>Both slots now live inside that one file.</a:t>
+            </a:r>
+          </a:p>
+          <a:p>
+            <a:r>
+              <a:rPr b="0" sz="1700"/>
+              <a:t>  ボウス スロッツ ナウ リヴ </a:t>
+            </a:r>
+            <a:r>
+              <a:rPr b="1" sz="1700"/>
+              <a:t>インサイド</a:t>
+            </a:r>
+            <a:r>
+              <a:rPr b="0" sz="1700"/>
+              <a:t> ザット </a:t>
+            </a:r>
+            <a:r>
+              <a:rPr b="1" sz="1700"/>
+              <a:t>ワン ファイル</a:t>
+            </a:r>
+            <a:r>
+              <a:rPr b="0" sz="1700"/>
+              <a:t>。</a:t>
+            </a:r>
+          </a:p>
+          <a:p>
+            <a:r>
+              <a:rPr b="0" sz="1700"/>
+              <a:t/>
+            </a:r>
+          </a:p>
+          <a:p>
+            <a:r>
+              <a:rPr b="0" sz="1200"/>
+              <a:t>── SCENE 5 · Slot A opens（0:20）</a:t>
+            </a:r>
+          </a:p>
+          <a:p>
+            <a:r>
+              <a:rPr b="0" sz="1200"/>
+              <a:t>DO: Retrieve 画面 → 物体A をかざす → 一致表示を待つ</a:t>
+            </a:r>
+          </a:p>
+          <a:p>
+            <a:r>
+              <a:rPr b="0" sz="1200"/>
+              <a:t>DO: → パスワードA → Open protected file</a:t>
+            </a:r>
+          </a:p>
+          <a:p>
+            <a:r>
+              <a:rPr b="0" sz="1200"/>
+              <a:t>DO: → 落ちてきたファイルを開いて中身を見せる</a:t>
+            </a:r>
+          </a:p>
+          <a:p>
+            <a:r>
+              <a:rPr b="0" sz="1700"/>
+              <a:t>Object A. Password A.</a:t>
+            </a:r>
+          </a:p>
+          <a:p>
+            <a:r>
+              <a:rPr b="0" sz="1700"/>
+              <a:t>  </a:t>
+            </a:r>
+            <a:r>
+              <a:rPr b="1" sz="1700"/>
+              <a:t>オブジェクト エイ</a:t>
+            </a:r>
+            <a:r>
+              <a:rPr b="0" sz="1700"/>
+              <a:t>。 </a:t>
+            </a:r>
+            <a:r>
+              <a:rPr b="1" sz="1700"/>
+              <a:t>パスワード エイ</a:t>
+            </a:r>
+            <a:r>
+              <a:rPr b="0" sz="1700"/>
+              <a:t>。</a:t>
+            </a:r>
+          </a:p>
+          <a:p>
+            <a:r>
+              <a:rPr b="0" sz="1700"/>
+              <a:t>And there it is.</a:t>
+            </a:r>
+          </a:p>
+          <a:p>
+            <a:r>
+              <a:rPr b="0" sz="1700"/>
+              <a:t>  アンド </a:t>
+            </a:r>
+            <a:r>
+              <a:rPr b="1" sz="1700"/>
+              <a:t>ゼア イット イズ</a:t>
+            </a:r>
+            <a:r>
+              <a:rPr b="0" sz="1700"/>
+              <a:t>。</a:t>
+            </a:r>
+          </a:p>
+          <a:p>
+            <a:r>
+              <a:rPr b="0" sz="1700"/>
+              <a:t>That is Slot A, out of demo dot vessel.</a:t>
+            </a:r>
+          </a:p>
+          <a:p>
+            <a:r>
+              <a:rPr b="0" sz="1700"/>
+              <a:t>  ザッツ </a:t>
+            </a:r>
+            <a:r>
+              <a:rPr b="1" sz="1700"/>
+              <a:t>スロット エイ</a:t>
+            </a:r>
+            <a:r>
+              <a:rPr b="0" sz="1700"/>
+              <a:t>、 アウト オヴ </a:t>
+            </a:r>
+            <a:r>
+              <a:rPr b="1" sz="1700"/>
+              <a:t>デモ ドット ヴェッセル</a:t>
+            </a:r>
+            <a:r>
+              <a:rPr b="0" sz="1700"/>
+              <a:t>。</a:t>
+            </a:r>
+          </a:p>
+          <a:p>
+            <a:r>
+              <a:rPr b="0" sz="1700"/>
+              <a:t/>
+            </a:r>
+          </a:p>
+          <a:p>
+            <a:r>
+              <a:rPr b="0" sz="1200"/>
+              <a:t>── SCENE 6 · The object alone is not enough（1:00）</a:t>
+            </a:r>
+          </a:p>
+          <a:p>
+            <a:r>
+              <a:rPr b="0" sz="1200"/>
+              <a:t>DO: 同じ Retrieve 画面のまま、物体B に持ち替える → 一致表示を待つ（待たずに押すと拒否される）</a:t>
+            </a:r>
+          </a:p>
+          <a:p>
+            <a:r>
+              <a:rPr b="0" sz="1200"/>
+              <a:t>DO: → まず パスワードA を入力 → Open protected file → 失敗</a:t>
+            </a:r>
+          </a:p>
+          <a:p>
+            <a:r>
+              <a:rPr b="0" sz="1200"/>
+              <a:t>DO: → 続けて パスワードB を入力 → Open protected file → 成功</a:t>
+            </a:r>
+          </a:p>
+          <a:p>
+            <a:r>
+              <a:rPr b="0" sz="1200"/>
+              <a:t>DO: → 落ちてきたファイルを開いて、SCENE 5 と中身が違うことを見せる</a:t>
+            </a:r>
+          </a:p>
+          <a:p>
+            <a:r>
+              <a:rPr b="0" sz="1700"/>
+              <a:t>Same screen. I have only changed the object.</a:t>
+            </a:r>
+          </a:p>
+          <a:p>
+            <a:r>
+              <a:rPr b="0" sz="1700"/>
+              <a:t>  </a:t>
+            </a:r>
+            <a:r>
+              <a:rPr b="1" sz="1700"/>
+              <a:t>セイム スクリーン</a:t>
+            </a:r>
+            <a:r>
+              <a:rPr b="0" sz="1700"/>
+              <a:t>。 アイヴ </a:t>
+            </a:r>
+            <a:r>
+              <a:rPr b="1" sz="1700"/>
+              <a:t>オンリー</a:t>
+            </a:r>
+            <a:r>
+              <a:rPr b="0" sz="1700"/>
+              <a:t> チェインジド ジ オブジェクト。</a:t>
+            </a:r>
+          </a:p>
+          <a:p>
+            <a:r>
+              <a:rPr b="0" sz="1700"/>
+              <a:t>This is the object for Slot B.</a:t>
+            </a:r>
+          </a:p>
+          <a:p>
+            <a:r>
+              <a:rPr b="0" sz="1700"/>
+              <a:t>  ディス イズ ジ オブジェクト フォー </a:t>
+            </a:r>
+            <a:r>
+              <a:rPr b="1" sz="1700"/>
+              <a:t>スロット ビー</a:t>
+            </a:r>
+            <a:r>
+              <a:rPr b="0" sz="1700"/>
+              <a:t>。</a:t>
+            </a:r>
+          </a:p>
+          <a:p>
+            <a:r>
+              <a:rPr b="0" sz="1700"/>
+              <a:t>And I will type Slot A's password.</a:t>
+            </a:r>
+          </a:p>
+          <a:p>
+            <a:r>
+              <a:rPr b="0" sz="1700"/>
+              <a:t>  アンド アイル タイプ </a:t>
+            </a:r>
+            <a:r>
+              <a:rPr b="1" sz="1700"/>
+              <a:t>スロット エイズ</a:t>
+            </a:r>
+            <a:r>
+              <a:rPr b="0" sz="1700"/>
+              <a:t> パスワード。</a:t>
+            </a:r>
+          </a:p>
+          <a:p>
+            <a:r>
+              <a:rPr b="0" sz="1700"/>
+              <a:t>No valid entry found.</a:t>
+            </a:r>
+          </a:p>
+          <a:p>
+            <a:r>
+              <a:rPr b="0" sz="1700"/>
+              <a:t>  </a:t>
+            </a:r>
+            <a:r>
+              <a:rPr b="1" sz="1700"/>
+              <a:t>ノウ ヴァリッド エントリー ファウンド</a:t>
+            </a:r>
+            <a:r>
+              <a:rPr b="0" sz="1700"/>
+              <a:t>。</a:t>
+            </a:r>
+          </a:p>
+          <a:p>
+            <a:r>
+              <a:rPr b="0" sz="1700"/>
+              <a:t>The object is right. The password is not. Nothing opens.</a:t>
+            </a:r>
+          </a:p>
+          <a:p>
+            <a:r>
+              <a:rPr b="0" sz="1700"/>
+              <a:t>  ジ オブジェクト イズ </a:t>
+            </a:r>
+            <a:r>
+              <a:rPr b="1" sz="1700"/>
+              <a:t>ゥライト</a:t>
+            </a:r>
+            <a:r>
+              <a:rPr b="0" sz="1700"/>
+              <a:t>。 ザ パスワード イズ </a:t>
+            </a:r>
+            <a:r>
+              <a:rPr b="1" sz="1700"/>
+              <a:t>ナット</a:t>
+            </a:r>
+            <a:r>
+              <a:rPr b="0" sz="1700"/>
+              <a:t>。 </a:t>
+            </a:r>
+            <a:r>
+              <a:rPr b="1" sz="1700"/>
+              <a:t>ナッシング</a:t>
+            </a:r>
+            <a:r>
+              <a:rPr b="0" sz="1700"/>
+              <a:t> オウプンズ。</a:t>
+            </a:r>
+          </a:p>
+          <a:p>
+            <a:r>
+              <a:rPr b="0" sz="1700"/>
+              <a:t>Now Slot B's own password.</a:t>
+            </a:r>
+          </a:p>
+          <a:p>
+            <a:r>
+              <a:rPr b="0" sz="1700"/>
+              <a:t>  ナウ </a:t>
+            </a:r>
+            <a:r>
+              <a:rPr b="1" sz="1700"/>
+              <a:t>スロット ビーズ オウン</a:t>
+            </a:r>
+            <a:r>
+              <a:rPr b="0" sz="1700"/>
+              <a:t> パスワード。</a:t>
+            </a:r>
+          </a:p>
+          <a:p>
+            <a:r>
+              <a:rPr b="0" sz="1700"/>
+              <a:t>A different file — out of the same file on disk.</a:t>
+            </a:r>
+          </a:p>
+          <a:p>
+            <a:r>
+              <a:rPr b="0" sz="1700"/>
+              <a:t>  ア </a:t>
             </a:r>
             <a:r>
               <a:rPr b="1" sz="1700"/>
@@ -5332,13 +6822,145 @@
             </a:r>
             <a:r>
               <a:rPr b="0" sz="1700"/>
+              <a:t> — アウト オヴ ザ </a:t>
+            </a:r>
+            <a:r>
+              <a:rPr b="1" sz="1700"/>
+              <a:t>セイム ファイル</a:t>
+            </a:r>
+            <a:r>
+              <a:rPr b="0" sz="1700"/>
+              <a:t> オン ディスク。</a:t>
+            </a:r>
+          </a:p>
+          <a:p>
+            <a:r>
+              <a:rPr b="0" sz="1700"/>
+              <a:t>One vessel. Two objects. Two passwords. Two files.</a:t>
+            </a:r>
+          </a:p>
+          <a:p>
+            <a:r>
+              <a:rPr b="0" sz="1700"/>
+              <a:t>  </a:t>
+            </a:r>
+            <a:r>
+              <a:rPr b="1" sz="1700"/>
+              <a:t>ワン ヴェッセル</a:t>
+            </a:r>
+            <a:r>
+              <a:rPr b="0" sz="1700"/>
+              <a:t>。 </a:t>
+            </a:r>
+            <a:r>
+              <a:rPr b="1" sz="1700"/>
+              <a:t>トゥー オブジェクツ</a:t>
+            </a:r>
+            <a:r>
+              <a:rPr b="0" sz="1700"/>
+              <a:t>。 </a:t>
+            </a:r>
+            <a:r>
+              <a:rPr b="1" sz="1700"/>
+              <a:t>トゥー パスワーズ</a:t>
+            </a:r>
+            <a:r>
+              <a:rPr b="0" sz="1700"/>
+              <a:t>。 </a:t>
+            </a:r>
+            <a:r>
+              <a:rPr b="1" sz="1700"/>
+              <a:t>トゥー ファイルズ</a:t>
+            </a:r>
+            <a:r>
+              <a:rPr b="0" sz="1700"/>
               <a:t>。</a:t>
             </a:r>
           </a:p>
           <a:p>
             <a:r>
               <a:rPr b="0" sz="1700"/>
-              <a:t>Same container. That is the two-slot model, working.</a:t>
+              <a:t/>
+            </a:r>
+          </a:p>
+          <a:p>
+            <a:r>
+              <a:rPr b="0" sz="1200"/>
+              <a:t>── SCENE 7 · The password alone is not enough either（0:40）</a:t>
+            </a:r>
+          </a:p>
+          <a:p>
+            <a:r>
+              <a:rPr b="0" sz="1200"/>
+              <a:t>DO: 同じ Retrieve 画面のまま、物体A に持ち替える → 表示が変わるのを待つ</a:t>
+            </a:r>
+          </a:p>
+          <a:p>
+            <a:r>
+              <a:rPr b="0" sz="1200"/>
+              <a:t>DO: → パスワードB を入力 → Open protected file → 失敗</a:t>
+            </a:r>
+          </a:p>
+          <a:p>
+            <a:r>
+              <a:rPr b="0" sz="1700"/>
+              <a:t>Now the other way around.</a:t>
+            </a:r>
+          </a:p>
+          <a:p>
+            <a:r>
+              <a:rPr b="0" sz="1700"/>
+              <a:t>  ナウ ジ </a:t>
+            </a:r>
+            <a:r>
+              <a:rPr b="1" sz="1700"/>
+              <a:t>アザー ウェイ</a:t>
+            </a:r>
+            <a:r>
+              <a:rPr b="0" sz="1700"/>
+              <a:t> アラウンド。</a:t>
+            </a:r>
+          </a:p>
+          <a:p>
+            <a:r>
+              <a:rPr b="0" sz="1700"/>
+              <a:t>I keep Slot B's password. I change the object back to A.</a:t>
+            </a:r>
+          </a:p>
+          <a:p>
+            <a:r>
+              <a:rPr b="0" sz="1700"/>
+              <a:t>  アイ </a:t>
+            </a:r>
+            <a:r>
+              <a:rPr b="1" sz="1700"/>
+              <a:t>キープ</a:t>
+            </a:r>
+            <a:r>
+              <a:rPr b="0" sz="1700"/>
+              <a:t> スロット ビーズ パスワード。 アイ </a:t>
+            </a:r>
+            <a:r>
+              <a:rPr b="1" sz="1700"/>
+              <a:t>チェインジ</a:t>
+            </a:r>
+            <a:r>
+              <a:rPr b="0" sz="1700"/>
+              <a:t> ジ オブジェクト バック トゥ </a:t>
+            </a:r>
+            <a:r>
+              <a:rPr b="1" sz="1700"/>
+              <a:t>エイ</a:t>
+            </a:r>
+            <a:r>
+              <a:rPr b="0" sz="1700"/>
+              <a:t>。</a:t>
+            </a:r>
+          </a:p>
+          <a:p>
+            <a:r>
+              <a:rPr b="0" sz="1700"/>
+              <a:t>Same result. No valid entry found.</a:t>
             </a:r>
           </a:p>
           <a:p>
@@ -5348,35 +6970,35 @@
             </a:r>
             <a:r>
               <a:rPr b="1" sz="1700"/>
-              <a:t>セイム コンテナ</a:t>
-            </a:r>
-            <a:r>
-              <a:rPr b="0" sz="1700"/>
-              <a:t>。 ザット イズ ザ </a:t>
-            </a:r>
-            <a:r>
-              <a:rPr b="1" sz="1700"/>
-              <a:t>トゥースロット モデル</a:t>
-            </a:r>
-            <a:r>
-              <a:rPr b="0" sz="1700"/>
-              <a:t>、 ワーキング。</a:t>
-            </a:r>
-          </a:p>
-          <a:p>
-            <a:r>
-              <a:rPr b="0" sz="1700"/>
-              <a:t>And then the part that matters most.</a:t>
-            </a:r>
-          </a:p>
-          <a:p>
-            <a:r>
-              <a:rPr b="0" sz="1700"/>
-              <a:t>  アンド ゼン ザ パート ザット </a:t>
-            </a:r>
-            <a:r>
-              <a:rPr b="1" sz="1700"/>
-              <a:t>マターズ モウスト</a:t>
+              <a:t>セイム リザルト</a:t>
+            </a:r>
+            <a:r>
+              <a:rPr b="0" sz="1700"/>
+              <a:t>。 ノウ ヴァリッド エントリー ファウンド。</a:t>
+            </a:r>
+          </a:p>
+          <a:p>
+            <a:r>
+              <a:rPr b="0" sz="1700"/>
+              <a:t>Not 'wrong object'. Not 'object missing'.</a:t>
+            </a:r>
+          </a:p>
+          <a:p>
+            <a:r>
+              <a:rPr b="0" sz="1700"/>
+              <a:t>  ナット </a:t>
+            </a:r>
+            <a:r>
+              <a:rPr b="1" sz="1700"/>
+              <a:t>ゥロング オブジェクト</a:t>
+            </a:r>
+            <a:r>
+              <a:rPr b="0" sz="1700"/>
+              <a:t>。 ナット </a:t>
+            </a:r>
+            <a:r>
+              <a:rPr b="1" sz="1700"/>
+              <a:t>オブジェクト ミッシング</a:t>
             </a:r>
             <a:r>
               <a:rPr b="0" sz="1700"/>
@@ -5386,69 +7008,25 @@
           <a:p>
             <a:r>
               <a:rPr b="0" sz="1700"/>
-              <a:t>I don’t touch the screen.</a:t>
-            </a:r>
-          </a:p>
-          <a:p>
-            <a:r>
-              <a:rPr b="0" sz="1700"/>
-              <a:t>  アイ </a:t>
-            </a:r>
-            <a:r>
-              <a:rPr b="1" sz="1700"/>
-              <a:t>ドウント タッチ</a:t>
-            </a:r>
-            <a:r>
-              <a:rPr b="0" sz="1700"/>
-              <a:t> ザ スクリーン。</a:t>
-            </a:r>
-          </a:p>
-          <a:p>
-            <a:r>
-              <a:rPr b="0" sz="1700"/>
-              <a:t>Same tab. Same file. Same password. Same button.</a:t>
-            </a:r>
-          </a:p>
-          <a:p>
-            <a:r>
-              <a:rPr b="0" sz="1700"/>
-              <a:t>  セイム タブ。 セイム ファイル。 セイム パスワード。 セイム バトゥン。</a:t>
-            </a:r>
-          </a:p>
-          <a:p>
-            <a:r>
-              <a:rPr b="0" sz="1700"/>
-              <a:t>I simply take the object off the table.</a:t>
-            </a:r>
-          </a:p>
-          <a:p>
-            <a:r>
-              <a:rPr b="0" sz="1700"/>
-              <a:t>  アイ シンプリー </a:t>
-            </a:r>
-            <a:r>
-              <a:rPr b="1" sz="1700"/>
-              <a:t>テイク ジ オブジェクト オフ</a:t>
-            </a:r>
-            <a:r>
-              <a:rPr b="0" sz="1700"/>
-              <a:t> ザ テイブル。</a:t>
-            </a:r>
-          </a:p>
-          <a:p>
-            <a:r>
-              <a:rPr b="0" sz="1700"/>
-              <a:t>And watch it refuse.</a:t>
-            </a:r>
-          </a:p>
-          <a:p>
-            <a:r>
-              <a:rPr b="0" sz="1700"/>
-              <a:t>  アンド ウォッチ イット </a:t>
-            </a:r>
-            <a:r>
-              <a:rPr b="1" sz="1700"/>
-              <a:t>リフューズ</a:t>
+              <a:t>It will not tell you what it is waiting for.</a:t>
+            </a:r>
+          </a:p>
+          <a:p>
+            <a:r>
+              <a:rPr b="0" sz="1700"/>
+              <a:t>  イット ウィル ナット </a:t>
+            </a:r>
+            <a:r>
+              <a:rPr b="1" sz="1700"/>
+              <a:t>テル ユー</a:t>
+            </a:r>
+            <a:r>
+              <a:rPr b="0" sz="1700"/>
+              <a:t> ワット イッツ </a:t>
+            </a:r>
+            <a:r>
+              <a:rPr b="1" sz="1700"/>
+              <a:t>ウェイティング フォー</a:t>
             </a:r>
             <a:r>
               <a:rPr b="0" sz="1700"/>
@@ -5458,25 +7036,89 @@
           <a:p>
             <a:r>
               <a:rPr b="0" sz="1700"/>
-              <a:t>Then Audit. And Silent Standby.”</a:t>
-            </a:r>
-          </a:p>
-          <a:p>
-            <a:r>
-              <a:rPr b="0" sz="1700"/>
-              <a:t>  ゼン </a:t>
-            </a:r>
-            <a:r>
-              <a:rPr b="1" sz="1700"/>
-              <a:t>オーディット</a:t>
-            </a:r>
-            <a:r>
-              <a:rPr b="0" sz="1700"/>
-              <a:t>。 アンド </a:t>
-            </a:r>
-            <a:r>
-              <a:rPr b="1" sz="1700"/>
-              <a:t>サイレント スタンドバイ</a:t>
+              <a:t>That is what 'the cue gates the operation' means.</a:t>
+            </a:r>
+          </a:p>
+          <a:p>
+            <a:r>
+              <a:rPr b="0" sz="1700"/>
+              <a:t>  ザッツ ワット ザ </a:t>
+            </a:r>
+            <a:r>
+              <a:rPr b="1" sz="1700"/>
+              <a:t>キュー ゲイツ ジ オペレイション</a:t>
+            </a:r>
+            <a:r>
+              <a:rPr b="0" sz="1700"/>
+              <a:t> ミーンズ。</a:t>
+            </a:r>
+          </a:p>
+          <a:p>
+            <a:r>
+              <a:rPr b="0" sz="1700"/>
+              <a:t/>
+            </a:r>
+          </a:p>
+          <a:p>
+            <a:r>
+              <a:rPr b="0" sz="1200"/>
+              <a:t>── SCENE 8 · Coercion — hand over Slot A（0:30）</a:t>
+            </a:r>
+          </a:p>
+          <a:p>
+            <a:r>
+              <a:rPr b="0" sz="1200"/>
+              <a:t>DO: 物体A → パスワードA → Open protected file（SCENE 5 と同一操作）</a:t>
+            </a:r>
+          </a:p>
+          <a:p>
+            <a:r>
+              <a:rPr b="0" sz="1200"/>
+              <a:t>DO: ここは手を速く動かさない。語りで見せる場面。</a:t>
+            </a:r>
+          </a:p>
+          <a:p>
+            <a:r>
+              <a:rPr b="0" sz="1700"/>
+              <a:t>Now change the situation.</a:t>
+            </a:r>
+          </a:p>
+          <a:p>
+            <a:r>
+              <a:rPr b="0" sz="1700"/>
+              <a:t>  ナウ </a:t>
+            </a:r>
+            <a:r>
+              <a:rPr b="1" sz="1700"/>
+              <a:t>チェインジ</a:t>
+            </a:r>
+            <a:r>
+              <a:rPr b="0" sz="1700"/>
+              <a:t> ザ シチュエイション。</a:t>
+            </a:r>
+          </a:p>
+          <a:p>
+            <a:r>
+              <a:rPr b="0" sz="1700"/>
+              <a:t>Someone has the device. And they have me.</a:t>
+            </a:r>
+          </a:p>
+          <a:p>
+            <a:r>
+              <a:rPr b="0" sz="1700"/>
+              <a:t>  サムワン ハズ ザ </a:t>
+            </a:r>
+            <a:r>
+              <a:rPr b="1" sz="1700"/>
+              <a:t>デバイス</a:t>
+            </a:r>
+            <a:r>
+              <a:rPr b="0" sz="1700"/>
+              <a:t>。 アンド ゼイ ハヴ </a:t>
+            </a:r>
+            <a:r>
+              <a:rPr b="1" sz="1700"/>
+              <a:t>ミー</a:t>
             </a:r>
             <a:r>
               <a:rPr b="0" sz="1700"/>
@@ -5486,55 +7128,179 @@
           <a:p>
             <a:r>
               <a:rPr b="0" sz="1700"/>
+              <a:t>'Give us the password.'</a:t>
+            </a:r>
+          </a:p>
+          <a:p>
+            <a:r>
+              <a:rPr b="0" sz="1700"/>
+              <a:t>  </a:t>
+            </a:r>
+            <a:r>
+              <a:rPr b="1" sz="1700"/>
+              <a:t>ギヴ アス</a:t>
+            </a:r>
+            <a:r>
+              <a:rPr b="0" sz="1700"/>
+              <a:t> ザ パスワード。</a:t>
+            </a:r>
+          </a:p>
+          <a:p>
+            <a:r>
+              <a:rPr b="0" sz="1700"/>
+              <a:t>So I do. Object A. Password A.</a:t>
+            </a:r>
+          </a:p>
+          <a:p>
+            <a:r>
+              <a:rPr b="0" sz="1700"/>
+              <a:t>  ソウ </a:t>
+            </a:r>
+            <a:r>
+              <a:rPr b="1" sz="1700"/>
+              <a:t>アイ ドゥー</a:t>
+            </a:r>
+            <a:r>
+              <a:rPr b="0" sz="1700"/>
+              <a:t>。 オブジェクト エイ。 パスワード エイ。</a:t>
+            </a:r>
+          </a:p>
+          <a:p>
+            <a:r>
+              <a:rPr b="0" sz="1700"/>
+              <a:t>They get a file. A real file, that really opens.</a:t>
+            </a:r>
+          </a:p>
+          <a:p>
+            <a:r>
+              <a:rPr b="0" sz="1700"/>
+              <a:t>  ゼイ ゲット ア ファイル。 ア </a:t>
+            </a:r>
+            <a:r>
+              <a:rPr b="1" sz="1700"/>
+              <a:t>リアル</a:t>
+            </a:r>
+            <a:r>
+              <a:rPr b="0" sz="1700"/>
+              <a:t> ファイル、 ザット </a:t>
+            </a:r>
+            <a:r>
+              <a:rPr b="1" sz="1700"/>
+              <a:t>リアリー オウプンズ</a:t>
+            </a:r>
+            <a:r>
+              <a:rPr b="0" sz="1700"/>
+              <a:t>。</a:t>
+            </a:r>
+          </a:p>
+          <a:p>
+            <a:r>
+              <a:rPr b="0" sz="1700"/>
+              <a:t>Nothing on this screen says there is another one.</a:t>
+            </a:r>
+          </a:p>
+          <a:p>
+            <a:r>
+              <a:rPr b="0" sz="1700"/>
+              <a:t>  </a:t>
+            </a:r>
+            <a:r>
+              <a:rPr b="1" sz="1700"/>
+              <a:t>ナッシング</a:t>
+            </a:r>
+            <a:r>
+              <a:rPr b="0" sz="1700"/>
+              <a:t> オン ディス スクリーン セズ ゼアズ </a:t>
+            </a:r>
+            <a:r>
+              <a:rPr b="1" sz="1700"/>
+              <a:t>アナザー ワン</a:t>
+            </a:r>
+            <a:r>
+              <a:rPr b="0" sz="1700"/>
+              <a:t>。</a:t>
+            </a:r>
+          </a:p>
+          <a:p>
+            <a:r>
+              <a:rPr b="0" sz="1700"/>
+              <a:t>That is the whole design.</a:t>
+            </a:r>
+          </a:p>
+          <a:p>
+            <a:r>
+              <a:rPr b="0" sz="1700"/>
+              <a:t>  ザッツ ザ </a:t>
+            </a:r>
+            <a:r>
+              <a:rPr b="1" sz="1700"/>
+              <a:t>ホウル デザイン</a:t>
+            </a:r>
+            <a:r>
+              <a:rPr b="0" sz="1700"/>
+              <a:t>。</a:t>
+            </a:r>
+          </a:p>
+          <a:p>
+            <a:r>
+              <a:rPr b="0" sz="1700"/>
               <a:t/>
             </a:r>
           </a:p>
           <a:p>
             <a:r>
-              <a:rPr b="0" sz="1700"/>
-              <a:t>── STEP 0 · 0:20 · Orientation</a:t>
-            </a:r>
-          </a:p>
-          <a:p>
-            <a:r>
               <a:rPr b="0" sz="1200"/>
-              <a:t>DO: Simple ホームを提示。下部バーを指す（o · n · g · e · q · w の6つだけ）</a:t>
-            </a:r>
-          </a:p>
-          <a:p>
-            <a:r>
-              <a:rPr b="0" sz="1700"/>
-              <a:t>“This is the real console — Local Disclosure Control.</a:t>
-            </a:r>
-          </a:p>
-          <a:p>
-            <a:r>
-              <a:rPr b="0" sz="1700"/>
-              <a:t>  ディス イズ ザ </a:t>
-            </a:r>
-            <a:r>
-              <a:rPr b="1" sz="1700"/>
-              <a:t>リアル コンソウル</a:t>
-            </a:r>
-            <a:r>
-              <a:rPr b="0" sz="1700"/>
-              <a:t> — ローカル ディスクロージャー コントロール。</a:t>
-            </a:r>
-          </a:p>
-          <a:p>
-            <a:r>
-              <a:rPr b="0" sz="1700"/>
-              <a:t>The home screen is deliberately small.</a:t>
-            </a:r>
-          </a:p>
-          <a:p>
-            <a:r>
-              <a:rPr b="0" sz="1700"/>
-              <a:t>  ザ ホウム スクリーン イズ </a:t>
-            </a:r>
-            <a:r>
-              <a:rPr b="1" sz="1700"/>
-              <a:t>ディリバレットリー スモール</a:t>
+              <a:t>── SCENE 9 · The other password（0:50）</a:t>
+            </a:r>
+          </a:p>
+          <a:p>
+            <a:r>
+              <a:rPr b="0" sz="1200"/>
+              <a:t>DO: 同じ Retrieve 画面。消したい方の物体（物体B）をかざす</a:t>
+            </a:r>
+          </a:p>
+          <a:p>
+            <a:r>
+              <a:rPr b="0" sz="1200"/>
+              <a:t>DO: → パスワード欄に Clearing password（破壊用）を入力 → Open protected file</a:t>
+            </a:r>
+          </a:p>
+          <a:p>
+            <a:r>
+              <a:rPr b="0" sz="1200"/>
+              <a:t>DO: → No valid entry found. と出る</a:t>
+            </a:r>
+          </a:p>
+          <a:p>
+            <a:r>
+              <a:rPr b="0" sz="1700"/>
+              <a:t>Worse case. They already know there is more.</a:t>
+            </a:r>
+          </a:p>
+          <a:p>
+            <a:r>
+              <a:rPr b="0" sz="1700"/>
+              <a:t>  </a:t>
+            </a:r>
+            <a:r>
+              <a:rPr b="1" sz="1700"/>
+              <a:t>ワース ケイス</a:t>
+            </a:r>
+            <a:r>
+              <a:rPr b="0" sz="1700"/>
+              <a:t>。 ゼイ オールレディ </a:t>
+            </a:r>
+            <a:r>
+              <a:rPr b="1" sz="1700"/>
+              <a:t>ノウ</a:t>
+            </a:r>
+            <a:r>
+              <a:rPr b="0" sz="1700"/>
+              <a:t> ゼアズ </a:t>
+            </a:r>
+            <a:r>
+              <a:rPr b="1" sz="1700"/>
+              <a:t>モア</a:t>
             </a:r>
             <a:r>
               <a:rPr b="0" sz="1700"/>
@@ -5544,29 +7310,57 @@
           <a:p>
             <a:r>
               <a:rPr b="0" sz="1700"/>
-              <a:t>Open. New. Guided. Expert.</a:t>
-            </a:r>
-          </a:p>
-          <a:p>
-            <a:r>
-              <a:rPr b="0" sz="1700"/>
-              <a:t>  オウプン。 ニュー。 ガイディッド。 エクスパート。</a:t>
-            </a:r>
-          </a:p>
-          <a:p>
-            <a:r>
-              <a:rPr b="0" sz="1700"/>
-              <a:t>Under pressure, you don’t want a wall of options.</a:t>
-            </a:r>
-          </a:p>
-          <a:p>
-            <a:r>
-              <a:rPr b="0" sz="1700"/>
-              <a:t>  アンダー プレッシャー、 ユー ドウント ワント ア </a:t>
-            </a:r>
-            <a:r>
-              <a:rPr b="1" sz="1700"/>
-              <a:t>ウォール オヴ オプションズ</a:t>
+              <a:t>Same screen. Same object. Same field. Same button.</a:t>
+            </a:r>
+          </a:p>
+          <a:p>
+            <a:r>
+              <a:rPr b="0" sz="1700"/>
+              <a:t>  セイム スクリーン。 セイム オブジェクト。 セイム フィールド。 セイム ボタン。</a:t>
+            </a:r>
+          </a:p>
+          <a:p>
+            <a:r>
+              <a:rPr b="0" sz="1700"/>
+              <a:t>The only thing I change is which password I type.</a:t>
+            </a:r>
+          </a:p>
+          <a:p>
+            <a:r>
+              <a:rPr b="0" sz="1700"/>
+              <a:t>  ジ </a:t>
+            </a:r>
+            <a:r>
+              <a:rPr b="1" sz="1700"/>
+              <a:t>オンリー</a:t>
+            </a:r>
+            <a:r>
+              <a:rPr b="0" sz="1700"/>
+              <a:t> シング アイ チェインジ イズ </a:t>
+            </a:r>
+            <a:r>
+              <a:rPr b="1" sz="1700"/>
+              <a:t>ウィッチ パスワード</a:t>
+            </a:r>
+            <a:r>
+              <a:rPr b="0" sz="1700"/>
+              <a:t> アイ タイプ。</a:t>
+            </a:r>
+          </a:p>
+          <a:p>
+            <a:r>
+              <a:rPr b="0" sz="1700"/>
+              <a:t>And it says — no valid entry found.</a:t>
+            </a:r>
+          </a:p>
+          <a:p>
+            <a:r>
+              <a:rPr b="0" sz="1700"/>
+              <a:t>  アンド イット セズ — </a:t>
+            </a:r>
+            <a:r>
+              <a:rPr b="1" sz="1700"/>
+              <a:t>ノウ ヴァリッド エントリー ファウンド</a:t>
             </a:r>
             <a:r>
               <a:rPr b="0" sz="1700"/>
@@ -5576,17 +7370,25 @@
           <a:p>
             <a:r>
               <a:rPr b="0" sz="1700"/>
-              <a:t>The full control set is one key away.”</a:t>
-            </a:r>
-          </a:p>
-          <a:p>
-            <a:r>
-              <a:rPr b="0" sz="1700"/>
-              <a:t>  ザ フル コントロール セット イズ </a:t>
-            </a:r>
-            <a:r>
-              <a:rPr b="1" sz="1700"/>
-              <a:t>ワン キー アウェイ</a:t>
+              <a:t>That is the same sentence you get from a typo.</a:t>
+            </a:r>
+          </a:p>
+          <a:p>
+            <a:r>
+              <a:rPr b="0" sz="1700"/>
+              <a:t>  ザッツ ザ </a:t>
+            </a:r>
+            <a:r>
+              <a:rPr b="1" sz="1700"/>
+              <a:t>セイム センテンス</a:t>
+            </a:r>
+            <a:r>
+              <a:rPr b="0" sz="1700"/>
+              <a:t> ユー ゲット フロム ア </a:t>
+            </a:r>
+            <a:r>
+              <a:rPr b="1" sz="1700"/>
+              <a:t>タイポ</a:t>
             </a:r>
             <a:r>
               <a:rPr b="0" sz="1700"/>
@@ -5596,75 +7398,321 @@
           <a:p>
             <a:r>
               <a:rPr b="0" sz="1700"/>
+              <a:t>But that entry is not locked. It is gone.</a:t>
+            </a:r>
+          </a:p>
+          <a:p>
+            <a:r>
+              <a:rPr b="0" sz="1700"/>
+              <a:t>  バット ザット エントリー イズ ナット </a:t>
+            </a:r>
+            <a:r>
+              <a:rPr b="1" sz="1700"/>
+              <a:t>ロックト</a:t>
+            </a:r>
+            <a:r>
+              <a:rPr b="0" sz="1700"/>
+              <a:t>。 イッツ </a:t>
+            </a:r>
+            <a:r>
+              <a:rPr b="1" sz="1700"/>
+              <a:t>ゴーン</a:t>
+            </a:r>
+            <a:r>
+              <a:rPr b="0" sz="1700"/>
+              <a:t>。</a:t>
+            </a:r>
+          </a:p>
+          <a:p>
+            <a:r>
+              <a:rPr b="0" sz="1700"/>
+              <a:t>The password they can compel is not the only one there is.</a:t>
+            </a:r>
+          </a:p>
+          <a:p>
+            <a:r>
+              <a:rPr b="0" sz="1700"/>
+              <a:t>  ザ パスワード ゼイ キャン </a:t>
+            </a:r>
+            <a:r>
+              <a:rPr b="1" sz="1700"/>
+              <a:t>コンペル</a:t>
+            </a:r>
+            <a:r>
+              <a:rPr b="0" sz="1700"/>
+              <a:t> イズ ナット ジ </a:t>
+            </a:r>
+            <a:r>
+              <a:rPr b="1" sz="1700"/>
+              <a:t>オンリー ワン</a:t>
+            </a:r>
+            <a:r>
+              <a:rPr b="0" sz="1700"/>
+              <a:t> ゼア イズ。</a:t>
+            </a:r>
+          </a:p>
+          <a:p>
+            <a:r>
+              <a:rPr b="0" sz="1700"/>
               <a:t/>
             </a:r>
           </a:p>
           <a:p>
             <a:r>
-              <a:rPr b="0" sz="1700"/>
-              <a:t>── STEP 1 · 0:50 · Create a Vessel — Prepare</a:t>
-            </a:r>
-          </a:p>
-          <a:p>
-            <a:r>
               <a:rPr b="0" sz="1200"/>
-              <a:t>DO: n New → vessel-path → vessel-size を 64M に変更（Select・既定 512M。既定のまま作らない）→ vessel-label（任意・無害な語）→ create-btn</a:t>
-            </a:r>
-          </a:p>
-          <a:p>
-            <a:r>
-              <a:rPr b="0" sz="1700"/>
-              <a:t>“First I create a vessel — a deniable container file.</a:t>
-            </a:r>
-          </a:p>
-          <a:p>
-            <a:r>
-              <a:rPr b="0" sz="1700"/>
-              <a:t>  ファースト アイ クリエイト ア </a:t>
-            </a:r>
-            <a:r>
-              <a:rPr b="1" sz="1700"/>
-              <a:t>ヴェッセル</a:t>
-            </a:r>
-            <a:r>
-              <a:rPr b="0" sz="1700"/>
-              <a:t> — ア ディナイアブル コンテナ ファイル。</a:t>
-            </a:r>
-          </a:p>
-          <a:p>
-            <a:r>
-              <a:rPr b="0" sz="1700"/>
-              <a:t>This is the Prepare step.</a:t>
-            </a:r>
-          </a:p>
-          <a:p>
-            <a:r>
-              <a:rPr b="0" sz="1700"/>
-              <a:t>  ディス イズ ザ </a:t>
-            </a:r>
-            <a:r>
-              <a:rPr b="1" sz="1700"/>
-              <a:t>プリペア</a:t>
-            </a:r>
-            <a:r>
-              <a:rPr b="0" sz="1700"/>
-              <a:t> ステップ。</a:t>
-            </a:r>
-          </a:p>
-          <a:p>
-            <a:r>
-              <a:rPr b="0" sz="1700"/>
-              <a:t>It has no header. No magic bytes.</a:t>
-            </a:r>
-          </a:p>
-          <a:p>
-            <a:r>
-              <a:rPr b="0" sz="1700"/>
-              <a:t>  イット ハズ </a:t>
-            </a:r>
-            <a:r>
-              <a:rPr b="1" sz="1700"/>
-              <a:t>ノウ ヘダー</a:t>
+              <a:t>── SCENE 10 · Nothing left to open — and what the tool will not claim（0:50）</a:t>
+            </a:r>
+          </a:p>
+          <a:p>
+            <a:r>
+              <a:rPr b="0" sz="1200"/>
+              <a:t>DO: 物体B → パスワードB（正規のもの）→ Open protected file → 何も出てこない</a:t>
+            </a:r>
+          </a:p>
+          <a:p>
+            <a:r>
+              <a:rPr b="0" sz="1200"/>
+              <a:t>DO: 続けて 物体A → パスワードA → Open protected file → 開く（時間が押していれば口頭のみ）</a:t>
+            </a:r>
+          </a:p>
+          <a:p>
+            <a:r>
+              <a:rPr b="0" sz="1200"/>
+              <a:t>DO: 最後の3行は操作なし。手を止めて、客席を見て言う。</a:t>
+            </a:r>
+          </a:p>
+          <a:p>
+            <a:r>
+              <a:rPr b="0" sz="1700"/>
+              <a:t>Let me prove that.</a:t>
+            </a:r>
+          </a:p>
+          <a:p>
+            <a:r>
+              <a:rPr b="0" sz="1700"/>
+              <a:t>  レット ミー </a:t>
+            </a:r>
+            <a:r>
+              <a:rPr b="1" sz="1700"/>
+              <a:t>プルーヴ</a:t>
+            </a:r>
+            <a:r>
+              <a:rPr b="0" sz="1700"/>
+              <a:t> ザット。</a:t>
+            </a:r>
+          </a:p>
+          <a:p>
+            <a:r>
+              <a:rPr b="0" sz="1700"/>
+              <a:t>Object B. Slot B's real password. The correct way.</a:t>
+            </a:r>
+          </a:p>
+          <a:p>
+            <a:r>
+              <a:rPr b="0" sz="1700"/>
+              <a:t>  オブジェクト ビー。 スロット ビーズ </a:t>
+            </a:r>
+            <a:r>
+              <a:rPr b="1" sz="1700"/>
+              <a:t>リアル</a:t>
+            </a:r>
+            <a:r>
+              <a:rPr b="0" sz="1700"/>
+              <a:t> パスワード。 ザ </a:t>
+            </a:r>
+            <a:r>
+              <a:rPr b="1" sz="1700"/>
+              <a:t>コゥレクト ウェイ</a:t>
+            </a:r>
+            <a:r>
+              <a:rPr b="0" sz="1700"/>
+              <a:t>。</a:t>
+            </a:r>
+          </a:p>
+          <a:p>
+            <a:r>
+              <a:rPr b="0" sz="1700"/>
+              <a:t>Nothing.</a:t>
+            </a:r>
+          </a:p>
+          <a:p>
+            <a:r>
+              <a:rPr b="0" sz="1700"/>
+              <a:t>  </a:t>
+            </a:r>
+            <a:r>
+              <a:rPr b="1" sz="1700"/>
+              <a:t>ナッシング</a:t>
+            </a:r>
+            <a:r>
+              <a:rPr b="0" sz="1700"/>
+              <a:t>。</a:t>
+            </a:r>
+          </a:p>
+          <a:p>
+            <a:r>
+              <a:rPr b="0" sz="1700"/>
+              <a:t>I cannot get it back either. That is not a bug.</a:t>
+            </a:r>
+          </a:p>
+          <a:p>
+            <a:r>
+              <a:rPr b="0" sz="1700"/>
+              <a:t>  アイ キャナット ゲット イット バック </a:t>
+            </a:r>
+            <a:r>
+              <a:rPr b="1" sz="1700"/>
+              <a:t>アイザー</a:t>
+            </a:r>
+            <a:r>
+              <a:rPr b="0" sz="1700"/>
+              <a:t>。 ザッツ </a:t>
+            </a:r>
+            <a:r>
+              <a:rPr b="1" sz="1700"/>
+              <a:t>ナット ア バグ</a:t>
+            </a:r>
+            <a:r>
+              <a:rPr b="0" sz="1700"/>
+              <a:t>。</a:t>
+            </a:r>
+          </a:p>
+          <a:p>
+            <a:r>
+              <a:rPr b="0" sz="1700"/>
+              <a:t>And Slot A still opens, exactly as before.</a:t>
+            </a:r>
+          </a:p>
+          <a:p>
+            <a:r>
+              <a:rPr b="0" sz="1700"/>
+              <a:t>  アンド </a:t>
+            </a:r>
+            <a:r>
+              <a:rPr b="1" sz="1700"/>
+              <a:t>スロット エイ</a:t>
+            </a:r>
+            <a:r>
+              <a:rPr b="0" sz="1700"/>
+              <a:t> スティル オウプンズ、 イグザクトリー アズ </a:t>
+            </a:r>
+            <a:r>
+              <a:rPr b="1" sz="1700"/>
+              <a:t>ビフォー</a:t>
+            </a:r>
+            <a:r>
+              <a:rPr b="0" sz="1700"/>
+              <a:t>。</a:t>
+            </a:r>
+          </a:p>
+          <a:p>
+            <a:r>
+              <a:rPr b="0" sz="1700"/>
+              <a:t>One thing this tool will never tell you:</a:t>
+            </a:r>
+          </a:p>
+          <a:p>
+            <a:r>
+              <a:rPr b="0" sz="1700"/>
+              <a:t>  ワン シング ディス ツール ウィル ネヴァー </a:t>
+            </a:r>
+            <a:r>
+              <a:rPr b="1" sz="1700"/>
+              <a:t>テル ユー</a:t>
+            </a:r>
+            <a:r>
+              <a:rPr b="0" sz="1700"/>
+              <a:t>:</a:t>
+            </a:r>
+          </a:p>
+          <a:p>
+            <a:r>
+              <a:rPr b="0" sz="1700"/>
+              <a:t>whether your cover story is believable.</a:t>
+            </a:r>
+          </a:p>
+          <a:p>
+            <a:r>
+              <a:rPr b="0" sz="1700"/>
+              <a:t>  ウェザー ユア </a:t>
+            </a:r>
+            <a:r>
+              <a:rPr b="1" sz="1700"/>
+              <a:t>カヴァー ストーリー</a:t>
+            </a:r>
+            <a:r>
+              <a:rPr b="0" sz="1700"/>
+              <a:t> イズ </a:t>
+            </a:r>
+            <a:r>
+              <a:rPr b="1" sz="1700"/>
+              <a:t>ビリーヴァブル</a:t>
+            </a:r>
+            <a:r>
+              <a:rPr b="0" sz="1700"/>
+              <a:t>。</a:t>
+            </a:r>
+          </a:p>
+          <a:p>
+            <a:r>
+              <a:rPr b="0" sz="1700"/>
+              <a:t>That is your job. It does not pretend otherwise.</a:t>
+            </a:r>
+          </a:p>
+          <a:p>
+            <a:r>
+              <a:rPr b="0" sz="1700"/>
+              <a:t>  ザッツ </a:t>
+            </a:r>
+            <a:r>
+              <a:rPr b="1" sz="1700"/>
+              <a:t>ユア ジョブ</a:t>
+            </a:r>
+            <a:r>
+              <a:rPr b="0" sz="1700"/>
+              <a:t>。 イット ダズ ナット </a:t>
+            </a:r>
+            <a:r>
+              <a:rPr b="1" sz="1700"/>
+              <a:t>プリテンド</a:t>
+            </a:r>
+            <a:r>
+              <a:rPr b="0" sz="1700"/>
+              <a:t> アザーワイズ。</a:t>
+            </a:r>
+          </a:p>
+          <a:p>
+            <a:r>
+              <a:rPr b="0" sz="1700"/>
+              <a:t/>
+            </a:r>
+          </a:p>
+          <a:p>
+            <a:r>
+              <a:rPr b="0" sz="1200"/>
+              <a:t>── SCENE 11 · Wrap（0:10）</a:t>
+            </a:r>
+          </a:p>
+          <a:p>
+            <a:r>
+              <a:rPr b="0" sz="1200"/>
+              <a:t>DO: スライド（Slide 25）へ戻す。</a:t>
+            </a:r>
+          </a:p>
+          <a:p>
+            <a:r>
+              <a:rPr b="0" sz="1700"/>
+              <a:t>One file. Two objects. Two passwords.</a:t>
+            </a:r>
+          </a:p>
+          <a:p>
+            <a:r>
+              <a:rPr b="0" sz="1700"/>
+              <a:t>  </a:t>
+            </a:r>
+            <a:r>
+              <a:rPr b="1" sz="1700"/>
+              <a:t>ワン ファイル</a:t>
             </a:r>
             <a:r>
               <a:rPr b="0" sz="1700"/>
@@ -5672,7 +7720,15 @@
             </a:r>
             <a:r>
               <a:rPr b="1" sz="1700"/>
-              <a:t>ノウ マジック バイツ</a:t>
+              <a:t>トゥー オブジェクツ</a:t>
+            </a:r>
+            <a:r>
+              <a:rPr b="0" sz="1700"/>
+              <a:t>。 </a:t>
+            </a:r>
+            <a:r>
+              <a:rPr b="1" sz="1700"/>
+              <a:t>トゥー パスワーズ</a:t>
             </a:r>
             <a:r>
               <a:rPr b="0" sz="1700"/>
@@ -5682,21 +7738,57 @@
           <a:p>
             <a:r>
               <a:rPr b="0" sz="1700"/>
-              <a:t>On disk, it’s indistinguishable from random data.”</a:t>
-            </a:r>
-          </a:p>
-          <a:p>
-            <a:r>
-              <a:rPr b="0" sz="1700"/>
-              <a:t>  オン ディスク、 イッツ </a:t>
-            </a:r>
-            <a:r>
-              <a:rPr b="1" sz="1700"/>
-              <a:t>インディスティングウィシャブル</a:t>
-            </a:r>
-            <a:r>
-              <a:rPr b="0" sz="1700"/>
-              <a:t> フロム ランダム データ。</a:t>
+              <a:t>And a password that ends one, instead of opening it.</a:t>
+            </a:r>
+          </a:p>
+          <a:p>
+            <a:r>
+              <a:rPr b="0" sz="1700"/>
+              <a:t>  アンド ア パスワード ザット </a:t>
+            </a:r>
+            <a:r>
+              <a:rPr b="1" sz="1700"/>
+              <a:t>エンズ</a:t>
+            </a:r>
+            <a:r>
+              <a:rPr b="0" sz="1700"/>
+              <a:t> ワン、 インステッド オヴ </a:t>
+            </a:r>
+            <a:r>
+              <a:rPr b="1" sz="1700"/>
+              <a:t>オウプニング</a:t>
+            </a:r>
+            <a:r>
+              <a:rPr b="0" sz="1700"/>
+              <a:t> イット。</a:t>
+            </a:r>
+          </a:p>
+          <a:p>
+            <a:r>
+              <a:rPr b="0" sz="1700"/>
+              <a:t>On real hardware. Come and try it at the table.</a:t>
+            </a:r>
+          </a:p>
+          <a:p>
+            <a:r>
+              <a:rPr b="0" sz="1700"/>
+              <a:t>  オン </a:t>
+            </a:r>
+            <a:r>
+              <a:rPr b="1" sz="1700"/>
+              <a:t>リアル ハードウェア</a:t>
+            </a:r>
+            <a:r>
+              <a:rPr b="0" sz="1700"/>
+              <a:t>。 カム アンド </a:t>
+            </a:r>
+            <a:r>
+              <a:rPr b="1" sz="1700"/>
+              <a:t>トライ イット</a:t>
+            </a:r>
+            <a:r>
+              <a:rPr b="0" sz="1700"/>
+              <a:t> アット ザ テイブル。</a:t>
             </a:r>
           </a:p>
           <a:p>
@@ -5707,286 +7799,14 @@
           </a:p>
           <a:p>
             <a:r>
-              <a:rPr b="0" sz="1700"/>
-              <a:t>── STEP 2 · 1:30 · Bind — put two different files into one container</a:t>
-            </a:r>
-          </a:p>
-          <a:p>
-            <a:r>
               <a:rPr b="0" sz="1200"/>
-              <a:t>DO: TUI で w → プロジェクタをラップトップのブラウザへ切替 → 事前ブックマークの /unlock タブに store トークンを入力 → Store 画面。1回目：「Choose the entry」で Entry 1 → ファイル → パスワード → 物体を手元に置いたまま 1 · Capture empty scene → 物体Aをかざして 2 · Capture access object → かざしたまま Protect file2回目：Entry 2 に切替 → 別ファイル → 別パスワード → 物体を外して 1 · Capture empty scene → 物体Bをかざして 2 · Capture access object → Advanced security options → Restricted recovery password に破壊パスワード → かざしたまま Protect file</a:t>
-            </a:r>
-          </a:p>
-          <a:p>
-            <a:r>
-              <a:rPr b="0" sz="1700"/>
-              <a:t>“Now I switch to the browser.</a:t>
-            </a:r>
-          </a:p>
-          <a:p>
-            <a:r>
-              <a:rPr b="0" sz="1700"/>
-              <a:t>  ナウ アイ スウィッチ トゥ ザ </a:t>
-            </a:r>
-            <a:r>
-              <a:rPr b="1" sz="1700"/>
-              <a:t>ブラウザ</a:t>
-            </a:r>
-            <a:r>
-              <a:rPr b="0" sz="1700"/>
-              <a:t>。</a:t>
-            </a:r>
-          </a:p>
-          <a:p>
-            <a:r>
-              <a:rPr b="0" sz="1700"/>
-              <a:t>The same device serves a local web interface.</a:t>
-            </a:r>
-          </a:p>
-          <a:p>
-            <a:r>
-              <a:rPr b="0" sz="1700"/>
-              <a:t>  ザ セイム デバイス サーヴズ ア </a:t>
-            </a:r>
-            <a:r>
-              <a:rPr b="1" sz="1700"/>
-              <a:t>ローカル ウェブ インターフェイス</a:t>
-            </a:r>
-            <a:r>
-              <a:rPr b="0" sz="1700"/>
-              <a:t>。</a:t>
-            </a:r>
-          </a:p>
-          <a:p>
-            <a:r>
-              <a:rPr b="0" sz="1700"/>
-              <a:t>I’m logged in with a token scoped to the store role.</a:t>
-            </a:r>
-          </a:p>
-          <a:p>
-            <a:r>
-              <a:rPr b="0" sz="1700"/>
-              <a:t>  アイム ログド イン ウィズ ア トウクン スコウプト トゥ ザ </a:t>
-            </a:r>
-            <a:r>
-              <a:rPr b="1" sz="1700"/>
-              <a:t>ストア ロウル</a:t>
-            </a:r>
-            <a:r>
-              <a:rPr b="0" sz="1700"/>
-              <a:t>。</a:t>
-            </a:r>
-          </a:p>
-          <a:p>
-            <a:r>
-              <a:rPr b="0" sz="1700"/>
-              <a:t>I’m putting two different files into the one container I just made.</a:t>
-            </a:r>
-          </a:p>
-          <a:p>
-            <a:r>
-              <a:rPr b="0" sz="1700"/>
-              <a:t>  アイム プティング </a:t>
-            </a:r>
-            <a:r>
-              <a:rPr b="1" sz="1700"/>
-              <a:t>トゥー ディファレント ファイルズ</a:t>
-            </a:r>
-            <a:r>
-              <a:rPr b="0" sz="1700"/>
-              <a:t> イントゥ ザ ワン コンテナ アイ ジャスト メイド。</a:t>
-            </a:r>
-          </a:p>
-          <a:p>
-            <a:r>
-              <a:rPr b="0" sz="1700"/>
-              <a:t>Now watch — it takes two shots.</a:t>
-            </a:r>
-          </a:p>
-          <a:p>
-            <a:r>
-              <a:rPr b="0" sz="1700"/>
-              <a:t>  ナウ </a:t>
-            </a:r>
-            <a:r>
-              <a:rPr b="1" sz="1700"/>
-              <a:t>ウォッチ</a:t>
-            </a:r>
-            <a:r>
-              <a:rPr b="0" sz="1700"/>
-              <a:t> — イット テイクス </a:t>
-            </a:r>
-            <a:r>
-              <a:rPr b="1" sz="1700"/>
-              <a:t>トゥー ショッツ</a:t>
-            </a:r>
-            <a:r>
-              <a:rPr b="0" sz="1700"/>
-              <a:t>。</a:t>
-            </a:r>
-          </a:p>
-          <a:p>
-            <a:r>
-              <a:rPr b="0" sz="1700"/>
-              <a:t>First the empty view. Then the object.</a:t>
-            </a:r>
-          </a:p>
-          <a:p>
-            <a:r>
-              <a:rPr b="0" sz="1700"/>
-              <a:t>  ファースト ジ </a:t>
-            </a:r>
-            <a:r>
-              <a:rPr b="1" sz="1700"/>
-              <a:t>エンプティ ヴュー</a:t>
-            </a:r>
-            <a:r>
-              <a:rPr b="0" sz="1700"/>
-              <a:t>。 ゼン ジ </a:t>
-            </a:r>
-            <a:r>
-              <a:rPr b="1" sz="1700"/>
-              <a:t>オブジェクト</a:t>
-            </a:r>
-            <a:r>
-              <a:rPr b="0" sz="1700"/>
-              <a:t>。</a:t>
-            </a:r>
-          </a:p>
-          <a:p>
-            <a:r>
-              <a:rPr b="0" sz="1700"/>
-              <a:t>The difference between those two frames is what the device keeps.</a:t>
-            </a:r>
-          </a:p>
-          <a:p>
-            <a:r>
-              <a:rPr b="0" sz="1700"/>
-              <a:t>  ザ </a:t>
-            </a:r>
-            <a:r>
-              <a:rPr b="1" sz="1700"/>
-              <a:t>ディファレンス</a:t>
-            </a:r>
-            <a:r>
-              <a:rPr b="0" sz="1700"/>
-              <a:t> ビトウィーン ゾウズ トゥー フレイムズ イズ ワット ザ デバイス キープス。</a:t>
-            </a:r>
-          </a:p>
-          <a:p>
-            <a:r>
-              <a:rPr b="0" sz="1700"/>
-              <a:t>Otherwise it would be describing my wall.</a:t>
-            </a:r>
-          </a:p>
-          <a:p>
-            <a:r>
-              <a:rPr b="0" sz="1700"/>
-              <a:t>  アザワイズ イット ウド ビー ディスクライビング マイ </a:t>
-            </a:r>
-            <a:r>
-              <a:rPr b="1" sz="1700"/>
-              <a:t>ウォール</a:t>
-            </a:r>
-            <a:r>
-              <a:rPr b="0" sz="1700"/>
-              <a:t>。</a:t>
-            </a:r>
-          </a:p>
-          <a:p>
-            <a:r>
-              <a:rPr b="0" sz="1700"/>
-              <a:t>And then my wall would open the file.</a:t>
-            </a:r>
-          </a:p>
-          <a:p>
-            <a:r>
-              <a:rPr b="0" sz="1700"/>
-              <a:t>  アンド ゼン </a:t>
-            </a:r>
-            <a:r>
-              <a:rPr b="1" sz="1700"/>
-              <a:t>マイ ウォール</a:t>
-            </a:r>
-            <a:r>
-              <a:rPr b="0" sz="1700"/>
-              <a:t> ウド オウプン ザ ファイル。</a:t>
-            </a:r>
-          </a:p>
-          <a:p>
-            <a:r>
-              <a:rPr b="0" sz="1700"/>
-              <a:t>And remember what that object is. A cue, not a key.</a:t>
-            </a:r>
-          </a:p>
-          <a:p>
-            <a:r>
-              <a:rPr b="0" sz="1700"/>
-              <a:t>  アンド リメンバー ワット ザット オブジェクト イズ。 ア </a:t>
-            </a:r>
-            <a:r>
-              <a:rPr b="1" sz="1700"/>
-              <a:t>キュー</a:t>
-            </a:r>
-            <a:r>
-              <a:rPr b="0" sz="1700"/>
-              <a:t>、 </a:t>
-            </a:r>
-            <a:r>
-              <a:rPr b="1" sz="1700"/>
-              <a:t>ナット</a:t>
-            </a:r>
-            <a:r>
-              <a:rPr b="0" sz="1700"/>
-              <a:t> ア キー。</a:t>
-            </a:r>
-          </a:p>
-          <a:p>
-            <a:r>
-              <a:rPr b="0" sz="1700"/>
-              <a:t>It gates the operation. It is not the encryption key.</a:t>
-            </a:r>
-          </a:p>
-          <a:p>
-            <a:r>
-              <a:rPr b="0" sz="1700"/>
-              <a:t>  イット </a:t>
-            </a:r>
-            <a:r>
-              <a:rPr b="1" sz="1700"/>
-              <a:t>ゲイツ</a:t>
-            </a:r>
-            <a:r>
-              <a:rPr b="0" sz="1700"/>
-              <a:t> ジ オペレイション。 イット イズ </a:t>
-            </a:r>
-            <a:r>
-              <a:rPr b="1" sz="1700"/>
-              <a:t>ナット</a:t>
-            </a:r>
-            <a:r>
-              <a:rPr b="0" sz="1700"/>
-              <a:t> ジ インクリプション キー。</a:t>
-            </a:r>
-          </a:p>
-          <a:p>
-            <a:r>
-              <a:rPr b="0" sz="1700"/>
-              <a:t>A photograph of it unlocks nothing.”</a:t>
-            </a:r>
-          </a:p>
-          <a:p>
-            <a:r>
-              <a:rPr b="0" sz="1700"/>
-              <a:t>  ア フォウトグラフ オヴ イット アンロックス </a:t>
-            </a:r>
-            <a:r>
-              <a:rPr b="1" sz="1700"/>
-              <a:t>ナッシング</a:t>
-            </a:r>
-            <a:r>
-              <a:rPr b="0" sz="1700"/>
-              <a:t>。</a:t>
+              <a:t>── フォールバック（録画に切り替えたとき）</a:t>
+            </a:r>
+          </a:p>
+          <a:p>
+            <a:r>
+              <a:rPr b="0" sz="1200"/>
+              <a:t>JA: 「1つの容器・2つの物体・2つのパスワード・そして開くのではなく終わらせるパスワード」を口頭で辿る。個別シーンは最大15秒で見切り、止まらず前進。</a:t>
             </a:r>
           </a:p>
           <a:p>
@@ -5997,1444 +7817,8 @@
           </a:p>
           <a:p>
             <a:r>
-              <a:rPr b="0" sz="1700"/>
-              <a:t>── STEP 3 · 0:50 · Operate — the file comes back, and the role boundary</a:t>
-            </a:r>
-          </a:p>
-          <a:p>
-            <a:r>
               <a:rPr b="0" sz="1200"/>
-              <a:t>DO: 同じ store タブで Retrieve へ。物体Aを提示 → パスワード → Open protected file。続けて役割の境界：別タブで recover トークンで解錠しておいたウィンドウを一瞬提示 — ナビに Store / Maintenance が一切無いことを指す</a:t>
-            </a:r>
-          </a:p>
-          <a:p>
-            <a:r>
-              <a:rPr b="0" sz="1700"/>
-              <a:t>“Same object. Correct password. The file comes back.</a:t>
-            </a:r>
-          </a:p>
-          <a:p>
-            <a:r>
-              <a:rPr b="0" sz="1700"/>
-              <a:t>  セイム オブジェクト。 コゥレクト パスワード。 ザ ファイル </a:t>
-            </a:r>
-            <a:r>
-              <a:rPr b="1" sz="1700"/>
-              <a:t>カムズ バック</a:t>
-            </a:r>
-            <a:r>
-              <a:rPr b="0" sz="1700"/>
-              <a:t>。</a:t>
-            </a:r>
-          </a:p>
-          <a:p>
-            <a:r>
-              <a:rPr b="0" sz="1700"/>
-              <a:t>And here’s a second session. A narrower one.</a:t>
-            </a:r>
-          </a:p>
-          <a:p>
-            <a:r>
-              <a:rPr b="0" sz="1700"/>
-              <a:t>  アンド ヒアズ ア </a:t>
-            </a:r>
-            <a:r>
-              <a:rPr b="1" sz="1700"/>
-              <a:t>セカンド セッション</a:t>
-            </a:r>
-            <a:r>
-              <a:rPr b="0" sz="1700"/>
-              <a:t>。 ア </a:t>
-            </a:r>
-            <a:r>
-              <a:rPr b="1" sz="1700"/>
-              <a:t>ナロウアー</a:t>
-            </a:r>
-            <a:r>
-              <a:rPr b="0" sz="1700"/>
-              <a:t> ワン。</a:t>
-            </a:r>
-          </a:p>
-          <a:p>
-            <a:r>
-              <a:rPr b="0" sz="1700"/>
-              <a:t>Logged in with a different token — a different role.</a:t>
-            </a:r>
-          </a:p>
-          <a:p>
-            <a:r>
-              <a:rPr b="0" sz="1700"/>
-              <a:t>  ログド イン ウィズ ア </a:t>
-            </a:r>
-            <a:r>
-              <a:rPr b="1" sz="1700"/>
-              <a:t>ディファレント トウクン</a:t>
-            </a:r>
-            <a:r>
-              <a:rPr b="0" sz="1700"/>
-              <a:t> — ア </a:t>
-            </a:r>
-            <a:r>
-              <a:rPr b="1" sz="1700"/>
-              <a:t>ディファレント ロウル</a:t>
-            </a:r>
-            <a:r>
-              <a:rPr b="0" sz="1700"/>
-              <a:t>。</a:t>
-            </a:r>
-          </a:p>
-          <a:p>
-            <a:r>
-              <a:rPr b="0" sz="1700"/>
-              <a:t>It can decrypt, and it can destroy.</a:t>
-            </a:r>
-          </a:p>
-          <a:p>
-            <a:r>
-              <a:rPr b="0" sz="1700"/>
-              <a:t>  イット キャン </a:t>
-            </a:r>
-            <a:r>
-              <a:rPr b="1" sz="1700"/>
-              <a:t>ディクリプト</a:t>
-            </a:r>
-            <a:r>
-              <a:rPr b="0" sz="1700"/>
-              <a:t>、 アンド イット キャン </a:t>
-            </a:r>
-            <a:r>
-              <a:rPr b="1" sz="1700"/>
-              <a:t>ディストロイ</a:t>
-            </a:r>
-            <a:r>
-              <a:rPr b="0" sz="1700"/>
-              <a:t>。</a:t>
-            </a:r>
-          </a:p>
-          <a:p>
-            <a:r>
-              <a:rPr b="0" sz="1700"/>
-              <a:t>It can never reach Face setup at all.</a:t>
-            </a:r>
-          </a:p>
-          <a:p>
-            <a:r>
-              <a:rPr b="0" sz="1700"/>
-              <a:t>  イット キャン </a:t>
-            </a:r>
-            <a:r>
-              <a:rPr b="1" sz="1700"/>
-              <a:t>ネヴァー</a:t>
-            </a:r>
-            <a:r>
-              <a:rPr b="0" sz="1700"/>
-              <a:t> リーチ フェイス セットアップ アット オール。</a:t>
-            </a:r>
-          </a:p>
-          <a:p>
-            <a:r>
-              <a:rPr b="0" sz="1700"/>
-              <a:t>It can’t even see that there is more than one entry.”</a:t>
-            </a:r>
-          </a:p>
-          <a:p>
-            <a:r>
-              <a:rPr b="0" sz="1700"/>
-              <a:t>  イット キャント </a:t>
-            </a:r>
-            <a:r>
-              <a:rPr b="1" sz="1700"/>
-              <a:t>イーヴン シー</a:t>
-            </a:r>
-            <a:r>
-              <a:rPr b="0" sz="1700"/>
-              <a:t> ザット ゼア イズ モア ザン ワン エントリー。</a:t>
-            </a:r>
-          </a:p>
-          <a:p>
-            <a:r>
-              <a:rPr b="0" sz="1700"/>
-              <a:t/>
-            </a:r>
-          </a:p>
-          <a:p>
-            <a:r>
-              <a:rPr b="0" sz="1700"/>
-              <a:t>── STEP 3b · 0:35 · The second object, the second password — a different file</a:t>
-            </a:r>
-          </a:p>
-          <a:p>
-            <a:r>
-              <a:rPr b="0" sz="1200"/>
-              <a:t>DO: 同じ Retrieve 画面のまま、物体Bに持ち替える → 2つ目のパスワード → Open protected file。落ちてきたファイルを開いて中身を見せる</a:t>
-            </a:r>
-          </a:p>
-          <a:p>
-            <a:r>
-              <a:rPr b="0" sz="1700"/>
-              <a:t>“Now the same screen. The same container.</a:t>
-            </a:r>
-          </a:p>
-          <a:p>
-            <a:r>
-              <a:rPr b="0" sz="1700"/>
-              <a:t>  ナウ ザ </a:t>
-            </a:r>
-            <a:r>
-              <a:rPr b="1" sz="1700"/>
-              <a:t>セイム スクリーン</a:t>
-            </a:r>
-            <a:r>
-              <a:rPr b="0" sz="1700"/>
-              <a:t>。 ザ セイム コンテナ。</a:t>
-            </a:r>
-          </a:p>
-          <a:p>
-            <a:r>
-              <a:rPr b="0" sz="1700"/>
-              <a:t>But a different object — and a different password.</a:t>
-            </a:r>
-          </a:p>
-          <a:p>
-            <a:r>
-              <a:rPr b="0" sz="1700"/>
-              <a:t>  バット ア </a:t>
-            </a:r>
-            <a:r>
-              <a:rPr b="1" sz="1700"/>
-              <a:t>ディファレント オブジェクト</a:t>
-            </a:r>
-            <a:r>
-              <a:rPr b="0" sz="1700"/>
-              <a:t> — アンド ア </a:t>
-            </a:r>
-            <a:r>
-              <a:rPr b="1" sz="1700"/>
-              <a:t>ディファレント パスワード</a:t>
-            </a:r>
-            <a:r>
-              <a:rPr b="0" sz="1700"/>
-              <a:t>。</a:t>
-            </a:r>
-          </a:p>
-          <a:p>
-            <a:r>
-              <a:rPr b="0" sz="1700"/>
-              <a:t>And a different file comes back.</a:t>
-            </a:r>
-          </a:p>
-          <a:p>
-            <a:r>
-              <a:rPr b="0" sz="1700"/>
-              <a:t>  アンド ア </a:t>
-            </a:r>
-            <a:r>
-              <a:rPr b="1" sz="1700"/>
-              <a:t>ディファレント ファイル</a:t>
-            </a:r>
-            <a:r>
-              <a:rPr b="0" sz="1700"/>
-              <a:t> カムズ バック。</a:t>
-            </a:r>
-          </a:p>
-          <a:p>
-            <a:r>
-              <a:rPr b="0" sz="1700"/>
-              <a:t>One container. Two objects. Two passwords. Two files.</a:t>
-            </a:r>
-          </a:p>
-          <a:p>
-            <a:r>
-              <a:rPr b="0" sz="1700"/>
-              <a:t>  </a:t>
-            </a:r>
-            <a:r>
-              <a:rPr b="1" sz="1700"/>
-              <a:t>ワン コンテナ</a:t>
-            </a:r>
-            <a:r>
-              <a:rPr b="0" sz="1700"/>
-              <a:t>。 トゥー オブジェクツ。 トゥー パスワーズ。 </a:t>
-            </a:r>
-            <a:r>
-              <a:rPr b="1" sz="1700"/>
-              <a:t>トゥー ファイルズ</a:t>
-            </a:r>
-            <a:r>
-              <a:rPr b="0" sz="1700"/>
-              <a:t>。</a:t>
-            </a:r>
-          </a:p>
-          <a:p>
-            <a:r>
-              <a:rPr b="0" sz="1700"/>
-              <a:t>That is Slot A and Slot B — on the table, in front of you.”</a:t>
-            </a:r>
-          </a:p>
-          <a:p>
-            <a:r>
-              <a:rPr b="0" sz="1700"/>
-              <a:t>  ザット イズ </a:t>
-            </a:r>
-            <a:r>
-              <a:rPr b="1" sz="1700"/>
-              <a:t>スロット エイ アンド スロット ビー</a:t>
-            </a:r>
-            <a:r>
-              <a:rPr b="0" sz="1700"/>
-              <a:t> — オン ザ テイブル、 イン フロント オヴ ユー。</a:t>
-            </a:r>
-          </a:p>
-          <a:p>
-            <a:r>
-              <a:rPr b="0" sz="1700"/>
-              <a:t>SPEAK（間を置いて）</a:t>
-            </a:r>
-          </a:p>
-          <a:p>
-            <a:r>
-              <a:rPr b="0" sz="1700"/>
-              <a:t>“Same container. Different object — a different file.”</a:t>
-            </a:r>
-          </a:p>
-          <a:p>
-            <a:r>
-              <a:rPr b="0" sz="1700"/>
-              <a:t>  </a:t>
-            </a:r>
-            <a:r>
-              <a:rPr b="1" sz="1700"/>
-              <a:t>セイム コンテナ</a:t>
-            </a:r>
-            <a:r>
-              <a:rPr b="0" sz="1700"/>
-              <a:t>。 ディファレント オブジェクト — ア </a:t>
-            </a:r>
-            <a:r>
-              <a:rPr b="1" sz="1700"/>
-              <a:t>ディファレント ファイル</a:t>
-            </a:r>
-            <a:r>
-              <a:rPr b="0" sz="1700"/>
-              <a:t>。</a:t>
-            </a:r>
-          </a:p>
-          <a:p>
-            <a:r>
-              <a:rPr b="0" sz="1700"/>
-              <a:t/>
-            </a:r>
-          </a:p>
-          <a:p>
-            <a:r>
-              <a:rPr b="0" sz="1700"/>
-              <a:t>── STEP 4 · 0:50 · Same tab, same password — the object is gone, and it refuses</a:t>
-            </a:r>
-          </a:p>
-          <a:p>
-            <a:r>
-              <a:rPr b="0" sz="1200"/>
-              <a:t>DO: Step 3 と同じ Retrieve 画面のまま。 物体をカメラの視野から完全に外す（手で覆うのではなく卓の下に下ろす）→ オーバーレイが No object cue match に変わるのを待つ → Step 3 と同じパスワード → Open protected file。直後に物体を戻して同じパスワードで再実行し、成功させる（0:15）</a:t>
-            </a:r>
-          </a:p>
-          <a:p>
-            <a:r>
-              <a:rPr b="0" sz="1700"/>
-              <a:t>“Same tab. Same file. Same password. Same everything.</a:t>
-            </a:r>
-          </a:p>
-          <a:p>
-            <a:r>
-              <a:rPr b="0" sz="1700"/>
-              <a:t>  </a:t>
-            </a:r>
-            <a:r>
-              <a:rPr b="1" sz="1700"/>
-              <a:t>セイム</a:t>
-            </a:r>
-            <a:r>
-              <a:rPr b="0" sz="1700"/>
-              <a:t> タブ。 </a:t>
-            </a:r>
-            <a:r>
-              <a:rPr b="1" sz="1700"/>
-              <a:t>セイム</a:t>
-            </a:r>
-            <a:r>
-              <a:rPr b="0" sz="1700"/>
-              <a:t> ファイル。 </a:t>
-            </a:r>
-            <a:r>
-              <a:rPr b="1" sz="1700"/>
-              <a:t>セイム</a:t>
-            </a:r>
-            <a:r>
-              <a:rPr b="0" sz="1700"/>
-              <a:t> パスワード。 </a:t>
-            </a:r>
-            <a:r>
-              <a:rPr b="1" sz="1700"/>
-              <a:t>セイム エヴリシング</a:t>
-            </a:r>
-            <a:r>
-              <a:rPr b="0" sz="1700"/>
-              <a:t>。</a:t>
-            </a:r>
-          </a:p>
-          <a:p>
-            <a:r>
-              <a:rPr b="0" sz="1700"/>
-              <a:t>I have only taken the object away.</a:t>
-            </a:r>
-          </a:p>
-          <a:p>
-            <a:r>
-              <a:rPr b="0" sz="1700"/>
-              <a:t>  アイ ハヴ </a:t>
-            </a:r>
-            <a:r>
-              <a:rPr b="1" sz="1700"/>
-              <a:t>オウンリー</a:t>
-            </a:r>
-            <a:r>
-              <a:rPr b="0" sz="1700"/>
-              <a:t> テイクン ジ オブジェクト アウェイ。</a:t>
-            </a:r>
-          </a:p>
-          <a:p>
-            <a:r>
-              <a:rPr b="0" sz="1700"/>
-              <a:t>And look at what it says. ‘No valid entry found.’</a:t>
-            </a:r>
-          </a:p>
-          <a:p>
-            <a:r>
-              <a:rPr b="0" sz="1700"/>
-              <a:t>  アンド ルック アット ワット イット セズ。 </a:t>
-            </a:r>
-            <a:r>
-              <a:rPr b="1" sz="1700"/>
-              <a:t>ノウ ヴァリッド エントリー ファウンド</a:t>
-            </a:r>
-            <a:r>
-              <a:rPr b="0" sz="1700"/>
-              <a:t>。</a:t>
-            </a:r>
-          </a:p>
-          <a:p>
-            <a:r>
-              <a:rPr b="0" sz="1700"/>
-              <a:t>Not ‘wrong object’. Not ‘object missing’.</a:t>
-            </a:r>
-          </a:p>
-          <a:p>
-            <a:r>
-              <a:rPr b="0" sz="1700"/>
-              <a:t>  ナット </a:t>
-            </a:r>
-            <a:r>
-              <a:rPr b="1" sz="1700"/>
-              <a:t>ゥロング オブジェクト</a:t>
-            </a:r>
-            <a:r>
-              <a:rPr b="0" sz="1700"/>
-              <a:t>。 ナット </a:t>
-            </a:r>
-            <a:r>
-              <a:rPr b="1" sz="1700"/>
-              <a:t>オブジェクト ミッシング</a:t>
-            </a:r>
-            <a:r>
-              <a:rPr b="0" sz="1700"/>
-              <a:t>。</a:t>
-            </a:r>
-          </a:p>
-          <a:p>
-            <a:r>
-              <a:rPr b="0" sz="1700"/>
-              <a:t>It won’t even tell you what it’s waiting for.</a:t>
-            </a:r>
-          </a:p>
-          <a:p>
-            <a:r>
-              <a:rPr b="0" sz="1700"/>
-              <a:t>  イット ウォウント イーヴン テル ユー ワット イッツ </a:t>
-            </a:r>
-            <a:r>
-              <a:rPr b="1" sz="1700"/>
-              <a:t>ウェイティング</a:t>
-            </a:r>
-            <a:r>
-              <a:rPr b="0" sz="1700"/>
-              <a:t> フォー。</a:t>
-            </a:r>
-          </a:p>
-          <a:p>
-            <a:r>
-              <a:rPr b="0" sz="1700"/>
-              <a:t>That is deliberate.</a:t>
-            </a:r>
-          </a:p>
-          <a:p>
-            <a:r>
-              <a:rPr b="0" sz="1700"/>
-              <a:t>  ザット イズ </a:t>
-            </a:r>
-            <a:r>
-              <a:rPr b="1" sz="1700"/>
-              <a:t>ディリバレット</a:t>
-            </a:r>
-            <a:r>
-              <a:rPr b="0" sz="1700"/>
-              <a:t>。</a:t>
-            </a:r>
-          </a:p>
-          <a:p>
-            <a:r>
-              <a:rPr b="0" sz="1700"/>
-              <a:t>That is what ‘the cue gates the operation’ means.”</a:t>
-            </a:r>
-          </a:p>
-          <a:p>
-            <a:r>
-              <a:rPr b="0" sz="1700"/>
-              <a:t>  </a:t>
-            </a:r>
-            <a:r>
-              <a:rPr b="1" sz="1700"/>
-              <a:t>ザット</a:t>
-            </a:r>
-            <a:r>
-              <a:rPr b="0" sz="1700"/>
-              <a:t> イズ ワット 「ザ キュー ゲイツ ジ オペレイション」 ミーンズ。</a:t>
-            </a:r>
-          </a:p>
-          <a:p>
-            <a:r>
-              <a:rPr b="0" sz="1700"/>
-              <a:t>SPEAK（間を置いて）</a:t>
-            </a:r>
-          </a:p>
-          <a:p>
-            <a:r>
-              <a:rPr b="0" sz="1700"/>
-              <a:t>“Only the object is gone. And it refuses.”</a:t>
-            </a:r>
-          </a:p>
-          <a:p>
-            <a:r>
-              <a:rPr b="0" sz="1700"/>
-              <a:t>  </a:t>
-            </a:r>
-            <a:r>
-              <a:rPr b="1" sz="1700"/>
-              <a:t>オウンリー ジ オブジェクト</a:t>
-            </a:r>
-            <a:r>
-              <a:rPr b="0" sz="1700"/>
-              <a:t> イズ ゴーン。 アンド イット </a:t>
-            </a:r>
-            <a:r>
-              <a:rPr b="1" sz="1700"/>
-              <a:t>リフューズィズ</a:t>
-            </a:r>
-            <a:r>
-              <a:rPr b="0" sz="1700"/>
-              <a:t>。</a:t>
-            </a:r>
-          </a:p>
-          <a:p>
-            <a:r>
-              <a:rPr b="0" sz="1700"/>
-              <a:t/>
-            </a:r>
-          </a:p>
-          <a:p>
-            <a:r>
-              <a:rPr b="0" sz="1700"/>
-              <a:t>── STEP 4b · 0:40 · 同じ欄に、違うパスワード — エントリが消える</a:t>
-            </a:r>
-          </a:p>
-          <a:p>
-            <a:r>
-              <a:rPr b="0" sz="1200"/>
-              <a:t>DO: Step 3・4 とまったく同じ Retrieve 画面。 消したい Face の物体をかざす → パスワード欄に、そのアクセスパスワードではなく Clearing password（Store の Advanced security options で設定した2つめ）を入力 → Open protected file</a:t>
-            </a:r>
-          </a:p>
-          <a:p>
-            <a:r>
-              <a:rPr b="0" sz="1700"/>
-              <a:t>“Now watch this screen — because nothing on it is going to change.</a:t>
-            </a:r>
-          </a:p>
-          <a:p>
-            <a:r>
-              <a:rPr b="0" sz="1700"/>
-              <a:t>  ナウ </a:t>
-            </a:r>
-            <a:r>
-              <a:rPr b="1" sz="1700"/>
-              <a:t>ウォッチ ディス スクリーン</a:t>
-            </a:r>
-            <a:r>
-              <a:rPr b="0" sz="1700"/>
-              <a:t> — ビコズ </a:t>
-            </a:r>
-            <a:r>
-              <a:rPr b="1" sz="1700"/>
-              <a:t>ナッシング</a:t>
-            </a:r>
-            <a:r>
-              <a:rPr b="0" sz="1700"/>
-              <a:t> オン イット イズ ゴウイング トゥ チェインジ。</a:t>
-            </a:r>
-          </a:p>
-          <a:p>
-            <a:r>
-              <a:rPr b="0" sz="1700"/>
-              <a:t>Same tab. Same object. Same field. Same button.</a:t>
-            </a:r>
-          </a:p>
-          <a:p>
-            <a:r>
-              <a:rPr b="0" sz="1700"/>
-              <a:t>  セイム タブ。 セイム オブジェクト。 セイム フィールド。 セイム バトゥン。</a:t>
-            </a:r>
-          </a:p>
-          <a:p>
-            <a:r>
-              <a:rPr b="0" sz="1700"/>
-              <a:t>The only thing I do differently… is type a different password.</a:t>
-            </a:r>
-          </a:p>
-          <a:p>
-            <a:r>
-              <a:rPr b="0" sz="1700"/>
-              <a:t>  ジ オウンリー シング アイ ドゥー ディファレントリー… イズ タイプ ア </a:t>
-            </a:r>
-            <a:r>
-              <a:rPr b="1" sz="1700"/>
-              <a:t>ディファレント パスワード</a:t>
-            </a:r>
-            <a:r>
-              <a:rPr b="0" sz="1700"/>
-              <a:t>。</a:t>
-            </a:r>
-          </a:p>
-          <a:p>
-            <a:r>
-              <a:rPr b="0" sz="1700"/>
-              <a:t>And it says what it says when you mistype. No valid entry found.</a:t>
-            </a:r>
-          </a:p>
-          <a:p>
-            <a:r>
-              <a:rPr b="0" sz="1700"/>
-              <a:t>  アンド イット セズ ワット イット セズ ウェン ユー </a:t>
-            </a:r>
-            <a:r>
-              <a:rPr b="1" sz="1700"/>
-              <a:t>ミスタイプ</a:t>
-            </a:r>
-            <a:r>
-              <a:rPr b="0" sz="1700"/>
-              <a:t>。 ノウ ヴァリッド エントリー ファウンド。</a:t>
-            </a:r>
-          </a:p>
-          <a:p>
-            <a:r>
-              <a:rPr b="0" sz="1700"/>
-              <a:t>Except that entry is not locked.</a:t>
-            </a:r>
-          </a:p>
-          <a:p>
-            <a:r>
-              <a:rPr b="0" sz="1700"/>
-              <a:t>  イクセプト ザット エントリー イズ </a:t>
-            </a:r>
-            <a:r>
-              <a:rPr b="1" sz="1700"/>
-              <a:t>ナット ロックト</a:t>
-            </a:r>
-            <a:r>
-              <a:rPr b="0" sz="1700"/>
-              <a:t>。</a:t>
-            </a:r>
-          </a:p>
-          <a:p>
-            <a:r>
-              <a:rPr b="0" sz="1700"/>
-              <a:t>It is gone.</a:t>
-            </a:r>
-          </a:p>
-          <a:p>
-            <a:r>
-              <a:rPr b="0" sz="1700"/>
-              <a:t>  イット イズ </a:t>
-            </a:r>
-            <a:r>
-              <a:rPr b="1" sz="1700"/>
-              <a:t>ゴーン</a:t>
-            </a:r>
-            <a:r>
-              <a:rPr b="0" sz="1700"/>
-              <a:t>。</a:t>
-            </a:r>
-          </a:p>
-          <a:p>
-            <a:r>
-              <a:rPr b="0" sz="1700"/>
-              <a:t>The other one is untouched. And I can still open it.</a:t>
-            </a:r>
-          </a:p>
-          <a:p>
-            <a:r>
-              <a:rPr b="0" sz="1700"/>
-              <a:t>  ジ アザー ワン イズ </a:t>
-            </a:r>
-            <a:r>
-              <a:rPr b="1" sz="1700"/>
-              <a:t>アンタッチト</a:t>
-            </a:r>
-            <a:r>
-              <a:rPr b="0" sz="1700"/>
-              <a:t>。 アンド アイ キャン </a:t>
-            </a:r>
-            <a:r>
-              <a:rPr b="1" sz="1700"/>
-              <a:t>スティル オウプン</a:t>
-            </a:r>
-            <a:r>
-              <a:rPr b="0" sz="1700"/>
-              <a:t> イット。</a:t>
-            </a:r>
-          </a:p>
-          <a:p>
-            <a:r>
-              <a:rPr b="0" sz="1700"/>
-              <a:t>That’s my answer to ‘they’ll just make you type the password.’</a:t>
-            </a:r>
-          </a:p>
-          <a:p>
-            <a:r>
-              <a:rPr b="0" sz="1700"/>
-              <a:t>  ザッツ マイ </a:t>
-            </a:r>
-            <a:r>
-              <a:rPr b="1" sz="1700"/>
-              <a:t>アンサー</a:t>
-            </a:r>
-            <a:r>
-              <a:rPr b="0" sz="1700"/>
-              <a:t> トゥ 「ゼイル ジャスト メイク ユー タイプ ザ パスワード」。</a:t>
-            </a:r>
-          </a:p>
-          <a:p>
-            <a:r>
-              <a:rPr b="0" sz="1700"/>
-              <a:t>The password they can compel is not the only one there is.”</a:t>
-            </a:r>
-          </a:p>
-          <a:p>
-            <a:r>
-              <a:rPr b="0" sz="1700"/>
-              <a:t>  ザ パスワード ゼイ キャン </a:t>
-            </a:r>
-            <a:r>
-              <a:rPr b="1" sz="1700"/>
-              <a:t>コンペル</a:t>
-            </a:r>
-            <a:r>
-              <a:rPr b="0" sz="1700"/>
-              <a:t> イズ ナット ジ </a:t>
-            </a:r>
-            <a:r>
-              <a:rPr b="1" sz="1700"/>
-              <a:t>オウンリー ワン</a:t>
-            </a:r>
-            <a:r>
-              <a:rPr b="0" sz="1700"/>
-              <a:t> ゼア イズ。</a:t>
-            </a:r>
-          </a:p>
-          <a:p>
-            <a:r>
-              <a:rPr b="0" sz="1700"/>
-              <a:t>SPEAK（間を置いて）</a:t>
-            </a:r>
-          </a:p>
-          <a:p>
-            <a:r>
-              <a:rPr b="0" sz="1700"/>
-              <a:t>“Nothing on the screen changed. The entry is gone.”</a:t>
-            </a:r>
-          </a:p>
-          <a:p>
-            <a:r>
-              <a:rPr b="0" sz="1700"/>
-              <a:t>  </a:t>
-            </a:r>
-            <a:r>
-              <a:rPr b="1" sz="1700"/>
-              <a:t>ナッシング</a:t>
-            </a:r>
-            <a:r>
-              <a:rPr b="0" sz="1700"/>
-              <a:t> オン ザ スクリーン チェインジド。 ジ エントリー イズ </a:t>
-            </a:r>
-            <a:r>
-              <a:rPr b="1" sz="1700"/>
-              <a:t>ゴーン</a:t>
-            </a:r>
-            <a:r>
-              <a:rPr b="0" sz="1700"/>
-              <a:t>。</a:t>
-            </a:r>
-          </a:p>
-          <a:p>
-            <a:r>
-              <a:rPr b="0" sz="1700"/>
-              <a:t/>
-            </a:r>
-          </a:p>
-          <a:p>
-            <a:r>
-              <a:rPr b="0" sz="1700"/>
-              <a:t>── STEP 5 · 0:50 · Audit — free space, and what it won’t judge</a:t>
-            </a:r>
-          </a:p>
-          <a:p>
-            <a:r>
-              <a:rPr b="0" sz="1200"/>
-              <a:t>DO: ここでプロジェクタを TUI に戻す（切替②・往復の折り返し。以降は切替なし）。 e Expert → a Audit。Free Space Filler セクションを指す（戻るのは Esc）。a は #169 の非活性化対象から意図的に外してある — この Step でキー1つで直接使うため</a:t>
-            </a:r>
-          </a:p>
-          <a:p>
-            <a:r>
-              <a:rPr b="0" sz="1700"/>
-              <a:t>“Audit reports per face.</a:t>
-            </a:r>
-          </a:p>
-          <a:p>
-            <a:r>
-              <a:rPr b="0" sz="1700"/>
-              <a:t>  </a:t>
-            </a:r>
-            <a:r>
-              <a:rPr b="1" sz="1700"/>
-              <a:t>オーディット</a:t>
-            </a:r>
-            <a:r>
-              <a:rPr b="0" sz="1700"/>
-              <a:t> リポーツ パー </a:t>
-            </a:r>
-            <a:r>
-              <a:rPr b="1" sz="1700"/>
-              <a:t>フェイス</a:t>
-            </a:r>
-            <a:r>
-              <a:rPr b="0" sz="1700"/>
-              <a:t>。</a:t>
-            </a:r>
-          </a:p>
-          <a:p>
-            <a:r>
-              <a:rPr b="0" sz="1700"/>
-              <a:t>Now notice what it does not claim.</a:t>
-            </a:r>
-          </a:p>
-          <a:p>
-            <a:r>
-              <a:rPr b="0" sz="1700"/>
-              <a:t>  ナウ ノウティス ワット イット ダズ </a:t>
-            </a:r>
-            <a:r>
-              <a:rPr b="1" sz="1700"/>
-              <a:t>ナット</a:t>
-            </a:r>
-            <a:r>
-              <a:rPr b="0" sz="1700"/>
-              <a:t> クレイム。</a:t>
-            </a:r>
-          </a:p>
-          <a:p>
-            <a:r>
-              <a:rPr b="0" sz="1700"/>
-              <a:t>It doesn’t tell me my cover story is convincing.</a:t>
-            </a:r>
-          </a:p>
-          <a:p>
-            <a:r>
-              <a:rPr b="0" sz="1700"/>
-              <a:t>  イット ダズント テル ミー マイ カヴァー ストーリー イズ </a:t>
-            </a:r>
-            <a:r>
-              <a:rPr b="1" sz="1700"/>
-              <a:t>コンヴィンシング</a:t>
-            </a:r>
-            <a:r>
-              <a:rPr b="0" sz="1700"/>
-              <a:t>。</a:t>
-            </a:r>
-          </a:p>
-          <a:p>
-            <a:r>
-              <a:rPr b="0" sz="1700"/>
-              <a:t>The file I would hand over is one I wrote, and stored, myself.</a:t>
-            </a:r>
-          </a:p>
-          <a:p>
-            <a:r>
-              <a:rPr b="0" sz="1700"/>
-              <a:t>  ザ ファイル アイ ウド ハンド オウヴァー イズ ワン アイ </a:t>
-            </a:r>
-            <a:r>
-              <a:rPr b="1" sz="1700"/>
-              <a:t>ロウト</a:t>
-            </a:r>
-            <a:r>
-              <a:rPr b="0" sz="1700"/>
-              <a:t>、 アンド </a:t>
-            </a:r>
-            <a:r>
-              <a:rPr b="1" sz="1700"/>
-              <a:t>ストード</a:t>
-            </a:r>
-            <a:r>
-              <a:rPr b="0" sz="1700"/>
-              <a:t>、 マイセルフ。</a:t>
-            </a:r>
-          </a:p>
-          <a:p>
-            <a:r>
-              <a:rPr b="0" sz="1700"/>
-              <a:t>The tool can’t judge whether it’s believable. And it doesn’t pretend to.</a:t>
-            </a:r>
-          </a:p>
-          <a:p>
-            <a:r>
-              <a:rPr b="0" sz="1700"/>
-              <a:t>  ザ ツール キャント </a:t>
-            </a:r>
-            <a:r>
-              <a:rPr b="1" sz="1700"/>
-              <a:t>ジャッジ</a:t>
-            </a:r>
-            <a:r>
-              <a:rPr b="0" sz="1700"/>
-              <a:t> ウェザー イッツ ビリーヴァブル。 アンド イット ダズント </a:t>
-            </a:r>
-            <a:r>
-              <a:rPr b="1" sz="1700"/>
-              <a:t>プリテンド</a:t>
-            </a:r>
-            <a:r>
-              <a:rPr b="0" sz="1700"/>
-              <a:t> トゥ。</a:t>
-            </a:r>
-          </a:p>
-          <a:p>
-            <a:r>
-              <a:rPr b="0" sz="1700"/>
-              <a:t>All it reports here is how much free space is filled —</a:t>
-            </a:r>
-          </a:p>
-          <a:p>
-            <a:r>
-              <a:rPr b="0" sz="1700"/>
-              <a:t>  オール イット リポーツ ヒア イズ ハウ マッチ </a:t>
-            </a:r>
-            <a:r>
-              <a:rPr b="1" sz="1700"/>
-              <a:t>フリー スペイス</a:t>
-            </a:r>
-            <a:r>
-              <a:rPr b="0" sz="1700"/>
-              <a:t> イズ フィルド —</a:t>
-            </a:r>
-          </a:p>
-          <a:p>
-            <a:r>
-              <a:rPr b="0" sz="1700"/>
-              <a:t>so an otherwise empty container doesn’t read as empty.</a:t>
-            </a:r>
-          </a:p>
-          <a:p>
-            <a:r>
-              <a:rPr b="0" sz="1700"/>
-              <a:t>  ソウ アン アザワイズ エンプティ コンテナ ダズント リード アズ </a:t>
-            </a:r>
-            <a:r>
-              <a:rPr b="1" sz="1700"/>
-              <a:t>エンプティ</a:t>
-            </a:r>
-            <a:r>
-              <a:rPr b="0" sz="1700"/>
-              <a:t>。</a:t>
-            </a:r>
-          </a:p>
-          <a:p>
-            <a:r>
-              <a:rPr b="0" sz="1700"/>
-              <a:t>Judging the cover story is the operator’s job.</a:t>
-            </a:r>
-          </a:p>
-          <a:p>
-            <a:r>
-              <a:rPr b="0" sz="1700"/>
-              <a:t>  ジャッジング ザ カヴァー ストーリー イズ ジ </a:t>
-            </a:r>
-            <a:r>
-              <a:rPr b="1" sz="1700"/>
-              <a:t>オペレイターズ ジョブ</a:t>
-            </a:r>
-            <a:r>
-              <a:rPr b="0" sz="1700"/>
-              <a:t>。</a:t>
-            </a:r>
-          </a:p>
-          <a:p>
-            <a:r>
-              <a:rPr b="0" sz="1700"/>
-              <a:t>And the tool is honest about that boundary.”</a:t>
-            </a:r>
-          </a:p>
-          <a:p>
-            <a:r>
-              <a:rPr b="0" sz="1700"/>
-              <a:t>  アンド ザ ツール イズ </a:t>
-            </a:r>
-            <a:r>
-              <a:rPr b="1" sz="1700"/>
-              <a:t>オネスト</a:t>
-            </a:r>
-            <a:r>
-              <a:rPr b="0" sz="1700"/>
-              <a:t> アバウト ザット バウンダリー。</a:t>
-            </a:r>
-          </a:p>
-          <a:p>
-            <a:r>
-              <a:rPr b="0" sz="1700"/>
-              <a:t>SPEAK（間を置いて）</a:t>
-            </a:r>
-          </a:p>
-          <a:p>
-            <a:r>
-              <a:rPr b="0" sz="1700"/>
-              <a:t>“It reports what it can measure. It refuses to score what it can’t.”</a:t>
-            </a:r>
-          </a:p>
-          <a:p>
-            <a:r>
-              <a:rPr b="0" sz="1700"/>
-              <a:t>  イット リポーツ ワット イット キャン </a:t>
-            </a:r>
-            <a:r>
-              <a:rPr b="1" sz="1700"/>
-              <a:t>メジャー</a:t>
-            </a:r>
-            <a:r>
-              <a:rPr b="0" sz="1700"/>
-              <a:t>。 イット リフューズィズ トゥ </a:t>
-            </a:r>
-            <a:r>
-              <a:rPr b="1" sz="1700"/>
-              <a:t>スコア</a:t>
-            </a:r>
-            <a:r>
-              <a:rPr b="0" sz="1700"/>
-              <a:t> ワット イット キャント。</a:t>
-            </a:r>
-          </a:p>
-          <a:p>
-            <a:r>
-              <a:rPr b="0" sz="1700"/>
-              <a:t/>
-            </a:r>
-          </a:p>
-          <a:p>
-            <a:r>
-              <a:rPr b="0" sz="1700"/>
-              <a:t>── STEP 6 · 1:20 · Silent Standby — Disclose</a:t>
-            </a:r>
-          </a:p>
-          <a:p>
-            <a:r>
-              <a:rPr b="0" sz="1200"/>
-              <a:t>DO: Ctrl+S を押下。復帰は Ctrl+R または Esc。フッタに出ないので指で覚えておく</a:t>
-            </a:r>
-          </a:p>
-          <a:p>
-            <a:r>
-              <a:rPr b="0" sz="1700"/>
-              <a:t>“Now — the moment it’s built for.</a:t>
-            </a:r>
-          </a:p>
-          <a:p>
-            <a:r>
-              <a:rPr b="0" sz="1700"/>
-              <a:t>  ナウ — ザ </a:t>
-            </a:r>
-            <a:r>
-              <a:rPr b="1" sz="1700"/>
-              <a:t>モウメント</a:t>
-            </a:r>
-            <a:r>
-              <a:rPr b="0" sz="1700"/>
-              <a:t> イッツ ビルト フォー。</a:t>
-            </a:r>
-          </a:p>
-          <a:p>
-            <a:r>
-              <a:rPr b="0" sz="1700"/>
-              <a:t>One hotkey. Silent Standby.</a:t>
-            </a:r>
-          </a:p>
-          <a:p>
-            <a:r>
-              <a:rPr b="0" sz="1700"/>
-              <a:t>  </a:t>
-            </a:r>
-            <a:r>
-              <a:rPr b="1" sz="1700"/>
-              <a:t>ワン ホットキー</a:t>
-            </a:r>
-            <a:r>
-              <a:rPr b="0" sz="1700"/>
-              <a:t>。 </a:t>
-            </a:r>
-            <a:r>
-              <a:rPr b="1" sz="1700"/>
-              <a:t>サイレント スタンドバイ</a:t>
-            </a:r>
-            <a:r>
-              <a:rPr b="0" sz="1700"/>
-              <a:t>。</a:t>
-            </a:r>
-          </a:p>
-          <a:p>
-            <a:r>
-              <a:rPr b="0" sz="1700"/>
-              <a:t>The sensitive surface drops away.</a:t>
-            </a:r>
-          </a:p>
-          <a:p>
-            <a:r>
-              <a:rPr b="0" sz="1700"/>
-              <a:t>  ザ センシティヴ サーフィス </a:t>
-            </a:r>
-            <a:r>
-              <a:rPr b="1" sz="1700"/>
-              <a:t>ドロップス アウェイ</a:t>
-            </a:r>
-            <a:r>
-              <a:rPr b="0" sz="1700"/>
-              <a:t>。</a:t>
-            </a:r>
-          </a:p>
-          <a:p>
-            <a:r>
-              <a:rPr b="0" sz="1700"/>
-              <a:t>And it’s not only this screen. The web interface goes down with it.</a:t>
-            </a:r>
-          </a:p>
-          <a:p>
-            <a:r>
-              <a:rPr b="0" sz="1700"/>
-              <a:t>  アンド イッツ </a:t>
-            </a:r>
-            <a:r>
-              <a:rPr b="1" sz="1700"/>
-              <a:t>ナット オウンリー</a:t>
-            </a:r>
-            <a:r>
-              <a:rPr b="0" sz="1700"/>
-              <a:t> ディス スクリーン。 ザ ウェブ インターフェイス </a:t>
-            </a:r>
-            <a:r>
-              <a:rPr b="1" sz="1700"/>
-              <a:t>ゴウズ ダウン</a:t>
-            </a:r>
-            <a:r>
-              <a:rPr b="0" sz="1700"/>
-              <a:t> ウィズ イット。</a:t>
-            </a:r>
-          </a:p>
-          <a:p>
-            <a:r>
-              <a:rPr b="0" sz="1700"/>
-              <a:t>A laptop tethered to this device loses access at the same instant —</a:t>
-            </a:r>
-          </a:p>
-          <a:p>
-            <a:r>
-              <a:rPr b="0" sz="1700"/>
-              <a:t>  ア ラップトップ テザード トゥ ディス デバイス </a:t>
-            </a:r>
-            <a:r>
-              <a:rPr b="1" sz="1700"/>
-              <a:t>ルーズィズ アクセス</a:t>
-            </a:r>
-            <a:r>
-              <a:rPr b="0" sz="1700"/>
-              <a:t> アット ザ セイム インスタント —</a:t>
-            </a:r>
-          </a:p>
-          <a:p>
-            <a:r>
-              <a:rPr b="0" sz="1700"/>
-              <a:t>including the two browser tabs I just used.</a:t>
-            </a:r>
-          </a:p>
-          <a:p>
-            <a:r>
-              <a:rPr b="0" sz="1700"/>
-              <a:t>  インクルーディング ザ </a:t>
-            </a:r>
-            <a:r>
-              <a:rPr b="1" sz="1700"/>
-              <a:t>トゥー ブラウザ タブズ</a:t>
-            </a:r>
-            <a:r>
-              <a:rPr b="0" sz="1700"/>
-              <a:t> アイ ジャスト ユーズド。</a:t>
-            </a:r>
-          </a:p>
-          <a:p>
-            <a:r>
-              <a:rPr b="0" sz="1700"/>
-              <a:t>Coming back needs re-authentication.</a:t>
-            </a:r>
-          </a:p>
-          <a:p>
-            <a:r>
-              <a:rPr b="0" sz="1700"/>
-              <a:t>  カミング バック ニーズ </a:t>
-            </a:r>
-            <a:r>
-              <a:rPr b="1" sz="1700"/>
-              <a:t>リーオーセンティケイション</a:t>
-            </a:r>
-            <a:r>
-              <a:rPr b="0" sz="1700"/>
-              <a:t>。</a:t>
-            </a:r>
-          </a:p>
-          <a:p>
-            <a:r>
-              <a:rPr b="0" sz="1700"/>
-              <a:t>I’m not hiding from forensics.</a:t>
-            </a:r>
-          </a:p>
-          <a:p>
-            <a:r>
-              <a:rPr b="0" sz="1700"/>
-              <a:t>  アイム </a:t>
-            </a:r>
-            <a:r>
-              <a:rPr b="1" sz="1700"/>
-              <a:t>ナット ハイディング</a:t>
-            </a:r>
-            <a:r>
-              <a:rPr b="0" sz="1700"/>
-              <a:t> フロム フォレンシックス。</a:t>
-            </a:r>
-          </a:p>
-          <a:p>
-            <a:r>
-              <a:rPr b="0" sz="1700"/>
-              <a:t>I’m buying time, and uncertainty.”</a:t>
-            </a:r>
-          </a:p>
-          <a:p>
-            <a:r>
-              <a:rPr b="0" sz="1700"/>
-              <a:t>  アイム </a:t>
-            </a:r>
-            <a:r>
-              <a:rPr b="1" sz="1700"/>
-              <a:t>バイイング タイム</a:t>
-            </a:r>
-            <a:r>
-              <a:rPr b="0" sz="1700"/>
-              <a:t>、 アンド </a:t>
-            </a:r>
-            <a:r>
-              <a:rPr b="1" sz="1700"/>
-              <a:t>アンサートゥンティ</a:t>
-            </a:r>
-            <a:r>
-              <a:rPr b="0" sz="1700"/>
-              <a:t>。</a:t>
-            </a:r>
-          </a:p>
-          <a:p>
-            <a:r>
-              <a:rPr b="0" sz="1700"/>
-              <a:t>SPEAK（間を置いて）</a:t>
-            </a:r>
-          </a:p>
-          <a:p>
-            <a:r>
-              <a:rPr b="0" sz="1700"/>
-              <a:t>“One key. And the second surface goes with it.”</a:t>
-            </a:r>
-          </a:p>
-          <a:p>
-            <a:r>
-              <a:rPr b="0" sz="1700"/>
-              <a:t>  </a:t>
-            </a:r>
-            <a:r>
-              <a:rPr b="1" sz="1700"/>
-              <a:t>ワン キー</a:t>
-            </a:r>
-            <a:r>
-              <a:rPr b="0" sz="1700"/>
-              <a:t>。 アンド ザ セカンド サーフィス </a:t>
-            </a:r>
-            <a:r>
-              <a:rPr b="1" sz="1700"/>
-              <a:t>ゴウズ ウィズ イット</a:t>
-            </a:r>
-            <a:r>
-              <a:rPr b="0" sz="1700"/>
-              <a:t>。</a:t>
-            </a:r>
-          </a:p>
-          <a:p>
-            <a:r>
-              <a:rPr b="0" sz="1700"/>
-              <a:t/>
-            </a:r>
-          </a:p>
-          <a:p>
-            <a:r>
-              <a:rPr b="0" sz="1700"/>
-              <a:t>── STEP 7 · 0:10 · Wrap</a:t>
-            </a:r>
-          </a:p>
-          <a:p>
-            <a:r>
-              <a:rPr b="0" sz="1200"/>
-              <a:t>DO: Esc で Simple Operator へ戻す → プロジェクタ入力をスライドへ復帰（Slide 25）</a:t>
-            </a:r>
-          </a:p>
-          <a:p>
-            <a:r>
-              <a:rPr b="0" sz="1700"/>
-              <a:t>“That’s Prepare, Bind, Operate, Disclose. On real hardware.</a:t>
-            </a:r>
-          </a:p>
-          <a:p>
-            <a:r>
-              <a:rPr b="0" sz="1700"/>
-              <a:t>  ザッツ </a:t>
-            </a:r>
-            <a:r>
-              <a:rPr b="1" sz="1700"/>
-              <a:t>プリペア</a:t>
-            </a:r>
-            <a:r>
-              <a:rPr b="0" sz="1700"/>
-              <a:t>、 </a:t>
-            </a:r>
-            <a:r>
-              <a:rPr b="1" sz="1700"/>
-              <a:t>バインド</a:t>
-            </a:r>
-            <a:r>
-              <a:rPr b="0" sz="1700"/>
-              <a:t>、 </a:t>
-            </a:r>
-            <a:r>
-              <a:rPr b="1" sz="1700"/>
-              <a:t>オペレイト</a:t>
-            </a:r>
-            <a:r>
-              <a:rPr b="0" sz="1700"/>
-              <a:t>、 </a:t>
-            </a:r>
-            <a:r>
-              <a:rPr b="1" sz="1700"/>
-              <a:t>ディスクロウズ</a:t>
-            </a:r>
-            <a:r>
-              <a:rPr b="0" sz="1700"/>
-              <a:t>。 オン </a:t>
-            </a:r>
-            <a:r>
-              <a:rPr b="1" sz="1700"/>
-              <a:t>リアル ハードウェア</a:t>
-            </a:r>
-            <a:r>
-              <a:rPr b="0" sz="1700"/>
-              <a:t>。</a:t>
-            </a:r>
-          </a:p>
-          <a:p>
-            <a:r>
-              <a:rPr b="0" sz="1700"/>
-              <a:t>Come and try it at the table.”</a:t>
-            </a:r>
-          </a:p>
-          <a:p>
-            <a:r>
-              <a:rPr b="0" sz="1700"/>
-              <a:t>  </a:t>
-            </a:r>
-            <a:r>
-              <a:rPr b="1" sz="1700"/>
-              <a:t>カム アンド トライ イット</a:t>
-            </a:r>
-            <a:r>
-              <a:rPr b="0" sz="1700"/>
-              <a:t> アット ザ テイブル。</a:t>
-            </a:r>
-          </a:p>
-          <a:p>
-            <a:r>
-              <a:rPr b="0" sz="1700"/>
-              <a:t/>
-            </a:r>
-          </a:p>
-          <a:p>
-            <a:r>
-              <a:rPr b="0" sz="1700"/>
-              <a:t>── フォールバック（録画に切り替えたとき）</a:t>
-            </a:r>
-          </a:p>
-          <a:p>
-            <a:r>
-              <a:rPr b="0" sz="1700"/>
-              <a:t>“The design points stand either way.”</a:t>
-            </a:r>
-          </a:p>
-          <a:p>
-            <a:r>
-              <a:rPr b="0" sz="1700"/>
-              <a:t>  ザ デザイン ポインツ </a:t>
-            </a:r>
-            <a:r>
-              <a:rPr b="1" sz="1700"/>
-              <a:t>スタンド</a:t>
-            </a:r>
-            <a:r>
-              <a:rPr b="0" sz="1700"/>
-              <a:t> イーザー ウェイ。</a:t>
-            </a:r>
-          </a:p>
-          <a:p>
-            <a:r>
-              <a:rPr b="0" sz="1700"/>
-              <a:t/>
-            </a:r>
-          </a:p>
-          <a:p>
-            <a:r>
-              <a:rPr b="0" sz="1200"/>
-              <a:t>JA: Step 3→4（物体だけ外す→拒否→戻して成功）と Step 6（Standby）だけは何があっても実機で見せる。26:00 到達で Step 4b と Step 5 Audit を削る。個別ステップは最大15秒で見切り、止まらず前進。</a:t>
+              <a:t>JA: 26:00 到達で SCENE 5 と SCENE 8 を落とす。SCENE 1・6・7・9・10 は何があっても実機で見せる。Audit と Silent Standby は実演しない — Audit は卓上デモと質疑の持ち札に回す。</a:t>
             </a:r>
           </a:p>
         </p:txBody>
@@ -21383,7 +21767,7 @@
                 <a:ea typeface="Calibri" pitchFamily="34" charset="-122"/>
                 <a:cs typeface="Calibri" pitchFamily="34" charset="-120"/>
               </a:rPr>
-              <a:t>Ex-military — former JGSDF officer (2nd Lt.), cyber unit</a:t>
+              <a:t>Turn offensive experience into defensive tools</a:t>
             </a:r>
             <a:endParaRPr lang="en-US" sz="1800" dirty="0"/>
           </a:p>
@@ -21404,7 +21788,7 @@
                 <a:ea typeface="Calibri" pitchFamily="34" charset="-122"/>
                 <a:cs typeface="Calibri" pitchFamily="34" charset="-120"/>
               </a:rPr>
-              <a:t>Turn offensive experience into defensive tools</a:t>
+              <a:t>Focus: deception, delaying action, constrained SOC/NOC, coercion-aware design</a:t>
             </a:r>
             <a:endParaRPr lang="en-US" sz="1800" dirty="0"/>
           </a:p>
@@ -21425,7 +21809,7 @@
                 <a:ea typeface="Calibri" pitchFamily="34" charset="-122"/>
                 <a:cs typeface="Calibri" pitchFamily="34" charset="-120"/>
               </a:rPr>
-              <a:t>Focus: deception, delaying action, constrained SOC/NOC, coercion-aware design</a:t>
+              <a:t>Former penetration tester · CISSP</a:t>
             </a:r>
             <a:endParaRPr lang="en-US" sz="1800" dirty="0"/>
           </a:p>
@@ -21446,7 +21830,7 @@
                 <a:ea typeface="Calibri" pitchFamily="34" charset="-122"/>
                 <a:cs typeface="Calibri" pitchFamily="34" charset="-120"/>
               </a:rPr>
-              <a:t>Former penetration tester · CISSP</a:t>
+              <a:t>Ex-military — former JGSDF officer (2nd Lt.), cyber unit</a:t>
             </a:r>
             <a:endParaRPr lang="en-US" sz="1800" dirty="0"/>
           </a:p>
@@ -25567,7 +25951,7 @@
                 <a:ea typeface="Courier New" pitchFamily="34" charset="-122"/>
                 <a:cs typeface="Courier New" pitchFamily="34" charset="-120"/>
               </a:rPr>
-              <a:t>Create → Bind → Two passwords, two files → Refused → Audit → Silent Standby</a:t>
+              <a:t>One file → Two objects, two passwords, two files → Refused, both ways → Compelled → Gone</a:t>
             </a:r>
             <a:pPr indent="0" marL="0">
               <a:buNone/>

--- a/docs/submissions/Phasmid_DEFCON_DemoLabs.pptx
+++ b/docs/submissions/Phasmid_DEFCON_DemoLabs.pptx
@@ -636,7 +636,7 @@
           <a:p>
             <a:r>
               <a:rPr b="0" sz="1700"/>
-              <a:t>  イッツ ザ レファレンス ビルド オヴ ザ </a:t>
+              <a:t>  イッツ ザ レファレンス ビルド オブ ザ </a:t>
             </a:r>
             <a:r>
               <a:rPr b="1" sz="1700"/>
@@ -704,7 +704,7 @@
             </a:r>
             <a:r>
               <a:rPr b="0" sz="1700"/>
-              <a:t>… アンド ゼイ ハヴ </a:t>
+              <a:t>… アンド ゼイ ハブ </a:t>
             </a:r>
             <a:r>
               <a:rPr b="1" sz="1700"/>
@@ -966,11 +966,11 @@
             </a:r>
             <a:r>
               <a:rPr b="1" sz="1700"/>
-              <a:t>センシティヴ</a:t>
-            </a:r>
-            <a:r>
-              <a:rPr b="0" sz="1700"/>
-              <a:t>、 アンド エニシング アバウト リカヴァリー。</a:t>
+              <a:t>センシティブ</a:t>
+            </a:r>
+            <a:r>
+              <a:rPr b="0" sz="1700"/>
+              <a:t>、 アンド エニシング アバウト リカバリー。</a:t>
             </a:r>
           </a:p>
           <a:p>
@@ -990,7 +990,7 @@
             </a:r>
             <a:r>
               <a:rPr b="0" sz="1700"/>
-              <a:t>。 キャプチャーヴィジブル </a:t>
+              <a:t>。 キャプチャービジブル </a:t>
             </a:r>
             <a:r>
               <a:rPr b="1" sz="1700"/>
@@ -1014,11 +1014,11 @@
             </a:r>
             <a:r>
               <a:rPr b="1" sz="1700"/>
-              <a:t>ネヴァー</a:t>
-            </a:r>
-            <a:r>
-              <a:rPr b="0" sz="1700"/>
-              <a:t> ショウ ザ ストラクチャー、 ザ リカヴァリー パス、 オア ジ オーダー ユード トライ シングズ イン。</a:t>
+              <a:t>ネバー</a:t>
+            </a:r>
+            <a:r>
+              <a:rPr b="0" sz="1700"/>
+              <a:t> ショウ ザ ストラクチャー、 ザ リカバリー パス、 オア ジ オーダー ユード トライ シングズ イン。</a:t>
             </a:r>
           </a:p>
           <a:p>
@@ -1176,7 +1176,7 @@
             </a:r>
             <a:r>
               <a:rPr b="0" sz="1700"/>
-              <a:t> オヴ ディス イズ フォウクロー。 イッツ </a:t>
+              <a:t> オブ ディス イズ フォークロー。 イッツ </a:t>
             </a:r>
             <a:r>
               <a:rPr b="1" sz="1700"/>
@@ -1326,7 +1326,7 @@
             </a:r>
             <a:r>
               <a:rPr b="0" sz="1700"/>
-              <a:t> ムーヴィング パーツ。</a:t>
+              <a:t> ムービング パーツ。</a:t>
             </a:r>
           </a:p>
           <a:p>
@@ -1350,11 +1350,11 @@
             </a:r>
             <a:r>
               <a:rPr b="1" sz="1700"/>
-              <a:t>ヴェッセル</a:t>
-            </a:r>
-            <a:r>
-              <a:rPr b="0" sz="1700"/>
-              <a:t>。 オーセンティケイティッド インクリプション、 パスワードディライヴド キーズ。</a:t>
+              <a:t>ベッセル</a:t>
+            </a:r>
+            <a:r>
+              <a:rPr b="0" sz="1700"/>
+              <a:t>。 オーセンティケイティッド インクリプション、 パスワードディライブド キーズ。</a:t>
             </a:r>
           </a:p>
           <a:p>
@@ -1374,7 +1374,7 @@
             </a:r>
             <a:r>
               <a:rPr b="0" sz="1700"/>
-              <a:t> — オブジェクトキュー オペレイション。 アイル カム ゥライト バック トゥ ディス。 イッツ ザ </a:t>
+              <a:t> — オブジェクトキュー オペレイション。 アイル カム ライト バック トゥ ディス。 イッツ ザ </a:t>
             </a:r>
             <a:r>
               <a:rPr b="1" sz="1700"/>
@@ -1458,7 +1458,7 @@
             </a:r>
             <a:r>
               <a:rPr b="1" sz="1700"/>
-              <a:t>オウプンズ</a:t>
+              <a:t>オープンズ</a:t>
             </a:r>
             <a:r>
               <a:rPr b="0" sz="1700"/>
@@ -1474,7 +1474,7 @@
           <a:p>
             <a:r>
               <a:rPr b="0" sz="1700"/>
-              <a:t>  ワン オウプンズ ザ </a:t>
+              <a:t>  ワン オープンズ ザ </a:t>
             </a:r>
             <a:r>
               <a:rPr b="1" sz="1700"/>
@@ -1514,7 +1514,7 @@
           <a:p>
             <a:r>
               <a:rPr b="0" sz="1700"/>
-              <a:t>  スリー パスワーズ。 スリー ヴェリー </a:t>
+              <a:t>  スリー パスワーズ。 スリー ベリー </a:t>
             </a:r>
             <a:r>
               <a:rPr b="1" sz="1700"/>
@@ -1538,7 +1538,7 @@
             </a:r>
             <a:r>
               <a:rPr b="1" sz="1700"/>
-              <a:t>オウンリー ユー</a:t>
+              <a:t>オンリー ユー</a:t>
             </a:r>
             <a:r>
               <a:rPr b="0" sz="1700"/>
@@ -1679,7 +1679,7 @@
           <a:p>
             <a:r>
               <a:rPr b="0" sz="1700"/>
-              <a:t>  ユー ショウ アン エヴリデイ </a:t>
+              <a:t>  ユー ショウ アン エブリデイ </a:t>
             </a:r>
             <a:r>
               <a:rPr b="1" sz="1700"/>
@@ -1739,7 +1739,7 @@
             </a:r>
             <a:r>
               <a:rPr b="1" sz="1700"/>
-              <a:t>ゥロング</a:t>
+              <a:t>ロング</a:t>
             </a:r>
             <a:r>
               <a:rPr b="0" sz="1700"/>
@@ -1791,7 +1791,7 @@
           <a:p>
             <a:r>
               <a:rPr b="0" sz="1700"/>
-              <a:t>  イット ドライヴズ </a:t>
+              <a:t>  イット ドライブズ </a:t>
             </a:r>
             <a:r>
               <a:rPr b="1" sz="1700"/>
@@ -1831,7 +1831,7 @@
           <a:p>
             <a:r>
               <a:rPr b="0" sz="1700"/>
-              <a:t>  ア フォウトウ オヴ ジ オブジェクト アンロックス </a:t>
+              <a:t>  ア フォト オブ ジ オブジェクト アンロックス </a:t>
             </a:r>
             <a:r>
               <a:rPr b="1" sz="1700"/>
@@ -1879,7 +1879,7 @@
           <a:p>
             <a:r>
               <a:rPr b="0" sz="1700"/>
-              <a:t>  ジ オブジェクト オウンリー ディサイズ ウェザー ユー ゲット トゥ </a:t>
+              <a:t>  ジ オブジェクト オンリー ディサイズ ウェザー ユー ゲット トゥ </a:t>
             </a:r>
             <a:r>
               <a:rPr b="1" sz="1700"/>
@@ -1911,7 +1911,7 @@
             </a:r>
             <a:r>
               <a:rPr b="1" sz="1700"/>
-              <a:t>ライヴ</a:t>
+              <a:t>ライブ</a:t>
             </a:r>
             <a:r>
               <a:rPr b="0" sz="1700"/>
@@ -1975,7 +1975,7 @@
             </a:r>
             <a:r>
               <a:rPr b="0" sz="1700"/>
-              <a:t> ア キー。 ア フォウトウ オヴ イット アンロックス </a:t>
+              <a:t> ア キー。 ア フォト オブ イット アンロックス </a:t>
             </a:r>
             <a:r>
               <a:rPr b="1" sz="1700"/>
@@ -2140,7 +2140,7 @@
           <a:p>
             <a:r>
               <a:rPr b="0" sz="1700"/>
-              <a:t>  ワン ホットキー ドロップス ザ センシティヴ インターフェイス イントゥ ア </a:t>
+              <a:t>  ワン ホットキー ドロップス ザ センシティブ インターフェイス イントゥ ア </a:t>
             </a:r>
             <a:r>
               <a:rPr b="1" sz="1700"/>
@@ -2208,7 +2208,7 @@
           <a:p>
             <a:r>
               <a:rPr b="0" sz="1700"/>
-              <a:t>  ザ ファイル ユー ウド ハンド オウヴァー イズ ア ファイル ユー </a:t>
+              <a:t>  ザ ファイル ユー ウド ハンド オーバー イズ ア ファイル ユー </a:t>
             </a:r>
             <a:r>
               <a:rPr b="1" sz="1700"/>
@@ -2256,7 +2256,7 @@
             </a:r>
             <a:r>
               <a:rPr b="0" sz="1700"/>
-              <a:t> マニュファクチャー ユア カヴァー ストーリー。</a:t>
+              <a:t> マニュファクチャー ユア カバー ストーリー。</a:t>
             </a:r>
           </a:p>
           <a:p>
@@ -2272,11 +2272,11 @@
             </a:r>
             <a:r>
               <a:rPr b="1" sz="1700"/>
-              <a:t>サヴァイヴ</a:t>
-            </a:r>
-            <a:r>
-              <a:rPr b="0" sz="1700"/>
-              <a:t> ファイヴ ミニッツ オヴ クエスチョニング。</a:t>
+              <a:t>サバイブ</a:t>
+            </a:r>
+            <a:r>
+              <a:rPr b="0" sz="1700"/>
+              <a:t> ファイブ ミニッツ オブ クエスチョニング。</a:t>
             </a:r>
           </a:p>
           <a:p>
@@ -2328,7 +2328,7 @@
           <a:p>
             <a:r>
               <a:rPr b="0" sz="1700"/>
-              <a:t>  ワット ザ ツール ダズ ギヴ ユー イズ </a:t>
+              <a:t>  ワット ザ ツール ダズ ギブ ユー イズ </a:t>
             </a:r>
             <a:r>
               <a:rPr b="1" sz="1700"/>
@@ -2380,15 +2380,15 @@
             </a:r>
             <a:r>
               <a:rPr b="1" sz="1700"/>
-              <a:t>ヴォリューム プロブレム</a:t>
-            </a:r>
-            <a:r>
-              <a:rPr b="0" sz="1700"/>
-              <a:t>。 アンド ヴォリューム イズ サムシング ソフトウェア キャン </a:t>
-            </a:r>
-            <a:r>
-              <a:rPr b="1" sz="1700"/>
-              <a:t>アクチュアリー ソルヴ</a:t>
+              <a:t>ボリューム プロブレム</a:t>
+            </a:r>
+            <a:r>
+              <a:rPr b="0" sz="1700"/>
+              <a:t>。 アンド ボリューム イズ サムシング ソフトウェア キャン </a:t>
+            </a:r>
+            <a:r>
+              <a:rPr b="1" sz="1700"/>
+              <a:t>アクチュアリー ソルブ</a:t>
             </a:r>
             <a:r>
               <a:rPr b="0" sz="1700"/>
@@ -2412,7 +2412,7 @@
             </a:r>
             <a:r>
               <a:rPr b="0" sz="1700"/>
-              <a:t>。 トラヴル。 フィールド エンジニア。 リサーチャー。</a:t>
+              <a:t>。 トラブル。 フィールド エンジニア。 リサーチャー。</a:t>
             </a:r>
           </a:p>
           <a:p>
@@ -2452,7 +2452,7 @@
             </a:r>
             <a:r>
               <a:rPr b="0" sz="1700"/>
-              <a:t>、 インステッド オヴ フェイリング ラウドリー。</a:t>
+              <a:t>、 インステッド オブ フェイリング ラウドリー。</a:t>
             </a:r>
           </a:p>
           <a:p>
@@ -2468,7 +2468,7 @@
             </a:r>
             <a:r>
               <a:rPr b="1" sz="1700"/>
-              <a:t>マジック インヴィジビリティ</a:t>
+              <a:t>マジック インビジビリティ</a:t>
             </a:r>
             <a:r>
               <a:rPr b="0" sz="1700"/>
@@ -2638,7 +2638,7 @@
           <a:p>
             <a:r>
               <a:rPr b="0" sz="1700"/>
-              <a:t>  ザ ヴォルト ファイル </a:t>
+              <a:t>  ザ ボルト ファイル </a:t>
             </a:r>
             <a:r>
               <a:rPr b="1" sz="1700"/>
@@ -2662,11 +2662,11 @@
             </a:r>
             <a:r>
               <a:rPr b="1" sz="1700"/>
-              <a:t>リヴィール</a:t>
-            </a:r>
-            <a:r>
-              <a:rPr b="0" sz="1700"/>
-              <a:t> ストラクチャー、 オア リカヴァリー。</a:t>
+              <a:t>リビール</a:t>
+            </a:r>
+            <a:r>
+              <a:rPr b="0" sz="1700"/>
+              <a:t> ストラクチャー、 オア リカバリー。</a:t>
             </a:r>
           </a:p>
           <a:p>
@@ -2840,7 +2840,7 @@
             </a:r>
             <a:r>
               <a:rPr b="0" sz="1700"/>
-              <a:t> ア ヴェッセル。</a:t>
+              <a:t> ア ベッセル。</a:t>
             </a:r>
           </a:p>
           <a:p>
@@ -3078,7 +3078,7 @@
             </a:r>
             <a:r>
               <a:rPr b="0" sz="1700"/>
-              <a:t> フォー キー デリヴェイション。</a:t>
+              <a:t> フォー キー デリベイション。</a:t>
             </a:r>
           </a:p>
           <a:p>
@@ -3130,11 +3130,11 @@
           <a:p>
             <a:r>
               <a:rPr b="0" sz="1700"/>
-              <a:t>  オール オヴ イット オン ア </a:t>
-            </a:r>
-            <a:r>
-              <a:rPr b="1" sz="1700"/>
-              <a:t>パイ ズィーロウ トゥー ダブリュー</a:t>
+              <a:t>  オール オブ イット オン ア </a:t>
+            </a:r>
+            <a:r>
+              <a:rPr b="1" sz="1700"/>
+              <a:t>パイ ゼロ トゥー ダブリュー</a:t>
             </a:r>
             <a:r>
               <a:rPr b="0" sz="1700"/>
@@ -3332,7 +3332,7 @@
           <a:p>
             <a:r>
               <a:rPr b="0" sz="1700"/>
-              <a:t>  ア パイ ズィーロウ トゥー ダブリュー、 イン ア </a:t>
+              <a:t>  ア パイ ゼロ トゥー ダブリュー、 イン ア </a:t>
             </a:r>
             <a:r>
               <a:rPr b="1" sz="1700"/>
@@ -3380,7 +3380,7 @@
           <a:p>
             <a:r>
               <a:rPr b="0" sz="1700"/>
-              <a:t>  ユー リーチ ザ ウェブ インターフェイス オウヴァー </a:t>
+              <a:t>  ユー リーチ ザ ウェブ インターフェイス オーバー </a:t>
             </a:r>
             <a:r>
               <a:rPr b="1" sz="1700"/>
@@ -3404,7 +3404,7 @@
             </a:r>
             <a:r>
               <a:rPr b="1" sz="1700"/>
-              <a:t>ネヴァー</a:t>
+              <a:t>ネバー</a:t>
             </a:r>
             <a:r>
               <a:rPr b="0" sz="1700"/>
@@ -3444,7 +3444,7 @@
             </a:r>
             <a:r>
               <a:rPr b="1" sz="1700"/>
-              <a:t>ゥライト ヒア</a:t>
+              <a:t>ライト ヒア</a:t>
             </a:r>
             <a:r>
               <a:rPr b="0" sz="1700"/>
@@ -3690,7 +3690,7 @@
             </a:r>
             <a:r>
               <a:rPr b="0" sz="1700"/>
-              <a:t> イン ザ ヴォルト。</a:t>
+              <a:t> イン ザ ボルト。</a:t>
             </a:r>
           </a:p>
           <a:p>
@@ -3702,7 +3702,7 @@
           <a:p>
             <a:r>
               <a:rPr b="0" sz="1700"/>
-              <a:t>  スタートアップ セルフテスツ チェック ザ プリミティヴズ </a:t>
+              <a:t>  スタートアップ セルフテスツ チェック ザ プリミティブズ </a:t>
             </a:r>
             <a:r>
               <a:rPr b="1" sz="1700"/>
@@ -3892,7 +3892,7 @@
             </a:r>
             <a:r>
               <a:rPr b="0" sz="1700"/>
-              <a:t>、 エヴリ デイ。</a:t>
+              <a:t>、 エブリ デイ。</a:t>
             </a:r>
           </a:p>
           <a:p>
@@ -3952,7 +3952,7 @@
           <a:p>
             <a:r>
               <a:rPr b="0" sz="1700"/>
-              <a:t>  オフェンシヴ ワーク トート ミー ザ ウィーク リンク イズ ザ </a:t>
+              <a:t>  オフェンシブ ワーク トート ミー ザ ウィーク リンク イズ ザ </a:t>
             </a:r>
             <a:r>
               <a:rPr b="1" sz="1700"/>
@@ -3972,11 +3972,11 @@
           <a:p>
             <a:r>
               <a:rPr b="0" sz="1700"/>
-              <a:t>  ソウ アイ ターン オフェンシヴ エクスピアリエンス イントゥ </a:t>
-            </a:r>
-            <a:r>
-              <a:rPr b="1" sz="1700"/>
-              <a:t>ディフェンシヴ ツールズ</a:t>
+              <a:t>  ソウ アイ ターン オフェンシブ エクスピアリエンス イントゥ </a:t>
+            </a:r>
+            <a:r>
+              <a:rPr b="1" sz="1700"/>
+              <a:t>ディフェンシブ ツールズ</a:t>
             </a:r>
             <a:r>
               <a:rPr b="0" sz="1700"/>
@@ -4214,11 +4214,11 @@
             </a:r>
             <a:r>
               <a:rPr b="1" sz="1700"/>
-              <a:t>エイチ ティー ティー ピー オウンリー</a:t>
-            </a:r>
-            <a:r>
-              <a:rPr b="0" sz="1700"/>
-              <a:t>、 アンド ショートリヴド。</a:t>
+              <a:t>エイチ ティー ティー ピー オンリー</a:t>
+            </a:r>
+            <a:r>
+              <a:rPr b="0" sz="1700"/>
+              <a:t>、 アンド ショートリブド。</a:t>
             </a:r>
           </a:p>
           <a:p>
@@ -4230,7 +4230,7 @@
           <a:p>
             <a:r>
               <a:rPr b="0" sz="1700"/>
-              <a:t>  アテンプト リミティング。 レイト リミティング。 インアクティヴィティ オートキル。 ハードゥンド ヘダーズ。</a:t>
+              <a:t>  アテンプト リミティング。 レイト リミティング。 インアクティビティ オートキル。 ハードゥンド ヘダーズ。</a:t>
             </a:r>
           </a:p>
           <a:p>
@@ -4423,7 +4423,7 @@
           <a:p>
             <a:r>
               <a:rPr b="0" sz="1700"/>
-              <a:t>  スタンドバイ。 ワークフロウズ ザット プリザーヴ </a:t>
+              <a:t>  スタンドバイ。 ワークフロウズ ザット プリザーブ </a:t>
             </a:r>
             <a:r>
               <a:rPr b="1" sz="1700"/>
@@ -4451,7 +4451,7 @@
             </a:r>
             <a:r>
               <a:rPr b="0" sz="1700"/>
-              <a:t> ルートキッツ。 カーネルレヴル ハイディング。</a:t>
+              <a:t> ルートキッツ。 カーネルレブル ハイディング。</a:t>
             </a:r>
           </a:p>
           <a:p>
@@ -4483,7 +4483,7 @@
             </a:r>
             <a:r>
               <a:rPr b="0" sz="1700"/>
-              <a:t> フォルス イヴェンツ、 オア フォルス タイムスタンプス。</a:t>
+              <a:t> フォルス イベンツ、 オア フォルス タイムスタンプス。</a:t>
             </a:r>
           </a:p>
           <a:p>
@@ -4531,7 +4531,7 @@
             </a:r>
             <a:r>
               <a:rPr b="0" sz="1700"/>
-              <a:t> クレイム フォレンシック インヴィジビリティ。</a:t>
+              <a:t> クレイム フォレンシック インビジビリティ。</a:t>
             </a:r>
           </a:p>
           <a:p>
@@ -4796,7 +4796,7 @@
             </a:r>
             <a:r>
               <a:rPr b="1" sz="1700"/>
-              <a:t>ネヴァー</a:t>
+              <a:t>ネバー</a:t>
             </a:r>
             <a:r>
               <a:rPr b="0" sz="1700"/>
@@ -4836,11 +4836,11 @@
           <a:p>
             <a:r>
               <a:rPr b="0" sz="1700"/>
-              <a:t>  アンド ワン モア シング イット ネヴァー クレイムズ: ザット ユア カヴァー ストーリー イズ </a:t>
-            </a:r>
-            <a:r>
-              <a:rPr b="1" sz="1700"/>
-              <a:t>コンヴィンシング</a:t>
+              <a:t>  アンド ワン モア シング イット ネバー クレイムズ: ザット ユア カバー ストーリー イズ </a:t>
+            </a:r>
+            <a:r>
+              <a:rPr b="1" sz="1700"/>
+              <a:t>コンビンシング</a:t>
             </a:r>
             <a:r>
               <a:rPr b="0" sz="1700"/>
@@ -4880,7 +4880,7 @@
             </a:r>
             <a:r>
               <a:rPr b="1" sz="1700"/>
-              <a:t>ビリーヴ</a:t>
+              <a:t>ビリーブ</a:t>
             </a:r>
             <a:r>
               <a:rPr b="0" sz="1700"/>
@@ -5061,7 +5061,7 @@
             </a:r>
             <a:r>
               <a:rPr b="1" sz="1700"/>
-              <a:t>ライヴ デモ</a:t>
+              <a:t>ライブ デモ</a:t>
             </a:r>
             <a:r>
               <a:rPr b="0" sz="1700"/>
@@ -5164,7 +5164,7 @@
           <a:p>
             <a:r>
               <a:rPr b="0" sz="1700"/>
-              <a:t>[19:20 / ~8:30] LIVE DEMO  ★中心（12シーン・画面切替は片道1回）</a:t>
+              <a:t>[19:20 / ~8:30] LIVE DEMO  ★中心（12シーン・切替は片道1回）</a:t>
             </a:r>
           </a:p>
           <a:p>
@@ -5176,13 +5176,25 @@
           <a:p>
             <a:r>
               <a:rPr b="0" sz="1200"/>
-              <a:t>── 前置き（手を動かしながら）</a:t>
-            </a:r>
-          </a:p>
-          <a:p>
-            <a:r>
-              <a:rPr b="0" sz="1700"/>
-              <a:t>“This is the real system.</a:t>
+              <a:t>【読み方】 ▶SAY = 止めずに読み切る（手は動かさない）  ✋DO = 黙って操作  ▶THEN = 画面が変わってから言う</a:t>
+            </a:r>
+          </a:p>
+          <a:p>
+            <a:r>
+              <a:rPr b="0" sz="1700"/>
+              <a:t/>
+            </a:r>
+          </a:p>
+          <a:p>
+            <a:r>
+              <a:rPr b="0" sz="1200"/>
+              <a:t>── 前置き（まだ何も操作しない）</a:t>
+            </a:r>
+          </a:p>
+          <a:p>
+            <a:r>
+              <a:rPr b="0" sz="1700"/>
+              <a:t>“This is the real system. One file on disk.</a:t>
             </a:r>
           </a:p>
           <a:p>
@@ -5196,13 +5208,21 @@
             </a:r>
             <a:r>
               <a:rPr b="0" sz="1700"/>
-              <a:t>。</a:t>
-            </a:r>
-          </a:p>
-          <a:p>
-            <a:r>
-              <a:rPr b="0" sz="1700"/>
-              <a:t>One file on disk.</a:t>
+              <a:t>。 </a:t>
+            </a:r>
+            <a:r>
+              <a:rPr b="1" sz="1700"/>
+              <a:t>ワン ファイル</a:t>
+            </a:r>
+            <a:r>
+              <a:rPr b="0" sz="1700"/>
+              <a:t> オン ディスク。</a:t>
+            </a:r>
+          </a:p>
+          <a:p>
+            <a:r>
+              <a:rPr b="0" sz="1700"/>
+              <a:t>Two objects, two passwords, two files inside it.</a:t>
             </a:r>
           </a:p>
           <a:p>
@@ -5212,27 +5232,7 @@
             </a:r>
             <a:r>
               <a:rPr b="1" sz="1700"/>
-              <a:t>ワン ファイル</a:t>
-            </a:r>
-            <a:r>
-              <a:rPr b="0" sz="1700"/>
-              <a:t> オン ディスク。</a:t>
-            </a:r>
-          </a:p>
-          <a:p>
-            <a:r>
-              <a:rPr b="0" sz="1700"/>
-              <a:t>Two objects, two passwords, two files inside it.</a:t>
-            </a:r>
-          </a:p>
-          <a:p>
-            <a:r>
-              <a:rPr b="0" sz="1700"/>
-              <a:t>  </a:t>
-            </a:r>
-            <a:r>
-              <a:rPr b="1" sz="1700"/>
-              <a:t>トゥー オブジェクツ</a:t>
+              <a:t>ツー オブジェクツ</a:t>
             </a:r>
             <a:r>
               <a:rPr b="0" sz="1700"/>
@@ -5240,7 +5240,7 @@
             </a:r>
             <a:r>
               <a:rPr b="1" sz="1700"/>
-              <a:t>トゥー パスワーズ</a:t>
+              <a:t>ツー パスワーズ</a:t>
             </a:r>
             <a:r>
               <a:rPr b="0" sz="1700"/>
@@ -5248,7 +5248,7 @@
             </a:r>
             <a:r>
               <a:rPr b="1" sz="1700"/>
-              <a:t>トゥー ファイルズ</a:t>
+              <a:t>ツー ファイルズ</a:t>
             </a:r>
             <a:r>
               <a:rPr b="0" sz="1700"/>
@@ -5272,11 +5272,11 @@
             </a:r>
             <a:r>
               <a:rPr b="0" sz="1700"/>
-              <a:t> ワン、 インステッド オヴ </a:t>
-            </a:r>
-            <a:r>
-              <a:rPr b="1" sz="1700"/>
-              <a:t>オウプニング</a:t>
+              <a:t> ワン、 インステッド オブ </a:t>
+            </a:r>
+            <a:r>
+              <a:rPr b="1" sz="1700"/>
+              <a:t>オープニング</a:t>
             </a:r>
             <a:r>
               <a:rPr b="0" sz="1700"/>
@@ -5298,133 +5298,139 @@
           <a:p>
             <a:r>
               <a:rPr b="0" sz="1200"/>
-              <a:t>DO: Simple Operator 画面を出したまま提示する。</a:t>
+              <a:t>▶ SAY — 止めずに読み切る</a:t>
+            </a:r>
+          </a:p>
+          <a:p>
+            <a:r>
+              <a:rPr b="0" sz="1700"/>
+              <a:t>This is the real console.</a:t>
+            </a:r>
+          </a:p>
+          <a:p>
+            <a:r>
+              <a:rPr b="0" sz="1700"/>
+              <a:t>  ディス イズ ザ </a:t>
+            </a:r>
+            <a:r>
+              <a:rPr b="1" sz="1700"/>
+              <a:t>リアル</a:t>
+            </a:r>
+            <a:r>
+              <a:rPr b="0" sz="1700"/>
+              <a:t> コンソール。</a:t>
+            </a:r>
+          </a:p>
+          <a:p>
+            <a:r>
+              <a:rPr b="0" sz="1700"/>
+              <a:t>Local Disclosure Control.</a:t>
+            </a:r>
+          </a:p>
+          <a:p>
+            <a:r>
+              <a:rPr b="0" sz="1700"/>
+              <a:t>  </a:t>
+            </a:r>
+            <a:r>
+              <a:rPr b="1" sz="1700"/>
+              <a:t>ローカル ディスクロージャー コントロール</a:t>
+            </a:r>
+            <a:r>
+              <a:rPr b="0" sz="1700"/>
+              <a:t>。</a:t>
+            </a:r>
+          </a:p>
+          <a:p>
+            <a:r>
+              <a:rPr b="0" sz="1700"/>
+              <a:t>The home screen is deliberately small.</a:t>
+            </a:r>
+          </a:p>
+          <a:p>
+            <a:r>
+              <a:rPr b="0" sz="1700"/>
+              <a:t>  ザ ホーム スクリーン イズ ディリバレットリー </a:t>
+            </a:r>
+            <a:r>
+              <a:rPr b="1" sz="1700"/>
+              <a:t>スモール</a:t>
+            </a:r>
+            <a:r>
+              <a:rPr b="0" sz="1700"/>
+              <a:t>。</a:t>
+            </a:r>
+          </a:p>
+          <a:p>
+            <a:r>
+              <a:rPr b="0" sz="1700"/>
+              <a:t>Open. New. Guided. Expert.</a:t>
+            </a:r>
+          </a:p>
+          <a:p>
+            <a:r>
+              <a:rPr b="0" sz="1700"/>
+              <a:t>  オープン。 ニュー。 ガイデッド。 エクスパート。</a:t>
+            </a:r>
+          </a:p>
+          <a:p>
+            <a:r>
+              <a:rPr b="0" sz="1700"/>
+              <a:t>Under pressure, you do not want a wall of options.</a:t>
+            </a:r>
+          </a:p>
+          <a:p>
+            <a:r>
+              <a:rPr b="0" sz="1700"/>
+              <a:t>  アンダー </a:t>
+            </a:r>
+            <a:r>
+              <a:rPr b="1" sz="1700"/>
+              <a:t>プレッシャー</a:t>
+            </a:r>
+            <a:r>
+              <a:rPr b="0" sz="1700"/>
+              <a:t>、 ユー ドント ウォント ア </a:t>
+            </a:r>
+            <a:r>
+              <a:rPr b="1" sz="1700"/>
+              <a:t>ウォール オブ オプションズ</a:t>
+            </a:r>
+            <a:r>
+              <a:rPr b="0" sz="1700"/>
+              <a:t>。</a:t>
+            </a:r>
+          </a:p>
+          <a:p>
+            <a:r>
+              <a:rPr b="0" sz="1700"/>
+              <a:t>The full control set is one key away.</a:t>
+            </a:r>
+          </a:p>
+          <a:p>
+            <a:r>
+              <a:rPr b="0" sz="1700"/>
+              <a:t>  ザ フル コントロール セット イズ </a:t>
+            </a:r>
+            <a:r>
+              <a:rPr b="1" sz="1700"/>
+              <a:t>ワン キー</a:t>
+            </a:r>
+            <a:r>
+              <a:rPr b="0" sz="1700"/>
+              <a:t> アウェイ。</a:t>
             </a:r>
           </a:p>
           <a:p>
             <a:r>
               <a:rPr b="0" sz="1200"/>
-              <a:t>DO: 下部のバー（open / new / guided / expert）を指す。</a:t>
-            </a:r>
-          </a:p>
-          <a:p>
-            <a:r>
-              <a:rPr b="0" sz="1700"/>
-              <a:t>This is the real console.</a:t>
-            </a:r>
-          </a:p>
-          <a:p>
-            <a:r>
-              <a:rPr b="0" sz="1700"/>
-              <a:t>  ディス イズ ザ </a:t>
-            </a:r>
-            <a:r>
-              <a:rPr b="1" sz="1700"/>
-              <a:t>リアル</a:t>
-            </a:r>
-            <a:r>
-              <a:rPr b="0" sz="1700"/>
-              <a:t> コンソール。</a:t>
-            </a:r>
-          </a:p>
-          <a:p>
-            <a:r>
-              <a:rPr b="0" sz="1700"/>
-              <a:t>Local Disclosure Control.</a:t>
-            </a:r>
-          </a:p>
-          <a:p>
-            <a:r>
-              <a:rPr b="0" sz="1700"/>
-              <a:t>  </a:t>
-            </a:r>
-            <a:r>
-              <a:rPr b="1" sz="1700"/>
-              <a:t>ローカル ディスクロージャー コントロール</a:t>
-            </a:r>
-            <a:r>
-              <a:rPr b="0" sz="1700"/>
-              <a:t>。</a:t>
-            </a:r>
-          </a:p>
-          <a:p>
-            <a:r>
-              <a:rPr b="0" sz="1700"/>
-              <a:t>The home screen is deliberately small.</a:t>
-            </a:r>
-          </a:p>
-          <a:p>
-            <a:r>
-              <a:rPr b="0" sz="1700"/>
-              <a:t>  ザ ホーム スクリーン イズ ディリバレットリー </a:t>
-            </a:r>
-            <a:r>
-              <a:rPr b="1" sz="1700"/>
-              <a:t>スモール</a:t>
-            </a:r>
-            <a:r>
-              <a:rPr b="0" sz="1700"/>
-              <a:t>。</a:t>
-            </a:r>
-          </a:p>
-          <a:p>
-            <a:r>
-              <a:rPr b="0" sz="1700"/>
-              <a:t>Open. New. Guided. Expert.</a:t>
-            </a:r>
-          </a:p>
-          <a:p>
-            <a:r>
-              <a:rPr b="0" sz="1700"/>
-              <a:t>  オウプン。 ニュー。 ガイデッド。 エクスパート。</a:t>
-            </a:r>
-          </a:p>
-          <a:p>
-            <a:r>
-              <a:rPr b="0" sz="1700"/>
-              <a:t>Under pressure, you do not want a wall of options.</a:t>
-            </a:r>
-          </a:p>
-          <a:p>
-            <a:r>
-              <a:rPr b="0" sz="1700"/>
-              <a:t>  アンダー </a:t>
-            </a:r>
-            <a:r>
-              <a:rPr b="1" sz="1700"/>
-              <a:t>プレッシャー</a:t>
-            </a:r>
-            <a:r>
-              <a:rPr b="0" sz="1700"/>
-              <a:t>、 ユー ドウント ウォント ア </a:t>
-            </a:r>
-            <a:r>
-              <a:rPr b="1" sz="1700"/>
-              <a:t>ウォール オヴ オプションズ</a:t>
-            </a:r>
-            <a:r>
-              <a:rPr b="0" sz="1700"/>
-              <a:t>。</a:t>
-            </a:r>
-          </a:p>
-          <a:p>
-            <a:r>
-              <a:rPr b="0" sz="1700"/>
-              <a:t>The full control set is one key away.</a:t>
-            </a:r>
-          </a:p>
-          <a:p>
-            <a:r>
-              <a:rPr b="0" sz="1700"/>
-              <a:t>  ザ フル コントロール セット イズ </a:t>
-            </a:r>
-            <a:r>
-              <a:rPr b="1" sz="1700"/>
-              <a:t>ワン キー</a:t>
-            </a:r>
-            <a:r>
-              <a:rPr b="0" sz="1700"/>
-              <a:t> アウェイ。</a:t>
+              <a:t>✋ DO — 黙って操作</a:t>
+            </a:r>
+          </a:p>
+          <a:p>
+            <a:r>
+              <a:rPr b="0" sz="1200"/>
+              <a:t>DO: Simple Operator 画面を出したまま提示する。下部のバーを指す。</a:t>
             </a:r>
           </a:p>
           <a:p>
@@ -5442,53 +5448,201 @@
           <a:p>
             <a:r>
               <a:rPr b="0" sz="1200"/>
-              <a:t>DO: TUI: n (New) → vessel-path に demo.vessel → vessel-size を 64M に変更（既定の 512M のまま作らない）</a:t>
+              <a:t>▶ SAY — 止めずに読み切る</a:t>
+            </a:r>
+          </a:p>
+          <a:p>
+            <a:r>
+              <a:rPr b="0" sz="1700"/>
+              <a:t>First, I make a vessel.</a:t>
+            </a:r>
+          </a:p>
+          <a:p>
+            <a:r>
+              <a:rPr b="0" sz="1700"/>
+              <a:t>  ファースト、 アイ メイク ア </a:t>
+            </a:r>
+            <a:r>
+              <a:rPr b="1" sz="1700"/>
+              <a:t>ベッセル</a:t>
+            </a:r>
+            <a:r>
+              <a:rPr b="0" sz="1700"/>
+              <a:t>。</a:t>
+            </a:r>
+          </a:p>
+          <a:p>
+            <a:r>
+              <a:rPr b="0" sz="1700"/>
+              <a:t>A deniable container. One file. Sixty-four megabytes.</a:t>
+            </a:r>
+          </a:p>
+          <a:p>
+            <a:r>
+              <a:rPr b="0" sz="1700"/>
+              <a:t>  ア ディナイアブル コンテナ。 </a:t>
+            </a:r>
+            <a:r>
+              <a:rPr b="1" sz="1700"/>
+              <a:t>ワン ファイル</a:t>
+            </a:r>
+            <a:r>
+              <a:rPr b="0" sz="1700"/>
+              <a:t>。 </a:t>
+            </a:r>
+            <a:r>
+              <a:rPr b="1" sz="1700"/>
+              <a:t>シクスティフォー</a:t>
+            </a:r>
+            <a:r>
+              <a:rPr b="0" sz="1700"/>
+              <a:t> メガバイツ。</a:t>
+            </a:r>
+          </a:p>
+          <a:p>
+            <a:r>
+              <a:rPr b="0" sz="1700"/>
+              <a:t>Then I will show you what it looks like on disk.</a:t>
+            </a:r>
+          </a:p>
+          <a:p>
+            <a:r>
+              <a:rPr b="0" sz="1700"/>
+              <a:t>  ゼン アイル ショウ ユー ワット イット </a:t>
+            </a:r>
+            <a:r>
+              <a:rPr b="1" sz="1700"/>
+              <a:t>ルックス ライク</a:t>
+            </a:r>
+            <a:r>
+              <a:rPr b="0" sz="1700"/>
+              <a:t> オン ディスク。</a:t>
             </a:r>
           </a:p>
           <a:p>
             <a:r>
               <a:rPr b="0" sz="1200"/>
-              <a:t>DO: → vessel-label（任意）→ create-btn</a:t>
+              <a:t>✋ DO — 黙って操作</a:t>
             </a:r>
           </a:p>
           <a:p>
             <a:r>
               <a:rPr b="0" sz="1200"/>
-              <a:t>DO: シェルに切り替えて、実物を見せる:</a:t>
+              <a:t>DO: n (New) → vessel-path に demo.vessel</a:t>
             </a:r>
           </a:p>
           <a:p>
             <a:r>
               <a:rPr b="0" sz="1200"/>
-              <a:t>DO: ls -lh demo.vessel</a:t>
+              <a:t>DO: → vessel-size を 64M に変更（既定の 512M のまま作らない）→ create-btn</a:t>
             </a:r>
           </a:p>
           <a:p>
             <a:r>
               <a:rPr b="0" sz="1200"/>
-              <a:t>DO: file demo.vessel</a:t>
+              <a:t>DO: 続けてシェルで:  ls -lh demo.vessel  /  file demo.vessel  /  od -A x -t x1z -N 96 demo.vessel</a:t>
             </a:r>
           </a:p>
           <a:p>
             <a:r>
               <a:rPr b="0" sz="1200"/>
-              <a:t>DO: od -A x -t x1z -N 96 demo.vessel</a:t>
-            </a:r>
-          </a:p>
-          <a:p>
-            <a:r>
-              <a:rPr b="0" sz="1700"/>
-              <a:t>First, I make a vessel.</a:t>
-            </a:r>
-          </a:p>
-          <a:p>
-            <a:r>
-              <a:rPr b="0" sz="1700"/>
-              <a:t>  ファースト、 アイ メイク ア </a:t>
-            </a:r>
-            <a:r>
-              <a:rPr b="1" sz="1700"/>
-              <a:t>ヴェッセル</a:t>
+              <a:t>▶ THEN — 画面が変わってから</a:t>
+            </a:r>
+          </a:p>
+          <a:p>
+            <a:r>
+              <a:rPr b="0" sz="1700"/>
+              <a:t>One file. That is all there is.</a:t>
+            </a:r>
+          </a:p>
+          <a:p>
+            <a:r>
+              <a:rPr b="0" sz="1700"/>
+              <a:t>  </a:t>
+            </a:r>
+            <a:r>
+              <a:rPr b="1" sz="1700"/>
+              <a:t>ワン ファイル</a:t>
+            </a:r>
+            <a:r>
+              <a:rPr b="0" sz="1700"/>
+              <a:t>。 ザッツ </a:t>
+            </a:r>
+            <a:r>
+              <a:rPr b="1" sz="1700"/>
+              <a:t>オール</a:t>
+            </a:r>
+            <a:r>
+              <a:rPr b="0" sz="1700"/>
+              <a:t> ゼア イズ。</a:t>
+            </a:r>
+          </a:p>
+          <a:p>
+            <a:r>
+              <a:rPr b="0" sz="1700"/>
+              <a:t>It says 'data'. It has nothing to say, because there is nothing to read.</a:t>
+            </a:r>
+          </a:p>
+          <a:p>
+            <a:r>
+              <a:rPr b="0" sz="1700"/>
+              <a:t>  イット セズ </a:t>
+            </a:r>
+            <a:r>
+              <a:rPr b="1" sz="1700"/>
+              <a:t>データ</a:t>
+            </a:r>
+            <a:r>
+              <a:rPr b="0" sz="1700"/>
+              <a:t>。 イット ハズ </a:t>
+            </a:r>
+            <a:r>
+              <a:rPr b="1" sz="1700"/>
+              <a:t>ナッシング</a:t>
+            </a:r>
+            <a:r>
+              <a:rPr b="0" sz="1700"/>
+              <a:t> トゥ セイ、 ビコーズ ゼアズ </a:t>
+            </a:r>
+            <a:r>
+              <a:rPr b="1" sz="1700"/>
+              <a:t>ナッシング</a:t>
+            </a:r>
+            <a:r>
+              <a:rPr b="0" sz="1700"/>
+              <a:t> トゥ リード。</a:t>
+            </a:r>
+          </a:p>
+          <a:p>
+            <a:r>
+              <a:rPr b="0" sz="1700"/>
+              <a:t>No header. No magic bytes. On disk, this is random.</a:t>
+            </a:r>
+          </a:p>
+          <a:p>
+            <a:r>
+              <a:rPr b="0" sz="1700"/>
+              <a:t>  ノー </a:t>
+            </a:r>
+            <a:r>
+              <a:rPr b="1" sz="1700"/>
+              <a:t>ヘッダー</a:t>
+            </a:r>
+            <a:r>
+              <a:rPr b="0" sz="1700"/>
+              <a:t>。 ノー </a:t>
+            </a:r>
+            <a:r>
+              <a:rPr b="1" sz="1700"/>
+              <a:t>マジック バイツ</a:t>
+            </a:r>
+            <a:r>
+              <a:rPr b="0" sz="1700"/>
+              <a:t>。 オン ディスク、 ディス イズ </a:t>
+            </a:r>
+            <a:r>
+              <a:rPr b="1" sz="1700"/>
+              <a:t>ランダム</a:t>
             </a:r>
             <a:r>
               <a:rPr b="0" sz="1700"/>
@@ -5498,17 +5652,25 @@
           <a:p>
             <a:r>
               <a:rPr b="0" sz="1700"/>
-              <a:t>A deniable container. One file.</a:t>
-            </a:r>
-          </a:p>
-          <a:p>
-            <a:r>
-              <a:rPr b="0" sz="1700"/>
-              <a:t>  ア ディナイアブル コンテイナー。 </a:t>
-            </a:r>
-            <a:r>
-              <a:rPr b="1" sz="1700"/>
-              <a:t>ワン ファイル</a:t>
+              <a:t>Remember the name. Demo dot vessel.</a:t>
+            </a:r>
+          </a:p>
+          <a:p>
+            <a:r>
+              <a:rPr b="0" sz="1700"/>
+              <a:t>  リメンバー ザ </a:t>
+            </a:r>
+            <a:r>
+              <a:rPr b="1" sz="1700"/>
+              <a:t>ネイム</a:t>
+            </a:r>
+            <a:r>
+              <a:rPr b="0" sz="1700"/>
+              <a:t>。 </a:t>
+            </a:r>
+            <a:r>
+              <a:rPr b="1" sz="1700"/>
+              <a:t>デモ ドット ベッセル</a:t>
             </a:r>
             <a:r>
               <a:rPr b="0" sz="1700"/>
@@ -5518,213 +5680,13 @@
           <a:p>
             <a:r>
               <a:rPr b="0" sz="1700"/>
-              <a:t>Sixty-four megabytes.</a:t>
-            </a:r>
-          </a:p>
-          <a:p>
-            <a:r>
-              <a:rPr b="0" sz="1700"/>
-              <a:t>  </a:t>
-            </a:r>
-            <a:r>
-              <a:rPr b="1" sz="1700"/>
-              <a:t>シクスティフォー</a:t>
-            </a:r>
-            <a:r>
-              <a:rPr b="0" sz="1700"/>
-              <a:t> メガバイツ。</a:t>
-            </a:r>
-          </a:p>
-          <a:p>
-            <a:r>
-              <a:rPr b="0" sz="1700"/>
-              <a:t>Let me show you what that looks like on disk.</a:t>
-            </a:r>
-          </a:p>
-          <a:p>
-            <a:r>
-              <a:rPr b="0" sz="1700"/>
-              <a:t>  レット ミー ショウ ユー ワット ザット </a:t>
-            </a:r>
-            <a:r>
-              <a:rPr b="1" sz="1700"/>
-              <a:t>ルックス ライク</a:t>
-            </a:r>
-            <a:r>
-              <a:rPr b="0" sz="1700"/>
-              <a:t> オン ディスク。</a:t>
-            </a:r>
-          </a:p>
-          <a:p>
-            <a:r>
-              <a:rPr b="0" sz="1700"/>
-              <a:t>ls — one file. That is all there is.</a:t>
-            </a:r>
-          </a:p>
-          <a:p>
-            <a:r>
-              <a:rPr b="0" sz="1700"/>
-              <a:t>  エルエス — </a:t>
-            </a:r>
-            <a:r>
-              <a:rPr b="1" sz="1700"/>
-              <a:t>ワン ファイル</a:t>
-            </a:r>
-            <a:r>
-              <a:rPr b="0" sz="1700"/>
-              <a:t>。 ザッツ </a:t>
-            </a:r>
-            <a:r>
-              <a:rPr b="1" sz="1700"/>
-              <a:t>オール</a:t>
-            </a:r>
-            <a:r>
-              <a:rPr b="0" sz="1700"/>
-              <a:t> ゼア イズ。</a:t>
-            </a:r>
-          </a:p>
-          <a:p>
-            <a:r>
-              <a:rPr b="0" sz="1700"/>
-              <a:t>file — it says 'data'.</a:t>
-            </a:r>
-          </a:p>
-          <a:p>
-            <a:r>
-              <a:rPr b="0" sz="1700"/>
-              <a:t>  ファイル — イット セズ </a:t>
-            </a:r>
-            <a:r>
-              <a:rPr b="1" sz="1700"/>
-              <a:t>データ</a:t>
-            </a:r>
-            <a:r>
-              <a:rPr b="0" sz="1700"/>
-              <a:t>。</a:t>
-            </a:r>
-          </a:p>
-          <a:p>
-            <a:r>
-              <a:rPr b="0" sz="1700"/>
-              <a:t>It has nothing to say, because there is nothing to read.</a:t>
-            </a:r>
-          </a:p>
-          <a:p>
-            <a:r>
-              <a:rPr b="0" sz="1700"/>
-              <a:t>  イット ハズ </a:t>
-            </a:r>
-            <a:r>
-              <a:rPr b="1" sz="1700"/>
-              <a:t>ナッシング</a:t>
-            </a:r>
-            <a:r>
-              <a:rPr b="0" sz="1700"/>
-              <a:t> トゥ セイ、 ビコーズ ゼアズ </a:t>
-            </a:r>
-            <a:r>
-              <a:rPr b="1" sz="1700"/>
-              <a:t>ナッシング</a:t>
-            </a:r>
-            <a:r>
-              <a:rPr b="0" sz="1700"/>
-              <a:t> トゥ リード。</a:t>
-            </a:r>
-          </a:p>
-          <a:p>
-            <a:r>
-              <a:rPr b="0" sz="1700"/>
-              <a:t>No header. No magic bytes. No format at all.</a:t>
-            </a:r>
-          </a:p>
-          <a:p>
-            <a:r>
-              <a:rPr b="0" sz="1700"/>
-              <a:t>  ノウ </a:t>
-            </a:r>
-            <a:r>
-              <a:rPr b="1" sz="1700"/>
-              <a:t>ヘッダー</a:t>
-            </a:r>
-            <a:r>
-              <a:rPr b="0" sz="1700"/>
-              <a:t>。 ノウ </a:t>
-            </a:r>
-            <a:r>
-              <a:rPr b="1" sz="1700"/>
-              <a:t>マジック バイツ</a:t>
-            </a:r>
-            <a:r>
-              <a:rPr b="0" sz="1700"/>
-              <a:t>。 ノウ フォーマット </a:t>
-            </a:r>
-            <a:r>
-              <a:rPr b="1" sz="1700"/>
-              <a:t>アット オール</a:t>
-            </a:r>
-            <a:r>
-              <a:rPr b="0" sz="1700"/>
-              <a:t>。</a:t>
-            </a:r>
-          </a:p>
-          <a:p>
-            <a:r>
-              <a:rPr b="0" sz="1700"/>
-              <a:t>On disk, this is random.</a:t>
-            </a:r>
-          </a:p>
-          <a:p>
-            <a:r>
-              <a:rPr b="0" sz="1700"/>
-              <a:t>  オン ディスク、 ディス イズ </a:t>
-            </a:r>
-            <a:r>
-              <a:rPr b="1" sz="1700"/>
-              <a:t>ランダム</a:t>
-            </a:r>
-            <a:r>
-              <a:rPr b="0" sz="1700"/>
-              <a:t>。</a:t>
-            </a:r>
-          </a:p>
-          <a:p>
-            <a:r>
-              <a:rPr b="0" sz="1700"/>
-              <a:t>Remember the name. Demo dot vessel.</a:t>
-            </a:r>
-          </a:p>
-          <a:p>
-            <a:r>
-              <a:rPr b="0" sz="1700"/>
-              <a:t>  リメンバー ザ </a:t>
-            </a:r>
-            <a:r>
-              <a:rPr b="1" sz="1700"/>
-              <a:t>ネイム</a:t>
-            </a:r>
-            <a:r>
-              <a:rPr b="0" sz="1700"/>
-              <a:t>。 </a:t>
-            </a:r>
-            <a:r>
-              <a:rPr b="1" sz="1700"/>
-              <a:t>デモ ドット ヴェッセル</a:t>
-            </a:r>
-            <a:r>
-              <a:rPr b="0" sz="1700"/>
-              <a:t>。</a:t>
-            </a:r>
-          </a:p>
-          <a:p>
-            <a:r>
-              <a:rPr b="0" sz="1700"/>
               <a:t>Everything from here comes out of this one file.</a:t>
             </a:r>
           </a:p>
           <a:p>
             <a:r>
               <a:rPr b="0" sz="1700"/>
-              <a:t>  エヴリシング フロム ヒア カムズ アウト オヴ </a:t>
+              <a:t>  エブリシング フロム ヒア カムズ アウト オブ </a:t>
             </a:r>
             <a:r>
               <a:rPr b="1" sz="1700"/>
@@ -5750,6 +5712,12 @@
           <a:p>
             <a:r>
               <a:rPr b="0" sz="1200"/>
+              <a:t>✋ DO — 黙って操作</a:t>
+            </a:r>
+          </a:p>
+          <a:p>
+            <a:r>
+              <a:rPr b="0" sz="1200"/>
               <a:t>DO: スペースを「スライド／ターミナル／ブラウザ」の3つに固定し、Ctrl+←→ だけで移動する。</a:t>
             </a:r>
           </a:p>
@@ -5774,29 +5742,89 @@
           <a:p>
             <a:r>
               <a:rPr b="0" sz="1200"/>
-              <a:t>DO: ブラウザで /unlock を開く（事前にブックマークしておく）</a:t>
+              <a:t>▶ SAY — 止めずに読み切る</a:t>
+            </a:r>
+          </a:p>
+          <a:p>
+            <a:r>
+              <a:rPr b="0" sz="1700"/>
+              <a:t>The device also serves a local web interface.</a:t>
+            </a:r>
+          </a:p>
+          <a:p>
+            <a:r>
+              <a:rPr b="0" sz="1700"/>
+              <a:t>  ザ デバイス オールソー サーブズ ア </a:t>
+            </a:r>
+            <a:r>
+              <a:rPr b="1" sz="1700"/>
+              <a:t>ローカル ウェブ インターフェイス</a:t>
+            </a:r>
+            <a:r>
+              <a:rPr b="0" sz="1700"/>
+              <a:t>。</a:t>
+            </a:r>
+          </a:p>
+          <a:p>
+            <a:r>
+              <a:rPr b="0" sz="1700"/>
+              <a:t>I am logging in now.</a:t>
+            </a:r>
+          </a:p>
+          <a:p>
+            <a:r>
+              <a:rPr b="0" sz="1700"/>
+              <a:t>  アイム </a:t>
+            </a:r>
+            <a:r>
+              <a:rPr b="1" sz="1700"/>
+              <a:t>ロギング イン</a:t>
+            </a:r>
+            <a:r>
+              <a:rPr b="0" sz="1700"/>
+              <a:t> ナウ。</a:t>
             </a:r>
           </a:p>
           <a:p>
             <a:r>
               <a:rPr b="0" sz="1200"/>
-              <a:t>DO: store トークンを入力してログイン</a:t>
-            </a:r>
-          </a:p>
-          <a:p>
-            <a:r>
-              <a:rPr b="0" sz="1700"/>
-              <a:t>The device also serves a local web interface.</a:t>
-            </a:r>
-          </a:p>
-          <a:p>
-            <a:r>
-              <a:rPr b="0" sz="1700"/>
-              <a:t>  ザ デバイス オールソウ サーヴズ ア </a:t>
-            </a:r>
-            <a:r>
-              <a:rPr b="1" sz="1700"/>
-              <a:t>ローカル ウェブ インターフェイス</a:t>
+              <a:t>✋ DO — 黙って操作</a:t>
+            </a:r>
+          </a:p>
+          <a:p>
+            <a:r>
+              <a:rPr b="0" sz="1200"/>
+              <a:t>DO: ブックマークした /unlock で store トークンを入力してログイン</a:t>
+            </a:r>
+          </a:p>
+          <a:p>
+            <a:r>
+              <a:rPr b="0" sz="1200"/>
+              <a:t>▶ THEN — 画面が変わってから</a:t>
+            </a:r>
+          </a:p>
+          <a:p>
+            <a:r>
+              <a:rPr b="0" sz="1700"/>
+              <a:t>One word about these tokens, because it matters.</a:t>
+            </a:r>
+          </a:p>
+          <a:p>
+            <a:r>
+              <a:rPr b="0" sz="1700"/>
+              <a:t>  ワン ワード アバウト ジーズ </a:t>
+            </a:r>
+            <a:r>
+              <a:rPr b="1" sz="1700"/>
+              <a:t>トークンズ</a:t>
+            </a:r>
+            <a:r>
+              <a:rPr b="0" sz="1700"/>
+              <a:t>、 ビコーズ イット </a:t>
+            </a:r>
+            <a:r>
+              <a:rPr b="1" sz="1700"/>
+              <a:t>マターズ</a:t>
             </a:r>
             <a:r>
               <a:rPr b="0" sz="1700"/>
@@ -5806,45 +5834,89 @@
           <a:p>
             <a:r>
               <a:rPr b="0" sz="1700"/>
-              <a:t>I am logging in now.</a:t>
-            </a:r>
-          </a:p>
-          <a:p>
-            <a:r>
-              <a:rPr b="0" sz="1700"/>
-              <a:t>  アイム </a:t>
-            </a:r>
-            <a:r>
-              <a:rPr b="1" sz="1700"/>
-              <a:t>ロギング イン</a:t>
-            </a:r>
-            <a:r>
-              <a:rPr b="0" sz="1700"/>
-              <a:t> ナウ。</a:t>
-            </a:r>
-          </a:p>
-          <a:p>
-            <a:r>
-              <a:rPr b="0" sz="1700"/>
-              <a:t>One word about these tokens, because it matters.</a:t>
-            </a:r>
-          </a:p>
-          <a:p>
-            <a:r>
-              <a:rPr b="0" sz="1700"/>
-              <a:t>  ワン ワード アバウト ジーズ </a:t>
-            </a:r>
-            <a:r>
-              <a:rPr b="1" sz="1700"/>
-              <a:t>トウクンズ</a:t>
-            </a:r>
-            <a:r>
-              <a:rPr b="0" sz="1700"/>
-              <a:t>、 ビコーズ イット </a:t>
-            </a:r>
-            <a:r>
-              <a:rPr b="1" sz="1700"/>
-              <a:t>マターズ</a:t>
+              <a:t>In real use, you issue two of them.</a:t>
+            </a:r>
+          </a:p>
+          <a:p>
+            <a:r>
+              <a:rPr b="0" sz="1700"/>
+              <a:t>  イン リアル ユース、 ユー イシュー </a:t>
+            </a:r>
+            <a:r>
+              <a:rPr b="1" sz="1700"/>
+              <a:t>ツー</a:t>
+            </a:r>
+            <a:r>
+              <a:rPr b="0" sz="1700"/>
+              <a:t> オブ ゼム。</a:t>
+            </a:r>
+          </a:p>
+          <a:p>
+            <a:r>
+              <a:rPr b="0" sz="1700"/>
+              <a:t>A full-control token — used once, somewhere safe, to set things up.</a:t>
+            </a:r>
+          </a:p>
+          <a:p>
+            <a:r>
+              <a:rPr b="0" sz="1700"/>
+              <a:t>  ア </a:t>
+            </a:r>
+            <a:r>
+              <a:rPr b="1" sz="1700"/>
+              <a:t>フルコントロール</a:t>
+            </a:r>
+            <a:r>
+              <a:rPr b="0" sz="1700"/>
+              <a:t> トークン — ユーズド </a:t>
+            </a:r>
+            <a:r>
+              <a:rPr b="1" sz="1700"/>
+              <a:t>ワンス</a:t>
+            </a:r>
+            <a:r>
+              <a:rPr b="0" sz="1700"/>
+              <a:t>、 サムウェア </a:t>
+            </a:r>
+            <a:r>
+              <a:rPr b="1" sz="1700"/>
+              <a:t>セイフ</a:t>
+            </a:r>
+            <a:r>
+              <a:rPr b="0" sz="1700"/>
+              <a:t>、 トゥ セット シングス アップ。</a:t>
+            </a:r>
+          </a:p>
+          <a:p>
+            <a:r>
+              <a:rPr b="0" sz="1700"/>
+              <a:t>And a recovery token, that can decrypt and nothing else.</a:t>
+            </a:r>
+          </a:p>
+          <a:p>
+            <a:r>
+              <a:rPr b="0" sz="1700"/>
+              <a:t>  アンド ア </a:t>
+            </a:r>
+            <a:r>
+              <a:rPr b="1" sz="1700"/>
+              <a:t>リカバリー</a:t>
+            </a:r>
+            <a:r>
+              <a:rPr b="0" sz="1700"/>
+              <a:t> トークン、 ザット キャン </a:t>
+            </a:r>
+            <a:r>
+              <a:rPr b="1" sz="1700"/>
+              <a:t>ディクリプト</a:t>
+            </a:r>
+            <a:r>
+              <a:rPr b="0" sz="1700"/>
+              <a:t> アンド </a:t>
+            </a:r>
+            <a:r>
+              <a:rPr b="1" sz="1700"/>
+              <a:t>ナッシング エルス</a:t>
             </a:r>
             <a:r>
               <a:rPr b="0" sz="1700"/>
@@ -5854,89 +5926,25 @@
           <a:p>
             <a:r>
               <a:rPr b="0" sz="1700"/>
-              <a:t>In real use, you issue two of them.</a:t>
-            </a:r>
-          </a:p>
-          <a:p>
-            <a:r>
-              <a:rPr b="0" sz="1700"/>
-              <a:t>  イン リアル ユース、 ユー イシュー </a:t>
-            </a:r>
-            <a:r>
-              <a:rPr b="1" sz="1700"/>
-              <a:t>トゥー</a:t>
-            </a:r>
-            <a:r>
-              <a:rPr b="0" sz="1700"/>
-              <a:t> オヴ ゼム。</a:t>
-            </a:r>
-          </a:p>
-          <a:p>
-            <a:r>
-              <a:rPr b="0" sz="1700"/>
-              <a:t>A full-control token — used once, somewhere safe, to set things up.</a:t>
-            </a:r>
-          </a:p>
-          <a:p>
-            <a:r>
-              <a:rPr b="0" sz="1700"/>
-              <a:t>  ア </a:t>
-            </a:r>
-            <a:r>
-              <a:rPr b="1" sz="1700"/>
-              <a:t>フルコントロール</a:t>
-            </a:r>
-            <a:r>
-              <a:rPr b="0" sz="1700"/>
-              <a:t> トウクン — ユーズド </a:t>
-            </a:r>
-            <a:r>
-              <a:rPr b="1" sz="1700"/>
-              <a:t>ワンス</a:t>
-            </a:r>
-            <a:r>
-              <a:rPr b="0" sz="1700"/>
-              <a:t>、 サムウェア </a:t>
-            </a:r>
-            <a:r>
-              <a:rPr b="1" sz="1700"/>
-              <a:t>セイフ</a:t>
-            </a:r>
-            <a:r>
-              <a:rPr b="0" sz="1700"/>
-              <a:t>、 トゥ セット シングス アップ。</a:t>
-            </a:r>
-          </a:p>
-          <a:p>
-            <a:r>
-              <a:rPr b="0" sz="1700"/>
-              <a:t>And a recovery token, that can decrypt and nothing else.</a:t>
-            </a:r>
-          </a:p>
-          <a:p>
-            <a:r>
-              <a:rPr b="0" sz="1700"/>
-              <a:t>  アンド ア </a:t>
-            </a:r>
-            <a:r>
-              <a:rPr b="1" sz="1700"/>
-              <a:t>リカヴァリー</a:t>
-            </a:r>
-            <a:r>
-              <a:rPr b="0" sz="1700"/>
-              <a:t> トウクン、 ザット キャン </a:t>
-            </a:r>
-            <a:r>
-              <a:rPr b="1" sz="1700"/>
-              <a:t>ディクリプト</a:t>
-            </a:r>
-            <a:r>
-              <a:rPr b="0" sz="1700"/>
-              <a:t> アンド </a:t>
-            </a:r>
-            <a:r>
-              <a:rPr b="1" sz="1700"/>
-              <a:t>ナッシング エルス</a:t>
+              <a:t>That is the one you carry into a bad situation.</a:t>
+            </a:r>
+          </a:p>
+          <a:p>
+            <a:r>
+              <a:rPr b="0" sz="1700"/>
+              <a:t>  ザッツ ザ ワン ユー </a:t>
+            </a:r>
+            <a:r>
+              <a:rPr b="1" sz="1700"/>
+              <a:t>キャリー</a:t>
+            </a:r>
+            <a:r>
+              <a:rPr b="0" sz="1700"/>
+              <a:t> イントゥ ア </a:t>
+            </a:r>
+            <a:r>
+              <a:rPr b="1" sz="1700"/>
+              <a:t>バッド シチュエイション</a:t>
             </a:r>
             <a:r>
               <a:rPr b="0" sz="1700"/>
@@ -5946,25 +5954,25 @@
           <a:p>
             <a:r>
               <a:rPr b="0" sz="1700"/>
-              <a:t>That is the one you carry into a bad situation.</a:t>
-            </a:r>
-          </a:p>
-          <a:p>
-            <a:r>
-              <a:rPr b="0" sz="1700"/>
-              <a:t>  ザッツ ザ ワン ユー </a:t>
-            </a:r>
-            <a:r>
-              <a:rPr b="1" sz="1700"/>
-              <a:t>キャリー</a:t>
-            </a:r>
-            <a:r>
-              <a:rPr b="0" sz="1700"/>
-              <a:t> イントゥ ア </a:t>
-            </a:r>
-            <a:r>
-              <a:rPr b="1" sz="1700"/>
-              <a:t>バッド シチュエイション</a:t>
+              <a:t>It cannot reach setup, so it cannot give setup away.</a:t>
+            </a:r>
+          </a:p>
+          <a:p>
+            <a:r>
+              <a:rPr b="0" sz="1700"/>
+              <a:t>  イット キャナット </a:t>
+            </a:r>
+            <a:r>
+              <a:rPr b="1" sz="1700"/>
+              <a:t>リーチ</a:t>
+            </a:r>
+            <a:r>
+              <a:rPr b="0" sz="1700"/>
+              <a:t> セットアップ、 ソー イット キャナット </a:t>
+            </a:r>
+            <a:r>
+              <a:rPr b="1" sz="1700"/>
+              <a:t>ギブ イット アウェイ</a:t>
             </a:r>
             <a:r>
               <a:rPr b="0" sz="1700"/>
@@ -5974,34 +5982,6 @@
           <a:p>
             <a:r>
               <a:rPr b="0" sz="1700"/>
-              <a:t>It cannot reach setup, so it cannot give setup away.</a:t>
-            </a:r>
-          </a:p>
-          <a:p>
-            <a:r>
-              <a:rPr b="0" sz="1700"/>
-              <a:t>  イット キャナット </a:t>
-            </a:r>
-            <a:r>
-              <a:rPr b="1" sz="1700"/>
-              <a:t>リーチ</a:t>
-            </a:r>
-            <a:r>
-              <a:rPr b="0" sz="1700"/>
-              <a:t> セットアップ、 ソウ イット キャナット </a:t>
-            </a:r>
-            <a:r>
-              <a:rPr b="1" sz="1700"/>
-              <a:t>ギヴ イット アウェイ</a:t>
-            </a:r>
-            <a:r>
-              <a:rPr b="0" sz="1700"/>
-              <a:t>。</a:t>
-            </a:r>
-          </a:p>
-          <a:p>
-            <a:r>
-              <a:rPr b="0" sz="1700"/>
               <a:t>Today I use one token, for time. Just know the split is there.</a:t>
             </a:r>
           </a:p>
@@ -6016,7 +5996,7 @@
             </a:r>
             <a:r>
               <a:rPr b="0" sz="1700"/>
-              <a:t> トウクン、 フォー </a:t>
+              <a:t> トークン、 フォー </a:t>
             </a:r>
             <a:r>
               <a:rPr b="1" sz="1700"/>
@@ -6024,7 +6004,7 @@
             </a:r>
             <a:r>
               <a:rPr b="0" sz="1700"/>
-              <a:t>。 ジャスト ノウ ザ </a:t>
+              <a:t>。 ジャスト ノー ザ </a:t>
             </a:r>
             <a:r>
               <a:rPr b="1" sz="1700"/>
@@ -6050,55 +6030,165 @@
           <a:p>
             <a:r>
               <a:rPr b="0" sz="1200"/>
-              <a:t>DO: Store 画面 → Step 1「Choose the slot」で Slot A を選択</a:t>
+              <a:t>▶ SAY — 止めずに読み切る</a:t>
+            </a:r>
+          </a:p>
+          <a:p>
+            <a:r>
+              <a:rPr b="0" sz="1700"/>
+              <a:t>Slot A. This is the file I would hand over.</a:t>
+            </a:r>
+          </a:p>
+          <a:p>
+            <a:r>
+              <a:rPr b="0" sz="1700"/>
+              <a:t>  </a:t>
+            </a:r>
+            <a:r>
+              <a:rPr b="1" sz="1700"/>
+              <a:t>スロット エイ</a:t>
+            </a:r>
+            <a:r>
+              <a:rPr b="0" sz="1700"/>
+              <a:t>。 ディス イズ ザ ファイル アイ ウド </a:t>
+            </a:r>
+            <a:r>
+              <a:rPr b="1" sz="1700"/>
+              <a:t>ハンド オーバー</a:t>
+            </a:r>
+            <a:r>
+              <a:rPr b="0" sz="1700"/>
+              <a:t>。</a:t>
+            </a:r>
+          </a:p>
+          <a:p>
+            <a:r>
+              <a:rPr b="0" sz="1700"/>
+              <a:t>Now watch the camera. It takes two shots.</a:t>
+            </a:r>
+          </a:p>
+          <a:p>
+            <a:r>
+              <a:rPr b="0" sz="1700"/>
+              <a:t>  ナウ ウォッチ ザ カメラ。 イット テイクス </a:t>
+            </a:r>
+            <a:r>
+              <a:rPr b="1" sz="1700"/>
+              <a:t>ツー ショッツ</a:t>
+            </a:r>
+            <a:r>
+              <a:rPr b="0" sz="1700"/>
+              <a:t>。</a:t>
+            </a:r>
+          </a:p>
+          <a:p>
+            <a:r>
+              <a:rPr b="0" sz="1700"/>
+              <a:t>First the empty scene — just my table. Then the same view, with the object in it.</a:t>
+            </a:r>
+          </a:p>
+          <a:p>
+            <a:r>
+              <a:rPr b="0" sz="1700"/>
+              <a:t>  ファースト ジ </a:t>
+            </a:r>
+            <a:r>
+              <a:rPr b="1" sz="1700"/>
+              <a:t>エンプティ シーン</a:t>
+            </a:r>
+            <a:r>
+              <a:rPr b="0" sz="1700"/>
+              <a:t> — ジャスト マイ </a:t>
+            </a:r>
+            <a:r>
+              <a:rPr b="1" sz="1700"/>
+              <a:t>テイブル</a:t>
+            </a:r>
+            <a:r>
+              <a:rPr b="0" sz="1700"/>
+              <a:t>。 ゼン ザ </a:t>
+            </a:r>
+            <a:r>
+              <a:rPr b="1" sz="1700"/>
+              <a:t>セイム ビュー</a:t>
+            </a:r>
+            <a:r>
+              <a:rPr b="0" sz="1700"/>
+              <a:t>、 ウィズ ジ </a:t>
+            </a:r>
+            <a:r>
+              <a:rPr b="1" sz="1700"/>
+              <a:t>オブジェクト</a:t>
+            </a:r>
+            <a:r>
+              <a:rPr b="0" sz="1700"/>
+              <a:t> イン イット。</a:t>
             </a:r>
           </a:p>
           <a:p>
             <a:r>
               <a:rPr b="0" sz="1200"/>
-              <a:t>DO: → 偽装用ファイルを選択 → パスワードA を入力</a:t>
+              <a:t>✋ DO — 黙って操作</a:t>
             </a:r>
           </a:p>
           <a:p>
             <a:r>
               <a:rPr b="0" sz="1200"/>
-              <a:t>DO: → 物体を手元に置いたまま「1 · Capture empty scene」</a:t>
+              <a:t>DO: Store → Step 1「Choose the slot」で Slot A → 偽装用ファイル → パスワードA</a:t>
             </a:r>
           </a:p>
           <a:p>
             <a:r>
               <a:rPr b="0" sz="1200"/>
-              <a:t>DO: → 物体A をかざして「2 · Capture access object」</a:t>
+              <a:t>DO: → 物体を外して「1 · Capture empty scene」</a:t>
             </a:r>
           </a:p>
           <a:p>
             <a:r>
               <a:rPr b="0" sz="1200"/>
-              <a:t>DO: → かざしたまま「Protect file」</a:t>
-            </a:r>
-          </a:p>
-          <a:p>
-            <a:r>
-              <a:rPr b="0" sz="1700"/>
-              <a:t>Slot A. This is the file I would hand over.</a:t>
-            </a:r>
-          </a:p>
-          <a:p>
-            <a:r>
-              <a:rPr b="0" sz="1700"/>
-              <a:t>  </a:t>
-            </a:r>
-            <a:r>
-              <a:rPr b="1" sz="1700"/>
-              <a:t>スロット エイ</a:t>
-            </a:r>
-            <a:r>
-              <a:rPr b="0" sz="1700"/>
-              <a:t>。 ディス イズ ザ ファイル アイ ウッド </a:t>
-            </a:r>
-            <a:r>
-              <a:rPr b="1" sz="1700"/>
-              <a:t>ハンド オーヴァー</a:t>
+              <a:t>DO: → 物体A をかざして「2 · Capture access object」→ かざしたまま「Protect file」</a:t>
+            </a:r>
+          </a:p>
+          <a:p>
+            <a:r>
+              <a:rPr b="0" sz="1200"/>
+              <a:t>▶ THEN — 画面が変わってから</a:t>
+            </a:r>
+          </a:p>
+          <a:p>
+            <a:r>
+              <a:rPr b="0" sz="1700"/>
+              <a:t>The device keeps the difference between them.</a:t>
+            </a:r>
+          </a:p>
+          <a:p>
+            <a:r>
+              <a:rPr b="0" sz="1700"/>
+              <a:t>  ザ デバイス キープス ザ </a:t>
+            </a:r>
+            <a:r>
+              <a:rPr b="1" sz="1700"/>
+              <a:t>ディファレンス</a:t>
+            </a:r>
+            <a:r>
+              <a:rPr b="0" sz="1700"/>
+              <a:t> ビトウィーン ゼム。</a:t>
+            </a:r>
+          </a:p>
+          <a:p>
+            <a:r>
+              <a:rPr b="0" sz="1700"/>
+              <a:t>Not my table. Not the room. The object.</a:t>
+            </a:r>
+          </a:p>
+          <a:p>
+            <a:r>
+              <a:rPr b="0" sz="1700"/>
+              <a:t>  ナット マイ テイブル。 ナット ザ ルーム。 </a:t>
+            </a:r>
+            <a:r>
+              <a:rPr b="1" sz="1700"/>
+              <a:t>ジ オブジェクト</a:t>
             </a:r>
             <a:r>
               <a:rPr b="0" sz="1700"/>
@@ -6108,17 +6198,25 @@
           <a:p>
             <a:r>
               <a:rPr b="0" sz="1700"/>
-              <a:t>Now watch the camera. It takes two shots.</a:t>
-            </a:r>
-          </a:p>
-          <a:p>
-            <a:r>
-              <a:rPr b="0" sz="1700"/>
-              <a:t>  ナウ ウォッチ ザ カメラ。 イット テイクス </a:t>
-            </a:r>
-            <a:r>
-              <a:rPr b="1" sz="1700"/>
-              <a:t>トゥー ショッツ</a:t>
+              <a:t>And this is a cue, not a key.</a:t>
+            </a:r>
+          </a:p>
+          <a:p>
+            <a:r>
+              <a:rPr b="0" sz="1700"/>
+              <a:t>  アンド ディス イズ ア </a:t>
+            </a:r>
+            <a:r>
+              <a:rPr b="1" sz="1700"/>
+              <a:t>キュー</a:t>
+            </a:r>
+            <a:r>
+              <a:rPr b="0" sz="1700"/>
+              <a:t>、 ナット ア </a:t>
+            </a:r>
+            <a:r>
+              <a:rPr b="1" sz="1700"/>
+              <a:t>キー</a:t>
             </a:r>
             <a:r>
               <a:rPr b="0" sz="1700"/>
@@ -6128,25 +6226,25 @@
           <a:p>
             <a:r>
               <a:rPr b="0" sz="1700"/>
-              <a:t>First, the empty scene. Just my table.</a:t>
-            </a:r>
-          </a:p>
-          <a:p>
-            <a:r>
-              <a:rPr b="0" sz="1700"/>
-              <a:t>  ファースト、 ジ </a:t>
-            </a:r>
-            <a:r>
-              <a:rPr b="1" sz="1700"/>
-              <a:t>エンプティ シーン</a:t>
-            </a:r>
-            <a:r>
-              <a:rPr b="0" sz="1700"/>
-              <a:t>。 ジャスト マイ </a:t>
-            </a:r>
-            <a:r>
-              <a:rPr b="1" sz="1700"/>
-              <a:t>テイブル</a:t>
+              <a:t>It does not encrypt anything. It decides whether the operation may start.</a:t>
+            </a:r>
+          </a:p>
+          <a:p>
+            <a:r>
+              <a:rPr b="0" sz="1700"/>
+              <a:t>  イット ダズ ナット </a:t>
+            </a:r>
+            <a:r>
+              <a:rPr b="1" sz="1700"/>
+              <a:t>エンクリプト</a:t>
+            </a:r>
+            <a:r>
+              <a:rPr b="0" sz="1700"/>
+              <a:t> エニシング。 イット ディサイズ ウェザー ジ オペレイション </a:t>
+            </a:r>
+            <a:r>
+              <a:rPr b="1" sz="1700"/>
+              <a:t>メイ スタート</a:t>
             </a:r>
             <a:r>
               <a:rPr b="0" sz="1700"/>
@@ -6156,143 +6254,7 @@
           <a:p>
             <a:r>
               <a:rPr b="0" sz="1700"/>
-              <a:t>Then the same view, with the object in it.</a:t>
-            </a:r>
-          </a:p>
-          <a:p>
-            <a:r>
-              <a:rPr b="0" sz="1700"/>
-              <a:t>  ゼン ザ </a:t>
-            </a:r>
-            <a:r>
-              <a:rPr b="1" sz="1700"/>
-              <a:t>セイム ヴュー</a:t>
-            </a:r>
-            <a:r>
-              <a:rPr b="0" sz="1700"/>
-              <a:t>、 ウィズ ジ </a:t>
-            </a:r>
-            <a:r>
-              <a:rPr b="1" sz="1700"/>
-              <a:t>オブジェクト</a:t>
-            </a:r>
-            <a:r>
-              <a:rPr b="0" sz="1700"/>
-              <a:t> イン イット。</a:t>
-            </a:r>
-          </a:p>
-          <a:p>
-            <a:r>
-              <a:rPr b="0" sz="1700"/>
-              <a:t>The device keeps the difference between them.</a:t>
-            </a:r>
-          </a:p>
-          <a:p>
-            <a:r>
-              <a:rPr b="0" sz="1700"/>
-              <a:t>  ザ デバイス キープス ザ </a:t>
-            </a:r>
-            <a:r>
-              <a:rPr b="1" sz="1700"/>
-              <a:t>ディファレンス</a:t>
-            </a:r>
-            <a:r>
-              <a:rPr b="0" sz="1700"/>
-              <a:t> ビトウィーン ゼム。</a:t>
-            </a:r>
-          </a:p>
-          <a:p>
-            <a:r>
-              <a:rPr b="0" sz="1700"/>
-              <a:t>Not my table. Not the room. The object.</a:t>
-            </a:r>
-          </a:p>
-          <a:p>
-            <a:r>
-              <a:rPr b="0" sz="1700"/>
-              <a:t>  ナット マイ テイブル。 ナット ザ ルーム。 </a:t>
-            </a:r>
-            <a:r>
-              <a:rPr b="1" sz="1700"/>
-              <a:t>ジ オブジェクト</a:t>
-            </a:r>
-            <a:r>
-              <a:rPr b="0" sz="1700"/>
-              <a:t>。</a:t>
-            </a:r>
-          </a:p>
-          <a:p>
-            <a:r>
-              <a:rPr b="0" sz="1700"/>
-              <a:t>And this is a cue, not a key.</a:t>
-            </a:r>
-          </a:p>
-          <a:p>
-            <a:r>
-              <a:rPr b="0" sz="1700"/>
-              <a:t>  アンド ディス イズ ア </a:t>
-            </a:r>
-            <a:r>
-              <a:rPr b="1" sz="1700"/>
-              <a:t>キュー</a:t>
-            </a:r>
-            <a:r>
-              <a:rPr b="0" sz="1700"/>
-              <a:t>、 ナット ア </a:t>
-            </a:r>
-            <a:r>
-              <a:rPr b="1" sz="1700"/>
-              <a:t>キー</a:t>
-            </a:r>
-            <a:r>
-              <a:rPr b="0" sz="1700"/>
-              <a:t>。</a:t>
-            </a:r>
-          </a:p>
-          <a:p>
-            <a:r>
-              <a:rPr b="0" sz="1700"/>
-              <a:t>It does not encrypt anything.</a:t>
-            </a:r>
-          </a:p>
-          <a:p>
-            <a:r>
-              <a:rPr b="0" sz="1700"/>
-              <a:t>  イット ダズ ナット </a:t>
-            </a:r>
-            <a:r>
-              <a:rPr b="1" sz="1700"/>
-              <a:t>エンクリプト</a:t>
-            </a:r>
-            <a:r>
-              <a:rPr b="0" sz="1700"/>
-              <a:t> エニシング。</a:t>
-            </a:r>
-          </a:p>
-          <a:p>
-            <a:r>
-              <a:rPr b="0" sz="1700"/>
-              <a:t>It decides whether the operation may start at all.</a:t>
-            </a:r>
-          </a:p>
-          <a:p>
-            <a:r>
-              <a:rPr b="0" sz="1700"/>
-              <a:t>  イット ディサイズ ウェザー ジ オペレイション </a:t>
-            </a:r>
-            <a:r>
-              <a:rPr b="1" sz="1700"/>
-              <a:t>メイ スタート</a:t>
-            </a:r>
-            <a:r>
-              <a:rPr b="0" sz="1700"/>
-              <a:t> アット オール。</a:t>
-            </a:r>
-          </a:p>
-          <a:p>
-            <a:r>
-              <a:rPr b="0" sz="1700"/>
-              <a:t>A photograph of it opens nothing.</a:t>
+              <a:t>A photo of it opens nothing.</a:t>
             </a:r>
           </a:p>
           <a:p>
@@ -6302,11 +6264,11 @@
             </a:r>
             <a:r>
               <a:rPr b="1" sz="1700"/>
-              <a:t>フォトグラフ</a:t>
-            </a:r>
-            <a:r>
-              <a:rPr b="0" sz="1700"/>
-              <a:t> オヴ イット オウプンズ </a:t>
+              <a:t>フォト</a:t>
+            </a:r>
+            <a:r>
+              <a:rPr b="0" sz="1700"/>
+              <a:t> オブ イット オープンズ </a:t>
             </a:r>
             <a:r>
               <a:rPr b="1" sz="1700"/>
@@ -6332,7 +6294,139 @@
           <a:p>
             <a:r>
               <a:rPr b="0" sz="1200"/>
-              <a:t>DO: Step 1 を Slot B に切り替え → 真のファイルを選択 → パスワードB を入力</a:t>
+              <a:t>▶ SAY — 止めずに読み切る</a:t>
+            </a:r>
+          </a:p>
+          <a:p>
+            <a:r>
+              <a:rPr b="0" sz="1700"/>
+              <a:t>Slot B. Same file on disk. Same demo dot vessel.</a:t>
+            </a:r>
+          </a:p>
+          <a:p>
+            <a:r>
+              <a:rPr b="0" sz="1700"/>
+              <a:t>  </a:t>
+            </a:r>
+            <a:r>
+              <a:rPr b="1" sz="1700"/>
+              <a:t>スロット ビー</a:t>
+            </a:r>
+            <a:r>
+              <a:rPr b="0" sz="1700"/>
+              <a:t>。 セイム ファイル オン ディスク。 セイム </a:t>
+            </a:r>
+            <a:r>
+              <a:rPr b="1" sz="1700"/>
+              <a:t>デモ ドット ベッセル</a:t>
+            </a:r>
+            <a:r>
+              <a:rPr b="0" sz="1700"/>
+              <a:t>。</a:t>
+            </a:r>
+          </a:p>
+          <a:p>
+            <a:r>
+              <a:rPr b="0" sz="1700"/>
+              <a:t>A different object. A different password.</a:t>
+            </a:r>
+          </a:p>
+          <a:p>
+            <a:r>
+              <a:rPr b="0" sz="1700"/>
+              <a:t>  ア ディファレント </a:t>
+            </a:r>
+            <a:r>
+              <a:rPr b="1" sz="1700"/>
+              <a:t>オブジェクト</a:t>
+            </a:r>
+            <a:r>
+              <a:rPr b="0" sz="1700"/>
+              <a:t>。 ア ディファレント </a:t>
+            </a:r>
+            <a:r>
+              <a:rPr b="1" sz="1700"/>
+              <a:t>パスワード</a:t>
+            </a:r>
+            <a:r>
+              <a:rPr b="0" sz="1700"/>
+              <a:t>。</a:t>
+            </a:r>
+          </a:p>
+          <a:p>
+            <a:r>
+              <a:rPr b="0" sz="1700"/>
+              <a:t>And one more thing, which I will use later — a second password for this slot.</a:t>
+            </a:r>
+          </a:p>
+          <a:p>
+            <a:r>
+              <a:rPr b="0" sz="1700"/>
+              <a:t>  アンド </a:t>
+            </a:r>
+            <a:r>
+              <a:rPr b="1" sz="1700"/>
+              <a:t>ワン モア シング</a:t>
+            </a:r>
+            <a:r>
+              <a:rPr b="0" sz="1700"/>
+              <a:t>、 ウィッチ アイル </a:t>
+            </a:r>
+            <a:r>
+              <a:rPr b="1" sz="1700"/>
+              <a:t>ユーズ レイター</a:t>
+            </a:r>
+            <a:r>
+              <a:rPr b="0" sz="1700"/>
+              <a:t> — ア </a:t>
+            </a:r>
+            <a:r>
+              <a:rPr b="1" sz="1700"/>
+              <a:t>セカンド パスワード</a:t>
+            </a:r>
+            <a:r>
+              <a:rPr b="0" sz="1700"/>
+              <a:t> フォー ディス スロット。</a:t>
+            </a:r>
+          </a:p>
+          <a:p>
+            <a:r>
+              <a:rPr b="0" sz="1700"/>
+              <a:t>Not one that opens it.</a:t>
+            </a:r>
+          </a:p>
+          <a:p>
+            <a:r>
+              <a:rPr b="0" sz="1700"/>
+              <a:t>  </a:t>
+            </a:r>
+            <a:r>
+              <a:rPr b="1" sz="1700"/>
+              <a:t>ナット</a:t>
+            </a:r>
+            <a:r>
+              <a:rPr b="0" sz="1700"/>
+              <a:t> ワン ザット </a:t>
+            </a:r>
+            <a:r>
+              <a:rPr b="1" sz="1700"/>
+              <a:t>オープンズ</a:t>
+            </a:r>
+            <a:r>
+              <a:rPr b="0" sz="1700"/>
+              <a:t> イット。</a:t>
+            </a:r>
+          </a:p>
+          <a:p>
+            <a:r>
+              <a:rPr b="0" sz="1200"/>
+              <a:t>✋ DO — 黙って操作</a:t>
+            </a:r>
+          </a:p>
+          <a:p>
+            <a:r>
+              <a:rPr b="0" sz="1200"/>
+              <a:t>DO: Step 1 を Slot B → 真のファイル → パスワードB</a:t>
             </a:r>
           </a:p>
           <a:p>
@@ -6344,151 +6438,13 @@
           <a:p>
             <a:r>
               <a:rPr b="0" sz="1200"/>
-              <a:t>DO: → 物体を外して「1 · Capture empty scene」</a:t>
+              <a:t>DO: → 物体を外して空シーン → 物体B をかざして撮影 → かざしたまま「Protect file」</a:t>
             </a:r>
           </a:p>
           <a:p>
             <a:r>
               <a:rPr b="0" sz="1200"/>
-              <a:t>DO: → 物体B をかざして「2 · Capture access object」</a:t>
-            </a:r>
-          </a:p>
-          <a:p>
-            <a:r>
-              <a:rPr b="0" sz="1200"/>
-              <a:t>DO: → かざしたまま「Protect file」</a:t>
-            </a:r>
-          </a:p>
-          <a:p>
-            <a:r>
-              <a:rPr b="0" sz="1700"/>
-              <a:t>Slot B. Same file on disk. Same demo dot vessel.</a:t>
-            </a:r>
-          </a:p>
-          <a:p>
-            <a:r>
-              <a:rPr b="0" sz="1700"/>
-              <a:t>  </a:t>
-            </a:r>
-            <a:r>
-              <a:rPr b="1" sz="1700"/>
-              <a:t>スロット ビー</a:t>
-            </a:r>
-            <a:r>
-              <a:rPr b="0" sz="1700"/>
-              <a:t>。 セイム ファイル オン ディスク。 セイム </a:t>
-            </a:r>
-            <a:r>
-              <a:rPr b="1" sz="1700"/>
-              <a:t>デモ ドット ヴェッセル</a:t>
-            </a:r>
-            <a:r>
-              <a:rPr b="0" sz="1700"/>
-              <a:t>。</a:t>
-            </a:r>
-          </a:p>
-          <a:p>
-            <a:r>
-              <a:rPr b="0" sz="1700"/>
-              <a:t>A different object. A different password.</a:t>
-            </a:r>
-          </a:p>
-          <a:p>
-            <a:r>
-              <a:rPr b="0" sz="1700"/>
-              <a:t>  ア ディファレント </a:t>
-            </a:r>
-            <a:r>
-              <a:rPr b="1" sz="1700"/>
-              <a:t>オブジェクト</a:t>
-            </a:r>
-            <a:r>
-              <a:rPr b="0" sz="1700"/>
-              <a:t>。 ア ディファレント </a:t>
-            </a:r>
-            <a:r>
-              <a:rPr b="1" sz="1700"/>
-              <a:t>パスワード</a:t>
-            </a:r>
-            <a:r>
-              <a:rPr b="0" sz="1700"/>
-              <a:t>。</a:t>
-            </a:r>
-          </a:p>
-          <a:p>
-            <a:r>
-              <a:rPr b="0" sz="1700"/>
-              <a:t>And one more thing here, which I will use later.</a:t>
-            </a:r>
-          </a:p>
-          <a:p>
-            <a:r>
-              <a:rPr b="0" sz="1700"/>
-              <a:t>  アンド </a:t>
-            </a:r>
-            <a:r>
-              <a:rPr b="1" sz="1700"/>
-              <a:t>ワン モア シング</a:t>
-            </a:r>
-            <a:r>
-              <a:rPr b="0" sz="1700"/>
-              <a:t> ヒア、 ウィッチ アイル </a:t>
-            </a:r>
-            <a:r>
-              <a:rPr b="1" sz="1700"/>
-              <a:t>ユーズ レイター</a:t>
-            </a:r>
-            <a:r>
-              <a:rPr b="0" sz="1700"/>
-              <a:t>。</a:t>
-            </a:r>
-          </a:p>
-          <a:p>
-            <a:r>
-              <a:rPr b="0" sz="1700"/>
-              <a:t>A second password for this slot.</a:t>
-            </a:r>
-          </a:p>
-          <a:p>
-            <a:r>
-              <a:rPr b="0" sz="1700"/>
-              <a:t>  ア </a:t>
-            </a:r>
-            <a:r>
-              <a:rPr b="1" sz="1700"/>
-              <a:t>セカンド パスワード</a:t>
-            </a:r>
-            <a:r>
-              <a:rPr b="0" sz="1700"/>
-              <a:t> フォー ディス スロット。</a:t>
-            </a:r>
-          </a:p>
-          <a:p>
-            <a:r>
-              <a:rPr b="0" sz="1700"/>
-              <a:t>Not one that opens it.</a:t>
-            </a:r>
-          </a:p>
-          <a:p>
-            <a:r>
-              <a:rPr b="0" sz="1700"/>
-              <a:t>  </a:t>
-            </a:r>
-            <a:r>
-              <a:rPr b="1" sz="1700"/>
-              <a:t>ナット</a:t>
-            </a:r>
-            <a:r>
-              <a:rPr b="0" sz="1700"/>
-              <a:t> ワン ザット </a:t>
-            </a:r>
-            <a:r>
-              <a:rPr b="1" sz="1700"/>
-              <a:t>オウプンズ</a:t>
-            </a:r>
-            <a:r>
-              <a:rPr b="0" sz="1700"/>
-              <a:t> イット。</a:t>
+              <a:t>▶ THEN — 画面が変わってから</a:t>
             </a:r>
           </a:p>
           <a:p>
@@ -6500,7 +6456,7 @@
           <a:p>
             <a:r>
               <a:rPr b="0" sz="1700"/>
-              <a:t>  ボウス スロッツ ナウ リヴ </a:t>
+              <a:t>  ボース スロッツ ナウ リブ </a:t>
             </a:r>
             <a:r>
               <a:rPr b="1" sz="1700"/>
@@ -6534,53 +6490,59 @@
           <a:p>
             <a:r>
               <a:rPr b="0" sz="1200"/>
-              <a:t>DO: Retrieve 画面 → 物体A をかざす → 一致表示を待つ</a:t>
+              <a:t>▶ SAY — 止めずに読み切る</a:t>
+            </a:r>
+          </a:p>
+          <a:p>
+            <a:r>
+              <a:rPr b="0" sz="1700"/>
+              <a:t>Object A. Password A.</a:t>
+            </a:r>
+          </a:p>
+          <a:p>
+            <a:r>
+              <a:rPr b="0" sz="1700"/>
+              <a:t>  </a:t>
+            </a:r>
+            <a:r>
+              <a:rPr b="1" sz="1700"/>
+              <a:t>オブジェクト エイ</a:t>
+            </a:r>
+            <a:r>
+              <a:rPr b="0" sz="1700"/>
+              <a:t>。 </a:t>
+            </a:r>
+            <a:r>
+              <a:rPr b="1" sz="1700"/>
+              <a:t>パスワード エイ</a:t>
+            </a:r>
+            <a:r>
+              <a:rPr b="0" sz="1700"/>
+              <a:t>。</a:t>
             </a:r>
           </a:p>
           <a:p>
             <a:r>
               <a:rPr b="0" sz="1200"/>
-              <a:t>DO: → パスワードA → Open protected file</a:t>
+              <a:t>✋ DO — 黙って操作</a:t>
             </a:r>
           </a:p>
           <a:p>
             <a:r>
               <a:rPr b="0" sz="1200"/>
-              <a:t>DO: → 落ちてきたファイルを開いて中身を見せる</a:t>
-            </a:r>
-          </a:p>
-          <a:p>
-            <a:r>
-              <a:rPr b="0" sz="1700"/>
-              <a:t>Object A. Password A.</a:t>
-            </a:r>
-          </a:p>
-          <a:p>
-            <a:r>
-              <a:rPr b="0" sz="1700"/>
-              <a:t>  </a:t>
-            </a:r>
-            <a:r>
-              <a:rPr b="1" sz="1700"/>
-              <a:t>オブジェクト エイ</a:t>
-            </a:r>
-            <a:r>
-              <a:rPr b="0" sz="1700"/>
-              <a:t>。 </a:t>
-            </a:r>
-            <a:r>
-              <a:rPr b="1" sz="1700"/>
-              <a:t>パスワード エイ</a:t>
-            </a:r>
-            <a:r>
-              <a:rPr b="0" sz="1700"/>
-              <a:t>。</a:t>
-            </a:r>
-          </a:p>
-          <a:p>
-            <a:r>
-              <a:rPr b="0" sz="1700"/>
-              <a:t>And there it is.</a:t>
+              <a:t>DO: Retrieve → 物体A → 一致表示を待つ → パスワードA → Open protected file → 中身を見せる</a:t>
+            </a:r>
+          </a:p>
+          <a:p>
+            <a:r>
+              <a:rPr b="0" sz="1200"/>
+              <a:t>▶ THEN — 画面が変わってから</a:t>
+            </a:r>
+          </a:p>
+          <a:p>
+            <a:r>
+              <a:rPr b="0" sz="1700"/>
+              <a:t>And there it is. That is Slot A, out of demo dot vessel.</a:t>
             </a:r>
           </a:p>
           <a:p>
@@ -6594,19 +6556,7 @@
             </a:r>
             <a:r>
               <a:rPr b="0" sz="1700"/>
-              <a:t>。</a:t>
-            </a:r>
-          </a:p>
-          <a:p>
-            <a:r>
-              <a:rPr b="0" sz="1700"/>
-              <a:t>That is Slot A, out of demo dot vessel.</a:t>
-            </a:r>
-          </a:p>
-          <a:p>
-            <a:r>
-              <a:rPr b="0" sz="1700"/>
-              <a:t>  ザッツ </a:t>
+              <a:t>。 ザッツ </a:t>
             </a:r>
             <a:r>
               <a:rPr b="1" sz="1700"/>
@@ -6614,11 +6564,11 @@
             </a:r>
             <a:r>
               <a:rPr b="0" sz="1700"/>
-              <a:t>、 アウト オヴ </a:t>
-            </a:r>
-            <a:r>
-              <a:rPr b="1" sz="1700"/>
-              <a:t>デモ ドット ヴェッセル</a:t>
+              <a:t>、 アウト オブ </a:t>
+            </a:r>
+            <a:r>
+              <a:rPr b="1" sz="1700"/>
+              <a:t>デモ ドット ベッセル</a:t>
             </a:r>
             <a:r>
               <a:rPr b="0" sz="1700"/>
@@ -6640,31 +6590,87 @@
           <a:p>
             <a:r>
               <a:rPr b="0" sz="1200"/>
-              <a:t>DO: 同じ Retrieve 画面のまま、物体B に持ち替える → 一致表示を待つ（待たずに押すと拒否される）</a:t>
+              <a:t>▶ SAY (1/2) — 止めずに読み切る</a:t>
+            </a:r>
+          </a:p>
+          <a:p>
+            <a:r>
+              <a:rPr b="0" sz="1700"/>
+              <a:t>Same screen. I have only changed the object.</a:t>
+            </a:r>
+          </a:p>
+          <a:p>
+            <a:r>
+              <a:rPr b="0" sz="1700"/>
+              <a:t>  </a:t>
+            </a:r>
+            <a:r>
+              <a:rPr b="1" sz="1700"/>
+              <a:t>セイム スクリーン</a:t>
+            </a:r>
+            <a:r>
+              <a:rPr b="0" sz="1700"/>
+              <a:t>。 アイブ </a:t>
+            </a:r>
+            <a:r>
+              <a:rPr b="1" sz="1700"/>
+              <a:t>オンリー</a:t>
+            </a:r>
+            <a:r>
+              <a:rPr b="0" sz="1700"/>
+              <a:t> チェインジド ジ オブジェクト。</a:t>
+            </a:r>
+          </a:p>
+          <a:p>
+            <a:r>
+              <a:rPr b="0" sz="1700"/>
+              <a:t>This is the object for Slot B — and I will type Slot A's password.</a:t>
+            </a:r>
+          </a:p>
+          <a:p>
+            <a:r>
+              <a:rPr b="0" sz="1700"/>
+              <a:t>  ディス イズ ジ オブジェクト フォー </a:t>
+            </a:r>
+            <a:r>
+              <a:rPr b="1" sz="1700"/>
+              <a:t>スロット ビー</a:t>
+            </a:r>
+            <a:r>
+              <a:rPr b="0" sz="1700"/>
+              <a:t> — アンド アイル タイプ </a:t>
+            </a:r>
+            <a:r>
+              <a:rPr b="1" sz="1700"/>
+              <a:t>スロット エイズ</a:t>
+            </a:r>
+            <a:r>
+              <a:rPr b="0" sz="1700"/>
+              <a:t> パスワード。</a:t>
             </a:r>
           </a:p>
           <a:p>
             <a:r>
               <a:rPr b="0" sz="1200"/>
-              <a:t>DO: → まず パスワードA を入力 → Open protected file → 失敗</a:t>
+              <a:t>✋ DO (1/2) — 黙って操作</a:t>
             </a:r>
           </a:p>
           <a:p>
             <a:r>
               <a:rPr b="0" sz="1200"/>
-              <a:t>DO: → 続けて パスワードB を入力 → Open protected file → 成功</a:t>
+              <a:t>DO: 物体B に持ち替え → 一致表示を待つ → パスワードA → Open protected file</a:t>
             </a:r>
           </a:p>
           <a:p>
             <a:r>
               <a:rPr b="0" sz="1200"/>
-              <a:t>DO: → 落ちてきたファイルを開いて、SCENE 5 と中身が違うことを見せる</a:t>
-            </a:r>
-          </a:p>
-          <a:p>
-            <a:r>
-              <a:rPr b="0" sz="1700"/>
-              <a:t>Same screen. I have only changed the object.</a:t>
+              <a:t>▶ THEN (1/2) — 画面が変わってから</a:t>
+            </a:r>
+          </a:p>
+          <a:p>
+            <a:r>
+              <a:rPr b="0" sz="1700"/>
+              <a:t>No valid entry found.</a:t>
             </a:r>
           </a:p>
           <a:p>
@@ -6674,35 +6680,7 @@
             </a:r>
             <a:r>
               <a:rPr b="1" sz="1700"/>
-              <a:t>セイム スクリーン</a:t>
-            </a:r>
-            <a:r>
-              <a:rPr b="0" sz="1700"/>
-              <a:t>。 アイヴ </a:t>
-            </a:r>
-            <a:r>
-              <a:rPr b="1" sz="1700"/>
-              <a:t>オンリー</a:t>
-            </a:r>
-            <a:r>
-              <a:rPr b="0" sz="1700"/>
-              <a:t> チェインジド ジ オブジェクト。</a:t>
-            </a:r>
-          </a:p>
-          <a:p>
-            <a:r>
-              <a:rPr b="0" sz="1700"/>
-              <a:t>This is the object for Slot B.</a:t>
-            </a:r>
-          </a:p>
-          <a:p>
-            <a:r>
-              <a:rPr b="0" sz="1700"/>
-              <a:t>  ディス イズ ジ オブジェクト フォー </a:t>
-            </a:r>
-            <a:r>
-              <a:rPr b="1" sz="1700"/>
-              <a:t>スロット ビー</a:t>
+              <a:t>ノー バリッド エントリー ファウンド</a:t>
             </a:r>
             <a:r>
               <a:rPr b="0" sz="1700"/>
@@ -6712,17 +6690,59 @@
           <a:p>
             <a:r>
               <a:rPr b="0" sz="1700"/>
-              <a:t>And I will type Slot A's password.</a:t>
-            </a:r>
-          </a:p>
-          <a:p>
-            <a:r>
-              <a:rPr b="0" sz="1700"/>
-              <a:t>  アンド アイル タイプ </a:t>
-            </a:r>
-            <a:r>
-              <a:rPr b="1" sz="1700"/>
-              <a:t>スロット エイズ</a:t>
+              <a:t>The object is right. The password is not. Nothing opens.</a:t>
+            </a:r>
+          </a:p>
+          <a:p>
+            <a:r>
+              <a:rPr b="0" sz="1700"/>
+              <a:t>  ジ オブジェクト イズ </a:t>
+            </a:r>
+            <a:r>
+              <a:rPr b="1" sz="1700"/>
+              <a:t>ライト</a:t>
+            </a:r>
+            <a:r>
+              <a:rPr b="0" sz="1700"/>
+              <a:t>。 ザ パスワード イズ </a:t>
+            </a:r>
+            <a:r>
+              <a:rPr b="1" sz="1700"/>
+              <a:t>ナット</a:t>
+            </a:r>
+            <a:r>
+              <a:rPr b="0" sz="1700"/>
+              <a:t>。 </a:t>
+            </a:r>
+            <a:r>
+              <a:rPr b="1" sz="1700"/>
+              <a:t>ナッシング</a:t>
+            </a:r>
+            <a:r>
+              <a:rPr b="0" sz="1700"/>
+              <a:t> オープンズ。</a:t>
+            </a:r>
+          </a:p>
+          <a:p>
+            <a:r>
+              <a:rPr b="0" sz="1200"/>
+              <a:t>▶ SAY (2/2) — 止めずに読み切る</a:t>
+            </a:r>
+          </a:p>
+          <a:p>
+            <a:r>
+              <a:rPr b="0" sz="1700"/>
+              <a:t>Now Slot B's own password.</a:t>
+            </a:r>
+          </a:p>
+          <a:p>
+            <a:r>
+              <a:rPr b="0" sz="1700"/>
+              <a:t>  ナウ </a:t>
+            </a:r>
+            <a:r>
+              <a:rPr b="1" sz="1700"/>
+              <a:t>スロット ビーズ オウン</a:t>
             </a:r>
             <a:r>
               <a:rPr b="0" sz="1700"/>
@@ -6731,8 +6751,54 @@
           </a:p>
           <a:p>
             <a:r>
-              <a:rPr b="0" sz="1700"/>
-              <a:t>No valid entry found.</a:t>
+              <a:rPr b="0" sz="1200"/>
+              <a:t>✋ DO (2/2) — 黙って操作</a:t>
+            </a:r>
+          </a:p>
+          <a:p>
+            <a:r>
+              <a:rPr b="0" sz="1200"/>
+              <a:t>DO: パスワードB → Open protected file → 落ちたファイルを開き、SCENE 5 と中身が違うことを見せる</a:t>
+            </a:r>
+          </a:p>
+          <a:p>
+            <a:r>
+              <a:rPr b="0" sz="1200"/>
+              <a:t>▶ THEN (2/2) — 画面が変わってから</a:t>
+            </a:r>
+          </a:p>
+          <a:p>
+            <a:r>
+              <a:rPr b="0" sz="1700"/>
+              <a:t>A different file — out of the same file on disk.</a:t>
+            </a:r>
+          </a:p>
+          <a:p>
+            <a:r>
+              <a:rPr b="0" sz="1700"/>
+              <a:t>  ア </a:t>
+            </a:r>
+            <a:r>
+              <a:rPr b="1" sz="1700"/>
+              <a:t>ディファレント ファイル</a:t>
+            </a:r>
+            <a:r>
+              <a:rPr b="0" sz="1700"/>
+              <a:t> — アウト オブ ザ </a:t>
+            </a:r>
+            <a:r>
+              <a:rPr b="1" sz="1700"/>
+              <a:t>セイム ファイル</a:t>
+            </a:r>
+            <a:r>
+              <a:rPr b="0" sz="1700"/>
+              <a:t> オン ディスク。</a:t>
+            </a:r>
+          </a:p>
+          <a:p>
+            <a:r>
+              <a:rPr b="0" sz="1700"/>
+              <a:t>One vessel. Two objects. Two passwords. Two files.</a:t>
             </a:r>
           </a:p>
           <a:p>
@@ -6742,35 +6808,7 @@
             </a:r>
             <a:r>
               <a:rPr b="1" sz="1700"/>
-              <a:t>ノウ ヴァリッド エントリー ファウンド</a:t>
-            </a:r>
-            <a:r>
-              <a:rPr b="0" sz="1700"/>
-              <a:t>。</a:t>
-            </a:r>
-          </a:p>
-          <a:p>
-            <a:r>
-              <a:rPr b="0" sz="1700"/>
-              <a:t>The object is right. The password is not. Nothing opens.</a:t>
-            </a:r>
-          </a:p>
-          <a:p>
-            <a:r>
-              <a:rPr b="0" sz="1700"/>
-              <a:t>  ジ オブジェクト イズ </a:t>
-            </a:r>
-            <a:r>
-              <a:rPr b="1" sz="1700"/>
-              <a:t>ゥライト</a:t>
-            </a:r>
-            <a:r>
-              <a:rPr b="0" sz="1700"/>
-              <a:t>。 ザ パスワード イズ </a:t>
-            </a:r>
-            <a:r>
-              <a:rPr b="1" sz="1700"/>
-              <a:t>ナット</a:t>
+              <a:t>ワン ベッセル</a:t>
             </a:r>
             <a:r>
               <a:rPr b="0" sz="1700"/>
@@ -6778,75 +6816,7 @@
             </a:r>
             <a:r>
               <a:rPr b="1" sz="1700"/>
-              <a:t>ナッシング</a:t>
-            </a:r>
-            <a:r>
-              <a:rPr b="0" sz="1700"/>
-              <a:t> オウプンズ。</a:t>
-            </a:r>
-          </a:p>
-          <a:p>
-            <a:r>
-              <a:rPr b="0" sz="1700"/>
-              <a:t>Now Slot B's own password.</a:t>
-            </a:r>
-          </a:p>
-          <a:p>
-            <a:r>
-              <a:rPr b="0" sz="1700"/>
-              <a:t>  ナウ </a:t>
-            </a:r>
-            <a:r>
-              <a:rPr b="1" sz="1700"/>
-              <a:t>スロット ビーズ オウン</a:t>
-            </a:r>
-            <a:r>
-              <a:rPr b="0" sz="1700"/>
-              <a:t> パスワード。</a:t>
-            </a:r>
-          </a:p>
-          <a:p>
-            <a:r>
-              <a:rPr b="0" sz="1700"/>
-              <a:t>A different file — out of the same file on disk.</a:t>
-            </a:r>
-          </a:p>
-          <a:p>
-            <a:r>
-              <a:rPr b="0" sz="1700"/>
-              <a:t>  ア </a:t>
-            </a:r>
-            <a:r>
-              <a:rPr b="1" sz="1700"/>
-              <a:t>ディファレント ファイル</a:t>
-            </a:r>
-            <a:r>
-              <a:rPr b="0" sz="1700"/>
-              <a:t> — アウト オヴ ザ </a:t>
-            </a:r>
-            <a:r>
-              <a:rPr b="1" sz="1700"/>
-              <a:t>セイム ファイル</a:t>
-            </a:r>
-            <a:r>
-              <a:rPr b="0" sz="1700"/>
-              <a:t> オン ディスク。</a:t>
-            </a:r>
-          </a:p>
-          <a:p>
-            <a:r>
-              <a:rPr b="0" sz="1700"/>
-              <a:t>One vessel. Two objects. Two passwords. Two files.</a:t>
-            </a:r>
-          </a:p>
-          <a:p>
-            <a:r>
-              <a:rPr b="0" sz="1700"/>
-              <a:t>  </a:t>
-            </a:r>
-            <a:r>
-              <a:rPr b="1" sz="1700"/>
-              <a:t>ワン ヴェッセル</a:t>
+              <a:t>ツー オブジェクツ</a:t>
             </a:r>
             <a:r>
               <a:rPr b="0" sz="1700"/>
@@ -6854,7 +6824,7 @@
             </a:r>
             <a:r>
               <a:rPr b="1" sz="1700"/>
-              <a:t>トゥー オブジェクツ</a:t>
+              <a:t>ツー パスワーズ</a:t>
             </a:r>
             <a:r>
               <a:rPr b="0" sz="1700"/>
@@ -6862,15 +6832,7 @@
             </a:r>
             <a:r>
               <a:rPr b="1" sz="1700"/>
-              <a:t>トゥー パスワーズ</a:t>
-            </a:r>
-            <a:r>
-              <a:rPr b="0" sz="1700"/>
-              <a:t>。 </a:t>
-            </a:r>
-            <a:r>
-              <a:rPr b="1" sz="1700"/>
-              <a:t>トゥー ファイルズ</a:t>
+              <a:t>ツー ファイルズ</a:t>
             </a:r>
             <a:r>
               <a:rPr b="0" sz="1700"/>
@@ -6892,69 +6854,81 @@
           <a:p>
             <a:r>
               <a:rPr b="0" sz="1200"/>
-              <a:t>DO: 同じ Retrieve 画面のまま、物体A に持ち替える → 表示が変わるのを待つ</a:t>
+              <a:t>▶ SAY — 止めずに読み切る</a:t>
+            </a:r>
+          </a:p>
+          <a:p>
+            <a:r>
+              <a:rPr b="0" sz="1700"/>
+              <a:t>Now the other way around.</a:t>
+            </a:r>
+          </a:p>
+          <a:p>
+            <a:r>
+              <a:rPr b="0" sz="1700"/>
+              <a:t>  ナウ ジ </a:t>
+            </a:r>
+            <a:r>
+              <a:rPr b="1" sz="1700"/>
+              <a:t>アザー ウェイ</a:t>
+            </a:r>
+            <a:r>
+              <a:rPr b="0" sz="1700"/>
+              <a:t> アラウンド。</a:t>
+            </a:r>
+          </a:p>
+          <a:p>
+            <a:r>
+              <a:rPr b="0" sz="1700"/>
+              <a:t>I keep Slot B's password. I change the object back to A.</a:t>
+            </a:r>
+          </a:p>
+          <a:p>
+            <a:r>
+              <a:rPr b="0" sz="1700"/>
+              <a:t>  アイ </a:t>
+            </a:r>
+            <a:r>
+              <a:rPr b="1" sz="1700"/>
+              <a:t>キープ</a:t>
+            </a:r>
+            <a:r>
+              <a:rPr b="0" sz="1700"/>
+              <a:t> スロット ビーズ パスワード。 アイ </a:t>
+            </a:r>
+            <a:r>
+              <a:rPr b="1" sz="1700"/>
+              <a:t>チェインジ</a:t>
+            </a:r>
+            <a:r>
+              <a:rPr b="0" sz="1700"/>
+              <a:t> ジ オブジェクト バック トゥ </a:t>
+            </a:r>
+            <a:r>
+              <a:rPr b="1" sz="1700"/>
+              <a:t>エイ</a:t>
+            </a:r>
+            <a:r>
+              <a:rPr b="0" sz="1700"/>
+              <a:t>。</a:t>
             </a:r>
           </a:p>
           <a:p>
             <a:r>
               <a:rPr b="0" sz="1200"/>
-              <a:t>DO: → パスワードB を入力 → Open protected file → 失敗</a:t>
-            </a:r>
-          </a:p>
-          <a:p>
-            <a:r>
-              <a:rPr b="0" sz="1700"/>
-              <a:t>Now the other way around.</a:t>
-            </a:r>
-          </a:p>
-          <a:p>
-            <a:r>
-              <a:rPr b="0" sz="1700"/>
-              <a:t>  ナウ ジ </a:t>
-            </a:r>
-            <a:r>
-              <a:rPr b="1" sz="1700"/>
-              <a:t>アザー ウェイ</a:t>
-            </a:r>
-            <a:r>
-              <a:rPr b="0" sz="1700"/>
-              <a:t> アラウンド。</a:t>
-            </a:r>
-          </a:p>
-          <a:p>
-            <a:r>
-              <a:rPr b="0" sz="1700"/>
-              <a:t>I keep Slot B's password. I change the object back to A.</a:t>
-            </a:r>
-          </a:p>
-          <a:p>
-            <a:r>
-              <a:rPr b="0" sz="1700"/>
-              <a:t>  アイ </a:t>
-            </a:r>
-            <a:r>
-              <a:rPr b="1" sz="1700"/>
-              <a:t>キープ</a:t>
-            </a:r>
-            <a:r>
-              <a:rPr b="0" sz="1700"/>
-              <a:t> スロット ビーズ パスワード。 アイ </a:t>
-            </a:r>
-            <a:r>
-              <a:rPr b="1" sz="1700"/>
-              <a:t>チェインジ</a:t>
-            </a:r>
-            <a:r>
-              <a:rPr b="0" sz="1700"/>
-              <a:t> ジ オブジェクト バック トゥ </a:t>
-            </a:r>
-            <a:r>
-              <a:rPr b="1" sz="1700"/>
-              <a:t>エイ</a:t>
-            </a:r>
-            <a:r>
-              <a:rPr b="0" sz="1700"/>
-              <a:t>。</a:t>
+              <a:t>✋ DO — 黙って操作</a:t>
+            </a:r>
+          </a:p>
+          <a:p>
+            <a:r>
+              <a:rPr b="0" sz="1200"/>
+              <a:t>DO: 物体A に持ち替え → 表示が変わるのを待つ → パスワードB → Open protected file</a:t>
+            </a:r>
+          </a:p>
+          <a:p>
+            <a:r>
+              <a:rPr b="0" sz="1200"/>
+              <a:t>▶ THEN — 画面が変わってから</a:t>
             </a:r>
           </a:p>
           <a:p>
@@ -6974,7 +6948,7 @@
             </a:r>
             <a:r>
               <a:rPr b="0" sz="1700"/>
-              <a:t>。 ノウ ヴァリッド エントリー ファウンド。</a:t>
+              <a:t>。 ノー バリッド エントリー ファウンド。</a:t>
             </a:r>
           </a:p>
           <a:p>
@@ -6990,7 +6964,7 @@
             </a:r>
             <a:r>
               <a:rPr b="1" sz="1700"/>
-              <a:t>ゥロング オブジェクト</a:t>
+              <a:t>ロング オブジェクト</a:t>
             </a:r>
             <a:r>
               <a:rPr b="0" sz="1700"/>
@@ -7068,57 +7042,125 @@
           <a:p>
             <a:r>
               <a:rPr b="0" sz="1200"/>
+              <a:t>▶ SAY — 止めずに読み切る</a:t>
+            </a:r>
+          </a:p>
+          <a:p>
+            <a:r>
+              <a:rPr b="0" sz="1700"/>
+              <a:t>Now change the situation.</a:t>
+            </a:r>
+          </a:p>
+          <a:p>
+            <a:r>
+              <a:rPr b="0" sz="1700"/>
+              <a:t>  ナウ </a:t>
+            </a:r>
+            <a:r>
+              <a:rPr b="1" sz="1700"/>
+              <a:t>チェインジ</a:t>
+            </a:r>
+            <a:r>
+              <a:rPr b="0" sz="1700"/>
+              <a:t> ザ シチュエイション。</a:t>
+            </a:r>
+          </a:p>
+          <a:p>
+            <a:r>
+              <a:rPr b="0" sz="1700"/>
+              <a:t>Someone has the device. And they have me.</a:t>
+            </a:r>
+          </a:p>
+          <a:p>
+            <a:r>
+              <a:rPr b="0" sz="1700"/>
+              <a:t>  サムワン ハズ ザ </a:t>
+            </a:r>
+            <a:r>
+              <a:rPr b="1" sz="1700"/>
+              <a:t>デバイス</a:t>
+            </a:r>
+            <a:r>
+              <a:rPr b="0" sz="1700"/>
+              <a:t>。 アンド ゼイ ハブ </a:t>
+            </a:r>
+            <a:r>
+              <a:rPr b="1" sz="1700"/>
+              <a:t>ミー</a:t>
+            </a:r>
+            <a:r>
+              <a:rPr b="0" sz="1700"/>
+              <a:t>。</a:t>
+            </a:r>
+          </a:p>
+          <a:p>
+            <a:r>
+              <a:rPr b="0" sz="1700"/>
+              <a:t>'Give us the password.' So I do.</a:t>
+            </a:r>
+          </a:p>
+          <a:p>
+            <a:r>
+              <a:rPr b="0" sz="1700"/>
+              <a:t>  </a:t>
+            </a:r>
+            <a:r>
+              <a:rPr b="1" sz="1700"/>
+              <a:t>ギブ アス</a:t>
+            </a:r>
+            <a:r>
+              <a:rPr b="0" sz="1700"/>
+              <a:t> ザ パスワード。 ソー </a:t>
+            </a:r>
+            <a:r>
+              <a:rPr b="1" sz="1700"/>
+              <a:t>アイ ドゥー</a:t>
+            </a:r>
+            <a:r>
+              <a:rPr b="0" sz="1700"/>
+              <a:t>。</a:t>
+            </a:r>
+          </a:p>
+          <a:p>
+            <a:r>
+              <a:rPr b="0" sz="1200"/>
+              <a:t>✋ DO — 黙って操作</a:t>
+            </a:r>
+          </a:p>
+          <a:p>
+            <a:r>
+              <a:rPr b="0" sz="1200"/>
               <a:t>DO: 物体A → パスワードA → Open protected file（SCENE 5 と同一操作）</a:t>
             </a:r>
           </a:p>
           <a:p>
             <a:r>
               <a:rPr b="0" sz="1200"/>
-              <a:t>DO: ここは手を速く動かさない。語りで見せる場面。</a:t>
-            </a:r>
-          </a:p>
-          <a:p>
-            <a:r>
-              <a:rPr b="0" sz="1700"/>
-              <a:t>Now change the situation.</a:t>
-            </a:r>
-          </a:p>
-          <a:p>
-            <a:r>
-              <a:rPr b="0" sz="1700"/>
-              <a:t>  ナウ </a:t>
-            </a:r>
-            <a:r>
-              <a:rPr b="1" sz="1700"/>
-              <a:t>チェインジ</a:t>
-            </a:r>
-            <a:r>
-              <a:rPr b="0" sz="1700"/>
-              <a:t> ザ シチュエイション。</a:t>
-            </a:r>
-          </a:p>
-          <a:p>
-            <a:r>
-              <a:rPr b="0" sz="1700"/>
-              <a:t>Someone has the device. And they have me.</a:t>
-            </a:r>
-          </a:p>
-          <a:p>
-            <a:r>
-              <a:rPr b="0" sz="1700"/>
-              <a:t>  サムワン ハズ ザ </a:t>
-            </a:r>
-            <a:r>
-              <a:rPr b="1" sz="1700"/>
-              <a:t>デバイス</a:t>
-            </a:r>
-            <a:r>
-              <a:rPr b="0" sz="1700"/>
-              <a:t>。 アンド ゼイ ハヴ </a:t>
-            </a:r>
-            <a:r>
-              <a:rPr b="1" sz="1700"/>
-              <a:t>ミー</a:t>
+              <a:t>▶ THEN — 画面が変わってから</a:t>
+            </a:r>
+          </a:p>
+          <a:p>
+            <a:r>
+              <a:rPr b="0" sz="1700"/>
+              <a:t>They get a file. A real file, that really opens.</a:t>
+            </a:r>
+          </a:p>
+          <a:p>
+            <a:r>
+              <a:rPr b="0" sz="1700"/>
+              <a:t>  ゼイ ゲット ア ファイル。 ア </a:t>
+            </a:r>
+            <a:r>
+              <a:rPr b="1" sz="1700"/>
+              <a:t>リアル</a:t>
+            </a:r>
+            <a:r>
+              <a:rPr b="0" sz="1700"/>
+              <a:t> ファイル、 ザット </a:t>
+            </a:r>
+            <a:r>
+              <a:rPr b="1" sz="1700"/>
+              <a:t>リアリー オープンズ</a:t>
             </a:r>
             <a:r>
               <a:rPr b="0" sz="1700"/>
@@ -7128,7 +7170,7 @@
           <a:p>
             <a:r>
               <a:rPr b="0" sz="1700"/>
-              <a:t>'Give us the password.'</a:t>
+              <a:t>Nothing on this screen says there is another one.</a:t>
             </a:r>
           </a:p>
           <a:p>
@@ -7138,55 +7180,15 @@
             </a:r>
             <a:r>
               <a:rPr b="1" sz="1700"/>
-              <a:t>ギヴ アス</a:t>
-            </a:r>
-            <a:r>
-              <a:rPr b="0" sz="1700"/>
-              <a:t> ザ パスワード。</a:t>
-            </a:r>
-          </a:p>
-          <a:p>
-            <a:r>
-              <a:rPr b="0" sz="1700"/>
-              <a:t>So I do. Object A. Password A.</a:t>
-            </a:r>
-          </a:p>
-          <a:p>
-            <a:r>
-              <a:rPr b="0" sz="1700"/>
-              <a:t>  ソウ </a:t>
-            </a:r>
-            <a:r>
-              <a:rPr b="1" sz="1700"/>
-              <a:t>アイ ドゥー</a:t>
-            </a:r>
-            <a:r>
-              <a:rPr b="0" sz="1700"/>
-              <a:t>。 オブジェクト エイ。 パスワード エイ。</a:t>
-            </a:r>
-          </a:p>
-          <a:p>
-            <a:r>
-              <a:rPr b="0" sz="1700"/>
-              <a:t>They get a file. A real file, that really opens.</a:t>
-            </a:r>
-          </a:p>
-          <a:p>
-            <a:r>
-              <a:rPr b="0" sz="1700"/>
-              <a:t>  ゼイ ゲット ア ファイル。 ア </a:t>
-            </a:r>
-            <a:r>
-              <a:rPr b="1" sz="1700"/>
-              <a:t>リアル</a:t>
-            </a:r>
-            <a:r>
-              <a:rPr b="0" sz="1700"/>
-              <a:t> ファイル、 ザット </a:t>
-            </a:r>
-            <a:r>
-              <a:rPr b="1" sz="1700"/>
-              <a:t>リアリー オウプンズ</a:t>
+              <a:t>ナッシング</a:t>
+            </a:r>
+            <a:r>
+              <a:rPr b="0" sz="1700"/>
+              <a:t> オン ディス スクリーン セズ ゼアズ </a:t>
+            </a:r>
+            <a:r>
+              <a:rPr b="1" sz="1700"/>
+              <a:t>アナザー ワン</a:t>
             </a:r>
             <a:r>
               <a:rPr b="0" sz="1700"/>
@@ -7196,34 +7198,6 @@
           <a:p>
             <a:r>
               <a:rPr b="0" sz="1700"/>
-              <a:t>Nothing on this screen says there is another one.</a:t>
-            </a:r>
-          </a:p>
-          <a:p>
-            <a:r>
-              <a:rPr b="0" sz="1700"/>
-              <a:t>  </a:t>
-            </a:r>
-            <a:r>
-              <a:rPr b="1" sz="1700"/>
-              <a:t>ナッシング</a:t>
-            </a:r>
-            <a:r>
-              <a:rPr b="0" sz="1700"/>
-              <a:t> オン ディス スクリーン セズ ゼアズ </a:t>
-            </a:r>
-            <a:r>
-              <a:rPr b="1" sz="1700"/>
-              <a:t>アナザー ワン</a:t>
-            </a:r>
-            <a:r>
-              <a:rPr b="0" sz="1700"/>
-              <a:t>。</a:t>
-            </a:r>
-          </a:p>
-          <a:p>
-            <a:r>
-              <a:rPr b="0" sz="1700"/>
               <a:t>That is the whole design.</a:t>
             </a:r>
           </a:p>
@@ -7234,7 +7208,7 @@
             </a:r>
             <a:r>
               <a:rPr b="1" sz="1700"/>
-              <a:t>ホウル デザイン</a:t>
+              <a:t>ホール デザイン</a:t>
             </a:r>
             <a:r>
               <a:rPr b="0" sz="1700"/>
@@ -7256,25 +7230,301 @@
           <a:p>
             <a:r>
               <a:rPr b="0" sz="1200"/>
-              <a:t>DO: 同じ Retrieve 画面。消したい方の物体（物体B）をかざす</a:t>
+              <a:t>▶ SAY — 止めずに読み切る</a:t>
+            </a:r>
+          </a:p>
+          <a:p>
+            <a:r>
+              <a:rPr b="0" sz="1700"/>
+              <a:t>Worse case. They already know there is more.</a:t>
+            </a:r>
+          </a:p>
+          <a:p>
+            <a:r>
+              <a:rPr b="0" sz="1700"/>
+              <a:t>  </a:t>
+            </a:r>
+            <a:r>
+              <a:rPr b="1" sz="1700"/>
+              <a:t>ワース ケイス</a:t>
+            </a:r>
+            <a:r>
+              <a:rPr b="0" sz="1700"/>
+              <a:t>。 ゼイ オールレディ </a:t>
+            </a:r>
+            <a:r>
+              <a:rPr b="1" sz="1700"/>
+              <a:t>ノー</a:t>
+            </a:r>
+            <a:r>
+              <a:rPr b="0" sz="1700"/>
+              <a:t> ゼアズ </a:t>
+            </a:r>
+            <a:r>
+              <a:rPr b="1" sz="1700"/>
+              <a:t>モア</a:t>
+            </a:r>
+            <a:r>
+              <a:rPr b="0" sz="1700"/>
+              <a:t>。</a:t>
+            </a:r>
+          </a:p>
+          <a:p>
+            <a:r>
+              <a:rPr b="0" sz="1700"/>
+              <a:t>Same screen. Same object. Same field. Same button.</a:t>
+            </a:r>
+          </a:p>
+          <a:p>
+            <a:r>
+              <a:rPr b="0" sz="1700"/>
+              <a:t>  セイム スクリーン。 セイム オブジェクト。 セイム フィールド。 セイム ボタン。</a:t>
+            </a:r>
+          </a:p>
+          <a:p>
+            <a:r>
+              <a:rPr b="0" sz="1700"/>
+              <a:t>The only thing I change is which password I type.</a:t>
+            </a:r>
+          </a:p>
+          <a:p>
+            <a:r>
+              <a:rPr b="0" sz="1700"/>
+              <a:t>  ジ </a:t>
+            </a:r>
+            <a:r>
+              <a:rPr b="1" sz="1700"/>
+              <a:t>オンリー</a:t>
+            </a:r>
+            <a:r>
+              <a:rPr b="0" sz="1700"/>
+              <a:t> シング アイ チェインジ イズ </a:t>
+            </a:r>
+            <a:r>
+              <a:rPr b="1" sz="1700"/>
+              <a:t>ウィッチ パスワード</a:t>
+            </a:r>
+            <a:r>
+              <a:rPr b="0" sz="1700"/>
+              <a:t> アイ タイプ。</a:t>
             </a:r>
           </a:p>
           <a:p>
             <a:r>
               <a:rPr b="0" sz="1200"/>
-              <a:t>DO: → パスワード欄に Clearing password（破壊用）を入力 → Open protected file</a:t>
+              <a:t>✋ DO — 黙って操作</a:t>
             </a:r>
           </a:p>
           <a:p>
             <a:r>
               <a:rPr b="0" sz="1200"/>
-              <a:t>DO: → No valid entry found. と出る</a:t>
-            </a:r>
-          </a:p>
-          <a:p>
-            <a:r>
-              <a:rPr b="0" sz="1700"/>
-              <a:t>Worse case. They already know there is more.</a:t>
+              <a:t>DO: 物体B をかざす → パスワード欄に Clearing password → Open protected file</a:t>
+            </a:r>
+          </a:p>
+          <a:p>
+            <a:r>
+              <a:rPr b="0" sz="1200"/>
+              <a:t>▶ THEN — 画面が変わってから</a:t>
+            </a:r>
+          </a:p>
+          <a:p>
+            <a:r>
+              <a:rPr b="0" sz="1700"/>
+              <a:t>And it says — no valid entry found.</a:t>
+            </a:r>
+          </a:p>
+          <a:p>
+            <a:r>
+              <a:rPr b="0" sz="1700"/>
+              <a:t>  アンド イット セズ — </a:t>
+            </a:r>
+            <a:r>
+              <a:rPr b="1" sz="1700"/>
+              <a:t>ノー バリッド エントリー ファウンド</a:t>
+            </a:r>
+            <a:r>
+              <a:rPr b="0" sz="1700"/>
+              <a:t>。</a:t>
+            </a:r>
+          </a:p>
+          <a:p>
+            <a:r>
+              <a:rPr b="0" sz="1700"/>
+              <a:t>That is the same sentence you get from a typo.</a:t>
+            </a:r>
+          </a:p>
+          <a:p>
+            <a:r>
+              <a:rPr b="0" sz="1700"/>
+              <a:t>  ザッツ ザ </a:t>
+            </a:r>
+            <a:r>
+              <a:rPr b="1" sz="1700"/>
+              <a:t>セイム センテンス</a:t>
+            </a:r>
+            <a:r>
+              <a:rPr b="0" sz="1700"/>
+              <a:t> ユー ゲット フロム ア </a:t>
+            </a:r>
+            <a:r>
+              <a:rPr b="1" sz="1700"/>
+              <a:t>タイポ</a:t>
+            </a:r>
+            <a:r>
+              <a:rPr b="0" sz="1700"/>
+              <a:t>。</a:t>
+            </a:r>
+          </a:p>
+          <a:p>
+            <a:r>
+              <a:rPr b="0" sz="1700"/>
+              <a:t>But that entry is not locked. It is gone.</a:t>
+            </a:r>
+          </a:p>
+          <a:p>
+            <a:r>
+              <a:rPr b="0" sz="1700"/>
+              <a:t>  バット ザット エントリー イズ ナット </a:t>
+            </a:r>
+            <a:r>
+              <a:rPr b="1" sz="1700"/>
+              <a:t>ロックト</a:t>
+            </a:r>
+            <a:r>
+              <a:rPr b="0" sz="1700"/>
+              <a:t>。 イッツ </a:t>
+            </a:r>
+            <a:r>
+              <a:rPr b="1" sz="1700"/>
+              <a:t>ゴーン</a:t>
+            </a:r>
+            <a:r>
+              <a:rPr b="0" sz="1700"/>
+              <a:t>。</a:t>
+            </a:r>
+          </a:p>
+          <a:p>
+            <a:r>
+              <a:rPr b="0" sz="1700"/>
+              <a:t>The password they can compel is not the only one there is.</a:t>
+            </a:r>
+          </a:p>
+          <a:p>
+            <a:r>
+              <a:rPr b="0" sz="1700"/>
+              <a:t>  ザ パスワード ゼイ キャン </a:t>
+            </a:r>
+            <a:r>
+              <a:rPr b="1" sz="1700"/>
+              <a:t>コンペル</a:t>
+            </a:r>
+            <a:r>
+              <a:rPr b="0" sz="1700"/>
+              <a:t> イズ ナット ジ </a:t>
+            </a:r>
+            <a:r>
+              <a:rPr b="1" sz="1700"/>
+              <a:t>オンリー ワン</a:t>
+            </a:r>
+            <a:r>
+              <a:rPr b="0" sz="1700"/>
+              <a:t> ゼア イズ。</a:t>
+            </a:r>
+          </a:p>
+          <a:p>
+            <a:r>
+              <a:rPr b="0" sz="1700"/>
+              <a:t/>
+            </a:r>
+          </a:p>
+          <a:p>
+            <a:r>
+              <a:rPr b="0" sz="1200"/>
+              <a:t>── SCENE 10 · Nothing left to open（0:50）</a:t>
+            </a:r>
+          </a:p>
+          <a:p>
+            <a:r>
+              <a:rPr b="0" sz="1200"/>
+              <a:t>▶ SAY — 止めずに読み切る</a:t>
+            </a:r>
+          </a:p>
+          <a:p>
+            <a:r>
+              <a:rPr b="0" sz="1700"/>
+              <a:t>Let me prove that.</a:t>
+            </a:r>
+          </a:p>
+          <a:p>
+            <a:r>
+              <a:rPr b="0" sz="1700"/>
+              <a:t>  レット ミー </a:t>
+            </a:r>
+            <a:r>
+              <a:rPr b="1" sz="1700"/>
+              <a:t>プルーブ</a:t>
+            </a:r>
+            <a:r>
+              <a:rPr b="0" sz="1700"/>
+              <a:t> ザット。</a:t>
+            </a:r>
+          </a:p>
+          <a:p>
+            <a:r>
+              <a:rPr b="0" sz="1700"/>
+              <a:t>Object B. Slot B's real password. The correct way.</a:t>
+            </a:r>
+          </a:p>
+          <a:p>
+            <a:r>
+              <a:rPr b="0" sz="1700"/>
+              <a:t>  オブジェクト ビー。 スロット ビーズ </a:t>
+            </a:r>
+            <a:r>
+              <a:rPr b="1" sz="1700"/>
+              <a:t>リアル</a:t>
+            </a:r>
+            <a:r>
+              <a:rPr b="0" sz="1700"/>
+              <a:t> パスワード。 ザ </a:t>
+            </a:r>
+            <a:r>
+              <a:rPr b="1" sz="1700"/>
+              <a:t>コレクト ウェイ</a:t>
+            </a:r>
+            <a:r>
+              <a:rPr b="0" sz="1700"/>
+              <a:t>。</a:t>
+            </a:r>
+          </a:p>
+          <a:p>
+            <a:r>
+              <a:rPr b="0" sz="1200"/>
+              <a:t>✋ DO — 黙って操作</a:t>
+            </a:r>
+          </a:p>
+          <a:p>
+            <a:r>
+              <a:rPr b="0" sz="1200"/>
+              <a:t>DO: 物体B → パスワードB（正規）→ Open protected file → 何も出ない</a:t>
+            </a:r>
+          </a:p>
+          <a:p>
+            <a:r>
+              <a:rPr b="0" sz="1200"/>
+              <a:t>DO: 続けて 物体A → パスワードA → 開く（時計が押していれば口頭のみ）</a:t>
+            </a:r>
+          </a:p>
+          <a:p>
+            <a:r>
+              <a:rPr b="0" sz="1200"/>
+              <a:t>▶ THEN — 画面が変わってから</a:t>
+            </a:r>
+          </a:p>
+          <a:p>
+            <a:r>
+              <a:rPr b="0" sz="1700"/>
+              <a:t>Nothing. I cannot get it back either. That is not a bug.</a:t>
             </a:r>
           </a:p>
           <a:p>
@@ -7284,23 +7534,23 @@
             </a:r>
             <a:r>
               <a:rPr b="1" sz="1700"/>
-              <a:t>ワース ケイス</a:t>
-            </a:r>
-            <a:r>
-              <a:rPr b="0" sz="1700"/>
-              <a:t>。 ゼイ オールレディ </a:t>
-            </a:r>
-            <a:r>
-              <a:rPr b="1" sz="1700"/>
-              <a:t>ノウ</a:t>
-            </a:r>
-            <a:r>
-              <a:rPr b="0" sz="1700"/>
-              <a:t> ゼアズ </a:t>
-            </a:r>
-            <a:r>
-              <a:rPr b="1" sz="1700"/>
-              <a:t>モア</a:t>
+              <a:t>ナッシング</a:t>
+            </a:r>
+            <a:r>
+              <a:rPr b="0" sz="1700"/>
+              <a:t>。 アイ キャナット ゲット イット バック </a:t>
+            </a:r>
+            <a:r>
+              <a:rPr b="1" sz="1700"/>
+              <a:t>アイザー</a:t>
+            </a:r>
+            <a:r>
+              <a:rPr b="0" sz="1700"/>
+              <a:t>。 ザッツ </a:t>
+            </a:r>
+            <a:r>
+              <a:rPr b="1" sz="1700"/>
+              <a:t>ナット ア バグ</a:t>
             </a:r>
             <a:r>
               <a:rPr b="0" sz="1700"/>
@@ -7310,57 +7560,25 @@
           <a:p>
             <a:r>
               <a:rPr b="0" sz="1700"/>
-              <a:t>Same screen. Same object. Same field. Same button.</a:t>
-            </a:r>
-          </a:p>
-          <a:p>
-            <a:r>
-              <a:rPr b="0" sz="1700"/>
-              <a:t>  セイム スクリーン。 セイム オブジェクト。 セイム フィールド。 セイム ボタン。</a:t>
-            </a:r>
-          </a:p>
-          <a:p>
-            <a:r>
-              <a:rPr b="0" sz="1700"/>
-              <a:t>The only thing I change is which password I type.</a:t>
-            </a:r>
-          </a:p>
-          <a:p>
-            <a:r>
-              <a:rPr b="0" sz="1700"/>
-              <a:t>  ジ </a:t>
-            </a:r>
-            <a:r>
-              <a:rPr b="1" sz="1700"/>
-              <a:t>オンリー</a:t>
-            </a:r>
-            <a:r>
-              <a:rPr b="0" sz="1700"/>
-              <a:t> シング アイ チェインジ イズ </a:t>
-            </a:r>
-            <a:r>
-              <a:rPr b="1" sz="1700"/>
-              <a:t>ウィッチ パスワード</a:t>
-            </a:r>
-            <a:r>
-              <a:rPr b="0" sz="1700"/>
-              <a:t> アイ タイプ。</a:t>
-            </a:r>
-          </a:p>
-          <a:p>
-            <a:r>
-              <a:rPr b="0" sz="1700"/>
-              <a:t>And it says — no valid entry found.</a:t>
-            </a:r>
-          </a:p>
-          <a:p>
-            <a:r>
-              <a:rPr b="0" sz="1700"/>
-              <a:t>  アンド イット セズ — </a:t>
-            </a:r>
-            <a:r>
-              <a:rPr b="1" sz="1700"/>
-              <a:t>ノウ ヴァリッド エントリー ファウンド</a:t>
+              <a:t>And Slot A still opens, exactly as before.</a:t>
+            </a:r>
+          </a:p>
+          <a:p>
+            <a:r>
+              <a:rPr b="0" sz="1700"/>
+              <a:t>  アンド </a:t>
+            </a:r>
+            <a:r>
+              <a:rPr b="1" sz="1700"/>
+              <a:t>スロット エイ</a:t>
+            </a:r>
+            <a:r>
+              <a:rPr b="0" sz="1700"/>
+              <a:t> スティル オープンズ、 イグザクトリー アズ </a:t>
+            </a:r>
+            <a:r>
+              <a:rPr b="1" sz="1700"/>
+              <a:t>ビフォー</a:t>
             </a:r>
             <a:r>
               <a:rPr b="0" sz="1700"/>
@@ -7370,251 +7588,13 @@
           <a:p>
             <a:r>
               <a:rPr b="0" sz="1700"/>
-              <a:t>That is the same sentence you get from a typo.</a:t>
-            </a:r>
-          </a:p>
-          <a:p>
-            <a:r>
-              <a:rPr b="0" sz="1700"/>
-              <a:t>  ザッツ ザ </a:t>
-            </a:r>
-            <a:r>
-              <a:rPr b="1" sz="1700"/>
-              <a:t>セイム センテンス</a:t>
-            </a:r>
-            <a:r>
-              <a:rPr b="0" sz="1700"/>
-              <a:t> ユー ゲット フロム ア </a:t>
-            </a:r>
-            <a:r>
-              <a:rPr b="1" sz="1700"/>
-              <a:t>タイポ</a:t>
-            </a:r>
-            <a:r>
-              <a:rPr b="0" sz="1700"/>
-              <a:t>。</a:t>
-            </a:r>
-          </a:p>
-          <a:p>
-            <a:r>
-              <a:rPr b="0" sz="1700"/>
-              <a:t>But that entry is not locked. It is gone.</a:t>
-            </a:r>
-          </a:p>
-          <a:p>
-            <a:r>
-              <a:rPr b="0" sz="1700"/>
-              <a:t>  バット ザット エントリー イズ ナット </a:t>
-            </a:r>
-            <a:r>
-              <a:rPr b="1" sz="1700"/>
-              <a:t>ロックト</a:t>
-            </a:r>
-            <a:r>
-              <a:rPr b="0" sz="1700"/>
-              <a:t>。 イッツ </a:t>
-            </a:r>
-            <a:r>
-              <a:rPr b="1" sz="1700"/>
-              <a:t>ゴーン</a:t>
-            </a:r>
-            <a:r>
-              <a:rPr b="0" sz="1700"/>
-              <a:t>。</a:t>
-            </a:r>
-          </a:p>
-          <a:p>
-            <a:r>
-              <a:rPr b="0" sz="1700"/>
-              <a:t>The password they can compel is not the only one there is.</a:t>
-            </a:r>
-          </a:p>
-          <a:p>
-            <a:r>
-              <a:rPr b="0" sz="1700"/>
-              <a:t>  ザ パスワード ゼイ キャン </a:t>
-            </a:r>
-            <a:r>
-              <a:rPr b="1" sz="1700"/>
-              <a:t>コンペル</a:t>
-            </a:r>
-            <a:r>
-              <a:rPr b="0" sz="1700"/>
-              <a:t> イズ ナット ジ </a:t>
-            </a:r>
-            <a:r>
-              <a:rPr b="1" sz="1700"/>
-              <a:t>オンリー ワン</a:t>
-            </a:r>
-            <a:r>
-              <a:rPr b="0" sz="1700"/>
-              <a:t> ゼア イズ。</a:t>
-            </a:r>
-          </a:p>
-          <a:p>
-            <a:r>
-              <a:rPr b="0" sz="1700"/>
-              <a:t/>
-            </a:r>
-          </a:p>
-          <a:p>
-            <a:r>
-              <a:rPr b="0" sz="1200"/>
-              <a:t>── SCENE 10 · Nothing left to open — and what the tool will not claim（0:50）</a:t>
-            </a:r>
-          </a:p>
-          <a:p>
-            <a:r>
-              <a:rPr b="0" sz="1200"/>
-              <a:t>DO: 物体B → パスワードB（正規のもの）→ Open protected file → 何も出てこない</a:t>
-            </a:r>
-          </a:p>
-          <a:p>
-            <a:r>
-              <a:rPr b="0" sz="1200"/>
-              <a:t>DO: 続けて 物体A → パスワードA → Open protected file → 開く（時間が押していれば口頭のみ）</a:t>
-            </a:r>
-          </a:p>
-          <a:p>
-            <a:r>
-              <a:rPr b="0" sz="1200"/>
-              <a:t>DO: 最後の3行は操作なし。手を止めて、客席を見て言う。</a:t>
-            </a:r>
-          </a:p>
-          <a:p>
-            <a:r>
-              <a:rPr b="0" sz="1700"/>
-              <a:t>Let me prove that.</a:t>
-            </a:r>
-          </a:p>
-          <a:p>
-            <a:r>
-              <a:rPr b="0" sz="1700"/>
-              <a:t>  レット ミー </a:t>
-            </a:r>
-            <a:r>
-              <a:rPr b="1" sz="1700"/>
-              <a:t>プルーヴ</a:t>
-            </a:r>
-            <a:r>
-              <a:rPr b="0" sz="1700"/>
-              <a:t> ザット。</a:t>
-            </a:r>
-          </a:p>
-          <a:p>
-            <a:r>
-              <a:rPr b="0" sz="1700"/>
-              <a:t>Object B. Slot B's real password. The correct way.</a:t>
-            </a:r>
-          </a:p>
-          <a:p>
-            <a:r>
-              <a:rPr b="0" sz="1700"/>
-              <a:t>  オブジェクト ビー。 スロット ビーズ </a:t>
-            </a:r>
-            <a:r>
-              <a:rPr b="1" sz="1700"/>
-              <a:t>リアル</a:t>
-            </a:r>
-            <a:r>
-              <a:rPr b="0" sz="1700"/>
-              <a:t> パスワード。 ザ </a:t>
-            </a:r>
-            <a:r>
-              <a:rPr b="1" sz="1700"/>
-              <a:t>コゥレクト ウェイ</a:t>
-            </a:r>
-            <a:r>
-              <a:rPr b="0" sz="1700"/>
-              <a:t>。</a:t>
-            </a:r>
-          </a:p>
-          <a:p>
-            <a:r>
-              <a:rPr b="0" sz="1700"/>
-              <a:t>Nothing.</a:t>
-            </a:r>
-          </a:p>
-          <a:p>
-            <a:r>
-              <a:rPr b="0" sz="1700"/>
-              <a:t>  </a:t>
-            </a:r>
-            <a:r>
-              <a:rPr b="1" sz="1700"/>
-              <a:t>ナッシング</a:t>
-            </a:r>
-            <a:r>
-              <a:rPr b="0" sz="1700"/>
-              <a:t>。</a:t>
-            </a:r>
-          </a:p>
-          <a:p>
-            <a:r>
-              <a:rPr b="0" sz="1700"/>
-              <a:t>I cannot get it back either. That is not a bug.</a:t>
-            </a:r>
-          </a:p>
-          <a:p>
-            <a:r>
-              <a:rPr b="0" sz="1700"/>
-              <a:t>  アイ キャナット ゲット イット バック </a:t>
-            </a:r>
-            <a:r>
-              <a:rPr b="1" sz="1700"/>
-              <a:t>アイザー</a:t>
-            </a:r>
-            <a:r>
-              <a:rPr b="0" sz="1700"/>
-              <a:t>。 ザッツ </a:t>
-            </a:r>
-            <a:r>
-              <a:rPr b="1" sz="1700"/>
-              <a:t>ナット ア バグ</a:t>
-            </a:r>
-            <a:r>
-              <a:rPr b="0" sz="1700"/>
-              <a:t>。</a:t>
-            </a:r>
-          </a:p>
-          <a:p>
-            <a:r>
-              <a:rPr b="0" sz="1700"/>
-              <a:t>And Slot A still opens, exactly as before.</a:t>
-            </a:r>
-          </a:p>
-          <a:p>
-            <a:r>
-              <a:rPr b="0" sz="1700"/>
-              <a:t>  アンド </a:t>
-            </a:r>
-            <a:r>
-              <a:rPr b="1" sz="1700"/>
-              <a:t>スロット エイ</a:t>
-            </a:r>
-            <a:r>
-              <a:rPr b="0" sz="1700"/>
-              <a:t> スティル オウプンズ、 イグザクトリー アズ </a:t>
-            </a:r>
-            <a:r>
-              <a:rPr b="1" sz="1700"/>
-              <a:t>ビフォー</a:t>
-            </a:r>
-            <a:r>
-              <a:rPr b="0" sz="1700"/>
-              <a:t>。</a:t>
-            </a:r>
-          </a:p>
-          <a:p>
-            <a:r>
-              <a:rPr b="0" sz="1700"/>
               <a:t>One thing this tool will never tell you:</a:t>
             </a:r>
           </a:p>
           <a:p>
             <a:r>
               <a:rPr b="0" sz="1700"/>
-              <a:t>  ワン シング ディス ツール ウィル ネヴァー </a:t>
+              <a:t>  ワン シング ディス ツール ウィル ネバー </a:t>
             </a:r>
             <a:r>
               <a:rPr b="1" sz="1700"/>
@@ -7638,7 +7618,7 @@
             </a:r>
             <a:r>
               <a:rPr b="1" sz="1700"/>
-              <a:t>カヴァー ストーリー</a:t>
+              <a:t>カバー ストーリー</a:t>
             </a:r>
             <a:r>
               <a:rPr b="0" sz="1700"/>
@@ -7646,7 +7626,7 @@
             </a:r>
             <a:r>
               <a:rPr b="1" sz="1700"/>
-              <a:t>ビリーヴァブル</a:t>
+              <a:t>ビリーバブル</a:t>
             </a:r>
             <a:r>
               <a:rPr b="0" sz="1700"/>
@@ -7696,129 +7676,123 @@
           <a:p>
             <a:r>
               <a:rPr b="0" sz="1200"/>
+              <a:t>▶ SAY — 止めずに読み切る</a:t>
+            </a:r>
+          </a:p>
+          <a:p>
+            <a:r>
+              <a:rPr b="0" sz="1700"/>
+              <a:t>One file. Two objects. Two passwords.</a:t>
+            </a:r>
+          </a:p>
+          <a:p>
+            <a:r>
+              <a:rPr b="0" sz="1700"/>
+              <a:t>  </a:t>
+            </a:r>
+            <a:r>
+              <a:rPr b="1" sz="1700"/>
+              <a:t>ワン ファイル</a:t>
+            </a:r>
+            <a:r>
+              <a:rPr b="0" sz="1700"/>
+              <a:t>。 </a:t>
+            </a:r>
+            <a:r>
+              <a:rPr b="1" sz="1700"/>
+              <a:t>ツー オブジェクツ</a:t>
+            </a:r>
+            <a:r>
+              <a:rPr b="0" sz="1700"/>
+              <a:t>。 </a:t>
+            </a:r>
+            <a:r>
+              <a:rPr b="1" sz="1700"/>
+              <a:t>ツー パスワーズ</a:t>
+            </a:r>
+            <a:r>
+              <a:rPr b="0" sz="1700"/>
+              <a:t>。</a:t>
+            </a:r>
+          </a:p>
+          <a:p>
+            <a:r>
+              <a:rPr b="0" sz="1700"/>
+              <a:t>And a password that ends one, instead of opening it.</a:t>
+            </a:r>
+          </a:p>
+          <a:p>
+            <a:r>
+              <a:rPr b="0" sz="1700"/>
+              <a:t>  アンド ア パスワード ザット </a:t>
+            </a:r>
+            <a:r>
+              <a:rPr b="1" sz="1700"/>
+              <a:t>エンズ</a:t>
+            </a:r>
+            <a:r>
+              <a:rPr b="0" sz="1700"/>
+              <a:t> ワン、 インステッド オブ </a:t>
+            </a:r>
+            <a:r>
+              <a:rPr b="1" sz="1700"/>
+              <a:t>オープニング</a:t>
+            </a:r>
+            <a:r>
+              <a:rPr b="0" sz="1700"/>
+              <a:t> イット。</a:t>
+            </a:r>
+          </a:p>
+          <a:p>
+            <a:r>
+              <a:rPr b="0" sz="1700"/>
+              <a:t>On real hardware. Come and try it at the table.</a:t>
+            </a:r>
+          </a:p>
+          <a:p>
+            <a:r>
+              <a:rPr b="0" sz="1700"/>
+              <a:t>  オン </a:t>
+            </a:r>
+            <a:r>
+              <a:rPr b="1" sz="1700"/>
+              <a:t>リアル ハードウェア</a:t>
+            </a:r>
+            <a:r>
+              <a:rPr b="0" sz="1700"/>
+              <a:t>。 カム アンド </a:t>
+            </a:r>
+            <a:r>
+              <a:rPr b="1" sz="1700"/>
+              <a:t>トライ イット</a:t>
+            </a:r>
+            <a:r>
+              <a:rPr b="0" sz="1700"/>
+              <a:t> アット ザ テイブル。</a:t>
+            </a:r>
+          </a:p>
+          <a:p>
+            <a:r>
+              <a:rPr b="0" sz="1200"/>
+              <a:t>✋ DO — 黙って操作</a:t>
+            </a:r>
+          </a:p>
+          <a:p>
+            <a:r>
+              <a:rPr b="0" sz="1200"/>
               <a:t>DO: スライド（Slide 25）へ戻す。</a:t>
             </a:r>
           </a:p>
           <a:p>
             <a:r>
               <a:rPr b="0" sz="1700"/>
-              <a:t>One file. Two objects. Two passwords.</a:t>
-            </a:r>
-          </a:p>
-          <a:p>
-            <a:r>
-              <a:rPr b="0" sz="1700"/>
-              <a:t>  </a:t>
-            </a:r>
-            <a:r>
-              <a:rPr b="1" sz="1700"/>
-              <a:t>ワン ファイル</a:t>
-            </a:r>
-            <a:r>
-              <a:rPr b="0" sz="1700"/>
-              <a:t>。 </a:t>
-            </a:r>
-            <a:r>
-              <a:rPr b="1" sz="1700"/>
-              <a:t>トゥー オブジェクツ</a:t>
-            </a:r>
-            <a:r>
-              <a:rPr b="0" sz="1700"/>
-              <a:t>。 </a:t>
-            </a:r>
-            <a:r>
-              <a:rPr b="1" sz="1700"/>
-              <a:t>トゥー パスワーズ</a:t>
-            </a:r>
-            <a:r>
-              <a:rPr b="0" sz="1700"/>
-              <a:t>。</a:t>
-            </a:r>
-          </a:p>
-          <a:p>
-            <a:r>
-              <a:rPr b="0" sz="1700"/>
-              <a:t>And a password that ends one, instead of opening it.</a:t>
-            </a:r>
-          </a:p>
-          <a:p>
-            <a:r>
-              <a:rPr b="0" sz="1700"/>
-              <a:t>  アンド ア パスワード ザット </a:t>
-            </a:r>
-            <a:r>
-              <a:rPr b="1" sz="1700"/>
-              <a:t>エンズ</a:t>
-            </a:r>
-            <a:r>
-              <a:rPr b="0" sz="1700"/>
-              <a:t> ワン、 インステッド オヴ </a:t>
-            </a:r>
-            <a:r>
-              <a:rPr b="1" sz="1700"/>
-              <a:t>オウプニング</a:t>
-            </a:r>
-            <a:r>
-              <a:rPr b="0" sz="1700"/>
-              <a:t> イット。</a:t>
-            </a:r>
-          </a:p>
-          <a:p>
-            <a:r>
-              <a:rPr b="0" sz="1700"/>
-              <a:t>On real hardware. Come and try it at the table.</a:t>
-            </a:r>
-          </a:p>
-          <a:p>
-            <a:r>
-              <a:rPr b="0" sz="1700"/>
-              <a:t>  オン </a:t>
-            </a:r>
-            <a:r>
-              <a:rPr b="1" sz="1700"/>
-              <a:t>リアル ハードウェア</a:t>
-            </a:r>
-            <a:r>
-              <a:rPr b="0" sz="1700"/>
-              <a:t>。 カム アンド </a:t>
-            </a:r>
-            <a:r>
-              <a:rPr b="1" sz="1700"/>
-              <a:t>トライ イット</a:t>
-            </a:r>
-            <a:r>
-              <a:rPr b="0" sz="1700"/>
-              <a:t> アット ザ テイブル。</a:t>
-            </a:r>
-          </a:p>
-          <a:p>
-            <a:r>
-              <a:rPr b="0" sz="1700"/>
               <a:t/>
             </a:r>
           </a:p>
           <a:p>
             <a:r>
               <a:rPr b="0" sz="1200"/>
-              <a:t>── フォールバック（録画に切り替えたとき）</a:t>
-            </a:r>
-          </a:p>
-          <a:p>
-            <a:r>
-              <a:rPr b="0" sz="1200"/>
-              <a:t>JA: 「1つの容器・2つの物体・2つのパスワード・そして開くのではなく終わらせるパスワード」を口頭で辿る。個別シーンは最大15秒で見切り、止まらず前進。</a:t>
-            </a:r>
-          </a:p>
-          <a:p>
-            <a:r>
-              <a:rPr b="0" sz="1700"/>
-              <a:t/>
-            </a:r>
-          </a:p>
-          <a:p>
-            <a:r>
-              <a:rPr b="0" sz="1200"/>
-              <a:t>JA: 26:00 到達で SCENE 5 と SCENE 8 を落とす。SCENE 1・6・7・9・10 は何があっても実機で見せる。Audit と Silent Standby は実演しない — Audit は卓上デモと質疑の持ち札に回す。</a:t>
+              <a:t>JA: 26:00 到達で SCENE 5 と SCENE 8 を落とす。SCENE 1・6・7・9・10 は何があっても実機で見せる。録画に切り替えたときは「1つの容器・2つの物体・2つのパスワード・そして開くのではなく終わらせるパスワード」を口頭で辿る。</a:t>
             </a:r>
           </a:p>
         </p:txBody>
@@ -7983,11 +7957,11 @@
             </a:r>
             <a:r>
               <a:rPr b="1" sz="1700"/>
-              <a:t>ヴァーチュアル インヴァイロンメント</a:t>
-            </a:r>
-            <a:r>
-              <a:rPr b="0" sz="1700"/>
-              <a:t> アンド オウプンズ ザ コンソウル。</a:t>
+              <a:t>バーチュアル インバイロンメント</a:t>
+            </a:r>
+            <a:r>
+              <a:rPr b="0" sz="1700"/>
+              <a:t> アンド オープンズ ザ コンソウル。</a:t>
             </a:r>
           </a:p>
           <a:p>
@@ -8011,7 +7985,7 @@
             </a:r>
             <a:r>
               <a:rPr b="1" sz="1700"/>
-              <a:t>アパッチ トゥー ポイント ズィーロウ</a:t>
+              <a:t>アパッチ トゥー ポイント ゼロ</a:t>
             </a:r>
             <a:r>
               <a:rPr b="0" sz="1700"/>
@@ -8027,7 +8001,7 @@
           <a:p>
             <a:r>
               <a:rPr b="0" sz="1700"/>
-              <a:t>  イヴァリュエイト イット </a:t>
+              <a:t>  イバリュエイト イット </a:t>
             </a:r>
             <a:r>
               <a:rPr b="1" sz="1700"/>
@@ -8204,7 +8178,7 @@
             </a:r>
             <a:r>
               <a:rPr b="1" sz="1700"/>
-              <a:t>ローカル オウンリー</a:t>
+              <a:t>ローカル オンリー</a:t>
             </a:r>
             <a:r>
               <a:rPr b="0" sz="1700"/>
@@ -8268,7 +8242,7 @@
             </a:r>
             <a:r>
               <a:rPr b="1" sz="1700"/>
-              <a:t>ゥライト ヒア</a:t>
+              <a:t>ライト ヒア</a:t>
             </a:r>
             <a:r>
               <a:rPr b="0" sz="1700"/>
@@ -8312,7 +8286,7 @@
           <a:p>
             <a:r>
               <a:rPr b="0" sz="1700"/>
-              <a:t>  アイヴ ゴット </a:t>
+              <a:t>  アイブ ゴット </a:t>
             </a:r>
             <a:r>
               <a:rPr b="1" sz="1700"/>
@@ -8562,7 +8536,7 @@
             </a:r>
             <a:r>
               <a:rPr b="1" sz="1700"/>
-              <a:t>ライヴ デモ</a:t>
+              <a:t>ライブ デモ</a:t>
             </a:r>
             <a:r>
               <a:rPr b="0" sz="1700"/>
@@ -8840,7 +8814,7 @@
           <a:p>
             <a:r>
               <a:rPr b="0" sz="1700"/>
-              <a:t>  ユー オウプン イット </a:t>
+              <a:t>  ユー オープン イット </a:t>
             </a:r>
             <a:r>
               <a:rPr b="1" sz="1700"/>
@@ -8852,7 +8826,7 @@
             </a:r>
             <a:r>
               <a:rPr b="1" sz="1700"/>
-              <a:t>エヴリシング</a:t>
+              <a:t>エブリシング</a:t>
             </a:r>
             <a:r>
               <a:rPr b="0" sz="1700"/>
@@ -8872,7 +8846,7 @@
             </a:r>
             <a:r>
               <a:rPr b="1" sz="1700"/>
-              <a:t>オウヴァー ディスクロージャー</a:t>
+              <a:t>オーバー ディスクロージャー</a:t>
             </a:r>
             <a:r>
               <a:rPr b="0" sz="1700"/>
@@ -9050,11 +9024,11 @@
             </a:r>
             <a:r>
               <a:rPr b="0" sz="1700"/>
-              <a:t>、 ウィズ フルディスク インクリプション — アンド ユー ハンド オウヴァー </a:t>
-            </a:r>
-            <a:r>
-              <a:rPr b="1" sz="1700"/>
-              <a:t>エヴリシング</a:t>
+              <a:t>、 ウィズ フルディスク インクリプション — アンド ユー ハンド オーバー </a:t>
+            </a:r>
+            <a:r>
+              <a:rPr b="1" sz="1700"/>
+              <a:t>エブリシング</a:t>
             </a:r>
             <a:r>
               <a:rPr b="0" sz="1700"/>
@@ -9094,7 +9068,7 @@
             </a:r>
             <a:r>
               <a:rPr b="1" sz="1700"/>
-              <a:t>ヴィジブル</a:t>
+              <a:t>ビジブル</a:t>
             </a:r>
             <a:r>
               <a:rPr b="0" sz="1700"/>
@@ -9126,7 +9100,7 @@
             </a:r>
             <a:r>
               <a:rPr b="0" sz="1700"/>
-              <a:t>。 ヴェリー ディファレント </a:t>
+              <a:t>。 ベリー ディファレント </a:t>
             </a:r>
             <a:r>
               <a:rPr b="1" sz="1700"/>
@@ -9272,7 +9246,7 @@
           <a:p>
             <a:r>
               <a:rPr b="0" sz="1700"/>
-              <a:t>  ファズミッド イズ ア フィールド イヴァリュエイション リサーチ </a:t>
+              <a:t>  ファズミッド イズ ア フィールド イバリュエイション リサーチ </a:t>
             </a:r>
             <a:r>
               <a:rPr b="1" sz="1700"/>
@@ -9296,7 +9270,7 @@
             </a:r>
             <a:r>
               <a:rPr b="1" sz="1700"/>
-              <a:t>ローカル オウンリー</a:t>
+              <a:t>ローカル オンリー</a:t>
             </a:r>
             <a:r>
               <a:rPr b="0" sz="1700"/>
@@ -9582,7 +9556,7 @@
             </a:r>
             <a:r>
               <a:rPr b="0" sz="1700"/>
-              <a:t> イズ ワット ザ ヴィジブル サーフィス ショウズ。</a:t>
+              <a:t> イズ ワット ザ ビジブル サーフィス ショウズ。</a:t>
             </a:r>
           </a:p>
           <a:p>
@@ -9638,7 +9612,7 @@
             </a:r>
             <a:r>
               <a:rPr b="0" sz="1700"/>
-              <a:t> ザ ヴィジブル パス。</a:t>
+              <a:t> ザ ビジブル パス。</a:t>
             </a:r>
           </a:p>
           <a:p>
@@ -9718,7 +9692,7 @@
             </a:r>
             <a:r>
               <a:rPr b="0" sz="1700"/>
-              <a:t> オン ザ ヴィジブル パス。</a:t>
+              <a:t> オン ザ ビジブル パス。</a:t>
             </a:r>
           </a:p>
           <a:p>
@@ -9860,11 +9834,11 @@
             </a:r>
             <a:r>
               <a:rPr b="1" sz="1700"/>
-              <a:t>ファイヴ</a:t>
-            </a:r>
-            <a:r>
-              <a:rPr b="0" sz="1700"/>
-              <a:t> アドヴァサリーズ イン スコープ。</a:t>
+              <a:t>ファイブ</a:t>
+            </a:r>
+            <a:r>
+              <a:rPr b="0" sz="1700"/>
+              <a:t> アドバサリーズ イン スコープ。</a:t>
             </a:r>
           </a:p>
           <a:p>
@@ -9876,7 +9850,7 @@
           <a:p>
             <a:r>
               <a:rPr b="0" sz="1700"/>
-              <a:t>  ア フィジカル キャプター。 ア パッシヴ オブザーヴァー。 ア ローカル アクティヴ アタッカー。</a:t>
+              <a:t>  ア フィジカル キャプター。 ア パッシブ オブザーバー。 ア ローカル アクティブ アタッカー。</a:t>
             </a:r>
           </a:p>
           <a:p>
@@ -9908,11 +9882,11 @@
           <a:p>
             <a:r>
               <a:rPr b="0" sz="1700"/>
-              <a:t>  アンド ファイヴ エクスプリシットリー </a:t>
-            </a:r>
-            <a:r>
-              <a:rPr b="1" sz="1700"/>
-              <a:t>アウト オヴ スコープ</a:t>
+              <a:t>  アンド ファイブ エクスプリシットリー </a:t>
+            </a:r>
+            <a:r>
+              <a:rPr b="1" sz="1700"/>
+              <a:t>アウト オブ スコープ</a:t>
             </a:r>
             <a:r>
               <a:rPr b="0" sz="1700"/>
@@ -9964,7 +9938,7 @@
             </a:r>
             <a:r>
               <a:rPr b="1" sz="1700"/>
-              <a:t>オウンド</a:t>
+              <a:t>オーンド</a:t>
             </a:r>
             <a:r>
               <a:rPr b="0" sz="1700"/>
@@ -9972,7 +9946,7 @@
             </a:r>
             <a:r>
               <a:rPr b="1" sz="1700"/>
-              <a:t>セイヴズ</a:t>
+              <a:t>セイブズ</a:t>
             </a:r>
             <a:r>
               <a:rPr b="0" sz="1700"/>
@@ -10118,7 +10092,7 @@
             </a:r>
             <a:r>
               <a:rPr b="1" sz="1700"/>
-              <a:t>ハンドウェイヴ</a:t>
+              <a:t>ハンドウェイブ</a:t>
             </a:r>
             <a:r>
               <a:rPr b="0" sz="1700"/>
@@ -10230,7 +10204,7 @@
             </a:r>
             <a:r>
               <a:rPr b="0" sz="1700"/>
-              <a:t> ウィズ エニー オヴ ゼム — </a:t>
+              <a:t> ウィズ エニー オブ ゼム — </a:t>
             </a:r>
             <a:r>
               <a:rPr b="1" sz="1700"/>

--- a/docs/submissions/Phasmid_DEFCON_DemoLabs.pptx
+++ b/docs/submissions/Phasmid_DEFCON_DemoLabs.pptx
@@ -640,7 +640,7 @@
             </a:r>
             <a:r>
               <a:rPr b="1" sz="1700"/>
-              <a:t>ジェイナス アイドウロン システム</a:t>
+              <a:t>ジェイナス アイドロン システム</a:t>
             </a:r>
             <a:r>
               <a:rPr b="0" sz="1700"/>
@@ -872,17 +872,45 @@
           <a:p>
             <a:r>
               <a:rPr b="0" sz="1700"/>
-              <a:t>“Architecturally, four things stay explicit.</a:t>
-            </a:r>
-          </a:p>
-          <a:p>
-            <a:r>
-              <a:rPr b="0" sz="1700"/>
-              <a:t>  アーキテクチャリー、 フォー シングズ ステイ </a:t>
-            </a:r>
-            <a:r>
-              <a:rPr b="1" sz="1700"/>
-              <a:t>エクスプリシット</a:t>
+              <a:t>“By design, four things stay explicit.</a:t>
+            </a:r>
+          </a:p>
+          <a:p>
+            <a:r>
+              <a:rPr b="0" sz="1700"/>
+              <a:t>  </a:t>
+            </a:r>
+            <a:r>
+              <a:rPr b="1" sz="1700"/>
+              <a:t>バイ デザイン</a:t>
+            </a:r>
+            <a:r>
+              <a:rPr b="0" sz="1700"/>
+              <a:t>、 フォー シングズ ステイ エクスプリシット。</a:t>
+            </a:r>
+          </a:p>
+          <a:p>
+            <a:r>
+              <a:rPr b="0" sz="1700"/>
+              <a:t>One. Two-slot storage.</a:t>
+            </a:r>
+          </a:p>
+          <a:p>
+            <a:r>
+              <a:rPr b="0" sz="1700"/>
+              <a:t>  </a:t>
+            </a:r>
+            <a:r>
+              <a:rPr b="1" sz="1700"/>
+              <a:t>ワン</a:t>
+            </a:r>
+            <a:r>
+              <a:rPr b="0" sz="1700"/>
+              <a:t>。 トゥースロット </a:t>
+            </a:r>
+            <a:r>
+              <a:rPr b="1" sz="1700"/>
+              <a:t>ストレージ</a:t>
             </a:r>
             <a:r>
               <a:rPr b="0" sz="1700"/>
@@ -892,7 +920,7 @@
           <a:p>
             <a:r>
               <a:rPr b="0" sz="1700"/>
-              <a:t>One. Two-slot storage.</a:t>
+              <a:t>Two. Local access-key mixing — keys come from local state, not from a passphrase alone.</a:t>
             </a:r>
           </a:p>
           <a:p>
@@ -902,15 +930,51 @@
             </a:r>
             <a:r>
               <a:rPr b="1" sz="1700"/>
-              <a:t>ワン</a:t>
-            </a:r>
-            <a:r>
-              <a:rPr b="0" sz="1700"/>
-              <a:t>。 トゥースロット </a:t>
-            </a:r>
-            <a:r>
-              <a:rPr b="1" sz="1700"/>
-              <a:t>ストレージ</a:t>
+              <a:t>トゥー</a:t>
+            </a:r>
+            <a:r>
+              <a:rPr b="0" sz="1700"/>
+              <a:t>。 ローカル アクセスキー ミキシング — キーズ カム フロム </a:t>
+            </a:r>
+            <a:r>
+              <a:rPr b="1" sz="1700"/>
+              <a:t>ローカル ステイト</a:t>
+            </a:r>
+            <a:r>
+              <a:rPr b="0" sz="1700"/>
+              <a:t>、 ナット フロム ア パスフレイズ アロウン。</a:t>
+            </a:r>
+          </a:p>
+          <a:p>
+            <a:r>
+              <a:rPr b="0" sz="1700"/>
+              <a:t>Three. A restricted-action policy. It gates anything sensitive, and anything about recovery.</a:t>
+            </a:r>
+          </a:p>
+          <a:p>
+            <a:r>
+              <a:rPr b="0" sz="1700"/>
+              <a:t>  スリー。 ア </a:t>
+            </a:r>
+            <a:r>
+              <a:rPr b="1" sz="1700"/>
+              <a:t>リストリクテッド アクション</a:t>
+            </a:r>
+            <a:r>
+              <a:rPr b="0" sz="1700"/>
+              <a:t> ポリシー。 イット ゲイツ エニシング </a:t>
+            </a:r>
+            <a:r>
+              <a:rPr b="1" sz="1700"/>
+              <a:t>センシティブ</a:t>
+            </a:r>
+            <a:r>
+              <a:rPr b="0" sz="1700"/>
+              <a:t>、 アンド エニシング アバウト </a:t>
+            </a:r>
+            <a:r>
+              <a:rPr b="1" sz="1700"/>
+              <a:t>リカバリー</a:t>
             </a:r>
             <a:r>
               <a:rPr b="0" sz="1700"/>
@@ -920,85 +984,21 @@
           <a:p>
             <a:r>
               <a:rPr b="0" sz="1700"/>
-              <a:t>Two. Local access-key mixing — keys come from local state, not from a passphrase alone.</a:t>
-            </a:r>
-          </a:p>
-          <a:p>
-            <a:r>
-              <a:rPr b="0" sz="1700"/>
-              <a:t>  </a:t>
-            </a:r>
-            <a:r>
-              <a:rPr b="1" sz="1700"/>
-              <a:t>トゥー</a:t>
-            </a:r>
-            <a:r>
-              <a:rPr b="0" sz="1700"/>
-              <a:t>。 ローカル アクセスキー ミキシング — キーズ カム フロム </a:t>
-            </a:r>
-            <a:r>
-              <a:rPr b="1" sz="1700"/>
-              <a:t>ローカル ステイト</a:t>
-            </a:r>
-            <a:r>
-              <a:rPr b="0" sz="1700"/>
-              <a:t>、 ナット フロム ア パスフレイズ アロウン。</a:t>
-            </a:r>
-          </a:p>
-          <a:p>
-            <a:r>
-              <a:rPr b="0" sz="1700"/>
-              <a:t>Three. A restricted-action policy. It gates anything sensitive, and anything about recovery.</a:t>
-            </a:r>
-          </a:p>
-          <a:p>
-            <a:r>
-              <a:rPr b="0" sz="1700"/>
-              <a:t>  </a:t>
-            </a:r>
-            <a:r>
-              <a:rPr b="1" sz="1700"/>
-              <a:t>スリー</a:t>
-            </a:r>
-            <a:r>
-              <a:rPr b="0" sz="1700"/>
-              <a:t>。 ア リストリクティッドアクション ポリシー。 イット ゲイツ エニシング </a:t>
-            </a:r>
-            <a:r>
-              <a:rPr b="1" sz="1700"/>
-              <a:t>センシティブ</a:t>
-            </a:r>
-            <a:r>
-              <a:rPr b="0" sz="1700"/>
-              <a:t>、 アンド エニシング アバウト リカバリー。</a:t>
-            </a:r>
-          </a:p>
-          <a:p>
-            <a:r>
-              <a:rPr b="0" sz="1700"/>
               <a:t>Four. Capture-visible discipline.</a:t>
             </a:r>
           </a:p>
           <a:p>
             <a:r>
               <a:rPr b="0" sz="1700"/>
-              <a:t>  </a:t>
-            </a:r>
-            <a:r>
-              <a:rPr b="1" sz="1700"/>
-              <a:t>フォー</a:t>
-            </a:r>
-            <a:r>
-              <a:rPr b="0" sz="1700"/>
-              <a:t>。 キャプチャービジブル </a:t>
-            </a:r>
-            <a:r>
-              <a:rPr b="1" sz="1700"/>
-              <a:t>ディシプリン</a:t>
-            </a:r>
-            <a:r>
-              <a:rPr b="0" sz="1700"/>
-              <a:t>。</a:t>
+              <a:t>  フォー。 </a:t>
+            </a:r>
+            <a:r>
+              <a:rPr b="1" sz="1700"/>
+              <a:t>キャプチャー ビジブル</a:t>
+            </a:r>
+            <a:r>
+              <a:rPr b="0" sz="1700"/>
+              <a:t> ディシプリン。</a:t>
             </a:r>
           </a:p>
           <a:p>
@@ -1136,15 +1136,7 @@
           <a:p>
             <a:r>
               <a:rPr b="0" sz="1700"/>
-              <a:t>  アンダニース アー </a:t>
-            </a:r>
-            <a:r>
-              <a:rPr b="1" sz="1700"/>
-              <a:t>ナロウ ローカル レイヤーズ</a:t>
-            </a:r>
-            <a:r>
-              <a:rPr b="0" sz="1700"/>
-              <a:t>。</a:t>
+              <a:t>  アンダニース アー ナロー ローカル レイヤーズ。</a:t>
             </a:r>
           </a:p>
           <a:p>
@@ -1180,7 +1172,7 @@
             </a:r>
             <a:r>
               <a:rPr b="1" sz="1700"/>
-              <a:t>ドキュメンティッド</a:t>
+              <a:t>ドキュメンテッド</a:t>
             </a:r>
             <a:r>
               <a:rPr b="0" sz="1700"/>
@@ -1332,7 +1324,35 @@
           <a:p>
             <a:r>
               <a:rPr b="0" sz="1700"/>
-              <a:t>One — an encrypted local vessel. Authenticated encryption, password-derived keys.</a:t>
+              <a:t>One — an encrypted local vessel. Authenticated encryption. Keys made from your password.</a:t>
+            </a:r>
+          </a:p>
+          <a:p>
+            <a:r>
+              <a:rPr b="0" sz="1700"/>
+              <a:t>  ワン — アン インクリプテッド ローカル </a:t>
+            </a:r>
+            <a:r>
+              <a:rPr b="1" sz="1700"/>
+              <a:t>ベッセル</a:t>
+            </a:r>
+            <a:r>
+              <a:rPr b="0" sz="1700"/>
+              <a:t>。 オーセンティケイテッド インクリプション。 </a:t>
+            </a:r>
+            <a:r>
+              <a:rPr b="1" sz="1700"/>
+              <a:t>キーズ メイド フロム ユア パスワード</a:t>
+            </a:r>
+            <a:r>
+              <a:rPr b="0" sz="1700"/>
+              <a:t>。</a:t>
+            </a:r>
+          </a:p>
+          <a:p>
+            <a:r>
+              <a:rPr b="0" sz="1700"/>
+              <a:t>Two — object-cue operation. I’ll come right back to this. It’s the fun part.</a:t>
             </a:r>
           </a:p>
           <a:p>
@@ -1342,25 +1362,25 @@
             </a:r>
             <a:r>
               <a:rPr b="1" sz="1700"/>
-              <a:t>ワン</a:t>
-            </a:r>
-            <a:r>
-              <a:rPr b="0" sz="1700"/>
-              <a:t> — アン インクリプティッド ローカル </a:t>
-            </a:r>
-            <a:r>
-              <a:rPr b="1" sz="1700"/>
-              <a:t>ベッセル</a:t>
-            </a:r>
-            <a:r>
-              <a:rPr b="0" sz="1700"/>
-              <a:t>。 オーセンティケイティッド インクリプション、 パスワードディライブド キーズ。</a:t>
-            </a:r>
-          </a:p>
-          <a:p>
-            <a:r>
-              <a:rPr b="0" sz="1700"/>
-              <a:t>Two — object-cue operation. I’ll come right back to this. It’s the fun part.</a:t>
+              <a:t>トゥー</a:t>
+            </a:r>
+            <a:r>
+              <a:rPr b="0" sz="1700"/>
+              <a:t> — オブジェクトキュー オペレイション。 アイル カム ライト バック トゥ ディス。 イッツ ザ </a:t>
+            </a:r>
+            <a:r>
+              <a:rPr b="1" sz="1700"/>
+              <a:t>ファン パート</a:t>
+            </a:r>
+            <a:r>
+              <a:rPr b="0" sz="1700"/>
+              <a:t>。</a:t>
+            </a:r>
+          </a:p>
+          <a:p>
+            <a:r>
+              <a:rPr b="0" sz="1700"/>
+              <a:t>Three — controlled disclosure.</a:t>
             </a:r>
           </a:p>
           <a:p>
@@ -1370,34 +1390,6 @@
             </a:r>
             <a:r>
               <a:rPr b="1" sz="1700"/>
-              <a:t>トゥー</a:t>
-            </a:r>
-            <a:r>
-              <a:rPr b="0" sz="1700"/>
-              <a:t> — オブジェクトキュー オペレイション。 アイル カム ライト バック トゥ ディス。 イッツ ザ </a:t>
-            </a:r>
-            <a:r>
-              <a:rPr b="1" sz="1700"/>
-              <a:t>ファン パート</a:t>
-            </a:r>
-            <a:r>
-              <a:rPr b="0" sz="1700"/>
-              <a:t>。</a:t>
-            </a:r>
-          </a:p>
-          <a:p>
-            <a:r>
-              <a:rPr b="0" sz="1700"/>
-              <a:t>Three — controlled disclosure.</a:t>
-            </a:r>
-          </a:p>
-          <a:p>
-            <a:r>
-              <a:rPr b="0" sz="1700"/>
-              <a:t>  </a:t>
-            </a:r>
-            <a:r>
-              <a:rPr b="1" sz="1700"/>
               <a:t>スリー</a:t>
             </a:r>
             <a:r>
@@ -1428,7 +1420,7 @@
           <a:p>
             <a:r>
               <a:rPr b="0" sz="1700"/>
-              <a:t>You set three credentials.</a:t>
+              <a:t>You set three passwords.</a:t>
             </a:r>
           </a:p>
           <a:p>
@@ -1438,7 +1430,7 @@
             </a:r>
             <a:r>
               <a:rPr b="1" sz="1700"/>
-              <a:t>スリー クリデンシャルズ</a:t>
+              <a:t>スリー パスワーズ</a:t>
             </a:r>
             <a:r>
               <a:rPr b="0" sz="1700"/>
@@ -1851,19 +1843,23 @@
           <a:p>
             <a:r>
               <a:rPr b="0" sz="1700"/>
-              <a:t>  ザ クリプト ステイズ ウィズ </a:t>
-            </a:r>
-            <a:r>
-              <a:rPr b="1" sz="1700"/>
-              <a:t>アーゴン トゥー アイディー</a:t>
-            </a:r>
-            <a:r>
-              <a:rPr b="0" sz="1700"/>
-              <a:t> アンド </a:t>
-            </a:r>
-            <a:r>
-              <a:rPr b="1" sz="1700"/>
-              <a:t>エイ イー エス ジー シー エム</a:t>
+              <a:t>  ザ クリプト ステイズ ウィズ アーゴン ツー アイディー アンド エイ イー エス ジー シー エム。</a:t>
+            </a:r>
+          </a:p>
+          <a:p>
+            <a:r>
+              <a:rPr b="0" sz="1700"/>
+              <a:t>The object only decides whether you get to act.</a:t>
+            </a:r>
+          </a:p>
+          <a:p>
+            <a:r>
+              <a:rPr b="0" sz="1700"/>
+              <a:t>  ジ オブジェクト オンリー ディサイズ ウェザー ユー ゲット トゥ </a:t>
+            </a:r>
+            <a:r>
+              <a:rPr b="1" sz="1700"/>
+              <a:t>アクト</a:t>
             </a:r>
             <a:r>
               <a:rPr b="0" sz="1700"/>
@@ -1873,17 +1869,45 @@
           <a:p>
             <a:r>
               <a:rPr b="0" sz="1700"/>
-              <a:t>The object only decides whether you get to act.</a:t>
-            </a:r>
-          </a:p>
-          <a:p>
-            <a:r>
-              <a:rPr b="0" sz="1700"/>
-              <a:t>  ジ オブジェクト オンリー ディサイズ ウェザー ユー ゲット トゥ </a:t>
-            </a:r>
-            <a:r>
-              <a:rPr b="1" sz="1700"/>
-              <a:t>アクト</a:t>
+              <a:t>And you’ll watch this fail, live, in a few minutes.</a:t>
+            </a:r>
+          </a:p>
+          <a:p>
+            <a:r>
+              <a:rPr b="0" sz="1700"/>
+              <a:t>  アンド ユール ウォッチ ディス </a:t>
+            </a:r>
+            <a:r>
+              <a:rPr b="1" sz="1700"/>
+              <a:t>フェイル</a:t>
+            </a:r>
+            <a:r>
+              <a:rPr b="0" sz="1700"/>
+              <a:t>、 </a:t>
+            </a:r>
+            <a:r>
+              <a:rPr b="1" sz="1700"/>
+              <a:t>ライブ</a:t>
+            </a:r>
+            <a:r>
+              <a:rPr b="0" sz="1700"/>
+              <a:t>、 イン ア フュー ミニッツ。</a:t>
+            </a:r>
+          </a:p>
+          <a:p>
+            <a:r>
+              <a:rPr b="0" sz="1700"/>
+              <a:t>Same file. Same password. No object.”</a:t>
+            </a:r>
+          </a:p>
+          <a:p>
+            <a:r>
+              <a:rPr b="0" sz="1700"/>
+              <a:t>  セイム ファイル。 セイム パスワード。 </a:t>
+            </a:r>
+            <a:r>
+              <a:rPr b="1" sz="1700"/>
+              <a:t>ノウ オブジェクト</a:t>
             </a:r>
             <a:r>
               <a:rPr b="0" sz="1700"/>
@@ -1893,17 +1917,29 @@
           <a:p>
             <a:r>
               <a:rPr b="0" sz="1700"/>
-              <a:t>And you’ll watch this fail, live, in a few minutes.</a:t>
-            </a:r>
-          </a:p>
-          <a:p>
-            <a:r>
-              <a:rPr b="0" sz="1700"/>
-              <a:t>  アンド ユール ウォッチ ディス </a:t>
-            </a:r>
-            <a:r>
-              <a:rPr b="1" sz="1700"/>
-              <a:t>フェイル</a:t>
+              <a:t/>
+            </a:r>
+          </a:p>
+          <a:p>
+            <a:r>
+              <a:rPr b="0" sz="1700"/>
+              <a:t>SPEAK（決めゼリフ・間を置いて）</a:t>
+            </a:r>
+          </a:p>
+          <a:p>
+            <a:r>
+              <a:rPr b="0" sz="1700"/>
+              <a:t>“A cue, not a key. A photo of it unlocks nothing.”</a:t>
+            </a:r>
+          </a:p>
+          <a:p>
+            <a:r>
+              <a:rPr b="0" sz="1700"/>
+              <a:t>  ア </a:t>
+            </a:r>
+            <a:r>
+              <a:rPr b="1" sz="1700"/>
+              <a:t>キュー</a:t>
             </a:r>
             <a:r>
               <a:rPr b="0" sz="1700"/>
@@ -1911,27 +1947,15 @@
             </a:r>
             <a:r>
               <a:rPr b="1" sz="1700"/>
-              <a:t>ライブ</a:t>
-            </a:r>
-            <a:r>
-              <a:rPr b="0" sz="1700"/>
-              <a:t>、 イン ア フュー ミニッツ。</a:t>
-            </a:r>
-          </a:p>
-          <a:p>
-            <a:r>
-              <a:rPr b="0" sz="1700"/>
-              <a:t>Same file. Same password. No object.”</a:t>
-            </a:r>
-          </a:p>
-          <a:p>
-            <a:r>
-              <a:rPr b="0" sz="1700"/>
-              <a:t>  セイム ファイル。 セイム パスワード。 </a:t>
-            </a:r>
-            <a:r>
-              <a:rPr b="1" sz="1700"/>
-              <a:t>ノウ オブジェクト</a:t>
+              <a:t>ナット</a:t>
+            </a:r>
+            <a:r>
+              <a:rPr b="0" sz="1700"/>
+              <a:t> ア キー。 ア フォト オブ イット アンロックス </a:t>
+            </a:r>
+            <a:r>
+              <a:rPr b="1" sz="1700"/>
+              <a:t>ナッシング</a:t>
             </a:r>
             <a:r>
               <a:rPr b="0" sz="1700"/>
@@ -1946,56 +1970,8 @@
           </a:p>
           <a:p>
             <a:r>
-              <a:rPr b="0" sz="1700"/>
-              <a:t>SPEAK（決めゼリフ・間を置いて）</a:t>
-            </a:r>
-          </a:p>
-          <a:p>
-            <a:r>
-              <a:rPr b="0" sz="1700"/>
-              <a:t>“A cue, not a key. A photo of it unlocks nothing.”</a:t>
-            </a:r>
-          </a:p>
-          <a:p>
-            <a:r>
-              <a:rPr b="0" sz="1700"/>
-              <a:t>  ア </a:t>
-            </a:r>
-            <a:r>
-              <a:rPr b="1" sz="1700"/>
-              <a:t>キュー</a:t>
-            </a:r>
-            <a:r>
-              <a:rPr b="0" sz="1700"/>
-              <a:t>、 </a:t>
-            </a:r>
-            <a:r>
-              <a:rPr b="1" sz="1700"/>
-              <a:t>ナット</a:t>
-            </a:r>
-            <a:r>
-              <a:rPr b="0" sz="1700"/>
-              <a:t> ア キー。 ア フォト オブ イット アンロックス </a:t>
-            </a:r>
-            <a:r>
-              <a:rPr b="1" sz="1700"/>
-              <a:t>ナッシング</a:t>
-            </a:r>
-            <a:r>
-              <a:rPr b="0" sz="1700"/>
-              <a:t>。</a:t>
-            </a:r>
-          </a:p>
-          <a:p>
-            <a:r>
-              <a:rPr b="0" sz="1700"/>
-              <a:t/>
-            </a:r>
-          </a:p>
-          <a:p>
-            <a:r>
               <a:rPr b="0" sz="1200"/>
-              <a:t>JA: ゆっくり。手元の物体を掲げると効果的。最後の一文で Step 4 を予告する — 実証を約束しておくとデモの山が強くなる</a:t>
+              <a:t>JA: ゆっくり。手元の物体を掲げると効果的。最後の一文で SCENE 6・7 の拒否を予告する — 実証を約束しておくとデモの山が強くなる</a:t>
             </a:r>
           </a:p>
         </p:txBody>
@@ -2154,17 +2130,17 @@
           <a:p>
             <a:r>
               <a:rPr b="0" sz="1700"/>
-              <a:t>Coming back needs re-authentication.</a:t>
-            </a:r>
-          </a:p>
-          <a:p>
-            <a:r>
-              <a:rPr b="0" sz="1700"/>
-              <a:t>  カミング バック ニーズ </a:t>
-            </a:r>
-            <a:r>
-              <a:rPr b="1" sz="1700"/>
-              <a:t>リーオーセンティケイション</a:t>
+              <a:t>To come back, you sign in again.</a:t>
+            </a:r>
+          </a:p>
+          <a:p>
+            <a:r>
+              <a:rPr b="0" sz="1700"/>
+              <a:t>  トゥ カム バック、 ユー </a:t>
+            </a:r>
+            <a:r>
+              <a:rPr b="1" sz="1700"/>
+              <a:t>サイン イン アゲイン</a:t>
             </a:r>
             <a:r>
               <a:rPr b="0" sz="1700"/>
@@ -2188,7 +2164,7 @@
             </a:r>
             <a:r>
               <a:rPr b="0" sz="1700"/>
-              <a:t>。 アンド アイ ワナ ビー </a:t>
+              <a:t>。 アンド アイ ウォント トゥ ビー </a:t>
             </a:r>
             <a:r>
               <a:rPr b="1" sz="1700"/>
@@ -2242,41 +2218,41 @@
           <a:p>
             <a:r>
               <a:rPr b="0" sz="1700"/>
-              <a:t>Phasmid does not manufacture your cover story.</a:t>
-            </a:r>
-          </a:p>
-          <a:p>
-            <a:r>
-              <a:rPr b="0" sz="1700"/>
-              <a:t>  ファズミッド ダズ </a:t>
-            </a:r>
-            <a:r>
-              <a:rPr b="1" sz="1700"/>
-              <a:t>ナット</a:t>
-            </a:r>
-            <a:r>
-              <a:rPr b="0" sz="1700"/>
-              <a:t> マニュファクチャー ユア カバー ストーリー。</a:t>
-            </a:r>
-          </a:p>
-          <a:p>
-            <a:r>
-              <a:rPr b="0" sz="1700"/>
-              <a:t>Generated data would not survive five minutes of questioning.</a:t>
-            </a:r>
-          </a:p>
-          <a:p>
-            <a:r>
-              <a:rPr b="0" sz="1700"/>
-              <a:t>  ジェネレイティッド データ ウド ナット </a:t>
-            </a:r>
-            <a:r>
-              <a:rPr b="1" sz="1700"/>
-              <a:t>サバイブ</a:t>
-            </a:r>
-            <a:r>
-              <a:rPr b="0" sz="1700"/>
-              <a:t> ファイブ ミニッツ オブ クエスチョニング。</a:t>
+              <a:t>Phasmid does not make up your cover story.</a:t>
+            </a:r>
+          </a:p>
+          <a:p>
+            <a:r>
+              <a:rPr b="0" sz="1700"/>
+              <a:t>  ファズミッド ダズ ナット </a:t>
+            </a:r>
+            <a:r>
+              <a:rPr b="1" sz="1700"/>
+              <a:t>メイク アップ</a:t>
+            </a:r>
+            <a:r>
+              <a:rPr b="0" sz="1700"/>
+              <a:t> ユア カバー ストーリー。</a:t>
+            </a:r>
+          </a:p>
+          <a:p>
+            <a:r>
+              <a:rPr b="0" sz="1700"/>
+              <a:t>Made-up data would not survive five minutes of questions.</a:t>
+            </a:r>
+          </a:p>
+          <a:p>
+            <a:r>
+              <a:rPr b="0" sz="1700"/>
+              <a:t>  </a:t>
+            </a:r>
+            <a:r>
+              <a:rPr b="1" sz="1700"/>
+              <a:t>メイドアップ データ</a:t>
+            </a:r>
+            <a:r>
+              <a:rPr b="0" sz="1700"/>
+              <a:t> ウド ナット サバイブ ファイブ ミニッツ オブ クエスチョンズ。</a:t>
             </a:r>
           </a:p>
           <a:p>
@@ -2302,21 +2278,29 @@
           <a:p>
             <a:r>
               <a:rPr b="0" sz="1700"/>
-              <a:t>Realism has to come from your own material — not from my random-text generator.</a:t>
-            </a:r>
-          </a:p>
-          <a:p>
-            <a:r>
-              <a:rPr b="0" sz="1700"/>
-              <a:t>  </a:t>
-            </a:r>
-            <a:r>
-              <a:rPr b="1" sz="1700"/>
-              <a:t>リアリズム</a:t>
-            </a:r>
-            <a:r>
-              <a:rPr b="0" sz="1700"/>
-              <a:t> ハズ トゥ カム フロム ユア オウン マテリアル — ナット フロム マイ ランダムテクスト ジェネレイター。</a:t>
+              <a:t>It has to be yours — not text my tool made up.</a:t>
+            </a:r>
+          </a:p>
+          <a:p>
+            <a:r>
+              <a:rPr b="0" sz="1700"/>
+              <a:t>  イット ハズ トゥ ビー </a:t>
+            </a:r>
+            <a:r>
+              <a:rPr b="1" sz="1700"/>
+              <a:t>ユアーズ</a:t>
+            </a:r>
+            <a:r>
+              <a:rPr b="0" sz="1700"/>
+              <a:t> — ナット テクスト マイ ツール </a:t>
+            </a:r>
+            <a:r>
+              <a:rPr b="1" sz="1700"/>
+              <a:t>メイド アップ</a:t>
+            </a:r>
+            <a:r>
+              <a:rPr b="0" sz="1700"/>
+              <a:t>。</a:t>
             </a:r>
           </a:p>
           <a:p>
@@ -2408,11 +2392,11 @@
             </a:r>
             <a:r>
               <a:rPr b="1" sz="1700"/>
-              <a:t>コンテクスト プロウファイルズ</a:t>
-            </a:r>
-            <a:r>
-              <a:rPr b="0" sz="1700"/>
-              <a:t>。 トラブル。 フィールド エンジニア。 リサーチャー。</a:t>
+              <a:t>コンテクスト プロファイルズ</a:t>
+            </a:r>
+            <a:r>
+              <a:rPr b="0" sz="1700"/>
+              <a:t>。 トラベル。 フィールド エンジニア。 リサーチャー。</a:t>
             </a:r>
           </a:p>
           <a:p>
@@ -2438,37 +2422,25 @@
           <a:p>
             <a:r>
               <a:rPr b="0" sz="1700"/>
-              <a:t>And in coercion-safe mode, a low-confidence match goes to the disclosure face, instead of failing loudly.</a:t>
-            </a:r>
-          </a:p>
-          <a:p>
-            <a:r>
-              <a:rPr b="0" sz="1700"/>
-              <a:t>  アンド イン コアージョンセイフ モウド、 ア ロウ コンフィデンス マッチ ゴウズ トゥ ザ </a:t>
-            </a:r>
-            <a:r>
-              <a:rPr b="1" sz="1700"/>
-              <a:t>ディスクロージャー フェイス</a:t>
-            </a:r>
-            <a:r>
-              <a:rPr b="0" sz="1700"/>
-              <a:t>、 インステッド オブ フェイリング ラウドリー。</a:t>
-            </a:r>
-          </a:p>
-          <a:p>
-            <a:r>
-              <a:rPr b="0" sz="1700"/>
-              <a:t>The goal isn’t magic invisibility.</a:t>
-            </a:r>
-          </a:p>
-          <a:p>
-            <a:r>
-              <a:rPr b="0" sz="1700"/>
-              <a:t>  ザ ゴウル イズント </a:t>
-            </a:r>
-            <a:r>
-              <a:rPr b="1" sz="1700"/>
-              <a:t>マジック インビジビリティ</a:t>
+              <a:t>And in coercion-safe mode, a weak match goes to the disclosure face — it does not fail loudly.</a:t>
+            </a:r>
+          </a:p>
+          <a:p>
+            <a:r>
+              <a:rPr b="0" sz="1700"/>
+              <a:t>  アンド イン コアージョンセイフ モード、 ア </a:t>
+            </a:r>
+            <a:r>
+              <a:rPr b="1" sz="1700"/>
+              <a:t>ウィーク マッチ</a:t>
+            </a:r>
+            <a:r>
+              <a:rPr b="0" sz="1700"/>
+              <a:t> ゴーズ トゥ ザ ディスクロージャー フェイス — イット ダズ </a:t>
+            </a:r>
+            <a:r>
+              <a:rPr b="1" sz="1700"/>
+              <a:t>ナット フェイル ラウドリー</a:t>
             </a:r>
             <a:r>
               <a:rPr b="0" sz="1700"/>
@@ -2478,17 +2450,37 @@
           <a:p>
             <a:r>
               <a:rPr b="0" sz="1700"/>
-              <a:t>The goal is uncertainty, and delay.”</a:t>
-            </a:r>
-          </a:p>
-          <a:p>
-            <a:r>
-              <a:rPr b="0" sz="1700"/>
-              <a:t>  ザ ゴウル イズ </a:t>
-            </a:r>
-            <a:r>
-              <a:rPr b="1" sz="1700"/>
-              <a:t>アンサートゥンティ</a:t>
+              <a:t>The goal is not to be invisible.</a:t>
+            </a:r>
+          </a:p>
+          <a:p>
+            <a:r>
+              <a:rPr b="0" sz="1700"/>
+              <a:t>  ザ ゴール イズ </a:t>
+            </a:r>
+            <a:r>
+              <a:rPr b="1" sz="1700"/>
+              <a:t>ナット トゥ ビー インビジブル</a:t>
+            </a:r>
+            <a:r>
+              <a:rPr b="0" sz="1700"/>
+              <a:t>。</a:t>
+            </a:r>
+          </a:p>
+          <a:p>
+            <a:r>
+              <a:rPr b="0" sz="1700"/>
+              <a:t>The goal is doubt, and time.”</a:t>
+            </a:r>
+          </a:p>
+          <a:p>
+            <a:r>
+              <a:rPr b="0" sz="1700"/>
+              <a:t>  ザ ゴール イズ </a:t>
+            </a:r>
+            <a:r>
+              <a:rPr b="1" sz="1700"/>
+              <a:t>ダウト</a:t>
             </a:r>
             <a:r>
               <a:rPr b="0" sz="1700"/>
@@ -2496,7 +2488,7 @@
             </a:r>
             <a:r>
               <a:rPr b="1" sz="1700"/>
-              <a:t>ディレイ</a:t>
+              <a:t>タイム</a:t>
             </a:r>
             <a:r>
               <a:rPr b="0" sz="1700"/>
@@ -2512,7 +2504,7 @@
           <a:p>
             <a:r>
               <a:rPr b="0" sz="1200"/>
-              <a:t>JA: 本トークで最も誤解されやすい点。「ツールが囮を作る」と思われた瞬間に設計の真実味が全部落ちる。「囮は利用者が用意する」と「填充は空き領域対策に過ぎない」を分けて言い切る。Silent Standby はデモで見せると予告</a:t>
+              <a:t>JA: 本トークで最も誤解されやすい点。「ツールが囮を作る」と思われた瞬間に設計の真実味が全部落ちる。「囮は利用者が用意する」と「填充は空き領域対策に過ぎない」を分けて言い切る。Silent Standby はデモで見せないので予告しない — 概念としてここで説明しきる</a:t>
             </a:r>
           </a:p>
         </p:txBody>
@@ -2638,7 +2630,7 @@
           <a:p>
             <a:r>
               <a:rPr b="0" sz="1700"/>
-              <a:t>  ザ ボルト ファイル </a:t>
+              <a:t>  ザ ボールト ファイル </a:t>
             </a:r>
             <a:r>
               <a:rPr b="1" sz="1700"/>
@@ -2672,29 +2664,29 @@
           <a:p>
             <a:r>
               <a:rPr b="0" sz="1700"/>
-              <a:t>And metadata reduction is best-effort. Support — not sanitization.</a:t>
-            </a:r>
-          </a:p>
-          <a:p>
-            <a:r>
-              <a:rPr b="0" sz="1700"/>
-              <a:t>  アンド メタデータ リダクション イズ </a:t>
-            </a:r>
-            <a:r>
-              <a:rPr b="1" sz="1700"/>
-              <a:t>ベスト エフォート</a:t>
-            </a:r>
-            <a:r>
-              <a:rPr b="0" sz="1700"/>
-              <a:t>。 サポート — </a:t>
-            </a:r>
-            <a:r>
-              <a:rPr b="1" sz="1700"/>
-              <a:t>ナット</a:t>
-            </a:r>
-            <a:r>
-              <a:rPr b="0" sz="1700"/>
-              <a:t> サニタイゼイション。</a:t>
+              <a:t>And metadata reduction is best-effort. It helps — it does not clean.</a:t>
+            </a:r>
+          </a:p>
+          <a:p>
+            <a:r>
+              <a:rPr b="0" sz="1700"/>
+              <a:t>  アンド メタデータ リダクション イズ ベスト エフォート。 イット </a:t>
+            </a:r>
+            <a:r>
+              <a:rPr b="1" sz="1700"/>
+              <a:t>ヘルプス</a:t>
+            </a:r>
+            <a:r>
+              <a:rPr b="0" sz="1700"/>
+              <a:t> — イット ダズ </a:t>
+            </a:r>
+            <a:r>
+              <a:rPr b="1" sz="1700"/>
+              <a:t>ナット クリーン</a:t>
+            </a:r>
+            <a:r>
+              <a:rPr b="0" sz="1700"/>
+              <a:t>。</a:t>
             </a:r>
           </a:p>
           <a:p>
@@ -2806,101 +2798,101 @@
           <a:p>
             <a:r>
               <a:rPr b="0" sz="1700"/>
-              <a:t>Operationally, it’s four steps.</a:t>
-            </a:r>
-          </a:p>
-          <a:p>
-            <a:r>
-              <a:rPr b="0" sz="1700"/>
-              <a:t>  オペレイショナリー、 イッツ </a:t>
-            </a:r>
-            <a:r>
-              <a:rPr b="1" sz="1700"/>
-              <a:t>フォー ステップス</a:t>
+              <a:t>In practice, it is four steps.</a:t>
+            </a:r>
+          </a:p>
+          <a:p>
+            <a:r>
+              <a:rPr b="0" sz="1700"/>
+              <a:t>  </a:t>
+            </a:r>
+            <a:r>
+              <a:rPr b="1" sz="1700"/>
+              <a:t>イン プラクティス</a:t>
+            </a:r>
+            <a:r>
+              <a:rPr b="0" sz="1700"/>
+              <a:t>、 イッツ フォー ステップス。</a:t>
+            </a:r>
+          </a:p>
+          <a:p>
+            <a:r>
+              <a:rPr b="0" sz="1700"/>
+              <a:t>Prepare a vessel.</a:t>
+            </a:r>
+          </a:p>
+          <a:p>
+            <a:r>
+              <a:rPr b="0" sz="1700"/>
+              <a:t>  </a:t>
+            </a:r>
+            <a:r>
+              <a:rPr b="1" sz="1700"/>
+              <a:t>プリペア</a:t>
+            </a:r>
+            <a:r>
+              <a:rPr b="0" sz="1700"/>
+              <a:t> ア ベッセル。</a:t>
+            </a:r>
+          </a:p>
+          <a:p>
+            <a:r>
+              <a:rPr b="0" sz="1700"/>
+              <a:t>Bind it — to local state, and to the object cue.</a:t>
+            </a:r>
+          </a:p>
+          <a:p>
+            <a:r>
+              <a:rPr b="0" sz="1700"/>
+              <a:t>  </a:t>
+            </a:r>
+            <a:r>
+              <a:rPr b="1" sz="1700"/>
+              <a:t>バインド</a:t>
+            </a:r>
+            <a:r>
+              <a:rPr b="0" sz="1700"/>
+              <a:t> イット — トゥ ローカル ステイト、 アンド トゥ ジ オブジェクト キュー。</a:t>
+            </a:r>
+          </a:p>
+          <a:p>
+            <a:r>
+              <a:rPr b="0" sz="1700"/>
+              <a:t>Operate it — through the CLI, the TUI, or the local web interface.</a:t>
+            </a:r>
+          </a:p>
+          <a:p>
+            <a:r>
+              <a:rPr b="0" sz="1700"/>
+              <a:t>  </a:t>
+            </a:r>
+            <a:r>
+              <a:rPr b="1" sz="1700"/>
+              <a:t>オペレイト</a:t>
+            </a:r>
+            <a:r>
+              <a:rPr b="0" sz="1700"/>
+              <a:t> イット — スルー ザ シー エル アイ、 ザ ティー ユー アイ、 オア ザ ローカル ウェブ インターフェイス。</a:t>
+            </a:r>
+          </a:p>
+          <a:p>
+            <a:r>
+              <a:rPr b="0" sz="1700"/>
+              <a:t>Disclose — controlled, under assumptions we wrote down.</a:t>
+            </a:r>
+          </a:p>
+          <a:p>
+            <a:r>
+              <a:rPr b="0" sz="1700"/>
+              <a:t>  ディスクローズ — コントロールド、 アンダー アサンプションズ </a:t>
+            </a:r>
+            <a:r>
+              <a:rPr b="1" sz="1700"/>
+              <a:t>ウィー ロート ダウン</a:t>
             </a:r>
             <a:r>
               <a:rPr b="0" sz="1700"/>
               <a:t>。</a:t>
-            </a:r>
-          </a:p>
-          <a:p>
-            <a:r>
-              <a:rPr b="0" sz="1700"/>
-              <a:t>Prepare a vessel.</a:t>
-            </a:r>
-          </a:p>
-          <a:p>
-            <a:r>
-              <a:rPr b="0" sz="1700"/>
-              <a:t>  </a:t>
-            </a:r>
-            <a:r>
-              <a:rPr b="1" sz="1700"/>
-              <a:t>プリペア</a:t>
-            </a:r>
-            <a:r>
-              <a:rPr b="0" sz="1700"/>
-              <a:t> ア ベッセル。</a:t>
-            </a:r>
-          </a:p>
-          <a:p>
-            <a:r>
-              <a:rPr b="0" sz="1700"/>
-              <a:t>Bind it — to local state, and to the object cue.</a:t>
-            </a:r>
-          </a:p>
-          <a:p>
-            <a:r>
-              <a:rPr b="0" sz="1700"/>
-              <a:t>  </a:t>
-            </a:r>
-            <a:r>
-              <a:rPr b="1" sz="1700"/>
-              <a:t>バインド</a:t>
-            </a:r>
-            <a:r>
-              <a:rPr b="0" sz="1700"/>
-              <a:t> イット — トゥ ローカル ステイト、 アンド トゥ ジ オブジェクト キュー。</a:t>
-            </a:r>
-          </a:p>
-          <a:p>
-            <a:r>
-              <a:rPr b="0" sz="1700"/>
-              <a:t>Operate it — through the CLI, the TUI, or the local web interface.</a:t>
-            </a:r>
-          </a:p>
-          <a:p>
-            <a:r>
-              <a:rPr b="0" sz="1700"/>
-              <a:t>  </a:t>
-            </a:r>
-            <a:r>
-              <a:rPr b="1" sz="1700"/>
-              <a:t>オペレイト</a:t>
-            </a:r>
-            <a:r>
-              <a:rPr b="0" sz="1700"/>
-              <a:t> イット — スルー ザ シー エル アイ、 ザ ティー ユー アイ、 オア ザ ローカル ウェブ インターフェイス。</a:t>
-            </a:r>
-          </a:p>
-          <a:p>
-            <a:r>
-              <a:rPr b="0" sz="1700"/>
-              <a:t>Disclose — controlled, under documented assumptions.</a:t>
-            </a:r>
-          </a:p>
-          <a:p>
-            <a:r>
-              <a:rPr b="0" sz="1700"/>
-              <a:t>  </a:t>
-            </a:r>
-            <a:r>
-              <a:rPr b="1" sz="1700"/>
-              <a:t>ディスクロウズ</a:t>
-            </a:r>
-            <a:r>
-              <a:rPr b="0" sz="1700"/>
-              <a:t> — コントロールド、 アンダー ドキュメンティッド アサンプションズ。</a:t>
             </a:r>
           </a:p>
           <a:p>
@@ -3064,7 +3056,27 @@
           <a:p>
             <a:r>
               <a:rPr b="0" sz="1700"/>
-              <a:t>Argon2id for key derivation.</a:t>
+              <a:t>Argon2id turns a password into a key.</a:t>
+            </a:r>
+          </a:p>
+          <a:p>
+            <a:r>
+              <a:rPr b="0" sz="1700"/>
+              <a:t>  アーゴン ツー アイディー </a:t>
+            </a:r>
+            <a:r>
+              <a:rPr b="1" sz="1700"/>
+              <a:t>ターンズ ア パスワード イントゥ ア キー</a:t>
+            </a:r>
+            <a:r>
+              <a:rPr b="0" sz="1700"/>
+              <a:t>。</a:t>
+            </a:r>
+          </a:p>
+          <a:p>
+            <a:r>
+              <a:rPr b="0" sz="1700"/>
+              <a:t>AES-GCM for authenticated encryption.</a:t>
             </a:r>
           </a:p>
           <a:p>
@@ -3074,31 +3086,11 @@
             </a:r>
             <a:r>
               <a:rPr b="1" sz="1700"/>
-              <a:t>アーゴン トゥー アイディー</a:t>
-            </a:r>
-            <a:r>
-              <a:rPr b="0" sz="1700"/>
-              <a:t> フォー キー デリベイション。</a:t>
-            </a:r>
-          </a:p>
-          <a:p>
-            <a:r>
-              <a:rPr b="0" sz="1700"/>
-              <a:t>AES-GCM for authenticated encryption.</a:t>
-            </a:r>
-          </a:p>
-          <a:p>
-            <a:r>
-              <a:rPr b="0" sz="1700"/>
-              <a:t>  </a:t>
-            </a:r>
-            <a:r>
-              <a:rPr b="1" sz="1700"/>
               <a:t>エイ イー エス ジー シー エム</a:t>
             </a:r>
             <a:r>
               <a:rPr b="0" sz="1700"/>
-              <a:t> フォー オーセンティケイティッド インクリプション。</a:t>
+              <a:t> フォー オーセンティケイテッド インクリプション。</a:t>
             </a:r>
           </a:p>
           <a:p>
@@ -3110,15 +3102,7 @@
           <a:p>
             <a:r>
               <a:rPr b="0" sz="1700"/>
-              <a:t>  ザ ウェブ インターフェイス バウンド トゥ </a:t>
-            </a:r>
-            <a:r>
-              <a:rPr b="1" sz="1700"/>
-              <a:t>ローカルホウスト</a:t>
-            </a:r>
-            <a:r>
-              <a:rPr b="0" sz="1700"/>
-              <a:t>。</a:t>
+              <a:t>  ザ ウェブ インターフェイス バウンド トゥ ローカルホスト。</a:t>
             </a:r>
           </a:p>
           <a:p>
@@ -3336,7 +3320,7 @@
             </a:r>
             <a:r>
               <a:rPr b="1" sz="1700"/>
-              <a:t>スリーディー プリンティッド ケイス</a:t>
+              <a:t>スリーディー プリンテッド ケイス</a:t>
             </a:r>
             <a:r>
               <a:rPr b="0" sz="1700"/>
@@ -3380,15 +3364,7 @@
           <a:p>
             <a:r>
               <a:rPr b="0" sz="1700"/>
-              <a:t>  ユー リーチ ザ ウェブ インターフェイス オーバー </a:t>
-            </a:r>
-            <a:r>
-              <a:rPr b="1" sz="1700"/>
-              <a:t>ユー エス ビー</a:t>
-            </a:r>
-            <a:r>
-              <a:rPr b="0" sz="1700"/>
-              <a:t>、 アット ローカルホウスト。</a:t>
+              <a:t>  ユー リーチ ザ ウェブ インターフェイス オーバー ユー エス ビー、 アット ローカルホスト。</a:t>
             </a:r>
           </a:p>
           <a:p>
@@ -3414,21 +3390,29 @@
           <a:p>
             <a:r>
               <a:rPr b="0" sz="1700"/>
-              <a:t>It’s meant to read as an unremarkable little gadget.</a:t>
-            </a:r>
-          </a:p>
-          <a:p>
-            <a:r>
-              <a:rPr b="0" sz="1700"/>
-              <a:t>  イッツ メント トゥ リード アズ アン アンリマーカブル リトル </a:t>
-            </a:r>
-            <a:r>
-              <a:rPr b="1" sz="1700"/>
-              <a:t>ガジェット</a:t>
-            </a:r>
-            <a:r>
-              <a:rPr b="0" sz="1700"/>
-              <a:t>。</a:t>
+              <a:t>It is meant to look like a boring little gadget.</a:t>
+            </a:r>
+          </a:p>
+          <a:p>
+            <a:r>
+              <a:rPr b="0" sz="1700"/>
+              <a:t>  イット イズ メント トゥ </a:t>
+            </a:r>
+            <a:r>
+              <a:rPr b="1" sz="1700"/>
+              <a:t>ルック ライク</a:t>
+            </a:r>
+            <a:r>
+              <a:rPr b="0" sz="1700"/>
+              <a:t> ア </a:t>
+            </a:r>
+            <a:r>
+              <a:rPr b="1" sz="1700"/>
+              <a:t>ボーリング</a:t>
+            </a:r>
+            <a:r>
+              <a:rPr b="0" sz="1700"/>
+              <a:t> リトル ガジェット。</a:t>
             </a:r>
           </a:p>
           <a:p>
@@ -3614,15 +3598,7 @@
           <a:p>
             <a:r>
               <a:rPr b="0" sz="1700"/>
-              <a:t>  アーゴン トゥー アイディー、 ウィズ </a:t>
-            </a:r>
-            <a:r>
-              <a:rPr b="1" sz="1700"/>
-              <a:t>ローカル アクセスキー マテリアル</a:t>
-            </a:r>
-            <a:r>
-              <a:rPr b="0" sz="1700"/>
-              <a:t> ミクスト イン、 アンド デバイス バインディング。</a:t>
+              <a:t>  アーゴン ツー アイディー、 ウィズ ローカル アクセスキー マテリアル ミクスト イン、 アンド デバイス バインディング。</a:t>
             </a:r>
           </a:p>
           <a:p>
@@ -3670,7 +3646,7 @@
             </a:r>
             <a:r>
               <a:rPr b="0" sz="1700"/>
-              <a:t>、 ウィズ オーセンティケイティッド メタデータ。</a:t>
+              <a:t>、 ウィズ オーセンティケイテッド メタデータ。</a:t>
             </a:r>
           </a:p>
           <a:p>
@@ -3690,7 +3666,7 @@
             </a:r>
             <a:r>
               <a:rPr b="0" sz="1700"/>
-              <a:t> イン ザ ボルト。</a:t>
+              <a:t> イン ザ ボールト。</a:t>
             </a:r>
           </a:p>
           <a:p>
@@ -4040,7 +4016,7 @@
           <a:p>
             <a:r>
               <a:rPr b="0" sz="1700"/>
-              <a:t>  ブラック ハット アーサナル。 ビーサイズ。 セクター。 コウド ブルー。</a:t>
+              <a:t>  ブラック ハット アーサナル。 ビーサイズ。 セクター。 コード ブルー。</a:t>
             </a:r>
           </a:p>
           <a:p>
@@ -4172,7 +4148,7 @@
           <a:p>
             <a:r>
               <a:rPr b="0" sz="1700"/>
-              <a:t>And the web interface is hardened — not an afterthought.</a:t>
+              <a:t>And the web interface is hardened — not bolted on later.</a:t>
             </a:r>
           </a:p>
           <a:p>
@@ -4186,7 +4162,15 @@
             </a:r>
             <a:r>
               <a:rPr b="0" sz="1700"/>
-              <a:t> — ナット アン アフターソート。</a:t>
+              <a:t> — ナット </a:t>
+            </a:r>
+            <a:r>
+              <a:rPr b="1" sz="1700"/>
+              <a:t>ボルテッド オン レイター</a:t>
+            </a:r>
+            <a:r>
+              <a:rPr b="0" sz="1700"/>
+              <a:t>。</a:t>
             </a:r>
           </a:p>
           <a:p>
@@ -4198,7 +4182,23 @@
           <a:p>
             <a:r>
               <a:rPr b="0" sz="1700"/>
-              <a:t>  ローカルホウスト バインディング。 パープロセス トウクンズ。</a:t>
+              <a:t>  </a:t>
+            </a:r>
+            <a:r>
+              <a:rPr b="1" sz="1700"/>
+              <a:t>ローカルホスト</a:t>
+            </a:r>
+            <a:r>
+              <a:rPr b="0" sz="1700"/>
+              <a:t> バインディング。 パープロセス </a:t>
+            </a:r>
+            <a:r>
+              <a:rPr b="1" sz="1700"/>
+              <a:t>トークンズ</a:t>
+            </a:r>
+            <a:r>
+              <a:rPr b="0" sz="1700"/>
+              <a:t>。</a:t>
             </a:r>
           </a:p>
           <a:p>
@@ -4210,15 +4210,15 @@
           <a:p>
             <a:r>
               <a:rPr b="0" sz="1700"/>
-              <a:t>  ア リストリクティッド コンファメイション セッション: </a:t>
-            </a:r>
-            <a:r>
-              <a:rPr b="1" sz="1700"/>
-              <a:t>エイチ ティー ティー ピー オンリー</a:t>
-            </a:r>
-            <a:r>
-              <a:rPr b="0" sz="1700"/>
-              <a:t>、 アンド ショートリブド。</a:t>
+              <a:t>  ア </a:t>
+            </a:r>
+            <a:r>
+              <a:rPr b="1" sz="1700"/>
+              <a:t>リストリクテッド コンファメイション</a:t>
+            </a:r>
+            <a:r>
+              <a:rPr b="0" sz="1700"/>
+              <a:t> セッション: エイチ ティー ティー ピー オンリー、 アンド ショートリブド。</a:t>
             </a:r>
           </a:p>
           <a:p>
@@ -4437,39 +4437,47 @@
           <a:p>
             <a:r>
               <a:rPr b="0" sz="1700"/>
-              <a:t>It explicitly disallows rootkits. Kernel-level hiding.</a:t>
-            </a:r>
-          </a:p>
-          <a:p>
-            <a:r>
-              <a:rPr b="0" sz="1700"/>
-              <a:t>  イット エクスプリシットリー </a:t>
-            </a:r>
-            <a:r>
-              <a:rPr b="1" sz="1700"/>
-              <a:t>ディサラウズ</a:t>
-            </a:r>
-            <a:r>
-              <a:rPr b="0" sz="1700"/>
-              <a:t> ルートキッツ。 カーネルレブル ハイディング。</a:t>
-            </a:r>
-          </a:p>
-          <a:p>
-            <a:r>
-              <a:rPr b="0" sz="1700"/>
-              <a:t>Anti-forensic destruction. Forensic-tool bypass.</a:t>
-            </a:r>
-          </a:p>
-          <a:p>
-            <a:r>
-              <a:rPr b="0" sz="1700"/>
-              <a:t>  アンティフォレンシック ディストラクション。 フォレンシック ツール バイパス。</a:t>
-            </a:r>
-          </a:p>
-          <a:p>
-            <a:r>
-              <a:rPr b="0" sz="1700"/>
-              <a:t>And fabricating false events, or false timestamps.</a:t>
+              <a:t>It rules out rootkits. Kernel-level hiding.</a:t>
+            </a:r>
+          </a:p>
+          <a:p>
+            <a:r>
+              <a:rPr b="0" sz="1700"/>
+              <a:t>  イット </a:t>
+            </a:r>
+            <a:r>
+              <a:rPr b="1" sz="1700"/>
+              <a:t>ルールズ アウト</a:t>
+            </a:r>
+            <a:r>
+              <a:rPr b="0" sz="1700"/>
+              <a:t> ルートキッツ。 カーネルレベル ハイディング。</a:t>
+            </a:r>
+          </a:p>
+          <a:p>
+            <a:r>
+              <a:rPr b="0" sz="1700"/>
+              <a:t>Anti-forensic wiping. Forensic-tool bypass.</a:t>
+            </a:r>
+          </a:p>
+          <a:p>
+            <a:r>
+              <a:rPr b="0" sz="1700"/>
+              <a:t>  アンティフォレンジック </a:t>
+            </a:r>
+            <a:r>
+              <a:rPr b="1" sz="1700"/>
+              <a:t>ワイピング</a:t>
+            </a:r>
+            <a:r>
+              <a:rPr b="0" sz="1700"/>
+              <a:t>。 フォレンジック ツール バイパス。</a:t>
+            </a:r>
+          </a:p>
+          <a:p>
+            <a:r>
+              <a:rPr b="0" sz="1700"/>
+              <a:t>And making up false events, or false timestamps.</a:t>
             </a:r>
           </a:p>
           <a:p>
@@ -4479,7 +4487,7 @@
             </a:r>
             <a:r>
               <a:rPr b="1" sz="1700"/>
-              <a:t>ファブリケイティング</a:t>
+              <a:t>メイキング アップ</a:t>
             </a:r>
             <a:r>
               <a:rPr b="0" sz="1700"/>
@@ -4489,7 +4497,7 @@
           <a:p>
             <a:r>
               <a:rPr b="0" sz="1700"/>
-              <a:t>It increases uncertainty. It delays a confident conclusion.</a:t>
+              <a:t>It adds doubt. It delays a confident answer.</a:t>
             </a:r>
           </a:p>
           <a:p>
@@ -4499,39 +4507,39 @@
             </a:r>
             <a:r>
               <a:rPr b="1" sz="1700"/>
-              <a:t>インクリーシズ</a:t>
-            </a:r>
-            <a:r>
-              <a:rPr b="0" sz="1700"/>
-              <a:t> アンサートゥンティ。 イット </a:t>
-            </a:r>
-            <a:r>
-              <a:rPr b="1" sz="1700"/>
-              <a:t>ディレイズ</a:t>
-            </a:r>
-            <a:r>
-              <a:rPr b="0" sz="1700"/>
-              <a:t> ア コンフィデント コンクルージョン。</a:t>
-            </a:r>
-          </a:p>
-          <a:p>
-            <a:r>
-              <a:rPr b="0" sz="1700"/>
-              <a:t>It does not claim forensic invisibility.</a:t>
-            </a:r>
-          </a:p>
-          <a:p>
-            <a:r>
-              <a:rPr b="0" sz="1700"/>
-              <a:t>  イット ダズ </a:t>
-            </a:r>
-            <a:r>
-              <a:rPr b="1" sz="1700"/>
-              <a:t>ナット</a:t>
-            </a:r>
-            <a:r>
-              <a:rPr b="0" sz="1700"/>
-              <a:t> クレイム フォレンシック インビジビリティ。</a:t>
+              <a:t>アッズ ダウト</a:t>
+            </a:r>
+            <a:r>
+              <a:rPr b="0" sz="1700"/>
+              <a:t>。 イット ディレイズ ア コンフィデント </a:t>
+            </a:r>
+            <a:r>
+              <a:rPr b="1" sz="1700"/>
+              <a:t>アンサー</a:t>
+            </a:r>
+            <a:r>
+              <a:rPr b="0" sz="1700"/>
+              <a:t>。</a:t>
+            </a:r>
+          </a:p>
+          <a:p>
+            <a:r>
+              <a:rPr b="0" sz="1700"/>
+              <a:t>It does not claim to be invisible to forensics.</a:t>
+            </a:r>
+          </a:p>
+          <a:p>
+            <a:r>
+              <a:rPr b="0" sz="1700"/>
+              <a:t>  イット ダズ ナット クレイム トゥ ビー </a:t>
+            </a:r>
+            <a:r>
+              <a:rPr b="1" sz="1700"/>
+              <a:t>インビジブル トゥ フォレンジックス</a:t>
+            </a:r>
+            <a:r>
+              <a:rPr b="0" sz="1700"/>
+              <a:t>。</a:t>
             </a:r>
           </a:p>
           <a:p>
@@ -4543,23 +4551,7 @@
           <a:p>
             <a:r>
               <a:rPr b="0" sz="1700"/>
-              <a:t>  ザット ライン イズ </a:t>
-            </a:r>
-            <a:r>
-              <a:rPr b="1" sz="1700"/>
-              <a:t>ディリバレット</a:t>
-            </a:r>
-            <a:r>
-              <a:rPr b="0" sz="1700"/>
-              <a:t>。 アンド イッツ イン ザ </a:t>
-            </a:r>
-            <a:r>
-              <a:rPr b="1" sz="1700"/>
-              <a:t>コウド</a:t>
-            </a:r>
-            <a:r>
-              <a:rPr b="0" sz="1700"/>
-              <a:t>。</a:t>
+              <a:t>  ザット ライン イズ ディリバレット。 アンド イッツ イン ザ コード。</a:t>
             </a:r>
           </a:p>
           <a:p>
@@ -4806,25 +4798,57 @@
           <a:p>
             <a:r>
               <a:rPr b="0" sz="1700"/>
-              <a:t>Perfect deniability. Forensic immunity.</a:t>
-            </a:r>
-          </a:p>
-          <a:p>
-            <a:r>
-              <a:rPr b="0" sz="1700"/>
-              <a:t>  パーフェクト ディナイアビリティ。 フォレンシック イミューニティ。</a:t>
-            </a:r>
-          </a:p>
-          <a:p>
-            <a:r>
-              <a:rPr b="0" sz="1700"/>
-              <a:t>Secure deletion on flash. Protection from a compromised host.</a:t>
-            </a:r>
-          </a:p>
-          <a:p>
-            <a:r>
-              <a:rPr b="0" sz="1700"/>
-              <a:t>  セキュア ディリーション オン フラッシュ。 プロテクション フロム ア コンプロマイズド ホウスト。</a:t>
+              <a:t>A cover that always holds. Safety from forensics.</a:t>
+            </a:r>
+          </a:p>
+          <a:p>
+            <a:r>
+              <a:rPr b="0" sz="1700"/>
+              <a:t>  ア </a:t>
+            </a:r>
+            <a:r>
+              <a:rPr b="1" sz="1700"/>
+              <a:t>カバー ザット オールウェイズ ホールズ</a:t>
+            </a:r>
+            <a:r>
+              <a:rPr b="0" sz="1700"/>
+              <a:t>。 </a:t>
+            </a:r>
+            <a:r>
+              <a:rPr b="1" sz="1700"/>
+              <a:t>セイフティ フロム フォレンジックス</a:t>
+            </a:r>
+            <a:r>
+              <a:rPr b="0" sz="1700"/>
+              <a:t>。</a:t>
+            </a:r>
+          </a:p>
+          <a:p>
+            <a:r>
+              <a:rPr b="0" sz="1700"/>
+              <a:t>Secure deletion on flash. Safety on a host already taken over.</a:t>
+            </a:r>
+          </a:p>
+          <a:p>
+            <a:r>
+              <a:rPr b="0" sz="1700"/>
+              <a:t>  セキュア ディリーション オン フラッシュ。 </a:t>
+            </a:r>
+            <a:r>
+              <a:rPr b="1" sz="1700"/>
+              <a:t>セイフティ</a:t>
+            </a:r>
+            <a:r>
+              <a:rPr b="0" sz="1700"/>
+              <a:t> オン ア ホスト オールレディ </a:t>
+            </a:r>
+            <a:r>
+              <a:rPr b="1" sz="1700"/>
+              <a:t>テイクン オーバー</a:t>
+            </a:r>
+            <a:r>
+              <a:rPr b="0" sz="1700"/>
+              <a:t>。</a:t>
             </a:r>
           </a:p>
           <a:p>
@@ -5344,17 +5368,17 @@
           <a:p>
             <a:r>
               <a:rPr b="0" sz="1700"/>
-              <a:t>The home screen is deliberately small.</a:t>
-            </a:r>
-          </a:p>
-          <a:p>
-            <a:r>
-              <a:rPr b="0" sz="1700"/>
-              <a:t>  ザ ホーム スクリーン イズ ディリバレットリー </a:t>
-            </a:r>
-            <a:r>
-              <a:rPr b="1" sz="1700"/>
-              <a:t>スモール</a:t>
+              <a:t>The home screen is small on purpose.</a:t>
+            </a:r>
+          </a:p>
+          <a:p>
+            <a:r>
+              <a:rPr b="0" sz="1700"/>
+              <a:t>  ザ ホーム スクリーン イズ </a:t>
+            </a:r>
+            <a:r>
+              <a:rPr b="1" sz="1700"/>
+              <a:t>スモール オン パーパス</a:t>
             </a:r>
             <a:r>
               <a:rPr b="0" sz="1700"/>
@@ -6742,7 +6766,7 @@
             </a:r>
             <a:r>
               <a:rPr b="1" sz="1700"/>
-              <a:t>スロット ビーズ オウン</a:t>
+              <a:t>スロット ビーズ オーン</a:t>
             </a:r>
             <a:r>
               <a:rPr b="0" sz="1700"/>
@@ -7947,21 +7971,29 @@
           <a:p>
             <a:r>
               <a:rPr b="0" sz="1700"/>
-              <a:t>The first run sets up a virtual environment and opens the console.</a:t>
-            </a:r>
-          </a:p>
-          <a:p>
-            <a:r>
-              <a:rPr b="0" sz="1700"/>
-              <a:t>  ザ ファースト ラン セッツ アップ ア </a:t>
-            </a:r>
-            <a:r>
-              <a:rPr b="1" sz="1700"/>
-              <a:t>バーチュアル インバイロンメント</a:t>
-            </a:r>
-            <a:r>
-              <a:rPr b="0" sz="1700"/>
-              <a:t> アンド オープンズ ザ コンソウル。</a:t>
+              <a:t>The first run sets things up and opens the console.</a:t>
+            </a:r>
+          </a:p>
+          <a:p>
+            <a:r>
+              <a:rPr b="0" sz="1700"/>
+              <a:t>  ザ ファースト ラン </a:t>
+            </a:r>
+            <a:r>
+              <a:rPr b="1" sz="1700"/>
+              <a:t>セッツ シングズ アップ</a:t>
+            </a:r>
+            <a:r>
+              <a:rPr b="0" sz="1700"/>
+              <a:t> アンド オープンズ ザ </a:t>
+            </a:r>
+            <a:r>
+              <a:rPr b="1" sz="1700"/>
+              <a:t>コンソール</a:t>
+            </a:r>
+            <a:r>
+              <a:rPr b="0" sz="1700"/>
+              <a:t>。</a:t>
             </a:r>
           </a:p>
           <a:p>
@@ -8210,23 +8242,7 @@
           <a:p>
             <a:r>
               <a:rPr b="0" sz="1700"/>
-              <a:t>  ザ コウド、 ザ スレット モデル、 アンド ジ アーキテクチャー アー オール オン </a:t>
-            </a:r>
-            <a:r>
-              <a:rPr b="1" sz="1700"/>
-              <a:t>ギットハブ</a:t>
-            </a:r>
-            <a:r>
-              <a:rPr b="0" sz="1700"/>
-              <a:t>、 アット </a:t>
-            </a:r>
-            <a:r>
-              <a:rPr b="1" sz="1700"/>
-              <a:t>ゼロワン ラビット</a:t>
-            </a:r>
-            <a:r>
-              <a:rPr b="0" sz="1700"/>
-              <a:t>。</a:t>
+              <a:t>  ザ コード、 ザ スレット モデル、 アンド ジ アーキテクチャー アー オール オン ギットハブ、 アット ゼロワン ラビット。</a:t>
             </a:r>
           </a:p>
           <a:p>
@@ -9240,17 +9256,17 @@
           <a:p>
             <a:r>
               <a:rPr b="0" sz="1700"/>
-              <a:t>Phasmid is a field-evaluation research prototype for disclosure control.</a:t>
-            </a:r>
-          </a:p>
-          <a:p>
-            <a:r>
-              <a:rPr b="0" sz="1700"/>
-              <a:t>  ファズミッド イズ ア フィールド イバリュエイション リサーチ </a:t>
-            </a:r>
-            <a:r>
-              <a:rPr b="1" sz="1700"/>
-              <a:t>プロウトタイプ</a:t>
+              <a:t>Phasmid is a research prototype for disclosure control.</a:t>
+            </a:r>
+          </a:p>
+          <a:p>
+            <a:r>
+              <a:rPr b="0" sz="1700"/>
+              <a:t>  ファズミッド イズ ア </a:t>
+            </a:r>
+            <a:r>
+              <a:rPr b="1" sz="1700"/>
+              <a:t>リサーチ プロトタイプ</a:t>
             </a:r>
             <a:r>
               <a:rPr b="0" sz="1700"/>
@@ -9288,41 +9304,41 @@
           <a:p>
             <a:r>
               <a:rPr b="0" sz="1700"/>
-              <a:t>And it is not a replacement for audited full-disk encryption.</a:t>
-            </a:r>
-          </a:p>
-          <a:p>
-            <a:r>
-              <a:rPr b="0" sz="1700"/>
-              <a:t>  アンド イット イズ </a:t>
-            </a:r>
-            <a:r>
-              <a:rPr b="1" sz="1700"/>
-              <a:t>ナット</a:t>
-            </a:r>
-            <a:r>
-              <a:rPr b="0" sz="1700"/>
-              <a:t> ア リプレイスメント フォー オーディティッド フルディスク インクリプション。</a:t>
-            </a:r>
-          </a:p>
-          <a:p>
-            <a:r>
-              <a:rPr b="0" sz="1700"/>
-              <a:t>Not hardware-backed keys.</a:t>
-            </a:r>
-          </a:p>
-          <a:p>
-            <a:r>
-              <a:rPr b="0" sz="1700"/>
-              <a:t>  </a:t>
-            </a:r>
-            <a:r>
-              <a:rPr b="1" sz="1700"/>
-              <a:t>ナット</a:t>
-            </a:r>
-            <a:r>
-              <a:rPr b="0" sz="1700"/>
-              <a:t> ハードウェアバックト キーズ。</a:t>
+              <a:t>And it does not replace audited full-disk encryption.</a:t>
+            </a:r>
+          </a:p>
+          <a:p>
+            <a:r>
+              <a:rPr b="0" sz="1700"/>
+              <a:t>  アンド イット ダズ </a:t>
+            </a:r>
+            <a:r>
+              <a:rPr b="1" sz="1700"/>
+              <a:t>ナット リプレイス</a:t>
+            </a:r>
+            <a:r>
+              <a:rPr b="0" sz="1700"/>
+              <a:t> オーディテッド フルディスク インクリプション。</a:t>
+            </a:r>
+          </a:p>
+          <a:p>
+            <a:r>
+              <a:rPr b="0" sz="1700"/>
+              <a:t>Not keys held in hardware.</a:t>
+            </a:r>
+          </a:p>
+          <a:p>
+            <a:r>
+              <a:rPr b="0" sz="1700"/>
+              <a:t>  ナット キーズ </a:t>
+            </a:r>
+            <a:r>
+              <a:rPr b="1" sz="1700"/>
+              <a:t>ヘルド イン ハードウェア</a:t>
+            </a:r>
+            <a:r>
+              <a:rPr b="0" sz="1700"/>
+              <a:t>。</a:t>
             </a:r>
           </a:p>
           <a:p>
@@ -9568,23 +9584,7 @@
           <a:p>
             <a:r>
               <a:rPr b="0" sz="1700"/>
-              <a:t>  </a:t>
-            </a:r>
-            <a:r>
-              <a:rPr b="1" sz="1700"/>
-              <a:t>プローザブル</a:t>
-            </a:r>
-            <a:r>
-              <a:rPr b="0" sz="1700"/>
-              <a:t>。 </a:t>
-            </a:r>
-            <a:r>
-              <a:rPr b="1" sz="1700"/>
-              <a:t>オーディナリー</a:t>
-            </a:r>
-            <a:r>
-              <a:rPr b="0" sz="1700"/>
-              <a:t>。 ディスクロウズド アンダー プレッシャー。</a:t>
+              <a:t>  プローザブル。 オーディナリー。 ディスクローズド アンダー プレッシャー。</a:t>
             </a:r>
           </a:p>
           <a:p>
@@ -9604,7 +9604,7 @@
             </a:r>
             <a:r>
               <a:rPr b="0" sz="1700"/>
-              <a:t> イズ プロテクティッド ローカル ステイト。 イット ステイズ </a:t>
+              <a:t> イズ プロテクテッド ローカル ステイト。 イット ステイズ </a:t>
             </a:r>
             <a:r>
               <a:rPr b="1" sz="1700"/>
@@ -9824,7 +9824,7 @@
           <a:p>
             <a:r>
               <a:rPr b="0" sz="1700"/>
-              <a:t>Five adversaries in scope.</a:t>
+              <a:t>Five attackers in scope.</a:t>
             </a:r>
           </a:p>
           <a:p>
@@ -9834,11 +9834,11 @@
             </a:r>
             <a:r>
               <a:rPr b="1" sz="1700"/>
-              <a:t>ファイブ</a:t>
-            </a:r>
-            <a:r>
-              <a:rPr b="0" sz="1700"/>
-              <a:t> アドバサリーズ イン スコープ。</a:t>
+              <a:t>ファイブ アタッカーズ</a:t>
+            </a:r>
+            <a:r>
+              <a:rPr b="0" sz="1700"/>
+              <a:t> イン スコープ。</a:t>
             </a:r>
           </a:p>
           <a:p>
@@ -9856,17 +9856,25 @@
           <a:p>
             <a:r>
               <a:rPr b="0" sz="1700"/>
-              <a:t>A local-network attacker. And a coercing authority.</a:t>
-            </a:r>
-          </a:p>
-          <a:p>
-            <a:r>
-              <a:rPr b="0" sz="1700"/>
-              <a:t>  ア ローカルネットワーク アタッカー。 アンド ア </a:t>
-            </a:r>
-            <a:r>
-              <a:rPr b="1" sz="1700"/>
-              <a:t>コアーシング オーソリティ</a:t>
+              <a:t>An attacker on the local network. And someone who can force you.</a:t>
+            </a:r>
+          </a:p>
+          <a:p>
+            <a:r>
+              <a:rPr b="0" sz="1700"/>
+              <a:t>  アン アタッカー オン ザ </a:t>
+            </a:r>
+            <a:r>
+              <a:rPr b="1" sz="1700"/>
+              <a:t>ローカル ネットワーク</a:t>
+            </a:r>
+            <a:r>
+              <a:rPr b="0" sz="1700"/>
+              <a:t>。 アンド </a:t>
+            </a:r>
+            <a:r>
+              <a:rPr b="1" sz="1700"/>
+              <a:t>サムワン フー キャン フォース ユー</a:t>
             </a:r>
             <a:r>
               <a:rPr b="0" sz="1700"/>
@@ -9896,13 +9904,21 @@
           <a:p>
             <a:r>
               <a:rPr b="0" sz="1700"/>
-              <a:t>A compromised kernel. Hardware implants. Remote attackers.</a:t>
-            </a:r>
-          </a:p>
-          <a:p>
-            <a:r>
-              <a:rPr b="0" sz="1700"/>
-              <a:t>  ア コンプロマイズド カーネル。 ハードウェア インプランツ。 リモウト アタッカーズ。</a:t>
+              <a:t>A kernel already taken over. Hardware implants. Remote attackers.</a:t>
+            </a:r>
+          </a:p>
+          <a:p>
+            <a:r>
+              <a:rPr b="0" sz="1700"/>
+              <a:t>  ア カーネル オールレディ </a:t>
+            </a:r>
+            <a:r>
+              <a:rPr b="1" sz="1700"/>
+              <a:t>テイクン オーバー</a:t>
+            </a:r>
+            <a:r>
+              <a:rPr b="0" sz="1700"/>
+              <a:t>。 ハードウェア インプランツ。 リモート アタッカーズ。</a:t>
             </a:r>
           </a:p>
           <a:p>
@@ -9934,23 +9950,7 @@
           <a:p>
             <a:r>
               <a:rPr b="0" sz="1700"/>
-              <a:t>  イフ ザ ホウスト イズ </a:t>
-            </a:r>
-            <a:r>
-              <a:rPr b="1" sz="1700"/>
-              <a:t>オーンド</a:t>
-            </a:r>
-            <a:r>
-              <a:rPr b="0" sz="1700"/>
-              <a:t>、 ノウ ユーザースペイス ツール </a:t>
-            </a:r>
-            <a:r>
-              <a:rPr b="1" sz="1700"/>
-              <a:t>セイブズ</a:t>
-            </a:r>
-            <a:r>
-              <a:rPr b="0" sz="1700"/>
-              <a:t> ユー。</a:t>
+              <a:t>  イフ ザ ホスト イズ オーンド、 ノウ ユーザースペイス ツール セイブズ ユー。</a:t>
             </a:r>
           </a:p>
           <a:p>
@@ -10150,13 +10150,21 @@
           <a:p>
             <a:r>
               <a:rPr b="0" sz="1700"/>
-              <a:t>Timing side-channels. Object-cue spoofing. Coerced disclosure.</a:t>
-            </a:r>
-          </a:p>
-          <a:p>
-            <a:r>
-              <a:rPr b="0" sz="1700"/>
-              <a:t>  タイミング サイドチャネルズ。 オブジェクトキュー スプーフィング。 コアースト ディスクロージャー。</a:t>
+              <a:t>Timing side-channels. Object-cue spoofing. Disclosure under force.</a:t>
+            </a:r>
+          </a:p>
+          <a:p>
+            <a:r>
+              <a:rPr b="0" sz="1700"/>
+              <a:t>  タイミング サイドチャネルズ。 オブジェクトキュー スプーフィング。 ディスクロージャー </a:t>
+            </a:r>
+            <a:r>
+              <a:rPr b="1" sz="1700"/>
+              <a:t>アンダー フォース</a:t>
+            </a:r>
+            <a:r>
+              <a:rPr b="0" sz="1700"/>
+              <a:t>。</a:t>
             </a:r>
           </a:p>
           <a:p>

--- a/docs/submissions/Phasmid_DEFCON_DemoLabs.pptx
+++ b/docs/submissions/Phasmid_DEFCON_DemoLabs.pptx
@@ -636,11 +636,11 @@
           <a:p>
             <a:r>
               <a:rPr b="0" sz="1700"/>
-              <a:t>  イッツ ザ レファレンス ビルド オヴ ザ </a:t>
-            </a:r>
-            <a:r>
-              <a:rPr b="1" sz="1700"/>
-              <a:t>ジェイナス アイドウロン システム</a:t>
+              <a:t>  イッツ ザ レファレンス ビルド オブ ザ </a:t>
+            </a:r>
+            <a:r>
+              <a:rPr b="1" sz="1700"/>
+              <a:t>ジェイナス アイドロン システム</a:t>
             </a:r>
             <a:r>
               <a:rPr b="0" sz="1700"/>
@@ -704,7 +704,7 @@
             </a:r>
             <a:r>
               <a:rPr b="0" sz="1700"/>
-              <a:t>… アンド ゼイ ハヴ </a:t>
+              <a:t>… アンド ゼイ ハブ </a:t>
             </a:r>
             <a:r>
               <a:rPr b="1" sz="1700"/>
@@ -872,17 +872,45 @@
           <a:p>
             <a:r>
               <a:rPr b="0" sz="1700"/>
-              <a:t>“Architecturally, four things stay explicit.</a:t>
-            </a:r>
-          </a:p>
-          <a:p>
-            <a:r>
-              <a:rPr b="0" sz="1700"/>
-              <a:t>  アーキテクチャリー、 フォー シングズ ステイ </a:t>
-            </a:r>
-            <a:r>
-              <a:rPr b="1" sz="1700"/>
-              <a:t>エクスプリシット</a:t>
+              <a:t>“By design, four things stay explicit.</a:t>
+            </a:r>
+          </a:p>
+          <a:p>
+            <a:r>
+              <a:rPr b="0" sz="1700"/>
+              <a:t>  </a:t>
+            </a:r>
+            <a:r>
+              <a:rPr b="1" sz="1700"/>
+              <a:t>バイ デザイン</a:t>
+            </a:r>
+            <a:r>
+              <a:rPr b="0" sz="1700"/>
+              <a:t>、 フォー シングズ ステイ エクスプリシット。</a:t>
+            </a:r>
+          </a:p>
+          <a:p>
+            <a:r>
+              <a:rPr b="0" sz="1700"/>
+              <a:t>One. Two-slot storage.</a:t>
+            </a:r>
+          </a:p>
+          <a:p>
+            <a:r>
+              <a:rPr b="0" sz="1700"/>
+              <a:t>  </a:t>
+            </a:r>
+            <a:r>
+              <a:rPr b="1" sz="1700"/>
+              <a:t>ワン</a:t>
+            </a:r>
+            <a:r>
+              <a:rPr b="0" sz="1700"/>
+              <a:t>。 トゥースロット </a:t>
+            </a:r>
+            <a:r>
+              <a:rPr b="1" sz="1700"/>
+              <a:t>ストレージ</a:t>
             </a:r>
             <a:r>
               <a:rPr b="0" sz="1700"/>
@@ -892,7 +920,7 @@
           <a:p>
             <a:r>
               <a:rPr b="0" sz="1700"/>
-              <a:t>One. Two-slot storage.</a:t>
+              <a:t>Two. Local access-key mixing — keys come from local state, not from a passphrase alone.</a:t>
             </a:r>
           </a:p>
           <a:p>
@@ -902,15 +930,51 @@
             </a:r>
             <a:r>
               <a:rPr b="1" sz="1700"/>
-              <a:t>ワン</a:t>
-            </a:r>
-            <a:r>
-              <a:rPr b="0" sz="1700"/>
-              <a:t>。 トゥースロット </a:t>
-            </a:r>
-            <a:r>
-              <a:rPr b="1" sz="1700"/>
-              <a:t>ストレージ</a:t>
+              <a:t>トゥー</a:t>
+            </a:r>
+            <a:r>
+              <a:rPr b="0" sz="1700"/>
+              <a:t>。 ローカル アクセスキー ミキシング — キーズ カム フロム </a:t>
+            </a:r>
+            <a:r>
+              <a:rPr b="1" sz="1700"/>
+              <a:t>ローカル ステイト</a:t>
+            </a:r>
+            <a:r>
+              <a:rPr b="0" sz="1700"/>
+              <a:t>、 ナット フロム ア パスフレイズ アロウン。</a:t>
+            </a:r>
+          </a:p>
+          <a:p>
+            <a:r>
+              <a:rPr b="0" sz="1700"/>
+              <a:t>Three. A restricted-action policy. It gates anything sensitive, and anything about recovery.</a:t>
+            </a:r>
+          </a:p>
+          <a:p>
+            <a:r>
+              <a:rPr b="0" sz="1700"/>
+              <a:t>  スリー。 ア </a:t>
+            </a:r>
+            <a:r>
+              <a:rPr b="1" sz="1700"/>
+              <a:t>リストリクテッド アクション</a:t>
+            </a:r>
+            <a:r>
+              <a:rPr b="0" sz="1700"/>
+              <a:t> ポリシー。 イット ゲイツ エニシング </a:t>
+            </a:r>
+            <a:r>
+              <a:rPr b="1" sz="1700"/>
+              <a:t>センシティブ</a:t>
+            </a:r>
+            <a:r>
+              <a:rPr b="0" sz="1700"/>
+              <a:t>、 アンド エニシング アバウト </a:t>
+            </a:r>
+            <a:r>
+              <a:rPr b="1" sz="1700"/>
+              <a:t>リカバリー</a:t>
             </a:r>
             <a:r>
               <a:rPr b="0" sz="1700"/>
@@ -920,85 +984,21 @@
           <a:p>
             <a:r>
               <a:rPr b="0" sz="1700"/>
-              <a:t>Two. Local access-key mixing — keys come from local state, not from a passphrase alone.</a:t>
-            </a:r>
-          </a:p>
-          <a:p>
-            <a:r>
-              <a:rPr b="0" sz="1700"/>
-              <a:t>  </a:t>
-            </a:r>
-            <a:r>
-              <a:rPr b="1" sz="1700"/>
-              <a:t>トゥー</a:t>
-            </a:r>
-            <a:r>
-              <a:rPr b="0" sz="1700"/>
-              <a:t>。 ローカル アクセスキー ミキシング — キーズ カム フロム </a:t>
-            </a:r>
-            <a:r>
-              <a:rPr b="1" sz="1700"/>
-              <a:t>ローカル ステイト</a:t>
-            </a:r>
-            <a:r>
-              <a:rPr b="0" sz="1700"/>
-              <a:t>、 ナット フロム ア パスフレイズ アロウン。</a:t>
-            </a:r>
-          </a:p>
-          <a:p>
-            <a:r>
-              <a:rPr b="0" sz="1700"/>
-              <a:t>Three. A restricted-action policy. It gates anything sensitive, and anything about recovery.</a:t>
-            </a:r>
-          </a:p>
-          <a:p>
-            <a:r>
-              <a:rPr b="0" sz="1700"/>
-              <a:t>  </a:t>
-            </a:r>
-            <a:r>
-              <a:rPr b="1" sz="1700"/>
-              <a:t>スリー</a:t>
-            </a:r>
-            <a:r>
-              <a:rPr b="0" sz="1700"/>
-              <a:t>。 ア リストリクティッドアクション ポリシー。 イット ゲイツ エニシング </a:t>
-            </a:r>
-            <a:r>
-              <a:rPr b="1" sz="1700"/>
-              <a:t>センシティヴ</a:t>
-            </a:r>
-            <a:r>
-              <a:rPr b="0" sz="1700"/>
-              <a:t>、 アンド エニシング アバウト リカヴァリー。</a:t>
-            </a:r>
-          </a:p>
-          <a:p>
-            <a:r>
-              <a:rPr b="0" sz="1700"/>
               <a:t>Four. Capture-visible discipline.</a:t>
             </a:r>
           </a:p>
           <a:p>
             <a:r>
               <a:rPr b="0" sz="1700"/>
-              <a:t>  </a:t>
-            </a:r>
-            <a:r>
-              <a:rPr b="1" sz="1700"/>
-              <a:t>フォー</a:t>
-            </a:r>
-            <a:r>
-              <a:rPr b="0" sz="1700"/>
-              <a:t>。 キャプチャーヴィジブル </a:t>
-            </a:r>
-            <a:r>
-              <a:rPr b="1" sz="1700"/>
-              <a:t>ディシプリン</a:t>
-            </a:r>
-            <a:r>
-              <a:rPr b="0" sz="1700"/>
-              <a:t>。</a:t>
+              <a:t>  フォー。 </a:t>
+            </a:r>
+            <a:r>
+              <a:rPr b="1" sz="1700"/>
+              <a:t>キャプチャー ビジブル</a:t>
+            </a:r>
+            <a:r>
+              <a:rPr b="0" sz="1700"/>
+              <a:t> ディシプリン。</a:t>
             </a:r>
           </a:p>
           <a:p>
@@ -1014,11 +1014,11 @@
             </a:r>
             <a:r>
               <a:rPr b="1" sz="1700"/>
-              <a:t>ネヴァー</a:t>
-            </a:r>
-            <a:r>
-              <a:rPr b="0" sz="1700"/>
-              <a:t> ショウ ザ ストラクチャー、 ザ リカヴァリー パス、 オア ジ オーダー ユード トライ シングズ イン。</a:t>
+              <a:t>ネバー</a:t>
+            </a:r>
+            <a:r>
+              <a:rPr b="0" sz="1700"/>
+              <a:t> ショウ ザ ストラクチャー、 ザ リカバリー パス、 オア ジ オーダー ユード トライ シングズ イン。</a:t>
             </a:r>
           </a:p>
           <a:p>
@@ -1136,15 +1136,7 @@
           <a:p>
             <a:r>
               <a:rPr b="0" sz="1700"/>
-              <a:t>  アンダニース アー </a:t>
-            </a:r>
-            <a:r>
-              <a:rPr b="1" sz="1700"/>
-              <a:t>ナロウ ローカル レイヤーズ</a:t>
-            </a:r>
-            <a:r>
-              <a:rPr b="0" sz="1700"/>
-              <a:t>。</a:t>
+              <a:t>  アンダニース アー ナロー ローカル レイヤーズ。</a:t>
             </a:r>
           </a:p>
           <a:p>
@@ -1176,11 +1168,11 @@
             </a:r>
             <a:r>
               <a:rPr b="0" sz="1700"/>
-              <a:t> オヴ ディス イズ フォウクロー。 イッツ </a:t>
-            </a:r>
-            <a:r>
-              <a:rPr b="1" sz="1700"/>
-              <a:t>ドキュメンティッド</a:t>
+              <a:t> オブ ディス イズ フォークロー。 イッツ </a:t>
+            </a:r>
+            <a:r>
+              <a:rPr b="1" sz="1700"/>
+              <a:t>ドキュメンテッド</a:t>
             </a:r>
             <a:r>
               <a:rPr b="0" sz="1700"/>
@@ -1326,13 +1318,41 @@
             </a:r>
             <a:r>
               <a:rPr b="0" sz="1700"/>
-              <a:t> ムーヴィング パーツ。</a:t>
-            </a:r>
-          </a:p>
-          <a:p>
-            <a:r>
-              <a:rPr b="0" sz="1700"/>
-              <a:t>One — an encrypted local vessel. Authenticated encryption, password-derived keys.</a:t>
+              <a:t> ムービング パーツ。</a:t>
+            </a:r>
+          </a:p>
+          <a:p>
+            <a:r>
+              <a:rPr b="0" sz="1700"/>
+              <a:t>One — an encrypted local vessel. Authenticated encryption. Keys made from your password.</a:t>
+            </a:r>
+          </a:p>
+          <a:p>
+            <a:r>
+              <a:rPr b="0" sz="1700"/>
+              <a:t>  ワン — アン インクリプテッド ローカル </a:t>
+            </a:r>
+            <a:r>
+              <a:rPr b="1" sz="1700"/>
+              <a:t>ベッセル</a:t>
+            </a:r>
+            <a:r>
+              <a:rPr b="0" sz="1700"/>
+              <a:t>。 オーセンティケイテッド インクリプション。 </a:t>
+            </a:r>
+            <a:r>
+              <a:rPr b="1" sz="1700"/>
+              <a:t>キーズ メイド フロム ユア パスワード</a:t>
+            </a:r>
+            <a:r>
+              <a:rPr b="0" sz="1700"/>
+              <a:t>。</a:t>
+            </a:r>
+          </a:p>
+          <a:p>
+            <a:r>
+              <a:rPr b="0" sz="1700"/>
+              <a:t>Two — object-cue operation. I’ll come right back to this. It’s the fun part.</a:t>
             </a:r>
           </a:p>
           <a:p>
@@ -1342,25 +1362,25 @@
             </a:r>
             <a:r>
               <a:rPr b="1" sz="1700"/>
-              <a:t>ワン</a:t>
-            </a:r>
-            <a:r>
-              <a:rPr b="0" sz="1700"/>
-              <a:t> — アン インクリプティッド ローカル </a:t>
-            </a:r>
-            <a:r>
-              <a:rPr b="1" sz="1700"/>
-              <a:t>ヴェッセル</a:t>
-            </a:r>
-            <a:r>
-              <a:rPr b="0" sz="1700"/>
-              <a:t>。 オーセンティケイティッド インクリプション、 パスワードディライヴド キーズ。</a:t>
-            </a:r>
-          </a:p>
-          <a:p>
-            <a:r>
-              <a:rPr b="0" sz="1700"/>
-              <a:t>Two — object-cue operation. I’ll come right back to this. It’s the fun part.</a:t>
+              <a:t>トゥー</a:t>
+            </a:r>
+            <a:r>
+              <a:rPr b="0" sz="1700"/>
+              <a:t> — オブジェクトキュー オペレイション。 アイル カム ライト バック トゥ ディス。 イッツ ザ </a:t>
+            </a:r>
+            <a:r>
+              <a:rPr b="1" sz="1700"/>
+              <a:t>ファン パート</a:t>
+            </a:r>
+            <a:r>
+              <a:rPr b="0" sz="1700"/>
+              <a:t>。</a:t>
+            </a:r>
+          </a:p>
+          <a:p>
+            <a:r>
+              <a:rPr b="0" sz="1700"/>
+              <a:t>Three — controlled disclosure.</a:t>
             </a:r>
           </a:p>
           <a:p>
@@ -1370,15 +1390,47 @@
             </a:r>
             <a:r>
               <a:rPr b="1" sz="1700"/>
-              <a:t>トゥー</a:t>
-            </a:r>
-            <a:r>
-              <a:rPr b="0" sz="1700"/>
-              <a:t> — オブジェクトキュー オペレイション。 アイル カム ゥライト バック トゥ ディス。 イッツ ザ </a:t>
-            </a:r>
-            <a:r>
-              <a:rPr b="1" sz="1700"/>
-              <a:t>ファン パート</a:t>
+              <a:t>スリー</a:t>
+            </a:r>
+            <a:r>
+              <a:rPr b="0" sz="1700"/>
+              <a:t> — コントロールド ディスクロージャー。</a:t>
+            </a:r>
+          </a:p>
+          <a:p>
+            <a:r>
+              <a:rPr b="0" sz="1700"/>
+              <a:t>And that third one is concrete, not a slogan.</a:t>
+            </a:r>
+          </a:p>
+          <a:p>
+            <a:r>
+              <a:rPr b="0" sz="1700"/>
+              <a:t>  アンド ザット サード ワン イズ </a:t>
+            </a:r>
+            <a:r>
+              <a:rPr b="1" sz="1700"/>
+              <a:t>コンクリート</a:t>
+            </a:r>
+            <a:r>
+              <a:rPr b="0" sz="1700"/>
+              <a:t>、 ナット ア スロウガン。</a:t>
+            </a:r>
+          </a:p>
+          <a:p>
+            <a:r>
+              <a:rPr b="0" sz="1700"/>
+              <a:t>You set three passwords.</a:t>
+            </a:r>
+          </a:p>
+          <a:p>
+            <a:r>
+              <a:rPr b="0" sz="1700"/>
+              <a:t>  ユー セット </a:t>
+            </a:r>
+            <a:r>
+              <a:rPr b="1" sz="1700"/>
+              <a:t>スリー パスワーズ</a:t>
             </a:r>
             <a:r>
               <a:rPr b="0" sz="1700"/>
@@ -1388,57 +1440,37 @@
           <a:p>
             <a:r>
               <a:rPr b="0" sz="1700"/>
-              <a:t>Three — controlled disclosure.</a:t>
-            </a:r>
-          </a:p>
-          <a:p>
-            <a:r>
-              <a:rPr b="0" sz="1700"/>
-              <a:t>  </a:t>
-            </a:r>
-            <a:r>
-              <a:rPr b="1" sz="1700"/>
-              <a:t>スリー</a:t>
-            </a:r>
-            <a:r>
-              <a:rPr b="0" sz="1700"/>
-              <a:t> — コントロールド ディスクロージャー。</a:t>
-            </a:r>
-          </a:p>
-          <a:p>
-            <a:r>
-              <a:rPr b="0" sz="1700"/>
-              <a:t>And that third one is concrete, not a slogan.</a:t>
-            </a:r>
-          </a:p>
-          <a:p>
-            <a:r>
-              <a:rPr b="0" sz="1700"/>
-              <a:t>  アンド ザット サード ワン イズ </a:t>
-            </a:r>
-            <a:r>
-              <a:rPr b="1" sz="1700"/>
-              <a:t>コンクリート</a:t>
-            </a:r>
-            <a:r>
-              <a:rPr b="0" sz="1700"/>
-              <a:t>、 ナット ア スロウガン。</a:t>
-            </a:r>
-          </a:p>
-          <a:p>
-            <a:r>
-              <a:rPr b="0" sz="1700"/>
-              <a:t>You set three credentials.</a:t>
-            </a:r>
-          </a:p>
-          <a:p>
-            <a:r>
-              <a:rPr b="0" sz="1700"/>
-              <a:t>  ユー セット </a:t>
-            </a:r>
-            <a:r>
-              <a:rPr b="1" sz="1700"/>
-              <a:t>スリー クリデンシャルズ</a:t>
+              <a:t>One opens the real file.</a:t>
+            </a:r>
+          </a:p>
+          <a:p>
+            <a:r>
+              <a:rPr b="0" sz="1700"/>
+              <a:t>  ワン </a:t>
+            </a:r>
+            <a:r>
+              <a:rPr b="1" sz="1700"/>
+              <a:t>オープンズ</a:t>
+            </a:r>
+            <a:r>
+              <a:rPr b="0" sz="1700"/>
+              <a:t> ザ リアル ファイル。</a:t>
+            </a:r>
+          </a:p>
+          <a:p>
+            <a:r>
+              <a:rPr b="0" sz="1700"/>
+              <a:t>One opens the decoy.</a:t>
+            </a:r>
+          </a:p>
+          <a:p>
+            <a:r>
+              <a:rPr b="0" sz="1700"/>
+              <a:t>  ワン オープンズ ザ </a:t>
+            </a:r>
+            <a:r>
+              <a:rPr b="1" sz="1700"/>
+              <a:t>ディーコイ</a:t>
             </a:r>
             <a:r>
               <a:rPr b="0" sz="1700"/>
@@ -1448,17 +1480,17 @@
           <a:p>
             <a:r>
               <a:rPr b="0" sz="1700"/>
-              <a:t>One opens the real file.</a:t>
-            </a:r>
-          </a:p>
-          <a:p>
-            <a:r>
-              <a:rPr b="0" sz="1700"/>
-              <a:t>  ワン </a:t>
-            </a:r>
-            <a:r>
-              <a:rPr b="1" sz="1700"/>
-              <a:t>オウプンズ</a:t>
+              <a:t>And one destroys the real file.</a:t>
+            </a:r>
+          </a:p>
+          <a:p>
+            <a:r>
+              <a:rPr b="0" sz="1700"/>
+              <a:t>  アンド ワン </a:t>
+            </a:r>
+            <a:r>
+              <a:rPr b="1" sz="1700"/>
+              <a:t>ディストロイズ</a:t>
             </a:r>
             <a:r>
               <a:rPr b="0" sz="1700"/>
@@ -1468,17 +1500,17 @@
           <a:p>
             <a:r>
               <a:rPr b="0" sz="1700"/>
-              <a:t>One opens the decoy.</a:t>
-            </a:r>
-          </a:p>
-          <a:p>
-            <a:r>
-              <a:rPr b="0" sz="1700"/>
-              <a:t>  ワン オウプンズ ザ </a:t>
-            </a:r>
-            <a:r>
-              <a:rPr b="1" sz="1700"/>
-              <a:t>ディーコイ</a:t>
+              <a:t>Three passwords. Three very different outcomes.</a:t>
+            </a:r>
+          </a:p>
+          <a:p>
+            <a:r>
+              <a:rPr b="0" sz="1700"/>
+              <a:t>  スリー パスワーズ。 スリー ベリー </a:t>
+            </a:r>
+            <a:r>
+              <a:rPr b="1" sz="1700"/>
+              <a:t>ディファレント アウトカムズ</a:t>
             </a:r>
             <a:r>
               <a:rPr b="0" sz="1700"/>
@@ -1488,46 +1520,6 @@
           <a:p>
             <a:r>
               <a:rPr b="0" sz="1700"/>
-              <a:t>And one destroys the real file.</a:t>
-            </a:r>
-          </a:p>
-          <a:p>
-            <a:r>
-              <a:rPr b="0" sz="1700"/>
-              <a:t>  アンド ワン </a:t>
-            </a:r>
-            <a:r>
-              <a:rPr b="1" sz="1700"/>
-              <a:t>ディストロイズ</a:t>
-            </a:r>
-            <a:r>
-              <a:rPr b="0" sz="1700"/>
-              <a:t> ザ リアル ファイル。</a:t>
-            </a:r>
-          </a:p>
-          <a:p>
-            <a:r>
-              <a:rPr b="0" sz="1700"/>
-              <a:t>Three passwords. Three very different outcomes.</a:t>
-            </a:r>
-          </a:p>
-          <a:p>
-            <a:r>
-              <a:rPr b="0" sz="1700"/>
-              <a:t>  スリー パスワーズ。 スリー ヴェリー </a:t>
-            </a:r>
-            <a:r>
-              <a:rPr b="1" sz="1700"/>
-              <a:t>ディファレント アウトカムズ</a:t>
-            </a:r>
-            <a:r>
-              <a:rPr b="0" sz="1700"/>
-              <a:t>。</a:t>
-            </a:r>
-          </a:p>
-          <a:p>
-            <a:r>
-              <a:rPr b="0" sz="1700"/>
               <a:t>And only you know which is which.”</a:t>
             </a:r>
           </a:p>
@@ -1538,7 +1530,7 @@
             </a:r>
             <a:r>
               <a:rPr b="1" sz="1700"/>
-              <a:t>オウンリー ユー</a:t>
+              <a:t>オンリー ユー</a:t>
             </a:r>
             <a:r>
               <a:rPr b="0" sz="1700"/>
@@ -1679,7 +1671,7 @@
           <a:p>
             <a:r>
               <a:rPr b="0" sz="1700"/>
-              <a:t>  ユー ショウ アン エヴリデイ </a:t>
+              <a:t>  ユー ショウ アン エブリデイ </a:t>
             </a:r>
             <a:r>
               <a:rPr b="1" sz="1700"/>
@@ -1739,7 +1731,7 @@
             </a:r>
             <a:r>
               <a:rPr b="1" sz="1700"/>
-              <a:t>ゥロング</a:t>
+              <a:t>ロング</a:t>
             </a:r>
             <a:r>
               <a:rPr b="0" sz="1700"/>
@@ -1791,7 +1783,7 @@
           <a:p>
             <a:r>
               <a:rPr b="0" sz="1700"/>
-              <a:t>  イット ドライヴズ </a:t>
+              <a:t>  イット ドライブズ </a:t>
             </a:r>
             <a:r>
               <a:rPr b="1" sz="1700"/>
@@ -1831,7 +1823,7 @@
           <a:p>
             <a:r>
               <a:rPr b="0" sz="1700"/>
-              <a:t>  ア フォウトウ オヴ ジ オブジェクト アンロックス </a:t>
+              <a:t>  ア フォト オブ ジ オブジェクト アンロックス </a:t>
             </a:r>
             <a:r>
               <a:rPr b="1" sz="1700"/>
@@ -1851,19 +1843,23 @@
           <a:p>
             <a:r>
               <a:rPr b="0" sz="1700"/>
-              <a:t>  ザ クリプト ステイズ ウィズ </a:t>
-            </a:r>
-            <a:r>
-              <a:rPr b="1" sz="1700"/>
-              <a:t>アーゴン トゥー アイディー</a:t>
-            </a:r>
-            <a:r>
-              <a:rPr b="0" sz="1700"/>
-              <a:t> アンド </a:t>
-            </a:r>
-            <a:r>
-              <a:rPr b="1" sz="1700"/>
-              <a:t>エイ イー エス ジー シー エム</a:t>
+              <a:t>  ザ クリプト ステイズ ウィズ アーゴン ツー アイディー アンド エイ イー エス ジー シー エム。</a:t>
+            </a:r>
+          </a:p>
+          <a:p>
+            <a:r>
+              <a:rPr b="0" sz="1700"/>
+              <a:t>The object only decides whether you get to act.</a:t>
+            </a:r>
+          </a:p>
+          <a:p>
+            <a:r>
+              <a:rPr b="0" sz="1700"/>
+              <a:t>  ジ オブジェクト オンリー ディサイズ ウェザー ユー ゲット トゥ </a:t>
+            </a:r>
+            <a:r>
+              <a:rPr b="1" sz="1700"/>
+              <a:t>アクト</a:t>
             </a:r>
             <a:r>
               <a:rPr b="0" sz="1700"/>
@@ -1873,17 +1869,45 @@
           <a:p>
             <a:r>
               <a:rPr b="0" sz="1700"/>
-              <a:t>The object only decides whether you get to act.</a:t>
-            </a:r>
-          </a:p>
-          <a:p>
-            <a:r>
-              <a:rPr b="0" sz="1700"/>
-              <a:t>  ジ オブジェクト オウンリー ディサイズ ウェザー ユー ゲット トゥ </a:t>
-            </a:r>
-            <a:r>
-              <a:rPr b="1" sz="1700"/>
-              <a:t>アクト</a:t>
+              <a:t>And you’ll watch this fail, live, in a few minutes.</a:t>
+            </a:r>
+          </a:p>
+          <a:p>
+            <a:r>
+              <a:rPr b="0" sz="1700"/>
+              <a:t>  アンド ユール ウォッチ ディス </a:t>
+            </a:r>
+            <a:r>
+              <a:rPr b="1" sz="1700"/>
+              <a:t>フェイル</a:t>
+            </a:r>
+            <a:r>
+              <a:rPr b="0" sz="1700"/>
+              <a:t>、 </a:t>
+            </a:r>
+            <a:r>
+              <a:rPr b="1" sz="1700"/>
+              <a:t>ライブ</a:t>
+            </a:r>
+            <a:r>
+              <a:rPr b="0" sz="1700"/>
+              <a:t>、 イン ア フュー ミニッツ。</a:t>
+            </a:r>
+          </a:p>
+          <a:p>
+            <a:r>
+              <a:rPr b="0" sz="1700"/>
+              <a:t>Same file. Same password. No object.”</a:t>
+            </a:r>
+          </a:p>
+          <a:p>
+            <a:r>
+              <a:rPr b="0" sz="1700"/>
+              <a:t>  セイム ファイル。 セイム パスワード。 </a:t>
+            </a:r>
+            <a:r>
+              <a:rPr b="1" sz="1700"/>
+              <a:t>ノウ オブジェクト</a:t>
             </a:r>
             <a:r>
               <a:rPr b="0" sz="1700"/>
@@ -1893,17 +1917,29 @@
           <a:p>
             <a:r>
               <a:rPr b="0" sz="1700"/>
-              <a:t>And you’ll watch this fail, live, in a few minutes.</a:t>
-            </a:r>
-          </a:p>
-          <a:p>
-            <a:r>
-              <a:rPr b="0" sz="1700"/>
-              <a:t>  アンド ユール ウォッチ ディス </a:t>
-            </a:r>
-            <a:r>
-              <a:rPr b="1" sz="1700"/>
-              <a:t>フェイル</a:t>
+              <a:t/>
+            </a:r>
+          </a:p>
+          <a:p>
+            <a:r>
+              <a:rPr b="0" sz="1700"/>
+              <a:t>SPEAK（決めゼリフ・間を置いて）</a:t>
+            </a:r>
+          </a:p>
+          <a:p>
+            <a:r>
+              <a:rPr b="0" sz="1700"/>
+              <a:t>“A cue, not a key. A photo of it unlocks nothing.”</a:t>
+            </a:r>
+          </a:p>
+          <a:p>
+            <a:r>
+              <a:rPr b="0" sz="1700"/>
+              <a:t>  ア </a:t>
+            </a:r>
+            <a:r>
+              <a:rPr b="1" sz="1700"/>
+              <a:t>キュー</a:t>
             </a:r>
             <a:r>
               <a:rPr b="0" sz="1700"/>
@@ -1911,27 +1947,15 @@
             </a:r>
             <a:r>
               <a:rPr b="1" sz="1700"/>
-              <a:t>ライヴ</a:t>
-            </a:r>
-            <a:r>
-              <a:rPr b="0" sz="1700"/>
-              <a:t>、 イン ア フュー ミニッツ。</a:t>
-            </a:r>
-          </a:p>
-          <a:p>
-            <a:r>
-              <a:rPr b="0" sz="1700"/>
-              <a:t>Same file. Same password. No object.”</a:t>
-            </a:r>
-          </a:p>
-          <a:p>
-            <a:r>
-              <a:rPr b="0" sz="1700"/>
-              <a:t>  セイム ファイル。 セイム パスワード。 </a:t>
-            </a:r>
-            <a:r>
-              <a:rPr b="1" sz="1700"/>
-              <a:t>ノウ オブジェクト</a:t>
+              <a:t>ナット</a:t>
+            </a:r>
+            <a:r>
+              <a:rPr b="0" sz="1700"/>
+              <a:t> ア キー。 ア フォト オブ イット アンロックス </a:t>
+            </a:r>
+            <a:r>
+              <a:rPr b="1" sz="1700"/>
+              <a:t>ナッシング</a:t>
             </a:r>
             <a:r>
               <a:rPr b="0" sz="1700"/>
@@ -1946,56 +1970,8 @@
           </a:p>
           <a:p>
             <a:r>
-              <a:rPr b="0" sz="1700"/>
-              <a:t>SPEAK（決めゼリフ・間を置いて）</a:t>
-            </a:r>
-          </a:p>
-          <a:p>
-            <a:r>
-              <a:rPr b="0" sz="1700"/>
-              <a:t>“A cue, not a key. A photo of it unlocks nothing.”</a:t>
-            </a:r>
-          </a:p>
-          <a:p>
-            <a:r>
-              <a:rPr b="0" sz="1700"/>
-              <a:t>  ア </a:t>
-            </a:r>
-            <a:r>
-              <a:rPr b="1" sz="1700"/>
-              <a:t>キュー</a:t>
-            </a:r>
-            <a:r>
-              <a:rPr b="0" sz="1700"/>
-              <a:t>、 </a:t>
-            </a:r>
-            <a:r>
-              <a:rPr b="1" sz="1700"/>
-              <a:t>ナット</a:t>
-            </a:r>
-            <a:r>
-              <a:rPr b="0" sz="1700"/>
-              <a:t> ア キー。 ア フォウトウ オヴ イット アンロックス </a:t>
-            </a:r>
-            <a:r>
-              <a:rPr b="1" sz="1700"/>
-              <a:t>ナッシング</a:t>
-            </a:r>
-            <a:r>
-              <a:rPr b="0" sz="1700"/>
-              <a:t>。</a:t>
-            </a:r>
-          </a:p>
-          <a:p>
-            <a:r>
-              <a:rPr b="0" sz="1700"/>
-              <a:t/>
-            </a:r>
-          </a:p>
-          <a:p>
-            <a:r>
               <a:rPr b="0" sz="1200"/>
-              <a:t>JA: ゆっくり。手元の物体を掲げると効果的。最後の一文で Step 4 を予告する — 実証を約束しておくとデモの山が強くなる</a:t>
+              <a:t>JA: ゆっくり。手元の物体を掲げると効果的。最後の一文で SCENE 6・7 の拒否を予告する — 実証を約束しておくとデモの山が強くなる</a:t>
             </a:r>
           </a:p>
         </p:txBody>
@@ -2140,7 +2116,7 @@
           <a:p>
             <a:r>
               <a:rPr b="0" sz="1700"/>
-              <a:t>  ワン ホットキー ドロップス ザ センシティヴ インターフェイス イントゥ ア </a:t>
+              <a:t>  ワン ホットキー ドロップス ザ センシティブ インターフェイス イントゥ ア </a:t>
             </a:r>
             <a:r>
               <a:rPr b="1" sz="1700"/>
@@ -2154,17 +2130,17 @@
           <a:p>
             <a:r>
               <a:rPr b="0" sz="1700"/>
-              <a:t>Coming back needs re-authentication.</a:t>
-            </a:r>
-          </a:p>
-          <a:p>
-            <a:r>
-              <a:rPr b="0" sz="1700"/>
-              <a:t>  カミング バック ニーズ </a:t>
-            </a:r>
-            <a:r>
-              <a:rPr b="1" sz="1700"/>
-              <a:t>リーオーセンティケイション</a:t>
+              <a:t>To come back, you sign in again.</a:t>
+            </a:r>
+          </a:p>
+          <a:p>
+            <a:r>
+              <a:rPr b="0" sz="1700"/>
+              <a:t>  トゥ カム バック、 ユー </a:t>
+            </a:r>
+            <a:r>
+              <a:rPr b="1" sz="1700"/>
+              <a:t>サイン イン アゲイン</a:t>
             </a:r>
             <a:r>
               <a:rPr b="0" sz="1700"/>
@@ -2188,7 +2164,7 @@
             </a:r>
             <a:r>
               <a:rPr b="0" sz="1700"/>
-              <a:t>。 アンド アイ ワナ ビー </a:t>
+              <a:t>。 アンド アイ ウォント トゥ ビー </a:t>
             </a:r>
             <a:r>
               <a:rPr b="1" sz="1700"/>
@@ -2208,7 +2184,7 @@
           <a:p>
             <a:r>
               <a:rPr b="0" sz="1700"/>
-              <a:t>  ザ ファイル ユー ウド ハンド オウヴァー イズ ア ファイル ユー </a:t>
+              <a:t>  ザ ファイル ユー ウド ハンド オーバー イズ ア ファイル ユー </a:t>
             </a:r>
             <a:r>
               <a:rPr b="1" sz="1700"/>
@@ -2242,41 +2218,41 @@
           <a:p>
             <a:r>
               <a:rPr b="0" sz="1700"/>
-              <a:t>Phasmid does not manufacture your cover story.</a:t>
-            </a:r>
-          </a:p>
-          <a:p>
-            <a:r>
-              <a:rPr b="0" sz="1700"/>
-              <a:t>  ファズミッド ダズ </a:t>
-            </a:r>
-            <a:r>
-              <a:rPr b="1" sz="1700"/>
-              <a:t>ナット</a:t>
-            </a:r>
-            <a:r>
-              <a:rPr b="0" sz="1700"/>
-              <a:t> マニュファクチャー ユア カヴァー ストーリー。</a:t>
-            </a:r>
-          </a:p>
-          <a:p>
-            <a:r>
-              <a:rPr b="0" sz="1700"/>
-              <a:t>Generated data would not survive five minutes of questioning.</a:t>
-            </a:r>
-          </a:p>
-          <a:p>
-            <a:r>
-              <a:rPr b="0" sz="1700"/>
-              <a:t>  ジェネレイティッド データ ウド ナット </a:t>
-            </a:r>
-            <a:r>
-              <a:rPr b="1" sz="1700"/>
-              <a:t>サヴァイヴ</a:t>
-            </a:r>
-            <a:r>
-              <a:rPr b="0" sz="1700"/>
-              <a:t> ファイヴ ミニッツ オヴ クエスチョニング。</a:t>
+              <a:t>Phasmid does not make up your cover story.</a:t>
+            </a:r>
+          </a:p>
+          <a:p>
+            <a:r>
+              <a:rPr b="0" sz="1700"/>
+              <a:t>  ファズミッド ダズ ナット </a:t>
+            </a:r>
+            <a:r>
+              <a:rPr b="1" sz="1700"/>
+              <a:t>メイク アップ</a:t>
+            </a:r>
+            <a:r>
+              <a:rPr b="0" sz="1700"/>
+              <a:t> ユア カバー ストーリー。</a:t>
+            </a:r>
+          </a:p>
+          <a:p>
+            <a:r>
+              <a:rPr b="0" sz="1700"/>
+              <a:t>Made-up data would not survive five minutes of questions.</a:t>
+            </a:r>
+          </a:p>
+          <a:p>
+            <a:r>
+              <a:rPr b="0" sz="1700"/>
+              <a:t>  </a:t>
+            </a:r>
+            <a:r>
+              <a:rPr b="1" sz="1700"/>
+              <a:t>メイドアップ データ</a:t>
+            </a:r>
+            <a:r>
+              <a:rPr b="0" sz="1700"/>
+              <a:t> ウド ナット サバイブ ファイブ ミニッツ オブ クエスチョンズ。</a:t>
             </a:r>
           </a:p>
           <a:p>
@@ -2302,21 +2278,29 @@
           <a:p>
             <a:r>
               <a:rPr b="0" sz="1700"/>
-              <a:t>Realism has to come from your own material — not from my random-text generator.</a:t>
-            </a:r>
-          </a:p>
-          <a:p>
-            <a:r>
-              <a:rPr b="0" sz="1700"/>
-              <a:t>  </a:t>
-            </a:r>
-            <a:r>
-              <a:rPr b="1" sz="1700"/>
-              <a:t>リアリズム</a:t>
-            </a:r>
-            <a:r>
-              <a:rPr b="0" sz="1700"/>
-              <a:t> ハズ トゥ カム フロム ユア オウン マテリアル — ナット フロム マイ ランダムテクスト ジェネレイター。</a:t>
+              <a:t>It has to be yours — not text my tool made up.</a:t>
+            </a:r>
+          </a:p>
+          <a:p>
+            <a:r>
+              <a:rPr b="0" sz="1700"/>
+              <a:t>  イット ハズ トゥ ビー </a:t>
+            </a:r>
+            <a:r>
+              <a:rPr b="1" sz="1700"/>
+              <a:t>ユアーズ</a:t>
+            </a:r>
+            <a:r>
+              <a:rPr b="0" sz="1700"/>
+              <a:t> — ナット テクスト マイ ツール </a:t>
+            </a:r>
+            <a:r>
+              <a:rPr b="1" sz="1700"/>
+              <a:t>メイド アップ</a:t>
+            </a:r>
+            <a:r>
+              <a:rPr b="0" sz="1700"/>
+              <a:t>。</a:t>
             </a:r>
           </a:p>
           <a:p>
@@ -2328,7 +2312,7 @@
           <a:p>
             <a:r>
               <a:rPr b="0" sz="1700"/>
-              <a:t>  ワット ザ ツール ダズ ギヴ ユー イズ </a:t>
+              <a:t>  ワット ザ ツール ダズ ギブ ユー イズ </a:t>
             </a:r>
             <a:r>
               <a:rPr b="1" sz="1700"/>
@@ -2380,15 +2364,15 @@
             </a:r>
             <a:r>
               <a:rPr b="1" sz="1700"/>
-              <a:t>ヴォリューム プロブレム</a:t>
-            </a:r>
-            <a:r>
-              <a:rPr b="0" sz="1700"/>
-              <a:t>。 アンド ヴォリューム イズ サムシング ソフトウェア キャン </a:t>
-            </a:r>
-            <a:r>
-              <a:rPr b="1" sz="1700"/>
-              <a:t>アクチュアリー ソルヴ</a:t>
+              <a:t>ボリューム プロブレム</a:t>
+            </a:r>
+            <a:r>
+              <a:rPr b="0" sz="1700"/>
+              <a:t>。 アンド ボリューム イズ サムシング ソフトウェア キャン </a:t>
+            </a:r>
+            <a:r>
+              <a:rPr b="1" sz="1700"/>
+              <a:t>アクチュアリー ソルブ</a:t>
             </a:r>
             <a:r>
               <a:rPr b="0" sz="1700"/>
@@ -2408,11 +2392,11 @@
             </a:r>
             <a:r>
               <a:rPr b="1" sz="1700"/>
-              <a:t>コンテクスト プロウファイルズ</a:t>
-            </a:r>
-            <a:r>
-              <a:rPr b="0" sz="1700"/>
-              <a:t>。 トラヴル。 フィールド エンジニア。 リサーチャー。</a:t>
+              <a:t>コンテクスト プロファイルズ</a:t>
+            </a:r>
+            <a:r>
+              <a:rPr b="0" sz="1700"/>
+              <a:t>。 トラベル。 フィールド エンジニア。 リサーチャー。</a:t>
             </a:r>
           </a:p>
           <a:p>
@@ -2438,37 +2422,25 @@
           <a:p>
             <a:r>
               <a:rPr b="0" sz="1700"/>
-              <a:t>And in coercion-safe mode, a low-confidence match goes to the disclosure face, instead of failing loudly.</a:t>
-            </a:r>
-          </a:p>
-          <a:p>
-            <a:r>
-              <a:rPr b="0" sz="1700"/>
-              <a:t>  アンド イン コアージョンセイフ モウド、 ア ロウ コンフィデンス マッチ ゴウズ トゥ ザ </a:t>
-            </a:r>
-            <a:r>
-              <a:rPr b="1" sz="1700"/>
-              <a:t>ディスクロージャー フェイス</a:t>
-            </a:r>
-            <a:r>
-              <a:rPr b="0" sz="1700"/>
-              <a:t>、 インステッド オヴ フェイリング ラウドリー。</a:t>
-            </a:r>
-          </a:p>
-          <a:p>
-            <a:r>
-              <a:rPr b="0" sz="1700"/>
-              <a:t>The goal isn’t magic invisibility.</a:t>
-            </a:r>
-          </a:p>
-          <a:p>
-            <a:r>
-              <a:rPr b="0" sz="1700"/>
-              <a:t>  ザ ゴウル イズント </a:t>
-            </a:r>
-            <a:r>
-              <a:rPr b="1" sz="1700"/>
-              <a:t>マジック インヴィジビリティ</a:t>
+              <a:t>And in coercion-safe mode, a weak match goes to the disclosure face — it does not fail loudly.</a:t>
+            </a:r>
+          </a:p>
+          <a:p>
+            <a:r>
+              <a:rPr b="0" sz="1700"/>
+              <a:t>  アンド イン コアージョンセイフ モード、 ア </a:t>
+            </a:r>
+            <a:r>
+              <a:rPr b="1" sz="1700"/>
+              <a:t>ウィーク マッチ</a:t>
+            </a:r>
+            <a:r>
+              <a:rPr b="0" sz="1700"/>
+              <a:t> ゴーズ トゥ ザ ディスクロージャー フェイス — イット ダズ </a:t>
+            </a:r>
+            <a:r>
+              <a:rPr b="1" sz="1700"/>
+              <a:t>ナット フェイル ラウドリー</a:t>
             </a:r>
             <a:r>
               <a:rPr b="0" sz="1700"/>
@@ -2478,17 +2450,37 @@
           <a:p>
             <a:r>
               <a:rPr b="0" sz="1700"/>
-              <a:t>The goal is uncertainty, and delay.”</a:t>
-            </a:r>
-          </a:p>
-          <a:p>
-            <a:r>
-              <a:rPr b="0" sz="1700"/>
-              <a:t>  ザ ゴウル イズ </a:t>
-            </a:r>
-            <a:r>
-              <a:rPr b="1" sz="1700"/>
-              <a:t>アンサートゥンティ</a:t>
+              <a:t>The goal is not to be invisible.</a:t>
+            </a:r>
+          </a:p>
+          <a:p>
+            <a:r>
+              <a:rPr b="0" sz="1700"/>
+              <a:t>  ザ ゴール イズ </a:t>
+            </a:r>
+            <a:r>
+              <a:rPr b="1" sz="1700"/>
+              <a:t>ナット トゥ ビー インビジブル</a:t>
+            </a:r>
+            <a:r>
+              <a:rPr b="0" sz="1700"/>
+              <a:t>。</a:t>
+            </a:r>
+          </a:p>
+          <a:p>
+            <a:r>
+              <a:rPr b="0" sz="1700"/>
+              <a:t>The goal is doubt, and time.”</a:t>
+            </a:r>
+          </a:p>
+          <a:p>
+            <a:r>
+              <a:rPr b="0" sz="1700"/>
+              <a:t>  ザ ゴール イズ </a:t>
+            </a:r>
+            <a:r>
+              <a:rPr b="1" sz="1700"/>
+              <a:t>ダウト</a:t>
             </a:r>
             <a:r>
               <a:rPr b="0" sz="1700"/>
@@ -2496,7 +2488,7 @@
             </a:r>
             <a:r>
               <a:rPr b="1" sz="1700"/>
-              <a:t>ディレイ</a:t>
+              <a:t>タイム</a:t>
             </a:r>
             <a:r>
               <a:rPr b="0" sz="1700"/>
@@ -2512,7 +2504,7 @@
           <a:p>
             <a:r>
               <a:rPr b="0" sz="1200"/>
-              <a:t>JA: 本トークで最も誤解されやすい点。「ツールが囮を作る」と思われた瞬間に設計の真実味が全部落ちる。「囮は利用者が用意する」と「填充は空き領域対策に過ぎない」を分けて言い切る。Silent Standby はデモで見せると予告</a:t>
+              <a:t>JA: 本トークで最も誤解されやすい点。「ツールが囮を作る」と思われた瞬間に設計の真実味が全部落ちる。「囮は利用者が用意する」と「填充は空き領域対策に過ぎない」を分けて言い切る。Silent Standby はデモで見せないので予告しない — 概念としてここで説明しきる</a:t>
             </a:r>
           </a:p>
         </p:txBody>
@@ -2638,7 +2630,7 @@
           <a:p>
             <a:r>
               <a:rPr b="0" sz="1700"/>
-              <a:t>  ザ ヴォルト ファイル </a:t>
+              <a:t>  ザ ボールト ファイル </a:t>
             </a:r>
             <a:r>
               <a:rPr b="1" sz="1700"/>
@@ -2662,39 +2654,39 @@
             </a:r>
             <a:r>
               <a:rPr b="1" sz="1700"/>
-              <a:t>リヴィール</a:t>
-            </a:r>
-            <a:r>
-              <a:rPr b="0" sz="1700"/>
-              <a:t> ストラクチャー、 オア リカヴァリー。</a:t>
-            </a:r>
-          </a:p>
-          <a:p>
-            <a:r>
-              <a:rPr b="0" sz="1700"/>
-              <a:t>And metadata reduction is best-effort. Support — not sanitization.</a:t>
-            </a:r>
-          </a:p>
-          <a:p>
-            <a:r>
-              <a:rPr b="0" sz="1700"/>
-              <a:t>  アンド メタデータ リダクション イズ </a:t>
-            </a:r>
-            <a:r>
-              <a:rPr b="1" sz="1700"/>
-              <a:t>ベスト エフォート</a:t>
-            </a:r>
-            <a:r>
-              <a:rPr b="0" sz="1700"/>
-              <a:t>。 サポート — </a:t>
-            </a:r>
-            <a:r>
-              <a:rPr b="1" sz="1700"/>
-              <a:t>ナット</a:t>
-            </a:r>
-            <a:r>
-              <a:rPr b="0" sz="1700"/>
-              <a:t> サニタイゼイション。</a:t>
+              <a:t>リビール</a:t>
+            </a:r>
+            <a:r>
+              <a:rPr b="0" sz="1700"/>
+              <a:t> ストラクチャー、 オア リカバリー。</a:t>
+            </a:r>
+          </a:p>
+          <a:p>
+            <a:r>
+              <a:rPr b="0" sz="1700"/>
+              <a:t>And metadata reduction is best-effort. It helps — it does not clean.</a:t>
+            </a:r>
+          </a:p>
+          <a:p>
+            <a:r>
+              <a:rPr b="0" sz="1700"/>
+              <a:t>  アンド メタデータ リダクション イズ ベスト エフォート。 イット </a:t>
+            </a:r>
+            <a:r>
+              <a:rPr b="1" sz="1700"/>
+              <a:t>ヘルプス</a:t>
+            </a:r>
+            <a:r>
+              <a:rPr b="0" sz="1700"/>
+              <a:t> — イット ダズ </a:t>
+            </a:r>
+            <a:r>
+              <a:rPr b="1" sz="1700"/>
+              <a:t>ナット クリーン</a:t>
+            </a:r>
+            <a:r>
+              <a:rPr b="0" sz="1700"/>
+              <a:t>。</a:t>
             </a:r>
           </a:p>
           <a:p>
@@ -2806,101 +2798,101 @@
           <a:p>
             <a:r>
               <a:rPr b="0" sz="1700"/>
-              <a:t>Operationally, it’s four steps.</a:t>
-            </a:r>
-          </a:p>
-          <a:p>
-            <a:r>
-              <a:rPr b="0" sz="1700"/>
-              <a:t>  オペレイショナリー、 イッツ </a:t>
-            </a:r>
-            <a:r>
-              <a:rPr b="1" sz="1700"/>
-              <a:t>フォー ステップス</a:t>
+              <a:t>In practice, it is four steps.</a:t>
+            </a:r>
+          </a:p>
+          <a:p>
+            <a:r>
+              <a:rPr b="0" sz="1700"/>
+              <a:t>  </a:t>
+            </a:r>
+            <a:r>
+              <a:rPr b="1" sz="1700"/>
+              <a:t>イン プラクティス</a:t>
+            </a:r>
+            <a:r>
+              <a:rPr b="0" sz="1700"/>
+              <a:t>、 イッツ フォー ステップス。</a:t>
+            </a:r>
+          </a:p>
+          <a:p>
+            <a:r>
+              <a:rPr b="0" sz="1700"/>
+              <a:t>Prepare a vessel.</a:t>
+            </a:r>
+          </a:p>
+          <a:p>
+            <a:r>
+              <a:rPr b="0" sz="1700"/>
+              <a:t>  </a:t>
+            </a:r>
+            <a:r>
+              <a:rPr b="1" sz="1700"/>
+              <a:t>プリペア</a:t>
+            </a:r>
+            <a:r>
+              <a:rPr b="0" sz="1700"/>
+              <a:t> ア ベッセル。</a:t>
+            </a:r>
+          </a:p>
+          <a:p>
+            <a:r>
+              <a:rPr b="0" sz="1700"/>
+              <a:t>Bind it — to local state, and to the object cue.</a:t>
+            </a:r>
+          </a:p>
+          <a:p>
+            <a:r>
+              <a:rPr b="0" sz="1700"/>
+              <a:t>  </a:t>
+            </a:r>
+            <a:r>
+              <a:rPr b="1" sz="1700"/>
+              <a:t>バインド</a:t>
+            </a:r>
+            <a:r>
+              <a:rPr b="0" sz="1700"/>
+              <a:t> イット — トゥ ローカル ステイト、 アンド トゥ ジ オブジェクト キュー。</a:t>
+            </a:r>
+          </a:p>
+          <a:p>
+            <a:r>
+              <a:rPr b="0" sz="1700"/>
+              <a:t>Operate it — through the CLI, the TUI, or the local web interface.</a:t>
+            </a:r>
+          </a:p>
+          <a:p>
+            <a:r>
+              <a:rPr b="0" sz="1700"/>
+              <a:t>  </a:t>
+            </a:r>
+            <a:r>
+              <a:rPr b="1" sz="1700"/>
+              <a:t>オペレイト</a:t>
+            </a:r>
+            <a:r>
+              <a:rPr b="0" sz="1700"/>
+              <a:t> イット — スルー ザ シー エル アイ、 ザ ティー ユー アイ、 オア ザ ローカル ウェブ インターフェイス。</a:t>
+            </a:r>
+          </a:p>
+          <a:p>
+            <a:r>
+              <a:rPr b="0" sz="1700"/>
+              <a:t>Disclose — controlled, under assumptions we wrote down.</a:t>
+            </a:r>
+          </a:p>
+          <a:p>
+            <a:r>
+              <a:rPr b="0" sz="1700"/>
+              <a:t>  ディスクローズ — コントロールド、 アンダー アサンプションズ </a:t>
+            </a:r>
+            <a:r>
+              <a:rPr b="1" sz="1700"/>
+              <a:t>ウィー ロート ダウン</a:t>
             </a:r>
             <a:r>
               <a:rPr b="0" sz="1700"/>
               <a:t>。</a:t>
-            </a:r>
-          </a:p>
-          <a:p>
-            <a:r>
-              <a:rPr b="0" sz="1700"/>
-              <a:t>Prepare a vessel.</a:t>
-            </a:r>
-          </a:p>
-          <a:p>
-            <a:r>
-              <a:rPr b="0" sz="1700"/>
-              <a:t>  </a:t>
-            </a:r>
-            <a:r>
-              <a:rPr b="1" sz="1700"/>
-              <a:t>プリペア</a:t>
-            </a:r>
-            <a:r>
-              <a:rPr b="0" sz="1700"/>
-              <a:t> ア ヴェッセル。</a:t>
-            </a:r>
-          </a:p>
-          <a:p>
-            <a:r>
-              <a:rPr b="0" sz="1700"/>
-              <a:t>Bind it — to local state, and to the object cue.</a:t>
-            </a:r>
-          </a:p>
-          <a:p>
-            <a:r>
-              <a:rPr b="0" sz="1700"/>
-              <a:t>  </a:t>
-            </a:r>
-            <a:r>
-              <a:rPr b="1" sz="1700"/>
-              <a:t>バインド</a:t>
-            </a:r>
-            <a:r>
-              <a:rPr b="0" sz="1700"/>
-              <a:t> イット — トゥ ローカル ステイト、 アンド トゥ ジ オブジェクト キュー。</a:t>
-            </a:r>
-          </a:p>
-          <a:p>
-            <a:r>
-              <a:rPr b="0" sz="1700"/>
-              <a:t>Operate it — through the CLI, the TUI, or the local web interface.</a:t>
-            </a:r>
-          </a:p>
-          <a:p>
-            <a:r>
-              <a:rPr b="0" sz="1700"/>
-              <a:t>  </a:t>
-            </a:r>
-            <a:r>
-              <a:rPr b="1" sz="1700"/>
-              <a:t>オペレイト</a:t>
-            </a:r>
-            <a:r>
-              <a:rPr b="0" sz="1700"/>
-              <a:t> イット — スルー ザ シー エル アイ、 ザ ティー ユー アイ、 オア ザ ローカル ウェブ インターフェイス。</a:t>
-            </a:r>
-          </a:p>
-          <a:p>
-            <a:r>
-              <a:rPr b="0" sz="1700"/>
-              <a:t>Disclose — controlled, under documented assumptions.</a:t>
-            </a:r>
-          </a:p>
-          <a:p>
-            <a:r>
-              <a:rPr b="0" sz="1700"/>
-              <a:t>  </a:t>
-            </a:r>
-            <a:r>
-              <a:rPr b="1" sz="1700"/>
-              <a:t>ディスクロウズ</a:t>
-            </a:r>
-            <a:r>
-              <a:rPr b="0" sz="1700"/>
-              <a:t> — コントロールド、 アンダー ドキュメンティッド アサンプションズ。</a:t>
             </a:r>
           </a:p>
           <a:p>
@@ -3064,7 +3056,27 @@
           <a:p>
             <a:r>
               <a:rPr b="0" sz="1700"/>
-              <a:t>Argon2id for key derivation.</a:t>
+              <a:t>Argon2id turns a password into a key.</a:t>
+            </a:r>
+          </a:p>
+          <a:p>
+            <a:r>
+              <a:rPr b="0" sz="1700"/>
+              <a:t>  アーゴン ツー アイディー </a:t>
+            </a:r>
+            <a:r>
+              <a:rPr b="1" sz="1700"/>
+              <a:t>ターンズ ア パスワード イントゥ ア キー</a:t>
+            </a:r>
+            <a:r>
+              <a:rPr b="0" sz="1700"/>
+              <a:t>。</a:t>
+            </a:r>
+          </a:p>
+          <a:p>
+            <a:r>
+              <a:rPr b="0" sz="1700"/>
+              <a:t>AES-GCM for authenticated encryption.</a:t>
             </a:r>
           </a:p>
           <a:p>
@@ -3074,31 +3086,11 @@
             </a:r>
             <a:r>
               <a:rPr b="1" sz="1700"/>
-              <a:t>アーゴン トゥー アイディー</a:t>
-            </a:r>
-            <a:r>
-              <a:rPr b="0" sz="1700"/>
-              <a:t> フォー キー デリヴェイション。</a:t>
-            </a:r>
-          </a:p>
-          <a:p>
-            <a:r>
-              <a:rPr b="0" sz="1700"/>
-              <a:t>AES-GCM for authenticated encryption.</a:t>
-            </a:r>
-          </a:p>
-          <a:p>
-            <a:r>
-              <a:rPr b="0" sz="1700"/>
-              <a:t>  </a:t>
-            </a:r>
-            <a:r>
-              <a:rPr b="1" sz="1700"/>
               <a:t>エイ イー エス ジー シー エム</a:t>
             </a:r>
             <a:r>
               <a:rPr b="0" sz="1700"/>
-              <a:t> フォー オーセンティケイティッド インクリプション。</a:t>
+              <a:t> フォー オーセンティケイテッド インクリプション。</a:t>
             </a:r>
           </a:p>
           <a:p>
@@ -3110,15 +3102,7 @@
           <a:p>
             <a:r>
               <a:rPr b="0" sz="1700"/>
-              <a:t>  ザ ウェブ インターフェイス バウンド トゥ </a:t>
-            </a:r>
-            <a:r>
-              <a:rPr b="1" sz="1700"/>
-              <a:t>ローカルホウスト</a:t>
-            </a:r>
-            <a:r>
-              <a:rPr b="0" sz="1700"/>
-              <a:t>。</a:t>
+              <a:t>  ザ ウェブ インターフェイス バウンド トゥ ローカルホスト。</a:t>
             </a:r>
           </a:p>
           <a:p>
@@ -3130,11 +3114,11 @@
           <a:p>
             <a:r>
               <a:rPr b="0" sz="1700"/>
-              <a:t>  オール オヴ イット オン ア </a:t>
-            </a:r>
-            <a:r>
-              <a:rPr b="1" sz="1700"/>
-              <a:t>パイ ズィーロウ トゥー ダブリュー</a:t>
+              <a:t>  オール オブ イット オン ア </a:t>
+            </a:r>
+            <a:r>
+              <a:rPr b="1" sz="1700"/>
+              <a:t>パイ ゼロ トゥー ダブリュー</a:t>
             </a:r>
             <a:r>
               <a:rPr b="0" sz="1700"/>
@@ -3332,11 +3316,11 @@
           <a:p>
             <a:r>
               <a:rPr b="0" sz="1700"/>
-              <a:t>  ア パイ ズィーロウ トゥー ダブリュー、 イン ア </a:t>
-            </a:r>
-            <a:r>
-              <a:rPr b="1" sz="1700"/>
-              <a:t>スリーディー プリンティッド ケイス</a:t>
+              <a:t>  ア パイ ゼロ トゥー ダブリュー、 イン ア </a:t>
+            </a:r>
+            <a:r>
+              <a:rPr b="1" sz="1700"/>
+              <a:t>スリーディー プリンテッド ケイス</a:t>
             </a:r>
             <a:r>
               <a:rPr b="0" sz="1700"/>
@@ -3380,15 +3364,7 @@
           <a:p>
             <a:r>
               <a:rPr b="0" sz="1700"/>
-              <a:t>  ユー リーチ ザ ウェブ インターフェイス オウヴァー </a:t>
-            </a:r>
-            <a:r>
-              <a:rPr b="1" sz="1700"/>
-              <a:t>ユー エス ビー</a:t>
-            </a:r>
-            <a:r>
-              <a:rPr b="0" sz="1700"/>
-              <a:t>、 アット ローカルホウスト。</a:t>
+              <a:t>  ユー リーチ ザ ウェブ インターフェイス オーバー ユー エス ビー、 アット ローカルホスト。</a:t>
             </a:r>
           </a:p>
           <a:p>
@@ -3404,7 +3380,7 @@
             </a:r>
             <a:r>
               <a:rPr b="1" sz="1700"/>
-              <a:t>ネヴァー</a:t>
+              <a:t>ネバー</a:t>
             </a:r>
             <a:r>
               <a:rPr b="0" sz="1700"/>
@@ -3414,21 +3390,29 @@
           <a:p>
             <a:r>
               <a:rPr b="0" sz="1700"/>
-              <a:t>It’s meant to read as an unremarkable little gadget.</a:t>
-            </a:r>
-          </a:p>
-          <a:p>
-            <a:r>
-              <a:rPr b="0" sz="1700"/>
-              <a:t>  イッツ メント トゥ リード アズ アン アンリマーカブル リトル </a:t>
-            </a:r>
-            <a:r>
-              <a:rPr b="1" sz="1700"/>
-              <a:t>ガジェット</a:t>
-            </a:r>
-            <a:r>
-              <a:rPr b="0" sz="1700"/>
-              <a:t>。</a:t>
+              <a:t>It is meant to look like a boring little gadget.</a:t>
+            </a:r>
+          </a:p>
+          <a:p>
+            <a:r>
+              <a:rPr b="0" sz="1700"/>
+              <a:t>  イット イズ メント トゥ </a:t>
+            </a:r>
+            <a:r>
+              <a:rPr b="1" sz="1700"/>
+              <a:t>ルック ライク</a:t>
+            </a:r>
+            <a:r>
+              <a:rPr b="0" sz="1700"/>
+              <a:t> ア </a:t>
+            </a:r>
+            <a:r>
+              <a:rPr b="1" sz="1700"/>
+              <a:t>ボーリング</a:t>
+            </a:r>
+            <a:r>
+              <a:rPr b="0" sz="1700"/>
+              <a:t> リトル ガジェット。</a:t>
             </a:r>
           </a:p>
           <a:p>
@@ -3444,7 +3428,7 @@
             </a:r>
             <a:r>
               <a:rPr b="1" sz="1700"/>
-              <a:t>ゥライト ヒア</a:t>
+              <a:t>ライト ヒア</a:t>
             </a:r>
             <a:r>
               <a:rPr b="0" sz="1700"/>
@@ -3614,15 +3598,7 @@
           <a:p>
             <a:r>
               <a:rPr b="0" sz="1700"/>
-              <a:t>  アーゴン トゥー アイディー、 ウィズ </a:t>
-            </a:r>
-            <a:r>
-              <a:rPr b="1" sz="1700"/>
-              <a:t>ローカル アクセスキー マテリアル</a:t>
-            </a:r>
-            <a:r>
-              <a:rPr b="0" sz="1700"/>
-              <a:t> ミクスト イン、 アンド デバイス バインディング。</a:t>
+              <a:t>  アーゴン ツー アイディー、 ウィズ ローカル アクセスキー マテリアル ミクスト イン、 アンド デバイス バインディング。</a:t>
             </a:r>
           </a:p>
           <a:p>
@@ -3670,7 +3646,7 @@
             </a:r>
             <a:r>
               <a:rPr b="0" sz="1700"/>
-              <a:t>、 ウィズ オーセンティケイティッド メタデータ。</a:t>
+              <a:t>、 ウィズ オーセンティケイテッド メタデータ。</a:t>
             </a:r>
           </a:p>
           <a:p>
@@ -3690,7 +3666,7 @@
             </a:r>
             <a:r>
               <a:rPr b="0" sz="1700"/>
-              <a:t> イン ザ ヴォルト。</a:t>
+              <a:t> イン ザ ボールト。</a:t>
             </a:r>
           </a:p>
           <a:p>
@@ -3702,7 +3678,7 @@
           <a:p>
             <a:r>
               <a:rPr b="0" sz="1700"/>
-              <a:t>  スタートアップ セルフテスツ チェック ザ プリミティヴズ </a:t>
+              <a:t>  スタートアップ セルフテスツ チェック ザ プリミティブズ </a:t>
             </a:r>
             <a:r>
               <a:rPr b="1" sz="1700"/>
@@ -3892,7 +3868,7 @@
             </a:r>
             <a:r>
               <a:rPr b="0" sz="1700"/>
-              <a:t>、 エヴリ デイ。</a:t>
+              <a:t>、 エブリ デイ。</a:t>
             </a:r>
           </a:p>
           <a:p>
@@ -3952,7 +3928,7 @@
           <a:p>
             <a:r>
               <a:rPr b="0" sz="1700"/>
-              <a:t>  オフェンシヴ ワーク トート ミー ザ ウィーク リンク イズ ザ </a:t>
+              <a:t>  オフェンシブ ワーク トート ミー ザ ウィーク リンク イズ ザ </a:t>
             </a:r>
             <a:r>
               <a:rPr b="1" sz="1700"/>
@@ -3972,11 +3948,11 @@
           <a:p>
             <a:r>
               <a:rPr b="0" sz="1700"/>
-              <a:t>  ソウ アイ ターン オフェンシヴ エクスピアリエンス イントゥ </a:t>
-            </a:r>
-            <a:r>
-              <a:rPr b="1" sz="1700"/>
-              <a:t>ディフェンシヴ ツールズ</a:t>
+              <a:t>  ソウ アイ ターン オフェンシブ エクスピアリエンス イントゥ </a:t>
+            </a:r>
+            <a:r>
+              <a:rPr b="1" sz="1700"/>
+              <a:t>ディフェンシブ ツールズ</a:t>
             </a:r>
             <a:r>
               <a:rPr b="0" sz="1700"/>
@@ -4040,7 +4016,7 @@
           <a:p>
             <a:r>
               <a:rPr b="0" sz="1700"/>
-              <a:t>  ブラック ハット アーサナル。 ビーサイズ。 セクター。 コウド ブルー。</a:t>
+              <a:t>  ブラック ハット アーサナル。 ビーサイズ。 セクター。 コード ブルー。</a:t>
             </a:r>
           </a:p>
           <a:p>
@@ -4172,7 +4148,7 @@
           <a:p>
             <a:r>
               <a:rPr b="0" sz="1700"/>
-              <a:t>And the web interface is hardened — not an afterthought.</a:t>
+              <a:t>And the web interface is hardened — not bolted on later.</a:t>
             </a:r>
           </a:p>
           <a:p>
@@ -4186,7 +4162,15 @@
             </a:r>
             <a:r>
               <a:rPr b="0" sz="1700"/>
-              <a:t> — ナット アン アフターソート。</a:t>
+              <a:t> — ナット </a:t>
+            </a:r>
+            <a:r>
+              <a:rPr b="1" sz="1700"/>
+              <a:t>ボルテッド オン レイター</a:t>
+            </a:r>
+            <a:r>
+              <a:rPr b="0" sz="1700"/>
+              <a:t>。</a:t>
             </a:r>
           </a:p>
           <a:p>
@@ -4198,7 +4182,23 @@
           <a:p>
             <a:r>
               <a:rPr b="0" sz="1700"/>
-              <a:t>  ローカルホウスト バインディング。 パープロセス トウクンズ。</a:t>
+              <a:t>  </a:t>
+            </a:r>
+            <a:r>
+              <a:rPr b="1" sz="1700"/>
+              <a:t>ローカルホスト</a:t>
+            </a:r>
+            <a:r>
+              <a:rPr b="0" sz="1700"/>
+              <a:t> バインディング。 パープロセス </a:t>
+            </a:r>
+            <a:r>
+              <a:rPr b="1" sz="1700"/>
+              <a:t>トークンズ</a:t>
+            </a:r>
+            <a:r>
+              <a:rPr b="0" sz="1700"/>
+              <a:t>。</a:t>
             </a:r>
           </a:p>
           <a:p>
@@ -4210,15 +4210,15 @@
           <a:p>
             <a:r>
               <a:rPr b="0" sz="1700"/>
-              <a:t>  ア リストリクティッド コンファメイション セッション: </a:t>
-            </a:r>
-            <a:r>
-              <a:rPr b="1" sz="1700"/>
-              <a:t>エイチ ティー ティー ピー オウンリー</a:t>
-            </a:r>
-            <a:r>
-              <a:rPr b="0" sz="1700"/>
-              <a:t>、 アンド ショートリヴド。</a:t>
+              <a:t>  ア </a:t>
+            </a:r>
+            <a:r>
+              <a:rPr b="1" sz="1700"/>
+              <a:t>リストリクテッド コンファメイション</a:t>
+            </a:r>
+            <a:r>
+              <a:rPr b="0" sz="1700"/>
+              <a:t> セッション: エイチ ティー ティー ピー オンリー、 アンド ショートリブド。</a:t>
             </a:r>
           </a:p>
           <a:p>
@@ -4230,7 +4230,7 @@
           <a:p>
             <a:r>
               <a:rPr b="0" sz="1700"/>
-              <a:t>  アテンプト リミティング。 レイト リミティング。 インアクティヴィティ オートキル。 ハードゥンド ヘダーズ。</a:t>
+              <a:t>  アテンプト リミティング。 レイト リミティング。 インアクティビティ オートキル。 ハードゥンド ヘダーズ。</a:t>
             </a:r>
           </a:p>
           <a:p>
@@ -4423,7 +4423,7 @@
           <a:p>
             <a:r>
               <a:rPr b="0" sz="1700"/>
-              <a:t>  スタンドバイ。 ワークフロウズ ザット プリザーヴ </a:t>
+              <a:t>  スタンドバイ。 ワークフロウズ ザット プリザーブ </a:t>
             </a:r>
             <a:r>
               <a:rPr b="1" sz="1700"/>
@@ -4437,39 +4437,47 @@
           <a:p>
             <a:r>
               <a:rPr b="0" sz="1700"/>
-              <a:t>It explicitly disallows rootkits. Kernel-level hiding.</a:t>
-            </a:r>
-          </a:p>
-          <a:p>
-            <a:r>
-              <a:rPr b="0" sz="1700"/>
-              <a:t>  イット エクスプリシットリー </a:t>
-            </a:r>
-            <a:r>
-              <a:rPr b="1" sz="1700"/>
-              <a:t>ディサラウズ</a:t>
-            </a:r>
-            <a:r>
-              <a:rPr b="0" sz="1700"/>
-              <a:t> ルートキッツ。 カーネルレヴル ハイディング。</a:t>
-            </a:r>
-          </a:p>
-          <a:p>
-            <a:r>
-              <a:rPr b="0" sz="1700"/>
-              <a:t>Anti-forensic destruction. Forensic-tool bypass.</a:t>
-            </a:r>
-          </a:p>
-          <a:p>
-            <a:r>
-              <a:rPr b="0" sz="1700"/>
-              <a:t>  アンティフォレンシック ディストラクション。 フォレンシック ツール バイパス。</a:t>
-            </a:r>
-          </a:p>
-          <a:p>
-            <a:r>
-              <a:rPr b="0" sz="1700"/>
-              <a:t>And fabricating false events, or false timestamps.</a:t>
+              <a:t>It rules out rootkits. Kernel-level hiding.</a:t>
+            </a:r>
+          </a:p>
+          <a:p>
+            <a:r>
+              <a:rPr b="0" sz="1700"/>
+              <a:t>  イット </a:t>
+            </a:r>
+            <a:r>
+              <a:rPr b="1" sz="1700"/>
+              <a:t>ルールズ アウト</a:t>
+            </a:r>
+            <a:r>
+              <a:rPr b="0" sz="1700"/>
+              <a:t> ルートキッツ。 カーネルレベル ハイディング。</a:t>
+            </a:r>
+          </a:p>
+          <a:p>
+            <a:r>
+              <a:rPr b="0" sz="1700"/>
+              <a:t>Anti-forensic wiping. Forensic-tool bypass.</a:t>
+            </a:r>
+          </a:p>
+          <a:p>
+            <a:r>
+              <a:rPr b="0" sz="1700"/>
+              <a:t>  アンティフォレンジック </a:t>
+            </a:r>
+            <a:r>
+              <a:rPr b="1" sz="1700"/>
+              <a:t>ワイピング</a:t>
+            </a:r>
+            <a:r>
+              <a:rPr b="0" sz="1700"/>
+              <a:t>。 フォレンジック ツール バイパス。</a:t>
+            </a:r>
+          </a:p>
+          <a:p>
+            <a:r>
+              <a:rPr b="0" sz="1700"/>
+              <a:t>And making up false events, or false timestamps.</a:t>
             </a:r>
           </a:p>
           <a:p>
@@ -4479,17 +4487,17 @@
             </a:r>
             <a:r>
               <a:rPr b="1" sz="1700"/>
-              <a:t>ファブリケイティング</a:t>
-            </a:r>
-            <a:r>
-              <a:rPr b="0" sz="1700"/>
-              <a:t> フォルス イヴェンツ、 オア フォルス タイムスタンプス。</a:t>
-            </a:r>
-          </a:p>
-          <a:p>
-            <a:r>
-              <a:rPr b="0" sz="1700"/>
-              <a:t>It increases uncertainty. It delays a confident conclusion.</a:t>
+              <a:t>メイキング アップ</a:t>
+            </a:r>
+            <a:r>
+              <a:rPr b="0" sz="1700"/>
+              <a:t> フォルス イベンツ、 オア フォルス タイムスタンプス。</a:t>
+            </a:r>
+          </a:p>
+          <a:p>
+            <a:r>
+              <a:rPr b="0" sz="1700"/>
+              <a:t>It adds doubt. It delays a confident answer.</a:t>
             </a:r>
           </a:p>
           <a:p>
@@ -4499,39 +4507,39 @@
             </a:r>
             <a:r>
               <a:rPr b="1" sz="1700"/>
-              <a:t>インクリーシズ</a:t>
-            </a:r>
-            <a:r>
-              <a:rPr b="0" sz="1700"/>
-              <a:t> アンサートゥンティ。 イット </a:t>
-            </a:r>
-            <a:r>
-              <a:rPr b="1" sz="1700"/>
-              <a:t>ディレイズ</a:t>
-            </a:r>
-            <a:r>
-              <a:rPr b="0" sz="1700"/>
-              <a:t> ア コンフィデント コンクルージョン。</a:t>
-            </a:r>
-          </a:p>
-          <a:p>
-            <a:r>
-              <a:rPr b="0" sz="1700"/>
-              <a:t>It does not claim forensic invisibility.</a:t>
-            </a:r>
-          </a:p>
-          <a:p>
-            <a:r>
-              <a:rPr b="0" sz="1700"/>
-              <a:t>  イット ダズ </a:t>
-            </a:r>
-            <a:r>
-              <a:rPr b="1" sz="1700"/>
-              <a:t>ナット</a:t>
-            </a:r>
-            <a:r>
-              <a:rPr b="0" sz="1700"/>
-              <a:t> クレイム フォレンシック インヴィジビリティ。</a:t>
+              <a:t>アッズ ダウト</a:t>
+            </a:r>
+            <a:r>
+              <a:rPr b="0" sz="1700"/>
+              <a:t>。 イット ディレイズ ア コンフィデント </a:t>
+            </a:r>
+            <a:r>
+              <a:rPr b="1" sz="1700"/>
+              <a:t>アンサー</a:t>
+            </a:r>
+            <a:r>
+              <a:rPr b="0" sz="1700"/>
+              <a:t>。</a:t>
+            </a:r>
+          </a:p>
+          <a:p>
+            <a:r>
+              <a:rPr b="0" sz="1700"/>
+              <a:t>It does not claim to be invisible to forensics.</a:t>
+            </a:r>
+          </a:p>
+          <a:p>
+            <a:r>
+              <a:rPr b="0" sz="1700"/>
+              <a:t>  イット ダズ ナット クレイム トゥ ビー </a:t>
+            </a:r>
+            <a:r>
+              <a:rPr b="1" sz="1700"/>
+              <a:t>インビジブル トゥ フォレンジックス</a:t>
+            </a:r>
+            <a:r>
+              <a:rPr b="0" sz="1700"/>
+              <a:t>。</a:t>
             </a:r>
           </a:p>
           <a:p>
@@ -4543,23 +4551,7 @@
           <a:p>
             <a:r>
               <a:rPr b="0" sz="1700"/>
-              <a:t>  ザット ライン イズ </a:t>
-            </a:r>
-            <a:r>
-              <a:rPr b="1" sz="1700"/>
-              <a:t>ディリバレット</a:t>
-            </a:r>
-            <a:r>
-              <a:rPr b="0" sz="1700"/>
-              <a:t>。 アンド イッツ イン ザ </a:t>
-            </a:r>
-            <a:r>
-              <a:rPr b="1" sz="1700"/>
-              <a:t>コウド</a:t>
-            </a:r>
-            <a:r>
-              <a:rPr b="0" sz="1700"/>
-              <a:t>。</a:t>
+              <a:t>  ザット ライン イズ ディリバレット。 アンド イッツ イン ザ コード。</a:t>
             </a:r>
           </a:p>
           <a:p>
@@ -4796,7 +4788,7 @@
             </a:r>
             <a:r>
               <a:rPr b="1" sz="1700"/>
-              <a:t>ネヴァー</a:t>
+              <a:t>ネバー</a:t>
             </a:r>
             <a:r>
               <a:rPr b="0" sz="1700"/>
@@ -4806,25 +4798,57 @@
           <a:p>
             <a:r>
               <a:rPr b="0" sz="1700"/>
-              <a:t>Perfect deniability. Forensic immunity.</a:t>
-            </a:r>
-          </a:p>
-          <a:p>
-            <a:r>
-              <a:rPr b="0" sz="1700"/>
-              <a:t>  パーフェクト ディナイアビリティ。 フォレンシック イミューニティ。</a:t>
-            </a:r>
-          </a:p>
-          <a:p>
-            <a:r>
-              <a:rPr b="0" sz="1700"/>
-              <a:t>Secure deletion on flash. Protection from a compromised host.</a:t>
-            </a:r>
-          </a:p>
-          <a:p>
-            <a:r>
-              <a:rPr b="0" sz="1700"/>
-              <a:t>  セキュア ディリーション オン フラッシュ。 プロテクション フロム ア コンプロマイズド ホウスト。</a:t>
+              <a:t>A cover that always holds. Safety from forensics.</a:t>
+            </a:r>
+          </a:p>
+          <a:p>
+            <a:r>
+              <a:rPr b="0" sz="1700"/>
+              <a:t>  ア </a:t>
+            </a:r>
+            <a:r>
+              <a:rPr b="1" sz="1700"/>
+              <a:t>カバー ザット オールウェイズ ホールズ</a:t>
+            </a:r>
+            <a:r>
+              <a:rPr b="0" sz="1700"/>
+              <a:t>。 </a:t>
+            </a:r>
+            <a:r>
+              <a:rPr b="1" sz="1700"/>
+              <a:t>セイフティ フロム フォレンジックス</a:t>
+            </a:r>
+            <a:r>
+              <a:rPr b="0" sz="1700"/>
+              <a:t>。</a:t>
+            </a:r>
+          </a:p>
+          <a:p>
+            <a:r>
+              <a:rPr b="0" sz="1700"/>
+              <a:t>Secure deletion on flash. Safety on a host already taken over.</a:t>
+            </a:r>
+          </a:p>
+          <a:p>
+            <a:r>
+              <a:rPr b="0" sz="1700"/>
+              <a:t>  セキュア ディリーション オン フラッシュ。 </a:t>
+            </a:r>
+            <a:r>
+              <a:rPr b="1" sz="1700"/>
+              <a:t>セイフティ</a:t>
+            </a:r>
+            <a:r>
+              <a:rPr b="0" sz="1700"/>
+              <a:t> オン ア ホスト オールレディ </a:t>
+            </a:r>
+            <a:r>
+              <a:rPr b="1" sz="1700"/>
+              <a:t>テイクン オーバー</a:t>
+            </a:r>
+            <a:r>
+              <a:rPr b="0" sz="1700"/>
+              <a:t>。</a:t>
             </a:r>
           </a:p>
           <a:p>
@@ -4836,11 +4860,11 @@
           <a:p>
             <a:r>
               <a:rPr b="0" sz="1700"/>
-              <a:t>  アンド ワン モア シング イット ネヴァー クレイムズ: ザット ユア カヴァー ストーリー イズ </a:t>
-            </a:r>
-            <a:r>
-              <a:rPr b="1" sz="1700"/>
-              <a:t>コンヴィンシング</a:t>
+              <a:t>  アンド ワン モア シング イット ネバー クレイムズ: ザット ユア カバー ストーリー イズ </a:t>
+            </a:r>
+            <a:r>
+              <a:rPr b="1" sz="1700"/>
+              <a:t>コンビンシング</a:t>
             </a:r>
             <a:r>
               <a:rPr b="0" sz="1700"/>
@@ -4880,7 +4904,7 @@
             </a:r>
             <a:r>
               <a:rPr b="1" sz="1700"/>
-              <a:t>ビリーヴ</a:t>
+              <a:t>ビリーブ</a:t>
             </a:r>
             <a:r>
               <a:rPr b="0" sz="1700"/>
@@ -5061,7 +5085,7 @@
             </a:r>
             <a:r>
               <a:rPr b="1" sz="1700"/>
-              <a:t>ライヴ デモ</a:t>
+              <a:t>ライブ デモ</a:t>
             </a:r>
             <a:r>
               <a:rPr b="0" sz="1700"/>
@@ -5164,7 +5188,7 @@
           <a:p>
             <a:r>
               <a:rPr b="0" sz="1700"/>
-              <a:t>[19:20 / ~8:30] LIVE DEMO  ★中心（12シーン・画面切替は片道1回）</a:t>
+              <a:t>[19:20 / ~8:30] LIVE DEMO  ★中心（12シーン・切替は片道1回）</a:t>
             </a:r>
           </a:p>
           <a:p>
@@ -5176,13 +5200,25 @@
           <a:p>
             <a:r>
               <a:rPr b="0" sz="1200"/>
-              <a:t>── 前置き（手を動かしながら）</a:t>
-            </a:r>
-          </a:p>
-          <a:p>
-            <a:r>
-              <a:rPr b="0" sz="1700"/>
-              <a:t>“This is the real system.</a:t>
+              <a:t>【読み方】 ▶SAY = 止めずに読み切る（手は動かさない）  ✋DO = 黙って操作  ▶THEN = 画面が変わってから言う</a:t>
+            </a:r>
+          </a:p>
+          <a:p>
+            <a:r>
+              <a:rPr b="0" sz="1700"/>
+              <a:t/>
+            </a:r>
+          </a:p>
+          <a:p>
+            <a:r>
+              <a:rPr b="0" sz="1200"/>
+              <a:t>── 前置き（まだ何も操作しない）</a:t>
+            </a:r>
+          </a:p>
+          <a:p>
+            <a:r>
+              <a:rPr b="0" sz="1700"/>
+              <a:t>“This is the real system. One file on disk.</a:t>
             </a:r>
           </a:p>
           <a:p>
@@ -5196,13 +5232,21 @@
             </a:r>
             <a:r>
               <a:rPr b="0" sz="1700"/>
-              <a:t>。</a:t>
-            </a:r>
-          </a:p>
-          <a:p>
-            <a:r>
-              <a:rPr b="0" sz="1700"/>
-              <a:t>One file on disk.</a:t>
+              <a:t>。 </a:t>
+            </a:r>
+            <a:r>
+              <a:rPr b="1" sz="1700"/>
+              <a:t>ワン ファイル</a:t>
+            </a:r>
+            <a:r>
+              <a:rPr b="0" sz="1700"/>
+              <a:t> オン ディスク。</a:t>
+            </a:r>
+          </a:p>
+          <a:p>
+            <a:r>
+              <a:rPr b="0" sz="1700"/>
+              <a:t>Two objects, two passwords, two files inside it.</a:t>
             </a:r>
           </a:p>
           <a:p>
@@ -5212,27 +5256,7 @@
             </a:r>
             <a:r>
               <a:rPr b="1" sz="1700"/>
-              <a:t>ワン ファイル</a:t>
-            </a:r>
-            <a:r>
-              <a:rPr b="0" sz="1700"/>
-              <a:t> オン ディスク。</a:t>
-            </a:r>
-          </a:p>
-          <a:p>
-            <a:r>
-              <a:rPr b="0" sz="1700"/>
-              <a:t>Two objects, two passwords, two files inside it.</a:t>
-            </a:r>
-          </a:p>
-          <a:p>
-            <a:r>
-              <a:rPr b="0" sz="1700"/>
-              <a:t>  </a:t>
-            </a:r>
-            <a:r>
-              <a:rPr b="1" sz="1700"/>
-              <a:t>トゥー オブジェクツ</a:t>
+              <a:t>ツー オブジェクツ</a:t>
             </a:r>
             <a:r>
               <a:rPr b="0" sz="1700"/>
@@ -5240,7 +5264,7 @@
             </a:r>
             <a:r>
               <a:rPr b="1" sz="1700"/>
-              <a:t>トゥー パスワーズ</a:t>
+              <a:t>ツー パスワーズ</a:t>
             </a:r>
             <a:r>
               <a:rPr b="0" sz="1700"/>
@@ -5248,7 +5272,7 @@
             </a:r>
             <a:r>
               <a:rPr b="1" sz="1700"/>
-              <a:t>トゥー ファイルズ</a:t>
+              <a:t>ツー ファイルズ</a:t>
             </a:r>
             <a:r>
               <a:rPr b="0" sz="1700"/>
@@ -5272,11 +5296,11 @@
             </a:r>
             <a:r>
               <a:rPr b="0" sz="1700"/>
-              <a:t> ワン、 インステッド オヴ </a:t>
-            </a:r>
-            <a:r>
-              <a:rPr b="1" sz="1700"/>
-              <a:t>オウプニング</a:t>
+              <a:t> ワン、 インステッド オブ </a:t>
+            </a:r>
+            <a:r>
+              <a:rPr b="1" sz="1700"/>
+              <a:t>オープニング</a:t>
             </a:r>
             <a:r>
               <a:rPr b="0" sz="1700"/>
@@ -5298,133 +5322,139 @@
           <a:p>
             <a:r>
               <a:rPr b="0" sz="1200"/>
-              <a:t>DO: Simple Operator 画面を出したまま提示する。</a:t>
+              <a:t>▶ SAY — 止めずに読み切る</a:t>
+            </a:r>
+          </a:p>
+          <a:p>
+            <a:r>
+              <a:rPr b="0" sz="1700"/>
+              <a:t>This is the real console.</a:t>
+            </a:r>
+          </a:p>
+          <a:p>
+            <a:r>
+              <a:rPr b="0" sz="1700"/>
+              <a:t>  ディス イズ ザ </a:t>
+            </a:r>
+            <a:r>
+              <a:rPr b="1" sz="1700"/>
+              <a:t>リアル</a:t>
+            </a:r>
+            <a:r>
+              <a:rPr b="0" sz="1700"/>
+              <a:t> コンソール。</a:t>
+            </a:r>
+          </a:p>
+          <a:p>
+            <a:r>
+              <a:rPr b="0" sz="1700"/>
+              <a:t>Local Disclosure Control.</a:t>
+            </a:r>
+          </a:p>
+          <a:p>
+            <a:r>
+              <a:rPr b="0" sz="1700"/>
+              <a:t>  </a:t>
+            </a:r>
+            <a:r>
+              <a:rPr b="1" sz="1700"/>
+              <a:t>ローカル ディスクロージャー コントロール</a:t>
+            </a:r>
+            <a:r>
+              <a:rPr b="0" sz="1700"/>
+              <a:t>。</a:t>
+            </a:r>
+          </a:p>
+          <a:p>
+            <a:r>
+              <a:rPr b="0" sz="1700"/>
+              <a:t>The home screen is small on purpose.</a:t>
+            </a:r>
+          </a:p>
+          <a:p>
+            <a:r>
+              <a:rPr b="0" sz="1700"/>
+              <a:t>  ザ ホーム スクリーン イズ </a:t>
+            </a:r>
+            <a:r>
+              <a:rPr b="1" sz="1700"/>
+              <a:t>スモール オン パーパス</a:t>
+            </a:r>
+            <a:r>
+              <a:rPr b="0" sz="1700"/>
+              <a:t>。</a:t>
+            </a:r>
+          </a:p>
+          <a:p>
+            <a:r>
+              <a:rPr b="0" sz="1700"/>
+              <a:t>Open. New. Guided. Expert.</a:t>
+            </a:r>
+          </a:p>
+          <a:p>
+            <a:r>
+              <a:rPr b="0" sz="1700"/>
+              <a:t>  オープン。 ニュー。 ガイデッド。 エクスパート。</a:t>
+            </a:r>
+          </a:p>
+          <a:p>
+            <a:r>
+              <a:rPr b="0" sz="1700"/>
+              <a:t>Under pressure, you do not want a wall of options.</a:t>
+            </a:r>
+          </a:p>
+          <a:p>
+            <a:r>
+              <a:rPr b="0" sz="1700"/>
+              <a:t>  アンダー </a:t>
+            </a:r>
+            <a:r>
+              <a:rPr b="1" sz="1700"/>
+              <a:t>プレッシャー</a:t>
+            </a:r>
+            <a:r>
+              <a:rPr b="0" sz="1700"/>
+              <a:t>、 ユー ドント ウォント ア </a:t>
+            </a:r>
+            <a:r>
+              <a:rPr b="1" sz="1700"/>
+              <a:t>ウォール オブ オプションズ</a:t>
+            </a:r>
+            <a:r>
+              <a:rPr b="0" sz="1700"/>
+              <a:t>。</a:t>
+            </a:r>
+          </a:p>
+          <a:p>
+            <a:r>
+              <a:rPr b="0" sz="1700"/>
+              <a:t>The full control set is one key away.</a:t>
+            </a:r>
+          </a:p>
+          <a:p>
+            <a:r>
+              <a:rPr b="0" sz="1700"/>
+              <a:t>  ザ フル コントロール セット イズ </a:t>
+            </a:r>
+            <a:r>
+              <a:rPr b="1" sz="1700"/>
+              <a:t>ワン キー</a:t>
+            </a:r>
+            <a:r>
+              <a:rPr b="0" sz="1700"/>
+              <a:t> アウェイ。</a:t>
             </a:r>
           </a:p>
           <a:p>
             <a:r>
               <a:rPr b="0" sz="1200"/>
-              <a:t>DO: 下部のバー（open / new / guided / expert）を指す。</a:t>
-            </a:r>
-          </a:p>
-          <a:p>
-            <a:r>
-              <a:rPr b="0" sz="1700"/>
-              <a:t>This is the real console.</a:t>
-            </a:r>
-          </a:p>
-          <a:p>
-            <a:r>
-              <a:rPr b="0" sz="1700"/>
-              <a:t>  ディス イズ ザ </a:t>
-            </a:r>
-            <a:r>
-              <a:rPr b="1" sz="1700"/>
-              <a:t>リアル</a:t>
-            </a:r>
-            <a:r>
-              <a:rPr b="0" sz="1700"/>
-              <a:t> コンソール。</a:t>
-            </a:r>
-          </a:p>
-          <a:p>
-            <a:r>
-              <a:rPr b="0" sz="1700"/>
-              <a:t>Local Disclosure Control.</a:t>
-            </a:r>
-          </a:p>
-          <a:p>
-            <a:r>
-              <a:rPr b="0" sz="1700"/>
-              <a:t>  </a:t>
-            </a:r>
-            <a:r>
-              <a:rPr b="1" sz="1700"/>
-              <a:t>ローカル ディスクロージャー コントロール</a:t>
-            </a:r>
-            <a:r>
-              <a:rPr b="0" sz="1700"/>
-              <a:t>。</a:t>
-            </a:r>
-          </a:p>
-          <a:p>
-            <a:r>
-              <a:rPr b="0" sz="1700"/>
-              <a:t>The home screen is deliberately small.</a:t>
-            </a:r>
-          </a:p>
-          <a:p>
-            <a:r>
-              <a:rPr b="0" sz="1700"/>
-              <a:t>  ザ ホーム スクリーン イズ ディリバレットリー </a:t>
-            </a:r>
-            <a:r>
-              <a:rPr b="1" sz="1700"/>
-              <a:t>スモール</a:t>
-            </a:r>
-            <a:r>
-              <a:rPr b="0" sz="1700"/>
-              <a:t>。</a:t>
-            </a:r>
-          </a:p>
-          <a:p>
-            <a:r>
-              <a:rPr b="0" sz="1700"/>
-              <a:t>Open. New. Guided. Expert.</a:t>
-            </a:r>
-          </a:p>
-          <a:p>
-            <a:r>
-              <a:rPr b="0" sz="1700"/>
-              <a:t>  オウプン。 ニュー。 ガイデッド。 エクスパート。</a:t>
-            </a:r>
-          </a:p>
-          <a:p>
-            <a:r>
-              <a:rPr b="0" sz="1700"/>
-              <a:t>Under pressure, you do not want a wall of options.</a:t>
-            </a:r>
-          </a:p>
-          <a:p>
-            <a:r>
-              <a:rPr b="0" sz="1700"/>
-              <a:t>  アンダー </a:t>
-            </a:r>
-            <a:r>
-              <a:rPr b="1" sz="1700"/>
-              <a:t>プレッシャー</a:t>
-            </a:r>
-            <a:r>
-              <a:rPr b="0" sz="1700"/>
-              <a:t>、 ユー ドウント ウォント ア </a:t>
-            </a:r>
-            <a:r>
-              <a:rPr b="1" sz="1700"/>
-              <a:t>ウォール オヴ オプションズ</a:t>
-            </a:r>
-            <a:r>
-              <a:rPr b="0" sz="1700"/>
-              <a:t>。</a:t>
-            </a:r>
-          </a:p>
-          <a:p>
-            <a:r>
-              <a:rPr b="0" sz="1700"/>
-              <a:t>The full control set is one key away.</a:t>
-            </a:r>
-          </a:p>
-          <a:p>
-            <a:r>
-              <a:rPr b="0" sz="1700"/>
-              <a:t>  ザ フル コントロール セット イズ </a:t>
-            </a:r>
-            <a:r>
-              <a:rPr b="1" sz="1700"/>
-              <a:t>ワン キー</a:t>
-            </a:r>
-            <a:r>
-              <a:rPr b="0" sz="1700"/>
-              <a:t> アウェイ。</a:t>
+              <a:t>✋ DO — 黙って操作</a:t>
+            </a:r>
+          </a:p>
+          <a:p>
+            <a:r>
+              <a:rPr b="0" sz="1200"/>
+              <a:t>DO: Simple Operator 画面を出したまま提示する。下部のバーを指す。</a:t>
             </a:r>
           </a:p>
           <a:p>
@@ -5442,53 +5472,201 @@
           <a:p>
             <a:r>
               <a:rPr b="0" sz="1200"/>
-              <a:t>DO: TUI: n (New) → vessel-path に demo.vessel → vessel-size を 64M に変更（既定の 512M のまま作らない）</a:t>
+              <a:t>▶ SAY — 止めずに読み切る</a:t>
+            </a:r>
+          </a:p>
+          <a:p>
+            <a:r>
+              <a:rPr b="0" sz="1700"/>
+              <a:t>First, I make a vessel.</a:t>
+            </a:r>
+          </a:p>
+          <a:p>
+            <a:r>
+              <a:rPr b="0" sz="1700"/>
+              <a:t>  ファースト、 アイ メイク ア </a:t>
+            </a:r>
+            <a:r>
+              <a:rPr b="1" sz="1700"/>
+              <a:t>ベッセル</a:t>
+            </a:r>
+            <a:r>
+              <a:rPr b="0" sz="1700"/>
+              <a:t>。</a:t>
+            </a:r>
+          </a:p>
+          <a:p>
+            <a:r>
+              <a:rPr b="0" sz="1700"/>
+              <a:t>A deniable container. One file. Sixty-four megabytes.</a:t>
+            </a:r>
+          </a:p>
+          <a:p>
+            <a:r>
+              <a:rPr b="0" sz="1700"/>
+              <a:t>  ア ディナイアブル コンテナ。 </a:t>
+            </a:r>
+            <a:r>
+              <a:rPr b="1" sz="1700"/>
+              <a:t>ワン ファイル</a:t>
+            </a:r>
+            <a:r>
+              <a:rPr b="0" sz="1700"/>
+              <a:t>。 </a:t>
+            </a:r>
+            <a:r>
+              <a:rPr b="1" sz="1700"/>
+              <a:t>シクスティフォー</a:t>
+            </a:r>
+            <a:r>
+              <a:rPr b="0" sz="1700"/>
+              <a:t> メガバイツ。</a:t>
+            </a:r>
+          </a:p>
+          <a:p>
+            <a:r>
+              <a:rPr b="0" sz="1700"/>
+              <a:t>Then I will show you what it looks like on disk.</a:t>
+            </a:r>
+          </a:p>
+          <a:p>
+            <a:r>
+              <a:rPr b="0" sz="1700"/>
+              <a:t>  ゼン アイル ショウ ユー ワット イット </a:t>
+            </a:r>
+            <a:r>
+              <a:rPr b="1" sz="1700"/>
+              <a:t>ルックス ライク</a:t>
+            </a:r>
+            <a:r>
+              <a:rPr b="0" sz="1700"/>
+              <a:t> オン ディスク。</a:t>
             </a:r>
           </a:p>
           <a:p>
             <a:r>
               <a:rPr b="0" sz="1200"/>
-              <a:t>DO: → vessel-label（任意）→ create-btn</a:t>
+              <a:t>✋ DO — 黙って操作</a:t>
             </a:r>
           </a:p>
           <a:p>
             <a:r>
               <a:rPr b="0" sz="1200"/>
-              <a:t>DO: シェルに切り替えて、実物を見せる:</a:t>
+              <a:t>DO: n (New) → vessel-path に demo.vessel</a:t>
             </a:r>
           </a:p>
           <a:p>
             <a:r>
               <a:rPr b="0" sz="1200"/>
-              <a:t>DO: ls -lh demo.vessel</a:t>
+              <a:t>DO: → vessel-size を 64M に変更（既定の 512M のまま作らない）→ create-btn</a:t>
             </a:r>
           </a:p>
           <a:p>
             <a:r>
               <a:rPr b="0" sz="1200"/>
-              <a:t>DO: file demo.vessel</a:t>
+              <a:t>DO: 続けてシェルで:  ls -lh demo.vessel  /  file demo.vessel  /  od -A x -t x1z -N 96 demo.vessel</a:t>
             </a:r>
           </a:p>
           <a:p>
             <a:r>
               <a:rPr b="0" sz="1200"/>
-              <a:t>DO: od -A x -t x1z -N 96 demo.vessel</a:t>
-            </a:r>
-          </a:p>
-          <a:p>
-            <a:r>
-              <a:rPr b="0" sz="1700"/>
-              <a:t>First, I make a vessel.</a:t>
-            </a:r>
-          </a:p>
-          <a:p>
-            <a:r>
-              <a:rPr b="0" sz="1700"/>
-              <a:t>  ファースト、 アイ メイク ア </a:t>
-            </a:r>
-            <a:r>
-              <a:rPr b="1" sz="1700"/>
-              <a:t>ヴェッセル</a:t>
+              <a:t>▶ THEN — 画面が変わってから</a:t>
+            </a:r>
+          </a:p>
+          <a:p>
+            <a:r>
+              <a:rPr b="0" sz="1700"/>
+              <a:t>One file. That is all there is.</a:t>
+            </a:r>
+          </a:p>
+          <a:p>
+            <a:r>
+              <a:rPr b="0" sz="1700"/>
+              <a:t>  </a:t>
+            </a:r>
+            <a:r>
+              <a:rPr b="1" sz="1700"/>
+              <a:t>ワン ファイル</a:t>
+            </a:r>
+            <a:r>
+              <a:rPr b="0" sz="1700"/>
+              <a:t>。 ザッツ </a:t>
+            </a:r>
+            <a:r>
+              <a:rPr b="1" sz="1700"/>
+              <a:t>オール</a:t>
+            </a:r>
+            <a:r>
+              <a:rPr b="0" sz="1700"/>
+              <a:t> ゼア イズ。</a:t>
+            </a:r>
+          </a:p>
+          <a:p>
+            <a:r>
+              <a:rPr b="0" sz="1700"/>
+              <a:t>It says 'data'. It has nothing to say, because there is nothing to read.</a:t>
+            </a:r>
+          </a:p>
+          <a:p>
+            <a:r>
+              <a:rPr b="0" sz="1700"/>
+              <a:t>  イット セズ </a:t>
+            </a:r>
+            <a:r>
+              <a:rPr b="1" sz="1700"/>
+              <a:t>データ</a:t>
+            </a:r>
+            <a:r>
+              <a:rPr b="0" sz="1700"/>
+              <a:t>。 イット ハズ </a:t>
+            </a:r>
+            <a:r>
+              <a:rPr b="1" sz="1700"/>
+              <a:t>ナッシング</a:t>
+            </a:r>
+            <a:r>
+              <a:rPr b="0" sz="1700"/>
+              <a:t> トゥ セイ、 ビコーズ ゼアズ </a:t>
+            </a:r>
+            <a:r>
+              <a:rPr b="1" sz="1700"/>
+              <a:t>ナッシング</a:t>
+            </a:r>
+            <a:r>
+              <a:rPr b="0" sz="1700"/>
+              <a:t> トゥ リード。</a:t>
+            </a:r>
+          </a:p>
+          <a:p>
+            <a:r>
+              <a:rPr b="0" sz="1700"/>
+              <a:t>No header. No magic bytes. On disk, this is random.</a:t>
+            </a:r>
+          </a:p>
+          <a:p>
+            <a:r>
+              <a:rPr b="0" sz="1700"/>
+              <a:t>  ノー </a:t>
+            </a:r>
+            <a:r>
+              <a:rPr b="1" sz="1700"/>
+              <a:t>ヘッダー</a:t>
+            </a:r>
+            <a:r>
+              <a:rPr b="0" sz="1700"/>
+              <a:t>。 ノー </a:t>
+            </a:r>
+            <a:r>
+              <a:rPr b="1" sz="1700"/>
+              <a:t>マジック バイツ</a:t>
+            </a:r>
+            <a:r>
+              <a:rPr b="0" sz="1700"/>
+              <a:t>。 オン ディスク、 ディス イズ </a:t>
+            </a:r>
+            <a:r>
+              <a:rPr b="1" sz="1700"/>
+              <a:t>ランダム</a:t>
             </a:r>
             <a:r>
               <a:rPr b="0" sz="1700"/>
@@ -5498,17 +5676,25 @@
           <a:p>
             <a:r>
               <a:rPr b="0" sz="1700"/>
-              <a:t>A deniable container. One file.</a:t>
-            </a:r>
-          </a:p>
-          <a:p>
-            <a:r>
-              <a:rPr b="0" sz="1700"/>
-              <a:t>  ア ディナイアブル コンテイナー。 </a:t>
-            </a:r>
-            <a:r>
-              <a:rPr b="1" sz="1700"/>
-              <a:t>ワン ファイル</a:t>
+              <a:t>Remember the name. Demo dot vessel.</a:t>
+            </a:r>
+          </a:p>
+          <a:p>
+            <a:r>
+              <a:rPr b="0" sz="1700"/>
+              <a:t>  リメンバー ザ </a:t>
+            </a:r>
+            <a:r>
+              <a:rPr b="1" sz="1700"/>
+              <a:t>ネイム</a:t>
+            </a:r>
+            <a:r>
+              <a:rPr b="0" sz="1700"/>
+              <a:t>。 </a:t>
+            </a:r>
+            <a:r>
+              <a:rPr b="1" sz="1700"/>
+              <a:t>デモ ドット ベッセル</a:t>
             </a:r>
             <a:r>
               <a:rPr b="0" sz="1700"/>
@@ -5518,213 +5704,13 @@
           <a:p>
             <a:r>
               <a:rPr b="0" sz="1700"/>
-              <a:t>Sixty-four megabytes.</a:t>
-            </a:r>
-          </a:p>
-          <a:p>
-            <a:r>
-              <a:rPr b="0" sz="1700"/>
-              <a:t>  </a:t>
-            </a:r>
-            <a:r>
-              <a:rPr b="1" sz="1700"/>
-              <a:t>シクスティフォー</a:t>
-            </a:r>
-            <a:r>
-              <a:rPr b="0" sz="1700"/>
-              <a:t> メガバイツ。</a:t>
-            </a:r>
-          </a:p>
-          <a:p>
-            <a:r>
-              <a:rPr b="0" sz="1700"/>
-              <a:t>Let me show you what that looks like on disk.</a:t>
-            </a:r>
-          </a:p>
-          <a:p>
-            <a:r>
-              <a:rPr b="0" sz="1700"/>
-              <a:t>  レット ミー ショウ ユー ワット ザット </a:t>
-            </a:r>
-            <a:r>
-              <a:rPr b="1" sz="1700"/>
-              <a:t>ルックス ライク</a:t>
-            </a:r>
-            <a:r>
-              <a:rPr b="0" sz="1700"/>
-              <a:t> オン ディスク。</a:t>
-            </a:r>
-          </a:p>
-          <a:p>
-            <a:r>
-              <a:rPr b="0" sz="1700"/>
-              <a:t>ls — one file. That is all there is.</a:t>
-            </a:r>
-          </a:p>
-          <a:p>
-            <a:r>
-              <a:rPr b="0" sz="1700"/>
-              <a:t>  エルエス — </a:t>
-            </a:r>
-            <a:r>
-              <a:rPr b="1" sz="1700"/>
-              <a:t>ワン ファイル</a:t>
-            </a:r>
-            <a:r>
-              <a:rPr b="0" sz="1700"/>
-              <a:t>。 ザッツ </a:t>
-            </a:r>
-            <a:r>
-              <a:rPr b="1" sz="1700"/>
-              <a:t>オール</a:t>
-            </a:r>
-            <a:r>
-              <a:rPr b="0" sz="1700"/>
-              <a:t> ゼア イズ。</a:t>
-            </a:r>
-          </a:p>
-          <a:p>
-            <a:r>
-              <a:rPr b="0" sz="1700"/>
-              <a:t>file — it says 'data'.</a:t>
-            </a:r>
-          </a:p>
-          <a:p>
-            <a:r>
-              <a:rPr b="0" sz="1700"/>
-              <a:t>  ファイル — イット セズ </a:t>
-            </a:r>
-            <a:r>
-              <a:rPr b="1" sz="1700"/>
-              <a:t>データ</a:t>
-            </a:r>
-            <a:r>
-              <a:rPr b="0" sz="1700"/>
-              <a:t>。</a:t>
-            </a:r>
-          </a:p>
-          <a:p>
-            <a:r>
-              <a:rPr b="0" sz="1700"/>
-              <a:t>It has nothing to say, because there is nothing to read.</a:t>
-            </a:r>
-          </a:p>
-          <a:p>
-            <a:r>
-              <a:rPr b="0" sz="1700"/>
-              <a:t>  イット ハズ </a:t>
-            </a:r>
-            <a:r>
-              <a:rPr b="1" sz="1700"/>
-              <a:t>ナッシング</a:t>
-            </a:r>
-            <a:r>
-              <a:rPr b="0" sz="1700"/>
-              <a:t> トゥ セイ、 ビコーズ ゼアズ </a:t>
-            </a:r>
-            <a:r>
-              <a:rPr b="1" sz="1700"/>
-              <a:t>ナッシング</a:t>
-            </a:r>
-            <a:r>
-              <a:rPr b="0" sz="1700"/>
-              <a:t> トゥ リード。</a:t>
-            </a:r>
-          </a:p>
-          <a:p>
-            <a:r>
-              <a:rPr b="0" sz="1700"/>
-              <a:t>No header. No magic bytes. No format at all.</a:t>
-            </a:r>
-          </a:p>
-          <a:p>
-            <a:r>
-              <a:rPr b="0" sz="1700"/>
-              <a:t>  ノウ </a:t>
-            </a:r>
-            <a:r>
-              <a:rPr b="1" sz="1700"/>
-              <a:t>ヘッダー</a:t>
-            </a:r>
-            <a:r>
-              <a:rPr b="0" sz="1700"/>
-              <a:t>。 ノウ </a:t>
-            </a:r>
-            <a:r>
-              <a:rPr b="1" sz="1700"/>
-              <a:t>マジック バイツ</a:t>
-            </a:r>
-            <a:r>
-              <a:rPr b="0" sz="1700"/>
-              <a:t>。 ノウ フォーマット </a:t>
-            </a:r>
-            <a:r>
-              <a:rPr b="1" sz="1700"/>
-              <a:t>アット オール</a:t>
-            </a:r>
-            <a:r>
-              <a:rPr b="0" sz="1700"/>
-              <a:t>。</a:t>
-            </a:r>
-          </a:p>
-          <a:p>
-            <a:r>
-              <a:rPr b="0" sz="1700"/>
-              <a:t>On disk, this is random.</a:t>
-            </a:r>
-          </a:p>
-          <a:p>
-            <a:r>
-              <a:rPr b="0" sz="1700"/>
-              <a:t>  オン ディスク、 ディス イズ </a:t>
-            </a:r>
-            <a:r>
-              <a:rPr b="1" sz="1700"/>
-              <a:t>ランダム</a:t>
-            </a:r>
-            <a:r>
-              <a:rPr b="0" sz="1700"/>
-              <a:t>。</a:t>
-            </a:r>
-          </a:p>
-          <a:p>
-            <a:r>
-              <a:rPr b="0" sz="1700"/>
-              <a:t>Remember the name. Demo dot vessel.</a:t>
-            </a:r>
-          </a:p>
-          <a:p>
-            <a:r>
-              <a:rPr b="0" sz="1700"/>
-              <a:t>  リメンバー ザ </a:t>
-            </a:r>
-            <a:r>
-              <a:rPr b="1" sz="1700"/>
-              <a:t>ネイム</a:t>
-            </a:r>
-            <a:r>
-              <a:rPr b="0" sz="1700"/>
-              <a:t>。 </a:t>
-            </a:r>
-            <a:r>
-              <a:rPr b="1" sz="1700"/>
-              <a:t>デモ ドット ヴェッセル</a:t>
-            </a:r>
-            <a:r>
-              <a:rPr b="0" sz="1700"/>
-              <a:t>。</a:t>
-            </a:r>
-          </a:p>
-          <a:p>
-            <a:r>
-              <a:rPr b="0" sz="1700"/>
               <a:t>Everything from here comes out of this one file.</a:t>
             </a:r>
           </a:p>
           <a:p>
             <a:r>
               <a:rPr b="0" sz="1700"/>
-              <a:t>  エヴリシング フロム ヒア カムズ アウト オヴ </a:t>
+              <a:t>  エブリシング フロム ヒア カムズ アウト オブ </a:t>
             </a:r>
             <a:r>
               <a:rPr b="1" sz="1700"/>
@@ -5750,6 +5736,12 @@
           <a:p>
             <a:r>
               <a:rPr b="0" sz="1200"/>
+              <a:t>✋ DO — 黙って操作</a:t>
+            </a:r>
+          </a:p>
+          <a:p>
+            <a:r>
+              <a:rPr b="0" sz="1200"/>
               <a:t>DO: スペースを「スライド／ターミナル／ブラウザ」の3つに固定し、Ctrl+←→ だけで移動する。</a:t>
             </a:r>
           </a:p>
@@ -5774,29 +5766,89 @@
           <a:p>
             <a:r>
               <a:rPr b="0" sz="1200"/>
-              <a:t>DO: ブラウザで /unlock を開く（事前にブックマークしておく）</a:t>
+              <a:t>▶ SAY — 止めずに読み切る</a:t>
+            </a:r>
+          </a:p>
+          <a:p>
+            <a:r>
+              <a:rPr b="0" sz="1700"/>
+              <a:t>The device also serves a local web interface.</a:t>
+            </a:r>
+          </a:p>
+          <a:p>
+            <a:r>
+              <a:rPr b="0" sz="1700"/>
+              <a:t>  ザ デバイス オールソー サーブズ ア </a:t>
+            </a:r>
+            <a:r>
+              <a:rPr b="1" sz="1700"/>
+              <a:t>ローカル ウェブ インターフェイス</a:t>
+            </a:r>
+            <a:r>
+              <a:rPr b="0" sz="1700"/>
+              <a:t>。</a:t>
+            </a:r>
+          </a:p>
+          <a:p>
+            <a:r>
+              <a:rPr b="0" sz="1700"/>
+              <a:t>I am logging in now.</a:t>
+            </a:r>
+          </a:p>
+          <a:p>
+            <a:r>
+              <a:rPr b="0" sz="1700"/>
+              <a:t>  アイム </a:t>
+            </a:r>
+            <a:r>
+              <a:rPr b="1" sz="1700"/>
+              <a:t>ロギング イン</a:t>
+            </a:r>
+            <a:r>
+              <a:rPr b="0" sz="1700"/>
+              <a:t> ナウ。</a:t>
             </a:r>
           </a:p>
           <a:p>
             <a:r>
               <a:rPr b="0" sz="1200"/>
-              <a:t>DO: store トークンを入力してログイン</a:t>
-            </a:r>
-          </a:p>
-          <a:p>
-            <a:r>
-              <a:rPr b="0" sz="1700"/>
-              <a:t>The device also serves a local web interface.</a:t>
-            </a:r>
-          </a:p>
-          <a:p>
-            <a:r>
-              <a:rPr b="0" sz="1700"/>
-              <a:t>  ザ デバイス オールソウ サーヴズ ア </a:t>
-            </a:r>
-            <a:r>
-              <a:rPr b="1" sz="1700"/>
-              <a:t>ローカル ウェブ インターフェイス</a:t>
+              <a:t>✋ DO — 黙って操作</a:t>
+            </a:r>
+          </a:p>
+          <a:p>
+            <a:r>
+              <a:rPr b="0" sz="1200"/>
+              <a:t>DO: ブックマークした /unlock で store トークンを入力してログイン</a:t>
+            </a:r>
+          </a:p>
+          <a:p>
+            <a:r>
+              <a:rPr b="0" sz="1200"/>
+              <a:t>▶ THEN — 画面が変わってから</a:t>
+            </a:r>
+          </a:p>
+          <a:p>
+            <a:r>
+              <a:rPr b="0" sz="1700"/>
+              <a:t>One word about these tokens, because it matters.</a:t>
+            </a:r>
+          </a:p>
+          <a:p>
+            <a:r>
+              <a:rPr b="0" sz="1700"/>
+              <a:t>  ワン ワード アバウト ジーズ </a:t>
+            </a:r>
+            <a:r>
+              <a:rPr b="1" sz="1700"/>
+              <a:t>トークンズ</a:t>
+            </a:r>
+            <a:r>
+              <a:rPr b="0" sz="1700"/>
+              <a:t>、 ビコーズ イット </a:t>
+            </a:r>
+            <a:r>
+              <a:rPr b="1" sz="1700"/>
+              <a:t>マターズ</a:t>
             </a:r>
             <a:r>
               <a:rPr b="0" sz="1700"/>
@@ -5806,45 +5858,89 @@
           <a:p>
             <a:r>
               <a:rPr b="0" sz="1700"/>
-              <a:t>I am logging in now.</a:t>
-            </a:r>
-          </a:p>
-          <a:p>
-            <a:r>
-              <a:rPr b="0" sz="1700"/>
-              <a:t>  アイム </a:t>
-            </a:r>
-            <a:r>
-              <a:rPr b="1" sz="1700"/>
-              <a:t>ロギング イン</a:t>
-            </a:r>
-            <a:r>
-              <a:rPr b="0" sz="1700"/>
-              <a:t> ナウ。</a:t>
-            </a:r>
-          </a:p>
-          <a:p>
-            <a:r>
-              <a:rPr b="0" sz="1700"/>
-              <a:t>One word about these tokens, because it matters.</a:t>
-            </a:r>
-          </a:p>
-          <a:p>
-            <a:r>
-              <a:rPr b="0" sz="1700"/>
-              <a:t>  ワン ワード アバウト ジーズ </a:t>
-            </a:r>
-            <a:r>
-              <a:rPr b="1" sz="1700"/>
-              <a:t>トウクンズ</a:t>
-            </a:r>
-            <a:r>
-              <a:rPr b="0" sz="1700"/>
-              <a:t>、 ビコーズ イット </a:t>
-            </a:r>
-            <a:r>
-              <a:rPr b="1" sz="1700"/>
-              <a:t>マターズ</a:t>
+              <a:t>In real use, you issue two of them.</a:t>
+            </a:r>
+          </a:p>
+          <a:p>
+            <a:r>
+              <a:rPr b="0" sz="1700"/>
+              <a:t>  イン リアル ユース、 ユー イシュー </a:t>
+            </a:r>
+            <a:r>
+              <a:rPr b="1" sz="1700"/>
+              <a:t>ツー</a:t>
+            </a:r>
+            <a:r>
+              <a:rPr b="0" sz="1700"/>
+              <a:t> オブ ゼム。</a:t>
+            </a:r>
+          </a:p>
+          <a:p>
+            <a:r>
+              <a:rPr b="0" sz="1700"/>
+              <a:t>A full-control token — used once, somewhere safe, to set things up.</a:t>
+            </a:r>
+          </a:p>
+          <a:p>
+            <a:r>
+              <a:rPr b="0" sz="1700"/>
+              <a:t>  ア </a:t>
+            </a:r>
+            <a:r>
+              <a:rPr b="1" sz="1700"/>
+              <a:t>フルコントロール</a:t>
+            </a:r>
+            <a:r>
+              <a:rPr b="0" sz="1700"/>
+              <a:t> トークン — ユーズド </a:t>
+            </a:r>
+            <a:r>
+              <a:rPr b="1" sz="1700"/>
+              <a:t>ワンス</a:t>
+            </a:r>
+            <a:r>
+              <a:rPr b="0" sz="1700"/>
+              <a:t>、 サムウェア </a:t>
+            </a:r>
+            <a:r>
+              <a:rPr b="1" sz="1700"/>
+              <a:t>セイフ</a:t>
+            </a:r>
+            <a:r>
+              <a:rPr b="0" sz="1700"/>
+              <a:t>、 トゥ セット シングス アップ。</a:t>
+            </a:r>
+          </a:p>
+          <a:p>
+            <a:r>
+              <a:rPr b="0" sz="1700"/>
+              <a:t>And a recovery token, that can decrypt and nothing else.</a:t>
+            </a:r>
+          </a:p>
+          <a:p>
+            <a:r>
+              <a:rPr b="0" sz="1700"/>
+              <a:t>  アンド ア </a:t>
+            </a:r>
+            <a:r>
+              <a:rPr b="1" sz="1700"/>
+              <a:t>リカバリー</a:t>
+            </a:r>
+            <a:r>
+              <a:rPr b="0" sz="1700"/>
+              <a:t> トークン、 ザット キャン </a:t>
+            </a:r>
+            <a:r>
+              <a:rPr b="1" sz="1700"/>
+              <a:t>ディクリプト</a:t>
+            </a:r>
+            <a:r>
+              <a:rPr b="0" sz="1700"/>
+              <a:t> アンド </a:t>
+            </a:r>
+            <a:r>
+              <a:rPr b="1" sz="1700"/>
+              <a:t>ナッシング エルス</a:t>
             </a:r>
             <a:r>
               <a:rPr b="0" sz="1700"/>
@@ -5854,89 +5950,25 @@
           <a:p>
             <a:r>
               <a:rPr b="0" sz="1700"/>
-              <a:t>In real use, you issue two of them.</a:t>
-            </a:r>
-          </a:p>
-          <a:p>
-            <a:r>
-              <a:rPr b="0" sz="1700"/>
-              <a:t>  イン リアル ユース、 ユー イシュー </a:t>
-            </a:r>
-            <a:r>
-              <a:rPr b="1" sz="1700"/>
-              <a:t>トゥー</a:t>
-            </a:r>
-            <a:r>
-              <a:rPr b="0" sz="1700"/>
-              <a:t> オヴ ゼム。</a:t>
-            </a:r>
-          </a:p>
-          <a:p>
-            <a:r>
-              <a:rPr b="0" sz="1700"/>
-              <a:t>A full-control token — used once, somewhere safe, to set things up.</a:t>
-            </a:r>
-          </a:p>
-          <a:p>
-            <a:r>
-              <a:rPr b="0" sz="1700"/>
-              <a:t>  ア </a:t>
-            </a:r>
-            <a:r>
-              <a:rPr b="1" sz="1700"/>
-              <a:t>フルコントロール</a:t>
-            </a:r>
-            <a:r>
-              <a:rPr b="0" sz="1700"/>
-              <a:t> トウクン — ユーズド </a:t>
-            </a:r>
-            <a:r>
-              <a:rPr b="1" sz="1700"/>
-              <a:t>ワンス</a:t>
-            </a:r>
-            <a:r>
-              <a:rPr b="0" sz="1700"/>
-              <a:t>、 サムウェア </a:t>
-            </a:r>
-            <a:r>
-              <a:rPr b="1" sz="1700"/>
-              <a:t>セイフ</a:t>
-            </a:r>
-            <a:r>
-              <a:rPr b="0" sz="1700"/>
-              <a:t>、 トゥ セット シングス アップ。</a:t>
-            </a:r>
-          </a:p>
-          <a:p>
-            <a:r>
-              <a:rPr b="0" sz="1700"/>
-              <a:t>And a recovery token, that can decrypt and nothing else.</a:t>
-            </a:r>
-          </a:p>
-          <a:p>
-            <a:r>
-              <a:rPr b="0" sz="1700"/>
-              <a:t>  アンド ア </a:t>
-            </a:r>
-            <a:r>
-              <a:rPr b="1" sz="1700"/>
-              <a:t>リカヴァリー</a:t>
-            </a:r>
-            <a:r>
-              <a:rPr b="0" sz="1700"/>
-              <a:t> トウクン、 ザット キャン </a:t>
-            </a:r>
-            <a:r>
-              <a:rPr b="1" sz="1700"/>
-              <a:t>ディクリプト</a:t>
-            </a:r>
-            <a:r>
-              <a:rPr b="0" sz="1700"/>
-              <a:t> アンド </a:t>
-            </a:r>
-            <a:r>
-              <a:rPr b="1" sz="1700"/>
-              <a:t>ナッシング エルス</a:t>
+              <a:t>That is the one you carry into a bad situation.</a:t>
+            </a:r>
+          </a:p>
+          <a:p>
+            <a:r>
+              <a:rPr b="0" sz="1700"/>
+              <a:t>  ザッツ ザ ワン ユー </a:t>
+            </a:r>
+            <a:r>
+              <a:rPr b="1" sz="1700"/>
+              <a:t>キャリー</a:t>
+            </a:r>
+            <a:r>
+              <a:rPr b="0" sz="1700"/>
+              <a:t> イントゥ ア </a:t>
+            </a:r>
+            <a:r>
+              <a:rPr b="1" sz="1700"/>
+              <a:t>バッド シチュエイション</a:t>
             </a:r>
             <a:r>
               <a:rPr b="0" sz="1700"/>
@@ -5946,25 +5978,25 @@
           <a:p>
             <a:r>
               <a:rPr b="0" sz="1700"/>
-              <a:t>That is the one you carry into a bad situation.</a:t>
-            </a:r>
-          </a:p>
-          <a:p>
-            <a:r>
-              <a:rPr b="0" sz="1700"/>
-              <a:t>  ザッツ ザ ワン ユー </a:t>
-            </a:r>
-            <a:r>
-              <a:rPr b="1" sz="1700"/>
-              <a:t>キャリー</a:t>
-            </a:r>
-            <a:r>
-              <a:rPr b="0" sz="1700"/>
-              <a:t> イントゥ ア </a:t>
-            </a:r>
-            <a:r>
-              <a:rPr b="1" sz="1700"/>
-              <a:t>バッド シチュエイション</a:t>
+              <a:t>It cannot reach setup, so it cannot give setup away.</a:t>
+            </a:r>
+          </a:p>
+          <a:p>
+            <a:r>
+              <a:rPr b="0" sz="1700"/>
+              <a:t>  イット キャナット </a:t>
+            </a:r>
+            <a:r>
+              <a:rPr b="1" sz="1700"/>
+              <a:t>リーチ</a:t>
+            </a:r>
+            <a:r>
+              <a:rPr b="0" sz="1700"/>
+              <a:t> セットアップ、 ソー イット キャナット </a:t>
+            </a:r>
+            <a:r>
+              <a:rPr b="1" sz="1700"/>
+              <a:t>ギブ イット アウェイ</a:t>
             </a:r>
             <a:r>
               <a:rPr b="0" sz="1700"/>
@@ -5974,34 +6006,6 @@
           <a:p>
             <a:r>
               <a:rPr b="0" sz="1700"/>
-              <a:t>It cannot reach setup, so it cannot give setup away.</a:t>
-            </a:r>
-          </a:p>
-          <a:p>
-            <a:r>
-              <a:rPr b="0" sz="1700"/>
-              <a:t>  イット キャナット </a:t>
-            </a:r>
-            <a:r>
-              <a:rPr b="1" sz="1700"/>
-              <a:t>リーチ</a:t>
-            </a:r>
-            <a:r>
-              <a:rPr b="0" sz="1700"/>
-              <a:t> セットアップ、 ソウ イット キャナット </a:t>
-            </a:r>
-            <a:r>
-              <a:rPr b="1" sz="1700"/>
-              <a:t>ギヴ イット アウェイ</a:t>
-            </a:r>
-            <a:r>
-              <a:rPr b="0" sz="1700"/>
-              <a:t>。</a:t>
-            </a:r>
-          </a:p>
-          <a:p>
-            <a:r>
-              <a:rPr b="0" sz="1700"/>
               <a:t>Today I use one token, for time. Just know the split is there.</a:t>
             </a:r>
           </a:p>
@@ -6016,7 +6020,7 @@
             </a:r>
             <a:r>
               <a:rPr b="0" sz="1700"/>
-              <a:t> トウクン、 フォー </a:t>
+              <a:t> トークン、 フォー </a:t>
             </a:r>
             <a:r>
               <a:rPr b="1" sz="1700"/>
@@ -6024,7 +6028,7 @@
             </a:r>
             <a:r>
               <a:rPr b="0" sz="1700"/>
-              <a:t>。 ジャスト ノウ ザ </a:t>
+              <a:t>。 ジャスト ノー ザ </a:t>
             </a:r>
             <a:r>
               <a:rPr b="1" sz="1700"/>
@@ -6050,55 +6054,165 @@
           <a:p>
             <a:r>
               <a:rPr b="0" sz="1200"/>
-              <a:t>DO: Store 画面 → Step 1「Choose the slot」で Slot A を選択</a:t>
+              <a:t>▶ SAY — 止めずに読み切る</a:t>
+            </a:r>
+          </a:p>
+          <a:p>
+            <a:r>
+              <a:rPr b="0" sz="1700"/>
+              <a:t>Slot A. This is the file I would hand over.</a:t>
+            </a:r>
+          </a:p>
+          <a:p>
+            <a:r>
+              <a:rPr b="0" sz="1700"/>
+              <a:t>  </a:t>
+            </a:r>
+            <a:r>
+              <a:rPr b="1" sz="1700"/>
+              <a:t>スロット エイ</a:t>
+            </a:r>
+            <a:r>
+              <a:rPr b="0" sz="1700"/>
+              <a:t>。 ディス イズ ザ ファイル アイ ウド </a:t>
+            </a:r>
+            <a:r>
+              <a:rPr b="1" sz="1700"/>
+              <a:t>ハンド オーバー</a:t>
+            </a:r>
+            <a:r>
+              <a:rPr b="0" sz="1700"/>
+              <a:t>。</a:t>
+            </a:r>
+          </a:p>
+          <a:p>
+            <a:r>
+              <a:rPr b="0" sz="1700"/>
+              <a:t>Now watch the camera. It takes two shots.</a:t>
+            </a:r>
+          </a:p>
+          <a:p>
+            <a:r>
+              <a:rPr b="0" sz="1700"/>
+              <a:t>  ナウ ウォッチ ザ カメラ。 イット テイクス </a:t>
+            </a:r>
+            <a:r>
+              <a:rPr b="1" sz="1700"/>
+              <a:t>ツー ショッツ</a:t>
+            </a:r>
+            <a:r>
+              <a:rPr b="0" sz="1700"/>
+              <a:t>。</a:t>
+            </a:r>
+          </a:p>
+          <a:p>
+            <a:r>
+              <a:rPr b="0" sz="1700"/>
+              <a:t>First the empty scene — just my table. Then the same view, with the object in it.</a:t>
+            </a:r>
+          </a:p>
+          <a:p>
+            <a:r>
+              <a:rPr b="0" sz="1700"/>
+              <a:t>  ファースト ジ </a:t>
+            </a:r>
+            <a:r>
+              <a:rPr b="1" sz="1700"/>
+              <a:t>エンプティ シーン</a:t>
+            </a:r>
+            <a:r>
+              <a:rPr b="0" sz="1700"/>
+              <a:t> — ジャスト マイ </a:t>
+            </a:r>
+            <a:r>
+              <a:rPr b="1" sz="1700"/>
+              <a:t>テイブル</a:t>
+            </a:r>
+            <a:r>
+              <a:rPr b="0" sz="1700"/>
+              <a:t>。 ゼン ザ </a:t>
+            </a:r>
+            <a:r>
+              <a:rPr b="1" sz="1700"/>
+              <a:t>セイム ビュー</a:t>
+            </a:r>
+            <a:r>
+              <a:rPr b="0" sz="1700"/>
+              <a:t>、 ウィズ ジ </a:t>
+            </a:r>
+            <a:r>
+              <a:rPr b="1" sz="1700"/>
+              <a:t>オブジェクト</a:t>
+            </a:r>
+            <a:r>
+              <a:rPr b="0" sz="1700"/>
+              <a:t> イン イット。</a:t>
             </a:r>
           </a:p>
           <a:p>
             <a:r>
               <a:rPr b="0" sz="1200"/>
-              <a:t>DO: → 偽装用ファイルを選択 → パスワードA を入力</a:t>
+              <a:t>✋ DO — 黙って操作</a:t>
             </a:r>
           </a:p>
           <a:p>
             <a:r>
               <a:rPr b="0" sz="1200"/>
-              <a:t>DO: → 物体を手元に置いたまま「1 · Capture empty scene」</a:t>
+              <a:t>DO: Store → Step 1「Choose the slot」で Slot A → 偽装用ファイル → パスワードA</a:t>
             </a:r>
           </a:p>
           <a:p>
             <a:r>
               <a:rPr b="0" sz="1200"/>
-              <a:t>DO: → 物体A をかざして「2 · Capture access object」</a:t>
+              <a:t>DO: → 物体を外して「1 · Capture empty scene」</a:t>
             </a:r>
           </a:p>
           <a:p>
             <a:r>
               <a:rPr b="0" sz="1200"/>
-              <a:t>DO: → かざしたまま「Protect file」</a:t>
-            </a:r>
-          </a:p>
-          <a:p>
-            <a:r>
-              <a:rPr b="0" sz="1700"/>
-              <a:t>Slot A. This is the file I would hand over.</a:t>
-            </a:r>
-          </a:p>
-          <a:p>
-            <a:r>
-              <a:rPr b="0" sz="1700"/>
-              <a:t>  </a:t>
-            </a:r>
-            <a:r>
-              <a:rPr b="1" sz="1700"/>
-              <a:t>スロット エイ</a:t>
-            </a:r>
-            <a:r>
-              <a:rPr b="0" sz="1700"/>
-              <a:t>。 ディス イズ ザ ファイル アイ ウッド </a:t>
-            </a:r>
-            <a:r>
-              <a:rPr b="1" sz="1700"/>
-              <a:t>ハンド オーヴァー</a:t>
+              <a:t>DO: → 物体A をかざして「2 · Capture access object」→ かざしたまま「Protect file」</a:t>
+            </a:r>
+          </a:p>
+          <a:p>
+            <a:r>
+              <a:rPr b="0" sz="1200"/>
+              <a:t>▶ THEN — 画面が変わってから</a:t>
+            </a:r>
+          </a:p>
+          <a:p>
+            <a:r>
+              <a:rPr b="0" sz="1700"/>
+              <a:t>The device keeps the difference between them.</a:t>
+            </a:r>
+          </a:p>
+          <a:p>
+            <a:r>
+              <a:rPr b="0" sz="1700"/>
+              <a:t>  ザ デバイス キープス ザ </a:t>
+            </a:r>
+            <a:r>
+              <a:rPr b="1" sz="1700"/>
+              <a:t>ディファレンス</a:t>
+            </a:r>
+            <a:r>
+              <a:rPr b="0" sz="1700"/>
+              <a:t> ビトウィーン ゼム。</a:t>
+            </a:r>
+          </a:p>
+          <a:p>
+            <a:r>
+              <a:rPr b="0" sz="1700"/>
+              <a:t>Not my table. Not the room. The object.</a:t>
+            </a:r>
+          </a:p>
+          <a:p>
+            <a:r>
+              <a:rPr b="0" sz="1700"/>
+              <a:t>  ナット マイ テイブル。 ナット ザ ルーム。 </a:t>
+            </a:r>
+            <a:r>
+              <a:rPr b="1" sz="1700"/>
+              <a:t>ジ オブジェクト</a:t>
             </a:r>
             <a:r>
               <a:rPr b="0" sz="1700"/>
@@ -6108,17 +6222,25 @@
           <a:p>
             <a:r>
               <a:rPr b="0" sz="1700"/>
-              <a:t>Now watch the camera. It takes two shots.</a:t>
-            </a:r>
-          </a:p>
-          <a:p>
-            <a:r>
-              <a:rPr b="0" sz="1700"/>
-              <a:t>  ナウ ウォッチ ザ カメラ。 イット テイクス </a:t>
-            </a:r>
-            <a:r>
-              <a:rPr b="1" sz="1700"/>
-              <a:t>トゥー ショッツ</a:t>
+              <a:t>And this is a cue, not a key.</a:t>
+            </a:r>
+          </a:p>
+          <a:p>
+            <a:r>
+              <a:rPr b="0" sz="1700"/>
+              <a:t>  アンド ディス イズ ア </a:t>
+            </a:r>
+            <a:r>
+              <a:rPr b="1" sz="1700"/>
+              <a:t>キュー</a:t>
+            </a:r>
+            <a:r>
+              <a:rPr b="0" sz="1700"/>
+              <a:t>、 ナット ア </a:t>
+            </a:r>
+            <a:r>
+              <a:rPr b="1" sz="1700"/>
+              <a:t>キー</a:t>
             </a:r>
             <a:r>
               <a:rPr b="0" sz="1700"/>
@@ -6128,25 +6250,25 @@
           <a:p>
             <a:r>
               <a:rPr b="0" sz="1700"/>
-              <a:t>First, the empty scene. Just my table.</a:t>
-            </a:r>
-          </a:p>
-          <a:p>
-            <a:r>
-              <a:rPr b="0" sz="1700"/>
-              <a:t>  ファースト、 ジ </a:t>
-            </a:r>
-            <a:r>
-              <a:rPr b="1" sz="1700"/>
-              <a:t>エンプティ シーン</a:t>
-            </a:r>
-            <a:r>
-              <a:rPr b="0" sz="1700"/>
-              <a:t>。 ジャスト マイ </a:t>
-            </a:r>
-            <a:r>
-              <a:rPr b="1" sz="1700"/>
-              <a:t>テイブル</a:t>
+              <a:t>It does not encrypt anything. It decides whether the operation may start.</a:t>
+            </a:r>
+          </a:p>
+          <a:p>
+            <a:r>
+              <a:rPr b="0" sz="1700"/>
+              <a:t>  イット ダズ ナット </a:t>
+            </a:r>
+            <a:r>
+              <a:rPr b="1" sz="1700"/>
+              <a:t>エンクリプト</a:t>
+            </a:r>
+            <a:r>
+              <a:rPr b="0" sz="1700"/>
+              <a:t> エニシング。 イット ディサイズ ウェザー ジ オペレイション </a:t>
+            </a:r>
+            <a:r>
+              <a:rPr b="1" sz="1700"/>
+              <a:t>メイ スタート</a:t>
             </a:r>
             <a:r>
               <a:rPr b="0" sz="1700"/>
@@ -6156,143 +6278,7 @@
           <a:p>
             <a:r>
               <a:rPr b="0" sz="1700"/>
-              <a:t>Then the same view, with the object in it.</a:t>
-            </a:r>
-          </a:p>
-          <a:p>
-            <a:r>
-              <a:rPr b="0" sz="1700"/>
-              <a:t>  ゼン ザ </a:t>
-            </a:r>
-            <a:r>
-              <a:rPr b="1" sz="1700"/>
-              <a:t>セイム ヴュー</a:t>
-            </a:r>
-            <a:r>
-              <a:rPr b="0" sz="1700"/>
-              <a:t>、 ウィズ ジ </a:t>
-            </a:r>
-            <a:r>
-              <a:rPr b="1" sz="1700"/>
-              <a:t>オブジェクト</a:t>
-            </a:r>
-            <a:r>
-              <a:rPr b="0" sz="1700"/>
-              <a:t> イン イット。</a:t>
-            </a:r>
-          </a:p>
-          <a:p>
-            <a:r>
-              <a:rPr b="0" sz="1700"/>
-              <a:t>The device keeps the difference between them.</a:t>
-            </a:r>
-          </a:p>
-          <a:p>
-            <a:r>
-              <a:rPr b="0" sz="1700"/>
-              <a:t>  ザ デバイス キープス ザ </a:t>
-            </a:r>
-            <a:r>
-              <a:rPr b="1" sz="1700"/>
-              <a:t>ディファレンス</a:t>
-            </a:r>
-            <a:r>
-              <a:rPr b="0" sz="1700"/>
-              <a:t> ビトウィーン ゼム。</a:t>
-            </a:r>
-          </a:p>
-          <a:p>
-            <a:r>
-              <a:rPr b="0" sz="1700"/>
-              <a:t>Not my table. Not the room. The object.</a:t>
-            </a:r>
-          </a:p>
-          <a:p>
-            <a:r>
-              <a:rPr b="0" sz="1700"/>
-              <a:t>  ナット マイ テイブル。 ナット ザ ルーム。 </a:t>
-            </a:r>
-            <a:r>
-              <a:rPr b="1" sz="1700"/>
-              <a:t>ジ オブジェクト</a:t>
-            </a:r>
-            <a:r>
-              <a:rPr b="0" sz="1700"/>
-              <a:t>。</a:t>
-            </a:r>
-          </a:p>
-          <a:p>
-            <a:r>
-              <a:rPr b="0" sz="1700"/>
-              <a:t>And this is a cue, not a key.</a:t>
-            </a:r>
-          </a:p>
-          <a:p>
-            <a:r>
-              <a:rPr b="0" sz="1700"/>
-              <a:t>  アンド ディス イズ ア </a:t>
-            </a:r>
-            <a:r>
-              <a:rPr b="1" sz="1700"/>
-              <a:t>キュー</a:t>
-            </a:r>
-            <a:r>
-              <a:rPr b="0" sz="1700"/>
-              <a:t>、 ナット ア </a:t>
-            </a:r>
-            <a:r>
-              <a:rPr b="1" sz="1700"/>
-              <a:t>キー</a:t>
-            </a:r>
-            <a:r>
-              <a:rPr b="0" sz="1700"/>
-              <a:t>。</a:t>
-            </a:r>
-          </a:p>
-          <a:p>
-            <a:r>
-              <a:rPr b="0" sz="1700"/>
-              <a:t>It does not encrypt anything.</a:t>
-            </a:r>
-          </a:p>
-          <a:p>
-            <a:r>
-              <a:rPr b="0" sz="1700"/>
-              <a:t>  イット ダズ ナット </a:t>
-            </a:r>
-            <a:r>
-              <a:rPr b="1" sz="1700"/>
-              <a:t>エンクリプト</a:t>
-            </a:r>
-            <a:r>
-              <a:rPr b="0" sz="1700"/>
-              <a:t> エニシング。</a:t>
-            </a:r>
-          </a:p>
-          <a:p>
-            <a:r>
-              <a:rPr b="0" sz="1700"/>
-              <a:t>It decides whether the operation may start at all.</a:t>
-            </a:r>
-          </a:p>
-          <a:p>
-            <a:r>
-              <a:rPr b="0" sz="1700"/>
-              <a:t>  イット ディサイズ ウェザー ジ オペレイション </a:t>
-            </a:r>
-            <a:r>
-              <a:rPr b="1" sz="1700"/>
-              <a:t>メイ スタート</a:t>
-            </a:r>
-            <a:r>
-              <a:rPr b="0" sz="1700"/>
-              <a:t> アット オール。</a:t>
-            </a:r>
-          </a:p>
-          <a:p>
-            <a:r>
-              <a:rPr b="0" sz="1700"/>
-              <a:t>A photograph of it opens nothing.</a:t>
+              <a:t>A photo of it opens nothing.</a:t>
             </a:r>
           </a:p>
           <a:p>
@@ -6302,11 +6288,11 @@
             </a:r>
             <a:r>
               <a:rPr b="1" sz="1700"/>
-              <a:t>フォトグラフ</a:t>
-            </a:r>
-            <a:r>
-              <a:rPr b="0" sz="1700"/>
-              <a:t> オヴ イット オウプンズ </a:t>
+              <a:t>フォト</a:t>
+            </a:r>
+            <a:r>
+              <a:rPr b="0" sz="1700"/>
+              <a:t> オブ イット オープンズ </a:t>
             </a:r>
             <a:r>
               <a:rPr b="1" sz="1700"/>
@@ -6332,7 +6318,139 @@
           <a:p>
             <a:r>
               <a:rPr b="0" sz="1200"/>
-              <a:t>DO: Step 1 を Slot B に切り替え → 真のファイルを選択 → パスワードB を入力</a:t>
+              <a:t>▶ SAY — 止めずに読み切る</a:t>
+            </a:r>
+          </a:p>
+          <a:p>
+            <a:r>
+              <a:rPr b="0" sz="1700"/>
+              <a:t>Slot B. Same file on disk. Same demo dot vessel.</a:t>
+            </a:r>
+          </a:p>
+          <a:p>
+            <a:r>
+              <a:rPr b="0" sz="1700"/>
+              <a:t>  </a:t>
+            </a:r>
+            <a:r>
+              <a:rPr b="1" sz="1700"/>
+              <a:t>スロット ビー</a:t>
+            </a:r>
+            <a:r>
+              <a:rPr b="0" sz="1700"/>
+              <a:t>。 セイム ファイル オン ディスク。 セイム </a:t>
+            </a:r>
+            <a:r>
+              <a:rPr b="1" sz="1700"/>
+              <a:t>デモ ドット ベッセル</a:t>
+            </a:r>
+            <a:r>
+              <a:rPr b="0" sz="1700"/>
+              <a:t>。</a:t>
+            </a:r>
+          </a:p>
+          <a:p>
+            <a:r>
+              <a:rPr b="0" sz="1700"/>
+              <a:t>A different object. A different password.</a:t>
+            </a:r>
+          </a:p>
+          <a:p>
+            <a:r>
+              <a:rPr b="0" sz="1700"/>
+              <a:t>  ア ディファレント </a:t>
+            </a:r>
+            <a:r>
+              <a:rPr b="1" sz="1700"/>
+              <a:t>オブジェクト</a:t>
+            </a:r>
+            <a:r>
+              <a:rPr b="0" sz="1700"/>
+              <a:t>。 ア ディファレント </a:t>
+            </a:r>
+            <a:r>
+              <a:rPr b="1" sz="1700"/>
+              <a:t>パスワード</a:t>
+            </a:r>
+            <a:r>
+              <a:rPr b="0" sz="1700"/>
+              <a:t>。</a:t>
+            </a:r>
+          </a:p>
+          <a:p>
+            <a:r>
+              <a:rPr b="0" sz="1700"/>
+              <a:t>And one more thing, which I will use later — a second password for this slot.</a:t>
+            </a:r>
+          </a:p>
+          <a:p>
+            <a:r>
+              <a:rPr b="0" sz="1700"/>
+              <a:t>  アンド </a:t>
+            </a:r>
+            <a:r>
+              <a:rPr b="1" sz="1700"/>
+              <a:t>ワン モア シング</a:t>
+            </a:r>
+            <a:r>
+              <a:rPr b="0" sz="1700"/>
+              <a:t>、 ウィッチ アイル </a:t>
+            </a:r>
+            <a:r>
+              <a:rPr b="1" sz="1700"/>
+              <a:t>ユーズ レイター</a:t>
+            </a:r>
+            <a:r>
+              <a:rPr b="0" sz="1700"/>
+              <a:t> — ア </a:t>
+            </a:r>
+            <a:r>
+              <a:rPr b="1" sz="1700"/>
+              <a:t>セカンド パスワード</a:t>
+            </a:r>
+            <a:r>
+              <a:rPr b="0" sz="1700"/>
+              <a:t> フォー ディス スロット。</a:t>
+            </a:r>
+          </a:p>
+          <a:p>
+            <a:r>
+              <a:rPr b="0" sz="1700"/>
+              <a:t>Not one that opens it.</a:t>
+            </a:r>
+          </a:p>
+          <a:p>
+            <a:r>
+              <a:rPr b="0" sz="1700"/>
+              <a:t>  </a:t>
+            </a:r>
+            <a:r>
+              <a:rPr b="1" sz="1700"/>
+              <a:t>ナット</a:t>
+            </a:r>
+            <a:r>
+              <a:rPr b="0" sz="1700"/>
+              <a:t> ワン ザット </a:t>
+            </a:r>
+            <a:r>
+              <a:rPr b="1" sz="1700"/>
+              <a:t>オープンズ</a:t>
+            </a:r>
+            <a:r>
+              <a:rPr b="0" sz="1700"/>
+              <a:t> イット。</a:t>
+            </a:r>
+          </a:p>
+          <a:p>
+            <a:r>
+              <a:rPr b="0" sz="1200"/>
+              <a:t>✋ DO — 黙って操作</a:t>
+            </a:r>
+          </a:p>
+          <a:p>
+            <a:r>
+              <a:rPr b="0" sz="1200"/>
+              <a:t>DO: Step 1 を Slot B → 真のファイル → パスワードB</a:t>
             </a:r>
           </a:p>
           <a:p>
@@ -6344,151 +6462,13 @@
           <a:p>
             <a:r>
               <a:rPr b="0" sz="1200"/>
-              <a:t>DO: → 物体を外して「1 · Capture empty scene」</a:t>
+              <a:t>DO: → 物体を外して空シーン → 物体B をかざして撮影 → かざしたまま「Protect file」</a:t>
             </a:r>
           </a:p>
           <a:p>
             <a:r>
               <a:rPr b="0" sz="1200"/>
-              <a:t>DO: → 物体B をかざして「2 · Capture access object」</a:t>
-            </a:r>
-          </a:p>
-          <a:p>
-            <a:r>
-              <a:rPr b="0" sz="1200"/>
-              <a:t>DO: → かざしたまま「Protect file」</a:t>
-            </a:r>
-          </a:p>
-          <a:p>
-            <a:r>
-              <a:rPr b="0" sz="1700"/>
-              <a:t>Slot B. Same file on disk. Same demo dot vessel.</a:t>
-            </a:r>
-          </a:p>
-          <a:p>
-            <a:r>
-              <a:rPr b="0" sz="1700"/>
-              <a:t>  </a:t>
-            </a:r>
-            <a:r>
-              <a:rPr b="1" sz="1700"/>
-              <a:t>スロット ビー</a:t>
-            </a:r>
-            <a:r>
-              <a:rPr b="0" sz="1700"/>
-              <a:t>。 セイム ファイル オン ディスク。 セイム </a:t>
-            </a:r>
-            <a:r>
-              <a:rPr b="1" sz="1700"/>
-              <a:t>デモ ドット ヴェッセル</a:t>
-            </a:r>
-            <a:r>
-              <a:rPr b="0" sz="1700"/>
-              <a:t>。</a:t>
-            </a:r>
-          </a:p>
-          <a:p>
-            <a:r>
-              <a:rPr b="0" sz="1700"/>
-              <a:t>A different object. A different password.</a:t>
-            </a:r>
-          </a:p>
-          <a:p>
-            <a:r>
-              <a:rPr b="0" sz="1700"/>
-              <a:t>  ア ディファレント </a:t>
-            </a:r>
-            <a:r>
-              <a:rPr b="1" sz="1700"/>
-              <a:t>オブジェクト</a:t>
-            </a:r>
-            <a:r>
-              <a:rPr b="0" sz="1700"/>
-              <a:t>。 ア ディファレント </a:t>
-            </a:r>
-            <a:r>
-              <a:rPr b="1" sz="1700"/>
-              <a:t>パスワード</a:t>
-            </a:r>
-            <a:r>
-              <a:rPr b="0" sz="1700"/>
-              <a:t>。</a:t>
-            </a:r>
-          </a:p>
-          <a:p>
-            <a:r>
-              <a:rPr b="0" sz="1700"/>
-              <a:t>And one more thing here, which I will use later.</a:t>
-            </a:r>
-          </a:p>
-          <a:p>
-            <a:r>
-              <a:rPr b="0" sz="1700"/>
-              <a:t>  アンド </a:t>
-            </a:r>
-            <a:r>
-              <a:rPr b="1" sz="1700"/>
-              <a:t>ワン モア シング</a:t>
-            </a:r>
-            <a:r>
-              <a:rPr b="0" sz="1700"/>
-              <a:t> ヒア、 ウィッチ アイル </a:t>
-            </a:r>
-            <a:r>
-              <a:rPr b="1" sz="1700"/>
-              <a:t>ユーズ レイター</a:t>
-            </a:r>
-            <a:r>
-              <a:rPr b="0" sz="1700"/>
-              <a:t>。</a:t>
-            </a:r>
-          </a:p>
-          <a:p>
-            <a:r>
-              <a:rPr b="0" sz="1700"/>
-              <a:t>A second password for this slot.</a:t>
-            </a:r>
-          </a:p>
-          <a:p>
-            <a:r>
-              <a:rPr b="0" sz="1700"/>
-              <a:t>  ア </a:t>
-            </a:r>
-            <a:r>
-              <a:rPr b="1" sz="1700"/>
-              <a:t>セカンド パスワード</a:t>
-            </a:r>
-            <a:r>
-              <a:rPr b="0" sz="1700"/>
-              <a:t> フォー ディス スロット。</a:t>
-            </a:r>
-          </a:p>
-          <a:p>
-            <a:r>
-              <a:rPr b="0" sz="1700"/>
-              <a:t>Not one that opens it.</a:t>
-            </a:r>
-          </a:p>
-          <a:p>
-            <a:r>
-              <a:rPr b="0" sz="1700"/>
-              <a:t>  </a:t>
-            </a:r>
-            <a:r>
-              <a:rPr b="1" sz="1700"/>
-              <a:t>ナット</a:t>
-            </a:r>
-            <a:r>
-              <a:rPr b="0" sz="1700"/>
-              <a:t> ワン ザット </a:t>
-            </a:r>
-            <a:r>
-              <a:rPr b="1" sz="1700"/>
-              <a:t>オウプンズ</a:t>
-            </a:r>
-            <a:r>
-              <a:rPr b="0" sz="1700"/>
-              <a:t> イット。</a:t>
+              <a:t>▶ THEN — 画面が変わってから</a:t>
             </a:r>
           </a:p>
           <a:p>
@@ -6500,7 +6480,7 @@
           <a:p>
             <a:r>
               <a:rPr b="0" sz="1700"/>
-              <a:t>  ボウス スロッツ ナウ リヴ </a:t>
+              <a:t>  ボース スロッツ ナウ リブ </a:t>
             </a:r>
             <a:r>
               <a:rPr b="1" sz="1700"/>
@@ -6534,53 +6514,59 @@
           <a:p>
             <a:r>
               <a:rPr b="0" sz="1200"/>
-              <a:t>DO: Retrieve 画面 → 物体A をかざす → 一致表示を待つ</a:t>
+              <a:t>▶ SAY — 止めずに読み切る</a:t>
+            </a:r>
+          </a:p>
+          <a:p>
+            <a:r>
+              <a:rPr b="0" sz="1700"/>
+              <a:t>Object A. Password A.</a:t>
+            </a:r>
+          </a:p>
+          <a:p>
+            <a:r>
+              <a:rPr b="0" sz="1700"/>
+              <a:t>  </a:t>
+            </a:r>
+            <a:r>
+              <a:rPr b="1" sz="1700"/>
+              <a:t>オブジェクト エイ</a:t>
+            </a:r>
+            <a:r>
+              <a:rPr b="0" sz="1700"/>
+              <a:t>。 </a:t>
+            </a:r>
+            <a:r>
+              <a:rPr b="1" sz="1700"/>
+              <a:t>パスワード エイ</a:t>
+            </a:r>
+            <a:r>
+              <a:rPr b="0" sz="1700"/>
+              <a:t>。</a:t>
             </a:r>
           </a:p>
           <a:p>
             <a:r>
               <a:rPr b="0" sz="1200"/>
-              <a:t>DO: → パスワードA → Open protected file</a:t>
+              <a:t>✋ DO — 黙って操作</a:t>
             </a:r>
           </a:p>
           <a:p>
             <a:r>
               <a:rPr b="0" sz="1200"/>
-              <a:t>DO: → 落ちてきたファイルを開いて中身を見せる</a:t>
-            </a:r>
-          </a:p>
-          <a:p>
-            <a:r>
-              <a:rPr b="0" sz="1700"/>
-              <a:t>Object A. Password A.</a:t>
-            </a:r>
-          </a:p>
-          <a:p>
-            <a:r>
-              <a:rPr b="0" sz="1700"/>
-              <a:t>  </a:t>
-            </a:r>
-            <a:r>
-              <a:rPr b="1" sz="1700"/>
-              <a:t>オブジェクト エイ</a:t>
-            </a:r>
-            <a:r>
-              <a:rPr b="0" sz="1700"/>
-              <a:t>。 </a:t>
-            </a:r>
-            <a:r>
-              <a:rPr b="1" sz="1700"/>
-              <a:t>パスワード エイ</a:t>
-            </a:r>
-            <a:r>
-              <a:rPr b="0" sz="1700"/>
-              <a:t>。</a:t>
-            </a:r>
-          </a:p>
-          <a:p>
-            <a:r>
-              <a:rPr b="0" sz="1700"/>
-              <a:t>And there it is.</a:t>
+              <a:t>DO: Retrieve → 物体A → 一致表示を待つ → パスワードA → Open protected file → 中身を見せる</a:t>
+            </a:r>
+          </a:p>
+          <a:p>
+            <a:r>
+              <a:rPr b="0" sz="1200"/>
+              <a:t>▶ THEN — 画面が変わってから</a:t>
+            </a:r>
+          </a:p>
+          <a:p>
+            <a:r>
+              <a:rPr b="0" sz="1700"/>
+              <a:t>And there it is. That is Slot A, out of demo dot vessel.</a:t>
             </a:r>
           </a:p>
           <a:p>
@@ -6594,19 +6580,7 @@
             </a:r>
             <a:r>
               <a:rPr b="0" sz="1700"/>
-              <a:t>。</a:t>
-            </a:r>
-          </a:p>
-          <a:p>
-            <a:r>
-              <a:rPr b="0" sz="1700"/>
-              <a:t>That is Slot A, out of demo dot vessel.</a:t>
-            </a:r>
-          </a:p>
-          <a:p>
-            <a:r>
-              <a:rPr b="0" sz="1700"/>
-              <a:t>  ザッツ </a:t>
+              <a:t>。 ザッツ </a:t>
             </a:r>
             <a:r>
               <a:rPr b="1" sz="1700"/>
@@ -6614,11 +6588,11 @@
             </a:r>
             <a:r>
               <a:rPr b="0" sz="1700"/>
-              <a:t>、 アウト オヴ </a:t>
-            </a:r>
-            <a:r>
-              <a:rPr b="1" sz="1700"/>
-              <a:t>デモ ドット ヴェッセル</a:t>
+              <a:t>、 アウト オブ </a:t>
+            </a:r>
+            <a:r>
+              <a:rPr b="1" sz="1700"/>
+              <a:t>デモ ドット ベッセル</a:t>
             </a:r>
             <a:r>
               <a:rPr b="0" sz="1700"/>
@@ -6640,31 +6614,87 @@
           <a:p>
             <a:r>
               <a:rPr b="0" sz="1200"/>
-              <a:t>DO: 同じ Retrieve 画面のまま、物体B に持ち替える → 一致表示を待つ（待たずに押すと拒否される）</a:t>
+              <a:t>▶ SAY (1/2) — 止めずに読み切る</a:t>
+            </a:r>
+          </a:p>
+          <a:p>
+            <a:r>
+              <a:rPr b="0" sz="1700"/>
+              <a:t>Same screen. I have only changed the object.</a:t>
+            </a:r>
+          </a:p>
+          <a:p>
+            <a:r>
+              <a:rPr b="0" sz="1700"/>
+              <a:t>  </a:t>
+            </a:r>
+            <a:r>
+              <a:rPr b="1" sz="1700"/>
+              <a:t>セイム スクリーン</a:t>
+            </a:r>
+            <a:r>
+              <a:rPr b="0" sz="1700"/>
+              <a:t>。 アイブ </a:t>
+            </a:r>
+            <a:r>
+              <a:rPr b="1" sz="1700"/>
+              <a:t>オンリー</a:t>
+            </a:r>
+            <a:r>
+              <a:rPr b="0" sz="1700"/>
+              <a:t> チェインジド ジ オブジェクト。</a:t>
+            </a:r>
+          </a:p>
+          <a:p>
+            <a:r>
+              <a:rPr b="0" sz="1700"/>
+              <a:t>This is the object for Slot B — and I will type Slot A's password.</a:t>
+            </a:r>
+          </a:p>
+          <a:p>
+            <a:r>
+              <a:rPr b="0" sz="1700"/>
+              <a:t>  ディス イズ ジ オブジェクト フォー </a:t>
+            </a:r>
+            <a:r>
+              <a:rPr b="1" sz="1700"/>
+              <a:t>スロット ビー</a:t>
+            </a:r>
+            <a:r>
+              <a:rPr b="0" sz="1700"/>
+              <a:t> — アンド アイル タイプ </a:t>
+            </a:r>
+            <a:r>
+              <a:rPr b="1" sz="1700"/>
+              <a:t>スロット エイズ</a:t>
+            </a:r>
+            <a:r>
+              <a:rPr b="0" sz="1700"/>
+              <a:t> パスワード。</a:t>
             </a:r>
           </a:p>
           <a:p>
             <a:r>
               <a:rPr b="0" sz="1200"/>
-              <a:t>DO: → まず パスワードA を入力 → Open protected file → 失敗</a:t>
+              <a:t>✋ DO (1/2) — 黙って操作</a:t>
             </a:r>
           </a:p>
           <a:p>
             <a:r>
               <a:rPr b="0" sz="1200"/>
-              <a:t>DO: → 続けて パスワードB を入力 → Open protected file → 成功</a:t>
+              <a:t>DO: 物体B に持ち替え → 一致表示を待つ → パスワードA → Open protected file</a:t>
             </a:r>
           </a:p>
           <a:p>
             <a:r>
               <a:rPr b="0" sz="1200"/>
-              <a:t>DO: → 落ちてきたファイルを開いて、SCENE 5 と中身が違うことを見せる</a:t>
-            </a:r>
-          </a:p>
-          <a:p>
-            <a:r>
-              <a:rPr b="0" sz="1700"/>
-              <a:t>Same screen. I have only changed the object.</a:t>
+              <a:t>▶ THEN (1/2) — 画面が変わってから</a:t>
+            </a:r>
+          </a:p>
+          <a:p>
+            <a:r>
+              <a:rPr b="0" sz="1700"/>
+              <a:t>No valid entry found.</a:t>
             </a:r>
           </a:p>
           <a:p>
@@ -6674,35 +6704,7 @@
             </a:r>
             <a:r>
               <a:rPr b="1" sz="1700"/>
-              <a:t>セイム スクリーン</a:t>
-            </a:r>
-            <a:r>
-              <a:rPr b="0" sz="1700"/>
-              <a:t>。 アイヴ </a:t>
-            </a:r>
-            <a:r>
-              <a:rPr b="1" sz="1700"/>
-              <a:t>オンリー</a:t>
-            </a:r>
-            <a:r>
-              <a:rPr b="0" sz="1700"/>
-              <a:t> チェインジド ジ オブジェクト。</a:t>
-            </a:r>
-          </a:p>
-          <a:p>
-            <a:r>
-              <a:rPr b="0" sz="1700"/>
-              <a:t>This is the object for Slot B.</a:t>
-            </a:r>
-          </a:p>
-          <a:p>
-            <a:r>
-              <a:rPr b="0" sz="1700"/>
-              <a:t>  ディス イズ ジ オブジェクト フォー </a:t>
-            </a:r>
-            <a:r>
-              <a:rPr b="1" sz="1700"/>
-              <a:t>スロット ビー</a:t>
+              <a:t>ノー バリッド エントリー ファウンド</a:t>
             </a:r>
             <a:r>
               <a:rPr b="0" sz="1700"/>
@@ -6712,17 +6714,59 @@
           <a:p>
             <a:r>
               <a:rPr b="0" sz="1700"/>
-              <a:t>And I will type Slot A's password.</a:t>
-            </a:r>
-          </a:p>
-          <a:p>
-            <a:r>
-              <a:rPr b="0" sz="1700"/>
-              <a:t>  アンド アイル タイプ </a:t>
-            </a:r>
-            <a:r>
-              <a:rPr b="1" sz="1700"/>
-              <a:t>スロット エイズ</a:t>
+              <a:t>The object is right. The password is not. Nothing opens.</a:t>
+            </a:r>
+          </a:p>
+          <a:p>
+            <a:r>
+              <a:rPr b="0" sz="1700"/>
+              <a:t>  ジ オブジェクト イズ </a:t>
+            </a:r>
+            <a:r>
+              <a:rPr b="1" sz="1700"/>
+              <a:t>ライト</a:t>
+            </a:r>
+            <a:r>
+              <a:rPr b="0" sz="1700"/>
+              <a:t>。 ザ パスワード イズ </a:t>
+            </a:r>
+            <a:r>
+              <a:rPr b="1" sz="1700"/>
+              <a:t>ナット</a:t>
+            </a:r>
+            <a:r>
+              <a:rPr b="0" sz="1700"/>
+              <a:t>。 </a:t>
+            </a:r>
+            <a:r>
+              <a:rPr b="1" sz="1700"/>
+              <a:t>ナッシング</a:t>
+            </a:r>
+            <a:r>
+              <a:rPr b="0" sz="1700"/>
+              <a:t> オープンズ。</a:t>
+            </a:r>
+          </a:p>
+          <a:p>
+            <a:r>
+              <a:rPr b="0" sz="1200"/>
+              <a:t>▶ SAY (2/2) — 止めずに読み切る</a:t>
+            </a:r>
+          </a:p>
+          <a:p>
+            <a:r>
+              <a:rPr b="0" sz="1700"/>
+              <a:t>Now Slot B's own password.</a:t>
+            </a:r>
+          </a:p>
+          <a:p>
+            <a:r>
+              <a:rPr b="0" sz="1700"/>
+              <a:t>  ナウ </a:t>
+            </a:r>
+            <a:r>
+              <a:rPr b="1" sz="1700"/>
+              <a:t>スロット ビーズ オーン</a:t>
             </a:r>
             <a:r>
               <a:rPr b="0" sz="1700"/>
@@ -6731,8 +6775,54 @@
           </a:p>
           <a:p>
             <a:r>
-              <a:rPr b="0" sz="1700"/>
-              <a:t>No valid entry found.</a:t>
+              <a:rPr b="0" sz="1200"/>
+              <a:t>✋ DO (2/2) — 黙って操作</a:t>
+            </a:r>
+          </a:p>
+          <a:p>
+            <a:r>
+              <a:rPr b="0" sz="1200"/>
+              <a:t>DO: パスワードB → Open protected file → 落ちたファイルを開き、SCENE 5 と中身が違うことを見せる</a:t>
+            </a:r>
+          </a:p>
+          <a:p>
+            <a:r>
+              <a:rPr b="0" sz="1200"/>
+              <a:t>▶ THEN (2/2) — 画面が変わってから</a:t>
+            </a:r>
+          </a:p>
+          <a:p>
+            <a:r>
+              <a:rPr b="0" sz="1700"/>
+              <a:t>A different file — out of the same file on disk.</a:t>
+            </a:r>
+          </a:p>
+          <a:p>
+            <a:r>
+              <a:rPr b="0" sz="1700"/>
+              <a:t>  ア </a:t>
+            </a:r>
+            <a:r>
+              <a:rPr b="1" sz="1700"/>
+              <a:t>ディファレント ファイル</a:t>
+            </a:r>
+            <a:r>
+              <a:rPr b="0" sz="1700"/>
+              <a:t> — アウト オブ ザ </a:t>
+            </a:r>
+            <a:r>
+              <a:rPr b="1" sz="1700"/>
+              <a:t>セイム ファイル</a:t>
+            </a:r>
+            <a:r>
+              <a:rPr b="0" sz="1700"/>
+              <a:t> オン ディスク。</a:t>
+            </a:r>
+          </a:p>
+          <a:p>
+            <a:r>
+              <a:rPr b="0" sz="1700"/>
+              <a:t>One vessel. Two objects. Two passwords. Two files.</a:t>
             </a:r>
           </a:p>
           <a:p>
@@ -6742,35 +6832,7 @@
             </a:r>
             <a:r>
               <a:rPr b="1" sz="1700"/>
-              <a:t>ノウ ヴァリッド エントリー ファウンド</a:t>
-            </a:r>
-            <a:r>
-              <a:rPr b="0" sz="1700"/>
-              <a:t>。</a:t>
-            </a:r>
-          </a:p>
-          <a:p>
-            <a:r>
-              <a:rPr b="0" sz="1700"/>
-              <a:t>The object is right. The password is not. Nothing opens.</a:t>
-            </a:r>
-          </a:p>
-          <a:p>
-            <a:r>
-              <a:rPr b="0" sz="1700"/>
-              <a:t>  ジ オブジェクト イズ </a:t>
-            </a:r>
-            <a:r>
-              <a:rPr b="1" sz="1700"/>
-              <a:t>ゥライト</a:t>
-            </a:r>
-            <a:r>
-              <a:rPr b="0" sz="1700"/>
-              <a:t>。 ザ パスワード イズ </a:t>
-            </a:r>
-            <a:r>
-              <a:rPr b="1" sz="1700"/>
-              <a:t>ナット</a:t>
+              <a:t>ワン ベッセル</a:t>
             </a:r>
             <a:r>
               <a:rPr b="0" sz="1700"/>
@@ -6778,75 +6840,7 @@
             </a:r>
             <a:r>
               <a:rPr b="1" sz="1700"/>
-              <a:t>ナッシング</a:t>
-            </a:r>
-            <a:r>
-              <a:rPr b="0" sz="1700"/>
-              <a:t> オウプンズ。</a:t>
-            </a:r>
-          </a:p>
-          <a:p>
-            <a:r>
-              <a:rPr b="0" sz="1700"/>
-              <a:t>Now Slot B's own password.</a:t>
-            </a:r>
-          </a:p>
-          <a:p>
-            <a:r>
-              <a:rPr b="0" sz="1700"/>
-              <a:t>  ナウ </a:t>
-            </a:r>
-            <a:r>
-              <a:rPr b="1" sz="1700"/>
-              <a:t>スロット ビーズ オウン</a:t>
-            </a:r>
-            <a:r>
-              <a:rPr b="0" sz="1700"/>
-              <a:t> パスワード。</a:t>
-            </a:r>
-          </a:p>
-          <a:p>
-            <a:r>
-              <a:rPr b="0" sz="1700"/>
-              <a:t>A different file — out of the same file on disk.</a:t>
-            </a:r>
-          </a:p>
-          <a:p>
-            <a:r>
-              <a:rPr b="0" sz="1700"/>
-              <a:t>  ア </a:t>
-            </a:r>
-            <a:r>
-              <a:rPr b="1" sz="1700"/>
-              <a:t>ディファレント ファイル</a:t>
-            </a:r>
-            <a:r>
-              <a:rPr b="0" sz="1700"/>
-              <a:t> — アウト オヴ ザ </a:t>
-            </a:r>
-            <a:r>
-              <a:rPr b="1" sz="1700"/>
-              <a:t>セイム ファイル</a:t>
-            </a:r>
-            <a:r>
-              <a:rPr b="0" sz="1700"/>
-              <a:t> オン ディスク。</a:t>
-            </a:r>
-          </a:p>
-          <a:p>
-            <a:r>
-              <a:rPr b="0" sz="1700"/>
-              <a:t>One vessel. Two objects. Two passwords. Two files.</a:t>
-            </a:r>
-          </a:p>
-          <a:p>
-            <a:r>
-              <a:rPr b="0" sz="1700"/>
-              <a:t>  </a:t>
-            </a:r>
-            <a:r>
-              <a:rPr b="1" sz="1700"/>
-              <a:t>ワン ヴェッセル</a:t>
+              <a:t>ツー オブジェクツ</a:t>
             </a:r>
             <a:r>
               <a:rPr b="0" sz="1700"/>
@@ -6854,7 +6848,7 @@
             </a:r>
             <a:r>
               <a:rPr b="1" sz="1700"/>
-              <a:t>トゥー オブジェクツ</a:t>
+              <a:t>ツー パスワーズ</a:t>
             </a:r>
             <a:r>
               <a:rPr b="0" sz="1700"/>
@@ -6862,15 +6856,7 @@
             </a:r>
             <a:r>
               <a:rPr b="1" sz="1700"/>
-              <a:t>トゥー パスワーズ</a:t>
-            </a:r>
-            <a:r>
-              <a:rPr b="0" sz="1700"/>
-              <a:t>。 </a:t>
-            </a:r>
-            <a:r>
-              <a:rPr b="1" sz="1700"/>
-              <a:t>トゥー ファイルズ</a:t>
+              <a:t>ツー ファイルズ</a:t>
             </a:r>
             <a:r>
               <a:rPr b="0" sz="1700"/>
@@ -6892,69 +6878,81 @@
           <a:p>
             <a:r>
               <a:rPr b="0" sz="1200"/>
-              <a:t>DO: 同じ Retrieve 画面のまま、物体A に持ち替える → 表示が変わるのを待つ</a:t>
+              <a:t>▶ SAY — 止めずに読み切る</a:t>
+            </a:r>
+          </a:p>
+          <a:p>
+            <a:r>
+              <a:rPr b="0" sz="1700"/>
+              <a:t>Now the other way around.</a:t>
+            </a:r>
+          </a:p>
+          <a:p>
+            <a:r>
+              <a:rPr b="0" sz="1700"/>
+              <a:t>  ナウ ジ </a:t>
+            </a:r>
+            <a:r>
+              <a:rPr b="1" sz="1700"/>
+              <a:t>アザー ウェイ</a:t>
+            </a:r>
+            <a:r>
+              <a:rPr b="0" sz="1700"/>
+              <a:t> アラウンド。</a:t>
+            </a:r>
+          </a:p>
+          <a:p>
+            <a:r>
+              <a:rPr b="0" sz="1700"/>
+              <a:t>I keep Slot B's password. I change the object back to A.</a:t>
+            </a:r>
+          </a:p>
+          <a:p>
+            <a:r>
+              <a:rPr b="0" sz="1700"/>
+              <a:t>  アイ </a:t>
+            </a:r>
+            <a:r>
+              <a:rPr b="1" sz="1700"/>
+              <a:t>キープ</a:t>
+            </a:r>
+            <a:r>
+              <a:rPr b="0" sz="1700"/>
+              <a:t> スロット ビーズ パスワード。 アイ </a:t>
+            </a:r>
+            <a:r>
+              <a:rPr b="1" sz="1700"/>
+              <a:t>チェインジ</a:t>
+            </a:r>
+            <a:r>
+              <a:rPr b="0" sz="1700"/>
+              <a:t> ジ オブジェクト バック トゥ </a:t>
+            </a:r>
+            <a:r>
+              <a:rPr b="1" sz="1700"/>
+              <a:t>エイ</a:t>
+            </a:r>
+            <a:r>
+              <a:rPr b="0" sz="1700"/>
+              <a:t>。</a:t>
             </a:r>
           </a:p>
           <a:p>
             <a:r>
               <a:rPr b="0" sz="1200"/>
-              <a:t>DO: → パスワードB を入力 → Open protected file → 失敗</a:t>
-            </a:r>
-          </a:p>
-          <a:p>
-            <a:r>
-              <a:rPr b="0" sz="1700"/>
-              <a:t>Now the other way around.</a:t>
-            </a:r>
-          </a:p>
-          <a:p>
-            <a:r>
-              <a:rPr b="0" sz="1700"/>
-              <a:t>  ナウ ジ </a:t>
-            </a:r>
-            <a:r>
-              <a:rPr b="1" sz="1700"/>
-              <a:t>アザー ウェイ</a:t>
-            </a:r>
-            <a:r>
-              <a:rPr b="0" sz="1700"/>
-              <a:t> アラウンド。</a:t>
-            </a:r>
-          </a:p>
-          <a:p>
-            <a:r>
-              <a:rPr b="0" sz="1700"/>
-              <a:t>I keep Slot B's password. I change the object back to A.</a:t>
-            </a:r>
-          </a:p>
-          <a:p>
-            <a:r>
-              <a:rPr b="0" sz="1700"/>
-              <a:t>  アイ </a:t>
-            </a:r>
-            <a:r>
-              <a:rPr b="1" sz="1700"/>
-              <a:t>キープ</a:t>
-            </a:r>
-            <a:r>
-              <a:rPr b="0" sz="1700"/>
-              <a:t> スロット ビーズ パスワード。 アイ </a:t>
-            </a:r>
-            <a:r>
-              <a:rPr b="1" sz="1700"/>
-              <a:t>チェインジ</a:t>
-            </a:r>
-            <a:r>
-              <a:rPr b="0" sz="1700"/>
-              <a:t> ジ オブジェクト バック トゥ </a:t>
-            </a:r>
-            <a:r>
-              <a:rPr b="1" sz="1700"/>
-              <a:t>エイ</a:t>
-            </a:r>
-            <a:r>
-              <a:rPr b="0" sz="1700"/>
-              <a:t>。</a:t>
+              <a:t>✋ DO — 黙って操作</a:t>
+            </a:r>
+          </a:p>
+          <a:p>
+            <a:r>
+              <a:rPr b="0" sz="1200"/>
+              <a:t>DO: 物体A に持ち替え → 表示が変わるのを待つ → パスワードB → Open protected file</a:t>
+            </a:r>
+          </a:p>
+          <a:p>
+            <a:r>
+              <a:rPr b="0" sz="1200"/>
+              <a:t>▶ THEN — 画面が変わってから</a:t>
             </a:r>
           </a:p>
           <a:p>
@@ -6974,7 +6972,7 @@
             </a:r>
             <a:r>
               <a:rPr b="0" sz="1700"/>
-              <a:t>。 ノウ ヴァリッド エントリー ファウンド。</a:t>
+              <a:t>。 ノー バリッド エントリー ファウンド。</a:t>
             </a:r>
           </a:p>
           <a:p>
@@ -6990,7 +6988,7 @@
             </a:r>
             <a:r>
               <a:rPr b="1" sz="1700"/>
-              <a:t>ゥロング オブジェクト</a:t>
+              <a:t>ロング オブジェクト</a:t>
             </a:r>
             <a:r>
               <a:rPr b="0" sz="1700"/>
@@ -7068,57 +7066,125 @@
           <a:p>
             <a:r>
               <a:rPr b="0" sz="1200"/>
+              <a:t>▶ SAY — 止めずに読み切る</a:t>
+            </a:r>
+          </a:p>
+          <a:p>
+            <a:r>
+              <a:rPr b="0" sz="1700"/>
+              <a:t>Now change the situation.</a:t>
+            </a:r>
+          </a:p>
+          <a:p>
+            <a:r>
+              <a:rPr b="0" sz="1700"/>
+              <a:t>  ナウ </a:t>
+            </a:r>
+            <a:r>
+              <a:rPr b="1" sz="1700"/>
+              <a:t>チェインジ</a:t>
+            </a:r>
+            <a:r>
+              <a:rPr b="0" sz="1700"/>
+              <a:t> ザ シチュエイション。</a:t>
+            </a:r>
+          </a:p>
+          <a:p>
+            <a:r>
+              <a:rPr b="0" sz="1700"/>
+              <a:t>Someone has the device. And they have me.</a:t>
+            </a:r>
+          </a:p>
+          <a:p>
+            <a:r>
+              <a:rPr b="0" sz="1700"/>
+              <a:t>  サムワン ハズ ザ </a:t>
+            </a:r>
+            <a:r>
+              <a:rPr b="1" sz="1700"/>
+              <a:t>デバイス</a:t>
+            </a:r>
+            <a:r>
+              <a:rPr b="0" sz="1700"/>
+              <a:t>。 アンド ゼイ ハブ </a:t>
+            </a:r>
+            <a:r>
+              <a:rPr b="1" sz="1700"/>
+              <a:t>ミー</a:t>
+            </a:r>
+            <a:r>
+              <a:rPr b="0" sz="1700"/>
+              <a:t>。</a:t>
+            </a:r>
+          </a:p>
+          <a:p>
+            <a:r>
+              <a:rPr b="0" sz="1700"/>
+              <a:t>'Give us the password.' So I do.</a:t>
+            </a:r>
+          </a:p>
+          <a:p>
+            <a:r>
+              <a:rPr b="0" sz="1700"/>
+              <a:t>  </a:t>
+            </a:r>
+            <a:r>
+              <a:rPr b="1" sz="1700"/>
+              <a:t>ギブ アス</a:t>
+            </a:r>
+            <a:r>
+              <a:rPr b="0" sz="1700"/>
+              <a:t> ザ パスワード。 ソー </a:t>
+            </a:r>
+            <a:r>
+              <a:rPr b="1" sz="1700"/>
+              <a:t>アイ ドゥー</a:t>
+            </a:r>
+            <a:r>
+              <a:rPr b="0" sz="1700"/>
+              <a:t>。</a:t>
+            </a:r>
+          </a:p>
+          <a:p>
+            <a:r>
+              <a:rPr b="0" sz="1200"/>
+              <a:t>✋ DO — 黙って操作</a:t>
+            </a:r>
+          </a:p>
+          <a:p>
+            <a:r>
+              <a:rPr b="0" sz="1200"/>
               <a:t>DO: 物体A → パスワードA → Open protected file（SCENE 5 と同一操作）</a:t>
             </a:r>
           </a:p>
           <a:p>
             <a:r>
               <a:rPr b="0" sz="1200"/>
-              <a:t>DO: ここは手を速く動かさない。語りで見せる場面。</a:t>
-            </a:r>
-          </a:p>
-          <a:p>
-            <a:r>
-              <a:rPr b="0" sz="1700"/>
-              <a:t>Now change the situation.</a:t>
-            </a:r>
-          </a:p>
-          <a:p>
-            <a:r>
-              <a:rPr b="0" sz="1700"/>
-              <a:t>  ナウ </a:t>
-            </a:r>
-            <a:r>
-              <a:rPr b="1" sz="1700"/>
-              <a:t>チェインジ</a:t>
-            </a:r>
-            <a:r>
-              <a:rPr b="0" sz="1700"/>
-              <a:t> ザ シチュエイション。</a:t>
-            </a:r>
-          </a:p>
-          <a:p>
-            <a:r>
-              <a:rPr b="0" sz="1700"/>
-              <a:t>Someone has the device. And they have me.</a:t>
-            </a:r>
-          </a:p>
-          <a:p>
-            <a:r>
-              <a:rPr b="0" sz="1700"/>
-              <a:t>  サムワン ハズ ザ </a:t>
-            </a:r>
-            <a:r>
-              <a:rPr b="1" sz="1700"/>
-              <a:t>デバイス</a:t>
-            </a:r>
-            <a:r>
-              <a:rPr b="0" sz="1700"/>
-              <a:t>。 アンド ゼイ ハヴ </a:t>
-            </a:r>
-            <a:r>
-              <a:rPr b="1" sz="1700"/>
-              <a:t>ミー</a:t>
+              <a:t>▶ THEN — 画面が変わってから</a:t>
+            </a:r>
+          </a:p>
+          <a:p>
+            <a:r>
+              <a:rPr b="0" sz="1700"/>
+              <a:t>They get a file. A real file, that really opens.</a:t>
+            </a:r>
+          </a:p>
+          <a:p>
+            <a:r>
+              <a:rPr b="0" sz="1700"/>
+              <a:t>  ゼイ ゲット ア ファイル。 ア </a:t>
+            </a:r>
+            <a:r>
+              <a:rPr b="1" sz="1700"/>
+              <a:t>リアル</a:t>
+            </a:r>
+            <a:r>
+              <a:rPr b="0" sz="1700"/>
+              <a:t> ファイル、 ザット </a:t>
+            </a:r>
+            <a:r>
+              <a:rPr b="1" sz="1700"/>
+              <a:t>リアリー オープンズ</a:t>
             </a:r>
             <a:r>
               <a:rPr b="0" sz="1700"/>
@@ -7128,7 +7194,7 @@
           <a:p>
             <a:r>
               <a:rPr b="0" sz="1700"/>
-              <a:t>'Give us the password.'</a:t>
+              <a:t>Nothing on this screen says there is another one.</a:t>
             </a:r>
           </a:p>
           <a:p>
@@ -7138,55 +7204,15 @@
             </a:r>
             <a:r>
               <a:rPr b="1" sz="1700"/>
-              <a:t>ギヴ アス</a:t>
-            </a:r>
-            <a:r>
-              <a:rPr b="0" sz="1700"/>
-              <a:t> ザ パスワード。</a:t>
-            </a:r>
-          </a:p>
-          <a:p>
-            <a:r>
-              <a:rPr b="0" sz="1700"/>
-              <a:t>So I do. Object A. Password A.</a:t>
-            </a:r>
-          </a:p>
-          <a:p>
-            <a:r>
-              <a:rPr b="0" sz="1700"/>
-              <a:t>  ソウ </a:t>
-            </a:r>
-            <a:r>
-              <a:rPr b="1" sz="1700"/>
-              <a:t>アイ ドゥー</a:t>
-            </a:r>
-            <a:r>
-              <a:rPr b="0" sz="1700"/>
-              <a:t>。 オブジェクト エイ。 パスワード エイ。</a:t>
-            </a:r>
-          </a:p>
-          <a:p>
-            <a:r>
-              <a:rPr b="0" sz="1700"/>
-              <a:t>They get a file. A real file, that really opens.</a:t>
-            </a:r>
-          </a:p>
-          <a:p>
-            <a:r>
-              <a:rPr b="0" sz="1700"/>
-              <a:t>  ゼイ ゲット ア ファイル。 ア </a:t>
-            </a:r>
-            <a:r>
-              <a:rPr b="1" sz="1700"/>
-              <a:t>リアル</a:t>
-            </a:r>
-            <a:r>
-              <a:rPr b="0" sz="1700"/>
-              <a:t> ファイル、 ザット </a:t>
-            </a:r>
-            <a:r>
-              <a:rPr b="1" sz="1700"/>
-              <a:t>リアリー オウプンズ</a:t>
+              <a:t>ナッシング</a:t>
+            </a:r>
+            <a:r>
+              <a:rPr b="0" sz="1700"/>
+              <a:t> オン ディス スクリーン セズ ゼアズ </a:t>
+            </a:r>
+            <a:r>
+              <a:rPr b="1" sz="1700"/>
+              <a:t>アナザー ワン</a:t>
             </a:r>
             <a:r>
               <a:rPr b="0" sz="1700"/>
@@ -7196,34 +7222,6 @@
           <a:p>
             <a:r>
               <a:rPr b="0" sz="1700"/>
-              <a:t>Nothing on this screen says there is another one.</a:t>
-            </a:r>
-          </a:p>
-          <a:p>
-            <a:r>
-              <a:rPr b="0" sz="1700"/>
-              <a:t>  </a:t>
-            </a:r>
-            <a:r>
-              <a:rPr b="1" sz="1700"/>
-              <a:t>ナッシング</a:t>
-            </a:r>
-            <a:r>
-              <a:rPr b="0" sz="1700"/>
-              <a:t> オン ディス スクリーン セズ ゼアズ </a:t>
-            </a:r>
-            <a:r>
-              <a:rPr b="1" sz="1700"/>
-              <a:t>アナザー ワン</a:t>
-            </a:r>
-            <a:r>
-              <a:rPr b="0" sz="1700"/>
-              <a:t>。</a:t>
-            </a:r>
-          </a:p>
-          <a:p>
-            <a:r>
-              <a:rPr b="0" sz="1700"/>
               <a:t>That is the whole design.</a:t>
             </a:r>
           </a:p>
@@ -7234,7 +7232,7 @@
             </a:r>
             <a:r>
               <a:rPr b="1" sz="1700"/>
-              <a:t>ホウル デザイン</a:t>
+              <a:t>ホール デザイン</a:t>
             </a:r>
             <a:r>
               <a:rPr b="0" sz="1700"/>
@@ -7256,25 +7254,301 @@
           <a:p>
             <a:r>
               <a:rPr b="0" sz="1200"/>
-              <a:t>DO: 同じ Retrieve 画面。消したい方の物体（物体B）をかざす</a:t>
+              <a:t>▶ SAY — 止めずに読み切る</a:t>
+            </a:r>
+          </a:p>
+          <a:p>
+            <a:r>
+              <a:rPr b="0" sz="1700"/>
+              <a:t>Worse case. They already know there is more.</a:t>
+            </a:r>
+          </a:p>
+          <a:p>
+            <a:r>
+              <a:rPr b="0" sz="1700"/>
+              <a:t>  </a:t>
+            </a:r>
+            <a:r>
+              <a:rPr b="1" sz="1700"/>
+              <a:t>ワース ケイス</a:t>
+            </a:r>
+            <a:r>
+              <a:rPr b="0" sz="1700"/>
+              <a:t>。 ゼイ オールレディ </a:t>
+            </a:r>
+            <a:r>
+              <a:rPr b="1" sz="1700"/>
+              <a:t>ノー</a:t>
+            </a:r>
+            <a:r>
+              <a:rPr b="0" sz="1700"/>
+              <a:t> ゼアズ </a:t>
+            </a:r>
+            <a:r>
+              <a:rPr b="1" sz="1700"/>
+              <a:t>モア</a:t>
+            </a:r>
+            <a:r>
+              <a:rPr b="0" sz="1700"/>
+              <a:t>。</a:t>
+            </a:r>
+          </a:p>
+          <a:p>
+            <a:r>
+              <a:rPr b="0" sz="1700"/>
+              <a:t>Same screen. Same object. Same field. Same button.</a:t>
+            </a:r>
+          </a:p>
+          <a:p>
+            <a:r>
+              <a:rPr b="0" sz="1700"/>
+              <a:t>  セイム スクリーン。 セイム オブジェクト。 セイム フィールド。 セイム ボタン。</a:t>
+            </a:r>
+          </a:p>
+          <a:p>
+            <a:r>
+              <a:rPr b="0" sz="1700"/>
+              <a:t>The only thing I change is which password I type.</a:t>
+            </a:r>
+          </a:p>
+          <a:p>
+            <a:r>
+              <a:rPr b="0" sz="1700"/>
+              <a:t>  ジ </a:t>
+            </a:r>
+            <a:r>
+              <a:rPr b="1" sz="1700"/>
+              <a:t>オンリー</a:t>
+            </a:r>
+            <a:r>
+              <a:rPr b="0" sz="1700"/>
+              <a:t> シング アイ チェインジ イズ </a:t>
+            </a:r>
+            <a:r>
+              <a:rPr b="1" sz="1700"/>
+              <a:t>ウィッチ パスワード</a:t>
+            </a:r>
+            <a:r>
+              <a:rPr b="0" sz="1700"/>
+              <a:t> アイ タイプ。</a:t>
             </a:r>
           </a:p>
           <a:p>
             <a:r>
               <a:rPr b="0" sz="1200"/>
-              <a:t>DO: → パスワード欄に Clearing password（破壊用）を入力 → Open protected file</a:t>
+              <a:t>✋ DO — 黙って操作</a:t>
             </a:r>
           </a:p>
           <a:p>
             <a:r>
               <a:rPr b="0" sz="1200"/>
-              <a:t>DO: → No valid entry found. と出る</a:t>
-            </a:r>
-          </a:p>
-          <a:p>
-            <a:r>
-              <a:rPr b="0" sz="1700"/>
-              <a:t>Worse case. They already know there is more.</a:t>
+              <a:t>DO: 物体B をかざす → パスワード欄に Clearing password → Open protected file</a:t>
+            </a:r>
+          </a:p>
+          <a:p>
+            <a:r>
+              <a:rPr b="0" sz="1200"/>
+              <a:t>▶ THEN — 画面が変わってから</a:t>
+            </a:r>
+          </a:p>
+          <a:p>
+            <a:r>
+              <a:rPr b="0" sz="1700"/>
+              <a:t>And it says — no valid entry found.</a:t>
+            </a:r>
+          </a:p>
+          <a:p>
+            <a:r>
+              <a:rPr b="0" sz="1700"/>
+              <a:t>  アンド イット セズ — </a:t>
+            </a:r>
+            <a:r>
+              <a:rPr b="1" sz="1700"/>
+              <a:t>ノー バリッド エントリー ファウンド</a:t>
+            </a:r>
+            <a:r>
+              <a:rPr b="0" sz="1700"/>
+              <a:t>。</a:t>
+            </a:r>
+          </a:p>
+          <a:p>
+            <a:r>
+              <a:rPr b="0" sz="1700"/>
+              <a:t>That is the same sentence you get from a typo.</a:t>
+            </a:r>
+          </a:p>
+          <a:p>
+            <a:r>
+              <a:rPr b="0" sz="1700"/>
+              <a:t>  ザッツ ザ </a:t>
+            </a:r>
+            <a:r>
+              <a:rPr b="1" sz="1700"/>
+              <a:t>セイム センテンス</a:t>
+            </a:r>
+            <a:r>
+              <a:rPr b="0" sz="1700"/>
+              <a:t> ユー ゲット フロム ア </a:t>
+            </a:r>
+            <a:r>
+              <a:rPr b="1" sz="1700"/>
+              <a:t>タイポ</a:t>
+            </a:r>
+            <a:r>
+              <a:rPr b="0" sz="1700"/>
+              <a:t>。</a:t>
+            </a:r>
+          </a:p>
+          <a:p>
+            <a:r>
+              <a:rPr b="0" sz="1700"/>
+              <a:t>But that entry is not locked. It is gone.</a:t>
+            </a:r>
+          </a:p>
+          <a:p>
+            <a:r>
+              <a:rPr b="0" sz="1700"/>
+              <a:t>  バット ザット エントリー イズ ナット </a:t>
+            </a:r>
+            <a:r>
+              <a:rPr b="1" sz="1700"/>
+              <a:t>ロックト</a:t>
+            </a:r>
+            <a:r>
+              <a:rPr b="0" sz="1700"/>
+              <a:t>。 イッツ </a:t>
+            </a:r>
+            <a:r>
+              <a:rPr b="1" sz="1700"/>
+              <a:t>ゴーン</a:t>
+            </a:r>
+            <a:r>
+              <a:rPr b="0" sz="1700"/>
+              <a:t>。</a:t>
+            </a:r>
+          </a:p>
+          <a:p>
+            <a:r>
+              <a:rPr b="0" sz="1700"/>
+              <a:t>The password they can compel is not the only one there is.</a:t>
+            </a:r>
+          </a:p>
+          <a:p>
+            <a:r>
+              <a:rPr b="0" sz="1700"/>
+              <a:t>  ザ パスワード ゼイ キャン </a:t>
+            </a:r>
+            <a:r>
+              <a:rPr b="1" sz="1700"/>
+              <a:t>コンペル</a:t>
+            </a:r>
+            <a:r>
+              <a:rPr b="0" sz="1700"/>
+              <a:t> イズ ナット ジ </a:t>
+            </a:r>
+            <a:r>
+              <a:rPr b="1" sz="1700"/>
+              <a:t>オンリー ワン</a:t>
+            </a:r>
+            <a:r>
+              <a:rPr b="0" sz="1700"/>
+              <a:t> ゼア イズ。</a:t>
+            </a:r>
+          </a:p>
+          <a:p>
+            <a:r>
+              <a:rPr b="0" sz="1700"/>
+              <a:t/>
+            </a:r>
+          </a:p>
+          <a:p>
+            <a:r>
+              <a:rPr b="0" sz="1200"/>
+              <a:t>── SCENE 10 · Nothing left to open（0:50）</a:t>
+            </a:r>
+          </a:p>
+          <a:p>
+            <a:r>
+              <a:rPr b="0" sz="1200"/>
+              <a:t>▶ SAY — 止めずに読み切る</a:t>
+            </a:r>
+          </a:p>
+          <a:p>
+            <a:r>
+              <a:rPr b="0" sz="1700"/>
+              <a:t>Let me prove that.</a:t>
+            </a:r>
+          </a:p>
+          <a:p>
+            <a:r>
+              <a:rPr b="0" sz="1700"/>
+              <a:t>  レット ミー </a:t>
+            </a:r>
+            <a:r>
+              <a:rPr b="1" sz="1700"/>
+              <a:t>プルーブ</a:t>
+            </a:r>
+            <a:r>
+              <a:rPr b="0" sz="1700"/>
+              <a:t> ザット。</a:t>
+            </a:r>
+          </a:p>
+          <a:p>
+            <a:r>
+              <a:rPr b="0" sz="1700"/>
+              <a:t>Object B. Slot B's real password. The correct way.</a:t>
+            </a:r>
+          </a:p>
+          <a:p>
+            <a:r>
+              <a:rPr b="0" sz="1700"/>
+              <a:t>  オブジェクト ビー。 スロット ビーズ </a:t>
+            </a:r>
+            <a:r>
+              <a:rPr b="1" sz="1700"/>
+              <a:t>リアル</a:t>
+            </a:r>
+            <a:r>
+              <a:rPr b="0" sz="1700"/>
+              <a:t> パスワード。 ザ </a:t>
+            </a:r>
+            <a:r>
+              <a:rPr b="1" sz="1700"/>
+              <a:t>コレクト ウェイ</a:t>
+            </a:r>
+            <a:r>
+              <a:rPr b="0" sz="1700"/>
+              <a:t>。</a:t>
+            </a:r>
+          </a:p>
+          <a:p>
+            <a:r>
+              <a:rPr b="0" sz="1200"/>
+              <a:t>✋ DO — 黙って操作</a:t>
+            </a:r>
+          </a:p>
+          <a:p>
+            <a:r>
+              <a:rPr b="0" sz="1200"/>
+              <a:t>DO: 物体B → パスワードB（正規）→ Open protected file → 何も出ない</a:t>
+            </a:r>
+          </a:p>
+          <a:p>
+            <a:r>
+              <a:rPr b="0" sz="1200"/>
+              <a:t>DO: 続けて 物体A → パスワードA → 開く（時計が押していれば口頭のみ）</a:t>
+            </a:r>
+          </a:p>
+          <a:p>
+            <a:r>
+              <a:rPr b="0" sz="1200"/>
+              <a:t>▶ THEN — 画面が変わってから</a:t>
+            </a:r>
+          </a:p>
+          <a:p>
+            <a:r>
+              <a:rPr b="0" sz="1700"/>
+              <a:t>Nothing. I cannot get it back either. That is not a bug.</a:t>
             </a:r>
           </a:p>
           <a:p>
@@ -7284,23 +7558,23 @@
             </a:r>
             <a:r>
               <a:rPr b="1" sz="1700"/>
-              <a:t>ワース ケイス</a:t>
-            </a:r>
-            <a:r>
-              <a:rPr b="0" sz="1700"/>
-              <a:t>。 ゼイ オールレディ </a:t>
-            </a:r>
-            <a:r>
-              <a:rPr b="1" sz="1700"/>
-              <a:t>ノウ</a:t>
-            </a:r>
-            <a:r>
-              <a:rPr b="0" sz="1700"/>
-              <a:t> ゼアズ </a:t>
-            </a:r>
-            <a:r>
-              <a:rPr b="1" sz="1700"/>
-              <a:t>モア</a:t>
+              <a:t>ナッシング</a:t>
+            </a:r>
+            <a:r>
+              <a:rPr b="0" sz="1700"/>
+              <a:t>。 アイ キャナット ゲット イット バック </a:t>
+            </a:r>
+            <a:r>
+              <a:rPr b="1" sz="1700"/>
+              <a:t>アイザー</a:t>
+            </a:r>
+            <a:r>
+              <a:rPr b="0" sz="1700"/>
+              <a:t>。 ザッツ </a:t>
+            </a:r>
+            <a:r>
+              <a:rPr b="1" sz="1700"/>
+              <a:t>ナット ア バグ</a:t>
             </a:r>
             <a:r>
               <a:rPr b="0" sz="1700"/>
@@ -7310,57 +7584,25 @@
           <a:p>
             <a:r>
               <a:rPr b="0" sz="1700"/>
-              <a:t>Same screen. Same object. Same field. Same button.</a:t>
-            </a:r>
-          </a:p>
-          <a:p>
-            <a:r>
-              <a:rPr b="0" sz="1700"/>
-              <a:t>  セイム スクリーン。 セイム オブジェクト。 セイム フィールド。 セイム ボタン。</a:t>
-            </a:r>
-          </a:p>
-          <a:p>
-            <a:r>
-              <a:rPr b="0" sz="1700"/>
-              <a:t>The only thing I change is which password I type.</a:t>
-            </a:r>
-          </a:p>
-          <a:p>
-            <a:r>
-              <a:rPr b="0" sz="1700"/>
-              <a:t>  ジ </a:t>
-            </a:r>
-            <a:r>
-              <a:rPr b="1" sz="1700"/>
-              <a:t>オンリー</a:t>
-            </a:r>
-            <a:r>
-              <a:rPr b="0" sz="1700"/>
-              <a:t> シング アイ チェインジ イズ </a:t>
-            </a:r>
-            <a:r>
-              <a:rPr b="1" sz="1700"/>
-              <a:t>ウィッチ パスワード</a:t>
-            </a:r>
-            <a:r>
-              <a:rPr b="0" sz="1700"/>
-              <a:t> アイ タイプ。</a:t>
-            </a:r>
-          </a:p>
-          <a:p>
-            <a:r>
-              <a:rPr b="0" sz="1700"/>
-              <a:t>And it says — no valid entry found.</a:t>
-            </a:r>
-          </a:p>
-          <a:p>
-            <a:r>
-              <a:rPr b="0" sz="1700"/>
-              <a:t>  アンド イット セズ — </a:t>
-            </a:r>
-            <a:r>
-              <a:rPr b="1" sz="1700"/>
-              <a:t>ノウ ヴァリッド エントリー ファウンド</a:t>
+              <a:t>And Slot A still opens, exactly as before.</a:t>
+            </a:r>
+          </a:p>
+          <a:p>
+            <a:r>
+              <a:rPr b="0" sz="1700"/>
+              <a:t>  アンド </a:t>
+            </a:r>
+            <a:r>
+              <a:rPr b="1" sz="1700"/>
+              <a:t>スロット エイ</a:t>
+            </a:r>
+            <a:r>
+              <a:rPr b="0" sz="1700"/>
+              <a:t> スティル オープンズ、 イグザクトリー アズ </a:t>
+            </a:r>
+            <a:r>
+              <a:rPr b="1" sz="1700"/>
+              <a:t>ビフォー</a:t>
             </a:r>
             <a:r>
               <a:rPr b="0" sz="1700"/>
@@ -7370,251 +7612,13 @@
           <a:p>
             <a:r>
               <a:rPr b="0" sz="1700"/>
-              <a:t>That is the same sentence you get from a typo.</a:t>
-            </a:r>
-          </a:p>
-          <a:p>
-            <a:r>
-              <a:rPr b="0" sz="1700"/>
-              <a:t>  ザッツ ザ </a:t>
-            </a:r>
-            <a:r>
-              <a:rPr b="1" sz="1700"/>
-              <a:t>セイム センテンス</a:t>
-            </a:r>
-            <a:r>
-              <a:rPr b="0" sz="1700"/>
-              <a:t> ユー ゲット フロム ア </a:t>
-            </a:r>
-            <a:r>
-              <a:rPr b="1" sz="1700"/>
-              <a:t>タイポ</a:t>
-            </a:r>
-            <a:r>
-              <a:rPr b="0" sz="1700"/>
-              <a:t>。</a:t>
-            </a:r>
-          </a:p>
-          <a:p>
-            <a:r>
-              <a:rPr b="0" sz="1700"/>
-              <a:t>But that entry is not locked. It is gone.</a:t>
-            </a:r>
-          </a:p>
-          <a:p>
-            <a:r>
-              <a:rPr b="0" sz="1700"/>
-              <a:t>  バット ザット エントリー イズ ナット </a:t>
-            </a:r>
-            <a:r>
-              <a:rPr b="1" sz="1700"/>
-              <a:t>ロックト</a:t>
-            </a:r>
-            <a:r>
-              <a:rPr b="0" sz="1700"/>
-              <a:t>。 イッツ </a:t>
-            </a:r>
-            <a:r>
-              <a:rPr b="1" sz="1700"/>
-              <a:t>ゴーン</a:t>
-            </a:r>
-            <a:r>
-              <a:rPr b="0" sz="1700"/>
-              <a:t>。</a:t>
-            </a:r>
-          </a:p>
-          <a:p>
-            <a:r>
-              <a:rPr b="0" sz="1700"/>
-              <a:t>The password they can compel is not the only one there is.</a:t>
-            </a:r>
-          </a:p>
-          <a:p>
-            <a:r>
-              <a:rPr b="0" sz="1700"/>
-              <a:t>  ザ パスワード ゼイ キャン </a:t>
-            </a:r>
-            <a:r>
-              <a:rPr b="1" sz="1700"/>
-              <a:t>コンペル</a:t>
-            </a:r>
-            <a:r>
-              <a:rPr b="0" sz="1700"/>
-              <a:t> イズ ナット ジ </a:t>
-            </a:r>
-            <a:r>
-              <a:rPr b="1" sz="1700"/>
-              <a:t>オンリー ワン</a:t>
-            </a:r>
-            <a:r>
-              <a:rPr b="0" sz="1700"/>
-              <a:t> ゼア イズ。</a:t>
-            </a:r>
-          </a:p>
-          <a:p>
-            <a:r>
-              <a:rPr b="0" sz="1700"/>
-              <a:t/>
-            </a:r>
-          </a:p>
-          <a:p>
-            <a:r>
-              <a:rPr b="0" sz="1200"/>
-              <a:t>── SCENE 10 · Nothing left to open — and what the tool will not claim（0:50）</a:t>
-            </a:r>
-          </a:p>
-          <a:p>
-            <a:r>
-              <a:rPr b="0" sz="1200"/>
-              <a:t>DO: 物体B → パスワードB（正規のもの）→ Open protected file → 何も出てこない</a:t>
-            </a:r>
-          </a:p>
-          <a:p>
-            <a:r>
-              <a:rPr b="0" sz="1200"/>
-              <a:t>DO: 続けて 物体A → パスワードA → Open protected file → 開く（時間が押していれば口頭のみ）</a:t>
-            </a:r>
-          </a:p>
-          <a:p>
-            <a:r>
-              <a:rPr b="0" sz="1200"/>
-              <a:t>DO: 最後の3行は操作なし。手を止めて、客席を見て言う。</a:t>
-            </a:r>
-          </a:p>
-          <a:p>
-            <a:r>
-              <a:rPr b="0" sz="1700"/>
-              <a:t>Let me prove that.</a:t>
-            </a:r>
-          </a:p>
-          <a:p>
-            <a:r>
-              <a:rPr b="0" sz="1700"/>
-              <a:t>  レット ミー </a:t>
-            </a:r>
-            <a:r>
-              <a:rPr b="1" sz="1700"/>
-              <a:t>プルーヴ</a:t>
-            </a:r>
-            <a:r>
-              <a:rPr b="0" sz="1700"/>
-              <a:t> ザット。</a:t>
-            </a:r>
-          </a:p>
-          <a:p>
-            <a:r>
-              <a:rPr b="0" sz="1700"/>
-              <a:t>Object B. Slot B's real password. The correct way.</a:t>
-            </a:r>
-          </a:p>
-          <a:p>
-            <a:r>
-              <a:rPr b="0" sz="1700"/>
-              <a:t>  オブジェクト ビー。 スロット ビーズ </a:t>
-            </a:r>
-            <a:r>
-              <a:rPr b="1" sz="1700"/>
-              <a:t>リアル</a:t>
-            </a:r>
-            <a:r>
-              <a:rPr b="0" sz="1700"/>
-              <a:t> パスワード。 ザ </a:t>
-            </a:r>
-            <a:r>
-              <a:rPr b="1" sz="1700"/>
-              <a:t>コゥレクト ウェイ</a:t>
-            </a:r>
-            <a:r>
-              <a:rPr b="0" sz="1700"/>
-              <a:t>。</a:t>
-            </a:r>
-          </a:p>
-          <a:p>
-            <a:r>
-              <a:rPr b="0" sz="1700"/>
-              <a:t>Nothing.</a:t>
-            </a:r>
-          </a:p>
-          <a:p>
-            <a:r>
-              <a:rPr b="0" sz="1700"/>
-              <a:t>  </a:t>
-            </a:r>
-            <a:r>
-              <a:rPr b="1" sz="1700"/>
-              <a:t>ナッシング</a:t>
-            </a:r>
-            <a:r>
-              <a:rPr b="0" sz="1700"/>
-              <a:t>。</a:t>
-            </a:r>
-          </a:p>
-          <a:p>
-            <a:r>
-              <a:rPr b="0" sz="1700"/>
-              <a:t>I cannot get it back either. That is not a bug.</a:t>
-            </a:r>
-          </a:p>
-          <a:p>
-            <a:r>
-              <a:rPr b="0" sz="1700"/>
-              <a:t>  アイ キャナット ゲット イット バック </a:t>
-            </a:r>
-            <a:r>
-              <a:rPr b="1" sz="1700"/>
-              <a:t>アイザー</a:t>
-            </a:r>
-            <a:r>
-              <a:rPr b="0" sz="1700"/>
-              <a:t>。 ザッツ </a:t>
-            </a:r>
-            <a:r>
-              <a:rPr b="1" sz="1700"/>
-              <a:t>ナット ア バグ</a:t>
-            </a:r>
-            <a:r>
-              <a:rPr b="0" sz="1700"/>
-              <a:t>。</a:t>
-            </a:r>
-          </a:p>
-          <a:p>
-            <a:r>
-              <a:rPr b="0" sz="1700"/>
-              <a:t>And Slot A still opens, exactly as before.</a:t>
-            </a:r>
-          </a:p>
-          <a:p>
-            <a:r>
-              <a:rPr b="0" sz="1700"/>
-              <a:t>  アンド </a:t>
-            </a:r>
-            <a:r>
-              <a:rPr b="1" sz="1700"/>
-              <a:t>スロット エイ</a:t>
-            </a:r>
-            <a:r>
-              <a:rPr b="0" sz="1700"/>
-              <a:t> スティル オウプンズ、 イグザクトリー アズ </a:t>
-            </a:r>
-            <a:r>
-              <a:rPr b="1" sz="1700"/>
-              <a:t>ビフォー</a:t>
-            </a:r>
-            <a:r>
-              <a:rPr b="0" sz="1700"/>
-              <a:t>。</a:t>
-            </a:r>
-          </a:p>
-          <a:p>
-            <a:r>
-              <a:rPr b="0" sz="1700"/>
               <a:t>One thing this tool will never tell you:</a:t>
             </a:r>
           </a:p>
           <a:p>
             <a:r>
               <a:rPr b="0" sz="1700"/>
-              <a:t>  ワン シング ディス ツール ウィル ネヴァー </a:t>
+              <a:t>  ワン シング ディス ツール ウィル ネバー </a:t>
             </a:r>
             <a:r>
               <a:rPr b="1" sz="1700"/>
@@ -7638,7 +7642,7 @@
             </a:r>
             <a:r>
               <a:rPr b="1" sz="1700"/>
-              <a:t>カヴァー ストーリー</a:t>
+              <a:t>カバー ストーリー</a:t>
             </a:r>
             <a:r>
               <a:rPr b="0" sz="1700"/>
@@ -7646,7 +7650,7 @@
             </a:r>
             <a:r>
               <a:rPr b="1" sz="1700"/>
-              <a:t>ビリーヴァブル</a:t>
+              <a:t>ビリーバブル</a:t>
             </a:r>
             <a:r>
               <a:rPr b="0" sz="1700"/>
@@ -7696,129 +7700,123 @@
           <a:p>
             <a:r>
               <a:rPr b="0" sz="1200"/>
+              <a:t>▶ SAY — 止めずに読み切る</a:t>
+            </a:r>
+          </a:p>
+          <a:p>
+            <a:r>
+              <a:rPr b="0" sz="1700"/>
+              <a:t>One file. Two objects. Two passwords.</a:t>
+            </a:r>
+          </a:p>
+          <a:p>
+            <a:r>
+              <a:rPr b="0" sz="1700"/>
+              <a:t>  </a:t>
+            </a:r>
+            <a:r>
+              <a:rPr b="1" sz="1700"/>
+              <a:t>ワン ファイル</a:t>
+            </a:r>
+            <a:r>
+              <a:rPr b="0" sz="1700"/>
+              <a:t>。 </a:t>
+            </a:r>
+            <a:r>
+              <a:rPr b="1" sz="1700"/>
+              <a:t>ツー オブジェクツ</a:t>
+            </a:r>
+            <a:r>
+              <a:rPr b="0" sz="1700"/>
+              <a:t>。 </a:t>
+            </a:r>
+            <a:r>
+              <a:rPr b="1" sz="1700"/>
+              <a:t>ツー パスワーズ</a:t>
+            </a:r>
+            <a:r>
+              <a:rPr b="0" sz="1700"/>
+              <a:t>。</a:t>
+            </a:r>
+          </a:p>
+          <a:p>
+            <a:r>
+              <a:rPr b="0" sz="1700"/>
+              <a:t>And a password that ends one, instead of opening it.</a:t>
+            </a:r>
+          </a:p>
+          <a:p>
+            <a:r>
+              <a:rPr b="0" sz="1700"/>
+              <a:t>  アンド ア パスワード ザット </a:t>
+            </a:r>
+            <a:r>
+              <a:rPr b="1" sz="1700"/>
+              <a:t>エンズ</a:t>
+            </a:r>
+            <a:r>
+              <a:rPr b="0" sz="1700"/>
+              <a:t> ワン、 インステッド オブ </a:t>
+            </a:r>
+            <a:r>
+              <a:rPr b="1" sz="1700"/>
+              <a:t>オープニング</a:t>
+            </a:r>
+            <a:r>
+              <a:rPr b="0" sz="1700"/>
+              <a:t> イット。</a:t>
+            </a:r>
+          </a:p>
+          <a:p>
+            <a:r>
+              <a:rPr b="0" sz="1700"/>
+              <a:t>On real hardware. Come and try it at the table.</a:t>
+            </a:r>
+          </a:p>
+          <a:p>
+            <a:r>
+              <a:rPr b="0" sz="1700"/>
+              <a:t>  オン </a:t>
+            </a:r>
+            <a:r>
+              <a:rPr b="1" sz="1700"/>
+              <a:t>リアル ハードウェア</a:t>
+            </a:r>
+            <a:r>
+              <a:rPr b="0" sz="1700"/>
+              <a:t>。 カム アンド </a:t>
+            </a:r>
+            <a:r>
+              <a:rPr b="1" sz="1700"/>
+              <a:t>トライ イット</a:t>
+            </a:r>
+            <a:r>
+              <a:rPr b="0" sz="1700"/>
+              <a:t> アット ザ テイブル。</a:t>
+            </a:r>
+          </a:p>
+          <a:p>
+            <a:r>
+              <a:rPr b="0" sz="1200"/>
+              <a:t>✋ DO — 黙って操作</a:t>
+            </a:r>
+          </a:p>
+          <a:p>
+            <a:r>
+              <a:rPr b="0" sz="1200"/>
               <a:t>DO: スライド（Slide 25）へ戻す。</a:t>
             </a:r>
           </a:p>
           <a:p>
             <a:r>
               <a:rPr b="0" sz="1700"/>
-              <a:t>One file. Two objects. Two passwords.</a:t>
-            </a:r>
-          </a:p>
-          <a:p>
-            <a:r>
-              <a:rPr b="0" sz="1700"/>
-              <a:t>  </a:t>
-            </a:r>
-            <a:r>
-              <a:rPr b="1" sz="1700"/>
-              <a:t>ワン ファイル</a:t>
-            </a:r>
-            <a:r>
-              <a:rPr b="0" sz="1700"/>
-              <a:t>。 </a:t>
-            </a:r>
-            <a:r>
-              <a:rPr b="1" sz="1700"/>
-              <a:t>トゥー オブジェクツ</a:t>
-            </a:r>
-            <a:r>
-              <a:rPr b="0" sz="1700"/>
-              <a:t>。 </a:t>
-            </a:r>
-            <a:r>
-              <a:rPr b="1" sz="1700"/>
-              <a:t>トゥー パスワーズ</a:t>
-            </a:r>
-            <a:r>
-              <a:rPr b="0" sz="1700"/>
-              <a:t>。</a:t>
-            </a:r>
-          </a:p>
-          <a:p>
-            <a:r>
-              <a:rPr b="0" sz="1700"/>
-              <a:t>And a password that ends one, instead of opening it.</a:t>
-            </a:r>
-          </a:p>
-          <a:p>
-            <a:r>
-              <a:rPr b="0" sz="1700"/>
-              <a:t>  アンド ア パスワード ザット </a:t>
-            </a:r>
-            <a:r>
-              <a:rPr b="1" sz="1700"/>
-              <a:t>エンズ</a:t>
-            </a:r>
-            <a:r>
-              <a:rPr b="0" sz="1700"/>
-              <a:t> ワン、 インステッド オヴ </a:t>
-            </a:r>
-            <a:r>
-              <a:rPr b="1" sz="1700"/>
-              <a:t>オウプニング</a:t>
-            </a:r>
-            <a:r>
-              <a:rPr b="0" sz="1700"/>
-              <a:t> イット。</a:t>
-            </a:r>
-          </a:p>
-          <a:p>
-            <a:r>
-              <a:rPr b="0" sz="1700"/>
-              <a:t>On real hardware. Come and try it at the table.</a:t>
-            </a:r>
-          </a:p>
-          <a:p>
-            <a:r>
-              <a:rPr b="0" sz="1700"/>
-              <a:t>  オン </a:t>
-            </a:r>
-            <a:r>
-              <a:rPr b="1" sz="1700"/>
-              <a:t>リアル ハードウェア</a:t>
-            </a:r>
-            <a:r>
-              <a:rPr b="0" sz="1700"/>
-              <a:t>。 カム アンド </a:t>
-            </a:r>
-            <a:r>
-              <a:rPr b="1" sz="1700"/>
-              <a:t>トライ イット</a:t>
-            </a:r>
-            <a:r>
-              <a:rPr b="0" sz="1700"/>
-              <a:t> アット ザ テイブル。</a:t>
-            </a:r>
-          </a:p>
-          <a:p>
-            <a:r>
-              <a:rPr b="0" sz="1700"/>
               <a:t/>
             </a:r>
           </a:p>
           <a:p>
             <a:r>
               <a:rPr b="0" sz="1200"/>
-              <a:t>── フォールバック（録画に切り替えたとき）</a:t>
-            </a:r>
-          </a:p>
-          <a:p>
-            <a:r>
-              <a:rPr b="0" sz="1200"/>
-              <a:t>JA: 「1つの容器・2つの物体・2つのパスワード・そして開くのではなく終わらせるパスワード」を口頭で辿る。個別シーンは最大15秒で見切り、止まらず前進。</a:t>
-            </a:r>
-          </a:p>
-          <a:p>
-            <a:r>
-              <a:rPr b="0" sz="1700"/>
-              <a:t/>
-            </a:r>
-          </a:p>
-          <a:p>
-            <a:r>
-              <a:rPr b="0" sz="1200"/>
-              <a:t>JA: 26:00 到達で SCENE 5 と SCENE 8 を落とす。SCENE 1・6・7・9・10 は何があっても実機で見せる。Audit と Silent Standby は実演しない — Audit は卓上デモと質疑の持ち札に回す。</a:t>
+              <a:t>JA: 26:00 到達で SCENE 5 と SCENE 8 を落とす。SCENE 1・6・7・9・10 は何があっても実機で見せる。録画に切り替えたときは「1つの容器・2つの物体・2つのパスワード・そして開くのではなく終わらせるパスワード」を口頭で辿る。</a:t>
             </a:r>
           </a:p>
         </p:txBody>
@@ -7973,21 +7971,29 @@
           <a:p>
             <a:r>
               <a:rPr b="0" sz="1700"/>
-              <a:t>The first run sets up a virtual environment and opens the console.</a:t>
-            </a:r>
-          </a:p>
-          <a:p>
-            <a:r>
-              <a:rPr b="0" sz="1700"/>
-              <a:t>  ザ ファースト ラン セッツ アップ ア </a:t>
-            </a:r>
-            <a:r>
-              <a:rPr b="1" sz="1700"/>
-              <a:t>ヴァーチュアル インヴァイロンメント</a:t>
-            </a:r>
-            <a:r>
-              <a:rPr b="0" sz="1700"/>
-              <a:t> アンド オウプンズ ザ コンソウル。</a:t>
+              <a:t>The first run sets things up and opens the console.</a:t>
+            </a:r>
+          </a:p>
+          <a:p>
+            <a:r>
+              <a:rPr b="0" sz="1700"/>
+              <a:t>  ザ ファースト ラン </a:t>
+            </a:r>
+            <a:r>
+              <a:rPr b="1" sz="1700"/>
+              <a:t>セッツ シングズ アップ</a:t>
+            </a:r>
+            <a:r>
+              <a:rPr b="0" sz="1700"/>
+              <a:t> アンド オープンズ ザ </a:t>
+            </a:r>
+            <a:r>
+              <a:rPr b="1" sz="1700"/>
+              <a:t>コンソール</a:t>
+            </a:r>
+            <a:r>
+              <a:rPr b="0" sz="1700"/>
+              <a:t>。</a:t>
             </a:r>
           </a:p>
           <a:p>
@@ -8011,7 +8017,7 @@
             </a:r>
             <a:r>
               <a:rPr b="1" sz="1700"/>
-              <a:t>アパッチ トゥー ポイント ズィーロウ</a:t>
+              <a:t>アパッチ トゥー ポイント ゼロ</a:t>
             </a:r>
             <a:r>
               <a:rPr b="0" sz="1700"/>
@@ -8027,7 +8033,7 @@
           <a:p>
             <a:r>
               <a:rPr b="0" sz="1700"/>
-              <a:t>  イヴァリュエイト イット </a:t>
+              <a:t>  イバリュエイト イット </a:t>
             </a:r>
             <a:r>
               <a:rPr b="1" sz="1700"/>
@@ -8204,7 +8210,7 @@
             </a:r>
             <a:r>
               <a:rPr b="1" sz="1700"/>
-              <a:t>ローカル オウンリー</a:t>
+              <a:t>ローカル オンリー</a:t>
             </a:r>
             <a:r>
               <a:rPr b="0" sz="1700"/>
@@ -8236,19 +8242,51 @@
           <a:p>
             <a:r>
               <a:rPr b="0" sz="1700"/>
-              <a:t>  ザ コウド、 ザ スレット モデル、 アンド ジ アーキテクチャー アー オール オン </a:t>
-            </a:r>
-            <a:r>
-              <a:rPr b="1" sz="1700"/>
-              <a:t>ギットハブ</a:t>
-            </a:r>
-            <a:r>
-              <a:rPr b="0" sz="1700"/>
-              <a:t>、 アット </a:t>
-            </a:r>
-            <a:r>
-              <a:rPr b="1" sz="1700"/>
-              <a:t>ゼロワン ラビット</a:t>
+              <a:t>  ザ コード、 ザ スレット モデル、 アンド ジ アーキテクチャー アー オール オン ギットハブ、 アット ゼロワン ラビット。</a:t>
+            </a:r>
+          </a:p>
+          <a:p>
+            <a:r>
+              <a:rPr b="0" sz="1700"/>
+              <a:t>The device is right here on the table.</a:t>
+            </a:r>
+          </a:p>
+          <a:p>
+            <a:r>
+              <a:rPr b="0" sz="1700"/>
+              <a:t>  ザ デバイス イズ </a:t>
+            </a:r>
+            <a:r>
+              <a:rPr b="1" sz="1700"/>
+              <a:t>ライト ヒア</a:t>
+            </a:r>
+            <a:r>
+              <a:rPr b="0" sz="1700"/>
+              <a:t> オン ザ テイブル。</a:t>
+            </a:r>
+          </a:p>
+          <a:p>
+            <a:r>
+              <a:rPr b="0" sz="1700"/>
+              <a:t>Come and try it. And please — come and break it.</a:t>
+            </a:r>
+          </a:p>
+          <a:p>
+            <a:r>
+              <a:rPr b="0" sz="1700"/>
+              <a:t>  </a:t>
+            </a:r>
+            <a:r>
+              <a:rPr b="1" sz="1700"/>
+              <a:t>カム アンド トライ イット</a:t>
+            </a:r>
+            <a:r>
+              <a:rPr b="0" sz="1700"/>
+              <a:t>。 アンド プリーズ — </a:t>
+            </a:r>
+            <a:r>
+              <a:rPr b="1" sz="1700"/>
+              <a:t>カム アンド ブレイク イット</a:t>
             </a:r>
             <a:r>
               <a:rPr b="0" sz="1700"/>
@@ -8258,61 +8296,13 @@
           <a:p>
             <a:r>
               <a:rPr b="0" sz="1700"/>
-              <a:t>The device is right here on the table.</a:t>
-            </a:r>
-          </a:p>
-          <a:p>
-            <a:r>
-              <a:rPr b="0" sz="1700"/>
-              <a:t>  ザ デバイス イズ </a:t>
-            </a:r>
-            <a:r>
-              <a:rPr b="1" sz="1700"/>
-              <a:t>ゥライト ヒア</a:t>
-            </a:r>
-            <a:r>
-              <a:rPr b="0" sz="1700"/>
-              <a:t> オン ザ テイブル。</a:t>
-            </a:r>
-          </a:p>
-          <a:p>
-            <a:r>
-              <a:rPr b="0" sz="1700"/>
-              <a:t>Come and try it. And please — come and break it.</a:t>
-            </a:r>
-          </a:p>
-          <a:p>
-            <a:r>
-              <a:rPr b="0" sz="1700"/>
-              <a:t>  </a:t>
-            </a:r>
-            <a:r>
-              <a:rPr b="1" sz="1700"/>
-              <a:t>カム アンド トライ イット</a:t>
-            </a:r>
-            <a:r>
-              <a:rPr b="0" sz="1700"/>
-              <a:t>。 アンド プリーズ — </a:t>
-            </a:r>
-            <a:r>
-              <a:rPr b="1" sz="1700"/>
-              <a:t>カム アンド ブレイク イット</a:t>
-            </a:r>
-            <a:r>
-              <a:rPr b="0" sz="1700"/>
-              <a:t>。</a:t>
-            </a:r>
-          </a:p>
-          <a:p>
-            <a:r>
-              <a:rPr b="0" sz="1700"/>
               <a:t>I’ve got time for questions.”</a:t>
             </a:r>
           </a:p>
           <a:p>
             <a:r>
               <a:rPr b="0" sz="1700"/>
-              <a:t>  アイヴ ゴット </a:t>
+              <a:t>  アイブ ゴット </a:t>
             </a:r>
             <a:r>
               <a:rPr b="1" sz="1700"/>
@@ -8562,7 +8552,7 @@
             </a:r>
             <a:r>
               <a:rPr b="1" sz="1700"/>
-              <a:t>ライヴ デモ</a:t>
+              <a:t>ライブ デモ</a:t>
             </a:r>
             <a:r>
               <a:rPr b="0" sz="1700"/>
@@ -8840,7 +8830,7 @@
           <a:p>
             <a:r>
               <a:rPr b="0" sz="1700"/>
-              <a:t>  ユー オウプン イット </a:t>
+              <a:t>  ユー オープン イット </a:t>
             </a:r>
             <a:r>
               <a:rPr b="1" sz="1700"/>
@@ -8852,7 +8842,7 @@
             </a:r>
             <a:r>
               <a:rPr b="1" sz="1700"/>
-              <a:t>エヴリシング</a:t>
+              <a:t>エブリシング</a:t>
             </a:r>
             <a:r>
               <a:rPr b="0" sz="1700"/>
@@ -8872,7 +8862,7 @@
             </a:r>
             <a:r>
               <a:rPr b="1" sz="1700"/>
-              <a:t>オウヴァー ディスクロージャー</a:t>
+              <a:t>オーバー ディスクロージャー</a:t>
             </a:r>
             <a:r>
               <a:rPr b="0" sz="1700"/>
@@ -9050,11 +9040,11 @@
             </a:r>
             <a:r>
               <a:rPr b="0" sz="1700"/>
-              <a:t>、 ウィズ フルディスク インクリプション — アンド ユー ハンド オウヴァー </a:t>
-            </a:r>
-            <a:r>
-              <a:rPr b="1" sz="1700"/>
-              <a:t>エヴリシング</a:t>
+              <a:t>、 ウィズ フルディスク インクリプション — アンド ユー ハンド オーバー </a:t>
+            </a:r>
+            <a:r>
+              <a:rPr b="1" sz="1700"/>
+              <a:t>エブリシング</a:t>
             </a:r>
             <a:r>
               <a:rPr b="0" sz="1700"/>
@@ -9094,7 +9084,7 @@
             </a:r>
             <a:r>
               <a:rPr b="1" sz="1700"/>
-              <a:t>ヴィジブル</a:t>
+              <a:t>ビジブル</a:t>
             </a:r>
             <a:r>
               <a:rPr b="0" sz="1700"/>
@@ -9126,7 +9116,7 @@
             </a:r>
             <a:r>
               <a:rPr b="0" sz="1700"/>
-              <a:t>。 ヴェリー ディファレント </a:t>
+              <a:t>。 ベリー ディファレント </a:t>
             </a:r>
             <a:r>
               <a:rPr b="1" sz="1700"/>
@@ -9266,17 +9256,17 @@
           <a:p>
             <a:r>
               <a:rPr b="0" sz="1700"/>
-              <a:t>Phasmid is a field-evaluation research prototype for disclosure control.</a:t>
-            </a:r>
-          </a:p>
-          <a:p>
-            <a:r>
-              <a:rPr b="0" sz="1700"/>
-              <a:t>  ファズミッド イズ ア フィールド イヴァリュエイション リサーチ </a:t>
-            </a:r>
-            <a:r>
-              <a:rPr b="1" sz="1700"/>
-              <a:t>プロウトタイプ</a:t>
+              <a:t>Phasmid is a research prototype for disclosure control.</a:t>
+            </a:r>
+          </a:p>
+          <a:p>
+            <a:r>
+              <a:rPr b="0" sz="1700"/>
+              <a:t>  ファズミッド イズ ア </a:t>
+            </a:r>
+            <a:r>
+              <a:rPr b="1" sz="1700"/>
+              <a:t>リサーチ プロトタイプ</a:t>
             </a:r>
             <a:r>
               <a:rPr b="0" sz="1700"/>
@@ -9296,7 +9286,7 @@
             </a:r>
             <a:r>
               <a:rPr b="1" sz="1700"/>
-              <a:t>ローカル オウンリー</a:t>
+              <a:t>ローカル オンリー</a:t>
             </a:r>
             <a:r>
               <a:rPr b="0" sz="1700"/>
@@ -9314,41 +9304,41 @@
           <a:p>
             <a:r>
               <a:rPr b="0" sz="1700"/>
-              <a:t>And it is not a replacement for audited full-disk encryption.</a:t>
-            </a:r>
-          </a:p>
-          <a:p>
-            <a:r>
-              <a:rPr b="0" sz="1700"/>
-              <a:t>  アンド イット イズ </a:t>
-            </a:r>
-            <a:r>
-              <a:rPr b="1" sz="1700"/>
-              <a:t>ナット</a:t>
-            </a:r>
-            <a:r>
-              <a:rPr b="0" sz="1700"/>
-              <a:t> ア リプレイスメント フォー オーディティッド フルディスク インクリプション。</a:t>
-            </a:r>
-          </a:p>
-          <a:p>
-            <a:r>
-              <a:rPr b="0" sz="1700"/>
-              <a:t>Not hardware-backed keys.</a:t>
-            </a:r>
-          </a:p>
-          <a:p>
-            <a:r>
-              <a:rPr b="0" sz="1700"/>
-              <a:t>  </a:t>
-            </a:r>
-            <a:r>
-              <a:rPr b="1" sz="1700"/>
-              <a:t>ナット</a:t>
-            </a:r>
-            <a:r>
-              <a:rPr b="0" sz="1700"/>
-              <a:t> ハードウェアバックト キーズ。</a:t>
+              <a:t>And it does not replace audited full-disk encryption.</a:t>
+            </a:r>
+          </a:p>
+          <a:p>
+            <a:r>
+              <a:rPr b="0" sz="1700"/>
+              <a:t>  アンド イット ダズ </a:t>
+            </a:r>
+            <a:r>
+              <a:rPr b="1" sz="1700"/>
+              <a:t>ナット リプレイス</a:t>
+            </a:r>
+            <a:r>
+              <a:rPr b="0" sz="1700"/>
+              <a:t> オーディテッド フルディスク インクリプション。</a:t>
+            </a:r>
+          </a:p>
+          <a:p>
+            <a:r>
+              <a:rPr b="0" sz="1700"/>
+              <a:t>Not keys held in hardware.</a:t>
+            </a:r>
+          </a:p>
+          <a:p>
+            <a:r>
+              <a:rPr b="0" sz="1700"/>
+              <a:t>  ナット キーズ </a:t>
+            </a:r>
+            <a:r>
+              <a:rPr b="1" sz="1700"/>
+              <a:t>ヘルド イン ハードウェア</a:t>
+            </a:r>
+            <a:r>
+              <a:rPr b="0" sz="1700"/>
+              <a:t>。</a:t>
             </a:r>
           </a:p>
           <a:p>
@@ -9582,7 +9572,7 @@
             </a:r>
             <a:r>
               <a:rPr b="0" sz="1700"/>
-              <a:t> イズ ワット ザ ヴィジブル サーフィス ショウズ。</a:t>
+              <a:t> イズ ワット ザ ビジブル サーフィス ショウズ。</a:t>
             </a:r>
           </a:p>
           <a:p>
@@ -9594,23 +9584,7 @@
           <a:p>
             <a:r>
               <a:rPr b="0" sz="1700"/>
-              <a:t>  </a:t>
-            </a:r>
-            <a:r>
-              <a:rPr b="1" sz="1700"/>
-              <a:t>プローザブル</a:t>
-            </a:r>
-            <a:r>
-              <a:rPr b="0" sz="1700"/>
-              <a:t>。 </a:t>
-            </a:r>
-            <a:r>
-              <a:rPr b="1" sz="1700"/>
-              <a:t>オーディナリー</a:t>
-            </a:r>
-            <a:r>
-              <a:rPr b="0" sz="1700"/>
-              <a:t>。 ディスクロウズド アンダー プレッシャー。</a:t>
+              <a:t>  プローザブル。 オーディナリー。 ディスクローズド アンダー プレッシャー。</a:t>
             </a:r>
           </a:p>
           <a:p>
@@ -9630,7 +9604,7 @@
             </a:r>
             <a:r>
               <a:rPr b="0" sz="1700"/>
-              <a:t> イズ プロテクティッド ローカル ステイト。 イット ステイズ </a:t>
+              <a:t> イズ プロテクテッド ローカル ステイト。 イット ステイズ </a:t>
             </a:r>
             <a:r>
               <a:rPr b="1" sz="1700"/>
@@ -9638,7 +9612,7 @@
             </a:r>
             <a:r>
               <a:rPr b="0" sz="1700"/>
-              <a:t> ザ ヴィジブル パス。</a:t>
+              <a:t> ザ ビジブル パス。</a:t>
             </a:r>
           </a:p>
           <a:p>
@@ -9718,7 +9692,7 @@
             </a:r>
             <a:r>
               <a:rPr b="0" sz="1700"/>
-              <a:t> オン ザ ヴィジブル パス。</a:t>
+              <a:t> オン ザ ビジブル パス。</a:t>
             </a:r>
           </a:p>
           <a:p>
@@ -9850,7 +9824,7 @@
           <a:p>
             <a:r>
               <a:rPr b="0" sz="1700"/>
-              <a:t>Five adversaries in scope.</a:t>
+              <a:t>Five attackers in scope.</a:t>
             </a:r>
           </a:p>
           <a:p>
@@ -9860,11 +9834,11 @@
             </a:r>
             <a:r>
               <a:rPr b="1" sz="1700"/>
-              <a:t>ファイヴ</a:t>
-            </a:r>
-            <a:r>
-              <a:rPr b="0" sz="1700"/>
-              <a:t> アドヴァサリーズ イン スコープ。</a:t>
+              <a:t>ファイブ アタッカーズ</a:t>
+            </a:r>
+            <a:r>
+              <a:rPr b="0" sz="1700"/>
+              <a:t> イン スコープ。</a:t>
             </a:r>
           </a:p>
           <a:p>
@@ -9876,23 +9850,31 @@
           <a:p>
             <a:r>
               <a:rPr b="0" sz="1700"/>
-              <a:t>  ア フィジカル キャプター。 ア パッシヴ オブザーヴァー。 ア ローカル アクティヴ アタッカー。</a:t>
-            </a:r>
-          </a:p>
-          <a:p>
-            <a:r>
-              <a:rPr b="0" sz="1700"/>
-              <a:t>A local-network attacker. And a coercing authority.</a:t>
-            </a:r>
-          </a:p>
-          <a:p>
-            <a:r>
-              <a:rPr b="0" sz="1700"/>
-              <a:t>  ア ローカルネットワーク アタッカー。 アンド ア </a:t>
-            </a:r>
-            <a:r>
-              <a:rPr b="1" sz="1700"/>
-              <a:t>コアーシング オーソリティ</a:t>
+              <a:t>  ア フィジカル キャプター。 ア パッシブ オブザーバー。 ア ローカル アクティブ アタッカー。</a:t>
+            </a:r>
+          </a:p>
+          <a:p>
+            <a:r>
+              <a:rPr b="0" sz="1700"/>
+              <a:t>An attacker on the local network. And someone who can force you.</a:t>
+            </a:r>
+          </a:p>
+          <a:p>
+            <a:r>
+              <a:rPr b="0" sz="1700"/>
+              <a:t>  アン アタッカー オン ザ </a:t>
+            </a:r>
+            <a:r>
+              <a:rPr b="1" sz="1700"/>
+              <a:t>ローカル ネットワーク</a:t>
+            </a:r>
+            <a:r>
+              <a:rPr b="0" sz="1700"/>
+              <a:t>。 アンド </a:t>
+            </a:r>
+            <a:r>
+              <a:rPr b="1" sz="1700"/>
+              <a:t>サムワン フー キャン フォース ユー</a:t>
             </a:r>
             <a:r>
               <a:rPr b="0" sz="1700"/>
@@ -9908,11 +9890,11 @@
           <a:p>
             <a:r>
               <a:rPr b="0" sz="1700"/>
-              <a:t>  アンド ファイヴ エクスプリシットリー </a:t>
-            </a:r>
-            <a:r>
-              <a:rPr b="1" sz="1700"/>
-              <a:t>アウト オヴ スコープ</a:t>
+              <a:t>  アンド ファイブ エクスプリシットリー </a:t>
+            </a:r>
+            <a:r>
+              <a:rPr b="1" sz="1700"/>
+              <a:t>アウト オブ スコープ</a:t>
             </a:r>
             <a:r>
               <a:rPr b="0" sz="1700"/>
@@ -9922,13 +9904,21 @@
           <a:p>
             <a:r>
               <a:rPr b="0" sz="1700"/>
-              <a:t>A compromised kernel. Hardware implants. Remote attackers.</a:t>
-            </a:r>
-          </a:p>
-          <a:p>
-            <a:r>
-              <a:rPr b="0" sz="1700"/>
-              <a:t>  ア コンプロマイズド カーネル。 ハードウェア インプランツ。 リモウト アタッカーズ。</a:t>
+              <a:t>A kernel already taken over. Hardware implants. Remote attackers.</a:t>
+            </a:r>
+          </a:p>
+          <a:p>
+            <a:r>
+              <a:rPr b="0" sz="1700"/>
+              <a:t>  ア カーネル オールレディ </a:t>
+            </a:r>
+            <a:r>
+              <a:rPr b="1" sz="1700"/>
+              <a:t>テイクン オーバー</a:t>
+            </a:r>
+            <a:r>
+              <a:rPr b="0" sz="1700"/>
+              <a:t>。 ハードウェア インプランツ。 リモート アタッカーズ。</a:t>
             </a:r>
           </a:p>
           <a:p>
@@ -9960,23 +9950,7 @@
           <a:p>
             <a:r>
               <a:rPr b="0" sz="1700"/>
-              <a:t>  イフ ザ ホウスト イズ </a:t>
-            </a:r>
-            <a:r>
-              <a:rPr b="1" sz="1700"/>
-              <a:t>オウンド</a:t>
-            </a:r>
-            <a:r>
-              <a:rPr b="0" sz="1700"/>
-              <a:t>、 ノウ ユーザースペイス ツール </a:t>
-            </a:r>
-            <a:r>
-              <a:rPr b="1" sz="1700"/>
-              <a:t>セイヴズ</a:t>
-            </a:r>
-            <a:r>
-              <a:rPr b="0" sz="1700"/>
-              <a:t> ユー。</a:t>
+              <a:t>  イフ ザ ホスト イズ オーンド、 ノウ ユーザースペイス ツール セイブズ ユー。</a:t>
             </a:r>
           </a:p>
           <a:p>
@@ -10118,7 +10092,7 @@
             </a:r>
             <a:r>
               <a:rPr b="1" sz="1700"/>
-              <a:t>ハンドウェイヴ</a:t>
+              <a:t>ハンドウェイブ</a:t>
             </a:r>
             <a:r>
               <a:rPr b="0" sz="1700"/>
@@ -10176,13 +10150,21 @@
           <a:p>
             <a:r>
               <a:rPr b="0" sz="1700"/>
-              <a:t>Timing side-channels. Object-cue spoofing. Coerced disclosure.</a:t>
-            </a:r>
-          </a:p>
-          <a:p>
-            <a:r>
-              <a:rPr b="0" sz="1700"/>
-              <a:t>  タイミング サイドチャネルズ。 オブジェクトキュー スプーフィング。 コアースト ディスクロージャー。</a:t>
+              <a:t>Timing side-channels. Object-cue spoofing. Disclosure under force.</a:t>
+            </a:r>
+          </a:p>
+          <a:p>
+            <a:r>
+              <a:rPr b="0" sz="1700"/>
+              <a:t>  タイミング サイドチャネルズ。 オブジェクトキュー スプーフィング。 ディスクロージャー </a:t>
+            </a:r>
+            <a:r>
+              <a:rPr b="1" sz="1700"/>
+              <a:t>アンダー フォース</a:t>
+            </a:r>
+            <a:r>
+              <a:rPr b="0" sz="1700"/>
+              <a:t>。</a:t>
             </a:r>
           </a:p>
           <a:p>
@@ -10230,7 +10212,7 @@
             </a:r>
             <a:r>
               <a:rPr b="0" sz="1700"/>
-              <a:t> ウィズ エニー オヴ ゼム — </a:t>
+              <a:t> ウィズ エニー オブ ゼム — </a:t>
             </a:r>
             <a:r>
               <a:rPr b="1" sz="1700"/>
